--- a/slides/00-intro-series-overview.pptx
+++ b/slides/00-intro-series-overview.pptx
@@ -4,6 +4,9 @@
   <p:sldMasterIdLst>
     <p:sldMasterId id="2147483648" r:id="rId1"/>
   </p:sldMasterIdLst>
+  <p:notesMasterIdLst>
+    <p:notesMasterId r:id="rId12"/>
+  </p:notesMasterIdLst>
   <p:sldIdLst>
     <p:sldId id="256" r:id="rId2"/>
     <p:sldId id="257" r:id="rId3"/>
@@ -13,11 +16,9 @@
     <p:sldId id="261" r:id="rId7"/>
     <p:sldId id="262" r:id="rId8"/>
     <p:sldId id="263" r:id="rId9"/>
-    <p:sldId id="264" r:id="rId10"/>
+    <p:sldId id="265" r:id="rId10"/>
+    <p:sldId id="264" r:id="rId11"/>
   </p:sldIdLst>
-  <p:notesMasterIdLst>
-    <p:notesMasterId r:id="rId11"/>
-  </p:notesMasterIdLst>
   <p:sldSz cx="12192000" cy="6858000"/>
   <p:notesSz cx="6858000" cy="12192000"/>
   <p:defaultTextStyle>
@@ -112,6 +113,11 @@
       </a:defRPr>
     </a:lvl9pPr>
   </p:defaultTextStyle>
+  <p:extLst>
+    <p:ext uri="{EFAFB233-063F-42B5-8137-9DF3F51BA10A}">
+      <p15:sldGuideLst xmlns:p15="http://schemas.microsoft.com/office/powerpoint/2012/main"/>
+    </p:ext>
+  </p:extLst>
 </p:presentation>
 </file>
 
@@ -137,234 +143,10 @@
           <a:chExt cx="0" cy="0"/>
         </a:xfrm>
       </p:grpSpPr>
-      <p:sp>
-        <p:nvSpPr>
-          <p:cNvPr id="2" name="Header Placeholder 1"/>
-          <p:cNvSpPr>
-            <a:spLocks noGrp="1"/>
-          </p:cNvSpPr>
-          <p:nvPr>
-            <p:ph type="hdr" sz="quarter"/>
-          </p:nvPr>
-        </p:nvSpPr>
-        <p:spPr>
-          <a:xfrm>
-            <a:off x="0" y="0"/>
-            <a:ext cx="2971800" cy="458788"/>
-          </a:xfrm>
-          <a:prstGeom prst="rect">
-            <a:avLst/>
-          </a:prstGeom>
-        </p:spPr>
-        <p:txBody>
-          <a:bodyPr vert="horz" lIns="91440" tIns="45720" rIns="91440" bIns="45720" rtlCol="0"/>
-          <a:lstStyle>
-            <a:lvl1pPr algn="l">
-              <a:defRPr sz="1200"/>
-            </a:lvl1pPr>
-          </a:lstStyle>
-          <a:p>
-            <a:endParaRPr lang="en-US"/>
-          </a:p>
-        </p:txBody>
-      </p:sp>
-      <p:sp>
-        <p:nvSpPr>
-          <p:cNvPr id="3" name="Date Placeholder 2"/>
-          <p:cNvSpPr>
-            <a:spLocks noGrp="1"/>
-          </p:cNvSpPr>
-          <p:nvPr>
-            <p:ph type="dt" idx="1"/>
-          </p:nvPr>
-        </p:nvSpPr>
-        <p:spPr>
-          <a:xfrm>
-            <a:off x="3884613" y="0"/>
-            <a:ext cx="2971800" cy="458788"/>
-          </a:xfrm>
-          <a:prstGeom prst="rect">
-            <a:avLst/>
-          </a:prstGeom>
-        </p:spPr>
-        <p:txBody>
-          <a:bodyPr vert="horz" lIns="91440" tIns="45720" rIns="91440" bIns="45720" rtlCol="0"/>
-          <a:lstStyle>
-            <a:lvl1pPr algn="r">
-              <a:defRPr sz="1200"/>
-            </a:lvl1pPr>
-          </a:lstStyle>
-          <a:p>
-            <a:fld id="{5282F153-3F37-0F45-9E97-73ACFA13230C}" type="datetimeFigureOut">
-              <a:rPr lang="en-US"/>
-              <a:t>7/23/19</a:t>
-            </a:fld>
-            <a:endParaRPr lang="en-US"/>
-          </a:p>
-        </p:txBody>
-      </p:sp>
-      <p:sp>
-        <p:nvSpPr>
-          <p:cNvPr id="4" name="Slide Image Placeholder 3"/>
-          <p:cNvSpPr>
-            <a:spLocks noGrp="1" noRot="1" noChangeAspect="1"/>
-          </p:cNvSpPr>
-          <p:nvPr>
-            <p:ph type="sldImg" idx="2"/>
-          </p:nvPr>
-        </p:nvSpPr>
-        <p:spPr>
-          <a:xfrm>
-            <a:off x="685800" y="1143000"/>
-            <a:ext cx="5486400" cy="3086100"/>
-          </a:xfrm>
-          <a:prstGeom prst="rect">
-            <a:avLst/>
-          </a:prstGeom>
-          <a:noFill/>
-          <a:ln w="12700">
-            <a:solidFill>
-              <a:prstClr val="black"/>
-            </a:solidFill>
-          </a:ln>
-        </p:spPr>
-        <p:txBody>
-          <a:bodyPr vert="horz" lIns="91440" tIns="45720" rIns="91440" bIns="45720" rtlCol="0" anchor="ctr"/>
-          <a:lstStyle/>
-          <a:p>
-            <a:endParaRPr lang="en-US"/>
-          </a:p>
-        </p:txBody>
-      </p:sp>
-      <p:sp>
-        <p:nvSpPr>
-          <p:cNvPr id="5" name="Notes Placeholder 4"/>
-          <p:cNvSpPr>
-            <a:spLocks noGrp="1"/>
-          </p:cNvSpPr>
-          <p:nvPr>
-            <p:ph type="body" sz="quarter" idx="3"/>
-          </p:nvPr>
-        </p:nvSpPr>
-        <p:spPr>
-          <a:xfrm>
-            <a:off x="685800" y="4400550"/>
-            <a:ext cx="5486400" cy="3600450"/>
-          </a:xfrm>
-          <a:prstGeom prst="rect">
-            <a:avLst/>
-          </a:prstGeom>
-        </p:spPr>
-        <p:txBody>
-          <a:bodyPr vert="horz" lIns="91440" tIns="45720" rIns="91440" bIns="45720" rtlCol="0"/>
-          <a:lstStyle/>
-          <a:p>
-            <a:pPr lvl="0"/>
-            <a:r>
-              <a:rPr lang="en-US"/>
-              <a:t>Click to edit Master text styles</a:t>
-            </a:r>
-          </a:p>
-          <a:p>
-            <a:pPr lvl="1"/>
-            <a:r>
-              <a:rPr lang="en-US"/>
-              <a:t>Second level</a:t>
-            </a:r>
-          </a:p>
-          <a:p>
-            <a:pPr lvl="2"/>
-            <a:r>
-              <a:rPr lang="en-US"/>
-              <a:t>Third level</a:t>
-            </a:r>
-          </a:p>
-          <a:p>
-            <a:pPr lvl="3"/>
-            <a:r>
-              <a:rPr lang="en-US"/>
-              <a:t>Fourth level</a:t>
-            </a:r>
-          </a:p>
-          <a:p>
-            <a:pPr lvl="4"/>
-            <a:r>
-              <a:rPr lang="en-US"/>
-              <a:t>Fifth level</a:t>
-            </a:r>
-          </a:p>
-        </p:txBody>
-      </p:sp>
-      <p:sp>
-        <p:nvSpPr>
-          <p:cNvPr id="6" name="Footer Placeholder 5"/>
-          <p:cNvSpPr>
-            <a:spLocks noGrp="1"/>
-          </p:cNvSpPr>
-          <p:nvPr>
-            <p:ph type="ftr" sz="quarter" idx="4"/>
-          </p:nvPr>
-        </p:nvSpPr>
-        <p:spPr>
-          <a:xfrm>
-            <a:off x="0" y="8685213"/>
-            <a:ext cx="2971800" cy="458787"/>
-          </a:xfrm>
-          <a:prstGeom prst="rect">
-            <a:avLst/>
-          </a:prstGeom>
-        </p:spPr>
-        <p:txBody>
-          <a:bodyPr vert="horz" lIns="91440" tIns="45720" rIns="91440" bIns="45720" rtlCol="0" anchor="b"/>
-          <a:lstStyle>
-            <a:lvl1pPr algn="l">
-              <a:defRPr sz="1200"/>
-            </a:lvl1pPr>
-          </a:lstStyle>
-          <a:p>
-            <a:endParaRPr lang="en-US"/>
-          </a:p>
-        </p:txBody>
-      </p:sp>
-      <p:sp>
-        <p:nvSpPr>
-          <p:cNvPr id="7" name="Slide Number Placeholder 6"/>
-          <p:cNvSpPr>
-            <a:spLocks noGrp="1"/>
-          </p:cNvSpPr>
-          <p:nvPr>
-            <p:ph type="sldNum" sz="quarter" idx="5"/>
-          </p:nvPr>
-        </p:nvSpPr>
-        <p:spPr>
-          <a:xfrm>
-            <a:off x="3884613" y="8685213"/>
-            <a:ext cx="2971800" cy="458787"/>
-          </a:xfrm>
-          <a:prstGeom prst="rect">
-            <a:avLst/>
-          </a:prstGeom>
-        </p:spPr>
-        <p:txBody>
-          <a:bodyPr vert="horz" lIns="91440" tIns="45720" rIns="91440" bIns="45720" rtlCol="0" anchor="b"/>
-          <a:lstStyle>
-            <a:lvl1pPr algn="r">
-              <a:defRPr sz="1200"/>
-            </a:lvl1pPr>
-          </a:lstStyle>
-          <a:p>
-            <a:fld id="{CE5E9CC1-C706-0F49-92D6-E571CC5EEA8F}" type="slidenum">
-              <a:rPr lang="en-US"/>
-              <a:t>‹#›</a:t>
-            </a:fld>
-            <a:endParaRPr lang="en-US"/>
-          </a:p>
-        </p:txBody>
-      </p:sp>
     </p:spTree>
     <p:extLst>
       <p:ext uri="{BB962C8B-B14F-4D97-AF65-F5344CB8AC3E}">
-        <p14:creationId xmlns:p14="http://schemas.microsoft.com/office/powerpoint/2010/main" val="1024086991"/>
+        <p14:creationId xmlns:p14="http://schemas.microsoft.com/office/powerpoint/2010/main" val="1916708979"/>
       </p:ext>
     </p:extLst>
   </p:cSld>
@@ -508,10 +290,6 @@
           <a:bodyPr/>
           <a:lstStyle/>
           <a:p>
-            <a:r>
-              <a:rPr lang="en-US" dirty="0"/>
-              <a:t/>
-            </a:r>
             <a:endParaRPr lang="en-US" dirty="0"/>
           </a:p>
         </p:txBody>
@@ -534,6 +312,90 @@
             <a:fld id="{F7021451-1387-4CA6-816F-3879F97B5CBC}" type="slidenum">
               <a:rPr lang="en-US"/>
               <a:t>1</a:t>
+            </a:fld>
+            <a:endParaRPr lang="en-US"/>
+          </a:p>
+        </p:txBody>
+      </p:sp>
+    </p:spTree>
+    <p:extLst>
+      <p:ext uri="{BB962C8B-B14F-4D97-AF65-F5344CB8AC3E}">
+        <p14:creationId xmlns:p14="http://schemas.microsoft.com/office/powerpoint/2010/main" val="1024086991"/>
+      </p:ext>
+    </p:extLst>
+  </p:cSld>
+  <p:clrMapOvr>
+    <a:masterClrMapping/>
+  </p:clrMapOvr>
+</p:notes>
+</file>
+
+<file path=ppt/notesSlides/notesSlide10.xml><?xml version="1.0" encoding="utf-8"?>
+<p:notes xmlns:a="http://schemas.openxmlformats.org/drawingml/2006/main" xmlns:r="http://schemas.openxmlformats.org/officeDocument/2006/relationships" xmlns:p="http://schemas.openxmlformats.org/presentationml/2006/main">
+  <p:cSld>
+    <p:spTree>
+      <p:nvGrpSpPr>
+        <p:cNvPr id="1" name=""/>
+        <p:cNvGrpSpPr/>
+        <p:nvPr/>
+      </p:nvGrpSpPr>
+      <p:grpSpPr>
+        <a:xfrm>
+          <a:off x="0" y="0"/>
+          <a:ext cx="0" cy="0"/>
+          <a:chOff x="0" y="0"/>
+          <a:chExt cx="0" cy="0"/>
+        </a:xfrm>
+      </p:grpSpPr>
+      <p:sp>
+        <p:nvSpPr>
+          <p:cNvPr id="2" name="Slide Image Placeholder 1"/>
+          <p:cNvSpPr>
+            <a:spLocks noGrp="1" noRot="1" noChangeAspect="1"/>
+          </p:cNvSpPr>
+          <p:nvPr>
+            <p:ph type="sldImg"/>
+          </p:nvPr>
+        </p:nvSpPr>
+        <p:spPr/>
+      </p:sp>
+      <p:sp>
+        <p:nvSpPr>
+          <p:cNvPr id="3" name="Notes Placeholder 2"/>
+          <p:cNvSpPr>
+            <a:spLocks noGrp="1"/>
+          </p:cNvSpPr>
+          <p:nvPr>
+            <p:ph type="body" idx="1"/>
+          </p:nvPr>
+        </p:nvSpPr>
+        <p:spPr/>
+        <p:txBody>
+          <a:bodyPr/>
+          <a:lstStyle/>
+          <a:p>
+            <a:endParaRPr lang="en-US" dirty="0"/>
+          </a:p>
+        </p:txBody>
+      </p:sp>
+      <p:sp>
+        <p:nvSpPr>
+          <p:cNvPr id="4" name="Slide Number Placeholder 3"/>
+          <p:cNvSpPr>
+            <a:spLocks noGrp="1"/>
+          </p:cNvSpPr>
+          <p:nvPr>
+            <p:ph type="sldNum" sz="quarter" idx="10"/>
+          </p:nvPr>
+        </p:nvSpPr>
+        <p:spPr/>
+        <p:txBody>
+          <a:bodyPr/>
+          <a:lstStyle/>
+          <a:p>
+            <a:fld id="{F7021451-1387-4CA6-816F-3879F97B5CBC}" type="slidenum">
+              <a:rPr lang="en-US"/>
+              <a:t>10</a:t>
             </a:fld>
             <a:endParaRPr lang="en-US"/>
           </a:p>
@@ -596,10 +458,6 @@
           <a:bodyPr/>
           <a:lstStyle/>
           <a:p>
-            <a:r>
-              <a:rPr lang="en-US" dirty="0"/>
-              <a:t/>
-            </a:r>
             <a:endParaRPr lang="en-US" dirty="0"/>
           </a:p>
         </p:txBody>
@@ -684,10 +542,6 @@
           <a:bodyPr/>
           <a:lstStyle/>
           <a:p>
-            <a:r>
-              <a:rPr lang="en-US" dirty="0"/>
-              <a:t/>
-            </a:r>
             <a:endParaRPr lang="en-US" dirty="0"/>
           </a:p>
         </p:txBody>
@@ -772,10 +626,6 @@
           <a:bodyPr/>
           <a:lstStyle/>
           <a:p>
-            <a:r>
-              <a:rPr lang="en-US" dirty="0"/>
-              <a:t/>
-            </a:r>
             <a:endParaRPr lang="en-US" dirty="0"/>
           </a:p>
         </p:txBody>
@@ -860,10 +710,6 @@
           <a:bodyPr/>
           <a:lstStyle/>
           <a:p>
-            <a:r>
-              <a:rPr lang="en-US" dirty="0"/>
-              <a:t/>
-            </a:r>
             <a:endParaRPr lang="en-US" dirty="0"/>
           </a:p>
         </p:txBody>
@@ -948,10 +794,6 @@
           <a:bodyPr/>
           <a:lstStyle/>
           <a:p>
-            <a:r>
-              <a:rPr lang="en-US" dirty="0"/>
-              <a:t/>
-            </a:r>
             <a:endParaRPr lang="en-US" dirty="0"/>
           </a:p>
         </p:txBody>
@@ -1036,10 +878,6 @@
           <a:bodyPr/>
           <a:lstStyle/>
           <a:p>
-            <a:r>
-              <a:rPr lang="en-US" dirty="0"/>
-              <a:t/>
-            </a:r>
             <a:endParaRPr lang="en-US" dirty="0"/>
           </a:p>
         </p:txBody>
@@ -1124,10 +962,6 @@
           <a:bodyPr/>
           <a:lstStyle/>
           <a:p>
-            <a:r>
-              <a:rPr lang="en-US" dirty="0"/>
-              <a:t/>
-            </a:r>
             <a:endParaRPr lang="en-US" dirty="0"/>
           </a:p>
         </p:txBody>
@@ -1212,10 +1046,6 @@
           <a:bodyPr/>
           <a:lstStyle/>
           <a:p>
-            <a:r>
-              <a:rPr lang="en-US" dirty="0"/>
-              <a:t/>
-            </a:r>
             <a:endParaRPr lang="en-US" dirty="0"/>
           </a:p>
         </p:txBody>
@@ -1289,6 +1119,11 @@
 <file path=ppt/slideMasters/slideMaster1.xml><?xml version="1.0" encoding="utf-8"?>
 <p:sldMaster xmlns:a="http://schemas.openxmlformats.org/drawingml/2006/main" xmlns:r="http://schemas.openxmlformats.org/officeDocument/2006/relationships" xmlns:p="http://schemas.openxmlformats.org/presentationml/2006/main">
   <p:cSld>
+    <p:bg>
+      <p:bgRef idx="1001">
+        <a:schemeClr val="bg1"/>
+      </p:bgRef>
+    </p:bg>
     <p:spTree>
       <p:nvGrpSpPr>
         <p:cNvPr id="1" name=""/>
@@ -1571,6 +1406,7 @@
         <a:solidFill>
           <a:srgbClr val="0A0F1C"/>
         </a:solidFill>
+        <a:effectLst/>
       </p:bgPr>
     </p:bg>
     <p:spTree>
@@ -1611,6 +1447,13 @@
             <a:prstDash val="solid"/>
           </a:ln>
         </p:spPr>
+        <p:txBody>
+          <a:bodyPr/>
+          <a:lstStyle/>
+          <a:p>
+            <a:endParaRPr lang="en-CA"/>
+          </a:p>
+        </p:txBody>
       </p:sp>
       <p:sp>
         <p:nvSpPr>
@@ -1636,6 +1479,13 @@
             <a:prstDash val="solid"/>
           </a:ln>
         </p:spPr>
+        <p:txBody>
+          <a:bodyPr/>
+          <a:lstStyle/>
+          <a:p>
+            <a:endParaRPr lang="en-CA"/>
+          </a:p>
+        </p:txBody>
       </p:sp>
       <p:sp>
         <p:nvSpPr>
@@ -1661,6 +1511,13 @@
             <a:prstDash val="solid"/>
           </a:ln>
         </p:spPr>
+        <p:txBody>
+          <a:bodyPr/>
+          <a:lstStyle/>
+          <a:p>
+            <a:endParaRPr lang="en-CA"/>
+          </a:p>
+        </p:txBody>
       </p:sp>
       <p:sp>
         <p:nvSpPr>
@@ -1683,6 +1540,13 @@
           </a:solidFill>
           <a:ln/>
         </p:spPr>
+        <p:txBody>
+          <a:bodyPr/>
+          <a:lstStyle/>
+          <a:p>
+            <a:endParaRPr lang="en-CA"/>
+          </a:p>
+        </p:txBody>
       </p:sp>
       <p:sp>
         <p:nvSpPr>
@@ -1705,6 +1569,13 @@
           </a:solidFill>
           <a:ln/>
         </p:spPr>
+        <p:txBody>
+          <a:bodyPr/>
+          <a:lstStyle/>
+          <a:p>
+            <a:endParaRPr lang="en-CA"/>
+          </a:p>
+        </p:txBody>
       </p:sp>
       <p:sp>
         <p:nvSpPr>
@@ -1727,6 +1598,13 @@
           </a:solidFill>
           <a:ln/>
         </p:spPr>
+        <p:txBody>
+          <a:bodyPr/>
+          <a:lstStyle/>
+          <a:p>
+            <a:endParaRPr lang="en-CA"/>
+          </a:p>
+        </p:txBody>
       </p:sp>
       <p:sp>
         <p:nvSpPr>
@@ -1749,6 +1627,13 @@
           </a:solidFill>
           <a:ln/>
         </p:spPr>
+        <p:txBody>
+          <a:bodyPr/>
+          <a:lstStyle/>
+          <a:p>
+            <a:endParaRPr lang="en-CA"/>
+          </a:p>
+        </p:txBody>
       </p:sp>
       <p:sp>
         <p:nvSpPr>
@@ -1774,6 +1659,13 @@
             <a:prstDash val="solid"/>
           </a:ln>
         </p:spPr>
+        <p:txBody>
+          <a:bodyPr/>
+          <a:lstStyle/>
+          <a:p>
+            <a:endParaRPr lang="en-CA"/>
+          </a:p>
+        </p:txBody>
       </p:sp>
       <p:sp>
         <p:nvSpPr>
@@ -1799,6 +1691,13 @@
             <a:prstDash val="solid"/>
           </a:ln>
         </p:spPr>
+        <p:txBody>
+          <a:bodyPr/>
+          <a:lstStyle/>
+          <a:p>
+            <a:endParaRPr lang="en-CA"/>
+          </a:p>
+        </p:txBody>
       </p:sp>
       <p:sp>
         <p:nvSpPr>
@@ -1824,6 +1723,13 @@
             <a:prstDash val="solid"/>
           </a:ln>
         </p:spPr>
+        <p:txBody>
+          <a:bodyPr/>
+          <a:lstStyle/>
+          <a:p>
+            <a:endParaRPr lang="en-CA"/>
+          </a:p>
+        </p:txBody>
       </p:sp>
       <p:sp>
         <p:nvSpPr>
@@ -1846,6 +1752,13 @@
           </a:solidFill>
           <a:ln/>
         </p:spPr>
+        <p:txBody>
+          <a:bodyPr/>
+          <a:lstStyle/>
+          <a:p>
+            <a:endParaRPr lang="en-CA"/>
+          </a:p>
+        </p:txBody>
       </p:sp>
       <p:sp>
         <p:nvSpPr>
@@ -1868,6 +1781,13 @@
           </a:solidFill>
           <a:ln/>
         </p:spPr>
+        <p:txBody>
+          <a:bodyPr/>
+          <a:lstStyle/>
+          <a:p>
+            <a:endParaRPr lang="en-CA"/>
+          </a:p>
+        </p:txBody>
       </p:sp>
       <p:sp>
         <p:nvSpPr>
@@ -1890,6 +1810,13 @@
           </a:solidFill>
           <a:ln/>
         </p:spPr>
+        <p:txBody>
+          <a:bodyPr/>
+          <a:lstStyle/>
+          <a:p>
+            <a:endParaRPr lang="en-CA"/>
+          </a:p>
+        </p:txBody>
       </p:sp>
       <p:sp>
         <p:nvSpPr>
@@ -1912,6 +1839,13 @@
           </a:solidFill>
           <a:ln/>
         </p:spPr>
+        <p:txBody>
+          <a:bodyPr/>
+          <a:lstStyle/>
+          <a:p>
+            <a:endParaRPr lang="en-CA"/>
+          </a:p>
+        </p:txBody>
       </p:sp>
       <p:sp>
         <p:nvSpPr>
@@ -1934,11 +1868,11 @@
           <a:bodyPr wrap="square" lIns="0" tIns="0" rIns="0" bIns="0" rtlCol="0" anchor="ctr"/>
           <a:lstStyle/>
           <a:p>
-            <a:pPr indent="0" marL="0">
+            <a:pPr marL="0" indent="0">
               <a:buNone/>
             </a:pPr>
             <a:r>
-              <a:rPr lang="en-US" sz="900" dirty="0">
+              <a:rPr lang="en-US" sz="1080" dirty="0">
                 <a:solidFill>
                   <a:srgbClr val="5B6478"/>
                 </a:solidFill>
@@ -1948,7 +1882,7 @@
               </a:rPr>
               <a:t>PromptToApps</a:t>
             </a:r>
-            <a:endParaRPr lang="en-US" sz="900" dirty="0"/>
+            <a:endParaRPr lang="en-US" sz="1080" dirty="0"/>
           </a:p>
         </p:txBody>
       </p:sp>
@@ -1973,11 +1907,11 @@
           <a:bodyPr wrap="square" lIns="0" tIns="0" rIns="0" bIns="0" rtlCol="0" anchor="ctr"/>
           <a:lstStyle/>
           <a:p>
-            <a:pPr algn="r" indent="0" marL="0">
+            <a:pPr marL="0" indent="0" algn="r">
               <a:buNone/>
             </a:pPr>
             <a:r>
-              <a:rPr lang="en-US" sz="900" dirty="0">
+              <a:rPr lang="en-US" sz="1080" dirty="0">
                 <a:solidFill>
                   <a:srgbClr val="5B6478"/>
                 </a:solidFill>
@@ -1985,9 +1919,9 @@
                 <a:ea typeface="Courier New" pitchFamily="34" charset="-122"/>
                 <a:cs typeface="Courier New" pitchFamily="34" charset="-120"/>
               </a:rPr>
-              <a:t>1 / 9</a:t>
-            </a:r>
-            <a:endParaRPr lang="en-US" sz="900" dirty="0"/>
+              <a:t>1 / 10</a:t>
+            </a:r>
+            <a:endParaRPr lang="en-US" sz="1080" dirty="0"/>
           </a:p>
         </p:txBody>
       </p:sp>
@@ -2012,11 +1946,11 @@
           <a:bodyPr wrap="square" lIns="0" tIns="0" rIns="0" bIns="0" rtlCol="0" anchor="ctr"/>
           <a:lstStyle/>
           <a:p>
-            <a:pPr algn="ctr" indent="0" marL="0">
+            <a:pPr marL="0" indent="0" algn="ctr">
               <a:buNone/>
             </a:pPr>
             <a:r>
-              <a:rPr lang="en-US" sz="3640" b="1" dirty="0">
+              <a:rPr lang="en-US" sz="4368" b="1" dirty="0">
                 <a:solidFill>
                   <a:srgbClr val="F2A93B"/>
                 </a:solidFill>
@@ -2026,7 +1960,7 @@
               </a:rPr>
               <a:t>&gt;</a:t>
             </a:r>
-            <a:endParaRPr lang="en-US" sz="3640" dirty="0"/>
+            <a:endParaRPr lang="en-US" sz="4368" dirty="0"/>
           </a:p>
         </p:txBody>
       </p:sp>
@@ -2051,6 +1985,13 @@
           </a:solidFill>
           <a:ln/>
         </p:spPr>
+        <p:txBody>
+          <a:bodyPr/>
+          <a:lstStyle/>
+          <a:p>
+            <a:endParaRPr lang="en-CA"/>
+          </a:p>
+        </p:txBody>
       </p:sp>
       <p:sp>
         <p:nvSpPr>
@@ -2073,11 +2014,11 @@
           <a:bodyPr wrap="square" lIns="0" tIns="0" rIns="0" bIns="0" rtlCol="0" anchor="ctr"/>
           <a:lstStyle/>
           <a:p>
-            <a:pPr algn="ctr" indent="0" marL="0">
+            <a:pPr marL="0" indent="0" algn="ctr">
               <a:buNone/>
             </a:pPr>
             <a:r>
-              <a:rPr lang="en-US" sz="5400" b="1" dirty="0">
+              <a:rPr lang="en-US" sz="6480" b="1" dirty="0">
                 <a:solidFill>
                   <a:srgbClr val="F2A93B"/>
                 </a:solidFill>
@@ -2087,11 +2028,8 @@
               </a:rPr>
               <a:t>Spring </a:t>
             </a:r>
-            <a:pPr algn="ctr" indent="0" marL="0">
-              <a:buNone/>
-            </a:pPr>
-            <a:r>
-              <a:rPr lang="en-US" sz="5400" b="1" dirty="0">
+            <a:r>
+              <a:rPr lang="en-US" sz="6480" b="1" dirty="0">
                 <a:solidFill>
                   <a:srgbClr val="8B98AC"/>
                 </a:solidFill>
@@ -2101,11 +2039,8 @@
               </a:rPr>
               <a:t>AI </a:t>
             </a:r>
-            <a:pPr algn="ctr" indent="0" marL="0">
-              <a:buNone/>
-            </a:pPr>
-            <a:r>
-              <a:rPr lang="en-US" sz="5400" b="1" dirty="0">
+            <a:r>
+              <a:rPr lang="en-US" sz="6480" b="1" dirty="0">
                 <a:solidFill>
                   <a:srgbClr val="5FE0C5"/>
                 </a:solidFill>
@@ -2115,7 +2050,7 @@
               </a:rPr>
               <a:t>Llama</a:t>
             </a:r>
-            <a:endParaRPr lang="en-US" sz="5400" dirty="0"/>
+            <a:endParaRPr lang="en-US" sz="6480" dirty="0"/>
           </a:p>
         </p:txBody>
       </p:sp>
@@ -2140,11 +2075,11 @@
           <a:bodyPr wrap="square" lIns="0" tIns="0" rIns="0" bIns="0" rtlCol="0" anchor="ctr"/>
           <a:lstStyle/>
           <a:p>
-            <a:pPr algn="ctr" indent="0" marL="0">
+            <a:pPr marL="0" indent="0" algn="ctr">
               <a:buNone/>
             </a:pPr>
             <a:r>
-              <a:rPr lang="en-US" sz="2000" dirty="0">
+              <a:rPr lang="en-US" sz="2400" dirty="0">
                 <a:solidFill>
                   <a:srgbClr val="B8C0D0"/>
                 </a:solidFill>
@@ -2154,7 +2089,7 @@
               </a:rPr>
               <a:t>Building an AI-Powered HR Assistant — Chapters 1 to 11</a:t>
             </a:r>
-            <a:endParaRPr lang="en-US" sz="2000" dirty="0"/>
+            <a:endParaRPr lang="en-US" sz="2400" dirty="0"/>
           </a:p>
         </p:txBody>
       </p:sp>
@@ -2182,6 +2117,13 @@
             <a:prstDash val="solid"/>
           </a:ln>
         </p:spPr>
+        <p:txBody>
+          <a:bodyPr/>
+          <a:lstStyle/>
+          <a:p>
+            <a:endParaRPr lang="en-CA"/>
+          </a:p>
+        </p:txBody>
       </p:sp>
       <p:sp>
         <p:nvSpPr>
@@ -2207,6 +2149,13 @@
             <a:prstDash val="solid"/>
           </a:ln>
         </p:spPr>
+        <p:txBody>
+          <a:bodyPr/>
+          <a:lstStyle/>
+          <a:p>
+            <a:endParaRPr lang="en-CA"/>
+          </a:p>
+        </p:txBody>
       </p:sp>
       <p:sp>
         <p:nvSpPr>
@@ -2232,6 +2181,13 @@
             <a:prstDash val="solid"/>
           </a:ln>
         </p:spPr>
+        <p:txBody>
+          <a:bodyPr/>
+          <a:lstStyle/>
+          <a:p>
+            <a:endParaRPr lang="en-CA"/>
+          </a:p>
+        </p:txBody>
       </p:sp>
       <p:sp>
         <p:nvSpPr>
@@ -2257,6 +2213,13 @@
             <a:prstDash val="solid"/>
           </a:ln>
         </p:spPr>
+        <p:txBody>
+          <a:bodyPr/>
+          <a:lstStyle/>
+          <a:p>
+            <a:endParaRPr lang="en-CA"/>
+          </a:p>
+        </p:txBody>
       </p:sp>
       <p:sp>
         <p:nvSpPr>
@@ -2279,11 +2242,11 @@
           <a:bodyPr wrap="square" lIns="0" tIns="0" rIns="0" bIns="0" rtlCol="0" anchor="ctr"/>
           <a:lstStyle/>
           <a:p>
-            <a:pPr algn="ctr" indent="0" marL="0">
+            <a:pPr marL="0" indent="0" algn="ctr">
               <a:buNone/>
             </a:pPr>
             <a:r>
-              <a:rPr lang="en-US" sz="1300" dirty="0">
+              <a:rPr lang="en-US" sz="1560" dirty="0">
                 <a:solidFill>
                   <a:srgbClr val="8B98AC"/>
                 </a:solidFill>
@@ -2293,7 +2256,927 @@
               </a:rPr>
               <a:t>A PromptToApps Series  ·  prompttoapps.com</a:t>
             </a:r>
-            <a:endParaRPr lang="en-US" sz="1300" dirty="0"/>
+            <a:endParaRPr lang="en-US" sz="1560" dirty="0"/>
+          </a:p>
+        </p:txBody>
+      </p:sp>
+    </p:spTree>
+  </p:cSld>
+  <p:clrMapOvr>
+    <a:masterClrMapping/>
+  </p:clrMapOvr>
+</p:sld>
+</file>
+
+<file path=ppt/slides/slide10.xml><?xml version="1.0" encoding="utf-8"?>
+<p:sld xmlns:a="http://schemas.openxmlformats.org/drawingml/2006/main" xmlns:r="http://schemas.openxmlformats.org/officeDocument/2006/relationships" xmlns:p="http://schemas.openxmlformats.org/presentationml/2006/main">
+  <p:cSld name="Slide 9">
+    <p:bg>
+      <p:bgPr>
+        <a:solidFill>
+          <a:srgbClr val="0A0F1C"/>
+        </a:solidFill>
+        <a:effectLst/>
+      </p:bgPr>
+    </p:bg>
+    <p:spTree>
+      <p:nvGrpSpPr>
+        <p:cNvPr id="1" name=""/>
+        <p:cNvGrpSpPr/>
+        <p:nvPr/>
+      </p:nvGrpSpPr>
+      <p:grpSpPr>
+        <a:xfrm>
+          <a:off x="0" y="0"/>
+          <a:ext cx="0" cy="0"/>
+          <a:chOff x="0" y="0"/>
+          <a:chExt cx="0" cy="0"/>
+        </a:xfrm>
+      </p:grpSpPr>
+      <p:sp>
+        <p:nvSpPr>
+          <p:cNvPr id="2" name="Shape 0"/>
+          <p:cNvSpPr/>
+          <p:nvPr/>
+        </p:nvSpPr>
+        <p:spPr>
+          <a:xfrm>
+            <a:off x="457200" y="365760"/>
+            <a:ext cx="731520" cy="457200"/>
+          </a:xfrm>
+          <a:prstGeom prst="line">
+            <a:avLst/>
+          </a:prstGeom>
+          <a:noFill/>
+          <a:ln w="9525">
+            <a:solidFill>
+              <a:srgbClr val="5B6478">
+                <a:alpha val="30000"/>
+              </a:srgbClr>
+            </a:solidFill>
+            <a:prstDash val="solid"/>
+          </a:ln>
+        </p:spPr>
+        <p:txBody>
+          <a:bodyPr/>
+          <a:lstStyle/>
+          <a:p>
+            <a:endParaRPr lang="en-CA"/>
+          </a:p>
+        </p:txBody>
+      </p:sp>
+      <p:sp>
+        <p:nvSpPr>
+          <p:cNvPr id="3" name="Shape 1"/>
+          <p:cNvSpPr/>
+          <p:nvPr/>
+        </p:nvSpPr>
+        <p:spPr>
+          <a:xfrm>
+            <a:off x="822960" y="822960"/>
+            <a:ext cx="365760" cy="731520"/>
+          </a:xfrm>
+          <a:prstGeom prst="line">
+            <a:avLst/>
+          </a:prstGeom>
+          <a:noFill/>
+          <a:ln w="9525">
+            <a:solidFill>
+              <a:srgbClr val="5B6478">
+                <a:alpha val="30000"/>
+              </a:srgbClr>
+            </a:solidFill>
+            <a:prstDash val="solid"/>
+          </a:ln>
+        </p:spPr>
+        <p:txBody>
+          <a:bodyPr/>
+          <a:lstStyle/>
+          <a:p>
+            <a:endParaRPr lang="en-CA"/>
+          </a:p>
+        </p:txBody>
+      </p:sp>
+      <p:sp>
+        <p:nvSpPr>
+          <p:cNvPr id="4" name="Shape 2"/>
+          <p:cNvSpPr/>
+          <p:nvPr/>
+        </p:nvSpPr>
+        <p:spPr>
+          <a:xfrm flipV="1">
+            <a:off x="822960" y="1280160"/>
+            <a:ext cx="914400" cy="274320"/>
+          </a:xfrm>
+          <a:prstGeom prst="line">
+            <a:avLst/>
+          </a:prstGeom>
+          <a:noFill/>
+          <a:ln w="9525">
+            <a:solidFill>
+              <a:srgbClr val="5B6478">
+                <a:alpha val="30000"/>
+              </a:srgbClr>
+            </a:solidFill>
+            <a:prstDash val="solid"/>
+          </a:ln>
+        </p:spPr>
+        <p:txBody>
+          <a:bodyPr/>
+          <a:lstStyle/>
+          <a:p>
+            <a:endParaRPr lang="en-CA"/>
+          </a:p>
+        </p:txBody>
+      </p:sp>
+      <p:sp>
+        <p:nvSpPr>
+          <p:cNvPr id="5" name="Shape 3"/>
+          <p:cNvSpPr/>
+          <p:nvPr/>
+        </p:nvSpPr>
+        <p:spPr>
+          <a:xfrm>
+            <a:off x="429768" y="338328"/>
+            <a:ext cx="54864" cy="54864"/>
+          </a:xfrm>
+          <a:prstGeom prst="ellipse">
+            <a:avLst/>
+          </a:prstGeom>
+          <a:solidFill>
+            <a:srgbClr val="8B98AC">
+              <a:alpha val="60000"/>
+            </a:srgbClr>
+          </a:solidFill>
+          <a:ln/>
+        </p:spPr>
+        <p:txBody>
+          <a:bodyPr/>
+          <a:lstStyle/>
+          <a:p>
+            <a:endParaRPr lang="en-CA"/>
+          </a:p>
+        </p:txBody>
+      </p:sp>
+      <p:sp>
+        <p:nvSpPr>
+          <p:cNvPr id="6" name="Shape 4"/>
+          <p:cNvSpPr/>
+          <p:nvPr/>
+        </p:nvSpPr>
+        <p:spPr>
+          <a:xfrm>
+            <a:off x="1161288" y="795528"/>
+            <a:ext cx="54864" cy="54864"/>
+          </a:xfrm>
+          <a:prstGeom prst="ellipse">
+            <a:avLst/>
+          </a:prstGeom>
+          <a:solidFill>
+            <a:srgbClr val="8B98AC">
+              <a:alpha val="60000"/>
+            </a:srgbClr>
+          </a:solidFill>
+          <a:ln/>
+        </p:spPr>
+        <p:txBody>
+          <a:bodyPr/>
+          <a:lstStyle/>
+          <a:p>
+            <a:endParaRPr lang="en-CA"/>
+          </a:p>
+        </p:txBody>
+      </p:sp>
+      <p:sp>
+        <p:nvSpPr>
+          <p:cNvPr id="7" name="Shape 5"/>
+          <p:cNvSpPr/>
+          <p:nvPr/>
+        </p:nvSpPr>
+        <p:spPr>
+          <a:xfrm>
+            <a:off x="795528" y="1527048"/>
+            <a:ext cx="54864" cy="54864"/>
+          </a:xfrm>
+          <a:prstGeom prst="ellipse">
+            <a:avLst/>
+          </a:prstGeom>
+          <a:solidFill>
+            <a:srgbClr val="8B98AC">
+              <a:alpha val="60000"/>
+            </a:srgbClr>
+          </a:solidFill>
+          <a:ln/>
+        </p:spPr>
+        <p:txBody>
+          <a:bodyPr/>
+          <a:lstStyle/>
+          <a:p>
+            <a:endParaRPr lang="en-CA"/>
+          </a:p>
+        </p:txBody>
+      </p:sp>
+      <p:sp>
+        <p:nvSpPr>
+          <p:cNvPr id="8" name="Shape 6"/>
+          <p:cNvSpPr/>
+          <p:nvPr/>
+        </p:nvSpPr>
+        <p:spPr>
+          <a:xfrm>
+            <a:off x="1709928" y="1252728"/>
+            <a:ext cx="54864" cy="54864"/>
+          </a:xfrm>
+          <a:prstGeom prst="ellipse">
+            <a:avLst/>
+          </a:prstGeom>
+          <a:solidFill>
+            <a:srgbClr val="8B98AC">
+              <a:alpha val="60000"/>
+            </a:srgbClr>
+          </a:solidFill>
+          <a:ln/>
+        </p:spPr>
+        <p:txBody>
+          <a:bodyPr/>
+          <a:lstStyle/>
+          <a:p>
+            <a:endParaRPr lang="en-CA"/>
+          </a:p>
+        </p:txBody>
+      </p:sp>
+      <p:sp>
+        <p:nvSpPr>
+          <p:cNvPr id="9" name="Shape 7"/>
+          <p:cNvSpPr/>
+          <p:nvPr/>
+        </p:nvSpPr>
+        <p:spPr>
+          <a:xfrm flipV="1">
+            <a:off x="10789920" y="5486400"/>
+            <a:ext cx="731520" cy="548640"/>
+          </a:xfrm>
+          <a:prstGeom prst="line">
+            <a:avLst/>
+          </a:prstGeom>
+          <a:noFill/>
+          <a:ln w="9525">
+            <a:solidFill>
+              <a:srgbClr val="5B6478">
+                <a:alpha val="30000"/>
+              </a:srgbClr>
+            </a:solidFill>
+            <a:prstDash val="solid"/>
+          </a:ln>
+        </p:spPr>
+        <p:txBody>
+          <a:bodyPr/>
+          <a:lstStyle/>
+          <a:p>
+            <a:endParaRPr lang="en-CA"/>
+          </a:p>
+        </p:txBody>
+      </p:sp>
+      <p:sp>
+        <p:nvSpPr>
+          <p:cNvPr id="10" name="Shape 8"/>
+          <p:cNvSpPr/>
+          <p:nvPr/>
+        </p:nvSpPr>
+        <p:spPr>
+          <a:xfrm flipV="1">
+            <a:off x="11155680" y="4754880"/>
+            <a:ext cx="365760" cy="731520"/>
+          </a:xfrm>
+          <a:prstGeom prst="line">
+            <a:avLst/>
+          </a:prstGeom>
+          <a:noFill/>
+          <a:ln w="9525">
+            <a:solidFill>
+              <a:srgbClr val="5B6478">
+                <a:alpha val="30000"/>
+              </a:srgbClr>
+            </a:solidFill>
+            <a:prstDash val="solid"/>
+          </a:ln>
+        </p:spPr>
+        <p:txBody>
+          <a:bodyPr/>
+          <a:lstStyle/>
+          <a:p>
+            <a:endParaRPr lang="en-CA"/>
+          </a:p>
+        </p:txBody>
+      </p:sp>
+      <p:sp>
+        <p:nvSpPr>
+          <p:cNvPr id="11" name="Shape 9"/>
+          <p:cNvSpPr/>
+          <p:nvPr/>
+        </p:nvSpPr>
+        <p:spPr>
+          <a:xfrm>
+            <a:off x="11155680" y="4754880"/>
+            <a:ext cx="731520" cy="365760"/>
+          </a:xfrm>
+          <a:prstGeom prst="line">
+            <a:avLst/>
+          </a:prstGeom>
+          <a:noFill/>
+          <a:ln w="9525">
+            <a:solidFill>
+              <a:srgbClr val="5B6478">
+                <a:alpha val="30000"/>
+              </a:srgbClr>
+            </a:solidFill>
+            <a:prstDash val="solid"/>
+          </a:ln>
+        </p:spPr>
+        <p:txBody>
+          <a:bodyPr/>
+          <a:lstStyle/>
+          <a:p>
+            <a:endParaRPr lang="en-CA"/>
+          </a:p>
+        </p:txBody>
+      </p:sp>
+      <p:sp>
+        <p:nvSpPr>
+          <p:cNvPr id="12" name="Shape 10"/>
+          <p:cNvSpPr/>
+          <p:nvPr/>
+        </p:nvSpPr>
+        <p:spPr>
+          <a:xfrm>
+            <a:off x="10762488" y="6007608"/>
+            <a:ext cx="54864" cy="54864"/>
+          </a:xfrm>
+          <a:prstGeom prst="ellipse">
+            <a:avLst/>
+          </a:prstGeom>
+          <a:solidFill>
+            <a:srgbClr val="8B98AC">
+              <a:alpha val="60000"/>
+            </a:srgbClr>
+          </a:solidFill>
+          <a:ln/>
+        </p:spPr>
+        <p:txBody>
+          <a:bodyPr/>
+          <a:lstStyle/>
+          <a:p>
+            <a:endParaRPr lang="en-CA"/>
+          </a:p>
+        </p:txBody>
+      </p:sp>
+      <p:sp>
+        <p:nvSpPr>
+          <p:cNvPr id="13" name="Shape 11"/>
+          <p:cNvSpPr/>
+          <p:nvPr/>
+        </p:nvSpPr>
+        <p:spPr>
+          <a:xfrm>
+            <a:off x="11494008" y="5458968"/>
+            <a:ext cx="54864" cy="54864"/>
+          </a:xfrm>
+          <a:prstGeom prst="ellipse">
+            <a:avLst/>
+          </a:prstGeom>
+          <a:solidFill>
+            <a:srgbClr val="8B98AC">
+              <a:alpha val="60000"/>
+            </a:srgbClr>
+          </a:solidFill>
+          <a:ln/>
+        </p:spPr>
+        <p:txBody>
+          <a:bodyPr/>
+          <a:lstStyle/>
+          <a:p>
+            <a:endParaRPr lang="en-CA"/>
+          </a:p>
+        </p:txBody>
+      </p:sp>
+      <p:sp>
+        <p:nvSpPr>
+          <p:cNvPr id="14" name="Shape 12"/>
+          <p:cNvSpPr/>
+          <p:nvPr/>
+        </p:nvSpPr>
+        <p:spPr>
+          <a:xfrm>
+            <a:off x="11128248" y="4727448"/>
+            <a:ext cx="54864" cy="54864"/>
+          </a:xfrm>
+          <a:prstGeom prst="ellipse">
+            <a:avLst/>
+          </a:prstGeom>
+          <a:solidFill>
+            <a:srgbClr val="8B98AC">
+              <a:alpha val="60000"/>
+            </a:srgbClr>
+          </a:solidFill>
+          <a:ln/>
+        </p:spPr>
+        <p:txBody>
+          <a:bodyPr/>
+          <a:lstStyle/>
+          <a:p>
+            <a:endParaRPr lang="en-CA"/>
+          </a:p>
+        </p:txBody>
+      </p:sp>
+      <p:sp>
+        <p:nvSpPr>
+          <p:cNvPr id="15" name="Shape 13"/>
+          <p:cNvSpPr/>
+          <p:nvPr/>
+        </p:nvSpPr>
+        <p:spPr>
+          <a:xfrm>
+            <a:off x="11859768" y="5093208"/>
+            <a:ext cx="54864" cy="54864"/>
+          </a:xfrm>
+          <a:prstGeom prst="ellipse">
+            <a:avLst/>
+          </a:prstGeom>
+          <a:solidFill>
+            <a:srgbClr val="8B98AC">
+              <a:alpha val="60000"/>
+            </a:srgbClr>
+          </a:solidFill>
+          <a:ln/>
+        </p:spPr>
+        <p:txBody>
+          <a:bodyPr/>
+          <a:lstStyle/>
+          <a:p>
+            <a:endParaRPr lang="en-CA"/>
+          </a:p>
+        </p:txBody>
+      </p:sp>
+      <p:sp>
+        <p:nvSpPr>
+          <p:cNvPr id="16" name="Text 14"/>
+          <p:cNvSpPr/>
+          <p:nvPr/>
+        </p:nvSpPr>
+        <p:spPr>
+          <a:xfrm>
+            <a:off x="457200" y="6355080"/>
+            <a:ext cx="2743200" cy="274320"/>
+          </a:xfrm>
+          <a:prstGeom prst="rect">
+            <a:avLst/>
+          </a:prstGeom>
+          <a:noFill/>
+          <a:ln/>
+        </p:spPr>
+        <p:txBody>
+          <a:bodyPr wrap="square" lIns="0" tIns="0" rIns="0" bIns="0" rtlCol="0" anchor="ctr"/>
+          <a:lstStyle/>
+          <a:p>
+            <a:pPr marL="0" indent="0">
+              <a:buNone/>
+            </a:pPr>
+            <a:r>
+              <a:rPr lang="en-US" sz="1080" dirty="0">
+                <a:solidFill>
+                  <a:srgbClr val="5B6478"/>
+                </a:solidFill>
+                <a:latin typeface="Courier New" pitchFamily="34" charset="0"/>
+                <a:ea typeface="Courier New" pitchFamily="34" charset="-122"/>
+                <a:cs typeface="Courier New" pitchFamily="34" charset="-120"/>
+              </a:rPr>
+              <a:t>PromptToApps</a:t>
+            </a:r>
+            <a:endParaRPr lang="en-US" sz="1080" dirty="0"/>
+          </a:p>
+        </p:txBody>
+      </p:sp>
+      <p:sp>
+        <p:nvSpPr>
+          <p:cNvPr id="17" name="Text 15"/>
+          <p:cNvSpPr/>
+          <p:nvPr/>
+        </p:nvSpPr>
+        <p:spPr>
+          <a:xfrm>
+            <a:off x="11247120" y="6355080"/>
+            <a:ext cx="731520" cy="274320"/>
+          </a:xfrm>
+          <a:prstGeom prst="rect">
+            <a:avLst/>
+          </a:prstGeom>
+          <a:noFill/>
+          <a:ln/>
+        </p:spPr>
+        <p:txBody>
+          <a:bodyPr wrap="square" lIns="0" tIns="0" rIns="0" bIns="0" rtlCol="0" anchor="ctr"/>
+          <a:lstStyle/>
+          <a:p>
+            <a:pPr marL="0" indent="0" algn="r">
+              <a:buNone/>
+            </a:pPr>
+            <a:r>
+              <a:rPr lang="en-US" sz="1080" dirty="0">
+                <a:solidFill>
+                  <a:srgbClr val="5B6478"/>
+                </a:solidFill>
+                <a:latin typeface="Courier New" pitchFamily="34" charset="0"/>
+                <a:ea typeface="Courier New" pitchFamily="34" charset="-122"/>
+                <a:cs typeface="Courier New" pitchFamily="34" charset="-120"/>
+              </a:rPr>
+              <a:t>9 / 10</a:t>
+            </a:r>
+            <a:endParaRPr lang="en-US" sz="1080" dirty="0"/>
+          </a:p>
+        </p:txBody>
+      </p:sp>
+      <p:sp>
+        <p:nvSpPr>
+          <p:cNvPr id="18" name="Text 16"/>
+          <p:cNvSpPr/>
+          <p:nvPr/>
+        </p:nvSpPr>
+        <p:spPr>
+          <a:xfrm>
+            <a:off x="5577840" y="945490"/>
+            <a:ext cx="502920" cy="502920"/>
+          </a:xfrm>
+          <a:prstGeom prst="rect">
+            <a:avLst/>
+          </a:prstGeom>
+          <a:noFill/>
+          <a:ln/>
+        </p:spPr>
+        <p:txBody>
+          <a:bodyPr wrap="square" lIns="0" tIns="0" rIns="0" bIns="0" rtlCol="0" anchor="ctr"/>
+          <a:lstStyle/>
+          <a:p>
+            <a:pPr marL="0" indent="0" algn="ctr">
+              <a:buNone/>
+            </a:pPr>
+            <a:r>
+              <a:rPr lang="en-US" sz="3696" b="1" dirty="0">
+                <a:solidFill>
+                  <a:srgbClr val="F2A93B"/>
+                </a:solidFill>
+                <a:latin typeface="Courier New" pitchFamily="34" charset="0"/>
+                <a:ea typeface="Courier New" pitchFamily="34" charset="-122"/>
+                <a:cs typeface="Courier New" pitchFamily="34" charset="-120"/>
+              </a:rPr>
+              <a:t>&gt;</a:t>
+            </a:r>
+            <a:endParaRPr lang="en-US" sz="3696" dirty="0"/>
+          </a:p>
+        </p:txBody>
+      </p:sp>
+      <p:sp>
+        <p:nvSpPr>
+          <p:cNvPr id="19" name="Shape 17"/>
+          <p:cNvSpPr/>
+          <p:nvPr/>
+        </p:nvSpPr>
+        <p:spPr>
+          <a:xfrm>
+            <a:off x="6000293" y="1186891"/>
+            <a:ext cx="341986" cy="120701"/>
+          </a:xfrm>
+          <a:prstGeom prst="roundRect">
+            <a:avLst>
+              <a:gd name="adj" fmla="val 50000"/>
+            </a:avLst>
+          </a:prstGeom>
+          <a:solidFill>
+            <a:srgbClr val="5FE0C5"/>
+          </a:solidFill>
+          <a:ln/>
+        </p:spPr>
+        <p:txBody>
+          <a:bodyPr/>
+          <a:lstStyle/>
+          <a:p>
+            <a:endParaRPr lang="en-CA"/>
+          </a:p>
+        </p:txBody>
+      </p:sp>
+      <p:sp>
+        <p:nvSpPr>
+          <p:cNvPr id="20" name="Text 18"/>
+          <p:cNvSpPr/>
+          <p:nvPr/>
+        </p:nvSpPr>
+        <p:spPr>
+          <a:xfrm>
+            <a:off x="0" y="1783080"/>
+            <a:ext cx="12161520" cy="731520"/>
+          </a:xfrm>
+          <a:prstGeom prst="rect">
+            <a:avLst/>
+          </a:prstGeom>
+          <a:noFill/>
+          <a:ln/>
+        </p:spPr>
+        <p:txBody>
+          <a:bodyPr wrap="square" lIns="0" tIns="0" rIns="0" bIns="0" rtlCol="0" anchor="ctr"/>
+          <a:lstStyle/>
+          <a:p>
+            <a:pPr marL="0" indent="0" algn="ctr">
+              <a:buNone/>
+            </a:pPr>
+            <a:r>
+              <a:rPr lang="en-US" sz="4320" b="1" dirty="0">
+                <a:solidFill>
+                  <a:srgbClr val="E5E9F0"/>
+                </a:solidFill>
+                <a:latin typeface="Courier New" pitchFamily="34" charset="0"/>
+                <a:ea typeface="Courier New" pitchFamily="34" charset="-122"/>
+                <a:cs typeface="Courier New" pitchFamily="34" charset="-120"/>
+              </a:rPr>
+              <a:t>Let's build Chapter 1.</a:t>
+            </a:r>
+            <a:endParaRPr lang="en-US" sz="4320" dirty="0"/>
+          </a:p>
+        </p:txBody>
+      </p:sp>
+      <p:sp>
+        <p:nvSpPr>
+          <p:cNvPr id="21" name="Shape 19"/>
+          <p:cNvSpPr/>
+          <p:nvPr/>
+        </p:nvSpPr>
+        <p:spPr>
+          <a:xfrm>
+            <a:off x="4709160" y="2743200"/>
+            <a:ext cx="2743200" cy="0"/>
+          </a:xfrm>
+          <a:prstGeom prst="line">
+            <a:avLst/>
+          </a:prstGeom>
+          <a:noFill/>
+          <a:ln w="12700">
+            <a:solidFill>
+              <a:srgbClr val="5B6478">
+                <a:alpha val="70000"/>
+              </a:srgbClr>
+            </a:solidFill>
+            <a:prstDash val="solid"/>
+          </a:ln>
+        </p:spPr>
+        <p:txBody>
+          <a:bodyPr/>
+          <a:lstStyle/>
+          <a:p>
+            <a:endParaRPr lang="en-CA"/>
+          </a:p>
+        </p:txBody>
+      </p:sp>
+      <p:sp>
+        <p:nvSpPr>
+          <p:cNvPr id="22" name="Shape 20"/>
+          <p:cNvSpPr/>
+          <p:nvPr/>
+        </p:nvSpPr>
+        <p:spPr>
+          <a:xfrm>
+            <a:off x="4668012" y="2702052"/>
+            <a:ext cx="82296" cy="82296"/>
+          </a:xfrm>
+          <a:prstGeom prst="ellipse">
+            <a:avLst/>
+          </a:prstGeom>
+          <a:solidFill>
+            <a:srgbClr val="0A0F1C"/>
+          </a:solidFill>
+          <a:ln w="19050">
+            <a:solidFill>
+              <a:srgbClr val="F2A93B"/>
+            </a:solidFill>
+            <a:prstDash val="solid"/>
+          </a:ln>
+        </p:spPr>
+        <p:txBody>
+          <a:bodyPr/>
+          <a:lstStyle/>
+          <a:p>
+            <a:endParaRPr lang="en-CA"/>
+          </a:p>
+        </p:txBody>
+      </p:sp>
+      <p:sp>
+        <p:nvSpPr>
+          <p:cNvPr id="23" name="Shape 21"/>
+          <p:cNvSpPr/>
+          <p:nvPr/>
+        </p:nvSpPr>
+        <p:spPr>
+          <a:xfrm>
+            <a:off x="6039612" y="2702052"/>
+            <a:ext cx="82296" cy="82296"/>
+          </a:xfrm>
+          <a:prstGeom prst="ellipse">
+            <a:avLst/>
+          </a:prstGeom>
+          <a:solidFill>
+            <a:srgbClr val="0A0F1C"/>
+          </a:solidFill>
+          <a:ln w="19050">
+            <a:solidFill>
+              <a:srgbClr val="8B98AC"/>
+            </a:solidFill>
+            <a:prstDash val="solid"/>
+          </a:ln>
+        </p:spPr>
+        <p:txBody>
+          <a:bodyPr/>
+          <a:lstStyle/>
+          <a:p>
+            <a:endParaRPr lang="en-CA"/>
+          </a:p>
+        </p:txBody>
+      </p:sp>
+      <p:sp>
+        <p:nvSpPr>
+          <p:cNvPr id="24" name="Shape 22"/>
+          <p:cNvSpPr/>
+          <p:nvPr/>
+        </p:nvSpPr>
+        <p:spPr>
+          <a:xfrm>
+            <a:off x="7411212" y="2702052"/>
+            <a:ext cx="82296" cy="82296"/>
+          </a:xfrm>
+          <a:prstGeom prst="ellipse">
+            <a:avLst/>
+          </a:prstGeom>
+          <a:solidFill>
+            <a:srgbClr val="0A0F1C"/>
+          </a:solidFill>
+          <a:ln w="19050">
+            <a:solidFill>
+              <a:srgbClr val="5FE0C5"/>
+            </a:solidFill>
+            <a:prstDash val="solid"/>
+          </a:ln>
+        </p:spPr>
+        <p:txBody>
+          <a:bodyPr/>
+          <a:lstStyle/>
+          <a:p>
+            <a:endParaRPr lang="en-CA"/>
+          </a:p>
+        </p:txBody>
+      </p:sp>
+      <p:sp>
+        <p:nvSpPr>
+          <p:cNvPr id="25" name="Text 23"/>
+          <p:cNvSpPr/>
+          <p:nvPr/>
+        </p:nvSpPr>
+        <p:spPr>
+          <a:xfrm>
+            <a:off x="0" y="3017520"/>
+            <a:ext cx="12161520" cy="457200"/>
+          </a:xfrm>
+          <a:prstGeom prst="rect">
+            <a:avLst/>
+          </a:prstGeom>
+          <a:noFill/>
+          <a:ln/>
+        </p:spPr>
+        <p:txBody>
+          <a:bodyPr wrap="square" lIns="0" tIns="0" rIns="0" bIns="0" rtlCol="0" anchor="ctr"/>
+          <a:lstStyle/>
+          <a:p>
+            <a:pPr marL="0" indent="0" algn="ctr">
+              <a:buNone/>
+            </a:pPr>
+            <a:r>
+              <a:rPr lang="en-US" sz="2040" b="1" dirty="0">
+                <a:solidFill>
+                  <a:srgbClr val="F2A93B"/>
+                </a:solidFill>
+                <a:latin typeface="Calibri" pitchFamily="34" charset="0"/>
+                <a:ea typeface="Calibri" pitchFamily="34" charset="-122"/>
+                <a:cs typeface="Calibri" pitchFamily="34" charset="-120"/>
+              </a:rPr>
+              <a:t>Subscribe</a:t>
+            </a:r>
+            <a:r>
+              <a:rPr lang="en-US" sz="2040" dirty="0">
+                <a:solidFill>
+                  <a:srgbClr val="B8C0D0"/>
+                </a:solidFill>
+                <a:latin typeface="Calibri" pitchFamily="34" charset="0"/>
+                <a:ea typeface="Calibri" pitchFamily="34" charset="-122"/>
+                <a:cs typeface="Calibri" pitchFamily="34" charset="-120"/>
+              </a:rPr>
+              <a:t>  for every chapter  ·  </a:t>
+            </a:r>
+            <a:r>
+              <a:rPr lang="en-US" sz="2040" b="1" dirty="0">
+                <a:solidFill>
+                  <a:srgbClr val="5FE0C5"/>
+                </a:solidFill>
+                <a:latin typeface="Calibri" pitchFamily="34" charset="0"/>
+                <a:ea typeface="Calibri" pitchFamily="34" charset="-122"/>
+                <a:cs typeface="Calibri" pitchFamily="34" charset="-120"/>
+              </a:rPr>
+              <a:t>Star the repo</a:t>
+            </a:r>
+            <a:r>
+              <a:rPr lang="en-US" sz="2040" dirty="0">
+                <a:solidFill>
+                  <a:srgbClr val="B8C0D0"/>
+                </a:solidFill>
+                <a:latin typeface="Calibri" pitchFamily="34" charset="0"/>
+                <a:ea typeface="Calibri" pitchFamily="34" charset="-122"/>
+                <a:cs typeface="Calibri" pitchFamily="34" charset="-120"/>
+              </a:rPr>
+              <a:t>  on GitHub</a:t>
+            </a:r>
+            <a:endParaRPr lang="en-US" sz="2040" dirty="0"/>
+          </a:p>
+        </p:txBody>
+      </p:sp>
+      <p:sp>
+        <p:nvSpPr>
+          <p:cNvPr id="26" name="Text 24"/>
+          <p:cNvSpPr/>
+          <p:nvPr/>
+        </p:nvSpPr>
+        <p:spPr>
+          <a:xfrm>
+            <a:off x="0" y="3657600"/>
+            <a:ext cx="12161520" cy="365760"/>
+          </a:xfrm>
+          <a:prstGeom prst="rect">
+            <a:avLst/>
+          </a:prstGeom>
+          <a:noFill/>
+          <a:ln/>
+        </p:spPr>
+        <p:txBody>
+          <a:bodyPr wrap="square" lIns="0" tIns="0" rIns="0" bIns="0" rtlCol="0" anchor="ctr"/>
+          <a:lstStyle/>
+          <a:p>
+            <a:pPr marL="0" indent="0" algn="ctr">
+              <a:buNone/>
+            </a:pPr>
+            <a:r>
+              <a:rPr lang="en-US" sz="1800" dirty="0">
+                <a:solidFill>
+                  <a:srgbClr val="8B98AC"/>
+                </a:solidFill>
+                <a:latin typeface="Courier New" pitchFamily="34" charset="0"/>
+                <a:ea typeface="Courier New" pitchFamily="34" charset="-122"/>
+                <a:cs typeface="Courier New" pitchFamily="34" charset="-120"/>
+              </a:rPr>
+              <a:t>github.com/balajich/spring-ai-with-llama</a:t>
+            </a:r>
+            <a:endParaRPr lang="en-US" sz="1800" dirty="0"/>
+          </a:p>
+        </p:txBody>
+      </p:sp>
+      <p:sp>
+        <p:nvSpPr>
+          <p:cNvPr id="27" name="Text 25"/>
+          <p:cNvSpPr/>
+          <p:nvPr/>
+        </p:nvSpPr>
+        <p:spPr>
+          <a:xfrm>
+            <a:off x="0" y="4114800"/>
+            <a:ext cx="12161520" cy="365760"/>
+          </a:xfrm>
+          <a:prstGeom prst="rect">
+            <a:avLst/>
+          </a:prstGeom>
+          <a:noFill/>
+          <a:ln/>
+        </p:spPr>
+        <p:txBody>
+          <a:bodyPr wrap="square" lIns="0" tIns="0" rIns="0" bIns="0" rtlCol="0" anchor="ctr"/>
+          <a:lstStyle/>
+          <a:p>
+            <a:pPr marL="0" indent="0" algn="ctr">
+              <a:buNone/>
+            </a:pPr>
+            <a:r>
+              <a:rPr lang="en-US" sz="1560" dirty="0">
+                <a:solidFill>
+                  <a:srgbClr val="5B6478"/>
+                </a:solidFill>
+                <a:latin typeface="Courier New" pitchFamily="34" charset="0"/>
+                <a:ea typeface="Courier New" pitchFamily="34" charset="-122"/>
+                <a:cs typeface="Courier New" pitchFamily="34" charset="-120"/>
+              </a:rPr>
+              <a:t>prompttoapps.com</a:t>
+            </a:r>
+            <a:endParaRPr lang="en-US" sz="1560" dirty="0"/>
           </a:p>
         </p:txBody>
       </p:sp>
@@ -2313,6 +3196,7 @@
         <a:solidFill>
           <a:srgbClr val="0A0F1C"/>
         </a:solidFill>
+        <a:effectLst/>
       </p:bgPr>
     </p:bg>
     <p:spTree>
@@ -2353,6 +3237,13 @@
             <a:prstDash val="solid"/>
           </a:ln>
         </p:spPr>
+        <p:txBody>
+          <a:bodyPr/>
+          <a:lstStyle/>
+          <a:p>
+            <a:endParaRPr lang="en-CA"/>
+          </a:p>
+        </p:txBody>
       </p:sp>
       <p:sp>
         <p:nvSpPr>
@@ -2378,6 +3269,13 @@
             <a:prstDash val="solid"/>
           </a:ln>
         </p:spPr>
+        <p:txBody>
+          <a:bodyPr/>
+          <a:lstStyle/>
+          <a:p>
+            <a:endParaRPr lang="en-CA"/>
+          </a:p>
+        </p:txBody>
       </p:sp>
       <p:sp>
         <p:nvSpPr>
@@ -2403,6 +3301,13 @@
             <a:prstDash val="solid"/>
           </a:ln>
         </p:spPr>
+        <p:txBody>
+          <a:bodyPr/>
+          <a:lstStyle/>
+          <a:p>
+            <a:endParaRPr lang="en-CA"/>
+          </a:p>
+        </p:txBody>
       </p:sp>
       <p:sp>
         <p:nvSpPr>
@@ -2425,6 +3330,13 @@
           </a:solidFill>
           <a:ln/>
         </p:spPr>
+        <p:txBody>
+          <a:bodyPr/>
+          <a:lstStyle/>
+          <a:p>
+            <a:endParaRPr lang="en-CA"/>
+          </a:p>
+        </p:txBody>
       </p:sp>
       <p:sp>
         <p:nvSpPr>
@@ -2447,6 +3359,13 @@
           </a:solidFill>
           <a:ln/>
         </p:spPr>
+        <p:txBody>
+          <a:bodyPr/>
+          <a:lstStyle/>
+          <a:p>
+            <a:endParaRPr lang="en-CA"/>
+          </a:p>
+        </p:txBody>
       </p:sp>
       <p:sp>
         <p:nvSpPr>
@@ -2469,6 +3388,13 @@
           </a:solidFill>
           <a:ln/>
         </p:spPr>
+        <p:txBody>
+          <a:bodyPr/>
+          <a:lstStyle/>
+          <a:p>
+            <a:endParaRPr lang="en-CA"/>
+          </a:p>
+        </p:txBody>
       </p:sp>
       <p:sp>
         <p:nvSpPr>
@@ -2491,6 +3417,13 @@
           </a:solidFill>
           <a:ln/>
         </p:spPr>
+        <p:txBody>
+          <a:bodyPr/>
+          <a:lstStyle/>
+          <a:p>
+            <a:endParaRPr lang="en-CA"/>
+          </a:p>
+        </p:txBody>
       </p:sp>
       <p:sp>
         <p:nvSpPr>
@@ -2516,6 +3449,13 @@
             <a:prstDash val="solid"/>
           </a:ln>
         </p:spPr>
+        <p:txBody>
+          <a:bodyPr/>
+          <a:lstStyle/>
+          <a:p>
+            <a:endParaRPr lang="en-CA"/>
+          </a:p>
+        </p:txBody>
       </p:sp>
       <p:sp>
         <p:nvSpPr>
@@ -2541,6 +3481,13 @@
             <a:prstDash val="solid"/>
           </a:ln>
         </p:spPr>
+        <p:txBody>
+          <a:bodyPr/>
+          <a:lstStyle/>
+          <a:p>
+            <a:endParaRPr lang="en-CA"/>
+          </a:p>
+        </p:txBody>
       </p:sp>
       <p:sp>
         <p:nvSpPr>
@@ -2566,6 +3513,13 @@
             <a:prstDash val="solid"/>
           </a:ln>
         </p:spPr>
+        <p:txBody>
+          <a:bodyPr/>
+          <a:lstStyle/>
+          <a:p>
+            <a:endParaRPr lang="en-CA"/>
+          </a:p>
+        </p:txBody>
       </p:sp>
       <p:sp>
         <p:nvSpPr>
@@ -2588,6 +3542,13 @@
           </a:solidFill>
           <a:ln/>
         </p:spPr>
+        <p:txBody>
+          <a:bodyPr/>
+          <a:lstStyle/>
+          <a:p>
+            <a:endParaRPr lang="en-CA"/>
+          </a:p>
+        </p:txBody>
       </p:sp>
       <p:sp>
         <p:nvSpPr>
@@ -2610,6 +3571,13 @@
           </a:solidFill>
           <a:ln/>
         </p:spPr>
+        <p:txBody>
+          <a:bodyPr/>
+          <a:lstStyle/>
+          <a:p>
+            <a:endParaRPr lang="en-CA"/>
+          </a:p>
+        </p:txBody>
       </p:sp>
       <p:sp>
         <p:nvSpPr>
@@ -2632,6 +3600,13 @@
           </a:solidFill>
           <a:ln/>
         </p:spPr>
+        <p:txBody>
+          <a:bodyPr/>
+          <a:lstStyle/>
+          <a:p>
+            <a:endParaRPr lang="en-CA"/>
+          </a:p>
+        </p:txBody>
       </p:sp>
       <p:sp>
         <p:nvSpPr>
@@ -2654,6 +3629,13 @@
           </a:solidFill>
           <a:ln/>
         </p:spPr>
+        <p:txBody>
+          <a:bodyPr/>
+          <a:lstStyle/>
+          <a:p>
+            <a:endParaRPr lang="en-CA"/>
+          </a:p>
+        </p:txBody>
       </p:sp>
       <p:sp>
         <p:nvSpPr>
@@ -2676,11 +3658,11 @@
           <a:bodyPr wrap="square" lIns="0" tIns="0" rIns="0" bIns="0" rtlCol="0" anchor="ctr"/>
           <a:lstStyle/>
           <a:p>
-            <a:pPr indent="0" marL="0">
+            <a:pPr marL="0" indent="0">
               <a:buNone/>
             </a:pPr>
             <a:r>
-              <a:rPr lang="en-US" sz="900" dirty="0">
+              <a:rPr lang="en-US" sz="1080" dirty="0">
                 <a:solidFill>
                   <a:srgbClr val="5B6478"/>
                 </a:solidFill>
@@ -2690,7 +3672,7 @@
               </a:rPr>
               <a:t>PromptToApps</a:t>
             </a:r>
-            <a:endParaRPr lang="en-US" sz="900" dirty="0"/>
+            <a:endParaRPr lang="en-US" sz="1080" dirty="0"/>
           </a:p>
         </p:txBody>
       </p:sp>
@@ -2715,11 +3697,11 @@
           <a:bodyPr wrap="square" lIns="0" tIns="0" rIns="0" bIns="0" rtlCol="0" anchor="ctr"/>
           <a:lstStyle/>
           <a:p>
-            <a:pPr algn="r" indent="0" marL="0">
+            <a:pPr marL="0" indent="0" algn="r">
               <a:buNone/>
             </a:pPr>
             <a:r>
-              <a:rPr lang="en-US" sz="900" dirty="0">
+              <a:rPr lang="en-US" sz="1080" dirty="0">
                 <a:solidFill>
                   <a:srgbClr val="5B6478"/>
                 </a:solidFill>
@@ -2727,9 +3709,9 @@
                 <a:ea typeface="Courier New" pitchFamily="34" charset="-122"/>
                 <a:cs typeface="Courier New" pitchFamily="34" charset="-120"/>
               </a:rPr>
-              <a:t>2 / 9</a:t>
-            </a:r>
-            <a:endParaRPr lang="en-US" sz="900" dirty="0"/>
+              <a:t>2 / 10</a:t>
+            </a:r>
+            <a:endParaRPr lang="en-US" sz="1080" dirty="0"/>
           </a:p>
         </p:txBody>
       </p:sp>
@@ -2754,11 +3736,11 @@
           <a:bodyPr wrap="square" lIns="0" tIns="0" rIns="0" bIns="0" rtlCol="0" anchor="ctr"/>
           <a:lstStyle/>
           <a:p>
-            <a:pPr indent="0" marL="0">
+            <a:pPr marL="0" indent="0">
               <a:buNone/>
             </a:pPr>
             <a:r>
-              <a:rPr lang="en-US" sz="1200" spc="200" kern="0" dirty="0">
+              <a:rPr lang="en-US" sz="1440" kern="0" spc="200" dirty="0">
                 <a:solidFill>
                   <a:srgbClr val="5FE0C5"/>
                 </a:solidFill>
@@ -2768,7 +3750,7 @@
               </a:rPr>
               <a:t>WHY THIS SERIES</a:t>
             </a:r>
-            <a:endParaRPr lang="en-US" sz="1200" dirty="0"/>
+            <a:endParaRPr lang="en-US" sz="1440" dirty="0"/>
           </a:p>
         </p:txBody>
       </p:sp>
@@ -2793,11 +3775,11 @@
           <a:bodyPr wrap="square" lIns="0" tIns="0" rIns="0" bIns="0" rtlCol="0" anchor="ctr"/>
           <a:lstStyle/>
           <a:p>
-            <a:pPr algn="l" indent="0" marL="0">
+            <a:pPr marL="0" indent="0" algn="l">
               <a:buNone/>
             </a:pPr>
             <a:r>
-              <a:rPr lang="en-US" sz="2800" b="1" dirty="0">
+              <a:rPr lang="en-US" sz="3360" b="1" dirty="0">
                 <a:solidFill>
                   <a:srgbClr val="F2A93B"/>
                 </a:solidFill>
@@ -2807,7 +3789,7 @@
               </a:rPr>
               <a:t>No cloud bill. No API key. Just code.</a:t>
             </a:r>
-            <a:endParaRPr lang="en-US" sz="2800" dirty="0"/>
+            <a:endParaRPr lang="en-US" sz="3360" dirty="0"/>
           </a:p>
         </p:txBody>
       </p:sp>
@@ -2837,13 +3819,20 @@
             <a:prstDash val="solid"/>
           </a:ln>
           <a:effectLst>
-            <a:outerShdw sx="100000" sy="100000" kx="0" ky="0" algn="bl" rotWithShape="0" blurRad="101600" dist="38100" dir="2700000">
+            <a:outerShdw blurRad="101600" dist="38100" dir="2700000" algn="bl" rotWithShape="0">
               <a:srgbClr val="000000">
                 <a:alpha val="25000"/>
               </a:srgbClr>
             </a:outerShdw>
           </a:effectLst>
         </p:spPr>
+        <p:txBody>
+          <a:bodyPr/>
+          <a:lstStyle/>
+          <a:p>
+            <a:endParaRPr lang="en-CA"/>
+          </a:p>
+        </p:txBody>
       </p:sp>
       <p:sp>
         <p:nvSpPr>
@@ -2869,6 +3858,13 @@
             <a:prstDash val="solid"/>
           </a:ln>
         </p:spPr>
+        <p:txBody>
+          <a:bodyPr/>
+          <a:lstStyle/>
+          <a:p>
+            <a:endParaRPr lang="en-CA"/>
+          </a:p>
+        </p:txBody>
       </p:sp>
       <p:sp>
         <p:nvSpPr>
@@ -2891,11 +3887,11 @@
           <a:bodyPr wrap="square" lIns="0" tIns="0" rIns="0" bIns="0" rtlCol="0" anchor="ctr"/>
           <a:lstStyle/>
           <a:p>
-            <a:pPr algn="ctr" indent="0" marL="0">
+            <a:pPr marL="0" indent="0" algn="ctr">
               <a:buNone/>
             </a:pPr>
             <a:r>
-              <a:rPr lang="en-US" sz="1600" b="1" dirty="0">
+              <a:rPr lang="en-US" sz="1920" b="1" dirty="0">
                 <a:solidFill>
                   <a:srgbClr val="F2A93B"/>
                 </a:solidFill>
@@ -2905,7 +3901,7 @@
               </a:rPr>
               <a:t>1</a:t>
             </a:r>
-            <a:endParaRPr lang="en-US" sz="1600" dirty="0"/>
+            <a:endParaRPr lang="en-US" sz="1920" dirty="0"/>
           </a:p>
         </p:txBody>
       </p:sp>
@@ -2930,11 +3926,11 @@
           <a:bodyPr wrap="square" lIns="0" tIns="0" rIns="0" bIns="0" rtlCol="0" anchor="ctr"/>
           <a:lstStyle/>
           <a:p>
-            <a:pPr algn="ctr" indent="0" marL="0">
+            <a:pPr marL="0" indent="0" algn="ctr">
               <a:buNone/>
             </a:pPr>
             <a:r>
-              <a:rPr lang="en-US" sz="1600" b="1" dirty="0">
+              <a:rPr lang="en-US" sz="1920" b="1" dirty="0">
                 <a:solidFill>
                   <a:srgbClr val="E5E9F0"/>
                 </a:solidFill>
@@ -2944,7 +3940,7 @@
               </a:rPr>
               <a:t>Zero Paid APIs</a:t>
             </a:r>
-            <a:endParaRPr lang="en-US" sz="1600" dirty="0"/>
+            <a:endParaRPr lang="en-US" sz="1920" dirty="0"/>
           </a:p>
         </p:txBody>
       </p:sp>
@@ -2969,14 +3965,14 @@
           <a:bodyPr wrap="square" lIns="0" tIns="0" rIns="0" bIns="0" rtlCol="0" anchor="t"/>
           <a:lstStyle/>
           <a:p>
-            <a:pPr algn="ctr" indent="0" marL="0">
+            <a:pPr marL="0" indent="0" algn="ctr">
               <a:lnSpc>
                 <a:spcPct val="120000"/>
               </a:lnSpc>
               <a:buNone/>
             </a:pPr>
             <a:r>
-              <a:rPr lang="en-US" sz="1350" dirty="0">
+              <a:rPr lang="en-US" sz="1620" dirty="0">
                 <a:solidFill>
                   <a:srgbClr val="B8C0D0"/>
                 </a:solidFill>
@@ -2986,17 +3982,17 @@
               </a:rPr>
               <a:t>Every example runs on Ollama, locally.</a:t>
             </a:r>
-            <a:endParaRPr lang="en-US" sz="1350" dirty="0"/>
-          </a:p>
-          <a:p>
-            <a:pPr algn="ctr" indent="0" marL="0">
+            <a:endParaRPr lang="en-US" sz="1620" dirty="0"/>
+          </a:p>
+          <a:p>
+            <a:pPr marL="0" indent="0" algn="ctr">
               <a:lnSpc>
                 <a:spcPct val="120000"/>
               </a:lnSpc>
               <a:buNone/>
             </a:pPr>
             <a:r>
-              <a:rPr lang="en-US" sz="1350" dirty="0">
+              <a:rPr lang="en-US" sz="1620" dirty="0">
                 <a:solidFill>
                   <a:srgbClr val="B8C0D0"/>
                 </a:solidFill>
@@ -3006,7 +4002,7 @@
               </a:rPr>
               <a:t>No OpenAI account required.</a:t>
             </a:r>
-            <a:endParaRPr lang="en-US" sz="1350" dirty="0"/>
+            <a:endParaRPr lang="en-US" sz="1620" dirty="0"/>
           </a:p>
         </p:txBody>
       </p:sp>
@@ -3036,13 +4032,20 @@
             <a:prstDash val="solid"/>
           </a:ln>
           <a:effectLst>
-            <a:outerShdw sx="100000" sy="100000" kx="0" ky="0" algn="bl" rotWithShape="0" blurRad="101600" dist="38100" dir="2700000">
+            <a:outerShdw blurRad="101600" dist="38100" dir="2700000" algn="bl" rotWithShape="0">
               <a:srgbClr val="000000">
                 <a:alpha val="25000"/>
               </a:srgbClr>
             </a:outerShdw>
           </a:effectLst>
         </p:spPr>
+        <p:txBody>
+          <a:bodyPr/>
+          <a:lstStyle/>
+          <a:p>
+            <a:endParaRPr lang="en-CA"/>
+          </a:p>
+        </p:txBody>
       </p:sp>
       <p:sp>
         <p:nvSpPr>
@@ -3068,6 +4071,13 @@
             <a:prstDash val="solid"/>
           </a:ln>
         </p:spPr>
+        <p:txBody>
+          <a:bodyPr/>
+          <a:lstStyle/>
+          <a:p>
+            <a:endParaRPr lang="en-CA"/>
+          </a:p>
+        </p:txBody>
       </p:sp>
       <p:sp>
         <p:nvSpPr>
@@ -3090,11 +4100,11 @@
           <a:bodyPr wrap="square" lIns="0" tIns="0" rIns="0" bIns="0" rtlCol="0" anchor="ctr"/>
           <a:lstStyle/>
           <a:p>
-            <a:pPr algn="ctr" indent="0" marL="0">
+            <a:pPr marL="0" indent="0" algn="ctr">
               <a:buNone/>
             </a:pPr>
             <a:r>
-              <a:rPr lang="en-US" sz="1600" b="1" dirty="0">
+              <a:rPr lang="en-US" sz="1920" b="1" dirty="0">
                 <a:solidFill>
                   <a:srgbClr val="8B98AC"/>
                 </a:solidFill>
@@ -3104,7 +4114,7 @@
               </a:rPr>
               <a:t>2</a:t>
             </a:r>
-            <a:endParaRPr lang="en-US" sz="1600" dirty="0"/>
+            <a:endParaRPr lang="en-US" sz="1920" dirty="0"/>
           </a:p>
         </p:txBody>
       </p:sp>
@@ -3129,11 +4139,11 @@
           <a:bodyPr wrap="square" lIns="0" tIns="0" rIns="0" bIns="0" rtlCol="0" anchor="ctr"/>
           <a:lstStyle/>
           <a:p>
-            <a:pPr algn="ctr" indent="0" marL="0">
+            <a:pPr marL="0" indent="0" algn="ctr">
               <a:buNone/>
             </a:pPr>
             <a:r>
-              <a:rPr lang="en-US" sz="1600" b="1" dirty="0">
+              <a:rPr lang="en-US" sz="1920" b="1" dirty="0">
                 <a:solidFill>
                   <a:srgbClr val="E5E9F0"/>
                 </a:solidFill>
@@ -3143,7 +4153,7 @@
               </a:rPr>
               <a:t>Code-First</a:t>
             </a:r>
-            <a:endParaRPr lang="en-US" sz="1600" dirty="0"/>
+            <a:endParaRPr lang="en-US" sz="1920" dirty="0"/>
           </a:p>
         </p:txBody>
       </p:sp>
@@ -3168,14 +4178,14 @@
           <a:bodyPr wrap="square" lIns="0" tIns="0" rIns="0" bIns="0" rtlCol="0" anchor="t"/>
           <a:lstStyle/>
           <a:p>
-            <a:pPr algn="ctr" indent="0" marL="0">
+            <a:pPr marL="0" indent="0" algn="ctr">
               <a:lnSpc>
                 <a:spcPct val="120000"/>
               </a:lnSpc>
               <a:buNone/>
             </a:pPr>
             <a:r>
-              <a:rPr lang="en-US" sz="1350" dirty="0">
+              <a:rPr lang="en-US" sz="1620" dirty="0">
                 <a:solidFill>
                   <a:srgbClr val="B8C0D0"/>
                 </a:solidFill>
@@ -3185,17 +4195,17 @@
               </a:rPr>
               <a:t>Real Spring Boot code in every video —</a:t>
             </a:r>
-            <a:endParaRPr lang="en-US" sz="1350" dirty="0"/>
-          </a:p>
-          <a:p>
-            <a:pPr algn="ctr" indent="0" marL="0">
+            <a:endParaRPr lang="en-US" sz="1620" dirty="0"/>
+          </a:p>
+          <a:p>
+            <a:pPr marL="0" indent="0" algn="ctr">
               <a:lnSpc>
                 <a:spcPct val="120000"/>
               </a:lnSpc>
               <a:buNone/>
             </a:pPr>
             <a:r>
-              <a:rPr lang="en-US" sz="1350" dirty="0">
+              <a:rPr lang="en-US" sz="1620" dirty="0">
                 <a:solidFill>
                   <a:srgbClr val="B8C0D0"/>
                 </a:solidFill>
@@ -3205,7 +4215,7 @@
               </a:rPr>
               <a:t>not slideware, not pseudocode.</a:t>
             </a:r>
-            <a:endParaRPr lang="en-US" sz="1350" dirty="0"/>
+            <a:endParaRPr lang="en-US" sz="1620" dirty="0"/>
           </a:p>
         </p:txBody>
       </p:sp>
@@ -3235,13 +4245,20 @@
             <a:prstDash val="solid"/>
           </a:ln>
           <a:effectLst>
-            <a:outerShdw sx="100000" sy="100000" kx="0" ky="0" algn="bl" rotWithShape="0" blurRad="101600" dist="38100" dir="2700000">
+            <a:outerShdw blurRad="101600" dist="38100" dir="2700000" algn="bl" rotWithShape="0">
               <a:srgbClr val="000000">
                 <a:alpha val="25000"/>
               </a:srgbClr>
             </a:outerShdw>
           </a:effectLst>
         </p:spPr>
+        <p:txBody>
+          <a:bodyPr/>
+          <a:lstStyle/>
+          <a:p>
+            <a:endParaRPr lang="en-CA"/>
+          </a:p>
+        </p:txBody>
       </p:sp>
       <p:sp>
         <p:nvSpPr>
@@ -3267,6 +4284,13 @@
             <a:prstDash val="solid"/>
           </a:ln>
         </p:spPr>
+        <p:txBody>
+          <a:bodyPr/>
+          <a:lstStyle/>
+          <a:p>
+            <a:endParaRPr lang="en-CA"/>
+          </a:p>
+        </p:txBody>
       </p:sp>
       <p:sp>
         <p:nvSpPr>
@@ -3289,11 +4313,11 @@
           <a:bodyPr wrap="square" lIns="0" tIns="0" rIns="0" bIns="0" rtlCol="0" anchor="ctr"/>
           <a:lstStyle/>
           <a:p>
-            <a:pPr algn="ctr" indent="0" marL="0">
+            <a:pPr marL="0" indent="0" algn="ctr">
               <a:buNone/>
             </a:pPr>
             <a:r>
-              <a:rPr lang="en-US" sz="1600" b="1" dirty="0">
+              <a:rPr lang="en-US" sz="1920" b="1" dirty="0">
                 <a:solidFill>
                   <a:srgbClr val="5FE0C5"/>
                 </a:solidFill>
@@ -3303,7 +4327,7 @@
               </a:rPr>
               <a:t>3</a:t>
             </a:r>
-            <a:endParaRPr lang="en-US" sz="1600" dirty="0"/>
+            <a:endParaRPr lang="en-US" sz="1920" dirty="0"/>
           </a:p>
         </p:txBody>
       </p:sp>
@@ -3328,11 +4352,11 @@
           <a:bodyPr wrap="square" lIns="0" tIns="0" rIns="0" bIns="0" rtlCol="0" anchor="ctr"/>
           <a:lstStyle/>
           <a:p>
-            <a:pPr algn="ctr" indent="0" marL="0">
+            <a:pPr marL="0" indent="0" algn="ctr">
               <a:buNone/>
             </a:pPr>
             <a:r>
-              <a:rPr lang="en-US" sz="1600" b="1" dirty="0">
+              <a:rPr lang="en-US" sz="1920" b="1" dirty="0">
                 <a:solidFill>
                   <a:srgbClr val="E5E9F0"/>
                 </a:solidFill>
@@ -3342,7 +4366,7 @@
               </a:rPr>
               <a:t>One Evolving App</a:t>
             </a:r>
-            <a:endParaRPr lang="en-US" sz="1600" dirty="0"/>
+            <a:endParaRPr lang="en-US" sz="1920" dirty="0"/>
           </a:p>
         </p:txBody>
       </p:sp>
@@ -3367,14 +4391,14 @@
           <a:bodyPr wrap="square" lIns="0" tIns="0" rIns="0" bIns="0" rtlCol="0" anchor="t"/>
           <a:lstStyle/>
           <a:p>
-            <a:pPr algn="ctr" indent="0" marL="0">
+            <a:pPr marL="0" indent="0" algn="ctr">
               <a:lnSpc>
                 <a:spcPct val="120000"/>
               </a:lnSpc>
               <a:buNone/>
             </a:pPr>
             <a:r>
-              <a:rPr lang="en-US" sz="1350" dirty="0">
+              <a:rPr lang="en-US" sz="1620" dirty="0">
                 <a:solidFill>
                   <a:srgbClr val="B8C0D0"/>
                 </a:solidFill>
@@ -3384,17 +4408,17 @@
               </a:rPr>
               <a:t>Not 11 disconnected demos. One project</a:t>
             </a:r>
-            <a:endParaRPr lang="en-US" sz="1350" dirty="0"/>
-          </a:p>
-          <a:p>
-            <a:pPr algn="ctr" indent="0" marL="0">
+            <a:endParaRPr lang="en-US" sz="1620" dirty="0"/>
+          </a:p>
+          <a:p>
+            <a:pPr marL="0" indent="0" algn="ctr">
               <a:lnSpc>
                 <a:spcPct val="120000"/>
               </a:lnSpc>
               <a:buNone/>
             </a:pPr>
             <a:r>
-              <a:rPr lang="en-US" sz="1350" dirty="0">
+              <a:rPr lang="en-US" sz="1620" dirty="0">
                 <a:solidFill>
                   <a:srgbClr val="B8C0D0"/>
                 </a:solidFill>
@@ -3404,7 +4428,7 @@
               </a:rPr>
               <a:t>that grows a capability each chapter.</a:t>
             </a:r>
-            <a:endParaRPr lang="en-US" sz="1350" dirty="0"/>
+            <a:endParaRPr lang="en-US" sz="1620" dirty="0"/>
           </a:p>
         </p:txBody>
       </p:sp>
@@ -3424,6 +4448,7 @@
         <a:solidFill>
           <a:srgbClr val="0A0F1C"/>
         </a:solidFill>
+        <a:effectLst/>
       </p:bgPr>
     </p:bg>
     <p:spTree>
@@ -3464,6 +4489,13 @@
             <a:prstDash val="solid"/>
           </a:ln>
         </p:spPr>
+        <p:txBody>
+          <a:bodyPr/>
+          <a:lstStyle/>
+          <a:p>
+            <a:endParaRPr lang="en-CA"/>
+          </a:p>
+        </p:txBody>
       </p:sp>
       <p:sp>
         <p:nvSpPr>
@@ -3489,6 +4521,13 @@
             <a:prstDash val="solid"/>
           </a:ln>
         </p:spPr>
+        <p:txBody>
+          <a:bodyPr/>
+          <a:lstStyle/>
+          <a:p>
+            <a:endParaRPr lang="en-CA"/>
+          </a:p>
+        </p:txBody>
       </p:sp>
       <p:sp>
         <p:nvSpPr>
@@ -3514,6 +4553,13 @@
             <a:prstDash val="solid"/>
           </a:ln>
         </p:spPr>
+        <p:txBody>
+          <a:bodyPr/>
+          <a:lstStyle/>
+          <a:p>
+            <a:endParaRPr lang="en-CA"/>
+          </a:p>
+        </p:txBody>
       </p:sp>
       <p:sp>
         <p:nvSpPr>
@@ -3536,6 +4582,13 @@
           </a:solidFill>
           <a:ln/>
         </p:spPr>
+        <p:txBody>
+          <a:bodyPr/>
+          <a:lstStyle/>
+          <a:p>
+            <a:endParaRPr lang="en-CA"/>
+          </a:p>
+        </p:txBody>
       </p:sp>
       <p:sp>
         <p:nvSpPr>
@@ -3558,6 +4611,13 @@
           </a:solidFill>
           <a:ln/>
         </p:spPr>
+        <p:txBody>
+          <a:bodyPr/>
+          <a:lstStyle/>
+          <a:p>
+            <a:endParaRPr lang="en-CA"/>
+          </a:p>
+        </p:txBody>
       </p:sp>
       <p:sp>
         <p:nvSpPr>
@@ -3580,6 +4640,13 @@
           </a:solidFill>
           <a:ln/>
         </p:spPr>
+        <p:txBody>
+          <a:bodyPr/>
+          <a:lstStyle/>
+          <a:p>
+            <a:endParaRPr lang="en-CA"/>
+          </a:p>
+        </p:txBody>
       </p:sp>
       <p:sp>
         <p:nvSpPr>
@@ -3602,6 +4669,13 @@
           </a:solidFill>
           <a:ln/>
         </p:spPr>
+        <p:txBody>
+          <a:bodyPr/>
+          <a:lstStyle/>
+          <a:p>
+            <a:endParaRPr lang="en-CA"/>
+          </a:p>
+        </p:txBody>
       </p:sp>
       <p:sp>
         <p:nvSpPr>
@@ -3627,6 +4701,13 @@
             <a:prstDash val="solid"/>
           </a:ln>
         </p:spPr>
+        <p:txBody>
+          <a:bodyPr/>
+          <a:lstStyle/>
+          <a:p>
+            <a:endParaRPr lang="en-CA"/>
+          </a:p>
+        </p:txBody>
       </p:sp>
       <p:sp>
         <p:nvSpPr>
@@ -3652,6 +4733,13 @@
             <a:prstDash val="solid"/>
           </a:ln>
         </p:spPr>
+        <p:txBody>
+          <a:bodyPr/>
+          <a:lstStyle/>
+          <a:p>
+            <a:endParaRPr lang="en-CA"/>
+          </a:p>
+        </p:txBody>
       </p:sp>
       <p:sp>
         <p:nvSpPr>
@@ -3677,6 +4765,13 @@
             <a:prstDash val="solid"/>
           </a:ln>
         </p:spPr>
+        <p:txBody>
+          <a:bodyPr/>
+          <a:lstStyle/>
+          <a:p>
+            <a:endParaRPr lang="en-CA"/>
+          </a:p>
+        </p:txBody>
       </p:sp>
       <p:sp>
         <p:nvSpPr>
@@ -3699,6 +4794,13 @@
           </a:solidFill>
           <a:ln/>
         </p:spPr>
+        <p:txBody>
+          <a:bodyPr/>
+          <a:lstStyle/>
+          <a:p>
+            <a:endParaRPr lang="en-CA"/>
+          </a:p>
+        </p:txBody>
       </p:sp>
       <p:sp>
         <p:nvSpPr>
@@ -3721,6 +4823,13 @@
           </a:solidFill>
           <a:ln/>
         </p:spPr>
+        <p:txBody>
+          <a:bodyPr/>
+          <a:lstStyle/>
+          <a:p>
+            <a:endParaRPr lang="en-CA"/>
+          </a:p>
+        </p:txBody>
       </p:sp>
       <p:sp>
         <p:nvSpPr>
@@ -3743,6 +4852,13 @@
           </a:solidFill>
           <a:ln/>
         </p:spPr>
+        <p:txBody>
+          <a:bodyPr/>
+          <a:lstStyle/>
+          <a:p>
+            <a:endParaRPr lang="en-CA"/>
+          </a:p>
+        </p:txBody>
       </p:sp>
       <p:sp>
         <p:nvSpPr>
@@ -3765,6 +4881,13 @@
           </a:solidFill>
           <a:ln/>
         </p:spPr>
+        <p:txBody>
+          <a:bodyPr/>
+          <a:lstStyle/>
+          <a:p>
+            <a:endParaRPr lang="en-CA"/>
+          </a:p>
+        </p:txBody>
       </p:sp>
       <p:sp>
         <p:nvSpPr>
@@ -3787,11 +4910,11 @@
           <a:bodyPr wrap="square" lIns="0" tIns="0" rIns="0" bIns="0" rtlCol="0" anchor="ctr"/>
           <a:lstStyle/>
           <a:p>
-            <a:pPr indent="0" marL="0">
+            <a:pPr marL="0" indent="0">
               <a:buNone/>
             </a:pPr>
             <a:r>
-              <a:rPr lang="en-US" sz="900" dirty="0">
+              <a:rPr lang="en-US" sz="1080" dirty="0">
                 <a:solidFill>
                   <a:srgbClr val="5B6478"/>
                 </a:solidFill>
@@ -3801,7 +4924,7 @@
               </a:rPr>
               <a:t>PromptToApps</a:t>
             </a:r>
-            <a:endParaRPr lang="en-US" sz="900" dirty="0"/>
+            <a:endParaRPr lang="en-US" sz="1080" dirty="0"/>
           </a:p>
         </p:txBody>
       </p:sp>
@@ -3826,11 +4949,11 @@
           <a:bodyPr wrap="square" lIns="0" tIns="0" rIns="0" bIns="0" rtlCol="0" anchor="ctr"/>
           <a:lstStyle/>
           <a:p>
-            <a:pPr algn="r" indent="0" marL="0">
+            <a:pPr marL="0" indent="0" algn="r">
               <a:buNone/>
             </a:pPr>
             <a:r>
-              <a:rPr lang="en-US" sz="900" dirty="0">
+              <a:rPr lang="en-US" sz="1080" dirty="0">
                 <a:solidFill>
                   <a:srgbClr val="5B6478"/>
                 </a:solidFill>
@@ -3838,9 +4961,9 @@
                 <a:ea typeface="Courier New" pitchFamily="34" charset="-122"/>
                 <a:cs typeface="Courier New" pitchFamily="34" charset="-120"/>
               </a:rPr>
-              <a:t>3 / 9</a:t>
-            </a:r>
-            <a:endParaRPr lang="en-US" sz="900" dirty="0"/>
+              <a:t>3 / 10</a:t>
+            </a:r>
+            <a:endParaRPr lang="en-US" sz="1080" dirty="0"/>
           </a:p>
         </p:txBody>
       </p:sp>
@@ -3865,11 +4988,11 @@
           <a:bodyPr wrap="square" lIns="0" tIns="0" rIns="0" bIns="0" rtlCol="0" anchor="ctr"/>
           <a:lstStyle/>
           <a:p>
-            <a:pPr indent="0" marL="0">
+            <a:pPr marL="0" indent="0">
               <a:buNone/>
             </a:pPr>
             <a:r>
-              <a:rPr lang="en-US" sz="1200" spc="200" kern="0" dirty="0">
+              <a:rPr lang="en-US" sz="1440" kern="0" spc="200" dirty="0">
                 <a:solidFill>
                   <a:srgbClr val="5FE0C5"/>
                 </a:solidFill>
@@ -3879,7 +5002,7 @@
               </a:rPr>
               <a:t>THE PROJECT</a:t>
             </a:r>
-            <a:endParaRPr lang="en-US" sz="1200" dirty="0"/>
+            <a:endParaRPr lang="en-US" sz="1440" dirty="0"/>
           </a:p>
         </p:txBody>
       </p:sp>
@@ -3904,11 +5027,11 @@
           <a:bodyPr wrap="square" lIns="0" tIns="0" rIns="0" bIns="0" rtlCol="0" anchor="ctr"/>
           <a:lstStyle/>
           <a:p>
-            <a:pPr algn="l" indent="0" marL="0">
+            <a:pPr marL="0" indent="0" algn="l">
               <a:buNone/>
             </a:pPr>
             <a:r>
-              <a:rPr lang="en-US" sz="2800" b="1" dirty="0">
+              <a:rPr lang="en-US" sz="3360" b="1" dirty="0">
                 <a:solidFill>
                   <a:srgbClr val="F2A93B"/>
                 </a:solidFill>
@@ -3918,7 +5041,7 @@
               </a:rPr>
               <a:t>SmartHR Assistant</a:t>
             </a:r>
-            <a:endParaRPr lang="en-US" sz="2800" dirty="0"/>
+            <a:endParaRPr lang="en-US" sz="3360" dirty="0"/>
           </a:p>
         </p:txBody>
       </p:sp>
@@ -3943,11 +5066,11 @@
           <a:bodyPr wrap="square" lIns="0" tIns="0" rIns="0" bIns="0" rtlCol="0" anchor="ctr"/>
           <a:lstStyle/>
           <a:p>
-            <a:pPr indent="0" marL="0">
+            <a:pPr marL="0" indent="0">
               <a:buNone/>
             </a:pPr>
             <a:r>
-              <a:rPr lang="en-US" sz="1800" dirty="0">
+              <a:rPr lang="en-US" sz="2160" dirty="0">
                 <a:solidFill>
                   <a:srgbClr val="E5E9F0"/>
                 </a:solidFill>
@@ -3957,11 +5080,8 @@
               </a:rPr>
               <a:t>A fictional company, </a:t>
             </a:r>
-            <a:pPr indent="0" marL="0">
-              <a:buNone/>
-            </a:pPr>
-            <a:r>
-              <a:rPr lang="en-US" sz="1800" b="1" dirty="0">
+            <a:r>
+              <a:rPr lang="en-US" sz="2160" b="1" dirty="0">
                 <a:solidFill>
                   <a:srgbClr val="F2A93B"/>
                 </a:solidFill>
@@ -3971,11 +5091,8 @@
               </a:rPr>
               <a:t>TechCorp</a:t>
             </a:r>
-            <a:pPr indent="0" marL="0">
-              <a:buNone/>
-            </a:pPr>
-            <a:r>
-              <a:rPr lang="en-US" sz="1800" dirty="0">
+            <a:r>
+              <a:rPr lang="en-US" sz="2160" dirty="0">
                 <a:solidFill>
                   <a:srgbClr val="E5E9F0"/>
                 </a:solidFill>
@@ -3985,7 +5102,7 @@
               </a:rPr>
               <a:t>, needs an AI-powered HR platform.</a:t>
             </a:r>
-            <a:endParaRPr lang="en-US" sz="1800" dirty="0"/>
+            <a:endParaRPr lang="en-US" sz="2160" dirty="0"/>
           </a:p>
         </p:txBody>
       </p:sp>
@@ -4021,7 +5138,7 @@
               <a:buChar char="→"/>
             </a:pPr>
             <a:r>
-              <a:rPr lang="en-US" sz="1500" dirty="0">
+              <a:rPr lang="en-US" sz="1800" dirty="0">
                 <a:solidFill>
                   <a:srgbClr val="B8C0D0"/>
                 </a:solidFill>
@@ -4031,7 +5148,7 @@
               </a:rPr>
               <a:t>One Spring Boot application — not eleven separate sample projects</a:t>
             </a:r>
-            <a:endParaRPr lang="en-US" sz="1500" dirty="0"/>
+            <a:endParaRPr lang="en-US" sz="1800" dirty="0"/>
           </a:p>
           <a:p>
             <a:pPr marL="342900" indent="-342900">
@@ -4045,7 +5162,7 @@
               <a:buChar char="→"/>
             </a:pPr>
             <a:r>
-              <a:rPr lang="en-US" sz="1500" dirty="0">
+              <a:rPr lang="en-US" sz="1800" dirty="0">
                 <a:solidFill>
                   <a:srgbClr val="B8C0D0"/>
                 </a:solidFill>
@@ -4055,7 +5172,7 @@
               </a:rPr>
               <a:t>Every chapter adds a new capability to the same codebase</a:t>
             </a:r>
-            <a:endParaRPr lang="en-US" sz="1500" dirty="0"/>
+            <a:endParaRPr lang="en-US" sz="1800" dirty="0"/>
           </a:p>
           <a:p>
             <a:pPr marL="342900" indent="-342900">
@@ -4069,7 +5186,7 @@
               <a:buChar char="→"/>
             </a:pPr>
             <a:r>
-              <a:rPr lang="en-US" sz="1500" dirty="0">
+              <a:rPr lang="en-US" sz="1800" dirty="0">
                 <a:solidFill>
                   <a:srgbClr val="B8C0D0"/>
                 </a:solidFill>
@@ -4079,7 +5196,7 @@
               </a:rPr>
               <a:t>By Chapter 11 it answers questions, remembers context, searches</a:t>
             </a:r>
-            <a:endParaRPr lang="en-US" sz="1500" dirty="0"/>
+            <a:endParaRPr lang="en-US" sz="1800" dirty="0"/>
           </a:p>
           <a:p>
             <a:pPr marL="342900" indent="-342900">
@@ -4093,7 +5210,7 @@
               <a:buChar char="→"/>
             </a:pPr>
             <a:r>
-              <a:rPr lang="en-US" sz="1500" dirty="0">
+              <a:rPr lang="en-US" sz="1800" dirty="0">
                 <a:solidFill>
                   <a:srgbClr val="B8C0D0"/>
                 </a:solidFill>
@@ -4103,7 +5220,7 @@
               </a:rPr>
               <a:t>policy documents, and books interviews — all on its own</a:t>
             </a:r>
-            <a:endParaRPr lang="en-US" sz="1500" dirty="0"/>
+            <a:endParaRPr lang="en-US" sz="1800" dirty="0"/>
           </a:p>
         </p:txBody>
       </p:sp>
@@ -4116,11 +5233,11 @@
         <p:spPr>
           <a:xfrm>
             <a:off x="7955280" y="1554480"/>
-            <a:ext cx="3566160" cy="1051560"/>
+            <a:ext cx="3566160" cy="914400"/>
           </a:xfrm>
           <a:prstGeom prst="roundRect">
             <a:avLst>
-              <a:gd name="adj" fmla="val 8696"/>
+              <a:gd name="adj" fmla="val 10000"/>
             </a:avLst>
           </a:prstGeom>
           <a:solidFill>
@@ -4133,13 +5250,20 @@
             <a:prstDash val="solid"/>
           </a:ln>
           <a:effectLst>
-            <a:outerShdw sx="100000" sy="100000" kx="0" ky="0" algn="bl" rotWithShape="0" blurRad="76200" dist="38100" dir="5400000">
+            <a:outerShdw blurRad="76200" dist="38100" dir="5400000" algn="bl" rotWithShape="0">
               <a:srgbClr val="000000">
                 <a:alpha val="20000"/>
               </a:srgbClr>
             </a:outerShdw>
           </a:effectLst>
         </p:spPr>
+        <p:txBody>
+          <a:bodyPr/>
+          <a:lstStyle/>
+          <a:p>
+            <a:endParaRPr lang="en-CA"/>
+          </a:p>
+        </p:txBody>
       </p:sp>
       <p:sp>
         <p:nvSpPr>
@@ -4149,7 +5273,7 @@
         </p:nvSpPr>
         <p:spPr>
           <a:xfrm>
-            <a:off x="8183880" y="1664208"/>
+            <a:off x="8183880" y="1645920"/>
             <a:ext cx="1188720" cy="320040"/>
           </a:xfrm>
           <a:prstGeom prst="rect">
@@ -4162,11 +5286,11 @@
           <a:bodyPr wrap="square" lIns="0" tIns="0" rIns="0" bIns="0" rtlCol="0" anchor="ctr"/>
           <a:lstStyle/>
           <a:p>
-            <a:pPr indent="0" marL="0">
+            <a:pPr marL="0" indent="0">
               <a:buNone/>
             </a:pPr>
             <a:r>
-              <a:rPr lang="en-US" sz="1400" b="1" dirty="0">
+              <a:rPr lang="en-US" sz="1680" b="1" dirty="0">
                 <a:solidFill>
                   <a:srgbClr val="F2A93B"/>
                 </a:solidFill>
@@ -4176,7 +5300,7 @@
               </a:rPr>
               <a:t>Ch 1</a:t>
             </a:r>
-            <a:endParaRPr lang="en-US" sz="1400" dirty="0"/>
+            <a:endParaRPr lang="en-US" sz="1680" dirty="0"/>
           </a:p>
         </p:txBody>
       </p:sp>
@@ -4188,8 +5312,8 @@
         </p:nvSpPr>
         <p:spPr>
           <a:xfrm>
-            <a:off x="8183880" y="2057400"/>
-            <a:ext cx="3108960" cy="457200"/>
+            <a:off x="8183880" y="1993392"/>
+            <a:ext cx="3108960" cy="411480"/>
           </a:xfrm>
           <a:prstGeom prst="rect">
             <a:avLst/>
@@ -4201,11 +5325,11 @@
           <a:bodyPr wrap="square" lIns="0" tIns="0" rIns="0" bIns="0" rtlCol="0" anchor="ctr"/>
           <a:lstStyle/>
           <a:p>
-            <a:pPr indent="0" marL="0">
+            <a:pPr marL="0" indent="0">
               <a:buNone/>
             </a:pPr>
             <a:r>
-              <a:rPr lang="en-US" sz="1400" dirty="0">
+              <a:rPr lang="en-US" sz="1680" dirty="0">
                 <a:solidFill>
                   <a:srgbClr val="E5E9F0"/>
                 </a:solidFill>
@@ -4215,7 +5339,7 @@
               </a:rPr>
               <a:t>Ask a question</a:t>
             </a:r>
-            <a:endParaRPr lang="en-US" sz="1400" dirty="0"/>
+            <a:endParaRPr lang="en-US" sz="1680" dirty="0"/>
           </a:p>
         </p:txBody>
       </p:sp>
@@ -4227,8 +5351,8 @@
         </p:nvSpPr>
         <p:spPr>
           <a:xfrm>
-            <a:off x="9729216" y="2606040"/>
-            <a:ext cx="0" cy="320040"/>
+            <a:off x="9729216" y="2468880"/>
+            <a:ext cx="0" cy="228600"/>
           </a:xfrm>
           <a:prstGeom prst="line">
             <a:avLst/>
@@ -4242,6 +5366,13 @@
             <a:tailEnd type="triangle"/>
           </a:ln>
         </p:spPr>
+        <p:txBody>
+          <a:bodyPr/>
+          <a:lstStyle/>
+          <a:p>
+            <a:endParaRPr lang="en-CA"/>
+          </a:p>
+        </p:txBody>
       </p:sp>
       <p:sp>
         <p:nvSpPr>
@@ -4251,12 +5382,12 @@
         </p:nvSpPr>
         <p:spPr>
           <a:xfrm>
-            <a:off x="7955280" y="2926080"/>
-            <a:ext cx="3566160" cy="1051560"/>
+            <a:off x="7955280" y="2697480"/>
+            <a:ext cx="3566160" cy="914400"/>
           </a:xfrm>
           <a:prstGeom prst="roundRect">
             <a:avLst>
-              <a:gd name="adj" fmla="val 8696"/>
+              <a:gd name="adj" fmla="val 10000"/>
             </a:avLst>
           </a:prstGeom>
           <a:solidFill>
@@ -4269,13 +5400,20 @@
             <a:prstDash val="solid"/>
           </a:ln>
           <a:effectLst>
-            <a:outerShdw sx="100000" sy="100000" kx="0" ky="0" algn="bl" rotWithShape="0" blurRad="76200" dist="38100" dir="5400000">
+            <a:outerShdw blurRad="76200" dist="38100" dir="5400000" algn="bl" rotWithShape="0">
               <a:srgbClr val="000000">
                 <a:alpha val="20000"/>
               </a:srgbClr>
             </a:outerShdw>
           </a:effectLst>
         </p:spPr>
+        <p:txBody>
+          <a:bodyPr/>
+          <a:lstStyle/>
+          <a:p>
+            <a:endParaRPr lang="en-CA"/>
+          </a:p>
+        </p:txBody>
       </p:sp>
       <p:sp>
         <p:nvSpPr>
@@ -4285,7 +5423,7 @@
         </p:nvSpPr>
         <p:spPr>
           <a:xfrm>
-            <a:off x="8183880" y="3035808"/>
+            <a:off x="8183880" y="2788920"/>
             <a:ext cx="1188720" cy="320040"/>
           </a:xfrm>
           <a:prstGeom prst="rect">
@@ -4298,11 +5436,11 @@
           <a:bodyPr wrap="square" lIns="0" tIns="0" rIns="0" bIns="0" rtlCol="0" anchor="ctr"/>
           <a:lstStyle/>
           <a:p>
-            <a:pPr indent="0" marL="0">
+            <a:pPr marL="0" indent="0">
               <a:buNone/>
             </a:pPr>
             <a:r>
-              <a:rPr lang="en-US" sz="1400" b="1" dirty="0">
+              <a:rPr lang="en-US" sz="1680" b="1" dirty="0">
                 <a:solidFill>
                   <a:srgbClr val="8B98AC"/>
                 </a:solidFill>
@@ -4312,7 +5450,7 @@
               </a:rPr>
               <a:t>Ch 6</a:t>
             </a:r>
-            <a:endParaRPr lang="en-US" sz="1400" dirty="0"/>
+            <a:endParaRPr lang="en-US" sz="1680" dirty="0"/>
           </a:p>
         </p:txBody>
       </p:sp>
@@ -4324,8 +5462,8 @@
         </p:nvSpPr>
         <p:spPr>
           <a:xfrm>
-            <a:off x="8183880" y="3429000"/>
-            <a:ext cx="3108960" cy="457200"/>
+            <a:off x="8183880" y="3136392"/>
+            <a:ext cx="3108960" cy="411480"/>
           </a:xfrm>
           <a:prstGeom prst="rect">
             <a:avLst/>
@@ -4337,11 +5475,11 @@
           <a:bodyPr wrap="square" lIns="0" tIns="0" rIns="0" bIns="0" rtlCol="0" anchor="ctr"/>
           <a:lstStyle/>
           <a:p>
-            <a:pPr indent="0" marL="0">
+            <a:pPr marL="0" indent="0">
               <a:buNone/>
             </a:pPr>
             <a:r>
-              <a:rPr lang="en-US" sz="1400" dirty="0">
+              <a:rPr lang="en-US" sz="1680" dirty="0">
                 <a:solidFill>
                   <a:srgbClr val="E5E9F0"/>
                 </a:solidFill>
@@ -4351,7 +5489,7 @@
               </a:rPr>
               <a:t>Remember context</a:t>
             </a:r>
-            <a:endParaRPr lang="en-US" sz="1400" dirty="0"/>
+            <a:endParaRPr lang="en-US" sz="1680" dirty="0"/>
           </a:p>
         </p:txBody>
       </p:sp>
@@ -4363,8 +5501,8 @@
         </p:nvSpPr>
         <p:spPr>
           <a:xfrm>
-            <a:off x="9729216" y="3977640"/>
-            <a:ext cx="0" cy="320040"/>
+            <a:off x="9729216" y="3611880"/>
+            <a:ext cx="0" cy="228600"/>
           </a:xfrm>
           <a:prstGeom prst="line">
             <a:avLst/>
@@ -4378,6 +5516,13 @@
             <a:tailEnd type="triangle"/>
           </a:ln>
         </p:spPr>
+        <p:txBody>
+          <a:bodyPr/>
+          <a:lstStyle/>
+          <a:p>
+            <a:endParaRPr lang="en-CA"/>
+          </a:p>
+        </p:txBody>
       </p:sp>
       <p:sp>
         <p:nvSpPr>
@@ -4387,12 +5532,162 @@
         </p:nvSpPr>
         <p:spPr>
           <a:xfrm>
-            <a:off x="7955280" y="4297680"/>
-            <a:ext cx="3566160" cy="1051560"/>
+            <a:off x="7955280" y="3840480"/>
+            <a:ext cx="3566160" cy="914400"/>
           </a:xfrm>
           <a:prstGeom prst="roundRect">
             <a:avLst>
-              <a:gd name="adj" fmla="val 8696"/>
+              <a:gd name="adj" fmla="val 10000"/>
+            </a:avLst>
+          </a:prstGeom>
+          <a:solidFill>
+            <a:srgbClr val="121A2E"/>
+          </a:solidFill>
+          <a:ln w="15875">
+            <a:solidFill>
+              <a:srgbClr val="F2A93B"/>
+            </a:solidFill>
+            <a:prstDash val="solid"/>
+          </a:ln>
+          <a:effectLst>
+            <a:outerShdw blurRad="76200" dist="38100" dir="5400000" algn="bl" rotWithShape="0">
+              <a:srgbClr val="000000">
+                <a:alpha val="20000"/>
+              </a:srgbClr>
+            </a:outerShdw>
+          </a:effectLst>
+        </p:spPr>
+        <p:txBody>
+          <a:bodyPr/>
+          <a:lstStyle/>
+          <a:p>
+            <a:endParaRPr lang="en-CA"/>
+          </a:p>
+        </p:txBody>
+      </p:sp>
+      <p:sp>
+        <p:nvSpPr>
+          <p:cNvPr id="31" name="Text 29"/>
+          <p:cNvSpPr/>
+          <p:nvPr/>
+        </p:nvSpPr>
+        <p:spPr>
+          <a:xfrm>
+            <a:off x="8183880" y="3931920"/>
+            <a:ext cx="1188720" cy="320040"/>
+          </a:xfrm>
+          <a:prstGeom prst="rect">
+            <a:avLst/>
+          </a:prstGeom>
+          <a:noFill/>
+          <a:ln/>
+        </p:spPr>
+        <p:txBody>
+          <a:bodyPr wrap="square" lIns="0" tIns="0" rIns="0" bIns="0" rtlCol="0" anchor="ctr"/>
+          <a:lstStyle/>
+          <a:p>
+            <a:pPr marL="0" indent="0">
+              <a:buNone/>
+            </a:pPr>
+            <a:r>
+              <a:rPr lang="en-US" sz="1680" b="1" dirty="0">
+                <a:solidFill>
+                  <a:srgbClr val="F2A93B"/>
+                </a:solidFill>
+                <a:latin typeface="Courier New" pitchFamily="34" charset="0"/>
+                <a:ea typeface="Courier New" pitchFamily="34" charset="-122"/>
+                <a:cs typeface="Courier New" pitchFamily="34" charset="-120"/>
+              </a:rPr>
+              <a:t>Ch 7</a:t>
+            </a:r>
+            <a:endParaRPr lang="en-US" sz="1680" dirty="0"/>
+          </a:p>
+        </p:txBody>
+      </p:sp>
+      <p:sp>
+        <p:nvSpPr>
+          <p:cNvPr id="32" name="Text 30"/>
+          <p:cNvSpPr/>
+          <p:nvPr/>
+        </p:nvSpPr>
+        <p:spPr>
+          <a:xfrm>
+            <a:off x="8183880" y="4279392"/>
+            <a:ext cx="3108960" cy="411480"/>
+          </a:xfrm>
+          <a:prstGeom prst="rect">
+            <a:avLst/>
+          </a:prstGeom>
+          <a:noFill/>
+          <a:ln/>
+        </p:spPr>
+        <p:txBody>
+          <a:bodyPr wrap="square" lIns="0" tIns="0" rIns="0" bIns="0" rtlCol="0" anchor="ctr"/>
+          <a:lstStyle/>
+          <a:p>
+            <a:pPr marL="0" indent="0">
+              <a:buNone/>
+            </a:pPr>
+            <a:r>
+              <a:rPr lang="en-US" sz="1680" dirty="0">
+                <a:solidFill>
+                  <a:srgbClr val="E5E9F0"/>
+                </a:solidFill>
+                <a:latin typeface="Calibri" pitchFamily="34" charset="0"/>
+                <a:ea typeface="Calibri" pitchFamily="34" charset="-122"/>
+                <a:cs typeface="Calibri" pitchFamily="34" charset="-120"/>
+              </a:rPr>
+              <a:t>Search policy docs (RAG)</a:t>
+            </a:r>
+            <a:endParaRPr lang="en-US" sz="1680" dirty="0"/>
+          </a:p>
+        </p:txBody>
+      </p:sp>
+      <p:sp>
+        <p:nvSpPr>
+          <p:cNvPr id="33" name="Shape 31"/>
+          <p:cNvSpPr/>
+          <p:nvPr/>
+        </p:nvSpPr>
+        <p:spPr>
+          <a:xfrm>
+            <a:off x="9729216" y="4754880"/>
+            <a:ext cx="0" cy="228600"/>
+          </a:xfrm>
+          <a:prstGeom prst="line">
+            <a:avLst/>
+          </a:prstGeom>
+          <a:noFill/>
+          <a:ln w="19050">
+            <a:solidFill>
+              <a:srgbClr val="5B6478"/>
+            </a:solidFill>
+            <a:prstDash val="solid"/>
+            <a:tailEnd type="triangle"/>
+          </a:ln>
+        </p:spPr>
+        <p:txBody>
+          <a:bodyPr/>
+          <a:lstStyle/>
+          <a:p>
+            <a:endParaRPr lang="en-CA"/>
+          </a:p>
+        </p:txBody>
+      </p:sp>
+      <p:sp>
+        <p:nvSpPr>
+          <p:cNvPr id="34" name="Shape 32"/>
+          <p:cNvSpPr/>
+          <p:nvPr/>
+        </p:nvSpPr>
+        <p:spPr>
+          <a:xfrm>
+            <a:off x="7955280" y="4983480"/>
+            <a:ext cx="3566160" cy="914400"/>
+          </a:xfrm>
+          <a:prstGeom prst="roundRect">
+            <a:avLst>
+              <a:gd name="adj" fmla="val 10000"/>
             </a:avLst>
           </a:prstGeom>
           <a:solidFill>
@@ -4405,23 +5700,30 @@
             <a:prstDash val="solid"/>
           </a:ln>
           <a:effectLst>
-            <a:outerShdw sx="100000" sy="100000" kx="0" ky="0" algn="bl" rotWithShape="0" blurRad="76200" dist="38100" dir="5400000">
+            <a:outerShdw blurRad="76200" dist="38100" dir="5400000" algn="bl" rotWithShape="0">
               <a:srgbClr val="000000">
                 <a:alpha val="20000"/>
               </a:srgbClr>
             </a:outerShdw>
           </a:effectLst>
         </p:spPr>
-      </p:sp>
-      <p:sp>
-        <p:nvSpPr>
-          <p:cNvPr id="31" name="Text 29"/>
-          <p:cNvSpPr/>
-          <p:nvPr/>
-        </p:nvSpPr>
-        <p:spPr>
-          <a:xfrm>
-            <a:off x="8183880" y="4407408"/>
+        <p:txBody>
+          <a:bodyPr/>
+          <a:lstStyle/>
+          <a:p>
+            <a:endParaRPr lang="en-CA"/>
+          </a:p>
+        </p:txBody>
+      </p:sp>
+      <p:sp>
+        <p:nvSpPr>
+          <p:cNvPr id="35" name="Text 33"/>
+          <p:cNvSpPr/>
+          <p:nvPr/>
+        </p:nvSpPr>
+        <p:spPr>
+          <a:xfrm>
+            <a:off x="8183880" y="5074920"/>
             <a:ext cx="1188720" cy="320040"/>
           </a:xfrm>
           <a:prstGeom prst="rect">
@@ -4434,11 +5736,11 @@
           <a:bodyPr wrap="square" lIns="0" tIns="0" rIns="0" bIns="0" rtlCol="0" anchor="ctr"/>
           <a:lstStyle/>
           <a:p>
-            <a:pPr indent="0" marL="0">
+            <a:pPr marL="0" indent="0">
               <a:buNone/>
             </a:pPr>
             <a:r>
-              <a:rPr lang="en-US" sz="1400" b="1" dirty="0">
+              <a:rPr lang="en-US" sz="1680" b="1" dirty="0">
                 <a:solidFill>
                   <a:srgbClr val="5FE0C5"/>
                 </a:solidFill>
@@ -4448,20 +5750,20 @@
               </a:rPr>
               <a:t>Ch 11</a:t>
             </a:r>
-            <a:endParaRPr lang="en-US" sz="1400" dirty="0"/>
-          </a:p>
-        </p:txBody>
-      </p:sp>
-      <p:sp>
-        <p:nvSpPr>
-          <p:cNvPr id="32" name="Text 30"/>
-          <p:cNvSpPr/>
-          <p:nvPr/>
-        </p:nvSpPr>
-        <p:spPr>
-          <a:xfrm>
-            <a:off x="8183880" y="4800600"/>
-            <a:ext cx="3108960" cy="457200"/>
+            <a:endParaRPr lang="en-US" sz="1680" dirty="0"/>
+          </a:p>
+        </p:txBody>
+      </p:sp>
+      <p:sp>
+        <p:nvSpPr>
+          <p:cNvPr id="36" name="Text 34"/>
+          <p:cNvSpPr/>
+          <p:nvPr/>
+        </p:nvSpPr>
+        <p:spPr>
+          <a:xfrm>
+            <a:off x="8183880" y="5422392"/>
+            <a:ext cx="3108960" cy="411480"/>
           </a:xfrm>
           <a:prstGeom prst="rect">
             <a:avLst/>
@@ -4473,11 +5775,11 @@
           <a:bodyPr wrap="square" lIns="0" tIns="0" rIns="0" bIns="0" rtlCol="0" anchor="ctr"/>
           <a:lstStyle/>
           <a:p>
-            <a:pPr indent="0" marL="0">
+            <a:pPr marL="0" indent="0">
               <a:buNone/>
             </a:pPr>
             <a:r>
-              <a:rPr lang="en-US" sz="1400" dirty="0">
+              <a:rPr lang="en-US" sz="1680" dirty="0">
                 <a:solidFill>
                   <a:srgbClr val="E5E9F0"/>
                 </a:solidFill>
@@ -4487,7 +5789,7 @@
               </a:rPr>
               <a:t>Take action via MCP</a:t>
             </a:r>
-            <a:endParaRPr lang="en-US" sz="1400" dirty="0"/>
+            <a:endParaRPr lang="en-US" sz="1680" dirty="0"/>
           </a:p>
         </p:txBody>
       </p:sp>
@@ -4507,6 +5809,7 @@
         <a:solidFill>
           <a:srgbClr val="0A0F1C"/>
         </a:solidFill>
+        <a:effectLst/>
       </p:bgPr>
     </p:bg>
     <p:spTree>
@@ -4547,6 +5850,13 @@
             <a:prstDash val="solid"/>
           </a:ln>
         </p:spPr>
+        <p:txBody>
+          <a:bodyPr/>
+          <a:lstStyle/>
+          <a:p>
+            <a:endParaRPr lang="en-CA"/>
+          </a:p>
+        </p:txBody>
       </p:sp>
       <p:sp>
         <p:nvSpPr>
@@ -4572,6 +5882,13 @@
             <a:prstDash val="solid"/>
           </a:ln>
         </p:spPr>
+        <p:txBody>
+          <a:bodyPr/>
+          <a:lstStyle/>
+          <a:p>
+            <a:endParaRPr lang="en-CA"/>
+          </a:p>
+        </p:txBody>
       </p:sp>
       <p:sp>
         <p:nvSpPr>
@@ -4597,6 +5914,13 @@
             <a:prstDash val="solid"/>
           </a:ln>
         </p:spPr>
+        <p:txBody>
+          <a:bodyPr/>
+          <a:lstStyle/>
+          <a:p>
+            <a:endParaRPr lang="en-CA"/>
+          </a:p>
+        </p:txBody>
       </p:sp>
       <p:sp>
         <p:nvSpPr>
@@ -4619,6 +5943,13 @@
           </a:solidFill>
           <a:ln/>
         </p:spPr>
+        <p:txBody>
+          <a:bodyPr/>
+          <a:lstStyle/>
+          <a:p>
+            <a:endParaRPr lang="en-CA"/>
+          </a:p>
+        </p:txBody>
       </p:sp>
       <p:sp>
         <p:nvSpPr>
@@ -4641,6 +5972,13 @@
           </a:solidFill>
           <a:ln/>
         </p:spPr>
+        <p:txBody>
+          <a:bodyPr/>
+          <a:lstStyle/>
+          <a:p>
+            <a:endParaRPr lang="en-CA"/>
+          </a:p>
+        </p:txBody>
       </p:sp>
       <p:sp>
         <p:nvSpPr>
@@ -4663,6 +6001,13 @@
           </a:solidFill>
           <a:ln/>
         </p:spPr>
+        <p:txBody>
+          <a:bodyPr/>
+          <a:lstStyle/>
+          <a:p>
+            <a:endParaRPr lang="en-CA"/>
+          </a:p>
+        </p:txBody>
       </p:sp>
       <p:sp>
         <p:nvSpPr>
@@ -4685,6 +6030,13 @@
           </a:solidFill>
           <a:ln/>
         </p:spPr>
+        <p:txBody>
+          <a:bodyPr/>
+          <a:lstStyle/>
+          <a:p>
+            <a:endParaRPr lang="en-CA"/>
+          </a:p>
+        </p:txBody>
       </p:sp>
       <p:sp>
         <p:nvSpPr>
@@ -4710,6 +6062,13 @@
             <a:prstDash val="solid"/>
           </a:ln>
         </p:spPr>
+        <p:txBody>
+          <a:bodyPr/>
+          <a:lstStyle/>
+          <a:p>
+            <a:endParaRPr lang="en-CA"/>
+          </a:p>
+        </p:txBody>
       </p:sp>
       <p:sp>
         <p:nvSpPr>
@@ -4735,6 +6094,13 @@
             <a:prstDash val="solid"/>
           </a:ln>
         </p:spPr>
+        <p:txBody>
+          <a:bodyPr/>
+          <a:lstStyle/>
+          <a:p>
+            <a:endParaRPr lang="en-CA"/>
+          </a:p>
+        </p:txBody>
       </p:sp>
       <p:sp>
         <p:nvSpPr>
@@ -4760,6 +6126,13 @@
             <a:prstDash val="solid"/>
           </a:ln>
         </p:spPr>
+        <p:txBody>
+          <a:bodyPr/>
+          <a:lstStyle/>
+          <a:p>
+            <a:endParaRPr lang="en-CA"/>
+          </a:p>
+        </p:txBody>
       </p:sp>
       <p:sp>
         <p:nvSpPr>
@@ -4782,6 +6155,13 @@
           </a:solidFill>
           <a:ln/>
         </p:spPr>
+        <p:txBody>
+          <a:bodyPr/>
+          <a:lstStyle/>
+          <a:p>
+            <a:endParaRPr lang="en-CA"/>
+          </a:p>
+        </p:txBody>
       </p:sp>
       <p:sp>
         <p:nvSpPr>
@@ -4804,6 +6184,13 @@
           </a:solidFill>
           <a:ln/>
         </p:spPr>
+        <p:txBody>
+          <a:bodyPr/>
+          <a:lstStyle/>
+          <a:p>
+            <a:endParaRPr lang="en-CA"/>
+          </a:p>
+        </p:txBody>
       </p:sp>
       <p:sp>
         <p:nvSpPr>
@@ -4826,6 +6213,13 @@
           </a:solidFill>
           <a:ln/>
         </p:spPr>
+        <p:txBody>
+          <a:bodyPr/>
+          <a:lstStyle/>
+          <a:p>
+            <a:endParaRPr lang="en-CA"/>
+          </a:p>
+        </p:txBody>
       </p:sp>
       <p:sp>
         <p:nvSpPr>
@@ -4848,6 +6242,13 @@
           </a:solidFill>
           <a:ln/>
         </p:spPr>
+        <p:txBody>
+          <a:bodyPr/>
+          <a:lstStyle/>
+          <a:p>
+            <a:endParaRPr lang="en-CA"/>
+          </a:p>
+        </p:txBody>
       </p:sp>
       <p:sp>
         <p:nvSpPr>
@@ -4870,11 +6271,11 @@
           <a:bodyPr wrap="square" lIns="0" tIns="0" rIns="0" bIns="0" rtlCol="0" anchor="ctr"/>
           <a:lstStyle/>
           <a:p>
-            <a:pPr indent="0" marL="0">
+            <a:pPr marL="0" indent="0">
               <a:buNone/>
             </a:pPr>
             <a:r>
-              <a:rPr lang="en-US" sz="900" dirty="0">
+              <a:rPr lang="en-US" sz="1080" dirty="0">
                 <a:solidFill>
                   <a:srgbClr val="5B6478"/>
                 </a:solidFill>
@@ -4884,7 +6285,7 @@
               </a:rPr>
               <a:t>PromptToApps</a:t>
             </a:r>
-            <a:endParaRPr lang="en-US" sz="900" dirty="0"/>
+            <a:endParaRPr lang="en-US" sz="1080" dirty="0"/>
           </a:p>
         </p:txBody>
       </p:sp>
@@ -4909,11 +6310,11 @@
           <a:bodyPr wrap="square" lIns="0" tIns="0" rIns="0" bIns="0" rtlCol="0" anchor="ctr"/>
           <a:lstStyle/>
           <a:p>
-            <a:pPr algn="r" indent="0" marL="0">
+            <a:pPr marL="0" indent="0" algn="r">
               <a:buNone/>
             </a:pPr>
             <a:r>
-              <a:rPr lang="en-US" sz="900" dirty="0">
+              <a:rPr lang="en-US" sz="1080" dirty="0">
                 <a:solidFill>
                   <a:srgbClr val="5B6478"/>
                 </a:solidFill>
@@ -4921,9 +6322,9 @@
                 <a:ea typeface="Courier New" pitchFamily="34" charset="-122"/>
                 <a:cs typeface="Courier New" pitchFamily="34" charset="-120"/>
               </a:rPr>
-              <a:t>4 / 9</a:t>
-            </a:r>
-            <a:endParaRPr lang="en-US" sz="900" dirty="0"/>
+              <a:t>4 / 10</a:t>
+            </a:r>
+            <a:endParaRPr lang="en-US" sz="1080" dirty="0"/>
           </a:p>
         </p:txBody>
       </p:sp>
@@ -4948,11 +6349,11 @@
           <a:bodyPr wrap="square" lIns="0" tIns="0" rIns="0" bIns="0" rtlCol="0" anchor="ctr"/>
           <a:lstStyle/>
           <a:p>
-            <a:pPr indent="0" marL="0">
+            <a:pPr marL="0" indent="0">
               <a:buNone/>
             </a:pPr>
             <a:r>
-              <a:rPr lang="en-US" sz="1200" spc="200" kern="0" dirty="0">
+              <a:rPr lang="en-US" sz="1440" kern="0" spc="200" dirty="0">
                 <a:solidFill>
                   <a:srgbClr val="5FE0C5"/>
                 </a:solidFill>
@@ -4962,7 +6363,7 @@
               </a:rPr>
               <a:t>TECH STACK</a:t>
             </a:r>
-            <a:endParaRPr lang="en-US" sz="1200" dirty="0"/>
+            <a:endParaRPr lang="en-US" sz="1440" dirty="0"/>
           </a:p>
         </p:txBody>
       </p:sp>
@@ -4987,11 +6388,11 @@
           <a:bodyPr wrap="square" lIns="0" tIns="0" rIns="0" bIns="0" rtlCol="0" anchor="ctr"/>
           <a:lstStyle/>
           <a:p>
-            <a:pPr algn="l" indent="0" marL="0">
+            <a:pPr marL="0" indent="0" algn="l">
               <a:buNone/>
             </a:pPr>
             <a:r>
-              <a:rPr lang="en-US" sz="2800" b="1" dirty="0">
+              <a:rPr lang="en-US" sz="3360" b="1" dirty="0">
                 <a:solidFill>
                   <a:srgbClr val="F2A93B"/>
                 </a:solidFill>
@@ -5001,7 +6402,7 @@
               </a:rPr>
               <a:t>What's under the hood</a:t>
             </a:r>
-            <a:endParaRPr lang="en-US" sz="2800" dirty="0"/>
+            <a:endParaRPr lang="en-US" sz="3360" dirty="0"/>
           </a:p>
         </p:txBody>
       </p:sp>
@@ -5031,13 +6432,20 @@
             <a:prstDash val="solid"/>
           </a:ln>
           <a:effectLst>
-            <a:outerShdw sx="100000" sy="100000" kx="0" ky="0" algn="bl" rotWithShape="0" blurRad="76200" dist="38100" dir="2700000">
+            <a:outerShdw blurRad="76200" dist="38100" dir="2700000" algn="bl" rotWithShape="0">
               <a:srgbClr val="000000">
                 <a:alpha val="20000"/>
               </a:srgbClr>
             </a:outerShdw>
           </a:effectLst>
         </p:spPr>
+        <p:txBody>
+          <a:bodyPr/>
+          <a:lstStyle/>
+          <a:p>
+            <a:endParaRPr lang="en-CA"/>
+          </a:p>
+        </p:txBody>
       </p:sp>
       <p:sp>
         <p:nvSpPr>
@@ -5060,11 +6468,11 @@
           <a:bodyPr wrap="square" lIns="0" tIns="0" rIns="0" bIns="0" rtlCol="0" anchor="t"/>
           <a:lstStyle/>
           <a:p>
-            <a:pPr indent="0" marL="0">
+            <a:pPr marL="0" indent="0">
               <a:buNone/>
             </a:pPr>
             <a:r>
-              <a:rPr lang="en-US" sz="1400" b="1" dirty="0">
+              <a:rPr lang="en-US" sz="1680" b="1" dirty="0">
                 <a:solidFill>
                   <a:srgbClr val="F2A93B"/>
                 </a:solidFill>
@@ -5074,7 +6482,7 @@
               </a:rPr>
               <a:t>Spring Boot 4.1</a:t>
             </a:r>
-            <a:endParaRPr lang="en-US" sz="1400" dirty="0"/>
+            <a:endParaRPr lang="en-US" sz="1680" dirty="0"/>
           </a:p>
         </p:txBody>
       </p:sp>
@@ -5099,11 +6507,11 @@
           <a:bodyPr wrap="square" lIns="0" tIns="0" rIns="0" bIns="0" rtlCol="0" anchor="t"/>
           <a:lstStyle/>
           <a:p>
-            <a:pPr indent="0" marL="0">
+            <a:pPr marL="0" indent="0">
               <a:buNone/>
             </a:pPr>
             <a:r>
-              <a:rPr lang="en-US" sz="1150" dirty="0">
+              <a:rPr lang="en-US" sz="1380" dirty="0">
                 <a:solidFill>
                   <a:srgbClr val="B8C0D0"/>
                 </a:solidFill>
@@ -5113,7 +6521,7 @@
               </a:rPr>
               <a:t>Application framework</a:t>
             </a:r>
-            <a:endParaRPr lang="en-US" sz="1150" dirty="0"/>
+            <a:endParaRPr lang="en-US" sz="1380" dirty="0"/>
           </a:p>
         </p:txBody>
       </p:sp>
@@ -5143,13 +6551,20 @@
             <a:prstDash val="solid"/>
           </a:ln>
           <a:effectLst>
-            <a:outerShdw sx="100000" sy="100000" kx="0" ky="0" algn="bl" rotWithShape="0" blurRad="76200" dist="38100" dir="2700000">
+            <a:outerShdw blurRad="76200" dist="38100" dir="2700000" algn="bl" rotWithShape="0">
               <a:srgbClr val="000000">
                 <a:alpha val="20000"/>
               </a:srgbClr>
             </a:outerShdw>
           </a:effectLst>
         </p:spPr>
+        <p:txBody>
+          <a:bodyPr/>
+          <a:lstStyle/>
+          <a:p>
+            <a:endParaRPr lang="en-CA"/>
+          </a:p>
+        </p:txBody>
       </p:sp>
       <p:sp>
         <p:nvSpPr>
@@ -5172,11 +6587,11 @@
           <a:bodyPr wrap="square" lIns="0" tIns="0" rIns="0" bIns="0" rtlCol="0" anchor="t"/>
           <a:lstStyle/>
           <a:p>
-            <a:pPr indent="0" marL="0">
+            <a:pPr marL="0" indent="0">
               <a:buNone/>
             </a:pPr>
             <a:r>
-              <a:rPr lang="en-US" sz="1400" b="1" dirty="0">
+              <a:rPr lang="en-US" sz="1680" b="1" dirty="0">
                 <a:solidFill>
                   <a:srgbClr val="5FE0C5"/>
                 </a:solidFill>
@@ -5186,7 +6601,7 @@
               </a:rPr>
               <a:t>Spring AI 2.0</a:t>
             </a:r>
-            <a:endParaRPr lang="en-US" sz="1400" dirty="0"/>
+            <a:endParaRPr lang="en-US" sz="1680" dirty="0"/>
           </a:p>
         </p:txBody>
       </p:sp>
@@ -5211,11 +6626,11 @@
           <a:bodyPr wrap="square" lIns="0" tIns="0" rIns="0" bIns="0" rtlCol="0" anchor="t"/>
           <a:lstStyle/>
           <a:p>
-            <a:pPr indent="0" marL="0">
+            <a:pPr marL="0" indent="0">
               <a:buNone/>
             </a:pPr>
             <a:r>
-              <a:rPr lang="en-US" sz="1150" dirty="0">
+              <a:rPr lang="en-US" sz="1380" dirty="0">
                 <a:solidFill>
                   <a:srgbClr val="B8C0D0"/>
                 </a:solidFill>
@@ -5225,7 +6640,7 @@
               </a:rPr>
               <a:t>LLM integration layer</a:t>
             </a:r>
-            <a:endParaRPr lang="en-US" sz="1150" dirty="0"/>
+            <a:endParaRPr lang="en-US" sz="1380" dirty="0"/>
           </a:p>
         </p:txBody>
       </p:sp>
@@ -5255,13 +6670,20 @@
             <a:prstDash val="solid"/>
           </a:ln>
           <a:effectLst>
-            <a:outerShdw sx="100000" sy="100000" kx="0" ky="0" algn="bl" rotWithShape="0" blurRad="76200" dist="38100" dir="2700000">
+            <a:outerShdw blurRad="76200" dist="38100" dir="2700000" algn="bl" rotWithShape="0">
               <a:srgbClr val="000000">
                 <a:alpha val="20000"/>
               </a:srgbClr>
             </a:outerShdw>
           </a:effectLst>
         </p:spPr>
+        <p:txBody>
+          <a:bodyPr/>
+          <a:lstStyle/>
+          <a:p>
+            <a:endParaRPr lang="en-CA"/>
+          </a:p>
+        </p:txBody>
       </p:sp>
       <p:sp>
         <p:nvSpPr>
@@ -5284,11 +6706,11 @@
           <a:bodyPr wrap="square" lIns="0" tIns="0" rIns="0" bIns="0" rtlCol="0" anchor="t"/>
           <a:lstStyle/>
           <a:p>
-            <a:pPr indent="0" marL="0">
+            <a:pPr marL="0" indent="0">
               <a:buNone/>
             </a:pPr>
             <a:r>
-              <a:rPr lang="en-US" sz="1400" b="1" dirty="0">
+              <a:rPr lang="en-US" sz="1680" b="1" dirty="0">
                 <a:solidFill>
                   <a:srgbClr val="8B98AC"/>
                 </a:solidFill>
@@ -5298,7 +6720,7 @@
               </a:rPr>
               <a:t>Java 21</a:t>
             </a:r>
-            <a:endParaRPr lang="en-US" sz="1400" dirty="0"/>
+            <a:endParaRPr lang="en-US" sz="1680" dirty="0"/>
           </a:p>
         </p:txBody>
       </p:sp>
@@ -5323,11 +6745,11 @@
           <a:bodyPr wrap="square" lIns="0" tIns="0" rIns="0" bIns="0" rtlCol="0" anchor="t"/>
           <a:lstStyle/>
           <a:p>
-            <a:pPr indent="0" marL="0">
+            <a:pPr marL="0" indent="0">
               <a:buNone/>
             </a:pPr>
             <a:r>
-              <a:rPr lang="en-US" sz="1150" dirty="0">
+              <a:rPr lang="en-US" sz="1380" dirty="0">
                 <a:solidFill>
                   <a:srgbClr val="B8C0D0"/>
                 </a:solidFill>
@@ -5337,7 +6759,7 @@
               </a:rPr>
               <a:t>Language + runtime</a:t>
             </a:r>
-            <a:endParaRPr lang="en-US" sz="1150" dirty="0"/>
+            <a:endParaRPr lang="en-US" sz="1380" dirty="0"/>
           </a:p>
         </p:txBody>
       </p:sp>
@@ -5367,13 +6789,20 @@
             <a:prstDash val="solid"/>
           </a:ln>
           <a:effectLst>
-            <a:outerShdw sx="100000" sy="100000" kx="0" ky="0" algn="bl" rotWithShape="0" blurRad="76200" dist="38100" dir="2700000">
+            <a:outerShdw blurRad="76200" dist="38100" dir="2700000" algn="bl" rotWithShape="0">
               <a:srgbClr val="000000">
                 <a:alpha val="20000"/>
               </a:srgbClr>
             </a:outerShdw>
           </a:effectLst>
         </p:spPr>
+        <p:txBody>
+          <a:bodyPr/>
+          <a:lstStyle/>
+          <a:p>
+            <a:endParaRPr lang="en-CA"/>
+          </a:p>
+        </p:txBody>
       </p:sp>
       <p:sp>
         <p:nvSpPr>
@@ -5396,11 +6825,11 @@
           <a:bodyPr wrap="square" lIns="0" tIns="0" rIns="0" bIns="0" rtlCol="0" anchor="t"/>
           <a:lstStyle/>
           <a:p>
-            <a:pPr indent="0" marL="0">
+            <a:pPr marL="0" indent="0">
               <a:buNone/>
             </a:pPr>
             <a:r>
-              <a:rPr lang="en-US" sz="1400" b="1" dirty="0">
+              <a:rPr lang="en-US" sz="1680" b="1" dirty="0">
                 <a:solidFill>
                   <a:srgbClr val="F2A93B"/>
                 </a:solidFill>
@@ -5410,7 +6839,7 @@
               </a:rPr>
               <a:t>Ollama</a:t>
             </a:r>
-            <a:endParaRPr lang="en-US" sz="1400" dirty="0"/>
+            <a:endParaRPr lang="en-US" sz="1680" dirty="0"/>
           </a:p>
         </p:txBody>
       </p:sp>
@@ -5435,11 +6864,11 @@
           <a:bodyPr wrap="square" lIns="0" tIns="0" rIns="0" bIns="0" rtlCol="0" anchor="t"/>
           <a:lstStyle/>
           <a:p>
-            <a:pPr indent="0" marL="0">
+            <a:pPr marL="0" indent="0">
               <a:buNone/>
             </a:pPr>
             <a:r>
-              <a:rPr lang="en-US" sz="1150" dirty="0">
+              <a:rPr lang="en-US" sz="1380" dirty="0">
                 <a:solidFill>
                   <a:srgbClr val="B8C0D0"/>
                 </a:solidFill>
@@ -5449,7 +6878,7 @@
               </a:rPr>
               <a:t>Local model runtime</a:t>
             </a:r>
-            <a:endParaRPr lang="en-US" sz="1150" dirty="0"/>
+            <a:endParaRPr lang="en-US" sz="1380" dirty="0"/>
           </a:p>
         </p:txBody>
       </p:sp>
@@ -5479,13 +6908,20 @@
             <a:prstDash val="solid"/>
           </a:ln>
           <a:effectLst>
-            <a:outerShdw sx="100000" sy="100000" kx="0" ky="0" algn="bl" rotWithShape="0" blurRad="76200" dist="38100" dir="2700000">
+            <a:outerShdw blurRad="76200" dist="38100" dir="2700000" algn="bl" rotWithShape="0">
               <a:srgbClr val="000000">
                 <a:alpha val="20000"/>
               </a:srgbClr>
             </a:outerShdw>
           </a:effectLst>
         </p:spPr>
+        <p:txBody>
+          <a:bodyPr/>
+          <a:lstStyle/>
+          <a:p>
+            <a:endParaRPr lang="en-CA"/>
+          </a:p>
+        </p:txBody>
       </p:sp>
       <p:sp>
         <p:nvSpPr>
@@ -5508,11 +6944,11 @@
           <a:bodyPr wrap="square" lIns="0" tIns="0" rIns="0" bIns="0" rtlCol="0" anchor="t"/>
           <a:lstStyle/>
           <a:p>
-            <a:pPr indent="0" marL="0">
+            <a:pPr marL="0" indent="0">
               <a:buNone/>
             </a:pPr>
             <a:r>
-              <a:rPr lang="en-US" sz="1400" b="1" dirty="0">
+              <a:rPr lang="en-US" sz="1680" b="1" dirty="0">
                 <a:solidFill>
                   <a:srgbClr val="5FE0C5"/>
                 </a:solidFill>
@@ -5522,7 +6958,7 @@
               </a:rPr>
               <a:t>llama3.2</a:t>
             </a:r>
-            <a:endParaRPr lang="en-US" sz="1400" dirty="0"/>
+            <a:endParaRPr lang="en-US" sz="1680" dirty="0"/>
           </a:p>
         </p:txBody>
       </p:sp>
@@ -5547,11 +6983,11 @@
           <a:bodyPr wrap="square" lIns="0" tIns="0" rIns="0" bIns="0" rtlCol="0" anchor="t"/>
           <a:lstStyle/>
           <a:p>
-            <a:pPr indent="0" marL="0">
+            <a:pPr marL="0" indent="0">
               <a:buNone/>
             </a:pPr>
             <a:r>
-              <a:rPr lang="en-US" sz="1150" dirty="0">
+              <a:rPr lang="en-US" sz="1380" dirty="0">
                 <a:solidFill>
                   <a:srgbClr val="B8C0D0"/>
                 </a:solidFill>
@@ -5561,7 +6997,7 @@
               </a:rPr>
               <a:t>Chat / generation model</a:t>
             </a:r>
-            <a:endParaRPr lang="en-US" sz="1150" dirty="0"/>
+            <a:endParaRPr lang="en-US" sz="1380" dirty="0"/>
           </a:p>
         </p:txBody>
       </p:sp>
@@ -5591,13 +7027,20 @@
             <a:prstDash val="solid"/>
           </a:ln>
           <a:effectLst>
-            <a:outerShdw sx="100000" sy="100000" kx="0" ky="0" algn="bl" rotWithShape="0" blurRad="76200" dist="38100" dir="2700000">
+            <a:outerShdw blurRad="76200" dist="38100" dir="2700000" algn="bl" rotWithShape="0">
               <a:srgbClr val="000000">
                 <a:alpha val="20000"/>
               </a:srgbClr>
             </a:outerShdw>
           </a:effectLst>
         </p:spPr>
+        <p:txBody>
+          <a:bodyPr/>
+          <a:lstStyle/>
+          <a:p>
+            <a:endParaRPr lang="en-CA"/>
+          </a:p>
+        </p:txBody>
       </p:sp>
       <p:sp>
         <p:nvSpPr>
@@ -5620,11 +7063,11 @@
           <a:bodyPr wrap="square" lIns="0" tIns="0" rIns="0" bIns="0" rtlCol="0" anchor="t"/>
           <a:lstStyle/>
           <a:p>
-            <a:pPr indent="0" marL="0">
+            <a:pPr marL="0" indent="0">
               <a:buNone/>
             </a:pPr>
             <a:r>
-              <a:rPr lang="en-US" sz="1400" b="1" dirty="0">
+              <a:rPr lang="en-US" sz="1680" b="1" dirty="0">
                 <a:solidFill>
                   <a:srgbClr val="8B98AC"/>
                 </a:solidFill>
@@ -5634,7 +7077,7 @@
               </a:rPr>
               <a:t>nomic-embed-text</a:t>
             </a:r>
-            <a:endParaRPr lang="en-US" sz="1400" dirty="0"/>
+            <a:endParaRPr lang="en-US" sz="1680" dirty="0"/>
           </a:p>
         </p:txBody>
       </p:sp>
@@ -5659,11 +7102,11 @@
           <a:bodyPr wrap="square" lIns="0" tIns="0" rIns="0" bIns="0" rtlCol="0" anchor="t"/>
           <a:lstStyle/>
           <a:p>
-            <a:pPr indent="0" marL="0">
+            <a:pPr marL="0" indent="0">
               <a:buNone/>
             </a:pPr>
             <a:r>
-              <a:rPr lang="en-US" sz="1150" dirty="0">
+              <a:rPr lang="en-US" sz="1380" dirty="0">
                 <a:solidFill>
                   <a:srgbClr val="B8C0D0"/>
                 </a:solidFill>
@@ -5673,7 +7116,7 @@
               </a:rPr>
               <a:t>Embedding model</a:t>
             </a:r>
-            <a:endParaRPr lang="en-US" sz="1150" dirty="0"/>
+            <a:endParaRPr lang="en-US" sz="1380" dirty="0"/>
           </a:p>
         </p:txBody>
       </p:sp>
@@ -5703,13 +7146,20 @@
             <a:prstDash val="solid"/>
           </a:ln>
           <a:effectLst>
-            <a:outerShdw sx="100000" sy="100000" kx="0" ky="0" algn="bl" rotWithShape="0" blurRad="76200" dist="38100" dir="2700000">
+            <a:outerShdw blurRad="76200" dist="38100" dir="2700000" algn="bl" rotWithShape="0">
               <a:srgbClr val="000000">
                 <a:alpha val="20000"/>
               </a:srgbClr>
             </a:outerShdw>
           </a:effectLst>
         </p:spPr>
+        <p:txBody>
+          <a:bodyPr/>
+          <a:lstStyle/>
+          <a:p>
+            <a:endParaRPr lang="en-CA"/>
+          </a:p>
+        </p:txBody>
       </p:sp>
       <p:sp>
         <p:nvSpPr>
@@ -5732,11 +7182,11 @@
           <a:bodyPr wrap="square" lIns="0" tIns="0" rIns="0" bIns="0" rtlCol="0" anchor="t"/>
           <a:lstStyle/>
           <a:p>
-            <a:pPr indent="0" marL="0">
+            <a:pPr marL="0" indent="0">
               <a:buNone/>
             </a:pPr>
             <a:r>
-              <a:rPr lang="en-US" sz="1400" b="1" dirty="0">
+              <a:rPr lang="en-US" sz="1680" b="1" dirty="0">
                 <a:solidFill>
                   <a:srgbClr val="F2A93B"/>
                 </a:solidFill>
@@ -5746,7 +7196,7 @@
               </a:rPr>
               <a:t>PostgreSQL + pgvector</a:t>
             </a:r>
-            <a:endParaRPr lang="en-US" sz="1400" dirty="0"/>
+            <a:endParaRPr lang="en-US" sz="1680" dirty="0"/>
           </a:p>
         </p:txBody>
       </p:sp>
@@ -5771,11 +7221,11 @@
           <a:bodyPr wrap="square" lIns="0" tIns="0" rIns="0" bIns="0" rtlCol="0" anchor="t"/>
           <a:lstStyle/>
           <a:p>
-            <a:pPr indent="0" marL="0">
+            <a:pPr marL="0" indent="0">
               <a:buNone/>
             </a:pPr>
             <a:r>
-              <a:rPr lang="en-US" sz="1150" dirty="0">
+              <a:rPr lang="en-US" sz="1380" dirty="0">
                 <a:solidFill>
                   <a:srgbClr val="B8C0D0"/>
                 </a:solidFill>
@@ -5785,7 +7235,7 @@
               </a:rPr>
               <a:t>Persistent vector store</a:t>
             </a:r>
-            <a:endParaRPr lang="en-US" sz="1150" dirty="0"/>
+            <a:endParaRPr lang="en-US" sz="1380" dirty="0"/>
           </a:p>
         </p:txBody>
       </p:sp>
@@ -5815,13 +7265,20 @@
             <a:prstDash val="solid"/>
           </a:ln>
           <a:effectLst>
-            <a:outerShdw sx="100000" sy="100000" kx="0" ky="0" algn="bl" rotWithShape="0" blurRad="76200" dist="38100" dir="2700000">
+            <a:outerShdw blurRad="76200" dist="38100" dir="2700000" algn="bl" rotWithShape="0">
               <a:srgbClr val="000000">
                 <a:alpha val="20000"/>
               </a:srgbClr>
             </a:outerShdw>
           </a:effectLst>
         </p:spPr>
+        <p:txBody>
+          <a:bodyPr/>
+          <a:lstStyle/>
+          <a:p>
+            <a:endParaRPr lang="en-CA"/>
+          </a:p>
+        </p:txBody>
       </p:sp>
       <p:sp>
         <p:nvSpPr>
@@ -5844,11 +7301,11 @@
           <a:bodyPr wrap="square" lIns="0" tIns="0" rIns="0" bIns="0" rtlCol="0" anchor="t"/>
           <a:lstStyle/>
           <a:p>
-            <a:pPr indent="0" marL="0">
+            <a:pPr marL="0" indent="0">
               <a:buNone/>
             </a:pPr>
             <a:r>
-              <a:rPr lang="en-US" sz="1400" b="1" dirty="0">
+              <a:rPr lang="en-US" sz="1680" b="1" dirty="0">
                 <a:solidFill>
                   <a:srgbClr val="5FE0C5"/>
                 </a:solidFill>
@@ -5858,7 +7315,7 @@
               </a:rPr>
               <a:t>Neo4j</a:t>
             </a:r>
-            <a:endParaRPr lang="en-US" sz="1400" dirty="0"/>
+            <a:endParaRPr lang="en-US" sz="1680" dirty="0"/>
           </a:p>
         </p:txBody>
       </p:sp>
@@ -5883,11 +7340,11 @@
           <a:bodyPr wrap="square" lIns="0" tIns="0" rIns="0" bIns="0" rtlCol="0" anchor="t"/>
           <a:lstStyle/>
           <a:p>
-            <a:pPr indent="0" marL="0">
+            <a:pPr marL="0" indent="0">
               <a:buNone/>
             </a:pPr>
             <a:r>
-              <a:rPr lang="en-US" sz="1150" dirty="0">
+              <a:rPr lang="en-US" sz="1380" dirty="0">
                 <a:solidFill>
                   <a:srgbClr val="B8C0D0"/>
                 </a:solidFill>
@@ -5897,7 +7354,7 @@
               </a:rPr>
               <a:t>Graph-based vector store</a:t>
             </a:r>
-            <a:endParaRPr lang="en-US" sz="1150" dirty="0"/>
+            <a:endParaRPr lang="en-US" sz="1380" dirty="0"/>
           </a:p>
         </p:txBody>
       </p:sp>
@@ -5917,6 +7374,7 @@
         <a:solidFill>
           <a:srgbClr val="0A0F1C"/>
         </a:solidFill>
+        <a:effectLst/>
       </p:bgPr>
     </p:bg>
     <p:spTree>
@@ -5957,6 +7415,13 @@
             <a:prstDash val="solid"/>
           </a:ln>
         </p:spPr>
+        <p:txBody>
+          <a:bodyPr/>
+          <a:lstStyle/>
+          <a:p>
+            <a:endParaRPr lang="en-CA"/>
+          </a:p>
+        </p:txBody>
       </p:sp>
       <p:sp>
         <p:nvSpPr>
@@ -5982,6 +7447,13 @@
             <a:prstDash val="solid"/>
           </a:ln>
         </p:spPr>
+        <p:txBody>
+          <a:bodyPr/>
+          <a:lstStyle/>
+          <a:p>
+            <a:endParaRPr lang="en-CA"/>
+          </a:p>
+        </p:txBody>
       </p:sp>
       <p:sp>
         <p:nvSpPr>
@@ -6007,6 +7479,13 @@
             <a:prstDash val="solid"/>
           </a:ln>
         </p:spPr>
+        <p:txBody>
+          <a:bodyPr/>
+          <a:lstStyle/>
+          <a:p>
+            <a:endParaRPr lang="en-CA"/>
+          </a:p>
+        </p:txBody>
       </p:sp>
       <p:sp>
         <p:nvSpPr>
@@ -6029,6 +7508,13 @@
           </a:solidFill>
           <a:ln/>
         </p:spPr>
+        <p:txBody>
+          <a:bodyPr/>
+          <a:lstStyle/>
+          <a:p>
+            <a:endParaRPr lang="en-CA"/>
+          </a:p>
+        </p:txBody>
       </p:sp>
       <p:sp>
         <p:nvSpPr>
@@ -6051,6 +7537,13 @@
           </a:solidFill>
           <a:ln/>
         </p:spPr>
+        <p:txBody>
+          <a:bodyPr/>
+          <a:lstStyle/>
+          <a:p>
+            <a:endParaRPr lang="en-CA"/>
+          </a:p>
+        </p:txBody>
       </p:sp>
       <p:sp>
         <p:nvSpPr>
@@ -6073,6 +7566,13 @@
           </a:solidFill>
           <a:ln/>
         </p:spPr>
+        <p:txBody>
+          <a:bodyPr/>
+          <a:lstStyle/>
+          <a:p>
+            <a:endParaRPr lang="en-CA"/>
+          </a:p>
+        </p:txBody>
       </p:sp>
       <p:sp>
         <p:nvSpPr>
@@ -6095,6 +7595,13 @@
           </a:solidFill>
           <a:ln/>
         </p:spPr>
+        <p:txBody>
+          <a:bodyPr/>
+          <a:lstStyle/>
+          <a:p>
+            <a:endParaRPr lang="en-CA"/>
+          </a:p>
+        </p:txBody>
       </p:sp>
       <p:sp>
         <p:nvSpPr>
@@ -6120,6 +7627,13 @@
             <a:prstDash val="solid"/>
           </a:ln>
         </p:spPr>
+        <p:txBody>
+          <a:bodyPr/>
+          <a:lstStyle/>
+          <a:p>
+            <a:endParaRPr lang="en-CA"/>
+          </a:p>
+        </p:txBody>
       </p:sp>
       <p:sp>
         <p:nvSpPr>
@@ -6145,6 +7659,13 @@
             <a:prstDash val="solid"/>
           </a:ln>
         </p:spPr>
+        <p:txBody>
+          <a:bodyPr/>
+          <a:lstStyle/>
+          <a:p>
+            <a:endParaRPr lang="en-CA"/>
+          </a:p>
+        </p:txBody>
       </p:sp>
       <p:sp>
         <p:nvSpPr>
@@ -6170,6 +7691,13 @@
             <a:prstDash val="solid"/>
           </a:ln>
         </p:spPr>
+        <p:txBody>
+          <a:bodyPr/>
+          <a:lstStyle/>
+          <a:p>
+            <a:endParaRPr lang="en-CA"/>
+          </a:p>
+        </p:txBody>
       </p:sp>
       <p:sp>
         <p:nvSpPr>
@@ -6192,6 +7720,13 @@
           </a:solidFill>
           <a:ln/>
         </p:spPr>
+        <p:txBody>
+          <a:bodyPr/>
+          <a:lstStyle/>
+          <a:p>
+            <a:endParaRPr lang="en-CA"/>
+          </a:p>
+        </p:txBody>
       </p:sp>
       <p:sp>
         <p:nvSpPr>
@@ -6214,6 +7749,13 @@
           </a:solidFill>
           <a:ln/>
         </p:spPr>
+        <p:txBody>
+          <a:bodyPr/>
+          <a:lstStyle/>
+          <a:p>
+            <a:endParaRPr lang="en-CA"/>
+          </a:p>
+        </p:txBody>
       </p:sp>
       <p:sp>
         <p:nvSpPr>
@@ -6236,6 +7778,13 @@
           </a:solidFill>
           <a:ln/>
         </p:spPr>
+        <p:txBody>
+          <a:bodyPr/>
+          <a:lstStyle/>
+          <a:p>
+            <a:endParaRPr lang="en-CA"/>
+          </a:p>
+        </p:txBody>
       </p:sp>
       <p:sp>
         <p:nvSpPr>
@@ -6258,6 +7807,13 @@
           </a:solidFill>
           <a:ln/>
         </p:spPr>
+        <p:txBody>
+          <a:bodyPr/>
+          <a:lstStyle/>
+          <a:p>
+            <a:endParaRPr lang="en-CA"/>
+          </a:p>
+        </p:txBody>
       </p:sp>
       <p:sp>
         <p:nvSpPr>
@@ -6280,11 +7836,11 @@
           <a:bodyPr wrap="square" lIns="0" tIns="0" rIns="0" bIns="0" rtlCol="0" anchor="ctr"/>
           <a:lstStyle/>
           <a:p>
-            <a:pPr indent="0" marL="0">
+            <a:pPr marL="0" indent="0">
               <a:buNone/>
             </a:pPr>
             <a:r>
-              <a:rPr lang="en-US" sz="900" dirty="0">
+              <a:rPr lang="en-US" sz="1080" dirty="0">
                 <a:solidFill>
                   <a:srgbClr val="5B6478"/>
                 </a:solidFill>
@@ -6294,7 +7850,7 @@
               </a:rPr>
               <a:t>PromptToApps</a:t>
             </a:r>
-            <a:endParaRPr lang="en-US" sz="900" dirty="0"/>
+            <a:endParaRPr lang="en-US" sz="1080" dirty="0"/>
           </a:p>
         </p:txBody>
       </p:sp>
@@ -6319,11 +7875,11 @@
           <a:bodyPr wrap="square" lIns="0" tIns="0" rIns="0" bIns="0" rtlCol="0" anchor="ctr"/>
           <a:lstStyle/>
           <a:p>
-            <a:pPr algn="r" indent="0" marL="0">
+            <a:pPr marL="0" indent="0" algn="r">
               <a:buNone/>
             </a:pPr>
             <a:r>
-              <a:rPr lang="en-US" sz="900" dirty="0">
+              <a:rPr lang="en-US" sz="1080" dirty="0">
                 <a:solidFill>
                   <a:srgbClr val="5B6478"/>
                 </a:solidFill>
@@ -6331,9 +7887,9 @@
                 <a:ea typeface="Courier New" pitchFamily="34" charset="-122"/>
                 <a:cs typeface="Courier New" pitchFamily="34" charset="-120"/>
               </a:rPr>
-              <a:t>5 / 9</a:t>
-            </a:r>
-            <a:endParaRPr lang="en-US" sz="900" dirty="0"/>
+              <a:t>5 / 10</a:t>
+            </a:r>
+            <a:endParaRPr lang="en-US" sz="1080" dirty="0"/>
           </a:p>
         </p:txBody>
       </p:sp>
@@ -6358,11 +7914,11 @@
           <a:bodyPr wrap="square" lIns="0" tIns="0" rIns="0" bIns="0" rtlCol="0" anchor="ctr"/>
           <a:lstStyle/>
           <a:p>
-            <a:pPr indent="0" marL="0">
+            <a:pPr marL="0" indent="0">
               <a:buNone/>
             </a:pPr>
             <a:r>
-              <a:rPr lang="en-US" sz="1200" spc="200" kern="0" dirty="0">
+              <a:rPr lang="en-US" sz="1440" kern="0" spc="200" dirty="0">
                 <a:solidFill>
                   <a:srgbClr val="5FE0C5"/>
                 </a:solidFill>
@@ -6372,7 +7928,7 @@
               </a:rPr>
               <a:t>THE JOURNEY</a:t>
             </a:r>
-            <a:endParaRPr lang="en-US" sz="1200" dirty="0"/>
+            <a:endParaRPr lang="en-US" sz="1440" dirty="0"/>
           </a:p>
         </p:txBody>
       </p:sp>
@@ -6397,11 +7953,11 @@
           <a:bodyPr wrap="square" lIns="0" tIns="0" rIns="0" bIns="0" rtlCol="0" anchor="ctr"/>
           <a:lstStyle/>
           <a:p>
-            <a:pPr algn="l" indent="0" marL="0">
+            <a:pPr marL="0" indent="0" algn="l">
               <a:buNone/>
             </a:pPr>
             <a:r>
-              <a:rPr lang="en-US" sz="2800" b="1" dirty="0">
+              <a:rPr lang="en-US" sz="3360" b="1" dirty="0">
                 <a:solidFill>
                   <a:srgbClr val="F2A93B"/>
                 </a:solidFill>
@@ -6411,7 +7967,7 @@
               </a:rPr>
               <a:t>Chapters 1 → 11 at a glance</a:t>
             </a:r>
-            <a:endParaRPr lang="en-US" sz="2800" dirty="0"/>
+            <a:endParaRPr lang="en-US" sz="3360" dirty="0"/>
           </a:p>
         </p:txBody>
       </p:sp>
@@ -6441,13 +7997,20 @@
             <a:prstDash val="solid"/>
           </a:ln>
           <a:effectLst>
-            <a:outerShdw sx="100000" sy="100000" kx="0" ky="0" algn="bl" rotWithShape="0" blurRad="63500" dist="38100" dir="2700000">
+            <a:outerShdw blurRad="63500" dist="38100" dir="2700000" algn="bl" rotWithShape="0">
               <a:srgbClr val="000000">
                 <a:alpha val="20000"/>
               </a:srgbClr>
             </a:outerShdw>
           </a:effectLst>
         </p:spPr>
+        <p:txBody>
+          <a:bodyPr/>
+          <a:lstStyle/>
+          <a:p>
+            <a:endParaRPr lang="en-CA"/>
+          </a:p>
+        </p:txBody>
       </p:sp>
       <p:sp>
         <p:nvSpPr>
@@ -6470,11 +8033,11 @@
           <a:bodyPr wrap="square" lIns="0" tIns="0" rIns="0" bIns="0" rtlCol="0" anchor="ctr"/>
           <a:lstStyle/>
           <a:p>
-            <a:pPr algn="l" indent="0" marL="0">
+            <a:pPr marL="0" indent="0" algn="l">
               <a:buNone/>
             </a:pPr>
             <a:r>
-              <a:rPr lang="en-US" sz="1250" b="1" dirty="0">
+              <a:rPr lang="en-US" sz="1500" b="1" dirty="0">
                 <a:solidFill>
                   <a:srgbClr val="F2A93B"/>
                 </a:solidFill>
@@ -6484,11 +8047,8 @@
               </a:rPr>
               <a:t>1  </a:t>
             </a:r>
-            <a:pPr algn="l" indent="0" marL="0">
-              <a:buNone/>
-            </a:pPr>
-            <a:r>
-              <a:rPr lang="en-US" sz="1250" dirty="0">
+            <a:r>
+              <a:rPr lang="en-US" sz="1500" dirty="0">
                 <a:solidFill>
                   <a:srgbClr val="E5E9F0"/>
                 </a:solidFill>
@@ -6498,7 +8058,7 @@
               </a:rPr>
               <a:t>Hello, Spring AI!</a:t>
             </a:r>
-            <a:endParaRPr lang="en-US" sz="1250" dirty="0"/>
+            <a:endParaRPr lang="en-US" sz="1500" dirty="0"/>
           </a:p>
         </p:txBody>
       </p:sp>
@@ -6528,13 +8088,20 @@
             <a:prstDash val="solid"/>
           </a:ln>
           <a:effectLst>
-            <a:outerShdw sx="100000" sy="100000" kx="0" ky="0" algn="bl" rotWithShape="0" blurRad="63500" dist="38100" dir="2700000">
+            <a:outerShdw blurRad="63500" dist="38100" dir="2700000" algn="bl" rotWithShape="0">
               <a:srgbClr val="000000">
                 <a:alpha val="20000"/>
               </a:srgbClr>
             </a:outerShdw>
           </a:effectLst>
         </p:spPr>
+        <p:txBody>
+          <a:bodyPr/>
+          <a:lstStyle/>
+          <a:p>
+            <a:endParaRPr lang="en-CA"/>
+          </a:p>
+        </p:txBody>
       </p:sp>
       <p:sp>
         <p:nvSpPr>
@@ -6557,11 +8124,11 @@
           <a:bodyPr wrap="square" lIns="0" tIns="0" rIns="0" bIns="0" rtlCol="0" anchor="ctr"/>
           <a:lstStyle/>
           <a:p>
-            <a:pPr algn="l" indent="0" marL="0">
+            <a:pPr marL="0" indent="0" algn="l">
               <a:buNone/>
             </a:pPr>
             <a:r>
-              <a:rPr lang="en-US" sz="1250" b="1" dirty="0">
+              <a:rPr lang="en-US" sz="1500" b="1" dirty="0">
                 <a:solidFill>
                   <a:srgbClr val="F2A93B"/>
                 </a:solidFill>
@@ -6571,11 +8138,8 @@
               </a:rPr>
               <a:t>2  </a:t>
             </a:r>
-            <a:pPr algn="l" indent="0" marL="0">
-              <a:buNone/>
-            </a:pPr>
-            <a:r>
-              <a:rPr lang="en-US" sz="1250" dirty="0">
+            <a:r>
+              <a:rPr lang="en-US" sz="1500" dirty="0">
                 <a:solidFill>
                   <a:srgbClr val="E5E9F0"/>
                 </a:solidFill>
@@ -6585,7 +8149,7 @@
               </a:rPr>
               <a:t>Core Concepts</a:t>
             </a:r>
-            <a:endParaRPr lang="en-US" sz="1250" dirty="0"/>
+            <a:endParaRPr lang="en-US" sz="1500" dirty="0"/>
           </a:p>
         </p:txBody>
       </p:sp>
@@ -6615,13 +8179,20 @@
             <a:prstDash val="solid"/>
           </a:ln>
           <a:effectLst>
-            <a:outerShdw sx="100000" sy="100000" kx="0" ky="0" algn="bl" rotWithShape="0" blurRad="63500" dist="38100" dir="2700000">
+            <a:outerShdw blurRad="63500" dist="38100" dir="2700000" algn="bl" rotWithShape="0">
               <a:srgbClr val="000000">
                 <a:alpha val="20000"/>
               </a:srgbClr>
             </a:outerShdw>
           </a:effectLst>
         </p:spPr>
+        <p:txBody>
+          <a:bodyPr/>
+          <a:lstStyle/>
+          <a:p>
+            <a:endParaRPr lang="en-CA"/>
+          </a:p>
+        </p:txBody>
       </p:sp>
       <p:sp>
         <p:nvSpPr>
@@ -6644,11 +8215,11 @@
           <a:bodyPr wrap="square" lIns="0" tIns="0" rIns="0" bIns="0" rtlCol="0" anchor="ctr"/>
           <a:lstStyle/>
           <a:p>
-            <a:pPr algn="l" indent="0" marL="0">
+            <a:pPr marL="0" indent="0" algn="l">
               <a:buNone/>
             </a:pPr>
             <a:r>
-              <a:rPr lang="en-US" sz="1250" b="1" dirty="0">
+              <a:rPr lang="en-US" sz="1500" b="1" dirty="0">
                 <a:solidFill>
                   <a:srgbClr val="F2A93B"/>
                 </a:solidFill>
@@ -6658,11 +8229,8 @@
               </a:rPr>
               <a:t>3  </a:t>
             </a:r>
-            <a:pPr algn="l" indent="0" marL="0">
-              <a:buNone/>
-            </a:pPr>
-            <a:r>
-              <a:rPr lang="en-US" sz="1250" dirty="0">
+            <a:r>
+              <a:rPr lang="en-US" sz="1500" dirty="0">
                 <a:solidFill>
                   <a:srgbClr val="E5E9F0"/>
                 </a:solidFill>
@@ -6672,7 +8240,7 @@
               </a:rPr>
               <a:t>Comparing Models</a:t>
             </a:r>
-            <a:endParaRPr lang="en-US" sz="1250" dirty="0"/>
+            <a:endParaRPr lang="en-US" sz="1500" dirty="0"/>
           </a:p>
         </p:txBody>
       </p:sp>
@@ -6702,13 +8270,20 @@
             <a:prstDash val="solid"/>
           </a:ln>
           <a:effectLst>
-            <a:outerShdw sx="100000" sy="100000" kx="0" ky="0" algn="bl" rotWithShape="0" blurRad="63500" dist="38100" dir="2700000">
+            <a:outerShdw blurRad="63500" dist="38100" dir="2700000" algn="bl" rotWithShape="0">
               <a:srgbClr val="000000">
                 <a:alpha val="20000"/>
               </a:srgbClr>
             </a:outerShdw>
           </a:effectLst>
         </p:spPr>
+        <p:txBody>
+          <a:bodyPr/>
+          <a:lstStyle/>
+          <a:p>
+            <a:endParaRPr lang="en-CA"/>
+          </a:p>
+        </p:txBody>
       </p:sp>
       <p:sp>
         <p:nvSpPr>
@@ -6731,11 +8306,11 @@
           <a:bodyPr wrap="square" lIns="0" tIns="0" rIns="0" bIns="0" rtlCol="0" anchor="ctr"/>
           <a:lstStyle/>
           <a:p>
-            <a:pPr algn="l" indent="0" marL="0">
+            <a:pPr marL="0" indent="0" algn="l">
               <a:buNone/>
             </a:pPr>
             <a:r>
-              <a:rPr lang="en-US" sz="1250" b="1" dirty="0">
+              <a:rPr lang="en-US" sz="1500" b="1" dirty="0">
                 <a:solidFill>
                   <a:srgbClr val="F2A93B"/>
                 </a:solidFill>
@@ -6745,11 +8320,8 @@
               </a:rPr>
               <a:t>4  </a:t>
             </a:r>
-            <a:pPr algn="l" indent="0" marL="0">
-              <a:buNone/>
-            </a:pPr>
-            <a:r>
-              <a:rPr lang="en-US" sz="1250" dirty="0">
+            <a:r>
+              <a:rPr lang="en-US" sz="1500" dirty="0">
                 <a:solidFill>
                   <a:srgbClr val="E5E9F0"/>
                 </a:solidFill>
@@ -6759,7 +8331,7 @@
               </a:rPr>
               <a:t>Prompt Engineering</a:t>
             </a:r>
-            <a:endParaRPr lang="en-US" sz="1250" dirty="0"/>
+            <a:endParaRPr lang="en-US" sz="1500" dirty="0"/>
           </a:p>
         </p:txBody>
       </p:sp>
@@ -6789,13 +8361,20 @@
             <a:prstDash val="solid"/>
           </a:ln>
           <a:effectLst>
-            <a:outerShdw sx="100000" sy="100000" kx="0" ky="0" algn="bl" rotWithShape="0" blurRad="63500" dist="38100" dir="2700000">
+            <a:outerShdw blurRad="63500" dist="38100" dir="2700000" algn="bl" rotWithShape="0">
               <a:srgbClr val="000000">
                 <a:alpha val="20000"/>
               </a:srgbClr>
             </a:outerShdw>
           </a:effectLst>
         </p:spPr>
+        <p:txBody>
+          <a:bodyPr/>
+          <a:lstStyle/>
+          <a:p>
+            <a:endParaRPr lang="en-CA"/>
+          </a:p>
+        </p:txBody>
       </p:sp>
       <p:sp>
         <p:nvSpPr>
@@ -6818,11 +8397,11 @@
           <a:bodyPr wrap="square" lIns="0" tIns="0" rIns="0" bIns="0" rtlCol="0" anchor="ctr"/>
           <a:lstStyle/>
           <a:p>
-            <a:pPr algn="l" indent="0" marL="0">
+            <a:pPr marL="0" indent="0" algn="l">
               <a:buNone/>
             </a:pPr>
             <a:r>
-              <a:rPr lang="en-US" sz="1250" b="1" dirty="0">
+              <a:rPr lang="en-US" sz="1500" b="1" dirty="0">
                 <a:solidFill>
                   <a:srgbClr val="F2A93B"/>
                 </a:solidFill>
@@ -6832,11 +8411,8 @@
               </a:rPr>
               <a:t>5  </a:t>
             </a:r>
-            <a:pPr algn="l" indent="0" marL="0">
-              <a:buNone/>
-            </a:pPr>
-            <a:r>
-              <a:rPr lang="en-US" sz="1250" dirty="0">
+            <a:r>
+              <a:rPr lang="en-US" sz="1500" dirty="0">
                 <a:solidFill>
                   <a:srgbClr val="E5E9F0"/>
                 </a:solidFill>
@@ -6846,7 +8422,7 @@
               </a:rPr>
               <a:t>Structured Output</a:t>
             </a:r>
-            <a:endParaRPr lang="en-US" sz="1250" dirty="0"/>
+            <a:endParaRPr lang="en-US" sz="1500" dirty="0"/>
           </a:p>
         </p:txBody>
       </p:sp>
@@ -6876,13 +8452,20 @@
             <a:prstDash val="solid"/>
           </a:ln>
           <a:effectLst>
-            <a:outerShdw sx="100000" sy="100000" kx="0" ky="0" algn="bl" rotWithShape="0" blurRad="63500" dist="38100" dir="2700000">
+            <a:outerShdw blurRad="63500" dist="38100" dir="2700000" algn="bl" rotWithShape="0">
               <a:srgbClr val="000000">
                 <a:alpha val="20000"/>
               </a:srgbClr>
             </a:outerShdw>
           </a:effectLst>
         </p:spPr>
+        <p:txBody>
+          <a:bodyPr/>
+          <a:lstStyle/>
+          <a:p>
+            <a:endParaRPr lang="en-CA"/>
+          </a:p>
+        </p:txBody>
       </p:sp>
       <p:sp>
         <p:nvSpPr>
@@ -6905,11 +8488,11 @@
           <a:bodyPr wrap="square" lIns="0" tIns="0" rIns="0" bIns="0" rtlCol="0" anchor="ctr"/>
           <a:lstStyle/>
           <a:p>
-            <a:pPr algn="l" indent="0" marL="0">
+            <a:pPr marL="0" indent="0" algn="l">
               <a:buNone/>
             </a:pPr>
             <a:r>
-              <a:rPr lang="en-US" sz="1250" b="1" dirty="0">
+              <a:rPr lang="en-US" sz="1500" b="1" dirty="0">
                 <a:solidFill>
                   <a:srgbClr val="F2A93B"/>
                 </a:solidFill>
@@ -6919,11 +8502,8 @@
               </a:rPr>
               <a:t>6  </a:t>
             </a:r>
-            <a:pPr algn="l" indent="0" marL="0">
-              <a:buNone/>
-            </a:pPr>
-            <a:r>
-              <a:rPr lang="en-US" sz="1250" dirty="0">
+            <a:r>
+              <a:rPr lang="en-US" sz="1500" dirty="0">
                 <a:solidFill>
                   <a:srgbClr val="E5E9F0"/>
                 </a:solidFill>
@@ -6933,7 +8513,7 @@
               </a:rPr>
               <a:t>Chat Memory</a:t>
             </a:r>
-            <a:endParaRPr lang="en-US" sz="1250" dirty="0"/>
+            <a:endParaRPr lang="en-US" sz="1500" dirty="0"/>
           </a:p>
         </p:txBody>
       </p:sp>
@@ -6963,13 +8543,20 @@
             <a:prstDash val="solid"/>
           </a:ln>
           <a:effectLst>
-            <a:outerShdw sx="100000" sy="100000" kx="0" ky="0" algn="bl" rotWithShape="0" blurRad="63500" dist="38100" dir="2700000">
+            <a:outerShdw blurRad="63500" dist="38100" dir="2700000" algn="bl" rotWithShape="0">
               <a:srgbClr val="000000">
                 <a:alpha val="20000"/>
               </a:srgbClr>
             </a:outerShdw>
           </a:effectLst>
         </p:spPr>
+        <p:txBody>
+          <a:bodyPr/>
+          <a:lstStyle/>
+          <a:p>
+            <a:endParaRPr lang="en-CA"/>
+          </a:p>
+        </p:txBody>
       </p:sp>
       <p:sp>
         <p:nvSpPr>
@@ -6992,11 +8579,11 @@
           <a:bodyPr wrap="square" lIns="0" tIns="0" rIns="0" bIns="0" rtlCol="0" anchor="ctr"/>
           <a:lstStyle/>
           <a:p>
-            <a:pPr algn="l" indent="0" marL="0">
+            <a:pPr marL="0" indent="0" algn="l">
               <a:buNone/>
             </a:pPr>
             <a:r>
-              <a:rPr lang="en-US" sz="1250" b="1" dirty="0">
+              <a:rPr lang="en-US" sz="1500" b="1" dirty="0">
                 <a:solidFill>
                   <a:srgbClr val="F2A93B"/>
                 </a:solidFill>
@@ -7006,11 +8593,8 @@
               </a:rPr>
               <a:t>7  </a:t>
             </a:r>
-            <a:pPr algn="l" indent="0" marL="0">
-              <a:buNone/>
-            </a:pPr>
-            <a:r>
-              <a:rPr lang="en-US" sz="1250" dirty="0">
+            <a:r>
+              <a:rPr lang="en-US" sz="1500" dirty="0">
                 <a:solidFill>
                   <a:srgbClr val="E5E9F0"/>
                 </a:solidFill>
@@ -7020,7 +8604,7 @@
               </a:rPr>
               <a:t>RAG (SimpleVectorStore)</a:t>
             </a:r>
-            <a:endParaRPr lang="en-US" sz="1250" dirty="0"/>
+            <a:endParaRPr lang="en-US" sz="1500" dirty="0"/>
           </a:p>
         </p:txBody>
       </p:sp>
@@ -7050,13 +8634,20 @@
             <a:prstDash val="solid"/>
           </a:ln>
           <a:effectLst>
-            <a:outerShdw sx="100000" sy="100000" kx="0" ky="0" algn="bl" rotWithShape="0" blurRad="63500" dist="38100" dir="2700000">
+            <a:outerShdw blurRad="63500" dist="38100" dir="2700000" algn="bl" rotWithShape="0">
               <a:srgbClr val="000000">
                 <a:alpha val="20000"/>
               </a:srgbClr>
             </a:outerShdw>
           </a:effectLst>
         </p:spPr>
+        <p:txBody>
+          <a:bodyPr/>
+          <a:lstStyle/>
+          <a:p>
+            <a:endParaRPr lang="en-CA"/>
+          </a:p>
+        </p:txBody>
       </p:sp>
       <p:sp>
         <p:nvSpPr>
@@ -7079,11 +8670,11 @@
           <a:bodyPr wrap="square" lIns="0" tIns="0" rIns="0" bIns="0" rtlCol="0" anchor="ctr"/>
           <a:lstStyle/>
           <a:p>
-            <a:pPr algn="l" indent="0" marL="0">
+            <a:pPr marL="0" indent="0" algn="l">
               <a:buNone/>
             </a:pPr>
             <a:r>
-              <a:rPr lang="en-US" sz="1250" b="1" dirty="0">
+              <a:rPr lang="en-US" sz="1500" b="1" dirty="0">
                 <a:solidFill>
                   <a:srgbClr val="F2A93B"/>
                 </a:solidFill>
@@ -7093,11 +8684,8 @@
               </a:rPr>
               <a:t>8  </a:t>
             </a:r>
-            <a:pPr algn="l" indent="0" marL="0">
-              <a:buNone/>
-            </a:pPr>
-            <a:r>
-              <a:rPr lang="en-US" sz="1250" dirty="0">
+            <a:r>
+              <a:rPr lang="en-US" sz="1500" dirty="0">
                 <a:solidFill>
                   <a:srgbClr val="E5E9F0"/>
                 </a:solidFill>
@@ -7107,7 +8695,7 @@
               </a:rPr>
               <a:t>PgVector</a:t>
             </a:r>
-            <a:endParaRPr lang="en-US" sz="1250" dirty="0"/>
+            <a:endParaRPr lang="en-US" sz="1500" dirty="0"/>
           </a:p>
         </p:txBody>
       </p:sp>
@@ -7137,13 +8725,20 @@
             <a:prstDash val="solid"/>
           </a:ln>
           <a:effectLst>
-            <a:outerShdw sx="100000" sy="100000" kx="0" ky="0" algn="bl" rotWithShape="0" blurRad="63500" dist="38100" dir="2700000">
+            <a:outerShdw blurRad="63500" dist="38100" dir="2700000" algn="bl" rotWithShape="0">
               <a:srgbClr val="000000">
                 <a:alpha val="20000"/>
               </a:srgbClr>
             </a:outerShdw>
           </a:effectLst>
         </p:spPr>
+        <p:txBody>
+          <a:bodyPr/>
+          <a:lstStyle/>
+          <a:p>
+            <a:endParaRPr lang="en-CA"/>
+          </a:p>
+        </p:txBody>
       </p:sp>
       <p:sp>
         <p:nvSpPr>
@@ -7166,11 +8761,11 @@
           <a:bodyPr wrap="square" lIns="0" tIns="0" rIns="0" bIns="0" rtlCol="0" anchor="ctr"/>
           <a:lstStyle/>
           <a:p>
-            <a:pPr algn="l" indent="0" marL="0">
+            <a:pPr marL="0" indent="0" algn="l">
               <a:buNone/>
             </a:pPr>
             <a:r>
-              <a:rPr lang="en-US" sz="1250" b="1" dirty="0">
+              <a:rPr lang="en-US" sz="1500" b="1" dirty="0">
                 <a:solidFill>
                   <a:srgbClr val="F2A93B"/>
                 </a:solidFill>
@@ -7180,11 +8775,8 @@
               </a:rPr>
               <a:t>9  </a:t>
             </a:r>
-            <a:pPr algn="l" indent="0" marL="0">
-              <a:buNone/>
-            </a:pPr>
-            <a:r>
-              <a:rPr lang="en-US" sz="1250" dirty="0">
+            <a:r>
+              <a:rPr lang="en-US" sz="1500" dirty="0">
                 <a:solidFill>
                   <a:srgbClr val="E5E9F0"/>
                 </a:solidFill>
@@ -7194,7 +8786,7 @@
               </a:rPr>
               <a:t>Neo4j Graph RAG</a:t>
             </a:r>
-            <a:endParaRPr lang="en-US" sz="1250" dirty="0"/>
+            <a:endParaRPr lang="en-US" sz="1500" dirty="0"/>
           </a:p>
         </p:txBody>
       </p:sp>
@@ -7224,13 +8816,20 @@
             <a:prstDash val="solid"/>
           </a:ln>
           <a:effectLst>
-            <a:outerShdw sx="100000" sy="100000" kx="0" ky="0" algn="bl" rotWithShape="0" blurRad="63500" dist="38100" dir="2700000">
+            <a:outerShdw blurRad="63500" dist="38100" dir="2700000" algn="bl" rotWithShape="0">
               <a:srgbClr val="000000">
                 <a:alpha val="20000"/>
               </a:srgbClr>
             </a:outerShdw>
           </a:effectLst>
         </p:spPr>
+        <p:txBody>
+          <a:bodyPr/>
+          <a:lstStyle/>
+          <a:p>
+            <a:endParaRPr lang="en-CA"/>
+          </a:p>
+        </p:txBody>
       </p:sp>
       <p:sp>
         <p:nvSpPr>
@@ -7253,11 +8852,11 @@
           <a:bodyPr wrap="square" lIns="0" tIns="0" rIns="0" bIns="0" rtlCol="0" anchor="ctr"/>
           <a:lstStyle/>
           <a:p>
-            <a:pPr algn="l" indent="0" marL="0">
+            <a:pPr marL="0" indent="0" algn="l">
               <a:buNone/>
             </a:pPr>
             <a:r>
-              <a:rPr lang="en-US" sz="1250" b="1" dirty="0">
+              <a:rPr lang="en-US" sz="1500" b="1" dirty="0">
                 <a:solidFill>
                   <a:srgbClr val="F2A93B"/>
                 </a:solidFill>
@@ -7267,11 +8866,8 @@
               </a:rPr>
               <a:t>10  </a:t>
             </a:r>
-            <a:pPr algn="l" indent="0" marL="0">
-              <a:buNone/>
-            </a:pPr>
-            <a:r>
-              <a:rPr lang="en-US" sz="1250" dirty="0">
+            <a:r>
+              <a:rPr lang="en-US" sz="1500" dirty="0">
                 <a:solidFill>
                   <a:srgbClr val="E5E9F0"/>
                 </a:solidFill>
@@ -7281,7 +8877,7 @@
               </a:rPr>
               <a:t>Function Calling</a:t>
             </a:r>
-            <a:endParaRPr lang="en-US" sz="1250" dirty="0"/>
+            <a:endParaRPr lang="en-US" sz="1500" dirty="0"/>
           </a:p>
         </p:txBody>
       </p:sp>
@@ -7311,13 +8907,20 @@
             <a:prstDash val="solid"/>
           </a:ln>
           <a:effectLst>
-            <a:outerShdw sx="100000" sy="100000" kx="0" ky="0" algn="bl" rotWithShape="0" blurRad="63500" dist="38100" dir="2700000">
+            <a:outerShdw blurRad="63500" dist="38100" dir="2700000" algn="bl" rotWithShape="0">
               <a:srgbClr val="000000">
                 <a:alpha val="20000"/>
               </a:srgbClr>
             </a:outerShdw>
           </a:effectLst>
         </p:spPr>
+        <p:txBody>
+          <a:bodyPr/>
+          <a:lstStyle/>
+          <a:p>
+            <a:endParaRPr lang="en-CA"/>
+          </a:p>
+        </p:txBody>
       </p:sp>
       <p:sp>
         <p:nvSpPr>
@@ -7340,11 +8943,11 @@
           <a:bodyPr wrap="square" lIns="0" tIns="0" rIns="0" bIns="0" rtlCol="0" anchor="ctr"/>
           <a:lstStyle/>
           <a:p>
-            <a:pPr algn="l" indent="0" marL="0">
+            <a:pPr marL="0" indent="0" algn="l">
               <a:buNone/>
             </a:pPr>
             <a:r>
-              <a:rPr lang="en-US" sz="1250" b="1" dirty="0">
+              <a:rPr lang="en-US" sz="1500" b="1" dirty="0">
                 <a:solidFill>
                   <a:srgbClr val="F2A93B"/>
                 </a:solidFill>
@@ -7354,11 +8957,8 @@
               </a:rPr>
               <a:t>11  </a:t>
             </a:r>
-            <a:pPr algn="l" indent="0" marL="0">
-              <a:buNone/>
-            </a:pPr>
-            <a:r>
-              <a:rPr lang="en-US" sz="1250" dirty="0">
+            <a:r>
+              <a:rPr lang="en-US" sz="1500" dirty="0">
                 <a:solidFill>
                   <a:srgbClr val="E5E9F0"/>
                 </a:solidFill>
@@ -7368,7 +8968,7 @@
               </a:rPr>
               <a:t>MCP Integration</a:t>
             </a:r>
-            <a:endParaRPr lang="en-US" sz="1250" dirty="0"/>
+            <a:endParaRPr lang="en-US" sz="1500" dirty="0"/>
           </a:p>
         </p:txBody>
       </p:sp>
@@ -7388,6 +8988,7 @@
         <a:solidFill>
           <a:srgbClr val="0A0F1C"/>
         </a:solidFill>
+        <a:effectLst/>
       </p:bgPr>
     </p:bg>
     <p:spTree>
@@ -7428,6 +9029,13 @@
             <a:prstDash val="solid"/>
           </a:ln>
         </p:spPr>
+        <p:txBody>
+          <a:bodyPr/>
+          <a:lstStyle/>
+          <a:p>
+            <a:endParaRPr lang="en-CA"/>
+          </a:p>
+        </p:txBody>
       </p:sp>
       <p:sp>
         <p:nvSpPr>
@@ -7453,6 +9061,13 @@
             <a:prstDash val="solid"/>
           </a:ln>
         </p:spPr>
+        <p:txBody>
+          <a:bodyPr/>
+          <a:lstStyle/>
+          <a:p>
+            <a:endParaRPr lang="en-CA"/>
+          </a:p>
+        </p:txBody>
       </p:sp>
       <p:sp>
         <p:nvSpPr>
@@ -7478,6 +9093,13 @@
             <a:prstDash val="solid"/>
           </a:ln>
         </p:spPr>
+        <p:txBody>
+          <a:bodyPr/>
+          <a:lstStyle/>
+          <a:p>
+            <a:endParaRPr lang="en-CA"/>
+          </a:p>
+        </p:txBody>
       </p:sp>
       <p:sp>
         <p:nvSpPr>
@@ -7500,6 +9122,13 @@
           </a:solidFill>
           <a:ln/>
         </p:spPr>
+        <p:txBody>
+          <a:bodyPr/>
+          <a:lstStyle/>
+          <a:p>
+            <a:endParaRPr lang="en-CA"/>
+          </a:p>
+        </p:txBody>
       </p:sp>
       <p:sp>
         <p:nvSpPr>
@@ -7522,6 +9151,13 @@
           </a:solidFill>
           <a:ln/>
         </p:spPr>
+        <p:txBody>
+          <a:bodyPr/>
+          <a:lstStyle/>
+          <a:p>
+            <a:endParaRPr lang="en-CA"/>
+          </a:p>
+        </p:txBody>
       </p:sp>
       <p:sp>
         <p:nvSpPr>
@@ -7544,6 +9180,13 @@
           </a:solidFill>
           <a:ln/>
         </p:spPr>
+        <p:txBody>
+          <a:bodyPr/>
+          <a:lstStyle/>
+          <a:p>
+            <a:endParaRPr lang="en-CA"/>
+          </a:p>
+        </p:txBody>
       </p:sp>
       <p:sp>
         <p:nvSpPr>
@@ -7566,6 +9209,13 @@
           </a:solidFill>
           <a:ln/>
         </p:spPr>
+        <p:txBody>
+          <a:bodyPr/>
+          <a:lstStyle/>
+          <a:p>
+            <a:endParaRPr lang="en-CA"/>
+          </a:p>
+        </p:txBody>
       </p:sp>
       <p:sp>
         <p:nvSpPr>
@@ -7591,6 +9241,13 @@
             <a:prstDash val="solid"/>
           </a:ln>
         </p:spPr>
+        <p:txBody>
+          <a:bodyPr/>
+          <a:lstStyle/>
+          <a:p>
+            <a:endParaRPr lang="en-CA"/>
+          </a:p>
+        </p:txBody>
       </p:sp>
       <p:sp>
         <p:nvSpPr>
@@ -7616,6 +9273,13 @@
             <a:prstDash val="solid"/>
           </a:ln>
         </p:spPr>
+        <p:txBody>
+          <a:bodyPr/>
+          <a:lstStyle/>
+          <a:p>
+            <a:endParaRPr lang="en-CA"/>
+          </a:p>
+        </p:txBody>
       </p:sp>
       <p:sp>
         <p:nvSpPr>
@@ -7641,6 +9305,13 @@
             <a:prstDash val="solid"/>
           </a:ln>
         </p:spPr>
+        <p:txBody>
+          <a:bodyPr/>
+          <a:lstStyle/>
+          <a:p>
+            <a:endParaRPr lang="en-CA"/>
+          </a:p>
+        </p:txBody>
       </p:sp>
       <p:sp>
         <p:nvSpPr>
@@ -7663,6 +9334,13 @@
           </a:solidFill>
           <a:ln/>
         </p:spPr>
+        <p:txBody>
+          <a:bodyPr/>
+          <a:lstStyle/>
+          <a:p>
+            <a:endParaRPr lang="en-CA"/>
+          </a:p>
+        </p:txBody>
       </p:sp>
       <p:sp>
         <p:nvSpPr>
@@ -7685,6 +9363,13 @@
           </a:solidFill>
           <a:ln/>
         </p:spPr>
+        <p:txBody>
+          <a:bodyPr/>
+          <a:lstStyle/>
+          <a:p>
+            <a:endParaRPr lang="en-CA"/>
+          </a:p>
+        </p:txBody>
       </p:sp>
       <p:sp>
         <p:nvSpPr>
@@ -7707,6 +9392,13 @@
           </a:solidFill>
           <a:ln/>
         </p:spPr>
+        <p:txBody>
+          <a:bodyPr/>
+          <a:lstStyle/>
+          <a:p>
+            <a:endParaRPr lang="en-CA"/>
+          </a:p>
+        </p:txBody>
       </p:sp>
       <p:sp>
         <p:nvSpPr>
@@ -7729,6 +9421,13 @@
           </a:solidFill>
           <a:ln/>
         </p:spPr>
+        <p:txBody>
+          <a:bodyPr/>
+          <a:lstStyle/>
+          <a:p>
+            <a:endParaRPr lang="en-CA"/>
+          </a:p>
+        </p:txBody>
       </p:sp>
       <p:sp>
         <p:nvSpPr>
@@ -7751,11 +9450,11 @@
           <a:bodyPr wrap="square" lIns="0" tIns="0" rIns="0" bIns="0" rtlCol="0" anchor="ctr"/>
           <a:lstStyle/>
           <a:p>
-            <a:pPr indent="0" marL="0">
+            <a:pPr marL="0" indent="0">
               <a:buNone/>
             </a:pPr>
             <a:r>
-              <a:rPr lang="en-US" sz="900" dirty="0">
+              <a:rPr lang="en-US" sz="1080" dirty="0">
                 <a:solidFill>
                   <a:srgbClr val="5B6478"/>
                 </a:solidFill>
@@ -7765,7 +9464,7 @@
               </a:rPr>
               <a:t>PromptToApps</a:t>
             </a:r>
-            <a:endParaRPr lang="en-US" sz="900" dirty="0"/>
+            <a:endParaRPr lang="en-US" sz="1080" dirty="0"/>
           </a:p>
         </p:txBody>
       </p:sp>
@@ -7790,11 +9489,11 @@
           <a:bodyPr wrap="square" lIns="0" tIns="0" rIns="0" bIns="0" rtlCol="0" anchor="ctr"/>
           <a:lstStyle/>
           <a:p>
-            <a:pPr algn="r" indent="0" marL="0">
+            <a:pPr marL="0" indent="0" algn="r">
               <a:buNone/>
             </a:pPr>
             <a:r>
-              <a:rPr lang="en-US" sz="900" dirty="0">
+              <a:rPr lang="en-US" sz="1080" dirty="0">
                 <a:solidFill>
                   <a:srgbClr val="5B6478"/>
                 </a:solidFill>
@@ -7802,9 +9501,9 @@
                 <a:ea typeface="Courier New" pitchFamily="34" charset="-122"/>
                 <a:cs typeface="Courier New" pitchFamily="34" charset="-120"/>
               </a:rPr>
-              <a:t>6 / 9</a:t>
-            </a:r>
-            <a:endParaRPr lang="en-US" sz="900" dirty="0"/>
+              <a:t>6 / 10</a:t>
+            </a:r>
+            <a:endParaRPr lang="en-US" sz="1080" dirty="0"/>
           </a:p>
         </p:txBody>
       </p:sp>
@@ -7829,11 +9528,11 @@
           <a:bodyPr wrap="square" lIns="0" tIns="0" rIns="0" bIns="0" rtlCol="0" anchor="ctr"/>
           <a:lstStyle/>
           <a:p>
-            <a:pPr indent="0" marL="0">
+            <a:pPr marL="0" indent="0">
               <a:buNone/>
             </a:pPr>
             <a:r>
-              <a:rPr lang="en-US" sz="1200" spc="200" kern="0" dirty="0">
+              <a:rPr lang="en-US" sz="1440" kern="0" spc="200" dirty="0">
                 <a:solidFill>
                   <a:srgbClr val="5FE0C5"/>
                 </a:solidFill>
@@ -7843,7 +9542,7 @@
               </a:rPr>
               <a:t>A RUNNING THEME</a:t>
             </a:r>
-            <a:endParaRPr lang="en-US" sz="1200" dirty="0"/>
+            <a:endParaRPr lang="en-US" sz="1440" dirty="0"/>
           </a:p>
         </p:txBody>
       </p:sp>
@@ -7868,11 +9567,11 @@
           <a:bodyPr wrap="square" lIns="0" tIns="0" rIns="0" bIns="0" rtlCol="0" anchor="ctr"/>
           <a:lstStyle/>
           <a:p>
-            <a:pPr algn="l" indent="0" marL="0">
+            <a:pPr marL="0" indent="0" algn="l">
               <a:buNone/>
             </a:pPr>
             <a:r>
-              <a:rPr lang="en-US" sz="2800" b="1" dirty="0">
+              <a:rPr lang="en-US" sz="3360" b="1" dirty="0">
                 <a:solidFill>
                   <a:srgbClr val="F2A93B"/>
                 </a:solidFill>
@@ -7882,7 +9581,7 @@
               </a:rPr>
               <a:t>One interface, three vector stores</a:t>
             </a:r>
-            <a:endParaRPr lang="en-US" sz="2800" dirty="0"/>
+            <a:endParaRPr lang="en-US" sz="3360" dirty="0"/>
           </a:p>
         </p:txBody>
       </p:sp>
@@ -7907,11 +9606,11 @@
           <a:bodyPr wrap="square" lIns="0" tIns="0" rIns="0" bIns="0" rtlCol="0" anchor="ctr"/>
           <a:lstStyle/>
           <a:p>
-            <a:pPr indent="0" marL="0">
+            <a:pPr marL="0" indent="0">
               <a:buNone/>
             </a:pPr>
             <a:r>
-              <a:rPr lang="en-US" sz="1500" dirty="0">
+              <a:rPr lang="en-US" sz="1800" dirty="0">
                 <a:solidFill>
                   <a:srgbClr val="B8C0D0"/>
                 </a:solidFill>
@@ -7921,7 +9620,7 @@
               </a:rPr>
               <a:t>Chapters 7, 8, and 9 swap a single bean behind Spring AI's VectorStore interface — the rest of the app never changes.</a:t>
             </a:r>
-            <a:endParaRPr lang="en-US" sz="1500" dirty="0"/>
+            <a:endParaRPr lang="en-US" sz="1800" dirty="0"/>
           </a:p>
         </p:txBody>
       </p:sp>
@@ -7951,13 +9650,20 @@
             <a:prstDash val="solid"/>
           </a:ln>
           <a:effectLst>
-            <a:outerShdw sx="100000" sy="100000" kx="0" ky="0" algn="bl" rotWithShape="0" blurRad="101600" dist="38100" dir="2700000">
+            <a:outerShdw blurRad="101600" dist="38100" dir="2700000" algn="bl" rotWithShape="0">
               <a:srgbClr val="000000">
                 <a:alpha val="25000"/>
               </a:srgbClr>
             </a:outerShdw>
           </a:effectLst>
         </p:spPr>
+        <p:txBody>
+          <a:bodyPr/>
+          <a:lstStyle/>
+          <a:p>
+            <a:endParaRPr lang="en-CA"/>
+          </a:p>
+        </p:txBody>
       </p:sp>
       <p:sp>
         <p:nvSpPr>
@@ -7980,11 +9686,11 @@
           <a:bodyPr wrap="square" lIns="0" tIns="0" rIns="0" bIns="0" rtlCol="0" anchor="ctr"/>
           <a:lstStyle/>
           <a:p>
-            <a:pPr indent="0" marL="0">
+            <a:pPr marL="0" indent="0">
               <a:buNone/>
             </a:pPr>
             <a:r>
-              <a:rPr lang="en-US" sz="1200" b="1" dirty="0">
+              <a:rPr lang="en-US" sz="1440" b="1" dirty="0">
                 <a:solidFill>
                   <a:srgbClr val="F2A93B"/>
                 </a:solidFill>
@@ -7994,7 +9700,7 @@
               </a:rPr>
               <a:t>Ch 7</a:t>
             </a:r>
-            <a:endParaRPr lang="en-US" sz="1200" dirty="0"/>
+            <a:endParaRPr lang="en-US" sz="1440" dirty="0"/>
           </a:p>
         </p:txBody>
       </p:sp>
@@ -8019,11 +9725,11 @@
           <a:bodyPr wrap="square" lIns="0" tIns="0" rIns="0" bIns="0" rtlCol="0" anchor="ctr"/>
           <a:lstStyle/>
           <a:p>
-            <a:pPr indent="0" marL="0">
+            <a:pPr marL="0" indent="0">
               <a:buNone/>
             </a:pPr>
             <a:r>
-              <a:rPr lang="en-US" sz="1800" b="1" dirty="0">
+              <a:rPr lang="en-US" sz="2160" b="1" dirty="0">
                 <a:solidFill>
                   <a:srgbClr val="E5E9F0"/>
                 </a:solidFill>
@@ -8033,7 +9739,7 @@
               </a:rPr>
               <a:t>SimpleVectorStore</a:t>
             </a:r>
-            <a:endParaRPr lang="en-US" sz="1800" dirty="0"/>
+            <a:endParaRPr lang="en-US" sz="2160" dirty="0"/>
           </a:p>
         </p:txBody>
       </p:sp>
@@ -8058,11 +9764,11 @@
           <a:bodyPr wrap="square" lIns="0" tIns="0" rIns="0" bIns="0" rtlCol="0" anchor="ctr"/>
           <a:lstStyle/>
           <a:p>
-            <a:pPr indent="0" marL="0">
+            <a:pPr marL="0" indent="0">
               <a:buNone/>
             </a:pPr>
             <a:r>
-              <a:rPr lang="en-US" sz="1250" dirty="0">
+              <a:rPr lang="en-US" sz="1500" dirty="0">
                 <a:solidFill>
                   <a:srgbClr val="B8C0D0"/>
                 </a:solidFill>
@@ -8072,7 +9778,7 @@
               </a:rPr>
               <a:t>In-memory · O(N) brute force</a:t>
             </a:r>
-            <a:endParaRPr lang="en-US" sz="1250" dirty="0"/>
+            <a:endParaRPr lang="en-US" sz="1500" dirty="0"/>
           </a:p>
         </p:txBody>
       </p:sp>
@@ -8099,6 +9805,13 @@
             <a:tailEnd type="triangle"/>
           </a:ln>
         </p:spPr>
+        <p:txBody>
+          <a:bodyPr/>
+          <a:lstStyle/>
+          <a:p>
+            <a:endParaRPr lang="en-CA"/>
+          </a:p>
+        </p:txBody>
       </p:sp>
       <p:sp>
         <p:nvSpPr>
@@ -8126,13 +9839,20 @@
             <a:prstDash val="solid"/>
           </a:ln>
           <a:effectLst>
-            <a:outerShdw sx="100000" sy="100000" kx="0" ky="0" algn="bl" rotWithShape="0" blurRad="101600" dist="38100" dir="2700000">
+            <a:outerShdw blurRad="101600" dist="38100" dir="2700000" algn="bl" rotWithShape="0">
               <a:srgbClr val="000000">
                 <a:alpha val="25000"/>
               </a:srgbClr>
             </a:outerShdw>
           </a:effectLst>
         </p:spPr>
+        <p:txBody>
+          <a:bodyPr/>
+          <a:lstStyle/>
+          <a:p>
+            <a:endParaRPr lang="en-CA"/>
+          </a:p>
+        </p:txBody>
       </p:sp>
       <p:sp>
         <p:nvSpPr>
@@ -8155,11 +9875,11 @@
           <a:bodyPr wrap="square" lIns="0" tIns="0" rIns="0" bIns="0" rtlCol="0" anchor="ctr"/>
           <a:lstStyle/>
           <a:p>
-            <a:pPr indent="0" marL="0">
+            <a:pPr marL="0" indent="0">
               <a:buNone/>
             </a:pPr>
             <a:r>
-              <a:rPr lang="en-US" sz="1200" b="1" dirty="0">
+              <a:rPr lang="en-US" sz="1440" b="1" dirty="0">
                 <a:solidFill>
                   <a:srgbClr val="8B98AC"/>
                 </a:solidFill>
@@ -8169,7 +9889,7 @@
               </a:rPr>
               <a:t>Ch 8</a:t>
             </a:r>
-            <a:endParaRPr lang="en-US" sz="1200" dirty="0"/>
+            <a:endParaRPr lang="en-US" sz="1440" dirty="0"/>
           </a:p>
         </p:txBody>
       </p:sp>
@@ -8194,11 +9914,11 @@
           <a:bodyPr wrap="square" lIns="0" tIns="0" rIns="0" bIns="0" rtlCol="0" anchor="ctr"/>
           <a:lstStyle/>
           <a:p>
-            <a:pPr indent="0" marL="0">
+            <a:pPr marL="0" indent="0">
               <a:buNone/>
             </a:pPr>
             <a:r>
-              <a:rPr lang="en-US" sz="1800" b="1" dirty="0">
+              <a:rPr lang="en-US" sz="2160" b="1" dirty="0">
                 <a:solidFill>
                   <a:srgbClr val="E5E9F0"/>
                 </a:solidFill>
@@ -8208,7 +9928,7 @@
               </a:rPr>
               <a:t>PgVectorStore</a:t>
             </a:r>
-            <a:endParaRPr lang="en-US" sz="1800" dirty="0"/>
+            <a:endParaRPr lang="en-US" sz="2160" dirty="0"/>
           </a:p>
         </p:txBody>
       </p:sp>
@@ -8233,11 +9953,11 @@
           <a:bodyPr wrap="square" lIns="0" tIns="0" rIns="0" bIns="0" rtlCol="0" anchor="ctr"/>
           <a:lstStyle/>
           <a:p>
-            <a:pPr indent="0" marL="0">
+            <a:pPr marL="0" indent="0">
               <a:buNone/>
             </a:pPr>
             <a:r>
-              <a:rPr lang="en-US" sz="1250" dirty="0">
+              <a:rPr lang="en-US" sz="1500" dirty="0">
                 <a:solidFill>
                   <a:srgbClr val="B8C0D0"/>
                 </a:solidFill>
@@ -8247,7 +9967,7 @@
               </a:rPr>
               <a:t>PostgreSQL · HNSW index</a:t>
             </a:r>
-            <a:endParaRPr lang="en-US" sz="1250" dirty="0"/>
+            <a:endParaRPr lang="en-US" sz="1500" dirty="0"/>
           </a:p>
         </p:txBody>
       </p:sp>
@@ -8274,6 +9994,13 @@
             <a:tailEnd type="triangle"/>
           </a:ln>
         </p:spPr>
+        <p:txBody>
+          <a:bodyPr/>
+          <a:lstStyle/>
+          <a:p>
+            <a:endParaRPr lang="en-CA"/>
+          </a:p>
+        </p:txBody>
       </p:sp>
       <p:sp>
         <p:nvSpPr>
@@ -8301,13 +10028,20 @@
             <a:prstDash val="solid"/>
           </a:ln>
           <a:effectLst>
-            <a:outerShdw sx="100000" sy="100000" kx="0" ky="0" algn="bl" rotWithShape="0" blurRad="101600" dist="38100" dir="2700000">
+            <a:outerShdw blurRad="101600" dist="38100" dir="2700000" algn="bl" rotWithShape="0">
               <a:srgbClr val="000000">
                 <a:alpha val="25000"/>
               </a:srgbClr>
             </a:outerShdw>
           </a:effectLst>
         </p:spPr>
+        <p:txBody>
+          <a:bodyPr/>
+          <a:lstStyle/>
+          <a:p>
+            <a:endParaRPr lang="en-CA"/>
+          </a:p>
+        </p:txBody>
       </p:sp>
       <p:sp>
         <p:nvSpPr>
@@ -8330,11 +10064,11 @@
           <a:bodyPr wrap="square" lIns="0" tIns="0" rIns="0" bIns="0" rtlCol="0" anchor="ctr"/>
           <a:lstStyle/>
           <a:p>
-            <a:pPr indent="0" marL="0">
+            <a:pPr marL="0" indent="0">
               <a:buNone/>
             </a:pPr>
             <a:r>
-              <a:rPr lang="en-US" sz="1200" b="1" dirty="0">
+              <a:rPr lang="en-US" sz="1440" b="1" dirty="0">
                 <a:solidFill>
                   <a:srgbClr val="5FE0C5"/>
                 </a:solidFill>
@@ -8344,7 +10078,7 @@
               </a:rPr>
               <a:t>Ch 9</a:t>
             </a:r>
-            <a:endParaRPr lang="en-US" sz="1200" dirty="0"/>
+            <a:endParaRPr lang="en-US" sz="1440" dirty="0"/>
           </a:p>
         </p:txBody>
       </p:sp>
@@ -8369,11 +10103,11 @@
           <a:bodyPr wrap="square" lIns="0" tIns="0" rIns="0" bIns="0" rtlCol="0" anchor="ctr"/>
           <a:lstStyle/>
           <a:p>
-            <a:pPr indent="0" marL="0">
+            <a:pPr marL="0" indent="0">
               <a:buNone/>
             </a:pPr>
             <a:r>
-              <a:rPr lang="en-US" sz="1800" b="1" dirty="0">
+              <a:rPr lang="en-US" sz="2160" b="1" dirty="0">
                 <a:solidFill>
                   <a:srgbClr val="E5E9F0"/>
                 </a:solidFill>
@@ -8383,7 +10117,7 @@
               </a:rPr>
               <a:t>Neo4jVectorStore</a:t>
             </a:r>
-            <a:endParaRPr lang="en-US" sz="1800" dirty="0"/>
+            <a:endParaRPr lang="en-US" sz="2160" dirty="0"/>
           </a:p>
         </p:txBody>
       </p:sp>
@@ -8408,11 +10142,11 @@
           <a:bodyPr wrap="square" lIns="0" tIns="0" rIns="0" bIns="0" rtlCol="0" anchor="ctr"/>
           <a:lstStyle/>
           <a:p>
-            <a:pPr indent="0" marL="0">
+            <a:pPr marL="0" indent="0">
               <a:buNone/>
             </a:pPr>
             <a:r>
-              <a:rPr lang="en-US" sz="1250" dirty="0">
+              <a:rPr lang="en-US" sz="1500" dirty="0">
                 <a:solidFill>
                   <a:srgbClr val="B8C0D0"/>
                 </a:solidFill>
@@ -8422,7 +10156,7 @@
               </a:rPr>
               <a:t>Graph + vector · traversal</a:t>
             </a:r>
-            <a:endParaRPr lang="en-US" sz="1250" dirty="0"/>
+            <a:endParaRPr lang="en-US" sz="1500" dirty="0"/>
           </a:p>
         </p:txBody>
       </p:sp>
@@ -8447,11 +10181,11 @@
           <a:bodyPr wrap="square" lIns="0" tIns="0" rIns="0" bIns="0" rtlCol="0" anchor="ctr"/>
           <a:lstStyle/>
           <a:p>
-            <a:pPr algn="ctr" indent="0" marL="0">
+            <a:pPr marL="0" indent="0" algn="ctr">
               <a:buNone/>
             </a:pPr>
             <a:r>
-              <a:rPr lang="en-US" sz="1400" i="1" dirty="0">
+              <a:rPr lang="en-US" sz="1680" i="1" dirty="0">
                 <a:solidFill>
                   <a:srgbClr val="B8C0D0"/>
                 </a:solidFill>
@@ -8461,11 +10195,8 @@
               </a:rPr>
               <a:t>Same controller. Same </a:t>
             </a:r>
-            <a:pPr algn="ctr" indent="0" marL="0">
-              <a:buNone/>
-            </a:pPr>
-            <a:r>
-              <a:rPr lang="en-US" sz="1400" i="1" dirty="0">
+            <a:r>
+              <a:rPr lang="en-US" sz="1680" i="1" dirty="0">
                 <a:solidFill>
                   <a:srgbClr val="F2A93B"/>
                 </a:solidFill>
@@ -8475,11 +10206,8 @@
               </a:rPr>
               <a:t>QuestionAnswerAdvisor</a:t>
             </a:r>
-            <a:pPr algn="ctr" indent="0" marL="0">
-              <a:buNone/>
-            </a:pPr>
-            <a:r>
-              <a:rPr lang="en-US" sz="1400" i="1" dirty="0">
+            <a:r>
+              <a:rPr lang="en-US" sz="1680" i="1" dirty="0">
                 <a:solidFill>
                   <a:srgbClr val="B8C0D0"/>
                 </a:solidFill>
@@ -8489,7 +10217,7 @@
               </a:rPr>
               <a:t>. Same API — every time.</a:t>
             </a:r>
-            <a:endParaRPr lang="en-US" sz="1400" dirty="0"/>
+            <a:endParaRPr lang="en-US" sz="1680" dirty="0"/>
           </a:p>
         </p:txBody>
       </p:sp>
@@ -8509,6 +10237,7 @@
         <a:solidFill>
           <a:srgbClr val="0A0F1C"/>
         </a:solidFill>
+        <a:effectLst/>
       </p:bgPr>
     </p:bg>
     <p:spTree>
@@ -8549,6 +10278,13 @@
             <a:prstDash val="solid"/>
           </a:ln>
         </p:spPr>
+        <p:txBody>
+          <a:bodyPr/>
+          <a:lstStyle/>
+          <a:p>
+            <a:endParaRPr lang="en-CA"/>
+          </a:p>
+        </p:txBody>
       </p:sp>
       <p:sp>
         <p:nvSpPr>
@@ -8574,6 +10310,13 @@
             <a:prstDash val="solid"/>
           </a:ln>
         </p:spPr>
+        <p:txBody>
+          <a:bodyPr/>
+          <a:lstStyle/>
+          <a:p>
+            <a:endParaRPr lang="en-CA"/>
+          </a:p>
+        </p:txBody>
       </p:sp>
       <p:sp>
         <p:nvSpPr>
@@ -8599,6 +10342,13 @@
             <a:prstDash val="solid"/>
           </a:ln>
         </p:spPr>
+        <p:txBody>
+          <a:bodyPr/>
+          <a:lstStyle/>
+          <a:p>
+            <a:endParaRPr lang="en-CA"/>
+          </a:p>
+        </p:txBody>
       </p:sp>
       <p:sp>
         <p:nvSpPr>
@@ -8621,6 +10371,13 @@
           </a:solidFill>
           <a:ln/>
         </p:spPr>
+        <p:txBody>
+          <a:bodyPr/>
+          <a:lstStyle/>
+          <a:p>
+            <a:endParaRPr lang="en-CA"/>
+          </a:p>
+        </p:txBody>
       </p:sp>
       <p:sp>
         <p:nvSpPr>
@@ -8643,6 +10400,13 @@
           </a:solidFill>
           <a:ln/>
         </p:spPr>
+        <p:txBody>
+          <a:bodyPr/>
+          <a:lstStyle/>
+          <a:p>
+            <a:endParaRPr lang="en-CA"/>
+          </a:p>
+        </p:txBody>
       </p:sp>
       <p:sp>
         <p:nvSpPr>
@@ -8665,6 +10429,13 @@
           </a:solidFill>
           <a:ln/>
         </p:spPr>
+        <p:txBody>
+          <a:bodyPr/>
+          <a:lstStyle/>
+          <a:p>
+            <a:endParaRPr lang="en-CA"/>
+          </a:p>
+        </p:txBody>
       </p:sp>
       <p:sp>
         <p:nvSpPr>
@@ -8687,6 +10458,13 @@
           </a:solidFill>
           <a:ln/>
         </p:spPr>
+        <p:txBody>
+          <a:bodyPr/>
+          <a:lstStyle/>
+          <a:p>
+            <a:endParaRPr lang="en-CA"/>
+          </a:p>
+        </p:txBody>
       </p:sp>
       <p:sp>
         <p:nvSpPr>
@@ -8712,6 +10490,13 @@
             <a:prstDash val="solid"/>
           </a:ln>
         </p:spPr>
+        <p:txBody>
+          <a:bodyPr/>
+          <a:lstStyle/>
+          <a:p>
+            <a:endParaRPr lang="en-CA"/>
+          </a:p>
+        </p:txBody>
       </p:sp>
       <p:sp>
         <p:nvSpPr>
@@ -8737,6 +10522,13 @@
             <a:prstDash val="solid"/>
           </a:ln>
         </p:spPr>
+        <p:txBody>
+          <a:bodyPr/>
+          <a:lstStyle/>
+          <a:p>
+            <a:endParaRPr lang="en-CA"/>
+          </a:p>
+        </p:txBody>
       </p:sp>
       <p:sp>
         <p:nvSpPr>
@@ -8762,6 +10554,13 @@
             <a:prstDash val="solid"/>
           </a:ln>
         </p:spPr>
+        <p:txBody>
+          <a:bodyPr/>
+          <a:lstStyle/>
+          <a:p>
+            <a:endParaRPr lang="en-CA"/>
+          </a:p>
+        </p:txBody>
       </p:sp>
       <p:sp>
         <p:nvSpPr>
@@ -8784,6 +10583,13 @@
           </a:solidFill>
           <a:ln/>
         </p:spPr>
+        <p:txBody>
+          <a:bodyPr/>
+          <a:lstStyle/>
+          <a:p>
+            <a:endParaRPr lang="en-CA"/>
+          </a:p>
+        </p:txBody>
       </p:sp>
       <p:sp>
         <p:nvSpPr>
@@ -8806,6 +10612,13 @@
           </a:solidFill>
           <a:ln/>
         </p:spPr>
+        <p:txBody>
+          <a:bodyPr/>
+          <a:lstStyle/>
+          <a:p>
+            <a:endParaRPr lang="en-CA"/>
+          </a:p>
+        </p:txBody>
       </p:sp>
       <p:sp>
         <p:nvSpPr>
@@ -8828,6 +10641,13 @@
           </a:solidFill>
           <a:ln/>
         </p:spPr>
+        <p:txBody>
+          <a:bodyPr/>
+          <a:lstStyle/>
+          <a:p>
+            <a:endParaRPr lang="en-CA"/>
+          </a:p>
+        </p:txBody>
       </p:sp>
       <p:sp>
         <p:nvSpPr>
@@ -8850,6 +10670,13 @@
           </a:solidFill>
           <a:ln/>
         </p:spPr>
+        <p:txBody>
+          <a:bodyPr/>
+          <a:lstStyle/>
+          <a:p>
+            <a:endParaRPr lang="en-CA"/>
+          </a:p>
+        </p:txBody>
       </p:sp>
       <p:sp>
         <p:nvSpPr>
@@ -8872,11 +10699,11 @@
           <a:bodyPr wrap="square" lIns="0" tIns="0" rIns="0" bIns="0" rtlCol="0" anchor="ctr"/>
           <a:lstStyle/>
           <a:p>
-            <a:pPr indent="0" marL="0">
+            <a:pPr marL="0" indent="0">
               <a:buNone/>
             </a:pPr>
             <a:r>
-              <a:rPr lang="en-US" sz="900" dirty="0">
+              <a:rPr lang="en-US" sz="1080" dirty="0">
                 <a:solidFill>
                   <a:srgbClr val="5B6478"/>
                 </a:solidFill>
@@ -8886,7 +10713,7 @@
               </a:rPr>
               <a:t>PromptToApps</a:t>
             </a:r>
-            <a:endParaRPr lang="en-US" sz="900" dirty="0"/>
+            <a:endParaRPr lang="en-US" sz="1080" dirty="0"/>
           </a:p>
         </p:txBody>
       </p:sp>
@@ -8911,11 +10738,11 @@
           <a:bodyPr wrap="square" lIns="0" tIns="0" rIns="0" bIns="0" rtlCol="0" anchor="ctr"/>
           <a:lstStyle/>
           <a:p>
-            <a:pPr algn="r" indent="0" marL="0">
+            <a:pPr marL="0" indent="0" algn="r">
               <a:buNone/>
             </a:pPr>
             <a:r>
-              <a:rPr lang="en-US" sz="900" dirty="0">
+              <a:rPr lang="en-US" sz="1080" dirty="0">
                 <a:solidFill>
                   <a:srgbClr val="5B6478"/>
                 </a:solidFill>
@@ -8923,9 +10750,9 @@
                 <a:ea typeface="Courier New" pitchFamily="34" charset="-122"/>
                 <a:cs typeface="Courier New" pitchFamily="34" charset="-120"/>
               </a:rPr>
-              <a:t>7 / 9</a:t>
-            </a:r>
-            <a:endParaRPr lang="en-US" sz="900" dirty="0"/>
+              <a:t>7 / 10</a:t>
+            </a:r>
+            <a:endParaRPr lang="en-US" sz="1080" dirty="0"/>
           </a:p>
         </p:txBody>
       </p:sp>
@@ -8950,11 +10777,11 @@
           <a:bodyPr wrap="square" lIns="0" tIns="0" rIns="0" bIns="0" rtlCol="0" anchor="ctr"/>
           <a:lstStyle/>
           <a:p>
-            <a:pPr indent="0" marL="0">
+            <a:pPr marL="0" indent="0">
               <a:buNone/>
             </a:pPr>
             <a:r>
-              <a:rPr lang="en-US" sz="1200" spc="200" kern="0" dirty="0">
+              <a:rPr lang="en-US" sz="1440" kern="0" spc="200" dirty="0">
                 <a:solidFill>
                   <a:srgbClr val="5FE0C5"/>
                 </a:solidFill>
@@ -8964,7 +10791,7 @@
               </a:rPr>
               <a:t>FORMAT</a:t>
             </a:r>
-            <a:endParaRPr lang="en-US" sz="1200" dirty="0"/>
+            <a:endParaRPr lang="en-US" sz="1440" dirty="0"/>
           </a:p>
         </p:txBody>
       </p:sp>
@@ -8989,11 +10816,11 @@
           <a:bodyPr wrap="square" lIns="0" tIns="0" rIns="0" bIns="0" rtlCol="0" anchor="ctr"/>
           <a:lstStyle/>
           <a:p>
-            <a:pPr algn="l" indent="0" marL="0">
+            <a:pPr marL="0" indent="0" algn="l">
               <a:buNone/>
             </a:pPr>
             <a:r>
-              <a:rPr lang="en-US" sz="2800" b="1" dirty="0">
+              <a:rPr lang="en-US" sz="3360" b="1" dirty="0">
                 <a:solidFill>
                   <a:srgbClr val="F2A93B"/>
                 </a:solidFill>
@@ -9003,7 +10830,7 @@
               </a:rPr>
               <a:t>Every video, five minutes, three parts</a:t>
             </a:r>
-            <a:endParaRPr lang="en-US" sz="2800" dirty="0"/>
+            <a:endParaRPr lang="en-US" sz="3360" dirty="0"/>
           </a:p>
         </p:txBody>
       </p:sp>
@@ -9033,13 +10860,20 @@
             <a:prstDash val="solid"/>
           </a:ln>
           <a:effectLst>
-            <a:outerShdw sx="100000" sy="100000" kx="0" ky="0" algn="bl" rotWithShape="0" blurRad="101600" dist="38100" dir="2700000">
+            <a:outerShdw blurRad="101600" dist="38100" dir="2700000" algn="bl" rotWithShape="0">
               <a:srgbClr val="000000">
                 <a:alpha val="25000"/>
               </a:srgbClr>
             </a:outerShdw>
           </a:effectLst>
         </p:spPr>
+        <p:txBody>
+          <a:bodyPr/>
+          <a:lstStyle/>
+          <a:p>
+            <a:endParaRPr lang="en-CA"/>
+          </a:p>
+        </p:txBody>
       </p:sp>
       <p:sp>
         <p:nvSpPr>
@@ -9062,11 +10896,11 @@
           <a:bodyPr wrap="square" lIns="0" tIns="0" rIns="0" bIns="0" rtlCol="0" anchor="ctr"/>
           <a:lstStyle/>
           <a:p>
-            <a:pPr indent="0" marL="0">
+            <a:pPr marL="0" indent="0">
               <a:buNone/>
             </a:pPr>
             <a:r>
-              <a:rPr lang="en-US" sz="3000" b="1" dirty="0">
+              <a:rPr lang="en-US" sz="3600" b="1" dirty="0">
                 <a:solidFill>
                   <a:srgbClr val="F2A93B"/>
                 </a:solidFill>
@@ -9076,7 +10910,7 @@
               </a:rPr>
               <a:t>01</a:t>
             </a:r>
-            <a:endParaRPr lang="en-US" sz="3000" dirty="0"/>
+            <a:endParaRPr lang="en-US" sz="3600" dirty="0"/>
           </a:p>
         </p:txBody>
       </p:sp>
@@ -9101,11 +10935,11 @@
           <a:bodyPr wrap="square" lIns="0" tIns="0" rIns="0" bIns="0" rtlCol="0" anchor="ctr"/>
           <a:lstStyle/>
           <a:p>
-            <a:pPr indent="0" marL="0">
+            <a:pPr marL="0" indent="0">
               <a:buNone/>
             </a:pPr>
             <a:r>
-              <a:rPr lang="en-US" sz="1800" b="1" dirty="0">
+              <a:rPr lang="en-US" sz="2160" b="1" dirty="0">
                 <a:solidFill>
                   <a:srgbClr val="E5E9F0"/>
                 </a:solidFill>
@@ -9115,7 +10949,7 @@
               </a:rPr>
               <a:t>Concept</a:t>
             </a:r>
-            <a:endParaRPr lang="en-US" sz="1800" dirty="0"/>
+            <a:endParaRPr lang="en-US" sz="2160" dirty="0"/>
           </a:p>
         </p:txBody>
       </p:sp>
@@ -9140,14 +10974,14 @@
           <a:bodyPr wrap="square" lIns="0" tIns="0" rIns="0" bIns="0" rtlCol="0" anchor="t"/>
           <a:lstStyle/>
           <a:p>
-            <a:pPr indent="0" marL="0">
+            <a:pPr marL="0" indent="0">
               <a:lnSpc>
                 <a:spcPct val="120000"/>
               </a:lnSpc>
               <a:buNone/>
             </a:pPr>
             <a:r>
-              <a:rPr lang="en-US" sz="1300" dirty="0">
+              <a:rPr lang="en-US" sz="1560" dirty="0">
                 <a:solidFill>
                   <a:srgbClr val="B8C0D0"/>
                 </a:solidFill>
@@ -9157,17 +10991,17 @@
               </a:rPr>
               <a:t>What problem are we solving, in one</a:t>
             </a:r>
-            <a:endParaRPr lang="en-US" sz="1300" dirty="0"/>
-          </a:p>
-          <a:p>
-            <a:pPr indent="0" marL="0">
+            <a:endParaRPr lang="en-US" sz="1560" dirty="0"/>
+          </a:p>
+          <a:p>
+            <a:pPr marL="0" indent="0">
               <a:lnSpc>
                 <a:spcPct val="120000"/>
               </a:lnSpc>
               <a:buNone/>
             </a:pPr>
             <a:r>
-              <a:rPr lang="en-US" sz="1300" dirty="0">
+              <a:rPr lang="en-US" sz="1560" dirty="0">
                 <a:solidFill>
                   <a:srgbClr val="B8C0D0"/>
                 </a:solidFill>
@@ -9177,7 +11011,7 @@
               </a:rPr>
               <a:t>or two plain-English sentences.</a:t>
             </a:r>
-            <a:endParaRPr lang="en-US" sz="1300" dirty="0"/>
+            <a:endParaRPr lang="en-US" sz="1560" dirty="0"/>
           </a:p>
         </p:txBody>
       </p:sp>
@@ -9204,6 +11038,13 @@
             <a:tailEnd type="triangle"/>
           </a:ln>
         </p:spPr>
+        <p:txBody>
+          <a:bodyPr/>
+          <a:lstStyle/>
+          <a:p>
+            <a:endParaRPr lang="en-CA"/>
+          </a:p>
+        </p:txBody>
       </p:sp>
       <p:sp>
         <p:nvSpPr>
@@ -9231,13 +11072,20 @@
             <a:prstDash val="solid"/>
           </a:ln>
           <a:effectLst>
-            <a:outerShdw sx="100000" sy="100000" kx="0" ky="0" algn="bl" rotWithShape="0" blurRad="101600" dist="38100" dir="2700000">
+            <a:outerShdw blurRad="101600" dist="38100" dir="2700000" algn="bl" rotWithShape="0">
               <a:srgbClr val="000000">
                 <a:alpha val="25000"/>
               </a:srgbClr>
             </a:outerShdw>
           </a:effectLst>
         </p:spPr>
+        <p:txBody>
+          <a:bodyPr/>
+          <a:lstStyle/>
+          <a:p>
+            <a:endParaRPr lang="en-CA"/>
+          </a:p>
+        </p:txBody>
       </p:sp>
       <p:sp>
         <p:nvSpPr>
@@ -9260,11 +11108,11 @@
           <a:bodyPr wrap="square" lIns="0" tIns="0" rIns="0" bIns="0" rtlCol="0" anchor="ctr"/>
           <a:lstStyle/>
           <a:p>
-            <a:pPr indent="0" marL="0">
+            <a:pPr marL="0" indent="0">
               <a:buNone/>
             </a:pPr>
             <a:r>
-              <a:rPr lang="en-US" sz="3000" b="1" dirty="0">
+              <a:rPr lang="en-US" sz="3600" b="1" dirty="0">
                 <a:solidFill>
                   <a:srgbClr val="8B98AC"/>
                 </a:solidFill>
@@ -9274,7 +11122,7 @@
               </a:rPr>
               <a:t>02</a:t>
             </a:r>
-            <a:endParaRPr lang="en-US" sz="3000" dirty="0"/>
+            <a:endParaRPr lang="en-US" sz="3600" dirty="0"/>
           </a:p>
         </p:txBody>
       </p:sp>
@@ -9299,11 +11147,11 @@
           <a:bodyPr wrap="square" lIns="0" tIns="0" rIns="0" bIns="0" rtlCol="0" anchor="ctr"/>
           <a:lstStyle/>
           <a:p>
-            <a:pPr indent="0" marL="0">
+            <a:pPr marL="0" indent="0">
               <a:buNone/>
             </a:pPr>
             <a:r>
-              <a:rPr lang="en-US" sz="1800" b="1" dirty="0">
+              <a:rPr lang="en-US" sz="2160" b="1" dirty="0">
                 <a:solidFill>
                   <a:srgbClr val="E5E9F0"/>
                 </a:solidFill>
@@ -9313,7 +11161,7 @@
               </a:rPr>
               <a:t>Code</a:t>
             </a:r>
-            <a:endParaRPr lang="en-US" sz="1800" dirty="0"/>
+            <a:endParaRPr lang="en-US" sz="2160" dirty="0"/>
           </a:p>
         </p:txBody>
       </p:sp>
@@ -9338,14 +11186,14 @@
           <a:bodyPr wrap="square" lIns="0" tIns="0" rIns="0" bIns="0" rtlCol="0" anchor="t"/>
           <a:lstStyle/>
           <a:p>
-            <a:pPr indent="0" marL="0">
+            <a:pPr marL="0" indent="0">
               <a:lnSpc>
                 <a:spcPct val="120000"/>
               </a:lnSpc>
               <a:buNone/>
             </a:pPr>
             <a:r>
-              <a:rPr lang="en-US" sz="1300" dirty="0">
+              <a:rPr lang="en-US" sz="1560" dirty="0">
                 <a:solidFill>
                   <a:srgbClr val="B8C0D0"/>
                 </a:solidFill>
@@ -9355,17 +11203,17 @@
               </a:rPr>
               <a:t>The minimal Spring AI code that</a:t>
             </a:r>
-            <a:endParaRPr lang="en-US" sz="1300" dirty="0"/>
-          </a:p>
-          <a:p>
-            <a:pPr indent="0" marL="0">
+            <a:endParaRPr lang="en-US" sz="1560" dirty="0"/>
+          </a:p>
+          <a:p>
+            <a:pPr marL="0" indent="0">
               <a:lnSpc>
                 <a:spcPct val="120000"/>
               </a:lnSpc>
               <a:buNone/>
             </a:pPr>
             <a:r>
-              <a:rPr lang="en-US" sz="1300" dirty="0">
+              <a:rPr lang="en-US" sz="1560" dirty="0">
                 <a:solidFill>
                   <a:srgbClr val="B8C0D0"/>
                 </a:solidFill>
@@ -9375,7 +11223,7 @@
               </a:rPr>
               <a:t>actually implements it.</a:t>
             </a:r>
-            <a:endParaRPr lang="en-US" sz="1300" dirty="0"/>
+            <a:endParaRPr lang="en-US" sz="1560" dirty="0"/>
           </a:p>
         </p:txBody>
       </p:sp>
@@ -9402,6 +11250,13 @@
             <a:tailEnd type="triangle"/>
           </a:ln>
         </p:spPr>
+        <p:txBody>
+          <a:bodyPr/>
+          <a:lstStyle/>
+          <a:p>
+            <a:endParaRPr lang="en-CA"/>
+          </a:p>
+        </p:txBody>
       </p:sp>
       <p:sp>
         <p:nvSpPr>
@@ -9429,13 +11284,20 @@
             <a:prstDash val="solid"/>
           </a:ln>
           <a:effectLst>
-            <a:outerShdw sx="100000" sy="100000" kx="0" ky="0" algn="bl" rotWithShape="0" blurRad="101600" dist="38100" dir="2700000">
+            <a:outerShdw blurRad="101600" dist="38100" dir="2700000" algn="bl" rotWithShape="0">
               <a:srgbClr val="000000">
                 <a:alpha val="25000"/>
               </a:srgbClr>
             </a:outerShdw>
           </a:effectLst>
         </p:spPr>
+        <p:txBody>
+          <a:bodyPr/>
+          <a:lstStyle/>
+          <a:p>
+            <a:endParaRPr lang="en-CA"/>
+          </a:p>
+        </p:txBody>
       </p:sp>
       <p:sp>
         <p:nvSpPr>
@@ -9458,11 +11320,11 @@
           <a:bodyPr wrap="square" lIns="0" tIns="0" rIns="0" bIns="0" rtlCol="0" anchor="ctr"/>
           <a:lstStyle/>
           <a:p>
-            <a:pPr indent="0" marL="0">
+            <a:pPr marL="0" indent="0">
               <a:buNone/>
             </a:pPr>
             <a:r>
-              <a:rPr lang="en-US" sz="3000" b="1" dirty="0">
+              <a:rPr lang="en-US" sz="3600" b="1" dirty="0">
                 <a:solidFill>
                   <a:srgbClr val="5FE0C5"/>
                 </a:solidFill>
@@ -9472,7 +11334,7 @@
               </a:rPr>
               <a:t>03</a:t>
             </a:r>
-            <a:endParaRPr lang="en-US" sz="3000" dirty="0"/>
+            <a:endParaRPr lang="en-US" sz="3600" dirty="0"/>
           </a:p>
         </p:txBody>
       </p:sp>
@@ -9497,11 +11359,11 @@
           <a:bodyPr wrap="square" lIns="0" tIns="0" rIns="0" bIns="0" rtlCol="0" anchor="ctr"/>
           <a:lstStyle/>
           <a:p>
-            <a:pPr indent="0" marL="0">
+            <a:pPr marL="0" indent="0">
               <a:buNone/>
             </a:pPr>
             <a:r>
-              <a:rPr lang="en-US" sz="1800" b="1" dirty="0">
+              <a:rPr lang="en-US" sz="2160" b="1" dirty="0">
                 <a:solidFill>
                   <a:srgbClr val="E5E9F0"/>
                 </a:solidFill>
@@ -9511,7 +11373,7 @@
               </a:rPr>
               <a:t>Architecture</a:t>
             </a:r>
-            <a:endParaRPr lang="en-US" sz="1800" dirty="0"/>
+            <a:endParaRPr lang="en-US" sz="2160" dirty="0"/>
           </a:p>
         </p:txBody>
       </p:sp>
@@ -9536,14 +11398,14 @@
           <a:bodyPr wrap="square" lIns="0" tIns="0" rIns="0" bIns="0" rtlCol="0" anchor="t"/>
           <a:lstStyle/>
           <a:p>
-            <a:pPr indent="0" marL="0">
+            <a:pPr marL="0" indent="0">
               <a:lnSpc>
                 <a:spcPct val="120000"/>
               </a:lnSpc>
               <a:buNone/>
             </a:pPr>
             <a:r>
-              <a:rPr lang="en-US" sz="1300" dirty="0">
+              <a:rPr lang="en-US" sz="1560" dirty="0">
                 <a:solidFill>
                   <a:srgbClr val="B8C0D0"/>
                 </a:solidFill>
@@ -9553,17 +11415,17 @@
               </a:rPr>
               <a:t>A diagram showing how the pieces</a:t>
             </a:r>
-            <a:endParaRPr lang="en-US" sz="1300" dirty="0"/>
-          </a:p>
-          <a:p>
-            <a:pPr indent="0" marL="0">
+            <a:endParaRPr lang="en-US" sz="1560" dirty="0"/>
+          </a:p>
+          <a:p>
+            <a:pPr marL="0" indent="0">
               <a:lnSpc>
                 <a:spcPct val="120000"/>
               </a:lnSpc>
               <a:buNone/>
             </a:pPr>
             <a:r>
-              <a:rPr lang="en-US" sz="1300" dirty="0">
+              <a:rPr lang="en-US" sz="1560" dirty="0">
                 <a:solidFill>
                   <a:srgbClr val="B8C0D0"/>
                 </a:solidFill>
@@ -9573,7 +11435,7 @@
               </a:rPr>
               <a:t>talk to each other.</a:t>
             </a:r>
-            <a:endParaRPr lang="en-US" sz="1300" dirty="0"/>
+            <a:endParaRPr lang="en-US" sz="1560" dirty="0"/>
           </a:p>
         </p:txBody>
       </p:sp>
@@ -9598,11 +11460,11 @@
           <a:bodyPr wrap="square" lIns="0" tIns="0" rIns="0" bIns="0" rtlCol="0" anchor="ctr"/>
           <a:lstStyle/>
           <a:p>
-            <a:pPr algn="ctr" indent="0" marL="0">
+            <a:pPr marL="0" indent="0" algn="ctr">
               <a:buNone/>
             </a:pPr>
             <a:r>
-              <a:rPr lang="en-US" sz="1300" dirty="0">
+              <a:rPr lang="en-US" sz="1560" dirty="0">
                 <a:solidFill>
                   <a:srgbClr val="8B98AC"/>
                 </a:solidFill>
@@ -9612,7 +11474,7 @@
               </a:rPr>
               <a:t>Total runtime target: under 5 minutes per chapter.</a:t>
             </a:r>
-            <a:endParaRPr lang="en-US" sz="1300" dirty="0"/>
+            <a:endParaRPr lang="en-US" sz="1560" dirty="0"/>
           </a:p>
         </p:txBody>
       </p:sp>
@@ -9632,6 +11494,7 @@
         <a:solidFill>
           <a:srgbClr val="0A0F1C"/>
         </a:solidFill>
+        <a:effectLst/>
       </p:bgPr>
     </p:bg>
     <p:spTree>
@@ -9672,6 +11535,13 @@
             <a:prstDash val="solid"/>
           </a:ln>
         </p:spPr>
+        <p:txBody>
+          <a:bodyPr/>
+          <a:lstStyle/>
+          <a:p>
+            <a:endParaRPr lang="en-CA"/>
+          </a:p>
+        </p:txBody>
       </p:sp>
       <p:sp>
         <p:nvSpPr>
@@ -9697,6 +11567,13 @@
             <a:prstDash val="solid"/>
           </a:ln>
         </p:spPr>
+        <p:txBody>
+          <a:bodyPr/>
+          <a:lstStyle/>
+          <a:p>
+            <a:endParaRPr lang="en-CA"/>
+          </a:p>
+        </p:txBody>
       </p:sp>
       <p:sp>
         <p:nvSpPr>
@@ -9722,6 +11599,13 @@
             <a:prstDash val="solid"/>
           </a:ln>
         </p:spPr>
+        <p:txBody>
+          <a:bodyPr/>
+          <a:lstStyle/>
+          <a:p>
+            <a:endParaRPr lang="en-CA"/>
+          </a:p>
+        </p:txBody>
       </p:sp>
       <p:sp>
         <p:nvSpPr>
@@ -9744,6 +11628,13 @@
           </a:solidFill>
           <a:ln/>
         </p:spPr>
+        <p:txBody>
+          <a:bodyPr/>
+          <a:lstStyle/>
+          <a:p>
+            <a:endParaRPr lang="en-CA"/>
+          </a:p>
+        </p:txBody>
       </p:sp>
       <p:sp>
         <p:nvSpPr>
@@ -9766,6 +11657,13 @@
           </a:solidFill>
           <a:ln/>
         </p:spPr>
+        <p:txBody>
+          <a:bodyPr/>
+          <a:lstStyle/>
+          <a:p>
+            <a:endParaRPr lang="en-CA"/>
+          </a:p>
+        </p:txBody>
       </p:sp>
       <p:sp>
         <p:nvSpPr>
@@ -9788,6 +11686,13 @@
           </a:solidFill>
           <a:ln/>
         </p:spPr>
+        <p:txBody>
+          <a:bodyPr/>
+          <a:lstStyle/>
+          <a:p>
+            <a:endParaRPr lang="en-CA"/>
+          </a:p>
+        </p:txBody>
       </p:sp>
       <p:sp>
         <p:nvSpPr>
@@ -9810,6 +11715,13 @@
           </a:solidFill>
           <a:ln/>
         </p:spPr>
+        <p:txBody>
+          <a:bodyPr/>
+          <a:lstStyle/>
+          <a:p>
+            <a:endParaRPr lang="en-CA"/>
+          </a:p>
+        </p:txBody>
       </p:sp>
       <p:sp>
         <p:nvSpPr>
@@ -9835,6 +11747,13 @@
             <a:prstDash val="solid"/>
           </a:ln>
         </p:spPr>
+        <p:txBody>
+          <a:bodyPr/>
+          <a:lstStyle/>
+          <a:p>
+            <a:endParaRPr lang="en-CA"/>
+          </a:p>
+        </p:txBody>
       </p:sp>
       <p:sp>
         <p:nvSpPr>
@@ -9860,6 +11779,13 @@
             <a:prstDash val="solid"/>
           </a:ln>
         </p:spPr>
+        <p:txBody>
+          <a:bodyPr/>
+          <a:lstStyle/>
+          <a:p>
+            <a:endParaRPr lang="en-CA"/>
+          </a:p>
+        </p:txBody>
       </p:sp>
       <p:sp>
         <p:nvSpPr>
@@ -9885,6 +11811,13 @@
             <a:prstDash val="solid"/>
           </a:ln>
         </p:spPr>
+        <p:txBody>
+          <a:bodyPr/>
+          <a:lstStyle/>
+          <a:p>
+            <a:endParaRPr lang="en-CA"/>
+          </a:p>
+        </p:txBody>
       </p:sp>
       <p:sp>
         <p:nvSpPr>
@@ -9907,6 +11840,13 @@
           </a:solidFill>
           <a:ln/>
         </p:spPr>
+        <p:txBody>
+          <a:bodyPr/>
+          <a:lstStyle/>
+          <a:p>
+            <a:endParaRPr lang="en-CA"/>
+          </a:p>
+        </p:txBody>
       </p:sp>
       <p:sp>
         <p:nvSpPr>
@@ -9929,6 +11869,13 @@
           </a:solidFill>
           <a:ln/>
         </p:spPr>
+        <p:txBody>
+          <a:bodyPr/>
+          <a:lstStyle/>
+          <a:p>
+            <a:endParaRPr lang="en-CA"/>
+          </a:p>
+        </p:txBody>
       </p:sp>
       <p:sp>
         <p:nvSpPr>
@@ -9951,6 +11898,13 @@
           </a:solidFill>
           <a:ln/>
         </p:spPr>
+        <p:txBody>
+          <a:bodyPr/>
+          <a:lstStyle/>
+          <a:p>
+            <a:endParaRPr lang="en-CA"/>
+          </a:p>
+        </p:txBody>
       </p:sp>
       <p:sp>
         <p:nvSpPr>
@@ -9973,6 +11927,13 @@
           </a:solidFill>
           <a:ln/>
         </p:spPr>
+        <p:txBody>
+          <a:bodyPr/>
+          <a:lstStyle/>
+          <a:p>
+            <a:endParaRPr lang="en-CA"/>
+          </a:p>
+        </p:txBody>
       </p:sp>
       <p:sp>
         <p:nvSpPr>
@@ -9995,11 +11956,11 @@
           <a:bodyPr wrap="square" lIns="0" tIns="0" rIns="0" bIns="0" rtlCol="0" anchor="ctr"/>
           <a:lstStyle/>
           <a:p>
-            <a:pPr indent="0" marL="0">
+            <a:pPr marL="0" indent="0">
               <a:buNone/>
             </a:pPr>
             <a:r>
-              <a:rPr lang="en-US" sz="900" dirty="0">
+              <a:rPr lang="en-US" sz="1080" dirty="0">
                 <a:solidFill>
                   <a:srgbClr val="5B6478"/>
                 </a:solidFill>
@@ -10009,7 +11970,7 @@
               </a:rPr>
               <a:t>PromptToApps</a:t>
             </a:r>
-            <a:endParaRPr lang="en-US" sz="900" dirty="0"/>
+            <a:endParaRPr lang="en-US" sz="1080" dirty="0"/>
           </a:p>
         </p:txBody>
       </p:sp>
@@ -10034,11 +11995,11 @@
           <a:bodyPr wrap="square" lIns="0" tIns="0" rIns="0" bIns="0" rtlCol="0" anchor="ctr"/>
           <a:lstStyle/>
           <a:p>
-            <a:pPr algn="r" indent="0" marL="0">
+            <a:pPr marL="0" indent="0" algn="r">
               <a:buNone/>
             </a:pPr>
             <a:r>
-              <a:rPr lang="en-US" sz="900" dirty="0">
+              <a:rPr lang="en-US" sz="1080" dirty="0">
                 <a:solidFill>
                   <a:srgbClr val="5B6478"/>
                 </a:solidFill>
@@ -10046,9 +12007,9 @@
                 <a:ea typeface="Courier New" pitchFamily="34" charset="-122"/>
                 <a:cs typeface="Courier New" pitchFamily="34" charset="-120"/>
               </a:rPr>
-              <a:t>8 / 9</a:t>
-            </a:r>
-            <a:endParaRPr lang="en-US" sz="900" dirty="0"/>
+              <a:t>8 / 10</a:t>
+            </a:r>
+            <a:endParaRPr lang="en-US" sz="1080" dirty="0"/>
           </a:p>
         </p:txBody>
       </p:sp>
@@ -10073,11 +12034,11 @@
           <a:bodyPr wrap="square" lIns="0" tIns="0" rIns="0" bIns="0" rtlCol="0" anchor="ctr"/>
           <a:lstStyle/>
           <a:p>
-            <a:pPr indent="0" marL="0">
+            <a:pPr marL="0" indent="0">
               <a:buNone/>
             </a:pPr>
             <a:r>
-              <a:rPr lang="en-US" sz="1200" spc="200" kern="0" dirty="0">
+              <a:rPr lang="en-US" sz="1440" kern="0" spc="200" dirty="0">
                 <a:solidFill>
                   <a:srgbClr val="5FE0C5"/>
                 </a:solidFill>
@@ -10087,7 +12048,7 @@
               </a:rPr>
               <a:t>BEFORE YOU START</a:t>
             </a:r>
-            <a:endParaRPr lang="en-US" sz="1200" dirty="0"/>
+            <a:endParaRPr lang="en-US" sz="1440" dirty="0"/>
           </a:p>
         </p:txBody>
       </p:sp>
@@ -10112,11 +12073,11 @@
           <a:bodyPr wrap="square" lIns="0" tIns="0" rIns="0" bIns="0" rtlCol="0" anchor="ctr"/>
           <a:lstStyle/>
           <a:p>
-            <a:pPr algn="l" indent="0" marL="0">
+            <a:pPr marL="0" indent="0" algn="l">
               <a:buNone/>
             </a:pPr>
             <a:r>
-              <a:rPr lang="en-US" sz="2800" b="1" dirty="0">
+              <a:rPr lang="en-US" sz="3360" b="1" dirty="0">
                 <a:solidFill>
                   <a:srgbClr val="F2A93B"/>
                 </a:solidFill>
@@ -10126,7 +12087,7 @@
               </a:rPr>
               <a:t>What you need</a:t>
             </a:r>
-            <a:endParaRPr lang="en-US" sz="2800" dirty="0"/>
+            <a:endParaRPr lang="en-US" sz="3360" dirty="0"/>
           </a:p>
         </p:txBody>
       </p:sp>
@@ -10156,13 +12117,20 @@
             <a:prstDash val="solid"/>
           </a:ln>
           <a:effectLst>
-            <a:outerShdw sx="100000" sy="100000" kx="0" ky="0" algn="bl" rotWithShape="0" blurRad="76200" dist="38100" dir="2700000">
+            <a:outerShdw blurRad="76200" dist="38100" dir="2700000" algn="bl" rotWithShape="0">
               <a:srgbClr val="000000">
                 <a:alpha val="20000"/>
               </a:srgbClr>
             </a:outerShdw>
           </a:effectLst>
         </p:spPr>
+        <p:txBody>
+          <a:bodyPr/>
+          <a:lstStyle/>
+          <a:p>
+            <a:endParaRPr lang="en-CA"/>
+          </a:p>
+        </p:txBody>
       </p:sp>
       <p:sp>
         <p:nvSpPr>
@@ -10185,11 +12153,11 @@
           <a:bodyPr wrap="square" lIns="0" tIns="0" rIns="0" bIns="0" rtlCol="0" anchor="ctr"/>
           <a:lstStyle/>
           <a:p>
-            <a:pPr algn="ctr" indent="0" marL="0">
+            <a:pPr marL="0" indent="0" algn="ctr">
               <a:buNone/>
             </a:pPr>
             <a:r>
-              <a:rPr lang="en-US" sz="1600" b="1" dirty="0">
+              <a:rPr lang="en-US" sz="1920" b="1" dirty="0">
                 <a:solidFill>
                   <a:srgbClr val="F2A93B"/>
                 </a:solidFill>
@@ -10199,7 +12167,7 @@
               </a:rPr>
               <a:t>Java 21+</a:t>
             </a:r>
-            <a:endParaRPr lang="en-US" sz="1600" dirty="0"/>
+            <a:endParaRPr lang="en-US" sz="1920" dirty="0"/>
           </a:p>
         </p:txBody>
       </p:sp>
@@ -10224,14 +12192,14 @@
           <a:bodyPr wrap="square" lIns="0" tIns="0" rIns="0" bIns="0" rtlCol="0" anchor="t"/>
           <a:lstStyle/>
           <a:p>
-            <a:pPr algn="ctr" indent="0" marL="0">
+            <a:pPr marL="0" indent="0" algn="ctr">
               <a:lnSpc>
                 <a:spcPct val="120000"/>
               </a:lnSpc>
               <a:buNone/>
             </a:pPr>
             <a:r>
-              <a:rPr lang="en-US" sz="1200" dirty="0">
+              <a:rPr lang="en-US" sz="1440" dirty="0">
                 <a:solidFill>
                   <a:srgbClr val="B8C0D0"/>
                 </a:solidFill>
@@ -10241,7 +12209,7 @@
               </a:rPr>
               <a:t>Required for every chapter</a:t>
             </a:r>
-            <a:endParaRPr lang="en-US" sz="1200" dirty="0"/>
+            <a:endParaRPr lang="en-US" sz="1440" dirty="0"/>
           </a:p>
         </p:txBody>
       </p:sp>
@@ -10271,13 +12239,20 @@
             <a:prstDash val="solid"/>
           </a:ln>
           <a:effectLst>
-            <a:outerShdw sx="100000" sy="100000" kx="0" ky="0" algn="bl" rotWithShape="0" blurRad="76200" dist="38100" dir="2700000">
+            <a:outerShdw blurRad="76200" dist="38100" dir="2700000" algn="bl" rotWithShape="0">
               <a:srgbClr val="000000">
                 <a:alpha val="20000"/>
               </a:srgbClr>
             </a:outerShdw>
           </a:effectLst>
         </p:spPr>
+        <p:txBody>
+          <a:bodyPr/>
+          <a:lstStyle/>
+          <a:p>
+            <a:endParaRPr lang="en-CA"/>
+          </a:p>
+        </p:txBody>
       </p:sp>
       <p:sp>
         <p:nvSpPr>
@@ -10300,11 +12275,11 @@
           <a:bodyPr wrap="square" lIns="0" tIns="0" rIns="0" bIns="0" rtlCol="0" anchor="ctr"/>
           <a:lstStyle/>
           <a:p>
-            <a:pPr algn="ctr" indent="0" marL="0">
+            <a:pPr marL="0" indent="0" algn="ctr">
               <a:buNone/>
             </a:pPr>
             <a:r>
-              <a:rPr lang="en-US" sz="1600" b="1" dirty="0">
+              <a:rPr lang="en-US" sz="1920" b="1" dirty="0">
                 <a:solidFill>
                   <a:srgbClr val="F2A93B"/>
                 </a:solidFill>
@@ -10314,7 +12289,7 @@
               </a:rPr>
               <a:t>Maven 3.8+</a:t>
             </a:r>
-            <a:endParaRPr lang="en-US" sz="1600" dirty="0"/>
+            <a:endParaRPr lang="en-US" sz="1920" dirty="0"/>
           </a:p>
         </p:txBody>
       </p:sp>
@@ -10339,14 +12314,14 @@
           <a:bodyPr wrap="square" lIns="0" tIns="0" rIns="0" bIns="0" rtlCol="0" anchor="t"/>
           <a:lstStyle/>
           <a:p>
-            <a:pPr algn="ctr" indent="0" marL="0">
+            <a:pPr marL="0" indent="0" algn="ctr">
               <a:lnSpc>
                 <a:spcPct val="120000"/>
               </a:lnSpc>
               <a:buNone/>
             </a:pPr>
             <a:r>
-              <a:rPr lang="en-US" sz="1200" dirty="0">
+              <a:rPr lang="en-US" sz="1440" dirty="0">
                 <a:solidFill>
                   <a:srgbClr val="B8C0D0"/>
                 </a:solidFill>
@@ -10356,7 +12331,7 @@
               </a:rPr>
               <a:t>Required for every chapter</a:t>
             </a:r>
-            <a:endParaRPr lang="en-US" sz="1200" dirty="0"/>
+            <a:endParaRPr lang="en-US" sz="1440" dirty="0"/>
           </a:p>
         </p:txBody>
       </p:sp>
@@ -10386,13 +12361,20 @@
             <a:prstDash val="solid"/>
           </a:ln>
           <a:effectLst>
-            <a:outerShdw sx="100000" sy="100000" kx="0" ky="0" algn="bl" rotWithShape="0" blurRad="76200" dist="38100" dir="2700000">
+            <a:outerShdw blurRad="76200" dist="38100" dir="2700000" algn="bl" rotWithShape="0">
               <a:srgbClr val="000000">
                 <a:alpha val="20000"/>
               </a:srgbClr>
             </a:outerShdw>
           </a:effectLst>
         </p:spPr>
+        <p:txBody>
+          <a:bodyPr/>
+          <a:lstStyle/>
+          <a:p>
+            <a:endParaRPr lang="en-CA"/>
+          </a:p>
+        </p:txBody>
       </p:sp>
       <p:sp>
         <p:nvSpPr>
@@ -10415,11 +12397,11 @@
           <a:bodyPr wrap="square" lIns="0" tIns="0" rIns="0" bIns="0" rtlCol="0" anchor="ctr"/>
           <a:lstStyle/>
           <a:p>
-            <a:pPr algn="ctr" indent="0" marL="0">
+            <a:pPr marL="0" indent="0" algn="ctr">
               <a:buNone/>
             </a:pPr>
             <a:r>
-              <a:rPr lang="en-US" sz="1600" b="1" dirty="0">
+              <a:rPr lang="en-US" sz="1920" b="1" dirty="0">
                 <a:solidFill>
                   <a:srgbClr val="5FE0C5"/>
                 </a:solidFill>
@@ -10429,7 +12411,7 @@
               </a:rPr>
               <a:t>Ollama</a:t>
             </a:r>
-            <a:endParaRPr lang="en-US" sz="1600" dirty="0"/>
+            <a:endParaRPr lang="en-US" sz="1920" dirty="0"/>
           </a:p>
         </p:txBody>
       </p:sp>
@@ -10454,14 +12436,14 @@
           <a:bodyPr wrap="square" lIns="0" tIns="0" rIns="0" bIns="0" rtlCol="0" anchor="t"/>
           <a:lstStyle/>
           <a:p>
-            <a:pPr algn="ctr" indent="0" marL="0">
+            <a:pPr marL="0" indent="0" algn="ctr">
               <a:lnSpc>
                 <a:spcPct val="120000"/>
               </a:lnSpc>
               <a:buNone/>
             </a:pPr>
             <a:r>
-              <a:rPr lang="en-US" sz="1200" dirty="0">
+              <a:rPr lang="en-US" sz="1440" dirty="0">
                 <a:solidFill>
                   <a:srgbClr val="B8C0D0"/>
                 </a:solidFill>
@@ -10471,7 +12453,7 @@
               </a:rPr>
               <a:t>Required for every chapter</a:t>
             </a:r>
-            <a:endParaRPr lang="en-US" sz="1200" dirty="0"/>
+            <a:endParaRPr lang="en-US" sz="1440" dirty="0"/>
           </a:p>
         </p:txBody>
       </p:sp>
@@ -10501,13 +12483,20 @@
             <a:prstDash val="solid"/>
           </a:ln>
           <a:effectLst>
-            <a:outerShdw sx="100000" sy="100000" kx="0" ky="0" algn="bl" rotWithShape="0" blurRad="76200" dist="38100" dir="2700000">
+            <a:outerShdw blurRad="76200" dist="38100" dir="2700000" algn="bl" rotWithShape="0">
               <a:srgbClr val="000000">
                 <a:alpha val="20000"/>
               </a:srgbClr>
             </a:outerShdw>
           </a:effectLst>
         </p:spPr>
+        <p:txBody>
+          <a:bodyPr/>
+          <a:lstStyle/>
+          <a:p>
+            <a:endParaRPr lang="en-CA"/>
+          </a:p>
+        </p:txBody>
       </p:sp>
       <p:sp>
         <p:nvSpPr>
@@ -10530,11 +12519,11 @@
           <a:bodyPr wrap="square" lIns="0" tIns="0" rIns="0" bIns="0" rtlCol="0" anchor="ctr"/>
           <a:lstStyle/>
           <a:p>
-            <a:pPr algn="ctr" indent="0" marL="0">
+            <a:pPr marL="0" indent="0" algn="ctr">
               <a:buNone/>
             </a:pPr>
             <a:r>
-              <a:rPr lang="en-US" sz="1600" b="1" dirty="0">
+              <a:rPr lang="en-US" sz="1920" b="1" dirty="0">
                 <a:solidFill>
                   <a:srgbClr val="8B98AC"/>
                 </a:solidFill>
@@ -10544,7 +12533,7 @@
               </a:rPr>
               <a:t>Docker</a:t>
             </a:r>
-            <a:endParaRPr lang="en-US" sz="1600" dirty="0"/>
+            <a:endParaRPr lang="en-US" sz="1920" dirty="0"/>
           </a:p>
         </p:txBody>
       </p:sp>
@@ -10569,14 +12558,14 @@
           <a:bodyPr wrap="square" lIns="0" tIns="0" rIns="0" bIns="0" rtlCol="0" anchor="t"/>
           <a:lstStyle/>
           <a:p>
-            <a:pPr algn="ctr" indent="0" marL="0">
+            <a:pPr marL="0" indent="0" algn="ctr">
               <a:lnSpc>
                 <a:spcPct val="120000"/>
               </a:lnSpc>
               <a:buNone/>
             </a:pPr>
             <a:r>
-              <a:rPr lang="en-US" sz="1200" dirty="0">
+              <a:rPr lang="en-US" sz="1440" dirty="0">
                 <a:solidFill>
                   <a:srgbClr val="B8C0D0"/>
                 </a:solidFill>
@@ -10586,17 +12575,17 @@
               </a:rPr>
               <a:t>Only for Chapters 8 &amp; 9</a:t>
             </a:r>
-            <a:endParaRPr lang="en-US" sz="1200" dirty="0"/>
-          </a:p>
-          <a:p>
-            <a:pPr algn="ctr" indent="0" marL="0">
+            <a:endParaRPr lang="en-US" sz="1440" dirty="0"/>
+          </a:p>
+          <a:p>
+            <a:pPr marL="0" indent="0" algn="ctr">
               <a:lnSpc>
                 <a:spcPct val="120000"/>
               </a:lnSpc>
               <a:buNone/>
             </a:pPr>
             <a:r>
-              <a:rPr lang="en-US" sz="1200" dirty="0">
+              <a:rPr lang="en-US" sz="1440" dirty="0">
                 <a:solidFill>
                   <a:srgbClr val="B8C0D0"/>
                 </a:solidFill>
@@ -10606,7 +12595,7 @@
               </a:rPr>
               <a:t>(PostgreSQL + pgvector, Neo4j)</a:t>
             </a:r>
-            <a:endParaRPr lang="en-US" sz="1200" dirty="0"/>
+            <a:endParaRPr lang="en-US" sz="1440" dirty="0"/>
           </a:p>
         </p:txBody>
       </p:sp>
@@ -10631,11 +12620,11 @@
           <a:bodyPr wrap="square" lIns="0" tIns="0" rIns="0" bIns="0" rtlCol="0" anchor="ctr"/>
           <a:lstStyle/>
           <a:p>
-            <a:pPr algn="ctr" indent="0" marL="0">
+            <a:pPr marL="0" indent="0" algn="ctr">
               <a:buNone/>
             </a:pPr>
             <a:r>
-              <a:rPr lang="en-US" sz="1400" dirty="0">
+              <a:rPr lang="en-US" sz="1680" dirty="0">
                 <a:solidFill>
                   <a:srgbClr val="5FE0C5"/>
                 </a:solidFill>
@@ -10645,11 +12634,8 @@
               </a:rPr>
               <a:t>ollama pull llama3.2</a:t>
             </a:r>
-            <a:pPr algn="ctr" indent="0" marL="0">
-              <a:buNone/>
-            </a:pPr>
-            <a:r>
-              <a:rPr lang="en-US" sz="1400" dirty="0">
+            <a:r>
+              <a:rPr lang="en-US" sz="1680" dirty="0">
                 <a:solidFill>
                   <a:srgbClr val="5B6478"/>
                 </a:solidFill>
@@ -10659,11 +12645,8 @@
               </a:rPr>
               <a:t>   ·   </a:t>
             </a:r>
-            <a:pPr algn="ctr" indent="0" marL="0">
-              <a:buNone/>
-            </a:pPr>
-            <a:r>
-              <a:rPr lang="en-US" sz="1400" dirty="0">
+            <a:r>
+              <a:rPr lang="en-US" sz="1680" dirty="0">
                 <a:solidFill>
                   <a:srgbClr val="5FE0C5"/>
                 </a:solidFill>
@@ -10673,7 +12656,7 @@
               </a:rPr>
               <a:t>ollama pull nomic-embed-text</a:t>
             </a:r>
-            <a:endParaRPr lang="en-US" sz="1400" dirty="0"/>
+            <a:endParaRPr lang="en-US" sz="1680" dirty="0"/>
           </a:p>
         </p:txBody>
       </p:sp>
@@ -10687,12 +12670,13 @@
 
 <file path=ppt/slides/slide9.xml><?xml version="1.0" encoding="utf-8"?>
 <p:sld xmlns:a="http://schemas.openxmlformats.org/drawingml/2006/main" xmlns:r="http://schemas.openxmlformats.org/officeDocument/2006/relationships" xmlns:p="http://schemas.openxmlformats.org/presentationml/2006/main">
-  <p:cSld name="Slide 9">
+  <p:cSld name="Slide 10">
     <p:bg>
       <p:bgPr>
         <a:solidFill>
           <a:srgbClr val="0A0F1C"/>
         </a:solidFill>
+        <a:effectLst/>
       </p:bgPr>
     </p:bg>
     <p:spTree>
@@ -10733,6 +12717,13 @@
             <a:prstDash val="solid"/>
           </a:ln>
         </p:spPr>
+        <p:txBody>
+          <a:bodyPr/>
+          <a:lstStyle/>
+          <a:p>
+            <a:endParaRPr lang="en-CA"/>
+          </a:p>
+        </p:txBody>
       </p:sp>
       <p:sp>
         <p:nvSpPr>
@@ -10758,6 +12749,13 @@
             <a:prstDash val="solid"/>
           </a:ln>
         </p:spPr>
+        <p:txBody>
+          <a:bodyPr/>
+          <a:lstStyle/>
+          <a:p>
+            <a:endParaRPr lang="en-CA"/>
+          </a:p>
+        </p:txBody>
       </p:sp>
       <p:sp>
         <p:nvSpPr>
@@ -10783,6 +12781,13 @@
             <a:prstDash val="solid"/>
           </a:ln>
         </p:spPr>
+        <p:txBody>
+          <a:bodyPr/>
+          <a:lstStyle/>
+          <a:p>
+            <a:endParaRPr lang="en-CA"/>
+          </a:p>
+        </p:txBody>
       </p:sp>
       <p:sp>
         <p:nvSpPr>
@@ -10805,6 +12810,13 @@
           </a:solidFill>
           <a:ln/>
         </p:spPr>
+        <p:txBody>
+          <a:bodyPr/>
+          <a:lstStyle/>
+          <a:p>
+            <a:endParaRPr lang="en-CA"/>
+          </a:p>
+        </p:txBody>
       </p:sp>
       <p:sp>
         <p:nvSpPr>
@@ -10827,6 +12839,13 @@
           </a:solidFill>
           <a:ln/>
         </p:spPr>
+        <p:txBody>
+          <a:bodyPr/>
+          <a:lstStyle/>
+          <a:p>
+            <a:endParaRPr lang="en-CA"/>
+          </a:p>
+        </p:txBody>
       </p:sp>
       <p:sp>
         <p:nvSpPr>
@@ -10849,6 +12868,13 @@
           </a:solidFill>
           <a:ln/>
         </p:spPr>
+        <p:txBody>
+          <a:bodyPr/>
+          <a:lstStyle/>
+          <a:p>
+            <a:endParaRPr lang="en-CA"/>
+          </a:p>
+        </p:txBody>
       </p:sp>
       <p:sp>
         <p:nvSpPr>
@@ -10871,6 +12897,13 @@
           </a:solidFill>
           <a:ln/>
         </p:spPr>
+        <p:txBody>
+          <a:bodyPr/>
+          <a:lstStyle/>
+          <a:p>
+            <a:endParaRPr lang="en-CA"/>
+          </a:p>
+        </p:txBody>
       </p:sp>
       <p:sp>
         <p:nvSpPr>
@@ -10896,6 +12929,13 @@
             <a:prstDash val="solid"/>
           </a:ln>
         </p:spPr>
+        <p:txBody>
+          <a:bodyPr/>
+          <a:lstStyle/>
+          <a:p>
+            <a:endParaRPr lang="en-CA"/>
+          </a:p>
+        </p:txBody>
       </p:sp>
       <p:sp>
         <p:nvSpPr>
@@ -10921,6 +12961,13 @@
             <a:prstDash val="solid"/>
           </a:ln>
         </p:spPr>
+        <p:txBody>
+          <a:bodyPr/>
+          <a:lstStyle/>
+          <a:p>
+            <a:endParaRPr lang="en-CA"/>
+          </a:p>
+        </p:txBody>
       </p:sp>
       <p:sp>
         <p:nvSpPr>
@@ -10946,6 +12993,13 @@
             <a:prstDash val="solid"/>
           </a:ln>
         </p:spPr>
+        <p:txBody>
+          <a:bodyPr/>
+          <a:lstStyle/>
+          <a:p>
+            <a:endParaRPr lang="en-CA"/>
+          </a:p>
+        </p:txBody>
       </p:sp>
       <p:sp>
         <p:nvSpPr>
@@ -10968,6 +13022,13 @@
           </a:solidFill>
           <a:ln/>
         </p:spPr>
+        <p:txBody>
+          <a:bodyPr/>
+          <a:lstStyle/>
+          <a:p>
+            <a:endParaRPr lang="en-CA"/>
+          </a:p>
+        </p:txBody>
       </p:sp>
       <p:sp>
         <p:nvSpPr>
@@ -10990,6 +13051,13 @@
           </a:solidFill>
           <a:ln/>
         </p:spPr>
+        <p:txBody>
+          <a:bodyPr/>
+          <a:lstStyle/>
+          <a:p>
+            <a:endParaRPr lang="en-CA"/>
+          </a:p>
+        </p:txBody>
       </p:sp>
       <p:sp>
         <p:nvSpPr>
@@ -11012,6 +13080,13 @@
           </a:solidFill>
           <a:ln/>
         </p:spPr>
+        <p:txBody>
+          <a:bodyPr/>
+          <a:lstStyle/>
+          <a:p>
+            <a:endParaRPr lang="en-CA"/>
+          </a:p>
+        </p:txBody>
       </p:sp>
       <p:sp>
         <p:nvSpPr>
@@ -11034,6 +13109,13 @@
           </a:solidFill>
           <a:ln/>
         </p:spPr>
+        <p:txBody>
+          <a:bodyPr/>
+          <a:lstStyle/>
+          <a:p>
+            <a:endParaRPr lang="en-CA"/>
+          </a:p>
+        </p:txBody>
       </p:sp>
       <p:sp>
         <p:nvSpPr>
@@ -11056,11 +13138,11 @@
           <a:bodyPr wrap="square" lIns="0" tIns="0" rIns="0" bIns="0" rtlCol="0" anchor="ctr"/>
           <a:lstStyle/>
           <a:p>
-            <a:pPr indent="0" marL="0">
+            <a:pPr marL="0" indent="0">
               <a:buNone/>
             </a:pPr>
             <a:r>
-              <a:rPr lang="en-US" sz="900" dirty="0">
+              <a:rPr lang="en-US" sz="1080" dirty="0">
                 <a:solidFill>
                   <a:srgbClr val="5B6478"/>
                 </a:solidFill>
@@ -11070,7 +13152,7 @@
               </a:rPr>
               <a:t>PromptToApps</a:t>
             </a:r>
-            <a:endParaRPr lang="en-US" sz="900" dirty="0"/>
+            <a:endParaRPr lang="en-US" sz="1080" dirty="0"/>
           </a:p>
         </p:txBody>
       </p:sp>
@@ -11095,11 +13177,11 @@
           <a:bodyPr wrap="square" lIns="0" tIns="0" rIns="0" bIns="0" rtlCol="0" anchor="ctr"/>
           <a:lstStyle/>
           <a:p>
-            <a:pPr algn="r" indent="0" marL="0">
+            <a:pPr marL="0" indent="0" algn="r">
               <a:buNone/>
             </a:pPr>
             <a:r>
-              <a:rPr lang="en-US" sz="900" dirty="0">
+              <a:rPr lang="en-US" sz="1080" dirty="0">
                 <a:solidFill>
                   <a:srgbClr val="5B6478"/>
                 </a:solidFill>
@@ -11107,9 +13189,9 @@
                 <a:ea typeface="Courier New" pitchFamily="34" charset="-122"/>
                 <a:cs typeface="Courier New" pitchFamily="34" charset="-120"/>
               </a:rPr>
-              <a:t>9 / 9</a:t>
-            </a:r>
-            <a:endParaRPr lang="en-US" sz="900" dirty="0"/>
+              <a:t>10 / 10</a:t>
+            </a:r>
+            <a:endParaRPr lang="en-US" sz="1080" dirty="0"/>
           </a:p>
         </p:txBody>
       </p:sp>
@@ -11121,8 +13203,8 @@
         </p:nvSpPr>
         <p:spPr>
           <a:xfrm>
-            <a:off x="5577840" y="945490"/>
-            <a:ext cx="502920" cy="502920"/>
+            <a:off x="640080" y="164592"/>
+            <a:ext cx="7315200" cy="274320"/>
           </a:xfrm>
           <a:prstGeom prst="rect">
             <a:avLst/>
@@ -11134,56 +13216,34 @@
           <a:bodyPr wrap="square" lIns="0" tIns="0" rIns="0" bIns="0" rtlCol="0" anchor="ctr"/>
           <a:lstStyle/>
           <a:p>
-            <a:pPr algn="ctr" indent="0" marL="0">
+            <a:pPr marL="0" indent="0">
               <a:buNone/>
             </a:pPr>
             <a:r>
-              <a:rPr lang="en-US" sz="3080" b="1" dirty="0">
-                <a:solidFill>
-                  <a:srgbClr val="F2A93B"/>
+              <a:rPr lang="en-US" sz="1440" kern="0" spc="200" dirty="0">
+                <a:solidFill>
+                  <a:srgbClr val="5FE0C5"/>
                 </a:solidFill>
                 <a:latin typeface="Courier New" pitchFamily="34" charset="0"/>
                 <a:ea typeface="Courier New" pitchFamily="34" charset="-122"/>
                 <a:cs typeface="Courier New" pitchFamily="34" charset="-120"/>
               </a:rPr>
-              <a:t>&gt;</a:t>
-            </a:r>
-            <a:endParaRPr lang="en-US" sz="3080" dirty="0"/>
-          </a:p>
-        </p:txBody>
-      </p:sp>
-      <p:sp>
-        <p:nvSpPr>
-          <p:cNvPr id="19" name="Shape 17"/>
-          <p:cNvSpPr/>
-          <p:nvPr/>
-        </p:nvSpPr>
-        <p:spPr>
-          <a:xfrm>
-            <a:off x="6000293" y="1186891"/>
-            <a:ext cx="341986" cy="120701"/>
-          </a:xfrm>
-          <a:prstGeom prst="roundRect">
-            <a:avLst>
-              <a:gd name="adj" fmla="val 50000"/>
-            </a:avLst>
-          </a:prstGeom>
-          <a:solidFill>
-            <a:srgbClr val="5FE0C5"/>
-          </a:solidFill>
-          <a:ln/>
-        </p:spPr>
-      </p:sp>
-      <p:sp>
-        <p:nvSpPr>
-          <p:cNvPr id="20" name="Text 18"/>
-          <p:cNvSpPr/>
-          <p:nvPr/>
-        </p:nvSpPr>
-        <p:spPr>
-          <a:xfrm>
-            <a:off x="0" y="1783080"/>
-            <a:ext cx="12161520" cy="731520"/>
+              <a:t>CREDITS &amp; THANKS</a:t>
+            </a:r>
+            <a:endParaRPr lang="en-US" sz="1440" dirty="0"/>
+          </a:p>
+        </p:txBody>
+      </p:sp>
+      <p:sp>
+        <p:nvSpPr>
+          <p:cNvPr id="19" name="Text 17"/>
+          <p:cNvSpPr/>
+          <p:nvPr/>
+        </p:nvSpPr>
+        <p:spPr>
+          <a:xfrm>
+            <a:off x="640080" y="457200"/>
+            <a:ext cx="10881360" cy="640080"/>
           </a:xfrm>
           <a:prstGeom prst="rect">
             <a:avLst/>
@@ -11195,21 +13255,63 @@
           <a:bodyPr wrap="square" lIns="0" tIns="0" rIns="0" bIns="0" rtlCol="0" anchor="ctr"/>
           <a:lstStyle/>
           <a:p>
-            <a:pPr algn="ctr" indent="0" marL="0">
+            <a:pPr marL="0" indent="0" algn="l">
               <a:buNone/>
             </a:pPr>
             <a:r>
-              <a:rPr lang="en-US" sz="3600" b="1" dirty="0">
-                <a:solidFill>
-                  <a:srgbClr val="E5E9F0"/>
+              <a:rPr lang="en-US" sz="3360" b="1" dirty="0">
+                <a:solidFill>
+                  <a:srgbClr val="F2A93B"/>
                 </a:solidFill>
                 <a:latin typeface="Courier New" pitchFamily="34" charset="0"/>
                 <a:ea typeface="Courier New" pitchFamily="34" charset="-122"/>
                 <a:cs typeface="Courier New" pitchFamily="34" charset="-120"/>
               </a:rPr>
-              <a:t>Let's build Chapter 1.</a:t>
-            </a:r>
-            <a:endParaRPr lang="en-US" sz="3600" dirty="0"/>
+              <a:t>This isn't my merit</a:t>
+            </a:r>
+            <a:endParaRPr lang="en-US" sz="3360" dirty="0"/>
+          </a:p>
+        </p:txBody>
+      </p:sp>
+      <p:sp>
+        <p:nvSpPr>
+          <p:cNvPr id="20" name="Text 18"/>
+          <p:cNvSpPr/>
+          <p:nvPr/>
+        </p:nvSpPr>
+        <p:spPr>
+          <a:xfrm>
+            <a:off x="640080" y="1371600"/>
+            <a:ext cx="10881360" cy="731520"/>
+          </a:xfrm>
+          <a:prstGeom prst="rect">
+            <a:avLst/>
+          </a:prstGeom>
+          <a:noFill/>
+          <a:ln/>
+        </p:spPr>
+        <p:txBody>
+          <a:bodyPr wrap="square" lIns="0" tIns="0" rIns="0" bIns="0" rtlCol="0" anchor="ctr"/>
+          <a:lstStyle/>
+          <a:p>
+            <a:pPr marL="0" indent="0" algn="ctr">
+              <a:lnSpc>
+                <a:spcPct val="120000"/>
+              </a:lnSpc>
+              <a:buNone/>
+            </a:pPr>
+            <a:r>
+              <a:rPr lang="en-US" sz="1920" dirty="0">
+                <a:solidFill>
+                  <a:srgbClr val="B8C0D0"/>
+                </a:solidFill>
+                <a:latin typeface="Calibri" pitchFamily="34" charset="0"/>
+                <a:ea typeface="Calibri" pitchFamily="34" charset="-122"/>
+                <a:cs typeface="Calibri" pitchFamily="34" charset="-120"/>
+              </a:rPr>
+              <a:t>Everything in this series is built on the work of open-source projects and their communities. I only learned from them and shared what I built.</a:t>
+            </a:r>
+            <a:endParaRPr lang="en-US" sz="1920" dirty="0"/>
           </a:p>
         </p:txBody>
       </p:sp>
@@ -11221,8 +13323,324 @@
         </p:nvSpPr>
         <p:spPr>
           <a:xfrm>
-            <a:off x="4709160" y="2743200"/>
-            <a:ext cx="2743200" cy="0"/>
+            <a:off x="822960" y="2423160"/>
+            <a:ext cx="5029200" cy="2011680"/>
+          </a:xfrm>
+          <a:prstGeom prst="roundRect">
+            <a:avLst>
+              <a:gd name="adj" fmla="val 5455"/>
+            </a:avLst>
+          </a:prstGeom>
+          <a:solidFill>
+            <a:srgbClr val="121A2E"/>
+          </a:solidFill>
+          <a:ln w="19050">
+            <a:solidFill>
+              <a:srgbClr val="5FE0C5"/>
+            </a:solidFill>
+            <a:prstDash val="solid"/>
+          </a:ln>
+          <a:effectLst>
+            <a:outerShdw blurRad="101600" dist="38100" dir="2700000" algn="bl" rotWithShape="0">
+              <a:srgbClr val="000000">
+                <a:alpha val="25000"/>
+              </a:srgbClr>
+            </a:outerShdw>
+          </a:effectLst>
+        </p:spPr>
+        <p:txBody>
+          <a:bodyPr/>
+          <a:lstStyle/>
+          <a:p>
+            <a:endParaRPr lang="en-CA"/>
+          </a:p>
+        </p:txBody>
+      </p:sp>
+      <p:sp>
+        <p:nvSpPr>
+          <p:cNvPr id="22" name="Text 20"/>
+          <p:cNvSpPr/>
+          <p:nvPr/>
+        </p:nvSpPr>
+        <p:spPr>
+          <a:xfrm>
+            <a:off x="1143000" y="2697480"/>
+            <a:ext cx="4389120" cy="548640"/>
+          </a:xfrm>
+          <a:prstGeom prst="rect">
+            <a:avLst/>
+          </a:prstGeom>
+          <a:noFill/>
+          <a:ln/>
+        </p:spPr>
+        <p:txBody>
+          <a:bodyPr wrap="square" lIns="0" tIns="0" rIns="0" bIns="0" rtlCol="0" anchor="ctr"/>
+          <a:lstStyle/>
+          <a:p>
+            <a:pPr marL="0" indent="0">
+              <a:buNone/>
+            </a:pPr>
+            <a:r>
+              <a:rPr lang="en-US" sz="2640" b="1" dirty="0">
+                <a:solidFill>
+                  <a:srgbClr val="5FE0C5"/>
+                </a:solidFill>
+                <a:latin typeface="Courier New" pitchFamily="34" charset="0"/>
+                <a:ea typeface="Courier New" pitchFamily="34" charset="-122"/>
+                <a:cs typeface="Courier New" pitchFamily="34" charset="-120"/>
+              </a:rPr>
+              <a:t>Spring AI</a:t>
+            </a:r>
+            <a:endParaRPr lang="en-US" sz="2640" dirty="0"/>
+          </a:p>
+        </p:txBody>
+      </p:sp>
+      <p:sp>
+        <p:nvSpPr>
+          <p:cNvPr id="23" name="Text 21"/>
+          <p:cNvSpPr/>
+          <p:nvPr/>
+        </p:nvSpPr>
+        <p:spPr>
+          <a:xfrm>
+            <a:off x="1143000" y="3337560"/>
+            <a:ext cx="4389120" cy="457200"/>
+          </a:xfrm>
+          <a:prstGeom prst="rect">
+            <a:avLst/>
+          </a:prstGeom>
+          <a:noFill/>
+          <a:ln/>
+        </p:spPr>
+        <p:txBody>
+          <a:bodyPr wrap="square" lIns="0" tIns="0" rIns="0" bIns="0" rtlCol="0" anchor="ctr"/>
+          <a:lstStyle/>
+          <a:p>
+            <a:pPr marL="0" indent="0">
+              <a:buNone/>
+            </a:pPr>
+            <a:r>
+              <a:rPr lang="en-US" sz="1560" dirty="0">
+                <a:solidFill>
+                  <a:srgbClr val="E5E9F0"/>
+                </a:solidFill>
+                <a:latin typeface="Calibri" pitchFamily="34" charset="0"/>
+                <a:ea typeface="Calibri" pitchFamily="34" charset="-122"/>
+                <a:cs typeface="Calibri" pitchFamily="34" charset="-120"/>
+              </a:rPr>
+              <a:t>The AI integration layer for Spring</a:t>
+            </a:r>
+            <a:endParaRPr lang="en-US" sz="1560" dirty="0"/>
+          </a:p>
+        </p:txBody>
+      </p:sp>
+      <p:sp>
+        <p:nvSpPr>
+          <p:cNvPr id="24" name="Text 22"/>
+          <p:cNvSpPr/>
+          <p:nvPr/>
+        </p:nvSpPr>
+        <p:spPr>
+          <a:xfrm>
+            <a:off x="1143000" y="3840480"/>
+            <a:ext cx="4389120" cy="365760"/>
+          </a:xfrm>
+          <a:prstGeom prst="rect">
+            <a:avLst/>
+          </a:prstGeom>
+          <a:noFill/>
+          <a:ln/>
+        </p:spPr>
+        <p:txBody>
+          <a:bodyPr wrap="square" lIns="0" tIns="0" rIns="0" bIns="0" rtlCol="0" anchor="ctr"/>
+          <a:lstStyle/>
+          <a:p>
+            <a:pPr marL="0" indent="0">
+              <a:buNone/>
+            </a:pPr>
+            <a:r>
+              <a:rPr lang="en-US" sz="1440" dirty="0">
+                <a:solidFill>
+                  <a:srgbClr val="8B98AC"/>
+                </a:solidFill>
+                <a:latin typeface="Courier New" pitchFamily="34" charset="0"/>
+                <a:ea typeface="Courier New" pitchFamily="34" charset="-122"/>
+                <a:cs typeface="Courier New" pitchFamily="34" charset="-120"/>
+              </a:rPr>
+              <a:t>spring.io/projects/spring-ai</a:t>
+            </a:r>
+            <a:endParaRPr lang="en-US" sz="1440" dirty="0"/>
+          </a:p>
+        </p:txBody>
+      </p:sp>
+      <p:sp>
+        <p:nvSpPr>
+          <p:cNvPr id="25" name="Shape 23"/>
+          <p:cNvSpPr/>
+          <p:nvPr/>
+        </p:nvSpPr>
+        <p:spPr>
+          <a:xfrm>
+            <a:off x="6309360" y="2423160"/>
+            <a:ext cx="5029200" cy="2011680"/>
+          </a:xfrm>
+          <a:prstGeom prst="roundRect">
+            <a:avLst>
+              <a:gd name="adj" fmla="val 5455"/>
+            </a:avLst>
+          </a:prstGeom>
+          <a:solidFill>
+            <a:srgbClr val="121A2E"/>
+          </a:solidFill>
+          <a:ln w="19050">
+            <a:solidFill>
+              <a:srgbClr val="F2A93B"/>
+            </a:solidFill>
+            <a:prstDash val="solid"/>
+          </a:ln>
+          <a:effectLst>
+            <a:outerShdw blurRad="101600" dist="38100" dir="2700000" algn="bl" rotWithShape="0">
+              <a:srgbClr val="000000">
+                <a:alpha val="25000"/>
+              </a:srgbClr>
+            </a:outerShdw>
+          </a:effectLst>
+        </p:spPr>
+        <p:txBody>
+          <a:bodyPr/>
+          <a:lstStyle/>
+          <a:p>
+            <a:endParaRPr lang="en-CA"/>
+          </a:p>
+        </p:txBody>
+      </p:sp>
+      <p:sp>
+        <p:nvSpPr>
+          <p:cNvPr id="26" name="Text 24"/>
+          <p:cNvSpPr/>
+          <p:nvPr/>
+        </p:nvSpPr>
+        <p:spPr>
+          <a:xfrm>
+            <a:off x="6629400" y="2697480"/>
+            <a:ext cx="4389120" cy="548640"/>
+          </a:xfrm>
+          <a:prstGeom prst="rect">
+            <a:avLst/>
+          </a:prstGeom>
+          <a:noFill/>
+          <a:ln/>
+        </p:spPr>
+        <p:txBody>
+          <a:bodyPr wrap="square" lIns="0" tIns="0" rIns="0" bIns="0" rtlCol="0" anchor="ctr"/>
+          <a:lstStyle/>
+          <a:p>
+            <a:pPr marL="0" indent="0">
+              <a:buNone/>
+            </a:pPr>
+            <a:r>
+              <a:rPr lang="en-US" sz="2640" b="1" dirty="0">
+                <a:solidFill>
+                  <a:srgbClr val="F2A93B"/>
+                </a:solidFill>
+                <a:latin typeface="Courier New" pitchFamily="34" charset="0"/>
+                <a:ea typeface="Courier New" pitchFamily="34" charset="-122"/>
+                <a:cs typeface="Courier New" pitchFamily="34" charset="-120"/>
+              </a:rPr>
+              <a:t>Ollama</a:t>
+            </a:r>
+            <a:endParaRPr lang="en-US" sz="2640" dirty="0"/>
+          </a:p>
+        </p:txBody>
+      </p:sp>
+      <p:sp>
+        <p:nvSpPr>
+          <p:cNvPr id="27" name="Text 25"/>
+          <p:cNvSpPr/>
+          <p:nvPr/>
+        </p:nvSpPr>
+        <p:spPr>
+          <a:xfrm>
+            <a:off x="6629400" y="3337560"/>
+            <a:ext cx="4389120" cy="457200"/>
+          </a:xfrm>
+          <a:prstGeom prst="rect">
+            <a:avLst/>
+          </a:prstGeom>
+          <a:noFill/>
+          <a:ln/>
+        </p:spPr>
+        <p:txBody>
+          <a:bodyPr wrap="square" lIns="0" tIns="0" rIns="0" bIns="0" rtlCol="0" anchor="ctr"/>
+          <a:lstStyle/>
+          <a:p>
+            <a:pPr marL="0" indent="0">
+              <a:buNone/>
+            </a:pPr>
+            <a:r>
+              <a:rPr lang="en-US" sz="1560" dirty="0">
+                <a:solidFill>
+                  <a:srgbClr val="E5E9F0"/>
+                </a:solidFill>
+                <a:latin typeface="Calibri" pitchFamily="34" charset="0"/>
+                <a:ea typeface="Calibri" pitchFamily="34" charset="-122"/>
+                <a:cs typeface="Calibri" pitchFamily="34" charset="-120"/>
+              </a:rPr>
+              <a:t>Run open LLMs locally</a:t>
+            </a:r>
+            <a:endParaRPr lang="en-US" sz="1560" dirty="0"/>
+          </a:p>
+        </p:txBody>
+      </p:sp>
+      <p:sp>
+        <p:nvSpPr>
+          <p:cNvPr id="28" name="Text 26"/>
+          <p:cNvSpPr/>
+          <p:nvPr/>
+        </p:nvSpPr>
+        <p:spPr>
+          <a:xfrm>
+            <a:off x="6629400" y="3840480"/>
+            <a:ext cx="4389120" cy="365760"/>
+          </a:xfrm>
+          <a:prstGeom prst="rect">
+            <a:avLst/>
+          </a:prstGeom>
+          <a:noFill/>
+          <a:ln/>
+        </p:spPr>
+        <p:txBody>
+          <a:bodyPr wrap="square" lIns="0" tIns="0" rIns="0" bIns="0" rtlCol="0" anchor="ctr"/>
+          <a:lstStyle/>
+          <a:p>
+            <a:pPr marL="0" indent="0">
+              <a:buNone/>
+            </a:pPr>
+            <a:r>
+              <a:rPr lang="en-US" sz="1440" dirty="0">
+                <a:solidFill>
+                  <a:srgbClr val="8B98AC"/>
+                </a:solidFill>
+                <a:latin typeface="Courier New" pitchFamily="34" charset="0"/>
+                <a:ea typeface="Courier New" pitchFamily="34" charset="-122"/>
+                <a:cs typeface="Courier New" pitchFamily="34" charset="-120"/>
+              </a:rPr>
+              <a:t>ollama.com</a:t>
+            </a:r>
+            <a:endParaRPr lang="en-US" sz="1440" dirty="0"/>
+          </a:p>
+        </p:txBody>
+      </p:sp>
+      <p:sp>
+        <p:nvSpPr>
+          <p:cNvPr id="29" name="Shape 27"/>
+          <p:cNvSpPr/>
+          <p:nvPr/>
+        </p:nvSpPr>
+        <p:spPr>
+          <a:xfrm>
+            <a:off x="4251960" y="4892040"/>
+            <a:ext cx="3657600" cy="0"/>
           </a:xfrm>
           <a:prstGeom prst="line">
             <a:avLst/>
@@ -11237,16 +13655,23 @@
             <a:prstDash val="solid"/>
           </a:ln>
         </p:spPr>
-      </p:sp>
-      <p:sp>
-        <p:nvSpPr>
-          <p:cNvPr id="22" name="Shape 20"/>
-          <p:cNvSpPr/>
-          <p:nvPr/>
-        </p:nvSpPr>
-        <p:spPr>
-          <a:xfrm>
-            <a:off x="4668012" y="2702052"/>
+        <p:txBody>
+          <a:bodyPr/>
+          <a:lstStyle/>
+          <a:p>
+            <a:endParaRPr lang="en-CA"/>
+          </a:p>
+        </p:txBody>
+      </p:sp>
+      <p:sp>
+        <p:nvSpPr>
+          <p:cNvPr id="30" name="Shape 28"/>
+          <p:cNvSpPr/>
+          <p:nvPr/>
+        </p:nvSpPr>
+        <p:spPr>
+          <a:xfrm>
+            <a:off x="4210812" y="4850892"/>
             <a:ext cx="82296" cy="82296"/>
           </a:xfrm>
           <a:prstGeom prst="ellipse">
@@ -11262,16 +13687,23 @@
             <a:prstDash val="solid"/>
           </a:ln>
         </p:spPr>
-      </p:sp>
-      <p:sp>
-        <p:nvSpPr>
-          <p:cNvPr id="23" name="Shape 21"/>
-          <p:cNvSpPr/>
-          <p:nvPr/>
-        </p:nvSpPr>
-        <p:spPr>
-          <a:xfrm>
-            <a:off x="6039612" y="2702052"/>
+        <p:txBody>
+          <a:bodyPr/>
+          <a:lstStyle/>
+          <a:p>
+            <a:endParaRPr lang="en-CA"/>
+          </a:p>
+        </p:txBody>
+      </p:sp>
+      <p:sp>
+        <p:nvSpPr>
+          <p:cNvPr id="31" name="Shape 29"/>
+          <p:cNvSpPr/>
+          <p:nvPr/>
+        </p:nvSpPr>
+        <p:spPr>
+          <a:xfrm>
+            <a:off x="6039612" y="4850892"/>
             <a:ext cx="82296" cy="82296"/>
           </a:xfrm>
           <a:prstGeom prst="ellipse">
@@ -11287,16 +13719,23 @@
             <a:prstDash val="solid"/>
           </a:ln>
         </p:spPr>
-      </p:sp>
-      <p:sp>
-        <p:nvSpPr>
-          <p:cNvPr id="24" name="Shape 22"/>
-          <p:cNvSpPr/>
-          <p:nvPr/>
-        </p:nvSpPr>
-        <p:spPr>
-          <a:xfrm>
-            <a:off x="7411212" y="2702052"/>
+        <p:txBody>
+          <a:bodyPr/>
+          <a:lstStyle/>
+          <a:p>
+            <a:endParaRPr lang="en-CA"/>
+          </a:p>
+        </p:txBody>
+      </p:sp>
+      <p:sp>
+        <p:nvSpPr>
+          <p:cNvPr id="32" name="Shape 30"/>
+          <p:cNvSpPr/>
+          <p:nvPr/>
+        </p:nvSpPr>
+        <p:spPr>
+          <a:xfrm>
+            <a:off x="7868412" y="4850892"/>
             <a:ext cx="82296" cy="82296"/>
           </a:xfrm>
           <a:prstGeom prst="ellipse">
@@ -11312,16 +13751,23 @@
             <a:prstDash val="solid"/>
           </a:ln>
         </p:spPr>
-      </p:sp>
-      <p:sp>
-        <p:nvSpPr>
-          <p:cNvPr id="25" name="Text 23"/>
-          <p:cNvSpPr/>
-          <p:nvPr/>
-        </p:nvSpPr>
-        <p:spPr>
-          <a:xfrm>
-            <a:off x="0" y="3017520"/>
+        <p:txBody>
+          <a:bodyPr/>
+          <a:lstStyle/>
+          <a:p>
+            <a:endParaRPr lang="en-CA"/>
+          </a:p>
+        </p:txBody>
+      </p:sp>
+      <p:sp>
+        <p:nvSpPr>
+          <p:cNvPr id="33" name="Text 31"/>
+          <p:cNvSpPr/>
+          <p:nvPr/>
+        </p:nvSpPr>
+        <p:spPr>
+          <a:xfrm>
+            <a:off x="0" y="5120640"/>
             <a:ext cx="12161520" cy="457200"/>
           </a:xfrm>
           <a:prstGeom prst="rect">
@@ -11334,92 +13780,50 @@
           <a:bodyPr wrap="square" lIns="0" tIns="0" rIns="0" bIns="0" rtlCol="0" anchor="ctr"/>
           <a:lstStyle/>
           <a:p>
-            <a:pPr algn="ctr" indent="0" marL="0">
+            <a:pPr marL="0" indent="0" algn="ctr">
               <a:buNone/>
             </a:pPr>
             <a:r>
-              <a:rPr lang="en-US" sz="1700" b="1" dirty="0">
-                <a:solidFill>
-                  <a:srgbClr val="F2A93B"/>
+              <a:rPr lang="en-US" sz="1680" dirty="0">
+                <a:solidFill>
+                  <a:srgbClr val="E5E9F0"/>
                 </a:solidFill>
                 <a:latin typeface="Calibri" pitchFamily="34" charset="0"/>
                 <a:ea typeface="Calibri" pitchFamily="34" charset="-122"/>
                 <a:cs typeface="Calibri" pitchFamily="34" charset="-120"/>
               </a:rPr>
-              <a:t>Subscribe</a:t>
-            </a:r>
-            <a:pPr algn="ctr" indent="0" marL="0">
+              <a:t>Shared with gratitude — all credit to their maintainers &amp; contributors.</a:t>
+            </a:r>
+            <a:endParaRPr lang="en-US" sz="1680" dirty="0"/>
+          </a:p>
+        </p:txBody>
+      </p:sp>
+      <p:sp>
+        <p:nvSpPr>
+          <p:cNvPr id="34" name="Text 32"/>
+          <p:cNvSpPr/>
+          <p:nvPr/>
+        </p:nvSpPr>
+        <p:spPr>
+          <a:xfrm>
+            <a:off x="0" y="5623560"/>
+            <a:ext cx="12161520" cy="365760"/>
+          </a:xfrm>
+          <a:prstGeom prst="rect">
+            <a:avLst/>
+          </a:prstGeom>
+          <a:noFill/>
+          <a:ln/>
+        </p:spPr>
+        <p:txBody>
+          <a:bodyPr wrap="square" lIns="0" tIns="0" rIns="0" bIns="0" rtlCol="0" anchor="ctr"/>
+          <a:lstStyle/>
+          <a:p>
+            <a:pPr marL="0" indent="0" algn="ctr">
               <a:buNone/>
             </a:pPr>
             <a:r>
-              <a:rPr lang="en-US" sz="1700" dirty="0">
-                <a:solidFill>
-                  <a:srgbClr val="B8C0D0"/>
-                </a:solidFill>
-                <a:latin typeface="Calibri" pitchFamily="34" charset="0"/>
-                <a:ea typeface="Calibri" pitchFamily="34" charset="-122"/>
-                <a:cs typeface="Calibri" pitchFamily="34" charset="-120"/>
-              </a:rPr>
-              <a:t>  for every chapter  ·  </a:t>
-            </a:r>
-            <a:pPr algn="ctr" indent="0" marL="0">
-              <a:buNone/>
-            </a:pPr>
-            <a:r>
-              <a:rPr lang="en-US" sz="1700" b="1" dirty="0">
-                <a:solidFill>
-                  <a:srgbClr val="5FE0C5"/>
-                </a:solidFill>
-                <a:latin typeface="Calibri" pitchFamily="34" charset="0"/>
-                <a:ea typeface="Calibri" pitchFamily="34" charset="-122"/>
-                <a:cs typeface="Calibri" pitchFamily="34" charset="-120"/>
-              </a:rPr>
-              <a:t>Star the repo</a:t>
-            </a:r>
-            <a:pPr algn="ctr" indent="0" marL="0">
-              <a:buNone/>
-            </a:pPr>
-            <a:r>
-              <a:rPr lang="en-US" sz="1700" dirty="0">
-                <a:solidFill>
-                  <a:srgbClr val="B8C0D0"/>
-                </a:solidFill>
-                <a:latin typeface="Calibri" pitchFamily="34" charset="0"/>
-                <a:ea typeface="Calibri" pitchFamily="34" charset="-122"/>
-                <a:cs typeface="Calibri" pitchFamily="34" charset="-120"/>
-              </a:rPr>
-              <a:t>  on GitHub</a:t>
-            </a:r>
-            <a:endParaRPr lang="en-US" sz="1700" dirty="0"/>
-          </a:p>
-        </p:txBody>
-      </p:sp>
-      <p:sp>
-        <p:nvSpPr>
-          <p:cNvPr id="26" name="Text 24"/>
-          <p:cNvSpPr/>
-          <p:nvPr/>
-        </p:nvSpPr>
-        <p:spPr>
-          <a:xfrm>
-            <a:off x="0" y="3657600"/>
-            <a:ext cx="12161520" cy="365760"/>
-          </a:xfrm>
-          <a:prstGeom prst="rect">
-            <a:avLst/>
-          </a:prstGeom>
-          <a:noFill/>
-          <a:ln/>
-        </p:spPr>
-        <p:txBody>
-          <a:bodyPr wrap="square" lIns="0" tIns="0" rIns="0" bIns="0" rtlCol="0" anchor="ctr"/>
-          <a:lstStyle/>
-          <a:p>
-            <a:pPr algn="ctr" indent="0" marL="0">
-              <a:buNone/>
-            </a:pPr>
-            <a:r>
-              <a:rPr lang="en-US" sz="1500" dirty="0">
+              <a:rPr lang="en-US" sz="1440" dirty="0">
                 <a:solidFill>
                   <a:srgbClr val="8B98AC"/>
                 </a:solidFill>
@@ -11429,46 +13833,7 @@
               </a:rPr>
               <a:t>github.com/balajich/spring-ai-with-llama</a:t>
             </a:r>
-            <a:endParaRPr lang="en-US" sz="1500" dirty="0"/>
-          </a:p>
-        </p:txBody>
-      </p:sp>
-      <p:sp>
-        <p:nvSpPr>
-          <p:cNvPr id="27" name="Text 25"/>
-          <p:cNvSpPr/>
-          <p:nvPr/>
-        </p:nvSpPr>
-        <p:spPr>
-          <a:xfrm>
-            <a:off x="0" y="4114800"/>
-            <a:ext cx="12161520" cy="365760"/>
-          </a:xfrm>
-          <a:prstGeom prst="rect">
-            <a:avLst/>
-          </a:prstGeom>
-          <a:noFill/>
-          <a:ln/>
-        </p:spPr>
-        <p:txBody>
-          <a:bodyPr wrap="square" lIns="0" tIns="0" rIns="0" bIns="0" rtlCol="0" anchor="ctr"/>
-          <a:lstStyle/>
-          <a:p>
-            <a:pPr algn="ctr" indent="0" marL="0">
-              <a:buNone/>
-            </a:pPr>
-            <a:r>
-              <a:rPr lang="en-US" sz="1300" dirty="0">
-                <a:solidFill>
-                  <a:srgbClr val="5B6478"/>
-                </a:solidFill>
-                <a:latin typeface="Courier New" pitchFamily="34" charset="0"/>
-                <a:ea typeface="Courier New" pitchFamily="34" charset="-122"/>
-                <a:cs typeface="Courier New" pitchFamily="34" charset="-120"/>
-              </a:rPr>
-              <a:t>prompttoapps.com</a:t>
-            </a:r>
-            <a:endParaRPr lang="en-US" sz="1300" dirty="0"/>
+            <a:endParaRPr lang="en-US" sz="1440" dirty="0"/>
           </a:p>
         </p:txBody>
       </p:sp>
@@ -11773,4 +14138,319 @@
     </a:ext>
   </a:extLst>
 </a:theme>
+</file>
+
+<file path=ppt/theme/theme2.xml><?xml version="1.0" encoding="utf-8"?>
+<a:theme xmlns:a="http://schemas.openxmlformats.org/drawingml/2006/main" name="Office Theme">
+  <a:themeElements>
+    <a:clrScheme name="Office">
+      <a:dk1>
+        <a:sysClr val="windowText" lastClr="000000"/>
+      </a:dk1>
+      <a:lt1>
+        <a:sysClr val="window" lastClr="FFFFFF"/>
+      </a:lt1>
+      <a:dk2>
+        <a:srgbClr val="0E2841"/>
+      </a:dk2>
+      <a:lt2>
+        <a:srgbClr val="E8E8E8"/>
+      </a:lt2>
+      <a:accent1>
+        <a:srgbClr val="156082"/>
+      </a:accent1>
+      <a:accent2>
+        <a:srgbClr val="E97132"/>
+      </a:accent2>
+      <a:accent3>
+        <a:srgbClr val="196B24"/>
+      </a:accent3>
+      <a:accent4>
+        <a:srgbClr val="0F9ED5"/>
+      </a:accent4>
+      <a:accent5>
+        <a:srgbClr val="A02B93"/>
+      </a:accent5>
+      <a:accent6>
+        <a:srgbClr val="4EA72E"/>
+      </a:accent6>
+      <a:hlink>
+        <a:srgbClr val="467886"/>
+      </a:hlink>
+      <a:folHlink>
+        <a:srgbClr val="96607D"/>
+      </a:folHlink>
+    </a:clrScheme>
+    <a:fontScheme name="Office">
+      <a:majorFont>
+        <a:latin typeface="Aptos Display" panose="02110004020202020204"/>
+        <a:ea typeface=""/>
+        <a:cs typeface=""/>
+        <a:font script="Jpan" typeface="游ゴシック Light"/>
+        <a:font script="Hang" typeface="맑은 고딕"/>
+        <a:font script="Hans" typeface="等线 Light"/>
+        <a:font script="Hant" typeface="新細明體"/>
+        <a:font script="Arab" typeface="Times New Roman"/>
+        <a:font script="Hebr" typeface="Times New Roman"/>
+        <a:font script="Thai" typeface="Angsana New"/>
+        <a:font script="Ethi" typeface="Nyala"/>
+        <a:font script="Beng" typeface="Vrinda"/>
+        <a:font script="Gujr" typeface="Shruti"/>
+        <a:font script="Khmr" typeface="MoolBoran"/>
+        <a:font script="Knda" typeface="Tunga"/>
+        <a:font script="Guru" typeface="Raavi"/>
+        <a:font script="Cans" typeface="Euphemia"/>
+        <a:font script="Cher" typeface="Plantagenet Cherokee"/>
+        <a:font script="Yiii" typeface="Microsoft Yi Baiti"/>
+        <a:font script="Tibt" typeface="Microsoft Himalaya"/>
+        <a:font script="Thaa" typeface="MV Boli"/>
+        <a:font script="Deva" typeface="Mangal"/>
+        <a:font script="Telu" typeface="Gautami"/>
+        <a:font script="Taml" typeface="Latha"/>
+        <a:font script="Syrc" typeface="Estrangelo Edessa"/>
+        <a:font script="Orya" typeface="Kalinga"/>
+        <a:font script="Mlym" typeface="Kartika"/>
+        <a:font script="Laoo" typeface="DokChampa"/>
+        <a:font script="Sinh" typeface="Iskoola Pota"/>
+        <a:font script="Mong" typeface="Mongolian Baiti"/>
+        <a:font script="Viet" typeface="Times New Roman"/>
+        <a:font script="Uigh" typeface="Microsoft Uighur"/>
+        <a:font script="Geor" typeface="Sylfaen"/>
+        <a:font script="Armn" typeface="Arial"/>
+        <a:font script="Bugi" typeface="Leelawadee UI"/>
+        <a:font script="Bopo" typeface="Microsoft JhengHei"/>
+        <a:font script="Java" typeface="Javanese Text"/>
+        <a:font script="Lisu" typeface="Segoe UI"/>
+        <a:font script="Mymr" typeface="Myanmar Text"/>
+        <a:font script="Nkoo" typeface="Ebrima"/>
+        <a:font script="Olck" typeface="Nirmala UI"/>
+        <a:font script="Osma" typeface="Ebrima"/>
+        <a:font script="Phag" typeface="Phagspa"/>
+        <a:font script="Syrn" typeface="Estrangelo Edessa"/>
+        <a:font script="Syrj" typeface="Estrangelo Edessa"/>
+        <a:font script="Syre" typeface="Estrangelo Edessa"/>
+        <a:font script="Sora" typeface="Nirmala UI"/>
+        <a:font script="Tale" typeface="Microsoft Tai Le"/>
+        <a:font script="Talu" typeface="Microsoft New Tai Lue"/>
+        <a:font script="Tfng" typeface="Ebrima"/>
+      </a:majorFont>
+      <a:minorFont>
+        <a:latin typeface="Aptos" panose="02110004020202020204"/>
+        <a:ea typeface=""/>
+        <a:cs typeface=""/>
+        <a:font script="Jpan" typeface="游ゴシック"/>
+        <a:font script="Hang" typeface="맑은 고딕"/>
+        <a:font script="Hans" typeface="等线"/>
+        <a:font script="Hant" typeface="新細明體"/>
+        <a:font script="Arab" typeface="Arial"/>
+        <a:font script="Hebr" typeface="Arial"/>
+        <a:font script="Thai" typeface="Cordia New"/>
+        <a:font script="Ethi" typeface="Nyala"/>
+        <a:font script="Beng" typeface="Vrinda"/>
+        <a:font script="Gujr" typeface="Shruti"/>
+        <a:font script="Khmr" typeface="DaunPenh"/>
+        <a:font script="Knda" typeface="Tunga"/>
+        <a:font script="Guru" typeface="Raavi"/>
+        <a:font script="Cans" typeface="Euphemia"/>
+        <a:font script="Cher" typeface="Plantagenet Cherokee"/>
+        <a:font script="Yiii" typeface="Microsoft Yi Baiti"/>
+        <a:font script="Tibt" typeface="Microsoft Himalaya"/>
+        <a:font script="Thaa" typeface="MV Boli"/>
+        <a:font script="Deva" typeface="Mangal"/>
+        <a:font script="Telu" typeface="Gautami"/>
+        <a:font script="Taml" typeface="Latha"/>
+        <a:font script="Syrc" typeface="Estrangelo Edessa"/>
+        <a:font script="Orya" typeface="Kalinga"/>
+        <a:font script="Mlym" typeface="Kartika"/>
+        <a:font script="Laoo" typeface="DokChampa"/>
+        <a:font script="Sinh" typeface="Iskoola Pota"/>
+        <a:font script="Mong" typeface="Mongolian Baiti"/>
+        <a:font script="Viet" typeface="Arial"/>
+        <a:font script="Uigh" typeface="Microsoft Uighur"/>
+        <a:font script="Geor" typeface="Sylfaen"/>
+        <a:font script="Armn" typeface="Arial"/>
+        <a:font script="Bugi" typeface="Leelawadee UI"/>
+        <a:font script="Bopo" typeface="Microsoft JhengHei"/>
+        <a:font script="Java" typeface="Javanese Text"/>
+        <a:font script="Lisu" typeface="Segoe UI"/>
+        <a:font script="Mymr" typeface="Myanmar Text"/>
+        <a:font script="Nkoo" typeface="Ebrima"/>
+        <a:font script="Olck" typeface="Nirmala UI"/>
+        <a:font script="Osma" typeface="Ebrima"/>
+        <a:font script="Phag" typeface="Phagspa"/>
+        <a:font script="Syrn" typeface="Estrangelo Edessa"/>
+        <a:font script="Syrj" typeface="Estrangelo Edessa"/>
+        <a:font script="Syre" typeface="Estrangelo Edessa"/>
+        <a:font script="Sora" typeface="Nirmala UI"/>
+        <a:font script="Tale" typeface="Microsoft Tai Le"/>
+        <a:font script="Talu" typeface="Microsoft New Tai Lue"/>
+        <a:font script="Tfng" typeface="Ebrima"/>
+      </a:minorFont>
+    </a:fontScheme>
+    <a:fmtScheme name="Office">
+      <a:fillStyleLst>
+        <a:solidFill>
+          <a:schemeClr val="phClr"/>
+        </a:solidFill>
+        <a:gradFill rotWithShape="1">
+          <a:gsLst>
+            <a:gs pos="0">
+              <a:schemeClr val="phClr">
+                <a:lumMod val="110000"/>
+                <a:satMod val="105000"/>
+                <a:tint val="67000"/>
+              </a:schemeClr>
+            </a:gs>
+            <a:gs pos="50000">
+              <a:schemeClr val="phClr">
+                <a:lumMod val="105000"/>
+                <a:satMod val="103000"/>
+                <a:tint val="73000"/>
+              </a:schemeClr>
+            </a:gs>
+            <a:gs pos="100000">
+              <a:schemeClr val="phClr">
+                <a:lumMod val="105000"/>
+                <a:satMod val="109000"/>
+                <a:tint val="81000"/>
+              </a:schemeClr>
+            </a:gs>
+          </a:gsLst>
+          <a:lin ang="5400000" scaled="0"/>
+        </a:gradFill>
+        <a:gradFill rotWithShape="1">
+          <a:gsLst>
+            <a:gs pos="0">
+              <a:schemeClr val="phClr">
+                <a:satMod val="103000"/>
+                <a:lumMod val="102000"/>
+                <a:tint val="94000"/>
+              </a:schemeClr>
+            </a:gs>
+            <a:gs pos="50000">
+              <a:schemeClr val="phClr">
+                <a:satMod val="110000"/>
+                <a:lumMod val="100000"/>
+                <a:shade val="100000"/>
+              </a:schemeClr>
+            </a:gs>
+            <a:gs pos="100000">
+              <a:schemeClr val="phClr">
+                <a:lumMod val="99000"/>
+                <a:satMod val="120000"/>
+                <a:shade val="78000"/>
+              </a:schemeClr>
+            </a:gs>
+          </a:gsLst>
+          <a:lin ang="5400000" scaled="0"/>
+        </a:gradFill>
+      </a:fillStyleLst>
+      <a:lnStyleLst>
+        <a:ln w="12700" cap="flat" cmpd="sng" algn="ctr">
+          <a:solidFill>
+            <a:schemeClr val="phClr"/>
+          </a:solidFill>
+          <a:prstDash val="solid"/>
+          <a:miter lim="800000"/>
+        </a:ln>
+        <a:ln w="19050" cap="flat" cmpd="sng" algn="ctr">
+          <a:solidFill>
+            <a:schemeClr val="phClr"/>
+          </a:solidFill>
+          <a:prstDash val="solid"/>
+          <a:miter lim="800000"/>
+        </a:ln>
+        <a:ln w="25400" cap="flat" cmpd="sng" algn="ctr">
+          <a:solidFill>
+            <a:schemeClr val="phClr"/>
+          </a:solidFill>
+          <a:prstDash val="solid"/>
+          <a:miter lim="800000"/>
+        </a:ln>
+      </a:lnStyleLst>
+      <a:effectStyleLst>
+        <a:effectStyle>
+          <a:effectLst/>
+        </a:effectStyle>
+        <a:effectStyle>
+          <a:effectLst/>
+        </a:effectStyle>
+        <a:effectStyle>
+          <a:effectLst>
+            <a:outerShdw blurRad="57150" dist="19050" dir="5400000" algn="ctr" rotWithShape="0">
+              <a:srgbClr val="000000">
+                <a:alpha val="63000"/>
+              </a:srgbClr>
+            </a:outerShdw>
+          </a:effectLst>
+        </a:effectStyle>
+      </a:effectStyleLst>
+      <a:bgFillStyleLst>
+        <a:solidFill>
+          <a:schemeClr val="phClr"/>
+        </a:solidFill>
+        <a:solidFill>
+          <a:schemeClr val="phClr">
+            <a:tint val="95000"/>
+            <a:satMod val="170000"/>
+          </a:schemeClr>
+        </a:solidFill>
+        <a:gradFill rotWithShape="1">
+          <a:gsLst>
+            <a:gs pos="0">
+              <a:schemeClr val="phClr">
+                <a:tint val="93000"/>
+                <a:satMod val="150000"/>
+                <a:shade val="98000"/>
+                <a:lumMod val="102000"/>
+              </a:schemeClr>
+            </a:gs>
+            <a:gs pos="50000">
+              <a:schemeClr val="phClr">
+                <a:tint val="98000"/>
+                <a:satMod val="130000"/>
+                <a:shade val="90000"/>
+                <a:lumMod val="103000"/>
+              </a:schemeClr>
+            </a:gs>
+            <a:gs pos="100000">
+              <a:schemeClr val="phClr">
+                <a:shade val="63000"/>
+                <a:satMod val="120000"/>
+              </a:schemeClr>
+            </a:gs>
+          </a:gsLst>
+          <a:lin ang="5400000" scaled="0"/>
+        </a:gradFill>
+      </a:bgFillStyleLst>
+    </a:fmtScheme>
+  </a:themeElements>
+  <a:objectDefaults>
+    <a:lnDef>
+      <a:spPr/>
+      <a:bodyPr/>
+      <a:lstStyle/>
+      <a:style>
+        <a:lnRef idx="2">
+          <a:schemeClr val="accent1"/>
+        </a:lnRef>
+        <a:fillRef idx="0">
+          <a:schemeClr val="accent1"/>
+        </a:fillRef>
+        <a:effectRef idx="1">
+          <a:schemeClr val="accent1"/>
+        </a:effectRef>
+        <a:fontRef idx="minor">
+          <a:schemeClr val="tx1"/>
+        </a:fontRef>
+      </a:style>
+    </a:lnDef>
+  </a:objectDefaults>
+  <a:extraClrSchemeLst/>
+  <a:extLst>
+    <a:ext uri="{05A4C25C-085E-4340-85A3-A5531E510DB2}">
+      <thm15:themeFamily xmlns:thm15="http://schemas.microsoft.com/office/thememl/2012/main" name="Office Theme" id="{2E142A2C-CD16-42D6-873A-C26D2A0506FA}" vid="{1BDDFF52-6CD6-40A5-AB3C-68EB2F1E4D0A}"/>
+    </a:ext>
+  </a:extLst>
+</a:theme>
 </file>
--- a/slides/00-intro-series-overview.pptx
+++ b/slides/00-intro-series-overview.pptx
@@ -4,9 +4,6 @@
   <p:sldMasterIdLst>
     <p:sldMasterId id="2147483648" r:id="rId1"/>
   </p:sldMasterIdLst>
-  <p:notesMasterIdLst>
-    <p:notesMasterId r:id="rId12"/>
-  </p:notesMasterIdLst>
   <p:sldIdLst>
     <p:sldId id="256" r:id="rId2"/>
     <p:sldId id="257" r:id="rId3"/>
@@ -16,9 +13,12 @@
     <p:sldId id="261" r:id="rId7"/>
     <p:sldId id="262" r:id="rId8"/>
     <p:sldId id="263" r:id="rId9"/>
-    <p:sldId id="265" r:id="rId10"/>
-    <p:sldId id="264" r:id="rId11"/>
+    <p:sldId id="264" r:id="rId10"/>
+    <p:sldId id="265" r:id="rId11"/>
   </p:sldIdLst>
+  <p:notesMasterIdLst>
+    <p:notesMasterId r:id="rId12"/>
+  </p:notesMasterIdLst>
   <p:sldSz cx="12192000" cy="6858000"/>
   <p:notesSz cx="6858000" cy="12192000"/>
   <p:defaultTextStyle>
@@ -113,11 +113,6 @@
       </a:defRPr>
     </a:lvl9pPr>
   </p:defaultTextStyle>
-  <p:extLst>
-    <p:ext uri="{EFAFB233-063F-42B5-8137-9DF3F51BA10A}">
-      <p15:sldGuideLst xmlns:p15="http://schemas.microsoft.com/office/powerpoint/2012/main"/>
-    </p:ext>
-  </p:extLst>
 </p:presentation>
 </file>
 
@@ -143,10 +138,234 @@
           <a:chExt cx="0" cy="0"/>
         </a:xfrm>
       </p:grpSpPr>
+      <p:sp>
+        <p:nvSpPr>
+          <p:cNvPr id="2" name="Header Placeholder 1"/>
+          <p:cNvSpPr>
+            <a:spLocks noGrp="1"/>
+          </p:cNvSpPr>
+          <p:nvPr>
+            <p:ph type="hdr" sz="quarter"/>
+          </p:nvPr>
+        </p:nvSpPr>
+        <p:spPr>
+          <a:xfrm>
+            <a:off x="0" y="0"/>
+            <a:ext cx="2971800" cy="458788"/>
+          </a:xfrm>
+          <a:prstGeom prst="rect">
+            <a:avLst/>
+          </a:prstGeom>
+        </p:spPr>
+        <p:txBody>
+          <a:bodyPr vert="horz" lIns="91440" tIns="45720" rIns="91440" bIns="45720" rtlCol="0"/>
+          <a:lstStyle>
+            <a:lvl1pPr algn="l">
+              <a:defRPr sz="1200"/>
+            </a:lvl1pPr>
+          </a:lstStyle>
+          <a:p>
+            <a:endParaRPr lang="en-US"/>
+          </a:p>
+        </p:txBody>
+      </p:sp>
+      <p:sp>
+        <p:nvSpPr>
+          <p:cNvPr id="3" name="Date Placeholder 2"/>
+          <p:cNvSpPr>
+            <a:spLocks noGrp="1"/>
+          </p:cNvSpPr>
+          <p:nvPr>
+            <p:ph type="dt" idx="1"/>
+          </p:nvPr>
+        </p:nvSpPr>
+        <p:spPr>
+          <a:xfrm>
+            <a:off x="3884613" y="0"/>
+            <a:ext cx="2971800" cy="458788"/>
+          </a:xfrm>
+          <a:prstGeom prst="rect">
+            <a:avLst/>
+          </a:prstGeom>
+        </p:spPr>
+        <p:txBody>
+          <a:bodyPr vert="horz" lIns="91440" tIns="45720" rIns="91440" bIns="45720" rtlCol="0"/>
+          <a:lstStyle>
+            <a:lvl1pPr algn="r">
+              <a:defRPr sz="1200"/>
+            </a:lvl1pPr>
+          </a:lstStyle>
+          <a:p>
+            <a:fld id="{5282F153-3F37-0F45-9E97-73ACFA13230C}" type="datetimeFigureOut">
+              <a:rPr lang="en-US"/>
+              <a:t>7/23/19</a:t>
+            </a:fld>
+            <a:endParaRPr lang="en-US"/>
+          </a:p>
+        </p:txBody>
+      </p:sp>
+      <p:sp>
+        <p:nvSpPr>
+          <p:cNvPr id="4" name="Slide Image Placeholder 3"/>
+          <p:cNvSpPr>
+            <a:spLocks noGrp="1" noRot="1" noChangeAspect="1"/>
+          </p:cNvSpPr>
+          <p:nvPr>
+            <p:ph type="sldImg" idx="2"/>
+          </p:nvPr>
+        </p:nvSpPr>
+        <p:spPr>
+          <a:xfrm>
+            <a:off x="685800" y="1143000"/>
+            <a:ext cx="5486400" cy="3086100"/>
+          </a:xfrm>
+          <a:prstGeom prst="rect">
+            <a:avLst/>
+          </a:prstGeom>
+          <a:noFill/>
+          <a:ln w="12700">
+            <a:solidFill>
+              <a:prstClr val="black"/>
+            </a:solidFill>
+          </a:ln>
+        </p:spPr>
+        <p:txBody>
+          <a:bodyPr vert="horz" lIns="91440" tIns="45720" rIns="91440" bIns="45720" rtlCol="0" anchor="ctr"/>
+          <a:lstStyle/>
+          <a:p>
+            <a:endParaRPr lang="en-US"/>
+          </a:p>
+        </p:txBody>
+      </p:sp>
+      <p:sp>
+        <p:nvSpPr>
+          <p:cNvPr id="5" name="Notes Placeholder 4"/>
+          <p:cNvSpPr>
+            <a:spLocks noGrp="1"/>
+          </p:cNvSpPr>
+          <p:nvPr>
+            <p:ph type="body" sz="quarter" idx="3"/>
+          </p:nvPr>
+        </p:nvSpPr>
+        <p:spPr>
+          <a:xfrm>
+            <a:off x="685800" y="4400550"/>
+            <a:ext cx="5486400" cy="3600450"/>
+          </a:xfrm>
+          <a:prstGeom prst="rect">
+            <a:avLst/>
+          </a:prstGeom>
+        </p:spPr>
+        <p:txBody>
+          <a:bodyPr vert="horz" lIns="91440" tIns="45720" rIns="91440" bIns="45720" rtlCol="0"/>
+          <a:lstStyle/>
+          <a:p>
+            <a:pPr lvl="0"/>
+            <a:r>
+              <a:rPr lang="en-US"/>
+              <a:t>Click to edit Master text styles</a:t>
+            </a:r>
+          </a:p>
+          <a:p>
+            <a:pPr lvl="1"/>
+            <a:r>
+              <a:rPr lang="en-US"/>
+              <a:t>Second level</a:t>
+            </a:r>
+          </a:p>
+          <a:p>
+            <a:pPr lvl="2"/>
+            <a:r>
+              <a:rPr lang="en-US"/>
+              <a:t>Third level</a:t>
+            </a:r>
+          </a:p>
+          <a:p>
+            <a:pPr lvl="3"/>
+            <a:r>
+              <a:rPr lang="en-US"/>
+              <a:t>Fourth level</a:t>
+            </a:r>
+          </a:p>
+          <a:p>
+            <a:pPr lvl="4"/>
+            <a:r>
+              <a:rPr lang="en-US"/>
+              <a:t>Fifth level</a:t>
+            </a:r>
+          </a:p>
+        </p:txBody>
+      </p:sp>
+      <p:sp>
+        <p:nvSpPr>
+          <p:cNvPr id="6" name="Footer Placeholder 5"/>
+          <p:cNvSpPr>
+            <a:spLocks noGrp="1"/>
+          </p:cNvSpPr>
+          <p:nvPr>
+            <p:ph type="ftr" sz="quarter" idx="4"/>
+          </p:nvPr>
+        </p:nvSpPr>
+        <p:spPr>
+          <a:xfrm>
+            <a:off x="0" y="8685213"/>
+            <a:ext cx="2971800" cy="458787"/>
+          </a:xfrm>
+          <a:prstGeom prst="rect">
+            <a:avLst/>
+          </a:prstGeom>
+        </p:spPr>
+        <p:txBody>
+          <a:bodyPr vert="horz" lIns="91440" tIns="45720" rIns="91440" bIns="45720" rtlCol="0" anchor="b"/>
+          <a:lstStyle>
+            <a:lvl1pPr algn="l">
+              <a:defRPr sz="1200"/>
+            </a:lvl1pPr>
+          </a:lstStyle>
+          <a:p>
+            <a:endParaRPr lang="en-US"/>
+          </a:p>
+        </p:txBody>
+      </p:sp>
+      <p:sp>
+        <p:nvSpPr>
+          <p:cNvPr id="7" name="Slide Number Placeholder 6"/>
+          <p:cNvSpPr>
+            <a:spLocks noGrp="1"/>
+          </p:cNvSpPr>
+          <p:nvPr>
+            <p:ph type="sldNum" sz="quarter" idx="5"/>
+          </p:nvPr>
+        </p:nvSpPr>
+        <p:spPr>
+          <a:xfrm>
+            <a:off x="3884613" y="8685213"/>
+            <a:ext cx="2971800" cy="458787"/>
+          </a:xfrm>
+          <a:prstGeom prst="rect">
+            <a:avLst/>
+          </a:prstGeom>
+        </p:spPr>
+        <p:txBody>
+          <a:bodyPr vert="horz" lIns="91440" tIns="45720" rIns="91440" bIns="45720" rtlCol="0" anchor="b"/>
+          <a:lstStyle>
+            <a:lvl1pPr algn="r">
+              <a:defRPr sz="1200"/>
+            </a:lvl1pPr>
+          </a:lstStyle>
+          <a:p>
+            <a:fld id="{CE5E9CC1-C706-0F49-92D6-E571CC5EEA8F}" type="slidenum">
+              <a:rPr lang="en-US"/>
+              <a:t>‹#›</a:t>
+            </a:fld>
+            <a:endParaRPr lang="en-US"/>
+          </a:p>
+        </p:txBody>
+      </p:sp>
     </p:spTree>
     <p:extLst>
       <p:ext uri="{BB962C8B-B14F-4D97-AF65-F5344CB8AC3E}">
-        <p14:creationId xmlns:p14="http://schemas.microsoft.com/office/powerpoint/2010/main" val="1916708979"/>
+        <p14:creationId xmlns:p14="http://schemas.microsoft.com/office/powerpoint/2010/main" val="1024086991"/>
       </p:ext>
     </p:extLst>
   </p:cSld>
@@ -290,6 +509,10 @@
           <a:bodyPr/>
           <a:lstStyle/>
           <a:p>
+            <a:r>
+              <a:rPr lang="en-US" dirty="0"/>
+              <a:t/>
+            </a:r>
             <a:endParaRPr lang="en-US" dirty="0"/>
           </a:p>
         </p:txBody>
@@ -374,6 +597,10 @@
           <a:bodyPr/>
           <a:lstStyle/>
           <a:p>
+            <a:r>
+              <a:rPr lang="en-US" dirty="0"/>
+              <a:t/>
+            </a:r>
             <a:endParaRPr lang="en-US" dirty="0"/>
           </a:p>
         </p:txBody>
@@ -458,6 +685,10 @@
           <a:bodyPr/>
           <a:lstStyle/>
           <a:p>
+            <a:r>
+              <a:rPr lang="en-US" dirty="0"/>
+              <a:t/>
+            </a:r>
             <a:endParaRPr lang="en-US" dirty="0"/>
           </a:p>
         </p:txBody>
@@ -542,6 +773,10 @@
           <a:bodyPr/>
           <a:lstStyle/>
           <a:p>
+            <a:r>
+              <a:rPr lang="en-US" dirty="0"/>
+              <a:t/>
+            </a:r>
             <a:endParaRPr lang="en-US" dirty="0"/>
           </a:p>
         </p:txBody>
@@ -626,6 +861,10 @@
           <a:bodyPr/>
           <a:lstStyle/>
           <a:p>
+            <a:r>
+              <a:rPr lang="en-US" dirty="0"/>
+              <a:t/>
+            </a:r>
             <a:endParaRPr lang="en-US" dirty="0"/>
           </a:p>
         </p:txBody>
@@ -710,6 +949,10 @@
           <a:bodyPr/>
           <a:lstStyle/>
           <a:p>
+            <a:r>
+              <a:rPr lang="en-US" dirty="0"/>
+              <a:t/>
+            </a:r>
             <a:endParaRPr lang="en-US" dirty="0"/>
           </a:p>
         </p:txBody>
@@ -794,6 +1037,10 @@
           <a:bodyPr/>
           <a:lstStyle/>
           <a:p>
+            <a:r>
+              <a:rPr lang="en-US" dirty="0"/>
+              <a:t/>
+            </a:r>
             <a:endParaRPr lang="en-US" dirty="0"/>
           </a:p>
         </p:txBody>
@@ -878,6 +1125,10 @@
           <a:bodyPr/>
           <a:lstStyle/>
           <a:p>
+            <a:r>
+              <a:rPr lang="en-US" dirty="0"/>
+              <a:t/>
+            </a:r>
             <a:endParaRPr lang="en-US" dirty="0"/>
           </a:p>
         </p:txBody>
@@ -962,6 +1213,10 @@
           <a:bodyPr/>
           <a:lstStyle/>
           <a:p>
+            <a:r>
+              <a:rPr lang="en-US" dirty="0"/>
+              <a:t/>
+            </a:r>
             <a:endParaRPr lang="en-US" dirty="0"/>
           </a:p>
         </p:txBody>
@@ -1046,6 +1301,10 @@
           <a:bodyPr/>
           <a:lstStyle/>
           <a:p>
+            <a:r>
+              <a:rPr lang="en-US" dirty="0"/>
+              <a:t/>
+            </a:r>
             <a:endParaRPr lang="en-US" dirty="0"/>
           </a:p>
         </p:txBody>
@@ -1119,11 +1378,6 @@
 <file path=ppt/slideMasters/slideMaster1.xml><?xml version="1.0" encoding="utf-8"?>
 <p:sldMaster xmlns:a="http://schemas.openxmlformats.org/drawingml/2006/main" xmlns:r="http://schemas.openxmlformats.org/officeDocument/2006/relationships" xmlns:p="http://schemas.openxmlformats.org/presentationml/2006/main">
   <p:cSld>
-    <p:bg>
-      <p:bgRef idx="1001">
-        <a:schemeClr val="bg1"/>
-      </p:bgRef>
-    </p:bg>
     <p:spTree>
       <p:nvGrpSpPr>
         <p:cNvPr id="1" name=""/>
@@ -1406,7 +1660,6 @@
         <a:solidFill>
           <a:srgbClr val="0A0F1C"/>
         </a:solidFill>
-        <a:effectLst/>
       </p:bgPr>
     </p:bg>
     <p:spTree>
@@ -1447,13 +1700,6 @@
             <a:prstDash val="solid"/>
           </a:ln>
         </p:spPr>
-        <p:txBody>
-          <a:bodyPr/>
-          <a:lstStyle/>
-          <a:p>
-            <a:endParaRPr lang="en-CA"/>
-          </a:p>
-        </p:txBody>
       </p:sp>
       <p:sp>
         <p:nvSpPr>
@@ -1479,13 +1725,6 @@
             <a:prstDash val="solid"/>
           </a:ln>
         </p:spPr>
-        <p:txBody>
-          <a:bodyPr/>
-          <a:lstStyle/>
-          <a:p>
-            <a:endParaRPr lang="en-CA"/>
-          </a:p>
-        </p:txBody>
       </p:sp>
       <p:sp>
         <p:nvSpPr>
@@ -1511,13 +1750,6 @@
             <a:prstDash val="solid"/>
           </a:ln>
         </p:spPr>
-        <p:txBody>
-          <a:bodyPr/>
-          <a:lstStyle/>
-          <a:p>
-            <a:endParaRPr lang="en-CA"/>
-          </a:p>
-        </p:txBody>
       </p:sp>
       <p:sp>
         <p:nvSpPr>
@@ -1540,13 +1772,6 @@
           </a:solidFill>
           <a:ln/>
         </p:spPr>
-        <p:txBody>
-          <a:bodyPr/>
-          <a:lstStyle/>
-          <a:p>
-            <a:endParaRPr lang="en-CA"/>
-          </a:p>
-        </p:txBody>
       </p:sp>
       <p:sp>
         <p:nvSpPr>
@@ -1569,13 +1794,6 @@
           </a:solidFill>
           <a:ln/>
         </p:spPr>
-        <p:txBody>
-          <a:bodyPr/>
-          <a:lstStyle/>
-          <a:p>
-            <a:endParaRPr lang="en-CA"/>
-          </a:p>
-        </p:txBody>
       </p:sp>
       <p:sp>
         <p:nvSpPr>
@@ -1598,13 +1816,6 @@
           </a:solidFill>
           <a:ln/>
         </p:spPr>
-        <p:txBody>
-          <a:bodyPr/>
-          <a:lstStyle/>
-          <a:p>
-            <a:endParaRPr lang="en-CA"/>
-          </a:p>
-        </p:txBody>
       </p:sp>
       <p:sp>
         <p:nvSpPr>
@@ -1627,13 +1838,6 @@
           </a:solidFill>
           <a:ln/>
         </p:spPr>
-        <p:txBody>
-          <a:bodyPr/>
-          <a:lstStyle/>
-          <a:p>
-            <a:endParaRPr lang="en-CA"/>
-          </a:p>
-        </p:txBody>
       </p:sp>
       <p:sp>
         <p:nvSpPr>
@@ -1659,13 +1863,6 @@
             <a:prstDash val="solid"/>
           </a:ln>
         </p:spPr>
-        <p:txBody>
-          <a:bodyPr/>
-          <a:lstStyle/>
-          <a:p>
-            <a:endParaRPr lang="en-CA"/>
-          </a:p>
-        </p:txBody>
       </p:sp>
       <p:sp>
         <p:nvSpPr>
@@ -1691,13 +1888,6 @@
             <a:prstDash val="solid"/>
           </a:ln>
         </p:spPr>
-        <p:txBody>
-          <a:bodyPr/>
-          <a:lstStyle/>
-          <a:p>
-            <a:endParaRPr lang="en-CA"/>
-          </a:p>
-        </p:txBody>
       </p:sp>
       <p:sp>
         <p:nvSpPr>
@@ -1723,13 +1913,6 @@
             <a:prstDash val="solid"/>
           </a:ln>
         </p:spPr>
-        <p:txBody>
-          <a:bodyPr/>
-          <a:lstStyle/>
-          <a:p>
-            <a:endParaRPr lang="en-CA"/>
-          </a:p>
-        </p:txBody>
       </p:sp>
       <p:sp>
         <p:nvSpPr>
@@ -1752,13 +1935,6 @@
           </a:solidFill>
           <a:ln/>
         </p:spPr>
-        <p:txBody>
-          <a:bodyPr/>
-          <a:lstStyle/>
-          <a:p>
-            <a:endParaRPr lang="en-CA"/>
-          </a:p>
-        </p:txBody>
       </p:sp>
       <p:sp>
         <p:nvSpPr>
@@ -1781,13 +1957,6 @@
           </a:solidFill>
           <a:ln/>
         </p:spPr>
-        <p:txBody>
-          <a:bodyPr/>
-          <a:lstStyle/>
-          <a:p>
-            <a:endParaRPr lang="en-CA"/>
-          </a:p>
-        </p:txBody>
       </p:sp>
       <p:sp>
         <p:nvSpPr>
@@ -1810,13 +1979,6 @@
           </a:solidFill>
           <a:ln/>
         </p:spPr>
-        <p:txBody>
-          <a:bodyPr/>
-          <a:lstStyle/>
-          <a:p>
-            <a:endParaRPr lang="en-CA"/>
-          </a:p>
-        </p:txBody>
       </p:sp>
       <p:sp>
         <p:nvSpPr>
@@ -1839,13 +2001,6 @@
           </a:solidFill>
           <a:ln/>
         </p:spPr>
-        <p:txBody>
-          <a:bodyPr/>
-          <a:lstStyle/>
-          <a:p>
-            <a:endParaRPr lang="en-CA"/>
-          </a:p>
-        </p:txBody>
       </p:sp>
       <p:sp>
         <p:nvSpPr>
@@ -1868,7 +2023,7 @@
           <a:bodyPr wrap="square" lIns="0" tIns="0" rIns="0" bIns="0" rtlCol="0" anchor="ctr"/>
           <a:lstStyle/>
           <a:p>
-            <a:pPr marL="0" indent="0">
+            <a:pPr indent="0" marL="0">
               <a:buNone/>
             </a:pPr>
             <a:r>
@@ -1907,7 +2062,7 @@
           <a:bodyPr wrap="square" lIns="0" tIns="0" rIns="0" bIns="0" rtlCol="0" anchor="ctr"/>
           <a:lstStyle/>
           <a:p>
-            <a:pPr marL="0" indent="0" algn="r">
+            <a:pPr algn="r" indent="0" marL="0">
               <a:buNone/>
             </a:pPr>
             <a:r>
@@ -1946,7 +2101,7 @@
           <a:bodyPr wrap="square" lIns="0" tIns="0" rIns="0" bIns="0" rtlCol="0" anchor="ctr"/>
           <a:lstStyle/>
           <a:p>
-            <a:pPr marL="0" indent="0" algn="ctr">
+            <a:pPr algn="ctr" indent="0" marL="0">
               <a:buNone/>
             </a:pPr>
             <a:r>
@@ -1985,13 +2140,6 @@
           </a:solidFill>
           <a:ln/>
         </p:spPr>
-        <p:txBody>
-          <a:bodyPr/>
-          <a:lstStyle/>
-          <a:p>
-            <a:endParaRPr lang="en-CA"/>
-          </a:p>
-        </p:txBody>
       </p:sp>
       <p:sp>
         <p:nvSpPr>
@@ -2014,7 +2162,7 @@
           <a:bodyPr wrap="square" lIns="0" tIns="0" rIns="0" bIns="0" rtlCol="0" anchor="ctr"/>
           <a:lstStyle/>
           <a:p>
-            <a:pPr marL="0" indent="0" algn="ctr">
+            <a:pPr algn="ctr" indent="0" marL="0">
               <a:buNone/>
             </a:pPr>
             <a:r>
@@ -2028,6 +2176,9 @@
               </a:rPr>
               <a:t>Spring </a:t>
             </a:r>
+            <a:pPr algn="ctr" indent="0" marL="0">
+              <a:buNone/>
+            </a:pPr>
             <a:r>
               <a:rPr lang="en-US" sz="6480" b="1" dirty="0">
                 <a:solidFill>
@@ -2039,6 +2190,9 @@
               </a:rPr>
               <a:t>AI </a:t>
             </a:r>
+            <a:pPr algn="ctr" indent="0" marL="0">
+              <a:buNone/>
+            </a:pPr>
             <a:r>
               <a:rPr lang="en-US" sz="6480" b="1" dirty="0">
                 <a:solidFill>
@@ -2075,7 +2229,7 @@
           <a:bodyPr wrap="square" lIns="0" tIns="0" rIns="0" bIns="0" rtlCol="0" anchor="ctr"/>
           <a:lstStyle/>
           <a:p>
-            <a:pPr marL="0" indent="0" algn="ctr">
+            <a:pPr algn="ctr" indent="0" marL="0">
               <a:buNone/>
             </a:pPr>
             <a:r>
@@ -2117,13 +2271,6 @@
             <a:prstDash val="solid"/>
           </a:ln>
         </p:spPr>
-        <p:txBody>
-          <a:bodyPr/>
-          <a:lstStyle/>
-          <a:p>
-            <a:endParaRPr lang="en-CA"/>
-          </a:p>
-        </p:txBody>
       </p:sp>
       <p:sp>
         <p:nvSpPr>
@@ -2149,13 +2296,6 @@
             <a:prstDash val="solid"/>
           </a:ln>
         </p:spPr>
-        <p:txBody>
-          <a:bodyPr/>
-          <a:lstStyle/>
-          <a:p>
-            <a:endParaRPr lang="en-CA"/>
-          </a:p>
-        </p:txBody>
       </p:sp>
       <p:sp>
         <p:nvSpPr>
@@ -2181,13 +2321,6 @@
             <a:prstDash val="solid"/>
           </a:ln>
         </p:spPr>
-        <p:txBody>
-          <a:bodyPr/>
-          <a:lstStyle/>
-          <a:p>
-            <a:endParaRPr lang="en-CA"/>
-          </a:p>
-        </p:txBody>
       </p:sp>
       <p:sp>
         <p:nvSpPr>
@@ -2213,13 +2346,6 @@
             <a:prstDash val="solid"/>
           </a:ln>
         </p:spPr>
-        <p:txBody>
-          <a:bodyPr/>
-          <a:lstStyle/>
-          <a:p>
-            <a:endParaRPr lang="en-CA"/>
-          </a:p>
-        </p:txBody>
       </p:sp>
       <p:sp>
         <p:nvSpPr>
@@ -2242,7 +2368,7 @@
           <a:bodyPr wrap="square" lIns="0" tIns="0" rIns="0" bIns="0" rtlCol="0" anchor="ctr"/>
           <a:lstStyle/>
           <a:p>
-            <a:pPr marL="0" indent="0" algn="ctr">
+            <a:pPr algn="ctr" indent="0" marL="0">
               <a:buNone/>
             </a:pPr>
             <a:r>
@@ -2270,13 +2396,12 @@
 
 <file path=ppt/slides/slide10.xml><?xml version="1.0" encoding="utf-8"?>
 <p:sld xmlns:a="http://schemas.openxmlformats.org/drawingml/2006/main" xmlns:r="http://schemas.openxmlformats.org/officeDocument/2006/relationships" xmlns:p="http://schemas.openxmlformats.org/presentationml/2006/main">
-  <p:cSld name="Slide 9">
+  <p:cSld name="Slide 10">
     <p:bg>
       <p:bgPr>
         <a:solidFill>
           <a:srgbClr val="0A0F1C"/>
         </a:solidFill>
-        <a:effectLst/>
       </p:bgPr>
     </p:bg>
     <p:spTree>
@@ -2317,13 +2442,6 @@
             <a:prstDash val="solid"/>
           </a:ln>
         </p:spPr>
-        <p:txBody>
-          <a:bodyPr/>
-          <a:lstStyle/>
-          <a:p>
-            <a:endParaRPr lang="en-CA"/>
-          </a:p>
-        </p:txBody>
       </p:sp>
       <p:sp>
         <p:nvSpPr>
@@ -2349,13 +2467,6 @@
             <a:prstDash val="solid"/>
           </a:ln>
         </p:spPr>
-        <p:txBody>
-          <a:bodyPr/>
-          <a:lstStyle/>
-          <a:p>
-            <a:endParaRPr lang="en-CA"/>
-          </a:p>
-        </p:txBody>
       </p:sp>
       <p:sp>
         <p:nvSpPr>
@@ -2381,13 +2492,6 @@
             <a:prstDash val="solid"/>
           </a:ln>
         </p:spPr>
-        <p:txBody>
-          <a:bodyPr/>
-          <a:lstStyle/>
-          <a:p>
-            <a:endParaRPr lang="en-CA"/>
-          </a:p>
-        </p:txBody>
       </p:sp>
       <p:sp>
         <p:nvSpPr>
@@ -2410,13 +2514,6 @@
           </a:solidFill>
           <a:ln/>
         </p:spPr>
-        <p:txBody>
-          <a:bodyPr/>
-          <a:lstStyle/>
-          <a:p>
-            <a:endParaRPr lang="en-CA"/>
-          </a:p>
-        </p:txBody>
       </p:sp>
       <p:sp>
         <p:nvSpPr>
@@ -2439,13 +2536,6 @@
           </a:solidFill>
           <a:ln/>
         </p:spPr>
-        <p:txBody>
-          <a:bodyPr/>
-          <a:lstStyle/>
-          <a:p>
-            <a:endParaRPr lang="en-CA"/>
-          </a:p>
-        </p:txBody>
       </p:sp>
       <p:sp>
         <p:nvSpPr>
@@ -2468,13 +2558,6 @@
           </a:solidFill>
           <a:ln/>
         </p:spPr>
-        <p:txBody>
-          <a:bodyPr/>
-          <a:lstStyle/>
-          <a:p>
-            <a:endParaRPr lang="en-CA"/>
-          </a:p>
-        </p:txBody>
       </p:sp>
       <p:sp>
         <p:nvSpPr>
@@ -2497,13 +2580,6 @@
           </a:solidFill>
           <a:ln/>
         </p:spPr>
-        <p:txBody>
-          <a:bodyPr/>
-          <a:lstStyle/>
-          <a:p>
-            <a:endParaRPr lang="en-CA"/>
-          </a:p>
-        </p:txBody>
       </p:sp>
       <p:sp>
         <p:nvSpPr>
@@ -2529,13 +2605,6 @@
             <a:prstDash val="solid"/>
           </a:ln>
         </p:spPr>
-        <p:txBody>
-          <a:bodyPr/>
-          <a:lstStyle/>
-          <a:p>
-            <a:endParaRPr lang="en-CA"/>
-          </a:p>
-        </p:txBody>
       </p:sp>
       <p:sp>
         <p:nvSpPr>
@@ -2561,13 +2630,6 @@
             <a:prstDash val="solid"/>
           </a:ln>
         </p:spPr>
-        <p:txBody>
-          <a:bodyPr/>
-          <a:lstStyle/>
-          <a:p>
-            <a:endParaRPr lang="en-CA"/>
-          </a:p>
-        </p:txBody>
       </p:sp>
       <p:sp>
         <p:nvSpPr>
@@ -2593,13 +2655,6 @@
             <a:prstDash val="solid"/>
           </a:ln>
         </p:spPr>
-        <p:txBody>
-          <a:bodyPr/>
-          <a:lstStyle/>
-          <a:p>
-            <a:endParaRPr lang="en-CA"/>
-          </a:p>
-        </p:txBody>
       </p:sp>
       <p:sp>
         <p:nvSpPr>
@@ -2622,13 +2677,6 @@
           </a:solidFill>
           <a:ln/>
         </p:spPr>
-        <p:txBody>
-          <a:bodyPr/>
-          <a:lstStyle/>
-          <a:p>
-            <a:endParaRPr lang="en-CA"/>
-          </a:p>
-        </p:txBody>
       </p:sp>
       <p:sp>
         <p:nvSpPr>
@@ -2651,13 +2699,6 @@
           </a:solidFill>
           <a:ln/>
         </p:spPr>
-        <p:txBody>
-          <a:bodyPr/>
-          <a:lstStyle/>
-          <a:p>
-            <a:endParaRPr lang="en-CA"/>
-          </a:p>
-        </p:txBody>
       </p:sp>
       <p:sp>
         <p:nvSpPr>
@@ -2680,13 +2721,6 @@
           </a:solidFill>
           <a:ln/>
         </p:spPr>
-        <p:txBody>
-          <a:bodyPr/>
-          <a:lstStyle/>
-          <a:p>
-            <a:endParaRPr lang="en-CA"/>
-          </a:p>
-        </p:txBody>
       </p:sp>
       <p:sp>
         <p:nvSpPr>
@@ -2709,13 +2743,6 @@
           </a:solidFill>
           <a:ln/>
         </p:spPr>
-        <p:txBody>
-          <a:bodyPr/>
-          <a:lstStyle/>
-          <a:p>
-            <a:endParaRPr lang="en-CA"/>
-          </a:p>
-        </p:txBody>
       </p:sp>
       <p:sp>
         <p:nvSpPr>
@@ -2738,7 +2765,7 @@
           <a:bodyPr wrap="square" lIns="0" tIns="0" rIns="0" bIns="0" rtlCol="0" anchor="ctr"/>
           <a:lstStyle/>
           <a:p>
-            <a:pPr marL="0" indent="0">
+            <a:pPr indent="0" marL="0">
               <a:buNone/>
             </a:pPr>
             <a:r>
@@ -2777,7 +2804,7 @@
           <a:bodyPr wrap="square" lIns="0" tIns="0" rIns="0" bIns="0" rtlCol="0" anchor="ctr"/>
           <a:lstStyle/>
           <a:p>
-            <a:pPr marL="0" indent="0" algn="r">
+            <a:pPr algn="r" indent="0" marL="0">
               <a:buNone/>
             </a:pPr>
             <a:r>
@@ -2789,7 +2816,7 @@
                 <a:ea typeface="Courier New" pitchFamily="34" charset="-122"/>
                 <a:cs typeface="Courier New" pitchFamily="34" charset="-120"/>
               </a:rPr>
-              <a:t>9 / 10</a:t>
+              <a:t>10 / 10</a:t>
             </a:r>
             <a:endParaRPr lang="en-US" sz="1080" dirty="0"/>
           </a:p>
@@ -2803,8 +2830,8 @@
         </p:nvSpPr>
         <p:spPr>
           <a:xfrm>
-            <a:off x="5577840" y="945490"/>
-            <a:ext cx="502920" cy="502920"/>
+            <a:off x="640080" y="164592"/>
+            <a:ext cx="7315200" cy="274320"/>
           </a:xfrm>
           <a:prstGeom prst="rect">
             <a:avLst/>
@@ -2816,63 +2843,34 @@
           <a:bodyPr wrap="square" lIns="0" tIns="0" rIns="0" bIns="0" rtlCol="0" anchor="ctr"/>
           <a:lstStyle/>
           <a:p>
-            <a:pPr marL="0" indent="0" algn="ctr">
-              <a:buNone/>
-            </a:pPr>
-            <a:r>
-              <a:rPr lang="en-US" sz="3696" b="1" dirty="0">
-                <a:solidFill>
-                  <a:srgbClr val="F2A93B"/>
+            <a:pPr indent="0" marL="0">
+              <a:buNone/>
+            </a:pPr>
+            <a:r>
+              <a:rPr lang="en-US" sz="1440" spc="200" kern="0" dirty="0">
+                <a:solidFill>
+                  <a:srgbClr val="5FE0C5"/>
                 </a:solidFill>
                 <a:latin typeface="Courier New" pitchFamily="34" charset="0"/>
                 <a:ea typeface="Courier New" pitchFamily="34" charset="-122"/>
                 <a:cs typeface="Courier New" pitchFamily="34" charset="-120"/>
               </a:rPr>
-              <a:t>&gt;</a:t>
-            </a:r>
-            <a:endParaRPr lang="en-US" sz="3696" dirty="0"/>
-          </a:p>
-        </p:txBody>
-      </p:sp>
-      <p:sp>
-        <p:nvSpPr>
-          <p:cNvPr id="19" name="Shape 17"/>
-          <p:cNvSpPr/>
-          <p:nvPr/>
-        </p:nvSpPr>
-        <p:spPr>
-          <a:xfrm>
-            <a:off x="6000293" y="1186891"/>
-            <a:ext cx="341986" cy="120701"/>
-          </a:xfrm>
-          <a:prstGeom prst="roundRect">
-            <a:avLst>
-              <a:gd name="adj" fmla="val 50000"/>
-            </a:avLst>
-          </a:prstGeom>
-          <a:solidFill>
-            <a:srgbClr val="5FE0C5"/>
-          </a:solidFill>
-          <a:ln/>
-        </p:spPr>
-        <p:txBody>
-          <a:bodyPr/>
-          <a:lstStyle/>
-          <a:p>
-            <a:endParaRPr lang="en-CA"/>
-          </a:p>
-        </p:txBody>
-      </p:sp>
-      <p:sp>
-        <p:nvSpPr>
-          <p:cNvPr id="20" name="Text 18"/>
-          <p:cNvSpPr/>
-          <p:nvPr/>
-        </p:nvSpPr>
-        <p:spPr>
-          <a:xfrm>
-            <a:off x="0" y="1783080"/>
-            <a:ext cx="12161520" cy="731520"/>
+              <a:t>CREDITS &amp; THANKS</a:t>
+            </a:r>
+            <a:endParaRPr lang="en-US" sz="1440" dirty="0"/>
+          </a:p>
+        </p:txBody>
+      </p:sp>
+      <p:sp>
+        <p:nvSpPr>
+          <p:cNvPr id="19" name="Text 17"/>
+          <p:cNvSpPr/>
+          <p:nvPr/>
+        </p:nvSpPr>
+        <p:spPr>
+          <a:xfrm>
+            <a:off x="640080" y="457200"/>
+            <a:ext cx="10881360" cy="640080"/>
           </a:xfrm>
           <a:prstGeom prst="rect">
             <a:avLst/>
@@ -2884,21 +2882,63 @@
           <a:bodyPr wrap="square" lIns="0" tIns="0" rIns="0" bIns="0" rtlCol="0" anchor="ctr"/>
           <a:lstStyle/>
           <a:p>
-            <a:pPr marL="0" indent="0" algn="ctr">
-              <a:buNone/>
-            </a:pPr>
-            <a:r>
-              <a:rPr lang="en-US" sz="4320" b="1" dirty="0">
-                <a:solidFill>
-                  <a:srgbClr val="E5E9F0"/>
+            <a:pPr algn="l" indent="0" marL="0">
+              <a:buNone/>
+            </a:pPr>
+            <a:r>
+              <a:rPr lang="en-US" sz="3360" b="1" dirty="0">
+                <a:solidFill>
+                  <a:srgbClr val="F2A93B"/>
                 </a:solidFill>
                 <a:latin typeface="Courier New" pitchFamily="34" charset="0"/>
                 <a:ea typeface="Courier New" pitchFamily="34" charset="-122"/>
                 <a:cs typeface="Courier New" pitchFamily="34" charset="-120"/>
               </a:rPr>
-              <a:t>Let's build Chapter 1.</a:t>
-            </a:r>
-            <a:endParaRPr lang="en-US" sz="4320" dirty="0"/>
+              <a:t>This isn't my merit</a:t>
+            </a:r>
+            <a:endParaRPr lang="en-US" sz="3360" dirty="0"/>
+          </a:p>
+        </p:txBody>
+      </p:sp>
+      <p:sp>
+        <p:nvSpPr>
+          <p:cNvPr id="20" name="Text 18"/>
+          <p:cNvSpPr/>
+          <p:nvPr/>
+        </p:nvSpPr>
+        <p:spPr>
+          <a:xfrm>
+            <a:off x="640080" y="1371600"/>
+            <a:ext cx="10881360" cy="731520"/>
+          </a:xfrm>
+          <a:prstGeom prst="rect">
+            <a:avLst/>
+          </a:prstGeom>
+          <a:noFill/>
+          <a:ln/>
+        </p:spPr>
+        <p:txBody>
+          <a:bodyPr wrap="square" lIns="0" tIns="0" rIns="0" bIns="0" rtlCol="0" anchor="ctr"/>
+          <a:lstStyle/>
+          <a:p>
+            <a:pPr algn="ctr" indent="0" marL="0">
+              <a:lnSpc>
+                <a:spcPct val="120000"/>
+              </a:lnSpc>
+              <a:buNone/>
+            </a:pPr>
+            <a:r>
+              <a:rPr lang="en-US" sz="1920" dirty="0">
+                <a:solidFill>
+                  <a:srgbClr val="B8C0D0"/>
+                </a:solidFill>
+                <a:latin typeface="Calibri" pitchFamily="34" charset="0"/>
+                <a:ea typeface="Calibri" pitchFamily="34" charset="-122"/>
+                <a:cs typeface="Calibri" pitchFamily="34" charset="-120"/>
+              </a:rPr>
+              <a:t>Everything in this series is built on the work of open-source projects and their communities. I only learned from them and shared what I built.</a:t>
+            </a:r>
+            <a:endParaRPr lang="en-US" sz="1920" dirty="0"/>
           </a:p>
         </p:txBody>
       </p:sp>
@@ -2910,8 +2950,310 @@
         </p:nvSpPr>
         <p:spPr>
           <a:xfrm>
-            <a:off x="4709160" y="2743200"/>
-            <a:ext cx="2743200" cy="0"/>
+            <a:off x="822960" y="2423160"/>
+            <a:ext cx="5029200" cy="2011680"/>
+          </a:xfrm>
+          <a:prstGeom prst="roundRect">
+            <a:avLst>
+              <a:gd name="adj" fmla="val 5455"/>
+            </a:avLst>
+          </a:prstGeom>
+          <a:solidFill>
+            <a:srgbClr val="121A2E"/>
+          </a:solidFill>
+          <a:ln w="19050">
+            <a:solidFill>
+              <a:srgbClr val="5FE0C5"/>
+            </a:solidFill>
+            <a:prstDash val="solid"/>
+          </a:ln>
+          <a:effectLst>
+            <a:outerShdw sx="100000" sy="100000" kx="0" ky="0" algn="bl" rotWithShape="0" blurRad="101600" dist="38100" dir="2700000">
+              <a:srgbClr val="000000">
+                <a:alpha val="25000"/>
+              </a:srgbClr>
+            </a:outerShdw>
+          </a:effectLst>
+        </p:spPr>
+      </p:sp>
+      <p:sp>
+        <p:nvSpPr>
+          <p:cNvPr id="22" name="Text 20"/>
+          <p:cNvSpPr/>
+          <p:nvPr/>
+        </p:nvSpPr>
+        <p:spPr>
+          <a:xfrm>
+            <a:off x="1143000" y="2697480"/>
+            <a:ext cx="4389120" cy="548640"/>
+          </a:xfrm>
+          <a:prstGeom prst="rect">
+            <a:avLst/>
+          </a:prstGeom>
+          <a:noFill/>
+          <a:ln/>
+        </p:spPr>
+        <p:txBody>
+          <a:bodyPr wrap="square" lIns="0" tIns="0" rIns="0" bIns="0" rtlCol="0" anchor="ctr"/>
+          <a:lstStyle/>
+          <a:p>
+            <a:pPr indent="0" marL="0">
+              <a:buNone/>
+            </a:pPr>
+            <a:r>
+              <a:rPr lang="en-US" sz="2640" b="1" dirty="0">
+                <a:solidFill>
+                  <a:srgbClr val="5FE0C5"/>
+                </a:solidFill>
+                <a:latin typeface="Courier New" pitchFamily="34" charset="0"/>
+                <a:ea typeface="Courier New" pitchFamily="34" charset="-122"/>
+                <a:cs typeface="Courier New" pitchFamily="34" charset="-120"/>
+              </a:rPr>
+              <a:t>Spring AI</a:t>
+            </a:r>
+            <a:endParaRPr lang="en-US" sz="2640" dirty="0"/>
+          </a:p>
+        </p:txBody>
+      </p:sp>
+      <p:sp>
+        <p:nvSpPr>
+          <p:cNvPr id="23" name="Text 21"/>
+          <p:cNvSpPr/>
+          <p:nvPr/>
+        </p:nvSpPr>
+        <p:spPr>
+          <a:xfrm>
+            <a:off x="1143000" y="3337560"/>
+            <a:ext cx="4389120" cy="457200"/>
+          </a:xfrm>
+          <a:prstGeom prst="rect">
+            <a:avLst/>
+          </a:prstGeom>
+          <a:noFill/>
+          <a:ln/>
+        </p:spPr>
+        <p:txBody>
+          <a:bodyPr wrap="square" lIns="0" tIns="0" rIns="0" bIns="0" rtlCol="0" anchor="ctr"/>
+          <a:lstStyle/>
+          <a:p>
+            <a:pPr indent="0" marL="0">
+              <a:buNone/>
+            </a:pPr>
+            <a:r>
+              <a:rPr lang="en-US" sz="1560" dirty="0">
+                <a:solidFill>
+                  <a:srgbClr val="E5E9F0"/>
+                </a:solidFill>
+                <a:latin typeface="Calibri" pitchFamily="34" charset="0"/>
+                <a:ea typeface="Calibri" pitchFamily="34" charset="-122"/>
+                <a:cs typeface="Calibri" pitchFamily="34" charset="-120"/>
+              </a:rPr>
+              <a:t>The AI integration layer for Spring</a:t>
+            </a:r>
+            <a:endParaRPr lang="en-US" sz="1560" dirty="0"/>
+          </a:p>
+        </p:txBody>
+      </p:sp>
+      <p:sp>
+        <p:nvSpPr>
+          <p:cNvPr id="24" name="Text 22"/>
+          <p:cNvSpPr/>
+          <p:nvPr/>
+        </p:nvSpPr>
+        <p:spPr>
+          <a:xfrm>
+            <a:off x="1143000" y="3840480"/>
+            <a:ext cx="4389120" cy="365760"/>
+          </a:xfrm>
+          <a:prstGeom prst="rect">
+            <a:avLst/>
+          </a:prstGeom>
+          <a:noFill/>
+          <a:ln/>
+        </p:spPr>
+        <p:txBody>
+          <a:bodyPr wrap="square" lIns="0" tIns="0" rIns="0" bIns="0" rtlCol="0" anchor="ctr"/>
+          <a:lstStyle/>
+          <a:p>
+            <a:pPr indent="0" marL="0">
+              <a:buNone/>
+            </a:pPr>
+            <a:r>
+              <a:rPr lang="en-US" sz="1440" dirty="0">
+                <a:solidFill>
+                  <a:srgbClr val="8B98AC"/>
+                </a:solidFill>
+                <a:latin typeface="Courier New" pitchFamily="34" charset="0"/>
+                <a:ea typeface="Courier New" pitchFamily="34" charset="-122"/>
+                <a:cs typeface="Courier New" pitchFamily="34" charset="-120"/>
+              </a:rPr>
+              <a:t>spring.io/projects/spring-ai</a:t>
+            </a:r>
+            <a:endParaRPr lang="en-US" sz="1440" dirty="0"/>
+          </a:p>
+        </p:txBody>
+      </p:sp>
+      <p:sp>
+        <p:nvSpPr>
+          <p:cNvPr id="25" name="Shape 23"/>
+          <p:cNvSpPr/>
+          <p:nvPr/>
+        </p:nvSpPr>
+        <p:spPr>
+          <a:xfrm>
+            <a:off x="6309360" y="2423160"/>
+            <a:ext cx="5029200" cy="2011680"/>
+          </a:xfrm>
+          <a:prstGeom prst="roundRect">
+            <a:avLst>
+              <a:gd name="adj" fmla="val 5455"/>
+            </a:avLst>
+          </a:prstGeom>
+          <a:solidFill>
+            <a:srgbClr val="121A2E"/>
+          </a:solidFill>
+          <a:ln w="19050">
+            <a:solidFill>
+              <a:srgbClr val="F2A93B"/>
+            </a:solidFill>
+            <a:prstDash val="solid"/>
+          </a:ln>
+          <a:effectLst>
+            <a:outerShdw sx="100000" sy="100000" kx="0" ky="0" algn="bl" rotWithShape="0" blurRad="101600" dist="38100" dir="2700000">
+              <a:srgbClr val="000000">
+                <a:alpha val="25000"/>
+              </a:srgbClr>
+            </a:outerShdw>
+          </a:effectLst>
+        </p:spPr>
+      </p:sp>
+      <p:sp>
+        <p:nvSpPr>
+          <p:cNvPr id="26" name="Text 24"/>
+          <p:cNvSpPr/>
+          <p:nvPr/>
+        </p:nvSpPr>
+        <p:spPr>
+          <a:xfrm>
+            <a:off x="6629400" y="2697480"/>
+            <a:ext cx="4389120" cy="548640"/>
+          </a:xfrm>
+          <a:prstGeom prst="rect">
+            <a:avLst/>
+          </a:prstGeom>
+          <a:noFill/>
+          <a:ln/>
+        </p:spPr>
+        <p:txBody>
+          <a:bodyPr wrap="square" lIns="0" tIns="0" rIns="0" bIns="0" rtlCol="0" anchor="ctr"/>
+          <a:lstStyle/>
+          <a:p>
+            <a:pPr indent="0" marL="0">
+              <a:buNone/>
+            </a:pPr>
+            <a:r>
+              <a:rPr lang="en-US" sz="2640" b="1" dirty="0">
+                <a:solidFill>
+                  <a:srgbClr val="F2A93B"/>
+                </a:solidFill>
+                <a:latin typeface="Courier New" pitchFamily="34" charset="0"/>
+                <a:ea typeface="Courier New" pitchFamily="34" charset="-122"/>
+                <a:cs typeface="Courier New" pitchFamily="34" charset="-120"/>
+              </a:rPr>
+              <a:t>Ollama</a:t>
+            </a:r>
+            <a:endParaRPr lang="en-US" sz="2640" dirty="0"/>
+          </a:p>
+        </p:txBody>
+      </p:sp>
+      <p:sp>
+        <p:nvSpPr>
+          <p:cNvPr id="27" name="Text 25"/>
+          <p:cNvSpPr/>
+          <p:nvPr/>
+        </p:nvSpPr>
+        <p:spPr>
+          <a:xfrm>
+            <a:off x="6629400" y="3337560"/>
+            <a:ext cx="4389120" cy="457200"/>
+          </a:xfrm>
+          <a:prstGeom prst="rect">
+            <a:avLst/>
+          </a:prstGeom>
+          <a:noFill/>
+          <a:ln/>
+        </p:spPr>
+        <p:txBody>
+          <a:bodyPr wrap="square" lIns="0" tIns="0" rIns="0" bIns="0" rtlCol="0" anchor="ctr"/>
+          <a:lstStyle/>
+          <a:p>
+            <a:pPr indent="0" marL="0">
+              <a:buNone/>
+            </a:pPr>
+            <a:r>
+              <a:rPr lang="en-US" sz="1560" dirty="0">
+                <a:solidFill>
+                  <a:srgbClr val="E5E9F0"/>
+                </a:solidFill>
+                <a:latin typeface="Calibri" pitchFamily="34" charset="0"/>
+                <a:ea typeface="Calibri" pitchFamily="34" charset="-122"/>
+                <a:cs typeface="Calibri" pitchFamily="34" charset="-120"/>
+              </a:rPr>
+              <a:t>Run open LLMs locally</a:t>
+            </a:r>
+            <a:endParaRPr lang="en-US" sz="1560" dirty="0"/>
+          </a:p>
+        </p:txBody>
+      </p:sp>
+      <p:sp>
+        <p:nvSpPr>
+          <p:cNvPr id="28" name="Text 26"/>
+          <p:cNvSpPr/>
+          <p:nvPr/>
+        </p:nvSpPr>
+        <p:spPr>
+          <a:xfrm>
+            <a:off x="6629400" y="3840480"/>
+            <a:ext cx="4389120" cy="365760"/>
+          </a:xfrm>
+          <a:prstGeom prst="rect">
+            <a:avLst/>
+          </a:prstGeom>
+          <a:noFill/>
+          <a:ln/>
+        </p:spPr>
+        <p:txBody>
+          <a:bodyPr wrap="square" lIns="0" tIns="0" rIns="0" bIns="0" rtlCol="0" anchor="ctr"/>
+          <a:lstStyle/>
+          <a:p>
+            <a:pPr indent="0" marL="0">
+              <a:buNone/>
+            </a:pPr>
+            <a:r>
+              <a:rPr lang="en-US" sz="1440" dirty="0">
+                <a:solidFill>
+                  <a:srgbClr val="8B98AC"/>
+                </a:solidFill>
+                <a:latin typeface="Courier New" pitchFamily="34" charset="0"/>
+                <a:ea typeface="Courier New" pitchFamily="34" charset="-122"/>
+                <a:cs typeface="Courier New" pitchFamily="34" charset="-120"/>
+              </a:rPr>
+              <a:t>ollama.com</a:t>
+            </a:r>
+            <a:endParaRPr lang="en-US" sz="1440" dirty="0"/>
+          </a:p>
+        </p:txBody>
+      </p:sp>
+      <p:sp>
+        <p:nvSpPr>
+          <p:cNvPr id="29" name="Shape 27"/>
+          <p:cNvSpPr/>
+          <p:nvPr/>
+        </p:nvSpPr>
+        <p:spPr>
+          <a:xfrm>
+            <a:off x="4251960" y="4892040"/>
+            <a:ext cx="3657600" cy="0"/>
           </a:xfrm>
           <a:prstGeom prst="line">
             <a:avLst/>
@@ -2926,23 +3268,16 @@
             <a:prstDash val="solid"/>
           </a:ln>
         </p:spPr>
-        <p:txBody>
-          <a:bodyPr/>
-          <a:lstStyle/>
-          <a:p>
-            <a:endParaRPr lang="en-CA"/>
-          </a:p>
-        </p:txBody>
-      </p:sp>
-      <p:sp>
-        <p:nvSpPr>
-          <p:cNvPr id="22" name="Shape 20"/>
-          <p:cNvSpPr/>
-          <p:nvPr/>
-        </p:nvSpPr>
-        <p:spPr>
-          <a:xfrm>
-            <a:off x="4668012" y="2702052"/>
+      </p:sp>
+      <p:sp>
+        <p:nvSpPr>
+          <p:cNvPr id="30" name="Shape 28"/>
+          <p:cNvSpPr/>
+          <p:nvPr/>
+        </p:nvSpPr>
+        <p:spPr>
+          <a:xfrm>
+            <a:off x="4210812" y="4850892"/>
             <a:ext cx="82296" cy="82296"/>
           </a:xfrm>
           <a:prstGeom prst="ellipse">
@@ -2958,23 +3293,16 @@
             <a:prstDash val="solid"/>
           </a:ln>
         </p:spPr>
-        <p:txBody>
-          <a:bodyPr/>
-          <a:lstStyle/>
-          <a:p>
-            <a:endParaRPr lang="en-CA"/>
-          </a:p>
-        </p:txBody>
-      </p:sp>
-      <p:sp>
-        <p:nvSpPr>
-          <p:cNvPr id="23" name="Shape 21"/>
-          <p:cNvSpPr/>
-          <p:nvPr/>
-        </p:nvSpPr>
-        <p:spPr>
-          <a:xfrm>
-            <a:off x="6039612" y="2702052"/>
+      </p:sp>
+      <p:sp>
+        <p:nvSpPr>
+          <p:cNvPr id="31" name="Shape 29"/>
+          <p:cNvSpPr/>
+          <p:nvPr/>
+        </p:nvSpPr>
+        <p:spPr>
+          <a:xfrm>
+            <a:off x="6039612" y="4850892"/>
             <a:ext cx="82296" cy="82296"/>
           </a:xfrm>
           <a:prstGeom prst="ellipse">
@@ -2990,23 +3318,16 @@
             <a:prstDash val="solid"/>
           </a:ln>
         </p:spPr>
-        <p:txBody>
-          <a:bodyPr/>
-          <a:lstStyle/>
-          <a:p>
-            <a:endParaRPr lang="en-CA"/>
-          </a:p>
-        </p:txBody>
-      </p:sp>
-      <p:sp>
-        <p:nvSpPr>
-          <p:cNvPr id="24" name="Shape 22"/>
-          <p:cNvSpPr/>
-          <p:nvPr/>
-        </p:nvSpPr>
-        <p:spPr>
-          <a:xfrm>
-            <a:off x="7411212" y="2702052"/>
+      </p:sp>
+      <p:sp>
+        <p:nvSpPr>
+          <p:cNvPr id="32" name="Shape 30"/>
+          <p:cNvSpPr/>
+          <p:nvPr/>
+        </p:nvSpPr>
+        <p:spPr>
+          <a:xfrm>
+            <a:off x="7868412" y="4850892"/>
             <a:ext cx="82296" cy="82296"/>
           </a:xfrm>
           <a:prstGeom prst="ellipse">
@@ -3022,23 +3343,16 @@
             <a:prstDash val="solid"/>
           </a:ln>
         </p:spPr>
-        <p:txBody>
-          <a:bodyPr/>
-          <a:lstStyle/>
-          <a:p>
-            <a:endParaRPr lang="en-CA"/>
-          </a:p>
-        </p:txBody>
-      </p:sp>
-      <p:sp>
-        <p:nvSpPr>
-          <p:cNvPr id="25" name="Text 23"/>
-          <p:cNvSpPr/>
-          <p:nvPr/>
-        </p:nvSpPr>
-        <p:spPr>
-          <a:xfrm>
-            <a:off x="0" y="3017520"/>
+      </p:sp>
+      <p:sp>
+        <p:nvSpPr>
+          <p:cNvPr id="33" name="Text 31"/>
+          <p:cNvSpPr/>
+          <p:nvPr/>
+        </p:nvSpPr>
+        <p:spPr>
+          <a:xfrm>
+            <a:off x="0" y="5120640"/>
             <a:ext cx="12161520" cy="457200"/>
           </a:xfrm>
           <a:prstGeom prst="rect">
@@ -3051,66 +3365,33 @@
           <a:bodyPr wrap="square" lIns="0" tIns="0" rIns="0" bIns="0" rtlCol="0" anchor="ctr"/>
           <a:lstStyle/>
           <a:p>
-            <a:pPr marL="0" indent="0" algn="ctr">
-              <a:buNone/>
-            </a:pPr>
-            <a:r>
-              <a:rPr lang="en-US" sz="2040" b="1" dirty="0">
-                <a:solidFill>
-                  <a:srgbClr val="F2A93B"/>
+            <a:pPr algn="ctr" indent="0" marL="0">
+              <a:buNone/>
+            </a:pPr>
+            <a:r>
+              <a:rPr lang="en-US" sz="1680" dirty="0">
+                <a:solidFill>
+                  <a:srgbClr val="E5E9F0"/>
                 </a:solidFill>
                 <a:latin typeface="Calibri" pitchFamily="34" charset="0"/>
                 <a:ea typeface="Calibri" pitchFamily="34" charset="-122"/>
                 <a:cs typeface="Calibri" pitchFamily="34" charset="-120"/>
               </a:rPr>
-              <a:t>Subscribe</a:t>
-            </a:r>
-            <a:r>
-              <a:rPr lang="en-US" sz="2040" dirty="0">
-                <a:solidFill>
-                  <a:srgbClr val="B8C0D0"/>
-                </a:solidFill>
-                <a:latin typeface="Calibri" pitchFamily="34" charset="0"/>
-                <a:ea typeface="Calibri" pitchFamily="34" charset="-122"/>
-                <a:cs typeface="Calibri" pitchFamily="34" charset="-120"/>
-              </a:rPr>
-              <a:t>  for every chapter  ·  </a:t>
-            </a:r>
-            <a:r>
-              <a:rPr lang="en-US" sz="2040" b="1" dirty="0">
-                <a:solidFill>
-                  <a:srgbClr val="5FE0C5"/>
-                </a:solidFill>
-                <a:latin typeface="Calibri" pitchFamily="34" charset="0"/>
-                <a:ea typeface="Calibri" pitchFamily="34" charset="-122"/>
-                <a:cs typeface="Calibri" pitchFamily="34" charset="-120"/>
-              </a:rPr>
-              <a:t>Star the repo</a:t>
-            </a:r>
-            <a:r>
-              <a:rPr lang="en-US" sz="2040" dirty="0">
-                <a:solidFill>
-                  <a:srgbClr val="B8C0D0"/>
-                </a:solidFill>
-                <a:latin typeface="Calibri" pitchFamily="34" charset="0"/>
-                <a:ea typeface="Calibri" pitchFamily="34" charset="-122"/>
-                <a:cs typeface="Calibri" pitchFamily="34" charset="-120"/>
-              </a:rPr>
-              <a:t>  on GitHub</a:t>
-            </a:r>
-            <a:endParaRPr lang="en-US" sz="2040" dirty="0"/>
-          </a:p>
-        </p:txBody>
-      </p:sp>
-      <p:sp>
-        <p:nvSpPr>
-          <p:cNvPr id="26" name="Text 24"/>
-          <p:cNvSpPr/>
-          <p:nvPr/>
-        </p:nvSpPr>
-        <p:spPr>
-          <a:xfrm>
-            <a:off x="0" y="3657600"/>
+              <a:t>Shared with gratitude — all credit to their maintainers &amp; contributors.</a:t>
+            </a:r>
+            <a:endParaRPr lang="en-US" sz="1680" dirty="0"/>
+          </a:p>
+        </p:txBody>
+      </p:sp>
+      <p:sp>
+        <p:nvSpPr>
+          <p:cNvPr id="34" name="Text 32"/>
+          <p:cNvSpPr/>
+          <p:nvPr/>
+        </p:nvSpPr>
+        <p:spPr>
+          <a:xfrm>
+            <a:off x="0" y="5623560"/>
             <a:ext cx="12161520" cy="365760"/>
           </a:xfrm>
           <a:prstGeom prst="rect">
@@ -3123,11 +3404,11 @@
           <a:bodyPr wrap="square" lIns="0" tIns="0" rIns="0" bIns="0" rtlCol="0" anchor="ctr"/>
           <a:lstStyle/>
           <a:p>
-            <a:pPr marL="0" indent="0" algn="ctr">
-              <a:buNone/>
-            </a:pPr>
-            <a:r>
-              <a:rPr lang="en-US" sz="1800" dirty="0">
+            <a:pPr algn="ctr" indent="0" marL="0">
+              <a:buNone/>
+            </a:pPr>
+            <a:r>
+              <a:rPr lang="en-US" sz="1440" dirty="0">
                 <a:solidFill>
                   <a:srgbClr val="8B98AC"/>
                 </a:solidFill>
@@ -3137,46 +3418,7 @@
               </a:rPr>
               <a:t>github.com/balajich/spring-ai-with-llama</a:t>
             </a:r>
-            <a:endParaRPr lang="en-US" sz="1800" dirty="0"/>
-          </a:p>
-        </p:txBody>
-      </p:sp>
-      <p:sp>
-        <p:nvSpPr>
-          <p:cNvPr id="27" name="Text 25"/>
-          <p:cNvSpPr/>
-          <p:nvPr/>
-        </p:nvSpPr>
-        <p:spPr>
-          <a:xfrm>
-            <a:off x="0" y="4114800"/>
-            <a:ext cx="12161520" cy="365760"/>
-          </a:xfrm>
-          <a:prstGeom prst="rect">
-            <a:avLst/>
-          </a:prstGeom>
-          <a:noFill/>
-          <a:ln/>
-        </p:spPr>
-        <p:txBody>
-          <a:bodyPr wrap="square" lIns="0" tIns="0" rIns="0" bIns="0" rtlCol="0" anchor="ctr"/>
-          <a:lstStyle/>
-          <a:p>
-            <a:pPr marL="0" indent="0" algn="ctr">
-              <a:buNone/>
-            </a:pPr>
-            <a:r>
-              <a:rPr lang="en-US" sz="1560" dirty="0">
-                <a:solidFill>
-                  <a:srgbClr val="5B6478"/>
-                </a:solidFill>
-                <a:latin typeface="Courier New" pitchFamily="34" charset="0"/>
-                <a:ea typeface="Courier New" pitchFamily="34" charset="-122"/>
-                <a:cs typeface="Courier New" pitchFamily="34" charset="-120"/>
-              </a:rPr>
-              <a:t>prompttoapps.com</a:t>
-            </a:r>
-            <a:endParaRPr lang="en-US" sz="1560" dirty="0"/>
+            <a:endParaRPr lang="en-US" sz="1440" dirty="0"/>
           </a:p>
         </p:txBody>
       </p:sp>
@@ -3196,7 +3438,6 @@
         <a:solidFill>
           <a:srgbClr val="0A0F1C"/>
         </a:solidFill>
-        <a:effectLst/>
       </p:bgPr>
     </p:bg>
     <p:spTree>
@@ -3237,13 +3478,6 @@
             <a:prstDash val="solid"/>
           </a:ln>
         </p:spPr>
-        <p:txBody>
-          <a:bodyPr/>
-          <a:lstStyle/>
-          <a:p>
-            <a:endParaRPr lang="en-CA"/>
-          </a:p>
-        </p:txBody>
       </p:sp>
       <p:sp>
         <p:nvSpPr>
@@ -3269,13 +3503,6 @@
             <a:prstDash val="solid"/>
           </a:ln>
         </p:spPr>
-        <p:txBody>
-          <a:bodyPr/>
-          <a:lstStyle/>
-          <a:p>
-            <a:endParaRPr lang="en-CA"/>
-          </a:p>
-        </p:txBody>
       </p:sp>
       <p:sp>
         <p:nvSpPr>
@@ -3301,13 +3528,6 @@
             <a:prstDash val="solid"/>
           </a:ln>
         </p:spPr>
-        <p:txBody>
-          <a:bodyPr/>
-          <a:lstStyle/>
-          <a:p>
-            <a:endParaRPr lang="en-CA"/>
-          </a:p>
-        </p:txBody>
       </p:sp>
       <p:sp>
         <p:nvSpPr>
@@ -3330,13 +3550,6 @@
           </a:solidFill>
           <a:ln/>
         </p:spPr>
-        <p:txBody>
-          <a:bodyPr/>
-          <a:lstStyle/>
-          <a:p>
-            <a:endParaRPr lang="en-CA"/>
-          </a:p>
-        </p:txBody>
       </p:sp>
       <p:sp>
         <p:nvSpPr>
@@ -3359,13 +3572,6 @@
           </a:solidFill>
           <a:ln/>
         </p:spPr>
-        <p:txBody>
-          <a:bodyPr/>
-          <a:lstStyle/>
-          <a:p>
-            <a:endParaRPr lang="en-CA"/>
-          </a:p>
-        </p:txBody>
       </p:sp>
       <p:sp>
         <p:nvSpPr>
@@ -3388,13 +3594,6 @@
           </a:solidFill>
           <a:ln/>
         </p:spPr>
-        <p:txBody>
-          <a:bodyPr/>
-          <a:lstStyle/>
-          <a:p>
-            <a:endParaRPr lang="en-CA"/>
-          </a:p>
-        </p:txBody>
       </p:sp>
       <p:sp>
         <p:nvSpPr>
@@ -3417,13 +3616,6 @@
           </a:solidFill>
           <a:ln/>
         </p:spPr>
-        <p:txBody>
-          <a:bodyPr/>
-          <a:lstStyle/>
-          <a:p>
-            <a:endParaRPr lang="en-CA"/>
-          </a:p>
-        </p:txBody>
       </p:sp>
       <p:sp>
         <p:nvSpPr>
@@ -3449,13 +3641,6 @@
             <a:prstDash val="solid"/>
           </a:ln>
         </p:spPr>
-        <p:txBody>
-          <a:bodyPr/>
-          <a:lstStyle/>
-          <a:p>
-            <a:endParaRPr lang="en-CA"/>
-          </a:p>
-        </p:txBody>
       </p:sp>
       <p:sp>
         <p:nvSpPr>
@@ -3481,13 +3666,6 @@
             <a:prstDash val="solid"/>
           </a:ln>
         </p:spPr>
-        <p:txBody>
-          <a:bodyPr/>
-          <a:lstStyle/>
-          <a:p>
-            <a:endParaRPr lang="en-CA"/>
-          </a:p>
-        </p:txBody>
       </p:sp>
       <p:sp>
         <p:nvSpPr>
@@ -3513,13 +3691,6 @@
             <a:prstDash val="solid"/>
           </a:ln>
         </p:spPr>
-        <p:txBody>
-          <a:bodyPr/>
-          <a:lstStyle/>
-          <a:p>
-            <a:endParaRPr lang="en-CA"/>
-          </a:p>
-        </p:txBody>
       </p:sp>
       <p:sp>
         <p:nvSpPr>
@@ -3542,13 +3713,6 @@
           </a:solidFill>
           <a:ln/>
         </p:spPr>
-        <p:txBody>
-          <a:bodyPr/>
-          <a:lstStyle/>
-          <a:p>
-            <a:endParaRPr lang="en-CA"/>
-          </a:p>
-        </p:txBody>
       </p:sp>
       <p:sp>
         <p:nvSpPr>
@@ -3571,13 +3735,6 @@
           </a:solidFill>
           <a:ln/>
         </p:spPr>
-        <p:txBody>
-          <a:bodyPr/>
-          <a:lstStyle/>
-          <a:p>
-            <a:endParaRPr lang="en-CA"/>
-          </a:p>
-        </p:txBody>
       </p:sp>
       <p:sp>
         <p:nvSpPr>
@@ -3600,13 +3757,6 @@
           </a:solidFill>
           <a:ln/>
         </p:spPr>
-        <p:txBody>
-          <a:bodyPr/>
-          <a:lstStyle/>
-          <a:p>
-            <a:endParaRPr lang="en-CA"/>
-          </a:p>
-        </p:txBody>
       </p:sp>
       <p:sp>
         <p:nvSpPr>
@@ -3629,13 +3779,6 @@
           </a:solidFill>
           <a:ln/>
         </p:spPr>
-        <p:txBody>
-          <a:bodyPr/>
-          <a:lstStyle/>
-          <a:p>
-            <a:endParaRPr lang="en-CA"/>
-          </a:p>
-        </p:txBody>
       </p:sp>
       <p:sp>
         <p:nvSpPr>
@@ -3658,7 +3801,7 @@
           <a:bodyPr wrap="square" lIns="0" tIns="0" rIns="0" bIns="0" rtlCol="0" anchor="ctr"/>
           <a:lstStyle/>
           <a:p>
-            <a:pPr marL="0" indent="0">
+            <a:pPr indent="0" marL="0">
               <a:buNone/>
             </a:pPr>
             <a:r>
@@ -3697,7 +3840,7 @@
           <a:bodyPr wrap="square" lIns="0" tIns="0" rIns="0" bIns="0" rtlCol="0" anchor="ctr"/>
           <a:lstStyle/>
           <a:p>
-            <a:pPr marL="0" indent="0" algn="r">
+            <a:pPr algn="r" indent="0" marL="0">
               <a:buNone/>
             </a:pPr>
             <a:r>
@@ -3736,11 +3879,11 @@
           <a:bodyPr wrap="square" lIns="0" tIns="0" rIns="0" bIns="0" rtlCol="0" anchor="ctr"/>
           <a:lstStyle/>
           <a:p>
-            <a:pPr marL="0" indent="0">
-              <a:buNone/>
-            </a:pPr>
-            <a:r>
-              <a:rPr lang="en-US" sz="1440" kern="0" spc="200" dirty="0">
+            <a:pPr indent="0" marL="0">
+              <a:buNone/>
+            </a:pPr>
+            <a:r>
+              <a:rPr lang="en-US" sz="1440" spc="200" kern="0" dirty="0">
                 <a:solidFill>
                   <a:srgbClr val="5FE0C5"/>
                 </a:solidFill>
@@ -3775,7 +3918,7 @@
           <a:bodyPr wrap="square" lIns="0" tIns="0" rIns="0" bIns="0" rtlCol="0" anchor="ctr"/>
           <a:lstStyle/>
           <a:p>
-            <a:pPr marL="0" indent="0" algn="l">
+            <a:pPr algn="l" indent="0" marL="0">
               <a:buNone/>
             </a:pPr>
             <a:r>
@@ -3819,20 +3962,13 @@
             <a:prstDash val="solid"/>
           </a:ln>
           <a:effectLst>
-            <a:outerShdw blurRad="101600" dist="38100" dir="2700000" algn="bl" rotWithShape="0">
+            <a:outerShdw sx="100000" sy="100000" kx="0" ky="0" algn="bl" rotWithShape="0" blurRad="101600" dist="38100" dir="2700000">
               <a:srgbClr val="000000">
                 <a:alpha val="25000"/>
               </a:srgbClr>
             </a:outerShdw>
           </a:effectLst>
         </p:spPr>
-        <p:txBody>
-          <a:bodyPr/>
-          <a:lstStyle/>
-          <a:p>
-            <a:endParaRPr lang="en-CA"/>
-          </a:p>
-        </p:txBody>
       </p:sp>
       <p:sp>
         <p:nvSpPr>
@@ -3858,13 +3994,6 @@
             <a:prstDash val="solid"/>
           </a:ln>
         </p:spPr>
-        <p:txBody>
-          <a:bodyPr/>
-          <a:lstStyle/>
-          <a:p>
-            <a:endParaRPr lang="en-CA"/>
-          </a:p>
-        </p:txBody>
       </p:sp>
       <p:sp>
         <p:nvSpPr>
@@ -3887,7 +4016,7 @@
           <a:bodyPr wrap="square" lIns="0" tIns="0" rIns="0" bIns="0" rtlCol="0" anchor="ctr"/>
           <a:lstStyle/>
           <a:p>
-            <a:pPr marL="0" indent="0" algn="ctr">
+            <a:pPr algn="ctr" indent="0" marL="0">
               <a:buNone/>
             </a:pPr>
             <a:r>
@@ -3926,7 +4055,7 @@
           <a:bodyPr wrap="square" lIns="0" tIns="0" rIns="0" bIns="0" rtlCol="0" anchor="ctr"/>
           <a:lstStyle/>
           <a:p>
-            <a:pPr marL="0" indent="0" algn="ctr">
+            <a:pPr algn="ctr" indent="0" marL="0">
               <a:buNone/>
             </a:pPr>
             <a:r>
@@ -3965,7 +4094,7 @@
           <a:bodyPr wrap="square" lIns="0" tIns="0" rIns="0" bIns="0" rtlCol="0" anchor="t"/>
           <a:lstStyle/>
           <a:p>
-            <a:pPr marL="0" indent="0" algn="ctr">
+            <a:pPr algn="ctr" indent="0" marL="0">
               <a:lnSpc>
                 <a:spcPct val="120000"/>
               </a:lnSpc>
@@ -3985,7 +4114,7 @@
             <a:endParaRPr lang="en-US" sz="1620" dirty="0"/>
           </a:p>
           <a:p>
-            <a:pPr marL="0" indent="0" algn="ctr">
+            <a:pPr algn="ctr" indent="0" marL="0">
               <a:lnSpc>
                 <a:spcPct val="120000"/>
               </a:lnSpc>
@@ -4032,20 +4161,13 @@
             <a:prstDash val="solid"/>
           </a:ln>
           <a:effectLst>
-            <a:outerShdw blurRad="101600" dist="38100" dir="2700000" algn="bl" rotWithShape="0">
+            <a:outerShdw sx="100000" sy="100000" kx="0" ky="0" algn="bl" rotWithShape="0" blurRad="101600" dist="38100" dir="2700000">
               <a:srgbClr val="000000">
                 <a:alpha val="25000"/>
               </a:srgbClr>
             </a:outerShdw>
           </a:effectLst>
         </p:spPr>
-        <p:txBody>
-          <a:bodyPr/>
-          <a:lstStyle/>
-          <a:p>
-            <a:endParaRPr lang="en-CA"/>
-          </a:p>
-        </p:txBody>
       </p:sp>
       <p:sp>
         <p:nvSpPr>
@@ -4071,13 +4193,6 @@
             <a:prstDash val="solid"/>
           </a:ln>
         </p:spPr>
-        <p:txBody>
-          <a:bodyPr/>
-          <a:lstStyle/>
-          <a:p>
-            <a:endParaRPr lang="en-CA"/>
-          </a:p>
-        </p:txBody>
       </p:sp>
       <p:sp>
         <p:nvSpPr>
@@ -4100,7 +4215,7 @@
           <a:bodyPr wrap="square" lIns="0" tIns="0" rIns="0" bIns="0" rtlCol="0" anchor="ctr"/>
           <a:lstStyle/>
           <a:p>
-            <a:pPr marL="0" indent="0" algn="ctr">
+            <a:pPr algn="ctr" indent="0" marL="0">
               <a:buNone/>
             </a:pPr>
             <a:r>
@@ -4139,7 +4254,7 @@
           <a:bodyPr wrap="square" lIns="0" tIns="0" rIns="0" bIns="0" rtlCol="0" anchor="ctr"/>
           <a:lstStyle/>
           <a:p>
-            <a:pPr marL="0" indent="0" algn="ctr">
+            <a:pPr algn="ctr" indent="0" marL="0">
               <a:buNone/>
             </a:pPr>
             <a:r>
@@ -4178,7 +4293,7 @@
           <a:bodyPr wrap="square" lIns="0" tIns="0" rIns="0" bIns="0" rtlCol="0" anchor="t"/>
           <a:lstStyle/>
           <a:p>
-            <a:pPr marL="0" indent="0" algn="ctr">
+            <a:pPr algn="ctr" indent="0" marL="0">
               <a:lnSpc>
                 <a:spcPct val="120000"/>
               </a:lnSpc>
@@ -4198,7 +4313,7 @@
             <a:endParaRPr lang="en-US" sz="1620" dirty="0"/>
           </a:p>
           <a:p>
-            <a:pPr marL="0" indent="0" algn="ctr">
+            <a:pPr algn="ctr" indent="0" marL="0">
               <a:lnSpc>
                 <a:spcPct val="120000"/>
               </a:lnSpc>
@@ -4245,20 +4360,13 @@
             <a:prstDash val="solid"/>
           </a:ln>
           <a:effectLst>
-            <a:outerShdw blurRad="101600" dist="38100" dir="2700000" algn="bl" rotWithShape="0">
+            <a:outerShdw sx="100000" sy="100000" kx="0" ky="0" algn="bl" rotWithShape="0" blurRad="101600" dist="38100" dir="2700000">
               <a:srgbClr val="000000">
                 <a:alpha val="25000"/>
               </a:srgbClr>
             </a:outerShdw>
           </a:effectLst>
         </p:spPr>
-        <p:txBody>
-          <a:bodyPr/>
-          <a:lstStyle/>
-          <a:p>
-            <a:endParaRPr lang="en-CA"/>
-          </a:p>
-        </p:txBody>
       </p:sp>
       <p:sp>
         <p:nvSpPr>
@@ -4284,13 +4392,6 @@
             <a:prstDash val="solid"/>
           </a:ln>
         </p:spPr>
-        <p:txBody>
-          <a:bodyPr/>
-          <a:lstStyle/>
-          <a:p>
-            <a:endParaRPr lang="en-CA"/>
-          </a:p>
-        </p:txBody>
       </p:sp>
       <p:sp>
         <p:nvSpPr>
@@ -4313,7 +4414,7 @@
           <a:bodyPr wrap="square" lIns="0" tIns="0" rIns="0" bIns="0" rtlCol="0" anchor="ctr"/>
           <a:lstStyle/>
           <a:p>
-            <a:pPr marL="0" indent="0" algn="ctr">
+            <a:pPr algn="ctr" indent="0" marL="0">
               <a:buNone/>
             </a:pPr>
             <a:r>
@@ -4352,7 +4453,7 @@
           <a:bodyPr wrap="square" lIns="0" tIns="0" rIns="0" bIns="0" rtlCol="0" anchor="ctr"/>
           <a:lstStyle/>
           <a:p>
-            <a:pPr marL="0" indent="0" algn="ctr">
+            <a:pPr algn="ctr" indent="0" marL="0">
               <a:buNone/>
             </a:pPr>
             <a:r>
@@ -4391,7 +4492,7 @@
           <a:bodyPr wrap="square" lIns="0" tIns="0" rIns="0" bIns="0" rtlCol="0" anchor="t"/>
           <a:lstStyle/>
           <a:p>
-            <a:pPr marL="0" indent="0" algn="ctr">
+            <a:pPr algn="ctr" indent="0" marL="0">
               <a:lnSpc>
                 <a:spcPct val="120000"/>
               </a:lnSpc>
@@ -4411,7 +4512,7 @@
             <a:endParaRPr lang="en-US" sz="1620" dirty="0"/>
           </a:p>
           <a:p>
-            <a:pPr marL="0" indent="0" algn="ctr">
+            <a:pPr algn="ctr" indent="0" marL="0">
               <a:lnSpc>
                 <a:spcPct val="120000"/>
               </a:lnSpc>
@@ -4448,7 +4549,6 @@
         <a:solidFill>
           <a:srgbClr val="0A0F1C"/>
         </a:solidFill>
-        <a:effectLst/>
       </p:bgPr>
     </p:bg>
     <p:spTree>
@@ -4489,13 +4589,6 @@
             <a:prstDash val="solid"/>
           </a:ln>
         </p:spPr>
-        <p:txBody>
-          <a:bodyPr/>
-          <a:lstStyle/>
-          <a:p>
-            <a:endParaRPr lang="en-CA"/>
-          </a:p>
-        </p:txBody>
       </p:sp>
       <p:sp>
         <p:nvSpPr>
@@ -4521,13 +4614,6 @@
             <a:prstDash val="solid"/>
           </a:ln>
         </p:spPr>
-        <p:txBody>
-          <a:bodyPr/>
-          <a:lstStyle/>
-          <a:p>
-            <a:endParaRPr lang="en-CA"/>
-          </a:p>
-        </p:txBody>
       </p:sp>
       <p:sp>
         <p:nvSpPr>
@@ -4553,13 +4639,6 @@
             <a:prstDash val="solid"/>
           </a:ln>
         </p:spPr>
-        <p:txBody>
-          <a:bodyPr/>
-          <a:lstStyle/>
-          <a:p>
-            <a:endParaRPr lang="en-CA"/>
-          </a:p>
-        </p:txBody>
       </p:sp>
       <p:sp>
         <p:nvSpPr>
@@ -4582,13 +4661,6 @@
           </a:solidFill>
           <a:ln/>
         </p:spPr>
-        <p:txBody>
-          <a:bodyPr/>
-          <a:lstStyle/>
-          <a:p>
-            <a:endParaRPr lang="en-CA"/>
-          </a:p>
-        </p:txBody>
       </p:sp>
       <p:sp>
         <p:nvSpPr>
@@ -4611,13 +4683,6 @@
           </a:solidFill>
           <a:ln/>
         </p:spPr>
-        <p:txBody>
-          <a:bodyPr/>
-          <a:lstStyle/>
-          <a:p>
-            <a:endParaRPr lang="en-CA"/>
-          </a:p>
-        </p:txBody>
       </p:sp>
       <p:sp>
         <p:nvSpPr>
@@ -4640,13 +4705,6 @@
           </a:solidFill>
           <a:ln/>
         </p:spPr>
-        <p:txBody>
-          <a:bodyPr/>
-          <a:lstStyle/>
-          <a:p>
-            <a:endParaRPr lang="en-CA"/>
-          </a:p>
-        </p:txBody>
       </p:sp>
       <p:sp>
         <p:nvSpPr>
@@ -4669,13 +4727,6 @@
           </a:solidFill>
           <a:ln/>
         </p:spPr>
-        <p:txBody>
-          <a:bodyPr/>
-          <a:lstStyle/>
-          <a:p>
-            <a:endParaRPr lang="en-CA"/>
-          </a:p>
-        </p:txBody>
       </p:sp>
       <p:sp>
         <p:nvSpPr>
@@ -4701,13 +4752,6 @@
             <a:prstDash val="solid"/>
           </a:ln>
         </p:spPr>
-        <p:txBody>
-          <a:bodyPr/>
-          <a:lstStyle/>
-          <a:p>
-            <a:endParaRPr lang="en-CA"/>
-          </a:p>
-        </p:txBody>
       </p:sp>
       <p:sp>
         <p:nvSpPr>
@@ -4733,13 +4777,6 @@
             <a:prstDash val="solid"/>
           </a:ln>
         </p:spPr>
-        <p:txBody>
-          <a:bodyPr/>
-          <a:lstStyle/>
-          <a:p>
-            <a:endParaRPr lang="en-CA"/>
-          </a:p>
-        </p:txBody>
       </p:sp>
       <p:sp>
         <p:nvSpPr>
@@ -4765,13 +4802,6 @@
             <a:prstDash val="solid"/>
           </a:ln>
         </p:spPr>
-        <p:txBody>
-          <a:bodyPr/>
-          <a:lstStyle/>
-          <a:p>
-            <a:endParaRPr lang="en-CA"/>
-          </a:p>
-        </p:txBody>
       </p:sp>
       <p:sp>
         <p:nvSpPr>
@@ -4794,13 +4824,6 @@
           </a:solidFill>
           <a:ln/>
         </p:spPr>
-        <p:txBody>
-          <a:bodyPr/>
-          <a:lstStyle/>
-          <a:p>
-            <a:endParaRPr lang="en-CA"/>
-          </a:p>
-        </p:txBody>
       </p:sp>
       <p:sp>
         <p:nvSpPr>
@@ -4823,13 +4846,6 @@
           </a:solidFill>
           <a:ln/>
         </p:spPr>
-        <p:txBody>
-          <a:bodyPr/>
-          <a:lstStyle/>
-          <a:p>
-            <a:endParaRPr lang="en-CA"/>
-          </a:p>
-        </p:txBody>
       </p:sp>
       <p:sp>
         <p:nvSpPr>
@@ -4852,13 +4868,6 @@
           </a:solidFill>
           <a:ln/>
         </p:spPr>
-        <p:txBody>
-          <a:bodyPr/>
-          <a:lstStyle/>
-          <a:p>
-            <a:endParaRPr lang="en-CA"/>
-          </a:p>
-        </p:txBody>
       </p:sp>
       <p:sp>
         <p:nvSpPr>
@@ -4881,13 +4890,6 @@
           </a:solidFill>
           <a:ln/>
         </p:spPr>
-        <p:txBody>
-          <a:bodyPr/>
-          <a:lstStyle/>
-          <a:p>
-            <a:endParaRPr lang="en-CA"/>
-          </a:p>
-        </p:txBody>
       </p:sp>
       <p:sp>
         <p:nvSpPr>
@@ -4910,7 +4912,7 @@
           <a:bodyPr wrap="square" lIns="0" tIns="0" rIns="0" bIns="0" rtlCol="0" anchor="ctr"/>
           <a:lstStyle/>
           <a:p>
-            <a:pPr marL="0" indent="0">
+            <a:pPr indent="0" marL="0">
               <a:buNone/>
             </a:pPr>
             <a:r>
@@ -4949,7 +4951,7 @@
           <a:bodyPr wrap="square" lIns="0" tIns="0" rIns="0" bIns="0" rtlCol="0" anchor="ctr"/>
           <a:lstStyle/>
           <a:p>
-            <a:pPr marL="0" indent="0" algn="r">
+            <a:pPr algn="r" indent="0" marL="0">
               <a:buNone/>
             </a:pPr>
             <a:r>
@@ -4988,11 +4990,11 @@
           <a:bodyPr wrap="square" lIns="0" tIns="0" rIns="0" bIns="0" rtlCol="0" anchor="ctr"/>
           <a:lstStyle/>
           <a:p>
-            <a:pPr marL="0" indent="0">
-              <a:buNone/>
-            </a:pPr>
-            <a:r>
-              <a:rPr lang="en-US" sz="1440" kern="0" spc="200" dirty="0">
+            <a:pPr indent="0" marL="0">
+              <a:buNone/>
+            </a:pPr>
+            <a:r>
+              <a:rPr lang="en-US" sz="1440" spc="200" kern="0" dirty="0">
                 <a:solidFill>
                   <a:srgbClr val="5FE0C5"/>
                 </a:solidFill>
@@ -5027,7 +5029,7 @@
           <a:bodyPr wrap="square" lIns="0" tIns="0" rIns="0" bIns="0" rtlCol="0" anchor="ctr"/>
           <a:lstStyle/>
           <a:p>
-            <a:pPr marL="0" indent="0" algn="l">
+            <a:pPr algn="l" indent="0" marL="0">
               <a:buNone/>
             </a:pPr>
             <a:r>
@@ -5066,7 +5068,7 @@
           <a:bodyPr wrap="square" lIns="0" tIns="0" rIns="0" bIns="0" rtlCol="0" anchor="ctr"/>
           <a:lstStyle/>
           <a:p>
-            <a:pPr marL="0" indent="0">
+            <a:pPr indent="0" marL="0">
               <a:buNone/>
             </a:pPr>
             <a:r>
@@ -5080,6 +5082,9 @@
               </a:rPr>
               <a:t>A fictional company, </a:t>
             </a:r>
+            <a:pPr indent="0" marL="0">
+              <a:buNone/>
+            </a:pPr>
             <a:r>
               <a:rPr lang="en-US" sz="2160" b="1" dirty="0">
                 <a:solidFill>
@@ -5091,6 +5096,9 @@
               </a:rPr>
               <a:t>TechCorp</a:t>
             </a:r>
+            <a:pPr indent="0" marL="0">
+              <a:buNone/>
+            </a:pPr>
             <a:r>
               <a:rPr lang="en-US" sz="2160" dirty="0">
                 <a:solidFill>
@@ -5250,20 +5258,13 @@
             <a:prstDash val="solid"/>
           </a:ln>
           <a:effectLst>
-            <a:outerShdw blurRad="76200" dist="38100" dir="5400000" algn="bl" rotWithShape="0">
+            <a:outerShdw sx="100000" sy="100000" kx="0" ky="0" algn="bl" rotWithShape="0" blurRad="76200" dist="38100" dir="5400000">
               <a:srgbClr val="000000">
                 <a:alpha val="20000"/>
               </a:srgbClr>
             </a:outerShdw>
           </a:effectLst>
         </p:spPr>
-        <p:txBody>
-          <a:bodyPr/>
-          <a:lstStyle/>
-          <a:p>
-            <a:endParaRPr lang="en-CA"/>
-          </a:p>
-        </p:txBody>
       </p:sp>
       <p:sp>
         <p:nvSpPr>
@@ -5286,7 +5287,7 @@
           <a:bodyPr wrap="square" lIns="0" tIns="0" rIns="0" bIns="0" rtlCol="0" anchor="ctr"/>
           <a:lstStyle/>
           <a:p>
-            <a:pPr marL="0" indent="0">
+            <a:pPr indent="0" marL="0">
               <a:buNone/>
             </a:pPr>
             <a:r>
@@ -5325,7 +5326,7 @@
           <a:bodyPr wrap="square" lIns="0" tIns="0" rIns="0" bIns="0" rtlCol="0" anchor="ctr"/>
           <a:lstStyle/>
           <a:p>
-            <a:pPr marL="0" indent="0">
+            <a:pPr indent="0" marL="0">
               <a:buNone/>
             </a:pPr>
             <a:r>
@@ -5366,13 +5367,6 @@
             <a:tailEnd type="triangle"/>
           </a:ln>
         </p:spPr>
-        <p:txBody>
-          <a:bodyPr/>
-          <a:lstStyle/>
-          <a:p>
-            <a:endParaRPr lang="en-CA"/>
-          </a:p>
-        </p:txBody>
       </p:sp>
       <p:sp>
         <p:nvSpPr>
@@ -5400,20 +5394,13 @@
             <a:prstDash val="solid"/>
           </a:ln>
           <a:effectLst>
-            <a:outerShdw blurRad="76200" dist="38100" dir="5400000" algn="bl" rotWithShape="0">
+            <a:outerShdw sx="100000" sy="100000" kx="0" ky="0" algn="bl" rotWithShape="0" blurRad="76200" dist="38100" dir="5400000">
               <a:srgbClr val="000000">
                 <a:alpha val="20000"/>
               </a:srgbClr>
             </a:outerShdw>
           </a:effectLst>
         </p:spPr>
-        <p:txBody>
-          <a:bodyPr/>
-          <a:lstStyle/>
-          <a:p>
-            <a:endParaRPr lang="en-CA"/>
-          </a:p>
-        </p:txBody>
       </p:sp>
       <p:sp>
         <p:nvSpPr>
@@ -5436,7 +5423,7 @@
           <a:bodyPr wrap="square" lIns="0" tIns="0" rIns="0" bIns="0" rtlCol="0" anchor="ctr"/>
           <a:lstStyle/>
           <a:p>
-            <a:pPr marL="0" indent="0">
+            <a:pPr indent="0" marL="0">
               <a:buNone/>
             </a:pPr>
             <a:r>
@@ -5475,7 +5462,7 @@
           <a:bodyPr wrap="square" lIns="0" tIns="0" rIns="0" bIns="0" rtlCol="0" anchor="ctr"/>
           <a:lstStyle/>
           <a:p>
-            <a:pPr marL="0" indent="0">
+            <a:pPr indent="0" marL="0">
               <a:buNone/>
             </a:pPr>
             <a:r>
@@ -5516,13 +5503,6 @@
             <a:tailEnd type="triangle"/>
           </a:ln>
         </p:spPr>
-        <p:txBody>
-          <a:bodyPr/>
-          <a:lstStyle/>
-          <a:p>
-            <a:endParaRPr lang="en-CA"/>
-          </a:p>
-        </p:txBody>
       </p:sp>
       <p:sp>
         <p:nvSpPr>
@@ -5550,20 +5530,13 @@
             <a:prstDash val="solid"/>
           </a:ln>
           <a:effectLst>
-            <a:outerShdw blurRad="76200" dist="38100" dir="5400000" algn="bl" rotWithShape="0">
+            <a:outerShdw sx="100000" sy="100000" kx="0" ky="0" algn="bl" rotWithShape="0" blurRad="76200" dist="38100" dir="5400000">
               <a:srgbClr val="000000">
                 <a:alpha val="20000"/>
               </a:srgbClr>
             </a:outerShdw>
           </a:effectLst>
         </p:spPr>
-        <p:txBody>
-          <a:bodyPr/>
-          <a:lstStyle/>
-          <a:p>
-            <a:endParaRPr lang="en-CA"/>
-          </a:p>
-        </p:txBody>
       </p:sp>
       <p:sp>
         <p:nvSpPr>
@@ -5586,7 +5559,7 @@
           <a:bodyPr wrap="square" lIns="0" tIns="0" rIns="0" bIns="0" rtlCol="0" anchor="ctr"/>
           <a:lstStyle/>
           <a:p>
-            <a:pPr marL="0" indent="0">
+            <a:pPr indent="0" marL="0">
               <a:buNone/>
             </a:pPr>
             <a:r>
@@ -5625,7 +5598,7 @@
           <a:bodyPr wrap="square" lIns="0" tIns="0" rIns="0" bIns="0" rtlCol="0" anchor="ctr"/>
           <a:lstStyle/>
           <a:p>
-            <a:pPr marL="0" indent="0">
+            <a:pPr indent="0" marL="0">
               <a:buNone/>
             </a:pPr>
             <a:r>
@@ -5666,13 +5639,6 @@
             <a:tailEnd type="triangle"/>
           </a:ln>
         </p:spPr>
-        <p:txBody>
-          <a:bodyPr/>
-          <a:lstStyle/>
-          <a:p>
-            <a:endParaRPr lang="en-CA"/>
-          </a:p>
-        </p:txBody>
       </p:sp>
       <p:sp>
         <p:nvSpPr>
@@ -5700,20 +5666,13 @@
             <a:prstDash val="solid"/>
           </a:ln>
           <a:effectLst>
-            <a:outerShdw blurRad="76200" dist="38100" dir="5400000" algn="bl" rotWithShape="0">
+            <a:outerShdw sx="100000" sy="100000" kx="0" ky="0" algn="bl" rotWithShape="0" blurRad="76200" dist="38100" dir="5400000">
               <a:srgbClr val="000000">
                 <a:alpha val="20000"/>
               </a:srgbClr>
             </a:outerShdw>
           </a:effectLst>
         </p:spPr>
-        <p:txBody>
-          <a:bodyPr/>
-          <a:lstStyle/>
-          <a:p>
-            <a:endParaRPr lang="en-CA"/>
-          </a:p>
-        </p:txBody>
       </p:sp>
       <p:sp>
         <p:nvSpPr>
@@ -5736,7 +5695,7 @@
           <a:bodyPr wrap="square" lIns="0" tIns="0" rIns="0" bIns="0" rtlCol="0" anchor="ctr"/>
           <a:lstStyle/>
           <a:p>
-            <a:pPr marL="0" indent="0">
+            <a:pPr indent="0" marL="0">
               <a:buNone/>
             </a:pPr>
             <a:r>
@@ -5775,7 +5734,7 @@
           <a:bodyPr wrap="square" lIns="0" tIns="0" rIns="0" bIns="0" rtlCol="0" anchor="ctr"/>
           <a:lstStyle/>
           <a:p>
-            <a:pPr marL="0" indent="0">
+            <a:pPr indent="0" marL="0">
               <a:buNone/>
             </a:pPr>
             <a:r>
@@ -5809,7 +5768,6 @@
         <a:solidFill>
           <a:srgbClr val="0A0F1C"/>
         </a:solidFill>
-        <a:effectLst/>
       </p:bgPr>
     </p:bg>
     <p:spTree>
@@ -5850,13 +5808,6 @@
             <a:prstDash val="solid"/>
           </a:ln>
         </p:spPr>
-        <p:txBody>
-          <a:bodyPr/>
-          <a:lstStyle/>
-          <a:p>
-            <a:endParaRPr lang="en-CA"/>
-          </a:p>
-        </p:txBody>
       </p:sp>
       <p:sp>
         <p:nvSpPr>
@@ -5882,13 +5833,6 @@
             <a:prstDash val="solid"/>
           </a:ln>
         </p:spPr>
-        <p:txBody>
-          <a:bodyPr/>
-          <a:lstStyle/>
-          <a:p>
-            <a:endParaRPr lang="en-CA"/>
-          </a:p>
-        </p:txBody>
       </p:sp>
       <p:sp>
         <p:nvSpPr>
@@ -5914,13 +5858,6 @@
             <a:prstDash val="solid"/>
           </a:ln>
         </p:spPr>
-        <p:txBody>
-          <a:bodyPr/>
-          <a:lstStyle/>
-          <a:p>
-            <a:endParaRPr lang="en-CA"/>
-          </a:p>
-        </p:txBody>
       </p:sp>
       <p:sp>
         <p:nvSpPr>
@@ -5943,13 +5880,6 @@
           </a:solidFill>
           <a:ln/>
         </p:spPr>
-        <p:txBody>
-          <a:bodyPr/>
-          <a:lstStyle/>
-          <a:p>
-            <a:endParaRPr lang="en-CA"/>
-          </a:p>
-        </p:txBody>
       </p:sp>
       <p:sp>
         <p:nvSpPr>
@@ -5972,13 +5902,6 @@
           </a:solidFill>
           <a:ln/>
         </p:spPr>
-        <p:txBody>
-          <a:bodyPr/>
-          <a:lstStyle/>
-          <a:p>
-            <a:endParaRPr lang="en-CA"/>
-          </a:p>
-        </p:txBody>
       </p:sp>
       <p:sp>
         <p:nvSpPr>
@@ -6001,13 +5924,6 @@
           </a:solidFill>
           <a:ln/>
         </p:spPr>
-        <p:txBody>
-          <a:bodyPr/>
-          <a:lstStyle/>
-          <a:p>
-            <a:endParaRPr lang="en-CA"/>
-          </a:p>
-        </p:txBody>
       </p:sp>
       <p:sp>
         <p:nvSpPr>
@@ -6030,13 +5946,6 @@
           </a:solidFill>
           <a:ln/>
         </p:spPr>
-        <p:txBody>
-          <a:bodyPr/>
-          <a:lstStyle/>
-          <a:p>
-            <a:endParaRPr lang="en-CA"/>
-          </a:p>
-        </p:txBody>
       </p:sp>
       <p:sp>
         <p:nvSpPr>
@@ -6062,13 +5971,6 @@
             <a:prstDash val="solid"/>
           </a:ln>
         </p:spPr>
-        <p:txBody>
-          <a:bodyPr/>
-          <a:lstStyle/>
-          <a:p>
-            <a:endParaRPr lang="en-CA"/>
-          </a:p>
-        </p:txBody>
       </p:sp>
       <p:sp>
         <p:nvSpPr>
@@ -6094,13 +5996,6 @@
             <a:prstDash val="solid"/>
           </a:ln>
         </p:spPr>
-        <p:txBody>
-          <a:bodyPr/>
-          <a:lstStyle/>
-          <a:p>
-            <a:endParaRPr lang="en-CA"/>
-          </a:p>
-        </p:txBody>
       </p:sp>
       <p:sp>
         <p:nvSpPr>
@@ -6126,13 +6021,6 @@
             <a:prstDash val="solid"/>
           </a:ln>
         </p:spPr>
-        <p:txBody>
-          <a:bodyPr/>
-          <a:lstStyle/>
-          <a:p>
-            <a:endParaRPr lang="en-CA"/>
-          </a:p>
-        </p:txBody>
       </p:sp>
       <p:sp>
         <p:nvSpPr>
@@ -6155,13 +6043,6 @@
           </a:solidFill>
           <a:ln/>
         </p:spPr>
-        <p:txBody>
-          <a:bodyPr/>
-          <a:lstStyle/>
-          <a:p>
-            <a:endParaRPr lang="en-CA"/>
-          </a:p>
-        </p:txBody>
       </p:sp>
       <p:sp>
         <p:nvSpPr>
@@ -6184,13 +6065,6 @@
           </a:solidFill>
           <a:ln/>
         </p:spPr>
-        <p:txBody>
-          <a:bodyPr/>
-          <a:lstStyle/>
-          <a:p>
-            <a:endParaRPr lang="en-CA"/>
-          </a:p>
-        </p:txBody>
       </p:sp>
       <p:sp>
         <p:nvSpPr>
@@ -6213,13 +6087,6 @@
           </a:solidFill>
           <a:ln/>
         </p:spPr>
-        <p:txBody>
-          <a:bodyPr/>
-          <a:lstStyle/>
-          <a:p>
-            <a:endParaRPr lang="en-CA"/>
-          </a:p>
-        </p:txBody>
       </p:sp>
       <p:sp>
         <p:nvSpPr>
@@ -6242,13 +6109,6 @@
           </a:solidFill>
           <a:ln/>
         </p:spPr>
-        <p:txBody>
-          <a:bodyPr/>
-          <a:lstStyle/>
-          <a:p>
-            <a:endParaRPr lang="en-CA"/>
-          </a:p>
-        </p:txBody>
       </p:sp>
       <p:sp>
         <p:nvSpPr>
@@ -6271,7 +6131,7 @@
           <a:bodyPr wrap="square" lIns="0" tIns="0" rIns="0" bIns="0" rtlCol="0" anchor="ctr"/>
           <a:lstStyle/>
           <a:p>
-            <a:pPr marL="0" indent="0">
+            <a:pPr indent="0" marL="0">
               <a:buNone/>
             </a:pPr>
             <a:r>
@@ -6310,7 +6170,7 @@
           <a:bodyPr wrap="square" lIns="0" tIns="0" rIns="0" bIns="0" rtlCol="0" anchor="ctr"/>
           <a:lstStyle/>
           <a:p>
-            <a:pPr marL="0" indent="0" algn="r">
+            <a:pPr algn="r" indent="0" marL="0">
               <a:buNone/>
             </a:pPr>
             <a:r>
@@ -6349,11 +6209,11 @@
           <a:bodyPr wrap="square" lIns="0" tIns="0" rIns="0" bIns="0" rtlCol="0" anchor="ctr"/>
           <a:lstStyle/>
           <a:p>
-            <a:pPr marL="0" indent="0">
-              <a:buNone/>
-            </a:pPr>
-            <a:r>
-              <a:rPr lang="en-US" sz="1440" kern="0" spc="200" dirty="0">
+            <a:pPr indent="0" marL="0">
+              <a:buNone/>
+            </a:pPr>
+            <a:r>
+              <a:rPr lang="en-US" sz="1440" spc="200" kern="0" dirty="0">
                 <a:solidFill>
                   <a:srgbClr val="5FE0C5"/>
                 </a:solidFill>
@@ -6388,7 +6248,7 @@
           <a:bodyPr wrap="square" lIns="0" tIns="0" rIns="0" bIns="0" rtlCol="0" anchor="ctr"/>
           <a:lstStyle/>
           <a:p>
-            <a:pPr marL="0" indent="0" algn="l">
+            <a:pPr algn="l" indent="0" marL="0">
               <a:buNone/>
             </a:pPr>
             <a:r>
@@ -6432,20 +6292,13 @@
             <a:prstDash val="solid"/>
           </a:ln>
           <a:effectLst>
-            <a:outerShdw blurRad="76200" dist="38100" dir="2700000" algn="bl" rotWithShape="0">
+            <a:outerShdw sx="100000" sy="100000" kx="0" ky="0" algn="bl" rotWithShape="0" blurRad="76200" dist="38100" dir="2700000">
               <a:srgbClr val="000000">
                 <a:alpha val="20000"/>
               </a:srgbClr>
             </a:outerShdw>
           </a:effectLst>
         </p:spPr>
-        <p:txBody>
-          <a:bodyPr/>
-          <a:lstStyle/>
-          <a:p>
-            <a:endParaRPr lang="en-CA"/>
-          </a:p>
-        </p:txBody>
       </p:sp>
       <p:sp>
         <p:nvSpPr>
@@ -6468,7 +6321,7 @@
           <a:bodyPr wrap="square" lIns="0" tIns="0" rIns="0" bIns="0" rtlCol="0" anchor="t"/>
           <a:lstStyle/>
           <a:p>
-            <a:pPr marL="0" indent="0">
+            <a:pPr indent="0" marL="0">
               <a:buNone/>
             </a:pPr>
             <a:r>
@@ -6507,7 +6360,7 @@
           <a:bodyPr wrap="square" lIns="0" tIns="0" rIns="0" bIns="0" rtlCol="0" anchor="t"/>
           <a:lstStyle/>
           <a:p>
-            <a:pPr marL="0" indent="0">
+            <a:pPr indent="0" marL="0">
               <a:buNone/>
             </a:pPr>
             <a:r>
@@ -6551,20 +6404,13 @@
             <a:prstDash val="solid"/>
           </a:ln>
           <a:effectLst>
-            <a:outerShdw blurRad="76200" dist="38100" dir="2700000" algn="bl" rotWithShape="0">
+            <a:outerShdw sx="100000" sy="100000" kx="0" ky="0" algn="bl" rotWithShape="0" blurRad="76200" dist="38100" dir="2700000">
               <a:srgbClr val="000000">
                 <a:alpha val="20000"/>
               </a:srgbClr>
             </a:outerShdw>
           </a:effectLst>
         </p:spPr>
-        <p:txBody>
-          <a:bodyPr/>
-          <a:lstStyle/>
-          <a:p>
-            <a:endParaRPr lang="en-CA"/>
-          </a:p>
-        </p:txBody>
       </p:sp>
       <p:sp>
         <p:nvSpPr>
@@ -6587,7 +6433,7 @@
           <a:bodyPr wrap="square" lIns="0" tIns="0" rIns="0" bIns="0" rtlCol="0" anchor="t"/>
           <a:lstStyle/>
           <a:p>
-            <a:pPr marL="0" indent="0">
+            <a:pPr indent="0" marL="0">
               <a:buNone/>
             </a:pPr>
             <a:r>
@@ -6626,7 +6472,7 @@
           <a:bodyPr wrap="square" lIns="0" tIns="0" rIns="0" bIns="0" rtlCol="0" anchor="t"/>
           <a:lstStyle/>
           <a:p>
-            <a:pPr marL="0" indent="0">
+            <a:pPr indent="0" marL="0">
               <a:buNone/>
             </a:pPr>
             <a:r>
@@ -6670,20 +6516,13 @@
             <a:prstDash val="solid"/>
           </a:ln>
           <a:effectLst>
-            <a:outerShdw blurRad="76200" dist="38100" dir="2700000" algn="bl" rotWithShape="0">
+            <a:outerShdw sx="100000" sy="100000" kx="0" ky="0" algn="bl" rotWithShape="0" blurRad="76200" dist="38100" dir="2700000">
               <a:srgbClr val="000000">
                 <a:alpha val="20000"/>
               </a:srgbClr>
             </a:outerShdw>
           </a:effectLst>
         </p:spPr>
-        <p:txBody>
-          <a:bodyPr/>
-          <a:lstStyle/>
-          <a:p>
-            <a:endParaRPr lang="en-CA"/>
-          </a:p>
-        </p:txBody>
       </p:sp>
       <p:sp>
         <p:nvSpPr>
@@ -6706,7 +6545,7 @@
           <a:bodyPr wrap="square" lIns="0" tIns="0" rIns="0" bIns="0" rtlCol="0" anchor="t"/>
           <a:lstStyle/>
           <a:p>
-            <a:pPr marL="0" indent="0">
+            <a:pPr indent="0" marL="0">
               <a:buNone/>
             </a:pPr>
             <a:r>
@@ -6718,7 +6557,7 @@
                 <a:ea typeface="Courier New" pitchFamily="34" charset="-122"/>
                 <a:cs typeface="Courier New" pitchFamily="34" charset="-120"/>
               </a:rPr>
-              <a:t>Java 21</a:t>
+              <a:t>Java 25</a:t>
             </a:r>
             <a:endParaRPr lang="en-US" sz="1680" dirty="0"/>
           </a:p>
@@ -6745,7 +6584,7 @@
           <a:bodyPr wrap="square" lIns="0" tIns="0" rIns="0" bIns="0" rtlCol="0" anchor="t"/>
           <a:lstStyle/>
           <a:p>
-            <a:pPr marL="0" indent="0">
+            <a:pPr indent="0" marL="0">
               <a:buNone/>
             </a:pPr>
             <a:r>
@@ -6789,20 +6628,13 @@
             <a:prstDash val="solid"/>
           </a:ln>
           <a:effectLst>
-            <a:outerShdw blurRad="76200" dist="38100" dir="2700000" algn="bl" rotWithShape="0">
+            <a:outerShdw sx="100000" sy="100000" kx="0" ky="0" algn="bl" rotWithShape="0" blurRad="76200" dist="38100" dir="2700000">
               <a:srgbClr val="000000">
                 <a:alpha val="20000"/>
               </a:srgbClr>
             </a:outerShdw>
           </a:effectLst>
         </p:spPr>
-        <p:txBody>
-          <a:bodyPr/>
-          <a:lstStyle/>
-          <a:p>
-            <a:endParaRPr lang="en-CA"/>
-          </a:p>
-        </p:txBody>
       </p:sp>
       <p:sp>
         <p:nvSpPr>
@@ -6825,7 +6657,7 @@
           <a:bodyPr wrap="square" lIns="0" tIns="0" rIns="0" bIns="0" rtlCol="0" anchor="t"/>
           <a:lstStyle/>
           <a:p>
-            <a:pPr marL="0" indent="0">
+            <a:pPr indent="0" marL="0">
               <a:buNone/>
             </a:pPr>
             <a:r>
@@ -6864,7 +6696,7 @@
           <a:bodyPr wrap="square" lIns="0" tIns="0" rIns="0" bIns="0" rtlCol="0" anchor="t"/>
           <a:lstStyle/>
           <a:p>
-            <a:pPr marL="0" indent="0">
+            <a:pPr indent="0" marL="0">
               <a:buNone/>
             </a:pPr>
             <a:r>
@@ -6908,20 +6740,13 @@
             <a:prstDash val="solid"/>
           </a:ln>
           <a:effectLst>
-            <a:outerShdw blurRad="76200" dist="38100" dir="2700000" algn="bl" rotWithShape="0">
+            <a:outerShdw sx="100000" sy="100000" kx="0" ky="0" algn="bl" rotWithShape="0" blurRad="76200" dist="38100" dir="2700000">
               <a:srgbClr val="000000">
                 <a:alpha val="20000"/>
               </a:srgbClr>
             </a:outerShdw>
           </a:effectLst>
         </p:spPr>
-        <p:txBody>
-          <a:bodyPr/>
-          <a:lstStyle/>
-          <a:p>
-            <a:endParaRPr lang="en-CA"/>
-          </a:p>
-        </p:txBody>
       </p:sp>
       <p:sp>
         <p:nvSpPr>
@@ -6944,7 +6769,7 @@
           <a:bodyPr wrap="square" lIns="0" tIns="0" rIns="0" bIns="0" rtlCol="0" anchor="t"/>
           <a:lstStyle/>
           <a:p>
-            <a:pPr marL="0" indent="0">
+            <a:pPr indent="0" marL="0">
               <a:buNone/>
             </a:pPr>
             <a:r>
@@ -6983,7 +6808,7 @@
           <a:bodyPr wrap="square" lIns="0" tIns="0" rIns="0" bIns="0" rtlCol="0" anchor="t"/>
           <a:lstStyle/>
           <a:p>
-            <a:pPr marL="0" indent="0">
+            <a:pPr indent="0" marL="0">
               <a:buNone/>
             </a:pPr>
             <a:r>
@@ -7027,20 +6852,13 @@
             <a:prstDash val="solid"/>
           </a:ln>
           <a:effectLst>
-            <a:outerShdw blurRad="76200" dist="38100" dir="2700000" algn="bl" rotWithShape="0">
+            <a:outerShdw sx="100000" sy="100000" kx="0" ky="0" algn="bl" rotWithShape="0" blurRad="76200" dist="38100" dir="2700000">
               <a:srgbClr val="000000">
                 <a:alpha val="20000"/>
               </a:srgbClr>
             </a:outerShdw>
           </a:effectLst>
         </p:spPr>
-        <p:txBody>
-          <a:bodyPr/>
-          <a:lstStyle/>
-          <a:p>
-            <a:endParaRPr lang="en-CA"/>
-          </a:p>
-        </p:txBody>
       </p:sp>
       <p:sp>
         <p:nvSpPr>
@@ -7063,7 +6881,7 @@
           <a:bodyPr wrap="square" lIns="0" tIns="0" rIns="0" bIns="0" rtlCol="0" anchor="t"/>
           <a:lstStyle/>
           <a:p>
-            <a:pPr marL="0" indent="0">
+            <a:pPr indent="0" marL="0">
               <a:buNone/>
             </a:pPr>
             <a:r>
@@ -7102,7 +6920,7 @@
           <a:bodyPr wrap="square" lIns="0" tIns="0" rIns="0" bIns="0" rtlCol="0" anchor="t"/>
           <a:lstStyle/>
           <a:p>
-            <a:pPr marL="0" indent="0">
+            <a:pPr indent="0" marL="0">
               <a:buNone/>
             </a:pPr>
             <a:r>
@@ -7146,20 +6964,13 @@
             <a:prstDash val="solid"/>
           </a:ln>
           <a:effectLst>
-            <a:outerShdw blurRad="76200" dist="38100" dir="2700000" algn="bl" rotWithShape="0">
+            <a:outerShdw sx="100000" sy="100000" kx="0" ky="0" algn="bl" rotWithShape="0" blurRad="76200" dist="38100" dir="2700000">
               <a:srgbClr val="000000">
                 <a:alpha val="20000"/>
               </a:srgbClr>
             </a:outerShdw>
           </a:effectLst>
         </p:spPr>
-        <p:txBody>
-          <a:bodyPr/>
-          <a:lstStyle/>
-          <a:p>
-            <a:endParaRPr lang="en-CA"/>
-          </a:p>
-        </p:txBody>
       </p:sp>
       <p:sp>
         <p:nvSpPr>
@@ -7182,7 +6993,7 @@
           <a:bodyPr wrap="square" lIns="0" tIns="0" rIns="0" bIns="0" rtlCol="0" anchor="t"/>
           <a:lstStyle/>
           <a:p>
-            <a:pPr marL="0" indent="0">
+            <a:pPr indent="0" marL="0">
               <a:buNone/>
             </a:pPr>
             <a:r>
@@ -7221,7 +7032,7 @@
           <a:bodyPr wrap="square" lIns="0" tIns="0" rIns="0" bIns="0" rtlCol="0" anchor="t"/>
           <a:lstStyle/>
           <a:p>
-            <a:pPr marL="0" indent="0">
+            <a:pPr indent="0" marL="0">
               <a:buNone/>
             </a:pPr>
             <a:r>
@@ -7265,20 +7076,13 @@
             <a:prstDash val="solid"/>
           </a:ln>
           <a:effectLst>
-            <a:outerShdw blurRad="76200" dist="38100" dir="2700000" algn="bl" rotWithShape="0">
+            <a:outerShdw sx="100000" sy="100000" kx="0" ky="0" algn="bl" rotWithShape="0" blurRad="76200" dist="38100" dir="2700000">
               <a:srgbClr val="000000">
                 <a:alpha val="20000"/>
               </a:srgbClr>
             </a:outerShdw>
           </a:effectLst>
         </p:spPr>
-        <p:txBody>
-          <a:bodyPr/>
-          <a:lstStyle/>
-          <a:p>
-            <a:endParaRPr lang="en-CA"/>
-          </a:p>
-        </p:txBody>
       </p:sp>
       <p:sp>
         <p:nvSpPr>
@@ -7301,7 +7105,7 @@
           <a:bodyPr wrap="square" lIns="0" tIns="0" rIns="0" bIns="0" rtlCol="0" anchor="t"/>
           <a:lstStyle/>
           <a:p>
-            <a:pPr marL="0" indent="0">
+            <a:pPr indent="0" marL="0">
               <a:buNone/>
             </a:pPr>
             <a:r>
@@ -7340,7 +7144,7 @@
           <a:bodyPr wrap="square" lIns="0" tIns="0" rIns="0" bIns="0" rtlCol="0" anchor="t"/>
           <a:lstStyle/>
           <a:p>
-            <a:pPr marL="0" indent="0">
+            <a:pPr indent="0" marL="0">
               <a:buNone/>
             </a:pPr>
             <a:r>
@@ -7374,7 +7178,6 @@
         <a:solidFill>
           <a:srgbClr val="0A0F1C"/>
         </a:solidFill>
-        <a:effectLst/>
       </p:bgPr>
     </p:bg>
     <p:spTree>
@@ -7415,13 +7218,6 @@
             <a:prstDash val="solid"/>
           </a:ln>
         </p:spPr>
-        <p:txBody>
-          <a:bodyPr/>
-          <a:lstStyle/>
-          <a:p>
-            <a:endParaRPr lang="en-CA"/>
-          </a:p>
-        </p:txBody>
       </p:sp>
       <p:sp>
         <p:nvSpPr>
@@ -7447,13 +7243,6 @@
             <a:prstDash val="solid"/>
           </a:ln>
         </p:spPr>
-        <p:txBody>
-          <a:bodyPr/>
-          <a:lstStyle/>
-          <a:p>
-            <a:endParaRPr lang="en-CA"/>
-          </a:p>
-        </p:txBody>
       </p:sp>
       <p:sp>
         <p:nvSpPr>
@@ -7479,13 +7268,6 @@
             <a:prstDash val="solid"/>
           </a:ln>
         </p:spPr>
-        <p:txBody>
-          <a:bodyPr/>
-          <a:lstStyle/>
-          <a:p>
-            <a:endParaRPr lang="en-CA"/>
-          </a:p>
-        </p:txBody>
       </p:sp>
       <p:sp>
         <p:nvSpPr>
@@ -7508,13 +7290,6 @@
           </a:solidFill>
           <a:ln/>
         </p:spPr>
-        <p:txBody>
-          <a:bodyPr/>
-          <a:lstStyle/>
-          <a:p>
-            <a:endParaRPr lang="en-CA"/>
-          </a:p>
-        </p:txBody>
       </p:sp>
       <p:sp>
         <p:nvSpPr>
@@ -7537,13 +7312,6 @@
           </a:solidFill>
           <a:ln/>
         </p:spPr>
-        <p:txBody>
-          <a:bodyPr/>
-          <a:lstStyle/>
-          <a:p>
-            <a:endParaRPr lang="en-CA"/>
-          </a:p>
-        </p:txBody>
       </p:sp>
       <p:sp>
         <p:nvSpPr>
@@ -7566,13 +7334,6 @@
           </a:solidFill>
           <a:ln/>
         </p:spPr>
-        <p:txBody>
-          <a:bodyPr/>
-          <a:lstStyle/>
-          <a:p>
-            <a:endParaRPr lang="en-CA"/>
-          </a:p>
-        </p:txBody>
       </p:sp>
       <p:sp>
         <p:nvSpPr>
@@ -7595,13 +7356,6 @@
           </a:solidFill>
           <a:ln/>
         </p:spPr>
-        <p:txBody>
-          <a:bodyPr/>
-          <a:lstStyle/>
-          <a:p>
-            <a:endParaRPr lang="en-CA"/>
-          </a:p>
-        </p:txBody>
       </p:sp>
       <p:sp>
         <p:nvSpPr>
@@ -7627,13 +7381,6 @@
             <a:prstDash val="solid"/>
           </a:ln>
         </p:spPr>
-        <p:txBody>
-          <a:bodyPr/>
-          <a:lstStyle/>
-          <a:p>
-            <a:endParaRPr lang="en-CA"/>
-          </a:p>
-        </p:txBody>
       </p:sp>
       <p:sp>
         <p:nvSpPr>
@@ -7659,13 +7406,6 @@
             <a:prstDash val="solid"/>
           </a:ln>
         </p:spPr>
-        <p:txBody>
-          <a:bodyPr/>
-          <a:lstStyle/>
-          <a:p>
-            <a:endParaRPr lang="en-CA"/>
-          </a:p>
-        </p:txBody>
       </p:sp>
       <p:sp>
         <p:nvSpPr>
@@ -7691,13 +7431,6 @@
             <a:prstDash val="solid"/>
           </a:ln>
         </p:spPr>
-        <p:txBody>
-          <a:bodyPr/>
-          <a:lstStyle/>
-          <a:p>
-            <a:endParaRPr lang="en-CA"/>
-          </a:p>
-        </p:txBody>
       </p:sp>
       <p:sp>
         <p:nvSpPr>
@@ -7720,13 +7453,6 @@
           </a:solidFill>
           <a:ln/>
         </p:spPr>
-        <p:txBody>
-          <a:bodyPr/>
-          <a:lstStyle/>
-          <a:p>
-            <a:endParaRPr lang="en-CA"/>
-          </a:p>
-        </p:txBody>
       </p:sp>
       <p:sp>
         <p:nvSpPr>
@@ -7749,13 +7475,6 @@
           </a:solidFill>
           <a:ln/>
         </p:spPr>
-        <p:txBody>
-          <a:bodyPr/>
-          <a:lstStyle/>
-          <a:p>
-            <a:endParaRPr lang="en-CA"/>
-          </a:p>
-        </p:txBody>
       </p:sp>
       <p:sp>
         <p:nvSpPr>
@@ -7778,13 +7497,6 @@
           </a:solidFill>
           <a:ln/>
         </p:spPr>
-        <p:txBody>
-          <a:bodyPr/>
-          <a:lstStyle/>
-          <a:p>
-            <a:endParaRPr lang="en-CA"/>
-          </a:p>
-        </p:txBody>
       </p:sp>
       <p:sp>
         <p:nvSpPr>
@@ -7807,13 +7519,6 @@
           </a:solidFill>
           <a:ln/>
         </p:spPr>
-        <p:txBody>
-          <a:bodyPr/>
-          <a:lstStyle/>
-          <a:p>
-            <a:endParaRPr lang="en-CA"/>
-          </a:p>
-        </p:txBody>
       </p:sp>
       <p:sp>
         <p:nvSpPr>
@@ -7836,7 +7541,7 @@
           <a:bodyPr wrap="square" lIns="0" tIns="0" rIns="0" bIns="0" rtlCol="0" anchor="ctr"/>
           <a:lstStyle/>
           <a:p>
-            <a:pPr marL="0" indent="0">
+            <a:pPr indent="0" marL="0">
               <a:buNone/>
             </a:pPr>
             <a:r>
@@ -7875,7 +7580,7 @@
           <a:bodyPr wrap="square" lIns="0" tIns="0" rIns="0" bIns="0" rtlCol="0" anchor="ctr"/>
           <a:lstStyle/>
           <a:p>
-            <a:pPr marL="0" indent="0" algn="r">
+            <a:pPr algn="r" indent="0" marL="0">
               <a:buNone/>
             </a:pPr>
             <a:r>
@@ -7914,11 +7619,11 @@
           <a:bodyPr wrap="square" lIns="0" tIns="0" rIns="0" bIns="0" rtlCol="0" anchor="ctr"/>
           <a:lstStyle/>
           <a:p>
-            <a:pPr marL="0" indent="0">
-              <a:buNone/>
-            </a:pPr>
-            <a:r>
-              <a:rPr lang="en-US" sz="1440" kern="0" spc="200" dirty="0">
+            <a:pPr indent="0" marL="0">
+              <a:buNone/>
+            </a:pPr>
+            <a:r>
+              <a:rPr lang="en-US" sz="1440" spc="200" kern="0" dirty="0">
                 <a:solidFill>
                   <a:srgbClr val="5FE0C5"/>
                 </a:solidFill>
@@ -7953,7 +7658,7 @@
           <a:bodyPr wrap="square" lIns="0" tIns="0" rIns="0" bIns="0" rtlCol="0" anchor="ctr"/>
           <a:lstStyle/>
           <a:p>
-            <a:pPr marL="0" indent="0" algn="l">
+            <a:pPr algn="l" indent="0" marL="0">
               <a:buNone/>
             </a:pPr>
             <a:r>
@@ -7997,20 +7702,13 @@
             <a:prstDash val="solid"/>
           </a:ln>
           <a:effectLst>
-            <a:outerShdw blurRad="63500" dist="38100" dir="2700000" algn="bl" rotWithShape="0">
+            <a:outerShdw sx="100000" sy="100000" kx="0" ky="0" algn="bl" rotWithShape="0" blurRad="63500" dist="38100" dir="2700000">
               <a:srgbClr val="000000">
                 <a:alpha val="20000"/>
               </a:srgbClr>
             </a:outerShdw>
           </a:effectLst>
         </p:spPr>
-        <p:txBody>
-          <a:bodyPr/>
-          <a:lstStyle/>
-          <a:p>
-            <a:endParaRPr lang="en-CA"/>
-          </a:p>
-        </p:txBody>
       </p:sp>
       <p:sp>
         <p:nvSpPr>
@@ -8033,7 +7731,7 @@
           <a:bodyPr wrap="square" lIns="0" tIns="0" rIns="0" bIns="0" rtlCol="0" anchor="ctr"/>
           <a:lstStyle/>
           <a:p>
-            <a:pPr marL="0" indent="0" algn="l">
+            <a:pPr algn="l" indent="0" marL="0">
               <a:buNone/>
             </a:pPr>
             <a:r>
@@ -8047,6 +7745,9 @@
               </a:rPr>
               <a:t>1  </a:t>
             </a:r>
+            <a:pPr algn="l" indent="0" marL="0">
+              <a:buNone/>
+            </a:pPr>
             <a:r>
               <a:rPr lang="en-US" sz="1500" dirty="0">
                 <a:solidFill>
@@ -8088,20 +7789,13 @@
             <a:prstDash val="solid"/>
           </a:ln>
           <a:effectLst>
-            <a:outerShdw blurRad="63500" dist="38100" dir="2700000" algn="bl" rotWithShape="0">
+            <a:outerShdw sx="100000" sy="100000" kx="0" ky="0" algn="bl" rotWithShape="0" blurRad="63500" dist="38100" dir="2700000">
               <a:srgbClr val="000000">
                 <a:alpha val="20000"/>
               </a:srgbClr>
             </a:outerShdw>
           </a:effectLst>
         </p:spPr>
-        <p:txBody>
-          <a:bodyPr/>
-          <a:lstStyle/>
-          <a:p>
-            <a:endParaRPr lang="en-CA"/>
-          </a:p>
-        </p:txBody>
       </p:sp>
       <p:sp>
         <p:nvSpPr>
@@ -8124,7 +7818,7 @@
           <a:bodyPr wrap="square" lIns="0" tIns="0" rIns="0" bIns="0" rtlCol="0" anchor="ctr"/>
           <a:lstStyle/>
           <a:p>
-            <a:pPr marL="0" indent="0" algn="l">
+            <a:pPr algn="l" indent="0" marL="0">
               <a:buNone/>
             </a:pPr>
             <a:r>
@@ -8138,6 +7832,9 @@
               </a:rPr>
               <a:t>2  </a:t>
             </a:r>
+            <a:pPr algn="l" indent="0" marL="0">
+              <a:buNone/>
+            </a:pPr>
             <a:r>
               <a:rPr lang="en-US" sz="1500" dirty="0">
                 <a:solidFill>
@@ -8179,20 +7876,13 @@
             <a:prstDash val="solid"/>
           </a:ln>
           <a:effectLst>
-            <a:outerShdw blurRad="63500" dist="38100" dir="2700000" algn="bl" rotWithShape="0">
+            <a:outerShdw sx="100000" sy="100000" kx="0" ky="0" algn="bl" rotWithShape="0" blurRad="63500" dist="38100" dir="2700000">
               <a:srgbClr val="000000">
                 <a:alpha val="20000"/>
               </a:srgbClr>
             </a:outerShdw>
           </a:effectLst>
         </p:spPr>
-        <p:txBody>
-          <a:bodyPr/>
-          <a:lstStyle/>
-          <a:p>
-            <a:endParaRPr lang="en-CA"/>
-          </a:p>
-        </p:txBody>
       </p:sp>
       <p:sp>
         <p:nvSpPr>
@@ -8215,7 +7905,7 @@
           <a:bodyPr wrap="square" lIns="0" tIns="0" rIns="0" bIns="0" rtlCol="0" anchor="ctr"/>
           <a:lstStyle/>
           <a:p>
-            <a:pPr marL="0" indent="0" algn="l">
+            <a:pPr algn="l" indent="0" marL="0">
               <a:buNone/>
             </a:pPr>
             <a:r>
@@ -8229,6 +7919,9 @@
               </a:rPr>
               <a:t>3  </a:t>
             </a:r>
+            <a:pPr algn="l" indent="0" marL="0">
+              <a:buNone/>
+            </a:pPr>
             <a:r>
               <a:rPr lang="en-US" sz="1500" dirty="0">
                 <a:solidFill>
@@ -8270,20 +7963,13 @@
             <a:prstDash val="solid"/>
           </a:ln>
           <a:effectLst>
-            <a:outerShdw blurRad="63500" dist="38100" dir="2700000" algn="bl" rotWithShape="0">
+            <a:outerShdw sx="100000" sy="100000" kx="0" ky="0" algn="bl" rotWithShape="0" blurRad="63500" dist="38100" dir="2700000">
               <a:srgbClr val="000000">
                 <a:alpha val="20000"/>
               </a:srgbClr>
             </a:outerShdw>
           </a:effectLst>
         </p:spPr>
-        <p:txBody>
-          <a:bodyPr/>
-          <a:lstStyle/>
-          <a:p>
-            <a:endParaRPr lang="en-CA"/>
-          </a:p>
-        </p:txBody>
       </p:sp>
       <p:sp>
         <p:nvSpPr>
@@ -8306,7 +7992,7 @@
           <a:bodyPr wrap="square" lIns="0" tIns="0" rIns="0" bIns="0" rtlCol="0" anchor="ctr"/>
           <a:lstStyle/>
           <a:p>
-            <a:pPr marL="0" indent="0" algn="l">
+            <a:pPr algn="l" indent="0" marL="0">
               <a:buNone/>
             </a:pPr>
             <a:r>
@@ -8320,6 +8006,9 @@
               </a:rPr>
               <a:t>4  </a:t>
             </a:r>
+            <a:pPr algn="l" indent="0" marL="0">
+              <a:buNone/>
+            </a:pPr>
             <a:r>
               <a:rPr lang="en-US" sz="1500" dirty="0">
                 <a:solidFill>
@@ -8361,20 +8050,13 @@
             <a:prstDash val="solid"/>
           </a:ln>
           <a:effectLst>
-            <a:outerShdw blurRad="63500" dist="38100" dir="2700000" algn="bl" rotWithShape="0">
+            <a:outerShdw sx="100000" sy="100000" kx="0" ky="0" algn="bl" rotWithShape="0" blurRad="63500" dist="38100" dir="2700000">
               <a:srgbClr val="000000">
                 <a:alpha val="20000"/>
               </a:srgbClr>
             </a:outerShdw>
           </a:effectLst>
         </p:spPr>
-        <p:txBody>
-          <a:bodyPr/>
-          <a:lstStyle/>
-          <a:p>
-            <a:endParaRPr lang="en-CA"/>
-          </a:p>
-        </p:txBody>
       </p:sp>
       <p:sp>
         <p:nvSpPr>
@@ -8397,7 +8079,7 @@
           <a:bodyPr wrap="square" lIns="0" tIns="0" rIns="0" bIns="0" rtlCol="0" anchor="ctr"/>
           <a:lstStyle/>
           <a:p>
-            <a:pPr marL="0" indent="0" algn="l">
+            <a:pPr algn="l" indent="0" marL="0">
               <a:buNone/>
             </a:pPr>
             <a:r>
@@ -8411,6 +8093,9 @@
               </a:rPr>
               <a:t>5  </a:t>
             </a:r>
+            <a:pPr algn="l" indent="0" marL="0">
+              <a:buNone/>
+            </a:pPr>
             <a:r>
               <a:rPr lang="en-US" sz="1500" dirty="0">
                 <a:solidFill>
@@ -8452,20 +8137,13 @@
             <a:prstDash val="solid"/>
           </a:ln>
           <a:effectLst>
-            <a:outerShdw blurRad="63500" dist="38100" dir="2700000" algn="bl" rotWithShape="0">
+            <a:outerShdw sx="100000" sy="100000" kx="0" ky="0" algn="bl" rotWithShape="0" blurRad="63500" dist="38100" dir="2700000">
               <a:srgbClr val="000000">
                 <a:alpha val="20000"/>
               </a:srgbClr>
             </a:outerShdw>
           </a:effectLst>
         </p:spPr>
-        <p:txBody>
-          <a:bodyPr/>
-          <a:lstStyle/>
-          <a:p>
-            <a:endParaRPr lang="en-CA"/>
-          </a:p>
-        </p:txBody>
       </p:sp>
       <p:sp>
         <p:nvSpPr>
@@ -8488,7 +8166,7 @@
           <a:bodyPr wrap="square" lIns="0" tIns="0" rIns="0" bIns="0" rtlCol="0" anchor="ctr"/>
           <a:lstStyle/>
           <a:p>
-            <a:pPr marL="0" indent="0" algn="l">
+            <a:pPr algn="l" indent="0" marL="0">
               <a:buNone/>
             </a:pPr>
             <a:r>
@@ -8502,6 +8180,9 @@
               </a:rPr>
               <a:t>6  </a:t>
             </a:r>
+            <a:pPr algn="l" indent="0" marL="0">
+              <a:buNone/>
+            </a:pPr>
             <a:r>
               <a:rPr lang="en-US" sz="1500" dirty="0">
                 <a:solidFill>
@@ -8543,20 +8224,13 @@
             <a:prstDash val="solid"/>
           </a:ln>
           <a:effectLst>
-            <a:outerShdw blurRad="63500" dist="38100" dir="2700000" algn="bl" rotWithShape="0">
+            <a:outerShdw sx="100000" sy="100000" kx="0" ky="0" algn="bl" rotWithShape="0" blurRad="63500" dist="38100" dir="2700000">
               <a:srgbClr val="000000">
                 <a:alpha val="20000"/>
               </a:srgbClr>
             </a:outerShdw>
           </a:effectLst>
         </p:spPr>
-        <p:txBody>
-          <a:bodyPr/>
-          <a:lstStyle/>
-          <a:p>
-            <a:endParaRPr lang="en-CA"/>
-          </a:p>
-        </p:txBody>
       </p:sp>
       <p:sp>
         <p:nvSpPr>
@@ -8579,7 +8253,7 @@
           <a:bodyPr wrap="square" lIns="0" tIns="0" rIns="0" bIns="0" rtlCol="0" anchor="ctr"/>
           <a:lstStyle/>
           <a:p>
-            <a:pPr marL="0" indent="0" algn="l">
+            <a:pPr algn="l" indent="0" marL="0">
               <a:buNone/>
             </a:pPr>
             <a:r>
@@ -8593,6 +8267,9 @@
               </a:rPr>
               <a:t>7  </a:t>
             </a:r>
+            <a:pPr algn="l" indent="0" marL="0">
+              <a:buNone/>
+            </a:pPr>
             <a:r>
               <a:rPr lang="en-US" sz="1500" dirty="0">
                 <a:solidFill>
@@ -8634,20 +8311,13 @@
             <a:prstDash val="solid"/>
           </a:ln>
           <a:effectLst>
-            <a:outerShdw blurRad="63500" dist="38100" dir="2700000" algn="bl" rotWithShape="0">
+            <a:outerShdw sx="100000" sy="100000" kx="0" ky="0" algn="bl" rotWithShape="0" blurRad="63500" dist="38100" dir="2700000">
               <a:srgbClr val="000000">
                 <a:alpha val="20000"/>
               </a:srgbClr>
             </a:outerShdw>
           </a:effectLst>
         </p:spPr>
-        <p:txBody>
-          <a:bodyPr/>
-          <a:lstStyle/>
-          <a:p>
-            <a:endParaRPr lang="en-CA"/>
-          </a:p>
-        </p:txBody>
       </p:sp>
       <p:sp>
         <p:nvSpPr>
@@ -8670,7 +8340,7 @@
           <a:bodyPr wrap="square" lIns="0" tIns="0" rIns="0" bIns="0" rtlCol="0" anchor="ctr"/>
           <a:lstStyle/>
           <a:p>
-            <a:pPr marL="0" indent="0" algn="l">
+            <a:pPr algn="l" indent="0" marL="0">
               <a:buNone/>
             </a:pPr>
             <a:r>
@@ -8684,6 +8354,9 @@
               </a:rPr>
               <a:t>8  </a:t>
             </a:r>
+            <a:pPr algn="l" indent="0" marL="0">
+              <a:buNone/>
+            </a:pPr>
             <a:r>
               <a:rPr lang="en-US" sz="1500" dirty="0">
                 <a:solidFill>
@@ -8725,20 +8398,13 @@
             <a:prstDash val="solid"/>
           </a:ln>
           <a:effectLst>
-            <a:outerShdw blurRad="63500" dist="38100" dir="2700000" algn="bl" rotWithShape="0">
+            <a:outerShdw sx="100000" sy="100000" kx="0" ky="0" algn="bl" rotWithShape="0" blurRad="63500" dist="38100" dir="2700000">
               <a:srgbClr val="000000">
                 <a:alpha val="20000"/>
               </a:srgbClr>
             </a:outerShdw>
           </a:effectLst>
         </p:spPr>
-        <p:txBody>
-          <a:bodyPr/>
-          <a:lstStyle/>
-          <a:p>
-            <a:endParaRPr lang="en-CA"/>
-          </a:p>
-        </p:txBody>
       </p:sp>
       <p:sp>
         <p:nvSpPr>
@@ -8761,7 +8427,7 @@
           <a:bodyPr wrap="square" lIns="0" tIns="0" rIns="0" bIns="0" rtlCol="0" anchor="ctr"/>
           <a:lstStyle/>
           <a:p>
-            <a:pPr marL="0" indent="0" algn="l">
+            <a:pPr algn="l" indent="0" marL="0">
               <a:buNone/>
             </a:pPr>
             <a:r>
@@ -8775,6 +8441,9 @@
               </a:rPr>
               <a:t>9  </a:t>
             </a:r>
+            <a:pPr algn="l" indent="0" marL="0">
+              <a:buNone/>
+            </a:pPr>
             <a:r>
               <a:rPr lang="en-US" sz="1500" dirty="0">
                 <a:solidFill>
@@ -8816,20 +8485,13 @@
             <a:prstDash val="solid"/>
           </a:ln>
           <a:effectLst>
-            <a:outerShdw blurRad="63500" dist="38100" dir="2700000" algn="bl" rotWithShape="0">
+            <a:outerShdw sx="100000" sy="100000" kx="0" ky="0" algn="bl" rotWithShape="0" blurRad="63500" dist="38100" dir="2700000">
               <a:srgbClr val="000000">
                 <a:alpha val="20000"/>
               </a:srgbClr>
             </a:outerShdw>
           </a:effectLst>
         </p:spPr>
-        <p:txBody>
-          <a:bodyPr/>
-          <a:lstStyle/>
-          <a:p>
-            <a:endParaRPr lang="en-CA"/>
-          </a:p>
-        </p:txBody>
       </p:sp>
       <p:sp>
         <p:nvSpPr>
@@ -8852,7 +8514,7 @@
           <a:bodyPr wrap="square" lIns="0" tIns="0" rIns="0" bIns="0" rtlCol="0" anchor="ctr"/>
           <a:lstStyle/>
           <a:p>
-            <a:pPr marL="0" indent="0" algn="l">
+            <a:pPr algn="l" indent="0" marL="0">
               <a:buNone/>
             </a:pPr>
             <a:r>
@@ -8866,6 +8528,9 @@
               </a:rPr>
               <a:t>10  </a:t>
             </a:r>
+            <a:pPr algn="l" indent="0" marL="0">
+              <a:buNone/>
+            </a:pPr>
             <a:r>
               <a:rPr lang="en-US" sz="1500" dirty="0">
                 <a:solidFill>
@@ -8907,20 +8572,13 @@
             <a:prstDash val="solid"/>
           </a:ln>
           <a:effectLst>
-            <a:outerShdw blurRad="63500" dist="38100" dir="2700000" algn="bl" rotWithShape="0">
+            <a:outerShdw sx="100000" sy="100000" kx="0" ky="0" algn="bl" rotWithShape="0" blurRad="63500" dist="38100" dir="2700000">
               <a:srgbClr val="000000">
                 <a:alpha val="20000"/>
               </a:srgbClr>
             </a:outerShdw>
           </a:effectLst>
         </p:spPr>
-        <p:txBody>
-          <a:bodyPr/>
-          <a:lstStyle/>
-          <a:p>
-            <a:endParaRPr lang="en-CA"/>
-          </a:p>
-        </p:txBody>
       </p:sp>
       <p:sp>
         <p:nvSpPr>
@@ -8943,7 +8601,7 @@
           <a:bodyPr wrap="square" lIns="0" tIns="0" rIns="0" bIns="0" rtlCol="0" anchor="ctr"/>
           <a:lstStyle/>
           <a:p>
-            <a:pPr marL="0" indent="0" algn="l">
+            <a:pPr algn="l" indent="0" marL="0">
               <a:buNone/>
             </a:pPr>
             <a:r>
@@ -8957,6 +8615,9 @@
               </a:rPr>
               <a:t>11  </a:t>
             </a:r>
+            <a:pPr algn="l" indent="0" marL="0">
+              <a:buNone/>
+            </a:pPr>
             <a:r>
               <a:rPr lang="en-US" sz="1500" dirty="0">
                 <a:solidFill>
@@ -8988,7 +8649,6 @@
         <a:solidFill>
           <a:srgbClr val="0A0F1C"/>
         </a:solidFill>
-        <a:effectLst/>
       </p:bgPr>
     </p:bg>
     <p:spTree>
@@ -9029,13 +8689,6 @@
             <a:prstDash val="solid"/>
           </a:ln>
         </p:spPr>
-        <p:txBody>
-          <a:bodyPr/>
-          <a:lstStyle/>
-          <a:p>
-            <a:endParaRPr lang="en-CA"/>
-          </a:p>
-        </p:txBody>
       </p:sp>
       <p:sp>
         <p:nvSpPr>
@@ -9061,13 +8714,6 @@
             <a:prstDash val="solid"/>
           </a:ln>
         </p:spPr>
-        <p:txBody>
-          <a:bodyPr/>
-          <a:lstStyle/>
-          <a:p>
-            <a:endParaRPr lang="en-CA"/>
-          </a:p>
-        </p:txBody>
       </p:sp>
       <p:sp>
         <p:nvSpPr>
@@ -9093,13 +8739,6 @@
             <a:prstDash val="solid"/>
           </a:ln>
         </p:spPr>
-        <p:txBody>
-          <a:bodyPr/>
-          <a:lstStyle/>
-          <a:p>
-            <a:endParaRPr lang="en-CA"/>
-          </a:p>
-        </p:txBody>
       </p:sp>
       <p:sp>
         <p:nvSpPr>
@@ -9122,13 +8761,6 @@
           </a:solidFill>
           <a:ln/>
         </p:spPr>
-        <p:txBody>
-          <a:bodyPr/>
-          <a:lstStyle/>
-          <a:p>
-            <a:endParaRPr lang="en-CA"/>
-          </a:p>
-        </p:txBody>
       </p:sp>
       <p:sp>
         <p:nvSpPr>
@@ -9151,13 +8783,6 @@
           </a:solidFill>
           <a:ln/>
         </p:spPr>
-        <p:txBody>
-          <a:bodyPr/>
-          <a:lstStyle/>
-          <a:p>
-            <a:endParaRPr lang="en-CA"/>
-          </a:p>
-        </p:txBody>
       </p:sp>
       <p:sp>
         <p:nvSpPr>
@@ -9180,13 +8805,6 @@
           </a:solidFill>
           <a:ln/>
         </p:spPr>
-        <p:txBody>
-          <a:bodyPr/>
-          <a:lstStyle/>
-          <a:p>
-            <a:endParaRPr lang="en-CA"/>
-          </a:p>
-        </p:txBody>
       </p:sp>
       <p:sp>
         <p:nvSpPr>
@@ -9209,13 +8827,6 @@
           </a:solidFill>
           <a:ln/>
         </p:spPr>
-        <p:txBody>
-          <a:bodyPr/>
-          <a:lstStyle/>
-          <a:p>
-            <a:endParaRPr lang="en-CA"/>
-          </a:p>
-        </p:txBody>
       </p:sp>
       <p:sp>
         <p:nvSpPr>
@@ -9241,13 +8852,6 @@
             <a:prstDash val="solid"/>
           </a:ln>
         </p:spPr>
-        <p:txBody>
-          <a:bodyPr/>
-          <a:lstStyle/>
-          <a:p>
-            <a:endParaRPr lang="en-CA"/>
-          </a:p>
-        </p:txBody>
       </p:sp>
       <p:sp>
         <p:nvSpPr>
@@ -9273,13 +8877,6 @@
             <a:prstDash val="solid"/>
           </a:ln>
         </p:spPr>
-        <p:txBody>
-          <a:bodyPr/>
-          <a:lstStyle/>
-          <a:p>
-            <a:endParaRPr lang="en-CA"/>
-          </a:p>
-        </p:txBody>
       </p:sp>
       <p:sp>
         <p:nvSpPr>
@@ -9305,13 +8902,6 @@
             <a:prstDash val="solid"/>
           </a:ln>
         </p:spPr>
-        <p:txBody>
-          <a:bodyPr/>
-          <a:lstStyle/>
-          <a:p>
-            <a:endParaRPr lang="en-CA"/>
-          </a:p>
-        </p:txBody>
       </p:sp>
       <p:sp>
         <p:nvSpPr>
@@ -9334,13 +8924,6 @@
           </a:solidFill>
           <a:ln/>
         </p:spPr>
-        <p:txBody>
-          <a:bodyPr/>
-          <a:lstStyle/>
-          <a:p>
-            <a:endParaRPr lang="en-CA"/>
-          </a:p>
-        </p:txBody>
       </p:sp>
       <p:sp>
         <p:nvSpPr>
@@ -9363,13 +8946,6 @@
           </a:solidFill>
           <a:ln/>
         </p:spPr>
-        <p:txBody>
-          <a:bodyPr/>
-          <a:lstStyle/>
-          <a:p>
-            <a:endParaRPr lang="en-CA"/>
-          </a:p>
-        </p:txBody>
       </p:sp>
       <p:sp>
         <p:nvSpPr>
@@ -9392,13 +8968,6 @@
           </a:solidFill>
           <a:ln/>
         </p:spPr>
-        <p:txBody>
-          <a:bodyPr/>
-          <a:lstStyle/>
-          <a:p>
-            <a:endParaRPr lang="en-CA"/>
-          </a:p>
-        </p:txBody>
       </p:sp>
       <p:sp>
         <p:nvSpPr>
@@ -9421,13 +8990,6 @@
           </a:solidFill>
           <a:ln/>
         </p:spPr>
-        <p:txBody>
-          <a:bodyPr/>
-          <a:lstStyle/>
-          <a:p>
-            <a:endParaRPr lang="en-CA"/>
-          </a:p>
-        </p:txBody>
       </p:sp>
       <p:sp>
         <p:nvSpPr>
@@ -9450,7 +9012,7 @@
           <a:bodyPr wrap="square" lIns="0" tIns="0" rIns="0" bIns="0" rtlCol="0" anchor="ctr"/>
           <a:lstStyle/>
           <a:p>
-            <a:pPr marL="0" indent="0">
+            <a:pPr indent="0" marL="0">
               <a:buNone/>
             </a:pPr>
             <a:r>
@@ -9489,7 +9051,7 @@
           <a:bodyPr wrap="square" lIns="0" tIns="0" rIns="0" bIns="0" rtlCol="0" anchor="ctr"/>
           <a:lstStyle/>
           <a:p>
-            <a:pPr marL="0" indent="0" algn="r">
+            <a:pPr algn="r" indent="0" marL="0">
               <a:buNone/>
             </a:pPr>
             <a:r>
@@ -9528,11 +9090,11 @@
           <a:bodyPr wrap="square" lIns="0" tIns="0" rIns="0" bIns="0" rtlCol="0" anchor="ctr"/>
           <a:lstStyle/>
           <a:p>
-            <a:pPr marL="0" indent="0">
-              <a:buNone/>
-            </a:pPr>
-            <a:r>
-              <a:rPr lang="en-US" sz="1440" kern="0" spc="200" dirty="0">
+            <a:pPr indent="0" marL="0">
+              <a:buNone/>
+            </a:pPr>
+            <a:r>
+              <a:rPr lang="en-US" sz="1440" spc="200" kern="0" dirty="0">
                 <a:solidFill>
                   <a:srgbClr val="5FE0C5"/>
                 </a:solidFill>
@@ -9567,7 +9129,7 @@
           <a:bodyPr wrap="square" lIns="0" tIns="0" rIns="0" bIns="0" rtlCol="0" anchor="ctr"/>
           <a:lstStyle/>
           <a:p>
-            <a:pPr marL="0" indent="0" algn="l">
+            <a:pPr algn="l" indent="0" marL="0">
               <a:buNone/>
             </a:pPr>
             <a:r>
@@ -9606,7 +9168,7 @@
           <a:bodyPr wrap="square" lIns="0" tIns="0" rIns="0" bIns="0" rtlCol="0" anchor="ctr"/>
           <a:lstStyle/>
           <a:p>
-            <a:pPr marL="0" indent="0">
+            <a:pPr indent="0" marL="0">
               <a:buNone/>
             </a:pPr>
             <a:r>
@@ -9650,20 +9212,13 @@
             <a:prstDash val="solid"/>
           </a:ln>
           <a:effectLst>
-            <a:outerShdw blurRad="101600" dist="38100" dir="2700000" algn="bl" rotWithShape="0">
+            <a:outerShdw sx="100000" sy="100000" kx="0" ky="0" algn="bl" rotWithShape="0" blurRad="101600" dist="38100" dir="2700000">
               <a:srgbClr val="000000">
                 <a:alpha val="25000"/>
               </a:srgbClr>
             </a:outerShdw>
           </a:effectLst>
         </p:spPr>
-        <p:txBody>
-          <a:bodyPr/>
-          <a:lstStyle/>
-          <a:p>
-            <a:endParaRPr lang="en-CA"/>
-          </a:p>
-        </p:txBody>
       </p:sp>
       <p:sp>
         <p:nvSpPr>
@@ -9686,7 +9241,7 @@
           <a:bodyPr wrap="square" lIns="0" tIns="0" rIns="0" bIns="0" rtlCol="0" anchor="ctr"/>
           <a:lstStyle/>
           <a:p>
-            <a:pPr marL="0" indent="0">
+            <a:pPr indent="0" marL="0">
               <a:buNone/>
             </a:pPr>
             <a:r>
@@ -9725,7 +9280,7 @@
           <a:bodyPr wrap="square" lIns="0" tIns="0" rIns="0" bIns="0" rtlCol="0" anchor="ctr"/>
           <a:lstStyle/>
           <a:p>
-            <a:pPr marL="0" indent="0">
+            <a:pPr indent="0" marL="0">
               <a:buNone/>
             </a:pPr>
             <a:r>
@@ -9764,7 +9319,7 @@
           <a:bodyPr wrap="square" lIns="0" tIns="0" rIns="0" bIns="0" rtlCol="0" anchor="ctr"/>
           <a:lstStyle/>
           <a:p>
-            <a:pPr marL="0" indent="0">
+            <a:pPr indent="0" marL="0">
               <a:buNone/>
             </a:pPr>
             <a:r>
@@ -9805,13 +9360,6 @@
             <a:tailEnd type="triangle"/>
           </a:ln>
         </p:spPr>
-        <p:txBody>
-          <a:bodyPr/>
-          <a:lstStyle/>
-          <a:p>
-            <a:endParaRPr lang="en-CA"/>
-          </a:p>
-        </p:txBody>
       </p:sp>
       <p:sp>
         <p:nvSpPr>
@@ -9839,20 +9387,13 @@
             <a:prstDash val="solid"/>
           </a:ln>
           <a:effectLst>
-            <a:outerShdw blurRad="101600" dist="38100" dir="2700000" algn="bl" rotWithShape="0">
+            <a:outerShdw sx="100000" sy="100000" kx="0" ky="0" algn="bl" rotWithShape="0" blurRad="101600" dist="38100" dir="2700000">
               <a:srgbClr val="000000">
                 <a:alpha val="25000"/>
               </a:srgbClr>
             </a:outerShdw>
           </a:effectLst>
         </p:spPr>
-        <p:txBody>
-          <a:bodyPr/>
-          <a:lstStyle/>
-          <a:p>
-            <a:endParaRPr lang="en-CA"/>
-          </a:p>
-        </p:txBody>
       </p:sp>
       <p:sp>
         <p:nvSpPr>
@@ -9875,7 +9416,7 @@
           <a:bodyPr wrap="square" lIns="0" tIns="0" rIns="0" bIns="0" rtlCol="0" anchor="ctr"/>
           <a:lstStyle/>
           <a:p>
-            <a:pPr marL="0" indent="0">
+            <a:pPr indent="0" marL="0">
               <a:buNone/>
             </a:pPr>
             <a:r>
@@ -9914,7 +9455,7 @@
           <a:bodyPr wrap="square" lIns="0" tIns="0" rIns="0" bIns="0" rtlCol="0" anchor="ctr"/>
           <a:lstStyle/>
           <a:p>
-            <a:pPr marL="0" indent="0">
+            <a:pPr indent="0" marL="0">
               <a:buNone/>
             </a:pPr>
             <a:r>
@@ -9953,7 +9494,7 @@
           <a:bodyPr wrap="square" lIns="0" tIns="0" rIns="0" bIns="0" rtlCol="0" anchor="ctr"/>
           <a:lstStyle/>
           <a:p>
-            <a:pPr marL="0" indent="0">
+            <a:pPr indent="0" marL="0">
               <a:buNone/>
             </a:pPr>
             <a:r>
@@ -9994,13 +9535,6 @@
             <a:tailEnd type="triangle"/>
           </a:ln>
         </p:spPr>
-        <p:txBody>
-          <a:bodyPr/>
-          <a:lstStyle/>
-          <a:p>
-            <a:endParaRPr lang="en-CA"/>
-          </a:p>
-        </p:txBody>
       </p:sp>
       <p:sp>
         <p:nvSpPr>
@@ -10028,20 +9562,13 @@
             <a:prstDash val="solid"/>
           </a:ln>
           <a:effectLst>
-            <a:outerShdw blurRad="101600" dist="38100" dir="2700000" algn="bl" rotWithShape="0">
+            <a:outerShdw sx="100000" sy="100000" kx="0" ky="0" algn="bl" rotWithShape="0" blurRad="101600" dist="38100" dir="2700000">
               <a:srgbClr val="000000">
                 <a:alpha val="25000"/>
               </a:srgbClr>
             </a:outerShdw>
           </a:effectLst>
         </p:spPr>
-        <p:txBody>
-          <a:bodyPr/>
-          <a:lstStyle/>
-          <a:p>
-            <a:endParaRPr lang="en-CA"/>
-          </a:p>
-        </p:txBody>
       </p:sp>
       <p:sp>
         <p:nvSpPr>
@@ -10064,7 +9591,7 @@
           <a:bodyPr wrap="square" lIns="0" tIns="0" rIns="0" bIns="0" rtlCol="0" anchor="ctr"/>
           <a:lstStyle/>
           <a:p>
-            <a:pPr marL="0" indent="0">
+            <a:pPr indent="0" marL="0">
               <a:buNone/>
             </a:pPr>
             <a:r>
@@ -10103,7 +9630,7 @@
           <a:bodyPr wrap="square" lIns="0" tIns="0" rIns="0" bIns="0" rtlCol="0" anchor="ctr"/>
           <a:lstStyle/>
           <a:p>
-            <a:pPr marL="0" indent="0">
+            <a:pPr indent="0" marL="0">
               <a:buNone/>
             </a:pPr>
             <a:r>
@@ -10142,7 +9669,7 @@
           <a:bodyPr wrap="square" lIns="0" tIns="0" rIns="0" bIns="0" rtlCol="0" anchor="ctr"/>
           <a:lstStyle/>
           <a:p>
-            <a:pPr marL="0" indent="0">
+            <a:pPr indent="0" marL="0">
               <a:buNone/>
             </a:pPr>
             <a:r>
@@ -10181,7 +9708,7 @@
           <a:bodyPr wrap="square" lIns="0" tIns="0" rIns="0" bIns="0" rtlCol="0" anchor="ctr"/>
           <a:lstStyle/>
           <a:p>
-            <a:pPr marL="0" indent="0" algn="ctr">
+            <a:pPr algn="ctr" indent="0" marL="0">
               <a:buNone/>
             </a:pPr>
             <a:r>
@@ -10195,6 +9722,9 @@
               </a:rPr>
               <a:t>Same controller. Same </a:t>
             </a:r>
+            <a:pPr algn="ctr" indent="0" marL="0">
+              <a:buNone/>
+            </a:pPr>
             <a:r>
               <a:rPr lang="en-US" sz="1680" i="1" dirty="0">
                 <a:solidFill>
@@ -10206,6 +9736,9 @@
               </a:rPr>
               <a:t>QuestionAnswerAdvisor</a:t>
             </a:r>
+            <a:pPr algn="ctr" indent="0" marL="0">
+              <a:buNone/>
+            </a:pPr>
             <a:r>
               <a:rPr lang="en-US" sz="1680" i="1" dirty="0">
                 <a:solidFill>
@@ -10237,7 +9770,6 @@
         <a:solidFill>
           <a:srgbClr val="0A0F1C"/>
         </a:solidFill>
-        <a:effectLst/>
       </p:bgPr>
     </p:bg>
     <p:spTree>
@@ -10278,13 +9810,6 @@
             <a:prstDash val="solid"/>
           </a:ln>
         </p:spPr>
-        <p:txBody>
-          <a:bodyPr/>
-          <a:lstStyle/>
-          <a:p>
-            <a:endParaRPr lang="en-CA"/>
-          </a:p>
-        </p:txBody>
       </p:sp>
       <p:sp>
         <p:nvSpPr>
@@ -10310,13 +9835,6 @@
             <a:prstDash val="solid"/>
           </a:ln>
         </p:spPr>
-        <p:txBody>
-          <a:bodyPr/>
-          <a:lstStyle/>
-          <a:p>
-            <a:endParaRPr lang="en-CA"/>
-          </a:p>
-        </p:txBody>
       </p:sp>
       <p:sp>
         <p:nvSpPr>
@@ -10342,13 +9860,6 @@
             <a:prstDash val="solid"/>
           </a:ln>
         </p:spPr>
-        <p:txBody>
-          <a:bodyPr/>
-          <a:lstStyle/>
-          <a:p>
-            <a:endParaRPr lang="en-CA"/>
-          </a:p>
-        </p:txBody>
       </p:sp>
       <p:sp>
         <p:nvSpPr>
@@ -10371,13 +9882,6 @@
           </a:solidFill>
           <a:ln/>
         </p:spPr>
-        <p:txBody>
-          <a:bodyPr/>
-          <a:lstStyle/>
-          <a:p>
-            <a:endParaRPr lang="en-CA"/>
-          </a:p>
-        </p:txBody>
       </p:sp>
       <p:sp>
         <p:nvSpPr>
@@ -10400,13 +9904,6 @@
           </a:solidFill>
           <a:ln/>
         </p:spPr>
-        <p:txBody>
-          <a:bodyPr/>
-          <a:lstStyle/>
-          <a:p>
-            <a:endParaRPr lang="en-CA"/>
-          </a:p>
-        </p:txBody>
       </p:sp>
       <p:sp>
         <p:nvSpPr>
@@ -10429,13 +9926,6 @@
           </a:solidFill>
           <a:ln/>
         </p:spPr>
-        <p:txBody>
-          <a:bodyPr/>
-          <a:lstStyle/>
-          <a:p>
-            <a:endParaRPr lang="en-CA"/>
-          </a:p>
-        </p:txBody>
       </p:sp>
       <p:sp>
         <p:nvSpPr>
@@ -10458,13 +9948,6 @@
           </a:solidFill>
           <a:ln/>
         </p:spPr>
-        <p:txBody>
-          <a:bodyPr/>
-          <a:lstStyle/>
-          <a:p>
-            <a:endParaRPr lang="en-CA"/>
-          </a:p>
-        </p:txBody>
       </p:sp>
       <p:sp>
         <p:nvSpPr>
@@ -10490,13 +9973,6 @@
             <a:prstDash val="solid"/>
           </a:ln>
         </p:spPr>
-        <p:txBody>
-          <a:bodyPr/>
-          <a:lstStyle/>
-          <a:p>
-            <a:endParaRPr lang="en-CA"/>
-          </a:p>
-        </p:txBody>
       </p:sp>
       <p:sp>
         <p:nvSpPr>
@@ -10522,13 +9998,6 @@
             <a:prstDash val="solid"/>
           </a:ln>
         </p:spPr>
-        <p:txBody>
-          <a:bodyPr/>
-          <a:lstStyle/>
-          <a:p>
-            <a:endParaRPr lang="en-CA"/>
-          </a:p>
-        </p:txBody>
       </p:sp>
       <p:sp>
         <p:nvSpPr>
@@ -10554,13 +10023,6 @@
             <a:prstDash val="solid"/>
           </a:ln>
         </p:spPr>
-        <p:txBody>
-          <a:bodyPr/>
-          <a:lstStyle/>
-          <a:p>
-            <a:endParaRPr lang="en-CA"/>
-          </a:p>
-        </p:txBody>
       </p:sp>
       <p:sp>
         <p:nvSpPr>
@@ -10583,13 +10045,6 @@
           </a:solidFill>
           <a:ln/>
         </p:spPr>
-        <p:txBody>
-          <a:bodyPr/>
-          <a:lstStyle/>
-          <a:p>
-            <a:endParaRPr lang="en-CA"/>
-          </a:p>
-        </p:txBody>
       </p:sp>
       <p:sp>
         <p:nvSpPr>
@@ -10612,13 +10067,6 @@
           </a:solidFill>
           <a:ln/>
         </p:spPr>
-        <p:txBody>
-          <a:bodyPr/>
-          <a:lstStyle/>
-          <a:p>
-            <a:endParaRPr lang="en-CA"/>
-          </a:p>
-        </p:txBody>
       </p:sp>
       <p:sp>
         <p:nvSpPr>
@@ -10641,13 +10089,6 @@
           </a:solidFill>
           <a:ln/>
         </p:spPr>
-        <p:txBody>
-          <a:bodyPr/>
-          <a:lstStyle/>
-          <a:p>
-            <a:endParaRPr lang="en-CA"/>
-          </a:p>
-        </p:txBody>
       </p:sp>
       <p:sp>
         <p:nvSpPr>
@@ -10670,13 +10111,6 @@
           </a:solidFill>
           <a:ln/>
         </p:spPr>
-        <p:txBody>
-          <a:bodyPr/>
-          <a:lstStyle/>
-          <a:p>
-            <a:endParaRPr lang="en-CA"/>
-          </a:p>
-        </p:txBody>
       </p:sp>
       <p:sp>
         <p:nvSpPr>
@@ -10699,7 +10133,7 @@
           <a:bodyPr wrap="square" lIns="0" tIns="0" rIns="0" bIns="0" rtlCol="0" anchor="ctr"/>
           <a:lstStyle/>
           <a:p>
-            <a:pPr marL="0" indent="0">
+            <a:pPr indent="0" marL="0">
               <a:buNone/>
             </a:pPr>
             <a:r>
@@ -10738,7 +10172,7 @@
           <a:bodyPr wrap="square" lIns="0" tIns="0" rIns="0" bIns="0" rtlCol="0" anchor="ctr"/>
           <a:lstStyle/>
           <a:p>
-            <a:pPr marL="0" indent="0" algn="r">
+            <a:pPr algn="r" indent="0" marL="0">
               <a:buNone/>
             </a:pPr>
             <a:r>
@@ -10777,11 +10211,11 @@
           <a:bodyPr wrap="square" lIns="0" tIns="0" rIns="0" bIns="0" rtlCol="0" anchor="ctr"/>
           <a:lstStyle/>
           <a:p>
-            <a:pPr marL="0" indent="0">
-              <a:buNone/>
-            </a:pPr>
-            <a:r>
-              <a:rPr lang="en-US" sz="1440" kern="0" spc="200" dirty="0">
+            <a:pPr indent="0" marL="0">
+              <a:buNone/>
+            </a:pPr>
+            <a:r>
+              <a:rPr lang="en-US" sz="1440" spc="200" kern="0" dirty="0">
                 <a:solidFill>
                   <a:srgbClr val="5FE0C5"/>
                 </a:solidFill>
@@ -10816,7 +10250,7 @@
           <a:bodyPr wrap="square" lIns="0" tIns="0" rIns="0" bIns="0" rtlCol="0" anchor="ctr"/>
           <a:lstStyle/>
           <a:p>
-            <a:pPr marL="0" indent="0" algn="l">
+            <a:pPr algn="l" indent="0" marL="0">
               <a:buNone/>
             </a:pPr>
             <a:r>
@@ -10860,20 +10294,13 @@
             <a:prstDash val="solid"/>
           </a:ln>
           <a:effectLst>
-            <a:outerShdw blurRad="101600" dist="38100" dir="2700000" algn="bl" rotWithShape="0">
+            <a:outerShdw sx="100000" sy="100000" kx="0" ky="0" algn="bl" rotWithShape="0" blurRad="101600" dist="38100" dir="2700000">
               <a:srgbClr val="000000">
                 <a:alpha val="25000"/>
               </a:srgbClr>
             </a:outerShdw>
           </a:effectLst>
         </p:spPr>
-        <p:txBody>
-          <a:bodyPr/>
-          <a:lstStyle/>
-          <a:p>
-            <a:endParaRPr lang="en-CA"/>
-          </a:p>
-        </p:txBody>
       </p:sp>
       <p:sp>
         <p:nvSpPr>
@@ -10896,7 +10323,7 @@
           <a:bodyPr wrap="square" lIns="0" tIns="0" rIns="0" bIns="0" rtlCol="0" anchor="ctr"/>
           <a:lstStyle/>
           <a:p>
-            <a:pPr marL="0" indent="0">
+            <a:pPr indent="0" marL="0">
               <a:buNone/>
             </a:pPr>
             <a:r>
@@ -10935,7 +10362,7 @@
           <a:bodyPr wrap="square" lIns="0" tIns="0" rIns="0" bIns="0" rtlCol="0" anchor="ctr"/>
           <a:lstStyle/>
           <a:p>
-            <a:pPr marL="0" indent="0">
+            <a:pPr indent="0" marL="0">
               <a:buNone/>
             </a:pPr>
             <a:r>
@@ -10974,7 +10401,7 @@
           <a:bodyPr wrap="square" lIns="0" tIns="0" rIns="0" bIns="0" rtlCol="0" anchor="t"/>
           <a:lstStyle/>
           <a:p>
-            <a:pPr marL="0" indent="0">
+            <a:pPr indent="0" marL="0">
               <a:lnSpc>
                 <a:spcPct val="120000"/>
               </a:lnSpc>
@@ -10994,7 +10421,7 @@
             <a:endParaRPr lang="en-US" sz="1560" dirty="0"/>
           </a:p>
           <a:p>
-            <a:pPr marL="0" indent="0">
+            <a:pPr indent="0" marL="0">
               <a:lnSpc>
                 <a:spcPct val="120000"/>
               </a:lnSpc>
@@ -11038,13 +10465,6 @@
             <a:tailEnd type="triangle"/>
           </a:ln>
         </p:spPr>
-        <p:txBody>
-          <a:bodyPr/>
-          <a:lstStyle/>
-          <a:p>
-            <a:endParaRPr lang="en-CA"/>
-          </a:p>
-        </p:txBody>
       </p:sp>
       <p:sp>
         <p:nvSpPr>
@@ -11072,20 +10492,13 @@
             <a:prstDash val="solid"/>
           </a:ln>
           <a:effectLst>
-            <a:outerShdw blurRad="101600" dist="38100" dir="2700000" algn="bl" rotWithShape="0">
+            <a:outerShdw sx="100000" sy="100000" kx="0" ky="0" algn="bl" rotWithShape="0" blurRad="101600" dist="38100" dir="2700000">
               <a:srgbClr val="000000">
                 <a:alpha val="25000"/>
               </a:srgbClr>
             </a:outerShdw>
           </a:effectLst>
         </p:spPr>
-        <p:txBody>
-          <a:bodyPr/>
-          <a:lstStyle/>
-          <a:p>
-            <a:endParaRPr lang="en-CA"/>
-          </a:p>
-        </p:txBody>
       </p:sp>
       <p:sp>
         <p:nvSpPr>
@@ -11108,7 +10521,7 @@
           <a:bodyPr wrap="square" lIns="0" tIns="0" rIns="0" bIns="0" rtlCol="0" anchor="ctr"/>
           <a:lstStyle/>
           <a:p>
-            <a:pPr marL="0" indent="0">
+            <a:pPr indent="0" marL="0">
               <a:buNone/>
             </a:pPr>
             <a:r>
@@ -11147,7 +10560,7 @@
           <a:bodyPr wrap="square" lIns="0" tIns="0" rIns="0" bIns="0" rtlCol="0" anchor="ctr"/>
           <a:lstStyle/>
           <a:p>
-            <a:pPr marL="0" indent="0">
+            <a:pPr indent="0" marL="0">
               <a:buNone/>
             </a:pPr>
             <a:r>
@@ -11186,7 +10599,7 @@
           <a:bodyPr wrap="square" lIns="0" tIns="0" rIns="0" bIns="0" rtlCol="0" anchor="t"/>
           <a:lstStyle/>
           <a:p>
-            <a:pPr marL="0" indent="0">
+            <a:pPr indent="0" marL="0">
               <a:lnSpc>
                 <a:spcPct val="120000"/>
               </a:lnSpc>
@@ -11206,7 +10619,7 @@
             <a:endParaRPr lang="en-US" sz="1560" dirty="0"/>
           </a:p>
           <a:p>
-            <a:pPr marL="0" indent="0">
+            <a:pPr indent="0" marL="0">
               <a:lnSpc>
                 <a:spcPct val="120000"/>
               </a:lnSpc>
@@ -11250,13 +10663,6 @@
             <a:tailEnd type="triangle"/>
           </a:ln>
         </p:spPr>
-        <p:txBody>
-          <a:bodyPr/>
-          <a:lstStyle/>
-          <a:p>
-            <a:endParaRPr lang="en-CA"/>
-          </a:p>
-        </p:txBody>
       </p:sp>
       <p:sp>
         <p:nvSpPr>
@@ -11284,20 +10690,13 @@
             <a:prstDash val="solid"/>
           </a:ln>
           <a:effectLst>
-            <a:outerShdw blurRad="101600" dist="38100" dir="2700000" algn="bl" rotWithShape="0">
+            <a:outerShdw sx="100000" sy="100000" kx="0" ky="0" algn="bl" rotWithShape="0" blurRad="101600" dist="38100" dir="2700000">
               <a:srgbClr val="000000">
                 <a:alpha val="25000"/>
               </a:srgbClr>
             </a:outerShdw>
           </a:effectLst>
         </p:spPr>
-        <p:txBody>
-          <a:bodyPr/>
-          <a:lstStyle/>
-          <a:p>
-            <a:endParaRPr lang="en-CA"/>
-          </a:p>
-        </p:txBody>
       </p:sp>
       <p:sp>
         <p:nvSpPr>
@@ -11320,7 +10719,7 @@
           <a:bodyPr wrap="square" lIns="0" tIns="0" rIns="0" bIns="0" rtlCol="0" anchor="ctr"/>
           <a:lstStyle/>
           <a:p>
-            <a:pPr marL="0" indent="0">
+            <a:pPr indent="0" marL="0">
               <a:buNone/>
             </a:pPr>
             <a:r>
@@ -11359,7 +10758,7 @@
           <a:bodyPr wrap="square" lIns="0" tIns="0" rIns="0" bIns="0" rtlCol="0" anchor="ctr"/>
           <a:lstStyle/>
           <a:p>
-            <a:pPr marL="0" indent="0">
+            <a:pPr indent="0" marL="0">
               <a:buNone/>
             </a:pPr>
             <a:r>
@@ -11398,7 +10797,7 @@
           <a:bodyPr wrap="square" lIns="0" tIns="0" rIns="0" bIns="0" rtlCol="0" anchor="t"/>
           <a:lstStyle/>
           <a:p>
-            <a:pPr marL="0" indent="0">
+            <a:pPr indent="0" marL="0">
               <a:lnSpc>
                 <a:spcPct val="120000"/>
               </a:lnSpc>
@@ -11418,7 +10817,7 @@
             <a:endParaRPr lang="en-US" sz="1560" dirty="0"/>
           </a:p>
           <a:p>
-            <a:pPr marL="0" indent="0">
+            <a:pPr indent="0" marL="0">
               <a:lnSpc>
                 <a:spcPct val="120000"/>
               </a:lnSpc>
@@ -11460,7 +10859,7 @@
           <a:bodyPr wrap="square" lIns="0" tIns="0" rIns="0" bIns="0" rtlCol="0" anchor="ctr"/>
           <a:lstStyle/>
           <a:p>
-            <a:pPr marL="0" indent="0" algn="ctr">
+            <a:pPr algn="ctr" indent="0" marL="0">
               <a:buNone/>
             </a:pPr>
             <a:r>
@@ -11494,7 +10893,6 @@
         <a:solidFill>
           <a:srgbClr val="0A0F1C"/>
         </a:solidFill>
-        <a:effectLst/>
       </p:bgPr>
     </p:bg>
     <p:spTree>
@@ -11535,13 +10933,6 @@
             <a:prstDash val="solid"/>
           </a:ln>
         </p:spPr>
-        <p:txBody>
-          <a:bodyPr/>
-          <a:lstStyle/>
-          <a:p>
-            <a:endParaRPr lang="en-CA"/>
-          </a:p>
-        </p:txBody>
       </p:sp>
       <p:sp>
         <p:nvSpPr>
@@ -11567,13 +10958,6 @@
             <a:prstDash val="solid"/>
           </a:ln>
         </p:spPr>
-        <p:txBody>
-          <a:bodyPr/>
-          <a:lstStyle/>
-          <a:p>
-            <a:endParaRPr lang="en-CA"/>
-          </a:p>
-        </p:txBody>
       </p:sp>
       <p:sp>
         <p:nvSpPr>
@@ -11599,13 +10983,6 @@
             <a:prstDash val="solid"/>
           </a:ln>
         </p:spPr>
-        <p:txBody>
-          <a:bodyPr/>
-          <a:lstStyle/>
-          <a:p>
-            <a:endParaRPr lang="en-CA"/>
-          </a:p>
-        </p:txBody>
       </p:sp>
       <p:sp>
         <p:nvSpPr>
@@ -11628,13 +11005,6 @@
           </a:solidFill>
           <a:ln/>
         </p:spPr>
-        <p:txBody>
-          <a:bodyPr/>
-          <a:lstStyle/>
-          <a:p>
-            <a:endParaRPr lang="en-CA"/>
-          </a:p>
-        </p:txBody>
       </p:sp>
       <p:sp>
         <p:nvSpPr>
@@ -11657,13 +11027,6 @@
           </a:solidFill>
           <a:ln/>
         </p:spPr>
-        <p:txBody>
-          <a:bodyPr/>
-          <a:lstStyle/>
-          <a:p>
-            <a:endParaRPr lang="en-CA"/>
-          </a:p>
-        </p:txBody>
       </p:sp>
       <p:sp>
         <p:nvSpPr>
@@ -11686,13 +11049,6 @@
           </a:solidFill>
           <a:ln/>
         </p:spPr>
-        <p:txBody>
-          <a:bodyPr/>
-          <a:lstStyle/>
-          <a:p>
-            <a:endParaRPr lang="en-CA"/>
-          </a:p>
-        </p:txBody>
       </p:sp>
       <p:sp>
         <p:nvSpPr>
@@ -11715,13 +11071,6 @@
           </a:solidFill>
           <a:ln/>
         </p:spPr>
-        <p:txBody>
-          <a:bodyPr/>
-          <a:lstStyle/>
-          <a:p>
-            <a:endParaRPr lang="en-CA"/>
-          </a:p>
-        </p:txBody>
       </p:sp>
       <p:sp>
         <p:nvSpPr>
@@ -11747,13 +11096,6 @@
             <a:prstDash val="solid"/>
           </a:ln>
         </p:spPr>
-        <p:txBody>
-          <a:bodyPr/>
-          <a:lstStyle/>
-          <a:p>
-            <a:endParaRPr lang="en-CA"/>
-          </a:p>
-        </p:txBody>
       </p:sp>
       <p:sp>
         <p:nvSpPr>
@@ -11779,13 +11121,6 @@
             <a:prstDash val="solid"/>
           </a:ln>
         </p:spPr>
-        <p:txBody>
-          <a:bodyPr/>
-          <a:lstStyle/>
-          <a:p>
-            <a:endParaRPr lang="en-CA"/>
-          </a:p>
-        </p:txBody>
       </p:sp>
       <p:sp>
         <p:nvSpPr>
@@ -11811,13 +11146,6 @@
             <a:prstDash val="solid"/>
           </a:ln>
         </p:spPr>
-        <p:txBody>
-          <a:bodyPr/>
-          <a:lstStyle/>
-          <a:p>
-            <a:endParaRPr lang="en-CA"/>
-          </a:p>
-        </p:txBody>
       </p:sp>
       <p:sp>
         <p:nvSpPr>
@@ -11840,13 +11168,6 @@
           </a:solidFill>
           <a:ln/>
         </p:spPr>
-        <p:txBody>
-          <a:bodyPr/>
-          <a:lstStyle/>
-          <a:p>
-            <a:endParaRPr lang="en-CA"/>
-          </a:p>
-        </p:txBody>
       </p:sp>
       <p:sp>
         <p:nvSpPr>
@@ -11869,13 +11190,6 @@
           </a:solidFill>
           <a:ln/>
         </p:spPr>
-        <p:txBody>
-          <a:bodyPr/>
-          <a:lstStyle/>
-          <a:p>
-            <a:endParaRPr lang="en-CA"/>
-          </a:p>
-        </p:txBody>
       </p:sp>
       <p:sp>
         <p:nvSpPr>
@@ -11898,13 +11212,6 @@
           </a:solidFill>
           <a:ln/>
         </p:spPr>
-        <p:txBody>
-          <a:bodyPr/>
-          <a:lstStyle/>
-          <a:p>
-            <a:endParaRPr lang="en-CA"/>
-          </a:p>
-        </p:txBody>
       </p:sp>
       <p:sp>
         <p:nvSpPr>
@@ -11927,13 +11234,6 @@
           </a:solidFill>
           <a:ln/>
         </p:spPr>
-        <p:txBody>
-          <a:bodyPr/>
-          <a:lstStyle/>
-          <a:p>
-            <a:endParaRPr lang="en-CA"/>
-          </a:p>
-        </p:txBody>
       </p:sp>
       <p:sp>
         <p:nvSpPr>
@@ -11956,7 +11256,7 @@
           <a:bodyPr wrap="square" lIns="0" tIns="0" rIns="0" bIns="0" rtlCol="0" anchor="ctr"/>
           <a:lstStyle/>
           <a:p>
-            <a:pPr marL="0" indent="0">
+            <a:pPr indent="0" marL="0">
               <a:buNone/>
             </a:pPr>
             <a:r>
@@ -11995,7 +11295,7 @@
           <a:bodyPr wrap="square" lIns="0" tIns="0" rIns="0" bIns="0" rtlCol="0" anchor="ctr"/>
           <a:lstStyle/>
           <a:p>
-            <a:pPr marL="0" indent="0" algn="r">
+            <a:pPr algn="r" indent="0" marL="0">
               <a:buNone/>
             </a:pPr>
             <a:r>
@@ -12034,11 +11334,11 @@
           <a:bodyPr wrap="square" lIns="0" tIns="0" rIns="0" bIns="0" rtlCol="0" anchor="ctr"/>
           <a:lstStyle/>
           <a:p>
-            <a:pPr marL="0" indent="0">
-              <a:buNone/>
-            </a:pPr>
-            <a:r>
-              <a:rPr lang="en-US" sz="1440" kern="0" spc="200" dirty="0">
+            <a:pPr indent="0" marL="0">
+              <a:buNone/>
+            </a:pPr>
+            <a:r>
+              <a:rPr lang="en-US" sz="1440" spc="200" kern="0" dirty="0">
                 <a:solidFill>
                   <a:srgbClr val="5FE0C5"/>
                 </a:solidFill>
@@ -12073,7 +11373,7 @@
           <a:bodyPr wrap="square" lIns="0" tIns="0" rIns="0" bIns="0" rtlCol="0" anchor="ctr"/>
           <a:lstStyle/>
           <a:p>
-            <a:pPr marL="0" indent="0" algn="l">
+            <a:pPr algn="l" indent="0" marL="0">
               <a:buNone/>
             </a:pPr>
             <a:r>
@@ -12117,20 +11417,13 @@
             <a:prstDash val="solid"/>
           </a:ln>
           <a:effectLst>
-            <a:outerShdw blurRad="76200" dist="38100" dir="2700000" algn="bl" rotWithShape="0">
+            <a:outerShdw sx="100000" sy="100000" kx="0" ky="0" algn="bl" rotWithShape="0" blurRad="76200" dist="38100" dir="2700000">
               <a:srgbClr val="000000">
                 <a:alpha val="20000"/>
               </a:srgbClr>
             </a:outerShdw>
           </a:effectLst>
         </p:spPr>
-        <p:txBody>
-          <a:bodyPr/>
-          <a:lstStyle/>
-          <a:p>
-            <a:endParaRPr lang="en-CA"/>
-          </a:p>
-        </p:txBody>
       </p:sp>
       <p:sp>
         <p:nvSpPr>
@@ -12153,7 +11446,7 @@
           <a:bodyPr wrap="square" lIns="0" tIns="0" rIns="0" bIns="0" rtlCol="0" anchor="ctr"/>
           <a:lstStyle/>
           <a:p>
-            <a:pPr marL="0" indent="0" algn="ctr">
+            <a:pPr algn="ctr" indent="0" marL="0">
               <a:buNone/>
             </a:pPr>
             <a:r>
@@ -12165,7 +11458,7 @@
                 <a:ea typeface="Courier New" pitchFamily="34" charset="-122"/>
                 <a:cs typeface="Courier New" pitchFamily="34" charset="-120"/>
               </a:rPr>
-              <a:t>Java 21+</a:t>
+              <a:t>Java 25+</a:t>
             </a:r>
             <a:endParaRPr lang="en-US" sz="1920" dirty="0"/>
           </a:p>
@@ -12192,7 +11485,7 @@
           <a:bodyPr wrap="square" lIns="0" tIns="0" rIns="0" bIns="0" rtlCol="0" anchor="t"/>
           <a:lstStyle/>
           <a:p>
-            <a:pPr marL="0" indent="0" algn="ctr">
+            <a:pPr algn="ctr" indent="0" marL="0">
               <a:lnSpc>
                 <a:spcPct val="120000"/>
               </a:lnSpc>
@@ -12239,20 +11532,13 @@
             <a:prstDash val="solid"/>
           </a:ln>
           <a:effectLst>
-            <a:outerShdw blurRad="76200" dist="38100" dir="2700000" algn="bl" rotWithShape="0">
+            <a:outerShdw sx="100000" sy="100000" kx="0" ky="0" algn="bl" rotWithShape="0" blurRad="76200" dist="38100" dir="2700000">
               <a:srgbClr val="000000">
                 <a:alpha val="20000"/>
               </a:srgbClr>
             </a:outerShdw>
           </a:effectLst>
         </p:spPr>
-        <p:txBody>
-          <a:bodyPr/>
-          <a:lstStyle/>
-          <a:p>
-            <a:endParaRPr lang="en-CA"/>
-          </a:p>
-        </p:txBody>
       </p:sp>
       <p:sp>
         <p:nvSpPr>
@@ -12275,7 +11561,7 @@
           <a:bodyPr wrap="square" lIns="0" tIns="0" rIns="0" bIns="0" rtlCol="0" anchor="ctr"/>
           <a:lstStyle/>
           <a:p>
-            <a:pPr marL="0" indent="0" algn="ctr">
+            <a:pPr algn="ctr" indent="0" marL="0">
               <a:buNone/>
             </a:pPr>
             <a:r>
@@ -12314,7 +11600,7 @@
           <a:bodyPr wrap="square" lIns="0" tIns="0" rIns="0" bIns="0" rtlCol="0" anchor="t"/>
           <a:lstStyle/>
           <a:p>
-            <a:pPr marL="0" indent="0" algn="ctr">
+            <a:pPr algn="ctr" indent="0" marL="0">
               <a:lnSpc>
                 <a:spcPct val="120000"/>
               </a:lnSpc>
@@ -12361,20 +11647,13 @@
             <a:prstDash val="solid"/>
           </a:ln>
           <a:effectLst>
-            <a:outerShdw blurRad="76200" dist="38100" dir="2700000" algn="bl" rotWithShape="0">
+            <a:outerShdw sx="100000" sy="100000" kx="0" ky="0" algn="bl" rotWithShape="0" blurRad="76200" dist="38100" dir="2700000">
               <a:srgbClr val="000000">
                 <a:alpha val="20000"/>
               </a:srgbClr>
             </a:outerShdw>
           </a:effectLst>
         </p:spPr>
-        <p:txBody>
-          <a:bodyPr/>
-          <a:lstStyle/>
-          <a:p>
-            <a:endParaRPr lang="en-CA"/>
-          </a:p>
-        </p:txBody>
       </p:sp>
       <p:sp>
         <p:nvSpPr>
@@ -12397,7 +11676,7 @@
           <a:bodyPr wrap="square" lIns="0" tIns="0" rIns="0" bIns="0" rtlCol="0" anchor="ctr"/>
           <a:lstStyle/>
           <a:p>
-            <a:pPr marL="0" indent="0" algn="ctr">
+            <a:pPr algn="ctr" indent="0" marL="0">
               <a:buNone/>
             </a:pPr>
             <a:r>
@@ -12436,7 +11715,7 @@
           <a:bodyPr wrap="square" lIns="0" tIns="0" rIns="0" bIns="0" rtlCol="0" anchor="t"/>
           <a:lstStyle/>
           <a:p>
-            <a:pPr marL="0" indent="0" algn="ctr">
+            <a:pPr algn="ctr" indent="0" marL="0">
               <a:lnSpc>
                 <a:spcPct val="120000"/>
               </a:lnSpc>
@@ -12483,20 +11762,13 @@
             <a:prstDash val="solid"/>
           </a:ln>
           <a:effectLst>
-            <a:outerShdw blurRad="76200" dist="38100" dir="2700000" algn="bl" rotWithShape="0">
+            <a:outerShdw sx="100000" sy="100000" kx="0" ky="0" algn="bl" rotWithShape="0" blurRad="76200" dist="38100" dir="2700000">
               <a:srgbClr val="000000">
                 <a:alpha val="20000"/>
               </a:srgbClr>
             </a:outerShdw>
           </a:effectLst>
         </p:spPr>
-        <p:txBody>
-          <a:bodyPr/>
-          <a:lstStyle/>
-          <a:p>
-            <a:endParaRPr lang="en-CA"/>
-          </a:p>
-        </p:txBody>
       </p:sp>
       <p:sp>
         <p:nvSpPr>
@@ -12519,7 +11791,7 @@
           <a:bodyPr wrap="square" lIns="0" tIns="0" rIns="0" bIns="0" rtlCol="0" anchor="ctr"/>
           <a:lstStyle/>
           <a:p>
-            <a:pPr marL="0" indent="0" algn="ctr">
+            <a:pPr algn="ctr" indent="0" marL="0">
               <a:buNone/>
             </a:pPr>
             <a:r>
@@ -12558,7 +11830,7 @@
           <a:bodyPr wrap="square" lIns="0" tIns="0" rIns="0" bIns="0" rtlCol="0" anchor="t"/>
           <a:lstStyle/>
           <a:p>
-            <a:pPr marL="0" indent="0" algn="ctr">
+            <a:pPr algn="ctr" indent="0" marL="0">
               <a:lnSpc>
                 <a:spcPct val="120000"/>
               </a:lnSpc>
@@ -12578,7 +11850,7 @@
             <a:endParaRPr lang="en-US" sz="1440" dirty="0"/>
           </a:p>
           <a:p>
-            <a:pPr marL="0" indent="0" algn="ctr">
+            <a:pPr algn="ctr" indent="0" marL="0">
               <a:lnSpc>
                 <a:spcPct val="120000"/>
               </a:lnSpc>
@@ -12620,7 +11892,7 @@
           <a:bodyPr wrap="square" lIns="0" tIns="0" rIns="0" bIns="0" rtlCol="0" anchor="ctr"/>
           <a:lstStyle/>
           <a:p>
-            <a:pPr marL="0" indent="0" algn="ctr">
+            <a:pPr algn="ctr" indent="0" marL="0">
               <a:buNone/>
             </a:pPr>
             <a:r>
@@ -12634,6 +11906,9 @@
               </a:rPr>
               <a:t>ollama pull llama3.2</a:t>
             </a:r>
+            <a:pPr algn="ctr" indent="0" marL="0">
+              <a:buNone/>
+            </a:pPr>
             <a:r>
               <a:rPr lang="en-US" sz="1680" dirty="0">
                 <a:solidFill>
@@ -12645,6 +11920,9 @@
               </a:rPr>
               <a:t>   ·   </a:t>
             </a:r>
+            <a:pPr algn="ctr" indent="0" marL="0">
+              <a:buNone/>
+            </a:pPr>
             <a:r>
               <a:rPr lang="en-US" sz="1680" dirty="0">
                 <a:solidFill>
@@ -12670,13 +11948,12 @@
 
 <file path=ppt/slides/slide9.xml><?xml version="1.0" encoding="utf-8"?>
 <p:sld xmlns:a="http://schemas.openxmlformats.org/drawingml/2006/main" xmlns:r="http://schemas.openxmlformats.org/officeDocument/2006/relationships" xmlns:p="http://schemas.openxmlformats.org/presentationml/2006/main">
-  <p:cSld name="Slide 10">
+  <p:cSld name="Slide 9">
     <p:bg>
       <p:bgPr>
         <a:solidFill>
           <a:srgbClr val="0A0F1C"/>
         </a:solidFill>
-        <a:effectLst/>
       </p:bgPr>
     </p:bg>
     <p:spTree>
@@ -12717,13 +11994,6 @@
             <a:prstDash val="solid"/>
           </a:ln>
         </p:spPr>
-        <p:txBody>
-          <a:bodyPr/>
-          <a:lstStyle/>
-          <a:p>
-            <a:endParaRPr lang="en-CA"/>
-          </a:p>
-        </p:txBody>
       </p:sp>
       <p:sp>
         <p:nvSpPr>
@@ -12749,13 +12019,6 @@
             <a:prstDash val="solid"/>
           </a:ln>
         </p:spPr>
-        <p:txBody>
-          <a:bodyPr/>
-          <a:lstStyle/>
-          <a:p>
-            <a:endParaRPr lang="en-CA"/>
-          </a:p>
-        </p:txBody>
       </p:sp>
       <p:sp>
         <p:nvSpPr>
@@ -12781,13 +12044,6 @@
             <a:prstDash val="solid"/>
           </a:ln>
         </p:spPr>
-        <p:txBody>
-          <a:bodyPr/>
-          <a:lstStyle/>
-          <a:p>
-            <a:endParaRPr lang="en-CA"/>
-          </a:p>
-        </p:txBody>
       </p:sp>
       <p:sp>
         <p:nvSpPr>
@@ -12810,13 +12066,6 @@
           </a:solidFill>
           <a:ln/>
         </p:spPr>
-        <p:txBody>
-          <a:bodyPr/>
-          <a:lstStyle/>
-          <a:p>
-            <a:endParaRPr lang="en-CA"/>
-          </a:p>
-        </p:txBody>
       </p:sp>
       <p:sp>
         <p:nvSpPr>
@@ -12839,13 +12088,6 @@
           </a:solidFill>
           <a:ln/>
         </p:spPr>
-        <p:txBody>
-          <a:bodyPr/>
-          <a:lstStyle/>
-          <a:p>
-            <a:endParaRPr lang="en-CA"/>
-          </a:p>
-        </p:txBody>
       </p:sp>
       <p:sp>
         <p:nvSpPr>
@@ -12868,13 +12110,6 @@
           </a:solidFill>
           <a:ln/>
         </p:spPr>
-        <p:txBody>
-          <a:bodyPr/>
-          <a:lstStyle/>
-          <a:p>
-            <a:endParaRPr lang="en-CA"/>
-          </a:p>
-        </p:txBody>
       </p:sp>
       <p:sp>
         <p:nvSpPr>
@@ -12897,13 +12132,6 @@
           </a:solidFill>
           <a:ln/>
         </p:spPr>
-        <p:txBody>
-          <a:bodyPr/>
-          <a:lstStyle/>
-          <a:p>
-            <a:endParaRPr lang="en-CA"/>
-          </a:p>
-        </p:txBody>
       </p:sp>
       <p:sp>
         <p:nvSpPr>
@@ -12929,13 +12157,6 @@
             <a:prstDash val="solid"/>
           </a:ln>
         </p:spPr>
-        <p:txBody>
-          <a:bodyPr/>
-          <a:lstStyle/>
-          <a:p>
-            <a:endParaRPr lang="en-CA"/>
-          </a:p>
-        </p:txBody>
       </p:sp>
       <p:sp>
         <p:nvSpPr>
@@ -12961,13 +12182,6 @@
             <a:prstDash val="solid"/>
           </a:ln>
         </p:spPr>
-        <p:txBody>
-          <a:bodyPr/>
-          <a:lstStyle/>
-          <a:p>
-            <a:endParaRPr lang="en-CA"/>
-          </a:p>
-        </p:txBody>
       </p:sp>
       <p:sp>
         <p:nvSpPr>
@@ -12993,13 +12207,6 @@
             <a:prstDash val="solid"/>
           </a:ln>
         </p:spPr>
-        <p:txBody>
-          <a:bodyPr/>
-          <a:lstStyle/>
-          <a:p>
-            <a:endParaRPr lang="en-CA"/>
-          </a:p>
-        </p:txBody>
       </p:sp>
       <p:sp>
         <p:nvSpPr>
@@ -13022,13 +12229,6 @@
           </a:solidFill>
           <a:ln/>
         </p:spPr>
-        <p:txBody>
-          <a:bodyPr/>
-          <a:lstStyle/>
-          <a:p>
-            <a:endParaRPr lang="en-CA"/>
-          </a:p>
-        </p:txBody>
       </p:sp>
       <p:sp>
         <p:nvSpPr>
@@ -13051,13 +12251,6 @@
           </a:solidFill>
           <a:ln/>
         </p:spPr>
-        <p:txBody>
-          <a:bodyPr/>
-          <a:lstStyle/>
-          <a:p>
-            <a:endParaRPr lang="en-CA"/>
-          </a:p>
-        </p:txBody>
       </p:sp>
       <p:sp>
         <p:nvSpPr>
@@ -13080,13 +12273,6 @@
           </a:solidFill>
           <a:ln/>
         </p:spPr>
-        <p:txBody>
-          <a:bodyPr/>
-          <a:lstStyle/>
-          <a:p>
-            <a:endParaRPr lang="en-CA"/>
-          </a:p>
-        </p:txBody>
       </p:sp>
       <p:sp>
         <p:nvSpPr>
@@ -13109,13 +12295,6 @@
           </a:solidFill>
           <a:ln/>
         </p:spPr>
-        <p:txBody>
-          <a:bodyPr/>
-          <a:lstStyle/>
-          <a:p>
-            <a:endParaRPr lang="en-CA"/>
-          </a:p>
-        </p:txBody>
       </p:sp>
       <p:sp>
         <p:nvSpPr>
@@ -13138,7 +12317,7 @@
           <a:bodyPr wrap="square" lIns="0" tIns="0" rIns="0" bIns="0" rtlCol="0" anchor="ctr"/>
           <a:lstStyle/>
           <a:p>
-            <a:pPr marL="0" indent="0">
+            <a:pPr indent="0" marL="0">
               <a:buNone/>
             </a:pPr>
             <a:r>
@@ -13177,7 +12356,7 @@
           <a:bodyPr wrap="square" lIns="0" tIns="0" rIns="0" bIns="0" rtlCol="0" anchor="ctr"/>
           <a:lstStyle/>
           <a:p>
-            <a:pPr marL="0" indent="0" algn="r">
+            <a:pPr algn="r" indent="0" marL="0">
               <a:buNone/>
             </a:pPr>
             <a:r>
@@ -13189,7 +12368,7 @@
                 <a:ea typeface="Courier New" pitchFamily="34" charset="-122"/>
                 <a:cs typeface="Courier New" pitchFamily="34" charset="-120"/>
               </a:rPr>
-              <a:t>10 / 10</a:t>
+              <a:t>9 / 10</a:t>
             </a:r>
             <a:endParaRPr lang="en-US" sz="1080" dirty="0"/>
           </a:p>
@@ -13203,8 +12382,8 @@
         </p:nvSpPr>
         <p:spPr>
           <a:xfrm>
-            <a:off x="640080" y="164592"/>
-            <a:ext cx="7315200" cy="274320"/>
+            <a:off x="5577840" y="945490"/>
+            <a:ext cx="502920" cy="502920"/>
           </a:xfrm>
           <a:prstGeom prst="rect">
             <a:avLst/>
@@ -13216,34 +12395,56 @@
           <a:bodyPr wrap="square" lIns="0" tIns="0" rIns="0" bIns="0" rtlCol="0" anchor="ctr"/>
           <a:lstStyle/>
           <a:p>
-            <a:pPr marL="0" indent="0">
-              <a:buNone/>
-            </a:pPr>
-            <a:r>
-              <a:rPr lang="en-US" sz="1440" kern="0" spc="200" dirty="0">
-                <a:solidFill>
-                  <a:srgbClr val="5FE0C5"/>
+            <a:pPr algn="ctr" indent="0" marL="0">
+              <a:buNone/>
+            </a:pPr>
+            <a:r>
+              <a:rPr lang="en-US" sz="3696" b="1" dirty="0">
+                <a:solidFill>
+                  <a:srgbClr val="F2A93B"/>
                 </a:solidFill>
                 <a:latin typeface="Courier New" pitchFamily="34" charset="0"/>
                 <a:ea typeface="Courier New" pitchFamily="34" charset="-122"/>
                 <a:cs typeface="Courier New" pitchFamily="34" charset="-120"/>
               </a:rPr>
-              <a:t>CREDITS &amp; THANKS</a:t>
-            </a:r>
-            <a:endParaRPr lang="en-US" sz="1440" dirty="0"/>
-          </a:p>
-        </p:txBody>
-      </p:sp>
-      <p:sp>
-        <p:nvSpPr>
-          <p:cNvPr id="19" name="Text 17"/>
-          <p:cNvSpPr/>
-          <p:nvPr/>
-        </p:nvSpPr>
-        <p:spPr>
-          <a:xfrm>
-            <a:off x="640080" y="457200"/>
-            <a:ext cx="10881360" cy="640080"/>
+              <a:t>&gt;</a:t>
+            </a:r>
+            <a:endParaRPr lang="en-US" sz="3696" dirty="0"/>
+          </a:p>
+        </p:txBody>
+      </p:sp>
+      <p:sp>
+        <p:nvSpPr>
+          <p:cNvPr id="19" name="Shape 17"/>
+          <p:cNvSpPr/>
+          <p:nvPr/>
+        </p:nvSpPr>
+        <p:spPr>
+          <a:xfrm>
+            <a:off x="6000293" y="1186891"/>
+            <a:ext cx="341986" cy="120701"/>
+          </a:xfrm>
+          <a:prstGeom prst="roundRect">
+            <a:avLst>
+              <a:gd name="adj" fmla="val 50000"/>
+            </a:avLst>
+          </a:prstGeom>
+          <a:solidFill>
+            <a:srgbClr val="5FE0C5"/>
+          </a:solidFill>
+          <a:ln/>
+        </p:spPr>
+      </p:sp>
+      <p:sp>
+        <p:nvSpPr>
+          <p:cNvPr id="20" name="Text 18"/>
+          <p:cNvSpPr/>
+          <p:nvPr/>
+        </p:nvSpPr>
+        <p:spPr>
+          <a:xfrm>
+            <a:off x="0" y="1783080"/>
+            <a:ext cx="12161520" cy="731520"/>
           </a:xfrm>
           <a:prstGeom prst="rect">
             <a:avLst/>
@@ -13255,63 +12456,21 @@
           <a:bodyPr wrap="square" lIns="0" tIns="0" rIns="0" bIns="0" rtlCol="0" anchor="ctr"/>
           <a:lstStyle/>
           <a:p>
-            <a:pPr marL="0" indent="0" algn="l">
-              <a:buNone/>
-            </a:pPr>
-            <a:r>
-              <a:rPr lang="en-US" sz="3360" b="1" dirty="0">
-                <a:solidFill>
-                  <a:srgbClr val="F2A93B"/>
+            <a:pPr algn="ctr" indent="0" marL="0">
+              <a:buNone/>
+            </a:pPr>
+            <a:r>
+              <a:rPr lang="en-US" sz="4320" b="1" dirty="0">
+                <a:solidFill>
+                  <a:srgbClr val="E5E9F0"/>
                 </a:solidFill>
                 <a:latin typeface="Courier New" pitchFamily="34" charset="0"/>
                 <a:ea typeface="Courier New" pitchFamily="34" charset="-122"/>
                 <a:cs typeface="Courier New" pitchFamily="34" charset="-120"/>
               </a:rPr>
-              <a:t>This isn't my merit</a:t>
-            </a:r>
-            <a:endParaRPr lang="en-US" sz="3360" dirty="0"/>
-          </a:p>
-        </p:txBody>
-      </p:sp>
-      <p:sp>
-        <p:nvSpPr>
-          <p:cNvPr id="20" name="Text 18"/>
-          <p:cNvSpPr/>
-          <p:nvPr/>
-        </p:nvSpPr>
-        <p:spPr>
-          <a:xfrm>
-            <a:off x="640080" y="1371600"/>
-            <a:ext cx="10881360" cy="731520"/>
-          </a:xfrm>
-          <a:prstGeom prst="rect">
-            <a:avLst/>
-          </a:prstGeom>
-          <a:noFill/>
-          <a:ln/>
-        </p:spPr>
-        <p:txBody>
-          <a:bodyPr wrap="square" lIns="0" tIns="0" rIns="0" bIns="0" rtlCol="0" anchor="ctr"/>
-          <a:lstStyle/>
-          <a:p>
-            <a:pPr marL="0" indent="0" algn="ctr">
-              <a:lnSpc>
-                <a:spcPct val="120000"/>
-              </a:lnSpc>
-              <a:buNone/>
-            </a:pPr>
-            <a:r>
-              <a:rPr lang="en-US" sz="1920" dirty="0">
-                <a:solidFill>
-                  <a:srgbClr val="B8C0D0"/>
-                </a:solidFill>
-                <a:latin typeface="Calibri" pitchFamily="34" charset="0"/>
-                <a:ea typeface="Calibri" pitchFamily="34" charset="-122"/>
-                <a:cs typeface="Calibri" pitchFamily="34" charset="-120"/>
-              </a:rPr>
-              <a:t>Everything in this series is built on the work of open-source projects and their communities. I only learned from them and shared what I built.</a:t>
-            </a:r>
-            <a:endParaRPr lang="en-US" sz="1920" dirty="0"/>
+              <a:t>Let's build Chapter 1.</a:t>
+            </a:r>
+            <a:endParaRPr lang="en-US" sz="4320" dirty="0"/>
           </a:p>
         </p:txBody>
       </p:sp>
@@ -13323,324 +12482,8 @@
         </p:nvSpPr>
         <p:spPr>
           <a:xfrm>
-            <a:off x="822960" y="2423160"/>
-            <a:ext cx="5029200" cy="2011680"/>
-          </a:xfrm>
-          <a:prstGeom prst="roundRect">
-            <a:avLst>
-              <a:gd name="adj" fmla="val 5455"/>
-            </a:avLst>
-          </a:prstGeom>
-          <a:solidFill>
-            <a:srgbClr val="121A2E"/>
-          </a:solidFill>
-          <a:ln w="19050">
-            <a:solidFill>
-              <a:srgbClr val="5FE0C5"/>
-            </a:solidFill>
-            <a:prstDash val="solid"/>
-          </a:ln>
-          <a:effectLst>
-            <a:outerShdw blurRad="101600" dist="38100" dir="2700000" algn="bl" rotWithShape="0">
-              <a:srgbClr val="000000">
-                <a:alpha val="25000"/>
-              </a:srgbClr>
-            </a:outerShdw>
-          </a:effectLst>
-        </p:spPr>
-        <p:txBody>
-          <a:bodyPr/>
-          <a:lstStyle/>
-          <a:p>
-            <a:endParaRPr lang="en-CA"/>
-          </a:p>
-        </p:txBody>
-      </p:sp>
-      <p:sp>
-        <p:nvSpPr>
-          <p:cNvPr id="22" name="Text 20"/>
-          <p:cNvSpPr/>
-          <p:nvPr/>
-        </p:nvSpPr>
-        <p:spPr>
-          <a:xfrm>
-            <a:off x="1143000" y="2697480"/>
-            <a:ext cx="4389120" cy="548640"/>
-          </a:xfrm>
-          <a:prstGeom prst="rect">
-            <a:avLst/>
-          </a:prstGeom>
-          <a:noFill/>
-          <a:ln/>
-        </p:spPr>
-        <p:txBody>
-          <a:bodyPr wrap="square" lIns="0" tIns="0" rIns="0" bIns="0" rtlCol="0" anchor="ctr"/>
-          <a:lstStyle/>
-          <a:p>
-            <a:pPr marL="0" indent="0">
-              <a:buNone/>
-            </a:pPr>
-            <a:r>
-              <a:rPr lang="en-US" sz="2640" b="1" dirty="0">
-                <a:solidFill>
-                  <a:srgbClr val="5FE0C5"/>
-                </a:solidFill>
-                <a:latin typeface="Courier New" pitchFamily="34" charset="0"/>
-                <a:ea typeface="Courier New" pitchFamily="34" charset="-122"/>
-                <a:cs typeface="Courier New" pitchFamily="34" charset="-120"/>
-              </a:rPr>
-              <a:t>Spring AI</a:t>
-            </a:r>
-            <a:endParaRPr lang="en-US" sz="2640" dirty="0"/>
-          </a:p>
-        </p:txBody>
-      </p:sp>
-      <p:sp>
-        <p:nvSpPr>
-          <p:cNvPr id="23" name="Text 21"/>
-          <p:cNvSpPr/>
-          <p:nvPr/>
-        </p:nvSpPr>
-        <p:spPr>
-          <a:xfrm>
-            <a:off x="1143000" y="3337560"/>
-            <a:ext cx="4389120" cy="457200"/>
-          </a:xfrm>
-          <a:prstGeom prst="rect">
-            <a:avLst/>
-          </a:prstGeom>
-          <a:noFill/>
-          <a:ln/>
-        </p:spPr>
-        <p:txBody>
-          <a:bodyPr wrap="square" lIns="0" tIns="0" rIns="0" bIns="0" rtlCol="0" anchor="ctr"/>
-          <a:lstStyle/>
-          <a:p>
-            <a:pPr marL="0" indent="0">
-              <a:buNone/>
-            </a:pPr>
-            <a:r>
-              <a:rPr lang="en-US" sz="1560" dirty="0">
-                <a:solidFill>
-                  <a:srgbClr val="E5E9F0"/>
-                </a:solidFill>
-                <a:latin typeface="Calibri" pitchFamily="34" charset="0"/>
-                <a:ea typeface="Calibri" pitchFamily="34" charset="-122"/>
-                <a:cs typeface="Calibri" pitchFamily="34" charset="-120"/>
-              </a:rPr>
-              <a:t>The AI integration layer for Spring</a:t>
-            </a:r>
-            <a:endParaRPr lang="en-US" sz="1560" dirty="0"/>
-          </a:p>
-        </p:txBody>
-      </p:sp>
-      <p:sp>
-        <p:nvSpPr>
-          <p:cNvPr id="24" name="Text 22"/>
-          <p:cNvSpPr/>
-          <p:nvPr/>
-        </p:nvSpPr>
-        <p:spPr>
-          <a:xfrm>
-            <a:off x="1143000" y="3840480"/>
-            <a:ext cx="4389120" cy="365760"/>
-          </a:xfrm>
-          <a:prstGeom prst="rect">
-            <a:avLst/>
-          </a:prstGeom>
-          <a:noFill/>
-          <a:ln/>
-        </p:spPr>
-        <p:txBody>
-          <a:bodyPr wrap="square" lIns="0" tIns="0" rIns="0" bIns="0" rtlCol="0" anchor="ctr"/>
-          <a:lstStyle/>
-          <a:p>
-            <a:pPr marL="0" indent="0">
-              <a:buNone/>
-            </a:pPr>
-            <a:r>
-              <a:rPr lang="en-US" sz="1440" dirty="0">
-                <a:solidFill>
-                  <a:srgbClr val="8B98AC"/>
-                </a:solidFill>
-                <a:latin typeface="Courier New" pitchFamily="34" charset="0"/>
-                <a:ea typeface="Courier New" pitchFamily="34" charset="-122"/>
-                <a:cs typeface="Courier New" pitchFamily="34" charset="-120"/>
-              </a:rPr>
-              <a:t>spring.io/projects/spring-ai</a:t>
-            </a:r>
-            <a:endParaRPr lang="en-US" sz="1440" dirty="0"/>
-          </a:p>
-        </p:txBody>
-      </p:sp>
-      <p:sp>
-        <p:nvSpPr>
-          <p:cNvPr id="25" name="Shape 23"/>
-          <p:cNvSpPr/>
-          <p:nvPr/>
-        </p:nvSpPr>
-        <p:spPr>
-          <a:xfrm>
-            <a:off x="6309360" y="2423160"/>
-            <a:ext cx="5029200" cy="2011680"/>
-          </a:xfrm>
-          <a:prstGeom prst="roundRect">
-            <a:avLst>
-              <a:gd name="adj" fmla="val 5455"/>
-            </a:avLst>
-          </a:prstGeom>
-          <a:solidFill>
-            <a:srgbClr val="121A2E"/>
-          </a:solidFill>
-          <a:ln w="19050">
-            <a:solidFill>
-              <a:srgbClr val="F2A93B"/>
-            </a:solidFill>
-            <a:prstDash val="solid"/>
-          </a:ln>
-          <a:effectLst>
-            <a:outerShdw blurRad="101600" dist="38100" dir="2700000" algn="bl" rotWithShape="0">
-              <a:srgbClr val="000000">
-                <a:alpha val="25000"/>
-              </a:srgbClr>
-            </a:outerShdw>
-          </a:effectLst>
-        </p:spPr>
-        <p:txBody>
-          <a:bodyPr/>
-          <a:lstStyle/>
-          <a:p>
-            <a:endParaRPr lang="en-CA"/>
-          </a:p>
-        </p:txBody>
-      </p:sp>
-      <p:sp>
-        <p:nvSpPr>
-          <p:cNvPr id="26" name="Text 24"/>
-          <p:cNvSpPr/>
-          <p:nvPr/>
-        </p:nvSpPr>
-        <p:spPr>
-          <a:xfrm>
-            <a:off x="6629400" y="2697480"/>
-            <a:ext cx="4389120" cy="548640"/>
-          </a:xfrm>
-          <a:prstGeom prst="rect">
-            <a:avLst/>
-          </a:prstGeom>
-          <a:noFill/>
-          <a:ln/>
-        </p:spPr>
-        <p:txBody>
-          <a:bodyPr wrap="square" lIns="0" tIns="0" rIns="0" bIns="0" rtlCol="0" anchor="ctr"/>
-          <a:lstStyle/>
-          <a:p>
-            <a:pPr marL="0" indent="0">
-              <a:buNone/>
-            </a:pPr>
-            <a:r>
-              <a:rPr lang="en-US" sz="2640" b="1" dirty="0">
-                <a:solidFill>
-                  <a:srgbClr val="F2A93B"/>
-                </a:solidFill>
-                <a:latin typeface="Courier New" pitchFamily="34" charset="0"/>
-                <a:ea typeface="Courier New" pitchFamily="34" charset="-122"/>
-                <a:cs typeface="Courier New" pitchFamily="34" charset="-120"/>
-              </a:rPr>
-              <a:t>Ollama</a:t>
-            </a:r>
-            <a:endParaRPr lang="en-US" sz="2640" dirty="0"/>
-          </a:p>
-        </p:txBody>
-      </p:sp>
-      <p:sp>
-        <p:nvSpPr>
-          <p:cNvPr id="27" name="Text 25"/>
-          <p:cNvSpPr/>
-          <p:nvPr/>
-        </p:nvSpPr>
-        <p:spPr>
-          <a:xfrm>
-            <a:off x="6629400" y="3337560"/>
-            <a:ext cx="4389120" cy="457200"/>
-          </a:xfrm>
-          <a:prstGeom prst="rect">
-            <a:avLst/>
-          </a:prstGeom>
-          <a:noFill/>
-          <a:ln/>
-        </p:spPr>
-        <p:txBody>
-          <a:bodyPr wrap="square" lIns="0" tIns="0" rIns="0" bIns="0" rtlCol="0" anchor="ctr"/>
-          <a:lstStyle/>
-          <a:p>
-            <a:pPr marL="0" indent="0">
-              <a:buNone/>
-            </a:pPr>
-            <a:r>
-              <a:rPr lang="en-US" sz="1560" dirty="0">
-                <a:solidFill>
-                  <a:srgbClr val="E5E9F0"/>
-                </a:solidFill>
-                <a:latin typeface="Calibri" pitchFamily="34" charset="0"/>
-                <a:ea typeface="Calibri" pitchFamily="34" charset="-122"/>
-                <a:cs typeface="Calibri" pitchFamily="34" charset="-120"/>
-              </a:rPr>
-              <a:t>Run open LLMs locally</a:t>
-            </a:r>
-            <a:endParaRPr lang="en-US" sz="1560" dirty="0"/>
-          </a:p>
-        </p:txBody>
-      </p:sp>
-      <p:sp>
-        <p:nvSpPr>
-          <p:cNvPr id="28" name="Text 26"/>
-          <p:cNvSpPr/>
-          <p:nvPr/>
-        </p:nvSpPr>
-        <p:spPr>
-          <a:xfrm>
-            <a:off x="6629400" y="3840480"/>
-            <a:ext cx="4389120" cy="365760"/>
-          </a:xfrm>
-          <a:prstGeom prst="rect">
-            <a:avLst/>
-          </a:prstGeom>
-          <a:noFill/>
-          <a:ln/>
-        </p:spPr>
-        <p:txBody>
-          <a:bodyPr wrap="square" lIns="0" tIns="0" rIns="0" bIns="0" rtlCol="0" anchor="ctr"/>
-          <a:lstStyle/>
-          <a:p>
-            <a:pPr marL="0" indent="0">
-              <a:buNone/>
-            </a:pPr>
-            <a:r>
-              <a:rPr lang="en-US" sz="1440" dirty="0">
-                <a:solidFill>
-                  <a:srgbClr val="8B98AC"/>
-                </a:solidFill>
-                <a:latin typeface="Courier New" pitchFamily="34" charset="0"/>
-                <a:ea typeface="Courier New" pitchFamily="34" charset="-122"/>
-                <a:cs typeface="Courier New" pitchFamily="34" charset="-120"/>
-              </a:rPr>
-              <a:t>ollama.com</a:t>
-            </a:r>
-            <a:endParaRPr lang="en-US" sz="1440" dirty="0"/>
-          </a:p>
-        </p:txBody>
-      </p:sp>
-      <p:sp>
-        <p:nvSpPr>
-          <p:cNvPr id="29" name="Shape 27"/>
-          <p:cNvSpPr/>
-          <p:nvPr/>
-        </p:nvSpPr>
-        <p:spPr>
-          <a:xfrm>
-            <a:off x="4251960" y="4892040"/>
-            <a:ext cx="3657600" cy="0"/>
+            <a:off x="4709160" y="2743200"/>
+            <a:ext cx="2743200" cy="0"/>
           </a:xfrm>
           <a:prstGeom prst="line">
             <a:avLst/>
@@ -13655,23 +12498,16 @@
             <a:prstDash val="solid"/>
           </a:ln>
         </p:spPr>
-        <p:txBody>
-          <a:bodyPr/>
-          <a:lstStyle/>
-          <a:p>
-            <a:endParaRPr lang="en-CA"/>
-          </a:p>
-        </p:txBody>
-      </p:sp>
-      <p:sp>
-        <p:nvSpPr>
-          <p:cNvPr id="30" name="Shape 28"/>
-          <p:cNvSpPr/>
-          <p:nvPr/>
-        </p:nvSpPr>
-        <p:spPr>
-          <a:xfrm>
-            <a:off x="4210812" y="4850892"/>
+      </p:sp>
+      <p:sp>
+        <p:nvSpPr>
+          <p:cNvPr id="22" name="Shape 20"/>
+          <p:cNvSpPr/>
+          <p:nvPr/>
+        </p:nvSpPr>
+        <p:spPr>
+          <a:xfrm>
+            <a:off x="4668012" y="2702052"/>
             <a:ext cx="82296" cy="82296"/>
           </a:xfrm>
           <a:prstGeom prst="ellipse">
@@ -13687,23 +12523,16 @@
             <a:prstDash val="solid"/>
           </a:ln>
         </p:spPr>
-        <p:txBody>
-          <a:bodyPr/>
-          <a:lstStyle/>
-          <a:p>
-            <a:endParaRPr lang="en-CA"/>
-          </a:p>
-        </p:txBody>
-      </p:sp>
-      <p:sp>
-        <p:nvSpPr>
-          <p:cNvPr id="31" name="Shape 29"/>
-          <p:cNvSpPr/>
-          <p:nvPr/>
-        </p:nvSpPr>
-        <p:spPr>
-          <a:xfrm>
-            <a:off x="6039612" y="4850892"/>
+      </p:sp>
+      <p:sp>
+        <p:nvSpPr>
+          <p:cNvPr id="23" name="Shape 21"/>
+          <p:cNvSpPr/>
+          <p:nvPr/>
+        </p:nvSpPr>
+        <p:spPr>
+          <a:xfrm>
+            <a:off x="6039612" y="2702052"/>
             <a:ext cx="82296" cy="82296"/>
           </a:xfrm>
           <a:prstGeom prst="ellipse">
@@ -13719,23 +12548,16 @@
             <a:prstDash val="solid"/>
           </a:ln>
         </p:spPr>
-        <p:txBody>
-          <a:bodyPr/>
-          <a:lstStyle/>
-          <a:p>
-            <a:endParaRPr lang="en-CA"/>
-          </a:p>
-        </p:txBody>
-      </p:sp>
-      <p:sp>
-        <p:nvSpPr>
-          <p:cNvPr id="32" name="Shape 30"/>
-          <p:cNvSpPr/>
-          <p:nvPr/>
-        </p:nvSpPr>
-        <p:spPr>
-          <a:xfrm>
-            <a:off x="7868412" y="4850892"/>
+      </p:sp>
+      <p:sp>
+        <p:nvSpPr>
+          <p:cNvPr id="24" name="Shape 22"/>
+          <p:cNvSpPr/>
+          <p:nvPr/>
+        </p:nvSpPr>
+        <p:spPr>
+          <a:xfrm>
+            <a:off x="7411212" y="2702052"/>
             <a:ext cx="82296" cy="82296"/>
           </a:xfrm>
           <a:prstGeom prst="ellipse">
@@ -13751,23 +12573,16 @@
             <a:prstDash val="solid"/>
           </a:ln>
         </p:spPr>
-        <p:txBody>
-          <a:bodyPr/>
-          <a:lstStyle/>
-          <a:p>
-            <a:endParaRPr lang="en-CA"/>
-          </a:p>
-        </p:txBody>
-      </p:sp>
-      <p:sp>
-        <p:nvSpPr>
-          <p:cNvPr id="33" name="Text 31"/>
-          <p:cNvSpPr/>
-          <p:nvPr/>
-        </p:nvSpPr>
-        <p:spPr>
-          <a:xfrm>
-            <a:off x="0" y="5120640"/>
+      </p:sp>
+      <p:sp>
+        <p:nvSpPr>
+          <p:cNvPr id="25" name="Text 23"/>
+          <p:cNvSpPr/>
+          <p:nvPr/>
+        </p:nvSpPr>
+        <p:spPr>
+          <a:xfrm>
+            <a:off x="0" y="3017520"/>
             <a:ext cx="12161520" cy="457200"/>
           </a:xfrm>
           <a:prstGeom prst="rect">
@@ -13780,33 +12595,75 @@
           <a:bodyPr wrap="square" lIns="0" tIns="0" rIns="0" bIns="0" rtlCol="0" anchor="ctr"/>
           <a:lstStyle/>
           <a:p>
-            <a:pPr marL="0" indent="0" algn="ctr">
-              <a:buNone/>
-            </a:pPr>
-            <a:r>
-              <a:rPr lang="en-US" sz="1680" dirty="0">
-                <a:solidFill>
-                  <a:srgbClr val="E5E9F0"/>
+            <a:pPr algn="ctr" indent="0" marL="0">
+              <a:buNone/>
+            </a:pPr>
+            <a:r>
+              <a:rPr lang="en-US" sz="2040" b="1" dirty="0">
+                <a:solidFill>
+                  <a:srgbClr val="F2A93B"/>
                 </a:solidFill>
                 <a:latin typeface="Calibri" pitchFamily="34" charset="0"/>
                 <a:ea typeface="Calibri" pitchFamily="34" charset="-122"/>
                 <a:cs typeface="Calibri" pitchFamily="34" charset="-120"/>
               </a:rPr>
-              <a:t>Shared with gratitude — all credit to their maintainers &amp; contributors.</a:t>
-            </a:r>
-            <a:endParaRPr lang="en-US" sz="1680" dirty="0"/>
-          </a:p>
-        </p:txBody>
-      </p:sp>
-      <p:sp>
-        <p:nvSpPr>
-          <p:cNvPr id="34" name="Text 32"/>
-          <p:cNvSpPr/>
-          <p:nvPr/>
-        </p:nvSpPr>
-        <p:spPr>
-          <a:xfrm>
-            <a:off x="0" y="5623560"/>
+              <a:t>Subscribe</a:t>
+            </a:r>
+            <a:pPr algn="ctr" indent="0" marL="0">
+              <a:buNone/>
+            </a:pPr>
+            <a:r>
+              <a:rPr lang="en-US" sz="2040" dirty="0">
+                <a:solidFill>
+                  <a:srgbClr val="B8C0D0"/>
+                </a:solidFill>
+                <a:latin typeface="Calibri" pitchFamily="34" charset="0"/>
+                <a:ea typeface="Calibri" pitchFamily="34" charset="-122"/>
+                <a:cs typeface="Calibri" pitchFamily="34" charset="-120"/>
+              </a:rPr>
+              <a:t>  for every chapter  ·  </a:t>
+            </a:r>
+            <a:pPr algn="ctr" indent="0" marL="0">
+              <a:buNone/>
+            </a:pPr>
+            <a:r>
+              <a:rPr lang="en-US" sz="2040" b="1" dirty="0">
+                <a:solidFill>
+                  <a:srgbClr val="5FE0C5"/>
+                </a:solidFill>
+                <a:latin typeface="Calibri" pitchFamily="34" charset="0"/>
+                <a:ea typeface="Calibri" pitchFamily="34" charset="-122"/>
+                <a:cs typeface="Calibri" pitchFamily="34" charset="-120"/>
+              </a:rPr>
+              <a:t>Star the repo</a:t>
+            </a:r>
+            <a:pPr algn="ctr" indent="0" marL="0">
+              <a:buNone/>
+            </a:pPr>
+            <a:r>
+              <a:rPr lang="en-US" sz="2040" dirty="0">
+                <a:solidFill>
+                  <a:srgbClr val="B8C0D0"/>
+                </a:solidFill>
+                <a:latin typeface="Calibri" pitchFamily="34" charset="0"/>
+                <a:ea typeface="Calibri" pitchFamily="34" charset="-122"/>
+                <a:cs typeface="Calibri" pitchFamily="34" charset="-120"/>
+              </a:rPr>
+              <a:t>  on GitHub</a:t>
+            </a:r>
+            <a:endParaRPr lang="en-US" sz="2040" dirty="0"/>
+          </a:p>
+        </p:txBody>
+      </p:sp>
+      <p:sp>
+        <p:nvSpPr>
+          <p:cNvPr id="26" name="Text 24"/>
+          <p:cNvSpPr/>
+          <p:nvPr/>
+        </p:nvSpPr>
+        <p:spPr>
+          <a:xfrm>
+            <a:off x="0" y="3657600"/>
             <a:ext cx="12161520" cy="365760"/>
           </a:xfrm>
           <a:prstGeom prst="rect">
@@ -13819,11 +12676,11 @@
           <a:bodyPr wrap="square" lIns="0" tIns="0" rIns="0" bIns="0" rtlCol="0" anchor="ctr"/>
           <a:lstStyle/>
           <a:p>
-            <a:pPr marL="0" indent="0" algn="ctr">
-              <a:buNone/>
-            </a:pPr>
-            <a:r>
-              <a:rPr lang="en-US" sz="1440" dirty="0">
+            <a:pPr algn="ctr" indent="0" marL="0">
+              <a:buNone/>
+            </a:pPr>
+            <a:r>
+              <a:rPr lang="en-US" sz="1800" dirty="0">
                 <a:solidFill>
                   <a:srgbClr val="8B98AC"/>
                 </a:solidFill>
@@ -13833,7 +12690,46 @@
               </a:rPr>
               <a:t>github.com/balajich/spring-ai-with-llama</a:t>
             </a:r>
-            <a:endParaRPr lang="en-US" sz="1440" dirty="0"/>
+            <a:endParaRPr lang="en-US" sz="1800" dirty="0"/>
+          </a:p>
+        </p:txBody>
+      </p:sp>
+      <p:sp>
+        <p:nvSpPr>
+          <p:cNvPr id="27" name="Text 25"/>
+          <p:cNvSpPr/>
+          <p:nvPr/>
+        </p:nvSpPr>
+        <p:spPr>
+          <a:xfrm>
+            <a:off x="0" y="4114800"/>
+            <a:ext cx="12161520" cy="365760"/>
+          </a:xfrm>
+          <a:prstGeom prst="rect">
+            <a:avLst/>
+          </a:prstGeom>
+          <a:noFill/>
+          <a:ln/>
+        </p:spPr>
+        <p:txBody>
+          <a:bodyPr wrap="square" lIns="0" tIns="0" rIns="0" bIns="0" rtlCol="0" anchor="ctr"/>
+          <a:lstStyle/>
+          <a:p>
+            <a:pPr algn="ctr" indent="0" marL="0">
+              <a:buNone/>
+            </a:pPr>
+            <a:r>
+              <a:rPr lang="en-US" sz="1560" dirty="0">
+                <a:solidFill>
+                  <a:srgbClr val="5B6478"/>
+                </a:solidFill>
+                <a:latin typeface="Courier New" pitchFamily="34" charset="0"/>
+                <a:ea typeface="Courier New" pitchFamily="34" charset="-122"/>
+                <a:cs typeface="Courier New" pitchFamily="34" charset="-120"/>
+              </a:rPr>
+              <a:t>prompttoapps.com</a:t>
+            </a:r>
+            <a:endParaRPr lang="en-US" sz="1560" dirty="0"/>
           </a:p>
         </p:txBody>
       </p:sp>
@@ -14138,319 +13034,4 @@
     </a:ext>
   </a:extLst>
 </a:theme>
-</file>
-
-<file path=ppt/theme/theme2.xml><?xml version="1.0" encoding="utf-8"?>
-<a:theme xmlns:a="http://schemas.openxmlformats.org/drawingml/2006/main" name="Office Theme">
-  <a:themeElements>
-    <a:clrScheme name="Office">
-      <a:dk1>
-        <a:sysClr val="windowText" lastClr="000000"/>
-      </a:dk1>
-      <a:lt1>
-        <a:sysClr val="window" lastClr="FFFFFF"/>
-      </a:lt1>
-      <a:dk2>
-        <a:srgbClr val="0E2841"/>
-      </a:dk2>
-      <a:lt2>
-        <a:srgbClr val="E8E8E8"/>
-      </a:lt2>
-      <a:accent1>
-        <a:srgbClr val="156082"/>
-      </a:accent1>
-      <a:accent2>
-        <a:srgbClr val="E97132"/>
-      </a:accent2>
-      <a:accent3>
-        <a:srgbClr val="196B24"/>
-      </a:accent3>
-      <a:accent4>
-        <a:srgbClr val="0F9ED5"/>
-      </a:accent4>
-      <a:accent5>
-        <a:srgbClr val="A02B93"/>
-      </a:accent5>
-      <a:accent6>
-        <a:srgbClr val="4EA72E"/>
-      </a:accent6>
-      <a:hlink>
-        <a:srgbClr val="467886"/>
-      </a:hlink>
-      <a:folHlink>
-        <a:srgbClr val="96607D"/>
-      </a:folHlink>
-    </a:clrScheme>
-    <a:fontScheme name="Office">
-      <a:majorFont>
-        <a:latin typeface="Aptos Display" panose="02110004020202020204"/>
-        <a:ea typeface=""/>
-        <a:cs typeface=""/>
-        <a:font script="Jpan" typeface="游ゴシック Light"/>
-        <a:font script="Hang" typeface="맑은 고딕"/>
-        <a:font script="Hans" typeface="等线 Light"/>
-        <a:font script="Hant" typeface="新細明體"/>
-        <a:font script="Arab" typeface="Times New Roman"/>
-        <a:font script="Hebr" typeface="Times New Roman"/>
-        <a:font script="Thai" typeface="Angsana New"/>
-        <a:font script="Ethi" typeface="Nyala"/>
-        <a:font script="Beng" typeface="Vrinda"/>
-        <a:font script="Gujr" typeface="Shruti"/>
-        <a:font script="Khmr" typeface="MoolBoran"/>
-        <a:font script="Knda" typeface="Tunga"/>
-        <a:font script="Guru" typeface="Raavi"/>
-        <a:font script="Cans" typeface="Euphemia"/>
-        <a:font script="Cher" typeface="Plantagenet Cherokee"/>
-        <a:font script="Yiii" typeface="Microsoft Yi Baiti"/>
-        <a:font script="Tibt" typeface="Microsoft Himalaya"/>
-        <a:font script="Thaa" typeface="MV Boli"/>
-        <a:font script="Deva" typeface="Mangal"/>
-        <a:font script="Telu" typeface="Gautami"/>
-        <a:font script="Taml" typeface="Latha"/>
-        <a:font script="Syrc" typeface="Estrangelo Edessa"/>
-        <a:font script="Orya" typeface="Kalinga"/>
-        <a:font script="Mlym" typeface="Kartika"/>
-        <a:font script="Laoo" typeface="DokChampa"/>
-        <a:font script="Sinh" typeface="Iskoola Pota"/>
-        <a:font script="Mong" typeface="Mongolian Baiti"/>
-        <a:font script="Viet" typeface="Times New Roman"/>
-        <a:font script="Uigh" typeface="Microsoft Uighur"/>
-        <a:font script="Geor" typeface="Sylfaen"/>
-        <a:font script="Armn" typeface="Arial"/>
-        <a:font script="Bugi" typeface="Leelawadee UI"/>
-        <a:font script="Bopo" typeface="Microsoft JhengHei"/>
-        <a:font script="Java" typeface="Javanese Text"/>
-        <a:font script="Lisu" typeface="Segoe UI"/>
-        <a:font script="Mymr" typeface="Myanmar Text"/>
-        <a:font script="Nkoo" typeface="Ebrima"/>
-        <a:font script="Olck" typeface="Nirmala UI"/>
-        <a:font script="Osma" typeface="Ebrima"/>
-        <a:font script="Phag" typeface="Phagspa"/>
-        <a:font script="Syrn" typeface="Estrangelo Edessa"/>
-        <a:font script="Syrj" typeface="Estrangelo Edessa"/>
-        <a:font script="Syre" typeface="Estrangelo Edessa"/>
-        <a:font script="Sora" typeface="Nirmala UI"/>
-        <a:font script="Tale" typeface="Microsoft Tai Le"/>
-        <a:font script="Talu" typeface="Microsoft New Tai Lue"/>
-        <a:font script="Tfng" typeface="Ebrima"/>
-      </a:majorFont>
-      <a:minorFont>
-        <a:latin typeface="Aptos" panose="02110004020202020204"/>
-        <a:ea typeface=""/>
-        <a:cs typeface=""/>
-        <a:font script="Jpan" typeface="游ゴシック"/>
-        <a:font script="Hang" typeface="맑은 고딕"/>
-        <a:font script="Hans" typeface="等线"/>
-        <a:font script="Hant" typeface="新細明體"/>
-        <a:font script="Arab" typeface="Arial"/>
-        <a:font script="Hebr" typeface="Arial"/>
-        <a:font script="Thai" typeface="Cordia New"/>
-        <a:font script="Ethi" typeface="Nyala"/>
-        <a:font script="Beng" typeface="Vrinda"/>
-        <a:font script="Gujr" typeface="Shruti"/>
-        <a:font script="Khmr" typeface="DaunPenh"/>
-        <a:font script="Knda" typeface="Tunga"/>
-        <a:font script="Guru" typeface="Raavi"/>
-        <a:font script="Cans" typeface="Euphemia"/>
-        <a:font script="Cher" typeface="Plantagenet Cherokee"/>
-        <a:font script="Yiii" typeface="Microsoft Yi Baiti"/>
-        <a:font script="Tibt" typeface="Microsoft Himalaya"/>
-        <a:font script="Thaa" typeface="MV Boli"/>
-        <a:font script="Deva" typeface="Mangal"/>
-        <a:font script="Telu" typeface="Gautami"/>
-        <a:font script="Taml" typeface="Latha"/>
-        <a:font script="Syrc" typeface="Estrangelo Edessa"/>
-        <a:font script="Orya" typeface="Kalinga"/>
-        <a:font script="Mlym" typeface="Kartika"/>
-        <a:font script="Laoo" typeface="DokChampa"/>
-        <a:font script="Sinh" typeface="Iskoola Pota"/>
-        <a:font script="Mong" typeface="Mongolian Baiti"/>
-        <a:font script="Viet" typeface="Arial"/>
-        <a:font script="Uigh" typeface="Microsoft Uighur"/>
-        <a:font script="Geor" typeface="Sylfaen"/>
-        <a:font script="Armn" typeface="Arial"/>
-        <a:font script="Bugi" typeface="Leelawadee UI"/>
-        <a:font script="Bopo" typeface="Microsoft JhengHei"/>
-        <a:font script="Java" typeface="Javanese Text"/>
-        <a:font script="Lisu" typeface="Segoe UI"/>
-        <a:font script="Mymr" typeface="Myanmar Text"/>
-        <a:font script="Nkoo" typeface="Ebrima"/>
-        <a:font script="Olck" typeface="Nirmala UI"/>
-        <a:font script="Osma" typeface="Ebrima"/>
-        <a:font script="Phag" typeface="Phagspa"/>
-        <a:font script="Syrn" typeface="Estrangelo Edessa"/>
-        <a:font script="Syrj" typeface="Estrangelo Edessa"/>
-        <a:font script="Syre" typeface="Estrangelo Edessa"/>
-        <a:font script="Sora" typeface="Nirmala UI"/>
-        <a:font script="Tale" typeface="Microsoft Tai Le"/>
-        <a:font script="Talu" typeface="Microsoft New Tai Lue"/>
-        <a:font script="Tfng" typeface="Ebrima"/>
-      </a:minorFont>
-    </a:fontScheme>
-    <a:fmtScheme name="Office">
-      <a:fillStyleLst>
-        <a:solidFill>
-          <a:schemeClr val="phClr"/>
-        </a:solidFill>
-        <a:gradFill rotWithShape="1">
-          <a:gsLst>
-            <a:gs pos="0">
-              <a:schemeClr val="phClr">
-                <a:lumMod val="110000"/>
-                <a:satMod val="105000"/>
-                <a:tint val="67000"/>
-              </a:schemeClr>
-            </a:gs>
-            <a:gs pos="50000">
-              <a:schemeClr val="phClr">
-                <a:lumMod val="105000"/>
-                <a:satMod val="103000"/>
-                <a:tint val="73000"/>
-              </a:schemeClr>
-            </a:gs>
-            <a:gs pos="100000">
-              <a:schemeClr val="phClr">
-                <a:lumMod val="105000"/>
-                <a:satMod val="109000"/>
-                <a:tint val="81000"/>
-              </a:schemeClr>
-            </a:gs>
-          </a:gsLst>
-          <a:lin ang="5400000" scaled="0"/>
-        </a:gradFill>
-        <a:gradFill rotWithShape="1">
-          <a:gsLst>
-            <a:gs pos="0">
-              <a:schemeClr val="phClr">
-                <a:satMod val="103000"/>
-                <a:lumMod val="102000"/>
-                <a:tint val="94000"/>
-              </a:schemeClr>
-            </a:gs>
-            <a:gs pos="50000">
-              <a:schemeClr val="phClr">
-                <a:satMod val="110000"/>
-                <a:lumMod val="100000"/>
-                <a:shade val="100000"/>
-              </a:schemeClr>
-            </a:gs>
-            <a:gs pos="100000">
-              <a:schemeClr val="phClr">
-                <a:lumMod val="99000"/>
-                <a:satMod val="120000"/>
-                <a:shade val="78000"/>
-              </a:schemeClr>
-            </a:gs>
-          </a:gsLst>
-          <a:lin ang="5400000" scaled="0"/>
-        </a:gradFill>
-      </a:fillStyleLst>
-      <a:lnStyleLst>
-        <a:ln w="12700" cap="flat" cmpd="sng" algn="ctr">
-          <a:solidFill>
-            <a:schemeClr val="phClr"/>
-          </a:solidFill>
-          <a:prstDash val="solid"/>
-          <a:miter lim="800000"/>
-        </a:ln>
-        <a:ln w="19050" cap="flat" cmpd="sng" algn="ctr">
-          <a:solidFill>
-            <a:schemeClr val="phClr"/>
-          </a:solidFill>
-          <a:prstDash val="solid"/>
-          <a:miter lim="800000"/>
-        </a:ln>
-        <a:ln w="25400" cap="flat" cmpd="sng" algn="ctr">
-          <a:solidFill>
-            <a:schemeClr val="phClr"/>
-          </a:solidFill>
-          <a:prstDash val="solid"/>
-          <a:miter lim="800000"/>
-        </a:ln>
-      </a:lnStyleLst>
-      <a:effectStyleLst>
-        <a:effectStyle>
-          <a:effectLst/>
-        </a:effectStyle>
-        <a:effectStyle>
-          <a:effectLst/>
-        </a:effectStyle>
-        <a:effectStyle>
-          <a:effectLst>
-            <a:outerShdw blurRad="57150" dist="19050" dir="5400000" algn="ctr" rotWithShape="0">
-              <a:srgbClr val="000000">
-                <a:alpha val="63000"/>
-              </a:srgbClr>
-            </a:outerShdw>
-          </a:effectLst>
-        </a:effectStyle>
-      </a:effectStyleLst>
-      <a:bgFillStyleLst>
-        <a:solidFill>
-          <a:schemeClr val="phClr"/>
-        </a:solidFill>
-        <a:solidFill>
-          <a:schemeClr val="phClr">
-            <a:tint val="95000"/>
-            <a:satMod val="170000"/>
-          </a:schemeClr>
-        </a:solidFill>
-        <a:gradFill rotWithShape="1">
-          <a:gsLst>
-            <a:gs pos="0">
-              <a:schemeClr val="phClr">
-                <a:tint val="93000"/>
-                <a:satMod val="150000"/>
-                <a:shade val="98000"/>
-                <a:lumMod val="102000"/>
-              </a:schemeClr>
-            </a:gs>
-            <a:gs pos="50000">
-              <a:schemeClr val="phClr">
-                <a:tint val="98000"/>
-                <a:satMod val="130000"/>
-                <a:shade val="90000"/>
-                <a:lumMod val="103000"/>
-              </a:schemeClr>
-            </a:gs>
-            <a:gs pos="100000">
-              <a:schemeClr val="phClr">
-                <a:shade val="63000"/>
-                <a:satMod val="120000"/>
-              </a:schemeClr>
-            </a:gs>
-          </a:gsLst>
-          <a:lin ang="5400000" scaled="0"/>
-        </a:gradFill>
-      </a:bgFillStyleLst>
-    </a:fmtScheme>
-  </a:themeElements>
-  <a:objectDefaults>
-    <a:lnDef>
-      <a:spPr/>
-      <a:bodyPr/>
-      <a:lstStyle/>
-      <a:style>
-        <a:lnRef idx="2">
-          <a:schemeClr val="accent1"/>
-        </a:lnRef>
-        <a:fillRef idx="0">
-          <a:schemeClr val="accent1"/>
-        </a:fillRef>
-        <a:effectRef idx="1">
-          <a:schemeClr val="accent1"/>
-        </a:effectRef>
-        <a:fontRef idx="minor">
-          <a:schemeClr val="tx1"/>
-        </a:fontRef>
-      </a:style>
-    </a:lnDef>
-  </a:objectDefaults>
-  <a:extraClrSchemeLst/>
-  <a:extLst>
-    <a:ext uri="{05A4C25C-085E-4340-85A3-A5531E510DB2}">
-      <thm15:themeFamily xmlns:thm15="http://schemas.microsoft.com/office/thememl/2012/main" name="Office Theme" id="{2E142A2C-CD16-42D6-873A-C26D2A0506FA}" vid="{1BDDFF52-6CD6-40A5-AB3C-68EB2F1E4D0A}"/>
-    </a:ext>
-  </a:extLst>
-</a:theme>
 </file>
--- a/slides/00-intro-series-overview.pptx
+++ b/slides/00-intro-series-overview.pptx
@@ -4,6 +4,9 @@
   <p:sldMasterIdLst>
     <p:sldMasterId id="2147483648" r:id="rId1"/>
   </p:sldMasterIdLst>
+  <p:notesMasterIdLst>
+    <p:notesMasterId r:id="rId13"/>
+  </p:notesMasterIdLst>
   <p:sldIdLst>
     <p:sldId id="256" r:id="rId2"/>
     <p:sldId id="257" r:id="rId3"/>
@@ -13,12 +16,10 @@
     <p:sldId id="261" r:id="rId7"/>
     <p:sldId id="262" r:id="rId8"/>
     <p:sldId id="263" r:id="rId9"/>
-    <p:sldId id="264" r:id="rId10"/>
-    <p:sldId id="265" r:id="rId11"/>
+    <p:sldId id="265" r:id="rId10"/>
+    <p:sldId id="266" r:id="rId11"/>
+    <p:sldId id="264" r:id="rId12"/>
   </p:sldIdLst>
-  <p:notesMasterIdLst>
-    <p:notesMasterId r:id="rId12"/>
-  </p:notesMasterIdLst>
   <p:sldSz cx="12192000" cy="6858000"/>
   <p:notesSz cx="6858000" cy="12192000"/>
   <p:defaultTextStyle>
@@ -113,6 +114,11 @@
       </a:defRPr>
     </a:lvl9pPr>
   </p:defaultTextStyle>
+  <p:extLst>
+    <p:ext uri="{EFAFB233-063F-42B5-8137-9DF3F51BA10A}">
+      <p15:sldGuideLst xmlns:p15="http://schemas.microsoft.com/office/powerpoint/2012/main"/>
+    </p:ext>
+  </p:extLst>
 </p:presentation>
 </file>
 
@@ -138,234 +144,10 @@
           <a:chExt cx="0" cy="0"/>
         </a:xfrm>
       </p:grpSpPr>
-      <p:sp>
-        <p:nvSpPr>
-          <p:cNvPr id="2" name="Header Placeholder 1"/>
-          <p:cNvSpPr>
-            <a:spLocks noGrp="1"/>
-          </p:cNvSpPr>
-          <p:nvPr>
-            <p:ph type="hdr" sz="quarter"/>
-          </p:nvPr>
-        </p:nvSpPr>
-        <p:spPr>
-          <a:xfrm>
-            <a:off x="0" y="0"/>
-            <a:ext cx="2971800" cy="458788"/>
-          </a:xfrm>
-          <a:prstGeom prst="rect">
-            <a:avLst/>
-          </a:prstGeom>
-        </p:spPr>
-        <p:txBody>
-          <a:bodyPr vert="horz" lIns="91440" tIns="45720" rIns="91440" bIns="45720" rtlCol="0"/>
-          <a:lstStyle>
-            <a:lvl1pPr algn="l">
-              <a:defRPr sz="1200"/>
-            </a:lvl1pPr>
-          </a:lstStyle>
-          <a:p>
-            <a:endParaRPr lang="en-US"/>
-          </a:p>
-        </p:txBody>
-      </p:sp>
-      <p:sp>
-        <p:nvSpPr>
-          <p:cNvPr id="3" name="Date Placeholder 2"/>
-          <p:cNvSpPr>
-            <a:spLocks noGrp="1"/>
-          </p:cNvSpPr>
-          <p:nvPr>
-            <p:ph type="dt" idx="1"/>
-          </p:nvPr>
-        </p:nvSpPr>
-        <p:spPr>
-          <a:xfrm>
-            <a:off x="3884613" y="0"/>
-            <a:ext cx="2971800" cy="458788"/>
-          </a:xfrm>
-          <a:prstGeom prst="rect">
-            <a:avLst/>
-          </a:prstGeom>
-        </p:spPr>
-        <p:txBody>
-          <a:bodyPr vert="horz" lIns="91440" tIns="45720" rIns="91440" bIns="45720" rtlCol="0"/>
-          <a:lstStyle>
-            <a:lvl1pPr algn="r">
-              <a:defRPr sz="1200"/>
-            </a:lvl1pPr>
-          </a:lstStyle>
-          <a:p>
-            <a:fld id="{5282F153-3F37-0F45-9E97-73ACFA13230C}" type="datetimeFigureOut">
-              <a:rPr lang="en-US"/>
-              <a:t>7/23/19</a:t>
-            </a:fld>
-            <a:endParaRPr lang="en-US"/>
-          </a:p>
-        </p:txBody>
-      </p:sp>
-      <p:sp>
-        <p:nvSpPr>
-          <p:cNvPr id="4" name="Slide Image Placeholder 3"/>
-          <p:cNvSpPr>
-            <a:spLocks noGrp="1" noRot="1" noChangeAspect="1"/>
-          </p:cNvSpPr>
-          <p:nvPr>
-            <p:ph type="sldImg" idx="2"/>
-          </p:nvPr>
-        </p:nvSpPr>
-        <p:spPr>
-          <a:xfrm>
-            <a:off x="685800" y="1143000"/>
-            <a:ext cx="5486400" cy="3086100"/>
-          </a:xfrm>
-          <a:prstGeom prst="rect">
-            <a:avLst/>
-          </a:prstGeom>
-          <a:noFill/>
-          <a:ln w="12700">
-            <a:solidFill>
-              <a:prstClr val="black"/>
-            </a:solidFill>
-          </a:ln>
-        </p:spPr>
-        <p:txBody>
-          <a:bodyPr vert="horz" lIns="91440" tIns="45720" rIns="91440" bIns="45720" rtlCol="0" anchor="ctr"/>
-          <a:lstStyle/>
-          <a:p>
-            <a:endParaRPr lang="en-US"/>
-          </a:p>
-        </p:txBody>
-      </p:sp>
-      <p:sp>
-        <p:nvSpPr>
-          <p:cNvPr id="5" name="Notes Placeholder 4"/>
-          <p:cNvSpPr>
-            <a:spLocks noGrp="1"/>
-          </p:cNvSpPr>
-          <p:nvPr>
-            <p:ph type="body" sz="quarter" idx="3"/>
-          </p:nvPr>
-        </p:nvSpPr>
-        <p:spPr>
-          <a:xfrm>
-            <a:off x="685800" y="4400550"/>
-            <a:ext cx="5486400" cy="3600450"/>
-          </a:xfrm>
-          <a:prstGeom prst="rect">
-            <a:avLst/>
-          </a:prstGeom>
-        </p:spPr>
-        <p:txBody>
-          <a:bodyPr vert="horz" lIns="91440" tIns="45720" rIns="91440" bIns="45720" rtlCol="0"/>
-          <a:lstStyle/>
-          <a:p>
-            <a:pPr lvl="0"/>
-            <a:r>
-              <a:rPr lang="en-US"/>
-              <a:t>Click to edit Master text styles</a:t>
-            </a:r>
-          </a:p>
-          <a:p>
-            <a:pPr lvl="1"/>
-            <a:r>
-              <a:rPr lang="en-US"/>
-              <a:t>Second level</a:t>
-            </a:r>
-          </a:p>
-          <a:p>
-            <a:pPr lvl="2"/>
-            <a:r>
-              <a:rPr lang="en-US"/>
-              <a:t>Third level</a:t>
-            </a:r>
-          </a:p>
-          <a:p>
-            <a:pPr lvl="3"/>
-            <a:r>
-              <a:rPr lang="en-US"/>
-              <a:t>Fourth level</a:t>
-            </a:r>
-          </a:p>
-          <a:p>
-            <a:pPr lvl="4"/>
-            <a:r>
-              <a:rPr lang="en-US"/>
-              <a:t>Fifth level</a:t>
-            </a:r>
-          </a:p>
-        </p:txBody>
-      </p:sp>
-      <p:sp>
-        <p:nvSpPr>
-          <p:cNvPr id="6" name="Footer Placeholder 5"/>
-          <p:cNvSpPr>
-            <a:spLocks noGrp="1"/>
-          </p:cNvSpPr>
-          <p:nvPr>
-            <p:ph type="ftr" sz="quarter" idx="4"/>
-          </p:nvPr>
-        </p:nvSpPr>
-        <p:spPr>
-          <a:xfrm>
-            <a:off x="0" y="8685213"/>
-            <a:ext cx="2971800" cy="458787"/>
-          </a:xfrm>
-          <a:prstGeom prst="rect">
-            <a:avLst/>
-          </a:prstGeom>
-        </p:spPr>
-        <p:txBody>
-          <a:bodyPr vert="horz" lIns="91440" tIns="45720" rIns="91440" bIns="45720" rtlCol="0" anchor="b"/>
-          <a:lstStyle>
-            <a:lvl1pPr algn="l">
-              <a:defRPr sz="1200"/>
-            </a:lvl1pPr>
-          </a:lstStyle>
-          <a:p>
-            <a:endParaRPr lang="en-US"/>
-          </a:p>
-        </p:txBody>
-      </p:sp>
-      <p:sp>
-        <p:nvSpPr>
-          <p:cNvPr id="7" name="Slide Number Placeholder 6"/>
-          <p:cNvSpPr>
-            <a:spLocks noGrp="1"/>
-          </p:cNvSpPr>
-          <p:nvPr>
-            <p:ph type="sldNum" sz="quarter" idx="5"/>
-          </p:nvPr>
-        </p:nvSpPr>
-        <p:spPr>
-          <a:xfrm>
-            <a:off x="3884613" y="8685213"/>
-            <a:ext cx="2971800" cy="458787"/>
-          </a:xfrm>
-          <a:prstGeom prst="rect">
-            <a:avLst/>
-          </a:prstGeom>
-        </p:spPr>
-        <p:txBody>
-          <a:bodyPr vert="horz" lIns="91440" tIns="45720" rIns="91440" bIns="45720" rtlCol="0" anchor="b"/>
-          <a:lstStyle>
-            <a:lvl1pPr algn="r">
-              <a:defRPr sz="1200"/>
-            </a:lvl1pPr>
-          </a:lstStyle>
-          <a:p>
-            <a:fld id="{CE5E9CC1-C706-0F49-92D6-E571CC5EEA8F}" type="slidenum">
-              <a:rPr lang="en-US"/>
-              <a:t>‹#›</a:t>
-            </a:fld>
-            <a:endParaRPr lang="en-US"/>
-          </a:p>
-        </p:txBody>
-      </p:sp>
     </p:spTree>
     <p:extLst>
       <p:ext uri="{BB962C8B-B14F-4D97-AF65-F5344CB8AC3E}">
-        <p14:creationId xmlns:p14="http://schemas.microsoft.com/office/powerpoint/2010/main" val="1024086991"/>
+        <p14:creationId xmlns:p14="http://schemas.microsoft.com/office/powerpoint/2010/main" val="821127359"/>
       </p:ext>
     </p:extLst>
   </p:cSld>
@@ -509,10 +291,6 @@
           <a:bodyPr/>
           <a:lstStyle/>
           <a:p>
-            <a:r>
-              <a:rPr lang="en-US" dirty="0"/>
-              <a:t/>
-            </a:r>
             <a:endParaRPr lang="en-US" dirty="0"/>
           </a:p>
         </p:txBody>
@@ -597,10 +375,6 @@
           <a:bodyPr/>
           <a:lstStyle/>
           <a:p>
-            <a:r>
-              <a:rPr lang="en-US" dirty="0"/>
-              <a:t/>
-            </a:r>
             <a:endParaRPr lang="en-US" dirty="0"/>
           </a:p>
         </p:txBody>
@@ -623,6 +397,90 @@
             <a:fld id="{F7021451-1387-4CA6-816F-3879F97B5CBC}" type="slidenum">
               <a:rPr lang="en-US"/>
               <a:t>10</a:t>
+            </a:fld>
+            <a:endParaRPr lang="en-US"/>
+          </a:p>
+        </p:txBody>
+      </p:sp>
+    </p:spTree>
+    <p:extLst>
+      <p:ext uri="{BB962C8B-B14F-4D97-AF65-F5344CB8AC3E}">
+        <p14:creationId xmlns:p14="http://schemas.microsoft.com/office/powerpoint/2010/main" val="1024086991"/>
+      </p:ext>
+    </p:extLst>
+  </p:cSld>
+  <p:clrMapOvr>
+    <a:masterClrMapping/>
+  </p:clrMapOvr>
+</p:notes>
+</file>
+
+<file path=ppt/notesSlides/notesSlide11.xml><?xml version="1.0" encoding="utf-8"?>
+<p:notes xmlns:a="http://schemas.openxmlformats.org/drawingml/2006/main" xmlns:r="http://schemas.openxmlformats.org/officeDocument/2006/relationships" xmlns:p="http://schemas.openxmlformats.org/presentationml/2006/main">
+  <p:cSld>
+    <p:spTree>
+      <p:nvGrpSpPr>
+        <p:cNvPr id="1" name=""/>
+        <p:cNvGrpSpPr/>
+        <p:nvPr/>
+      </p:nvGrpSpPr>
+      <p:grpSpPr>
+        <a:xfrm>
+          <a:off x="0" y="0"/>
+          <a:ext cx="0" cy="0"/>
+          <a:chOff x="0" y="0"/>
+          <a:chExt cx="0" cy="0"/>
+        </a:xfrm>
+      </p:grpSpPr>
+      <p:sp>
+        <p:nvSpPr>
+          <p:cNvPr id="2" name="Slide Image Placeholder 1"/>
+          <p:cNvSpPr>
+            <a:spLocks noGrp="1" noRot="1" noChangeAspect="1"/>
+          </p:cNvSpPr>
+          <p:nvPr>
+            <p:ph type="sldImg"/>
+          </p:nvPr>
+        </p:nvSpPr>
+        <p:spPr/>
+      </p:sp>
+      <p:sp>
+        <p:nvSpPr>
+          <p:cNvPr id="3" name="Notes Placeholder 2"/>
+          <p:cNvSpPr>
+            <a:spLocks noGrp="1"/>
+          </p:cNvSpPr>
+          <p:nvPr>
+            <p:ph type="body" idx="1"/>
+          </p:nvPr>
+        </p:nvSpPr>
+        <p:spPr/>
+        <p:txBody>
+          <a:bodyPr/>
+          <a:lstStyle/>
+          <a:p>
+            <a:endParaRPr lang="en-US" dirty="0"/>
+          </a:p>
+        </p:txBody>
+      </p:sp>
+      <p:sp>
+        <p:nvSpPr>
+          <p:cNvPr id="4" name="Slide Number Placeholder 3"/>
+          <p:cNvSpPr>
+            <a:spLocks noGrp="1"/>
+          </p:cNvSpPr>
+          <p:nvPr>
+            <p:ph type="sldNum" sz="quarter" idx="10"/>
+          </p:nvPr>
+        </p:nvSpPr>
+        <p:spPr/>
+        <p:txBody>
+          <a:bodyPr/>
+          <a:lstStyle/>
+          <a:p>
+            <a:fld id="{F7021451-1387-4CA6-816F-3879F97B5CBC}" type="slidenum">
+              <a:rPr lang="en-US"/>
+              <a:t>11</a:t>
             </a:fld>
             <a:endParaRPr lang="en-US"/>
           </a:p>
@@ -685,10 +543,6 @@
           <a:bodyPr/>
           <a:lstStyle/>
           <a:p>
-            <a:r>
-              <a:rPr lang="en-US" dirty="0"/>
-              <a:t/>
-            </a:r>
             <a:endParaRPr lang="en-US" dirty="0"/>
           </a:p>
         </p:txBody>
@@ -773,10 +627,6 @@
           <a:bodyPr/>
           <a:lstStyle/>
           <a:p>
-            <a:r>
-              <a:rPr lang="en-US" dirty="0"/>
-              <a:t/>
-            </a:r>
             <a:endParaRPr lang="en-US" dirty="0"/>
           </a:p>
         </p:txBody>
@@ -861,10 +711,6 @@
           <a:bodyPr/>
           <a:lstStyle/>
           <a:p>
-            <a:r>
-              <a:rPr lang="en-US" dirty="0"/>
-              <a:t/>
-            </a:r>
             <a:endParaRPr lang="en-US" dirty="0"/>
           </a:p>
         </p:txBody>
@@ -949,10 +795,6 @@
           <a:bodyPr/>
           <a:lstStyle/>
           <a:p>
-            <a:r>
-              <a:rPr lang="en-US" dirty="0"/>
-              <a:t/>
-            </a:r>
             <a:endParaRPr lang="en-US" dirty="0"/>
           </a:p>
         </p:txBody>
@@ -1037,10 +879,6 @@
           <a:bodyPr/>
           <a:lstStyle/>
           <a:p>
-            <a:r>
-              <a:rPr lang="en-US" dirty="0"/>
-              <a:t/>
-            </a:r>
             <a:endParaRPr lang="en-US" dirty="0"/>
           </a:p>
         </p:txBody>
@@ -1125,10 +963,6 @@
           <a:bodyPr/>
           <a:lstStyle/>
           <a:p>
-            <a:r>
-              <a:rPr lang="en-US" dirty="0"/>
-              <a:t/>
-            </a:r>
             <a:endParaRPr lang="en-US" dirty="0"/>
           </a:p>
         </p:txBody>
@@ -1213,10 +1047,6 @@
           <a:bodyPr/>
           <a:lstStyle/>
           <a:p>
-            <a:r>
-              <a:rPr lang="en-US" dirty="0"/>
-              <a:t/>
-            </a:r>
             <a:endParaRPr lang="en-US" dirty="0"/>
           </a:p>
         </p:txBody>
@@ -1301,10 +1131,6 @@
           <a:bodyPr/>
           <a:lstStyle/>
           <a:p>
-            <a:r>
-              <a:rPr lang="en-US" dirty="0"/>
-              <a:t/>
-            </a:r>
             <a:endParaRPr lang="en-US" dirty="0"/>
           </a:p>
         </p:txBody>
@@ -1378,6 +1204,11 @@
 <file path=ppt/slideMasters/slideMaster1.xml><?xml version="1.0" encoding="utf-8"?>
 <p:sldMaster xmlns:a="http://schemas.openxmlformats.org/drawingml/2006/main" xmlns:r="http://schemas.openxmlformats.org/officeDocument/2006/relationships" xmlns:p="http://schemas.openxmlformats.org/presentationml/2006/main">
   <p:cSld>
+    <p:bg>
+      <p:bgRef idx="1001">
+        <a:schemeClr val="bg1"/>
+      </p:bgRef>
+    </p:bg>
     <p:spTree>
       <p:nvGrpSpPr>
         <p:cNvPr id="1" name=""/>
@@ -1660,6 +1491,7 @@
         <a:solidFill>
           <a:srgbClr val="0A0F1C"/>
         </a:solidFill>
+        <a:effectLst/>
       </p:bgPr>
     </p:bg>
     <p:spTree>
@@ -1700,6 +1532,13 @@
             <a:prstDash val="solid"/>
           </a:ln>
         </p:spPr>
+        <p:txBody>
+          <a:bodyPr/>
+          <a:lstStyle/>
+          <a:p>
+            <a:endParaRPr lang="en-CA"/>
+          </a:p>
+        </p:txBody>
       </p:sp>
       <p:sp>
         <p:nvSpPr>
@@ -1725,6 +1564,13 @@
             <a:prstDash val="solid"/>
           </a:ln>
         </p:spPr>
+        <p:txBody>
+          <a:bodyPr/>
+          <a:lstStyle/>
+          <a:p>
+            <a:endParaRPr lang="en-CA"/>
+          </a:p>
+        </p:txBody>
       </p:sp>
       <p:sp>
         <p:nvSpPr>
@@ -1750,6 +1596,13 @@
             <a:prstDash val="solid"/>
           </a:ln>
         </p:spPr>
+        <p:txBody>
+          <a:bodyPr/>
+          <a:lstStyle/>
+          <a:p>
+            <a:endParaRPr lang="en-CA"/>
+          </a:p>
+        </p:txBody>
       </p:sp>
       <p:sp>
         <p:nvSpPr>
@@ -1772,6 +1625,13 @@
           </a:solidFill>
           <a:ln/>
         </p:spPr>
+        <p:txBody>
+          <a:bodyPr/>
+          <a:lstStyle/>
+          <a:p>
+            <a:endParaRPr lang="en-CA"/>
+          </a:p>
+        </p:txBody>
       </p:sp>
       <p:sp>
         <p:nvSpPr>
@@ -1794,6 +1654,13 @@
           </a:solidFill>
           <a:ln/>
         </p:spPr>
+        <p:txBody>
+          <a:bodyPr/>
+          <a:lstStyle/>
+          <a:p>
+            <a:endParaRPr lang="en-CA"/>
+          </a:p>
+        </p:txBody>
       </p:sp>
       <p:sp>
         <p:nvSpPr>
@@ -1816,6 +1683,13 @@
           </a:solidFill>
           <a:ln/>
         </p:spPr>
+        <p:txBody>
+          <a:bodyPr/>
+          <a:lstStyle/>
+          <a:p>
+            <a:endParaRPr lang="en-CA"/>
+          </a:p>
+        </p:txBody>
       </p:sp>
       <p:sp>
         <p:nvSpPr>
@@ -1838,6 +1712,13 @@
           </a:solidFill>
           <a:ln/>
         </p:spPr>
+        <p:txBody>
+          <a:bodyPr/>
+          <a:lstStyle/>
+          <a:p>
+            <a:endParaRPr lang="en-CA"/>
+          </a:p>
+        </p:txBody>
       </p:sp>
       <p:sp>
         <p:nvSpPr>
@@ -1863,6 +1744,13 @@
             <a:prstDash val="solid"/>
           </a:ln>
         </p:spPr>
+        <p:txBody>
+          <a:bodyPr/>
+          <a:lstStyle/>
+          <a:p>
+            <a:endParaRPr lang="en-CA"/>
+          </a:p>
+        </p:txBody>
       </p:sp>
       <p:sp>
         <p:nvSpPr>
@@ -1888,6 +1776,13 @@
             <a:prstDash val="solid"/>
           </a:ln>
         </p:spPr>
+        <p:txBody>
+          <a:bodyPr/>
+          <a:lstStyle/>
+          <a:p>
+            <a:endParaRPr lang="en-CA"/>
+          </a:p>
+        </p:txBody>
       </p:sp>
       <p:sp>
         <p:nvSpPr>
@@ -1913,6 +1808,13 @@
             <a:prstDash val="solid"/>
           </a:ln>
         </p:spPr>
+        <p:txBody>
+          <a:bodyPr/>
+          <a:lstStyle/>
+          <a:p>
+            <a:endParaRPr lang="en-CA"/>
+          </a:p>
+        </p:txBody>
       </p:sp>
       <p:sp>
         <p:nvSpPr>
@@ -1935,6 +1837,13 @@
           </a:solidFill>
           <a:ln/>
         </p:spPr>
+        <p:txBody>
+          <a:bodyPr/>
+          <a:lstStyle/>
+          <a:p>
+            <a:endParaRPr lang="en-CA"/>
+          </a:p>
+        </p:txBody>
       </p:sp>
       <p:sp>
         <p:nvSpPr>
@@ -1957,6 +1866,13 @@
           </a:solidFill>
           <a:ln/>
         </p:spPr>
+        <p:txBody>
+          <a:bodyPr/>
+          <a:lstStyle/>
+          <a:p>
+            <a:endParaRPr lang="en-CA"/>
+          </a:p>
+        </p:txBody>
       </p:sp>
       <p:sp>
         <p:nvSpPr>
@@ -1979,6 +1895,13 @@
           </a:solidFill>
           <a:ln/>
         </p:spPr>
+        <p:txBody>
+          <a:bodyPr/>
+          <a:lstStyle/>
+          <a:p>
+            <a:endParaRPr lang="en-CA"/>
+          </a:p>
+        </p:txBody>
       </p:sp>
       <p:sp>
         <p:nvSpPr>
@@ -2001,6 +1924,13 @@
           </a:solidFill>
           <a:ln/>
         </p:spPr>
+        <p:txBody>
+          <a:bodyPr/>
+          <a:lstStyle/>
+          <a:p>
+            <a:endParaRPr lang="en-CA"/>
+          </a:p>
+        </p:txBody>
       </p:sp>
       <p:sp>
         <p:nvSpPr>
@@ -2023,7 +1953,7 @@
           <a:bodyPr wrap="square" lIns="0" tIns="0" rIns="0" bIns="0" rtlCol="0" anchor="ctr"/>
           <a:lstStyle/>
           <a:p>
-            <a:pPr indent="0" marL="0">
+            <a:pPr marL="0" indent="0">
               <a:buNone/>
             </a:pPr>
             <a:r>
@@ -2062,7 +1992,7 @@
           <a:bodyPr wrap="square" lIns="0" tIns="0" rIns="0" bIns="0" rtlCol="0" anchor="ctr"/>
           <a:lstStyle/>
           <a:p>
-            <a:pPr algn="r" indent="0" marL="0">
+            <a:pPr marL="0" indent="0" algn="r">
               <a:buNone/>
             </a:pPr>
             <a:r>
@@ -2074,7 +2004,7 @@
                 <a:ea typeface="Courier New" pitchFamily="34" charset="-122"/>
                 <a:cs typeface="Courier New" pitchFamily="34" charset="-120"/>
               </a:rPr>
-              <a:t>1 / 10</a:t>
+              <a:t>1 / 11</a:t>
             </a:r>
             <a:endParaRPr lang="en-US" sz="1080" dirty="0"/>
           </a:p>
@@ -2101,7 +2031,7 @@
           <a:bodyPr wrap="square" lIns="0" tIns="0" rIns="0" bIns="0" rtlCol="0" anchor="ctr"/>
           <a:lstStyle/>
           <a:p>
-            <a:pPr algn="ctr" indent="0" marL="0">
+            <a:pPr marL="0" indent="0" algn="ctr">
               <a:buNone/>
             </a:pPr>
             <a:r>
@@ -2140,6 +2070,13 @@
           </a:solidFill>
           <a:ln/>
         </p:spPr>
+        <p:txBody>
+          <a:bodyPr/>
+          <a:lstStyle/>
+          <a:p>
+            <a:endParaRPr lang="en-CA"/>
+          </a:p>
+        </p:txBody>
       </p:sp>
       <p:sp>
         <p:nvSpPr>
@@ -2162,7 +2099,7 @@
           <a:bodyPr wrap="square" lIns="0" tIns="0" rIns="0" bIns="0" rtlCol="0" anchor="ctr"/>
           <a:lstStyle/>
           <a:p>
-            <a:pPr algn="ctr" indent="0" marL="0">
+            <a:pPr marL="0" indent="0" algn="ctr">
               <a:buNone/>
             </a:pPr>
             <a:r>
@@ -2176,9 +2113,6 @@
               </a:rPr>
               <a:t>Spring </a:t>
             </a:r>
-            <a:pPr algn="ctr" indent="0" marL="0">
-              <a:buNone/>
-            </a:pPr>
             <a:r>
               <a:rPr lang="en-US" sz="6480" b="1" dirty="0">
                 <a:solidFill>
@@ -2190,9 +2124,6 @@
               </a:rPr>
               <a:t>AI </a:t>
             </a:r>
-            <a:pPr algn="ctr" indent="0" marL="0">
-              <a:buNone/>
-            </a:pPr>
             <a:r>
               <a:rPr lang="en-US" sz="6480" b="1" dirty="0">
                 <a:solidFill>
@@ -2229,7 +2160,7 @@
           <a:bodyPr wrap="square" lIns="0" tIns="0" rIns="0" bIns="0" rtlCol="0" anchor="ctr"/>
           <a:lstStyle/>
           <a:p>
-            <a:pPr algn="ctr" indent="0" marL="0">
+            <a:pPr marL="0" indent="0" algn="ctr">
               <a:buNone/>
             </a:pPr>
             <a:r>
@@ -2271,6 +2202,13 @@
             <a:prstDash val="solid"/>
           </a:ln>
         </p:spPr>
+        <p:txBody>
+          <a:bodyPr/>
+          <a:lstStyle/>
+          <a:p>
+            <a:endParaRPr lang="en-CA"/>
+          </a:p>
+        </p:txBody>
       </p:sp>
       <p:sp>
         <p:nvSpPr>
@@ -2296,6 +2234,13 @@
             <a:prstDash val="solid"/>
           </a:ln>
         </p:spPr>
+        <p:txBody>
+          <a:bodyPr/>
+          <a:lstStyle/>
+          <a:p>
+            <a:endParaRPr lang="en-CA"/>
+          </a:p>
+        </p:txBody>
       </p:sp>
       <p:sp>
         <p:nvSpPr>
@@ -2321,6 +2266,13 @@
             <a:prstDash val="solid"/>
           </a:ln>
         </p:spPr>
+        <p:txBody>
+          <a:bodyPr/>
+          <a:lstStyle/>
+          <a:p>
+            <a:endParaRPr lang="en-CA"/>
+          </a:p>
+        </p:txBody>
       </p:sp>
       <p:sp>
         <p:nvSpPr>
@@ -2346,6 +2298,13 @@
             <a:prstDash val="solid"/>
           </a:ln>
         </p:spPr>
+        <p:txBody>
+          <a:bodyPr/>
+          <a:lstStyle/>
+          <a:p>
+            <a:endParaRPr lang="en-CA"/>
+          </a:p>
+        </p:txBody>
       </p:sp>
       <p:sp>
         <p:nvSpPr>
@@ -2368,7 +2327,7 @@
           <a:bodyPr wrap="square" lIns="0" tIns="0" rIns="0" bIns="0" rtlCol="0" anchor="ctr"/>
           <a:lstStyle/>
           <a:p>
-            <a:pPr algn="ctr" indent="0" marL="0">
+            <a:pPr marL="0" indent="0" algn="ctr">
               <a:buNone/>
             </a:pPr>
             <a:r>
@@ -2396,12 +2355,13 @@
 
 <file path=ppt/slides/slide10.xml><?xml version="1.0" encoding="utf-8"?>
 <p:sld xmlns:a="http://schemas.openxmlformats.org/drawingml/2006/main" xmlns:r="http://schemas.openxmlformats.org/officeDocument/2006/relationships" xmlns:p="http://schemas.openxmlformats.org/presentationml/2006/main">
-  <p:cSld name="Slide 10">
+  <p:cSld name="Slide 11">
     <p:bg>
       <p:bgPr>
         <a:solidFill>
           <a:srgbClr val="0A0F1C"/>
         </a:solidFill>
+        <a:effectLst/>
       </p:bgPr>
     </p:bg>
     <p:spTree>
@@ -2442,6 +2402,13 @@
             <a:prstDash val="solid"/>
           </a:ln>
         </p:spPr>
+        <p:txBody>
+          <a:bodyPr/>
+          <a:lstStyle/>
+          <a:p>
+            <a:endParaRPr lang="en-CA"/>
+          </a:p>
+        </p:txBody>
       </p:sp>
       <p:sp>
         <p:nvSpPr>
@@ -2467,6 +2434,13 @@
             <a:prstDash val="solid"/>
           </a:ln>
         </p:spPr>
+        <p:txBody>
+          <a:bodyPr/>
+          <a:lstStyle/>
+          <a:p>
+            <a:endParaRPr lang="en-CA"/>
+          </a:p>
+        </p:txBody>
       </p:sp>
       <p:sp>
         <p:nvSpPr>
@@ -2492,6 +2466,13 @@
             <a:prstDash val="solid"/>
           </a:ln>
         </p:spPr>
+        <p:txBody>
+          <a:bodyPr/>
+          <a:lstStyle/>
+          <a:p>
+            <a:endParaRPr lang="en-CA"/>
+          </a:p>
+        </p:txBody>
       </p:sp>
       <p:sp>
         <p:nvSpPr>
@@ -2514,6 +2495,13 @@
           </a:solidFill>
           <a:ln/>
         </p:spPr>
+        <p:txBody>
+          <a:bodyPr/>
+          <a:lstStyle/>
+          <a:p>
+            <a:endParaRPr lang="en-CA"/>
+          </a:p>
+        </p:txBody>
       </p:sp>
       <p:sp>
         <p:nvSpPr>
@@ -2536,6 +2524,13 @@
           </a:solidFill>
           <a:ln/>
         </p:spPr>
+        <p:txBody>
+          <a:bodyPr/>
+          <a:lstStyle/>
+          <a:p>
+            <a:endParaRPr lang="en-CA"/>
+          </a:p>
+        </p:txBody>
       </p:sp>
       <p:sp>
         <p:nvSpPr>
@@ -2558,6 +2553,13 @@
           </a:solidFill>
           <a:ln/>
         </p:spPr>
+        <p:txBody>
+          <a:bodyPr/>
+          <a:lstStyle/>
+          <a:p>
+            <a:endParaRPr lang="en-CA"/>
+          </a:p>
+        </p:txBody>
       </p:sp>
       <p:sp>
         <p:nvSpPr>
@@ -2580,6 +2582,13 @@
           </a:solidFill>
           <a:ln/>
         </p:spPr>
+        <p:txBody>
+          <a:bodyPr/>
+          <a:lstStyle/>
+          <a:p>
+            <a:endParaRPr lang="en-CA"/>
+          </a:p>
+        </p:txBody>
       </p:sp>
       <p:sp>
         <p:nvSpPr>
@@ -2605,6 +2614,13 @@
             <a:prstDash val="solid"/>
           </a:ln>
         </p:spPr>
+        <p:txBody>
+          <a:bodyPr/>
+          <a:lstStyle/>
+          <a:p>
+            <a:endParaRPr lang="en-CA"/>
+          </a:p>
+        </p:txBody>
       </p:sp>
       <p:sp>
         <p:nvSpPr>
@@ -2630,6 +2646,13 @@
             <a:prstDash val="solid"/>
           </a:ln>
         </p:spPr>
+        <p:txBody>
+          <a:bodyPr/>
+          <a:lstStyle/>
+          <a:p>
+            <a:endParaRPr lang="en-CA"/>
+          </a:p>
+        </p:txBody>
       </p:sp>
       <p:sp>
         <p:nvSpPr>
@@ -2655,6 +2678,13 @@
             <a:prstDash val="solid"/>
           </a:ln>
         </p:spPr>
+        <p:txBody>
+          <a:bodyPr/>
+          <a:lstStyle/>
+          <a:p>
+            <a:endParaRPr lang="en-CA"/>
+          </a:p>
+        </p:txBody>
       </p:sp>
       <p:sp>
         <p:nvSpPr>
@@ -2677,6 +2707,13 @@
           </a:solidFill>
           <a:ln/>
         </p:spPr>
+        <p:txBody>
+          <a:bodyPr/>
+          <a:lstStyle/>
+          <a:p>
+            <a:endParaRPr lang="en-CA"/>
+          </a:p>
+        </p:txBody>
       </p:sp>
       <p:sp>
         <p:nvSpPr>
@@ -2699,6 +2736,13 @@
           </a:solidFill>
           <a:ln/>
         </p:spPr>
+        <p:txBody>
+          <a:bodyPr/>
+          <a:lstStyle/>
+          <a:p>
+            <a:endParaRPr lang="en-CA"/>
+          </a:p>
+        </p:txBody>
       </p:sp>
       <p:sp>
         <p:nvSpPr>
@@ -2721,6 +2765,13 @@
           </a:solidFill>
           <a:ln/>
         </p:spPr>
+        <p:txBody>
+          <a:bodyPr/>
+          <a:lstStyle/>
+          <a:p>
+            <a:endParaRPr lang="en-CA"/>
+          </a:p>
+        </p:txBody>
       </p:sp>
       <p:sp>
         <p:nvSpPr>
@@ -2743,6 +2794,13 @@
           </a:solidFill>
           <a:ln/>
         </p:spPr>
+        <p:txBody>
+          <a:bodyPr/>
+          <a:lstStyle/>
+          <a:p>
+            <a:endParaRPr lang="en-CA"/>
+          </a:p>
+        </p:txBody>
       </p:sp>
       <p:sp>
         <p:nvSpPr>
@@ -2765,7 +2823,7 @@
           <a:bodyPr wrap="square" lIns="0" tIns="0" rIns="0" bIns="0" rtlCol="0" anchor="ctr"/>
           <a:lstStyle/>
           <a:p>
-            <a:pPr indent="0" marL="0">
+            <a:pPr marL="0" indent="0">
               <a:buNone/>
             </a:pPr>
             <a:r>
@@ -2804,7 +2862,7 @@
           <a:bodyPr wrap="square" lIns="0" tIns="0" rIns="0" bIns="0" rtlCol="0" anchor="ctr"/>
           <a:lstStyle/>
           <a:p>
-            <a:pPr algn="r" indent="0" marL="0">
+            <a:pPr marL="0" indent="0" algn="r">
               <a:buNone/>
             </a:pPr>
             <a:r>
@@ -2816,7 +2874,7 @@
                 <a:ea typeface="Courier New" pitchFamily="34" charset="-122"/>
                 <a:cs typeface="Courier New" pitchFamily="34" charset="-120"/>
               </a:rPr>
-              <a:t>10 / 10</a:t>
+              <a:t>11 / 11</a:t>
             </a:r>
             <a:endParaRPr lang="en-US" sz="1080" dirty="0"/>
           </a:p>
@@ -2843,11 +2901,11 @@
           <a:bodyPr wrap="square" lIns="0" tIns="0" rIns="0" bIns="0" rtlCol="0" anchor="ctr"/>
           <a:lstStyle/>
           <a:p>
-            <a:pPr indent="0" marL="0">
+            <a:pPr marL="0" indent="0">
               <a:buNone/>
             </a:pPr>
             <a:r>
-              <a:rPr lang="en-US" sz="1440" spc="200" kern="0" dirty="0">
+              <a:rPr lang="en-US" sz="1440" kern="0" spc="200" dirty="0">
                 <a:solidFill>
                   <a:srgbClr val="5FE0C5"/>
                 </a:solidFill>
@@ -2882,7 +2940,7 @@
           <a:bodyPr wrap="square" lIns="0" tIns="0" rIns="0" bIns="0" rtlCol="0" anchor="ctr"/>
           <a:lstStyle/>
           <a:p>
-            <a:pPr algn="l" indent="0" marL="0">
+            <a:pPr marL="0" indent="0" algn="l">
               <a:buNone/>
             </a:pPr>
             <a:r>
@@ -2921,7 +2979,7 @@
           <a:bodyPr wrap="square" lIns="0" tIns="0" rIns="0" bIns="0" rtlCol="0" anchor="ctr"/>
           <a:lstStyle/>
           <a:p>
-            <a:pPr algn="ctr" indent="0" marL="0">
+            <a:pPr marL="0" indent="0" algn="ctr">
               <a:lnSpc>
                 <a:spcPct val="120000"/>
               </a:lnSpc>
@@ -2968,13 +3026,20 @@
             <a:prstDash val="solid"/>
           </a:ln>
           <a:effectLst>
-            <a:outerShdw sx="100000" sy="100000" kx="0" ky="0" algn="bl" rotWithShape="0" blurRad="101600" dist="38100" dir="2700000">
+            <a:outerShdw blurRad="101600" dist="38100" dir="2700000" algn="bl" rotWithShape="0">
               <a:srgbClr val="000000">
                 <a:alpha val="25000"/>
               </a:srgbClr>
             </a:outerShdw>
           </a:effectLst>
         </p:spPr>
+        <p:txBody>
+          <a:bodyPr/>
+          <a:lstStyle/>
+          <a:p>
+            <a:endParaRPr lang="en-CA"/>
+          </a:p>
+        </p:txBody>
       </p:sp>
       <p:sp>
         <p:nvSpPr>
@@ -2997,7 +3062,7 @@
           <a:bodyPr wrap="square" lIns="0" tIns="0" rIns="0" bIns="0" rtlCol="0" anchor="ctr"/>
           <a:lstStyle/>
           <a:p>
-            <a:pPr indent="0" marL="0">
+            <a:pPr marL="0" indent="0">
               <a:buNone/>
             </a:pPr>
             <a:r>
@@ -3036,7 +3101,7 @@
           <a:bodyPr wrap="square" lIns="0" tIns="0" rIns="0" bIns="0" rtlCol="0" anchor="ctr"/>
           <a:lstStyle/>
           <a:p>
-            <a:pPr indent="0" marL="0">
+            <a:pPr marL="0" indent="0">
               <a:buNone/>
             </a:pPr>
             <a:r>
@@ -3075,7 +3140,7 @@
           <a:bodyPr wrap="square" lIns="0" tIns="0" rIns="0" bIns="0" rtlCol="0" anchor="ctr"/>
           <a:lstStyle/>
           <a:p>
-            <a:pPr indent="0" marL="0">
+            <a:pPr marL="0" indent="0">
               <a:buNone/>
             </a:pPr>
             <a:r>
@@ -3119,13 +3184,20 @@
             <a:prstDash val="solid"/>
           </a:ln>
           <a:effectLst>
-            <a:outerShdw sx="100000" sy="100000" kx="0" ky="0" algn="bl" rotWithShape="0" blurRad="101600" dist="38100" dir="2700000">
+            <a:outerShdw blurRad="101600" dist="38100" dir="2700000" algn="bl" rotWithShape="0">
               <a:srgbClr val="000000">
                 <a:alpha val="25000"/>
               </a:srgbClr>
             </a:outerShdw>
           </a:effectLst>
         </p:spPr>
+        <p:txBody>
+          <a:bodyPr/>
+          <a:lstStyle/>
+          <a:p>
+            <a:endParaRPr lang="en-CA"/>
+          </a:p>
+        </p:txBody>
       </p:sp>
       <p:sp>
         <p:nvSpPr>
@@ -3148,7 +3220,7 @@
           <a:bodyPr wrap="square" lIns="0" tIns="0" rIns="0" bIns="0" rtlCol="0" anchor="ctr"/>
           <a:lstStyle/>
           <a:p>
-            <a:pPr indent="0" marL="0">
+            <a:pPr marL="0" indent="0">
               <a:buNone/>
             </a:pPr>
             <a:r>
@@ -3187,7 +3259,7 @@
           <a:bodyPr wrap="square" lIns="0" tIns="0" rIns="0" bIns="0" rtlCol="0" anchor="ctr"/>
           <a:lstStyle/>
           <a:p>
-            <a:pPr indent="0" marL="0">
+            <a:pPr marL="0" indent="0">
               <a:buNone/>
             </a:pPr>
             <a:r>
@@ -3226,7 +3298,7 @@
           <a:bodyPr wrap="square" lIns="0" tIns="0" rIns="0" bIns="0" rtlCol="0" anchor="ctr"/>
           <a:lstStyle/>
           <a:p>
-            <a:pPr indent="0" marL="0">
+            <a:pPr marL="0" indent="0">
               <a:buNone/>
             </a:pPr>
             <a:r>
@@ -3268,6 +3340,13 @@
             <a:prstDash val="solid"/>
           </a:ln>
         </p:spPr>
+        <p:txBody>
+          <a:bodyPr/>
+          <a:lstStyle/>
+          <a:p>
+            <a:endParaRPr lang="en-CA"/>
+          </a:p>
+        </p:txBody>
       </p:sp>
       <p:sp>
         <p:nvSpPr>
@@ -3293,6 +3372,13 @@
             <a:prstDash val="solid"/>
           </a:ln>
         </p:spPr>
+        <p:txBody>
+          <a:bodyPr/>
+          <a:lstStyle/>
+          <a:p>
+            <a:endParaRPr lang="en-CA"/>
+          </a:p>
+        </p:txBody>
       </p:sp>
       <p:sp>
         <p:nvSpPr>
@@ -3318,6 +3404,13 @@
             <a:prstDash val="solid"/>
           </a:ln>
         </p:spPr>
+        <p:txBody>
+          <a:bodyPr/>
+          <a:lstStyle/>
+          <a:p>
+            <a:endParaRPr lang="en-CA"/>
+          </a:p>
+        </p:txBody>
       </p:sp>
       <p:sp>
         <p:nvSpPr>
@@ -3343,6 +3436,13 @@
             <a:prstDash val="solid"/>
           </a:ln>
         </p:spPr>
+        <p:txBody>
+          <a:bodyPr/>
+          <a:lstStyle/>
+          <a:p>
+            <a:endParaRPr lang="en-CA"/>
+          </a:p>
+        </p:txBody>
       </p:sp>
       <p:sp>
         <p:nvSpPr>
@@ -3365,7 +3465,7 @@
           <a:bodyPr wrap="square" lIns="0" tIns="0" rIns="0" bIns="0" rtlCol="0" anchor="ctr"/>
           <a:lstStyle/>
           <a:p>
-            <a:pPr algn="ctr" indent="0" marL="0">
+            <a:pPr marL="0" indent="0" algn="ctr">
               <a:buNone/>
             </a:pPr>
             <a:r>
@@ -3404,7 +3504,7 @@
           <a:bodyPr wrap="square" lIns="0" tIns="0" rIns="0" bIns="0" rtlCol="0" anchor="ctr"/>
           <a:lstStyle/>
           <a:p>
-            <a:pPr algn="ctr" indent="0" marL="0">
+            <a:pPr marL="0" indent="0" algn="ctr">
               <a:buNone/>
             </a:pPr>
             <a:r>
@@ -3419,6 +3519,926 @@
               <a:t>github.com/balajich/spring-ai-with-llama</a:t>
             </a:r>
             <a:endParaRPr lang="en-US" sz="1440" dirty="0"/>
+          </a:p>
+        </p:txBody>
+      </p:sp>
+    </p:spTree>
+  </p:cSld>
+  <p:clrMapOvr>
+    <a:masterClrMapping/>
+  </p:clrMapOvr>
+</p:sld>
+</file>
+
+<file path=ppt/slides/slide11.xml><?xml version="1.0" encoding="utf-8"?>
+<p:sld xmlns:a="http://schemas.openxmlformats.org/drawingml/2006/main" xmlns:r="http://schemas.openxmlformats.org/officeDocument/2006/relationships" xmlns:p="http://schemas.openxmlformats.org/presentationml/2006/main">
+  <p:cSld name="Slide 9">
+    <p:bg>
+      <p:bgPr>
+        <a:solidFill>
+          <a:srgbClr val="0A0F1C"/>
+        </a:solidFill>
+        <a:effectLst/>
+      </p:bgPr>
+    </p:bg>
+    <p:spTree>
+      <p:nvGrpSpPr>
+        <p:cNvPr id="1" name=""/>
+        <p:cNvGrpSpPr/>
+        <p:nvPr/>
+      </p:nvGrpSpPr>
+      <p:grpSpPr>
+        <a:xfrm>
+          <a:off x="0" y="0"/>
+          <a:ext cx="0" cy="0"/>
+          <a:chOff x="0" y="0"/>
+          <a:chExt cx="0" cy="0"/>
+        </a:xfrm>
+      </p:grpSpPr>
+      <p:sp>
+        <p:nvSpPr>
+          <p:cNvPr id="2" name="Shape 0"/>
+          <p:cNvSpPr/>
+          <p:nvPr/>
+        </p:nvSpPr>
+        <p:spPr>
+          <a:xfrm>
+            <a:off x="457200" y="365760"/>
+            <a:ext cx="731520" cy="457200"/>
+          </a:xfrm>
+          <a:prstGeom prst="line">
+            <a:avLst/>
+          </a:prstGeom>
+          <a:noFill/>
+          <a:ln w="9525">
+            <a:solidFill>
+              <a:srgbClr val="5B6478">
+                <a:alpha val="30000"/>
+              </a:srgbClr>
+            </a:solidFill>
+            <a:prstDash val="solid"/>
+          </a:ln>
+        </p:spPr>
+        <p:txBody>
+          <a:bodyPr/>
+          <a:lstStyle/>
+          <a:p>
+            <a:endParaRPr lang="en-CA"/>
+          </a:p>
+        </p:txBody>
+      </p:sp>
+      <p:sp>
+        <p:nvSpPr>
+          <p:cNvPr id="3" name="Shape 1"/>
+          <p:cNvSpPr/>
+          <p:nvPr/>
+        </p:nvSpPr>
+        <p:spPr>
+          <a:xfrm>
+            <a:off x="822960" y="822960"/>
+            <a:ext cx="365760" cy="731520"/>
+          </a:xfrm>
+          <a:prstGeom prst="line">
+            <a:avLst/>
+          </a:prstGeom>
+          <a:noFill/>
+          <a:ln w="9525">
+            <a:solidFill>
+              <a:srgbClr val="5B6478">
+                <a:alpha val="30000"/>
+              </a:srgbClr>
+            </a:solidFill>
+            <a:prstDash val="solid"/>
+          </a:ln>
+        </p:spPr>
+        <p:txBody>
+          <a:bodyPr/>
+          <a:lstStyle/>
+          <a:p>
+            <a:endParaRPr lang="en-CA"/>
+          </a:p>
+        </p:txBody>
+      </p:sp>
+      <p:sp>
+        <p:nvSpPr>
+          <p:cNvPr id="4" name="Shape 2"/>
+          <p:cNvSpPr/>
+          <p:nvPr/>
+        </p:nvSpPr>
+        <p:spPr>
+          <a:xfrm flipV="1">
+            <a:off x="822960" y="1280160"/>
+            <a:ext cx="914400" cy="274320"/>
+          </a:xfrm>
+          <a:prstGeom prst="line">
+            <a:avLst/>
+          </a:prstGeom>
+          <a:noFill/>
+          <a:ln w="9525">
+            <a:solidFill>
+              <a:srgbClr val="5B6478">
+                <a:alpha val="30000"/>
+              </a:srgbClr>
+            </a:solidFill>
+            <a:prstDash val="solid"/>
+          </a:ln>
+        </p:spPr>
+        <p:txBody>
+          <a:bodyPr/>
+          <a:lstStyle/>
+          <a:p>
+            <a:endParaRPr lang="en-CA"/>
+          </a:p>
+        </p:txBody>
+      </p:sp>
+      <p:sp>
+        <p:nvSpPr>
+          <p:cNvPr id="5" name="Shape 3"/>
+          <p:cNvSpPr/>
+          <p:nvPr/>
+        </p:nvSpPr>
+        <p:spPr>
+          <a:xfrm>
+            <a:off x="429768" y="338328"/>
+            <a:ext cx="54864" cy="54864"/>
+          </a:xfrm>
+          <a:prstGeom prst="ellipse">
+            <a:avLst/>
+          </a:prstGeom>
+          <a:solidFill>
+            <a:srgbClr val="8B98AC">
+              <a:alpha val="60000"/>
+            </a:srgbClr>
+          </a:solidFill>
+          <a:ln/>
+        </p:spPr>
+        <p:txBody>
+          <a:bodyPr/>
+          <a:lstStyle/>
+          <a:p>
+            <a:endParaRPr lang="en-CA"/>
+          </a:p>
+        </p:txBody>
+      </p:sp>
+      <p:sp>
+        <p:nvSpPr>
+          <p:cNvPr id="6" name="Shape 4"/>
+          <p:cNvSpPr/>
+          <p:nvPr/>
+        </p:nvSpPr>
+        <p:spPr>
+          <a:xfrm>
+            <a:off x="1161288" y="795528"/>
+            <a:ext cx="54864" cy="54864"/>
+          </a:xfrm>
+          <a:prstGeom prst="ellipse">
+            <a:avLst/>
+          </a:prstGeom>
+          <a:solidFill>
+            <a:srgbClr val="8B98AC">
+              <a:alpha val="60000"/>
+            </a:srgbClr>
+          </a:solidFill>
+          <a:ln/>
+        </p:spPr>
+        <p:txBody>
+          <a:bodyPr/>
+          <a:lstStyle/>
+          <a:p>
+            <a:endParaRPr lang="en-CA"/>
+          </a:p>
+        </p:txBody>
+      </p:sp>
+      <p:sp>
+        <p:nvSpPr>
+          <p:cNvPr id="7" name="Shape 5"/>
+          <p:cNvSpPr/>
+          <p:nvPr/>
+        </p:nvSpPr>
+        <p:spPr>
+          <a:xfrm>
+            <a:off x="795528" y="1527048"/>
+            <a:ext cx="54864" cy="54864"/>
+          </a:xfrm>
+          <a:prstGeom prst="ellipse">
+            <a:avLst/>
+          </a:prstGeom>
+          <a:solidFill>
+            <a:srgbClr val="8B98AC">
+              <a:alpha val="60000"/>
+            </a:srgbClr>
+          </a:solidFill>
+          <a:ln/>
+        </p:spPr>
+        <p:txBody>
+          <a:bodyPr/>
+          <a:lstStyle/>
+          <a:p>
+            <a:endParaRPr lang="en-CA"/>
+          </a:p>
+        </p:txBody>
+      </p:sp>
+      <p:sp>
+        <p:nvSpPr>
+          <p:cNvPr id="8" name="Shape 6"/>
+          <p:cNvSpPr/>
+          <p:nvPr/>
+        </p:nvSpPr>
+        <p:spPr>
+          <a:xfrm>
+            <a:off x="1709928" y="1252728"/>
+            <a:ext cx="54864" cy="54864"/>
+          </a:xfrm>
+          <a:prstGeom prst="ellipse">
+            <a:avLst/>
+          </a:prstGeom>
+          <a:solidFill>
+            <a:srgbClr val="8B98AC">
+              <a:alpha val="60000"/>
+            </a:srgbClr>
+          </a:solidFill>
+          <a:ln/>
+        </p:spPr>
+        <p:txBody>
+          <a:bodyPr/>
+          <a:lstStyle/>
+          <a:p>
+            <a:endParaRPr lang="en-CA"/>
+          </a:p>
+        </p:txBody>
+      </p:sp>
+      <p:sp>
+        <p:nvSpPr>
+          <p:cNvPr id="9" name="Shape 7"/>
+          <p:cNvSpPr/>
+          <p:nvPr/>
+        </p:nvSpPr>
+        <p:spPr>
+          <a:xfrm flipV="1">
+            <a:off x="10789920" y="5486400"/>
+            <a:ext cx="731520" cy="548640"/>
+          </a:xfrm>
+          <a:prstGeom prst="line">
+            <a:avLst/>
+          </a:prstGeom>
+          <a:noFill/>
+          <a:ln w="9525">
+            <a:solidFill>
+              <a:srgbClr val="5B6478">
+                <a:alpha val="30000"/>
+              </a:srgbClr>
+            </a:solidFill>
+            <a:prstDash val="solid"/>
+          </a:ln>
+        </p:spPr>
+        <p:txBody>
+          <a:bodyPr/>
+          <a:lstStyle/>
+          <a:p>
+            <a:endParaRPr lang="en-CA"/>
+          </a:p>
+        </p:txBody>
+      </p:sp>
+      <p:sp>
+        <p:nvSpPr>
+          <p:cNvPr id="10" name="Shape 8"/>
+          <p:cNvSpPr/>
+          <p:nvPr/>
+        </p:nvSpPr>
+        <p:spPr>
+          <a:xfrm flipV="1">
+            <a:off x="11155680" y="4754880"/>
+            <a:ext cx="365760" cy="731520"/>
+          </a:xfrm>
+          <a:prstGeom prst="line">
+            <a:avLst/>
+          </a:prstGeom>
+          <a:noFill/>
+          <a:ln w="9525">
+            <a:solidFill>
+              <a:srgbClr val="5B6478">
+                <a:alpha val="30000"/>
+              </a:srgbClr>
+            </a:solidFill>
+            <a:prstDash val="solid"/>
+          </a:ln>
+        </p:spPr>
+        <p:txBody>
+          <a:bodyPr/>
+          <a:lstStyle/>
+          <a:p>
+            <a:endParaRPr lang="en-CA"/>
+          </a:p>
+        </p:txBody>
+      </p:sp>
+      <p:sp>
+        <p:nvSpPr>
+          <p:cNvPr id="11" name="Shape 9"/>
+          <p:cNvSpPr/>
+          <p:nvPr/>
+        </p:nvSpPr>
+        <p:spPr>
+          <a:xfrm>
+            <a:off x="11155680" y="4754880"/>
+            <a:ext cx="731520" cy="365760"/>
+          </a:xfrm>
+          <a:prstGeom prst="line">
+            <a:avLst/>
+          </a:prstGeom>
+          <a:noFill/>
+          <a:ln w="9525">
+            <a:solidFill>
+              <a:srgbClr val="5B6478">
+                <a:alpha val="30000"/>
+              </a:srgbClr>
+            </a:solidFill>
+            <a:prstDash val="solid"/>
+          </a:ln>
+        </p:spPr>
+        <p:txBody>
+          <a:bodyPr/>
+          <a:lstStyle/>
+          <a:p>
+            <a:endParaRPr lang="en-CA"/>
+          </a:p>
+        </p:txBody>
+      </p:sp>
+      <p:sp>
+        <p:nvSpPr>
+          <p:cNvPr id="12" name="Shape 10"/>
+          <p:cNvSpPr/>
+          <p:nvPr/>
+        </p:nvSpPr>
+        <p:spPr>
+          <a:xfrm>
+            <a:off x="10762488" y="6007608"/>
+            <a:ext cx="54864" cy="54864"/>
+          </a:xfrm>
+          <a:prstGeom prst="ellipse">
+            <a:avLst/>
+          </a:prstGeom>
+          <a:solidFill>
+            <a:srgbClr val="8B98AC">
+              <a:alpha val="60000"/>
+            </a:srgbClr>
+          </a:solidFill>
+          <a:ln/>
+        </p:spPr>
+        <p:txBody>
+          <a:bodyPr/>
+          <a:lstStyle/>
+          <a:p>
+            <a:endParaRPr lang="en-CA"/>
+          </a:p>
+        </p:txBody>
+      </p:sp>
+      <p:sp>
+        <p:nvSpPr>
+          <p:cNvPr id="13" name="Shape 11"/>
+          <p:cNvSpPr/>
+          <p:nvPr/>
+        </p:nvSpPr>
+        <p:spPr>
+          <a:xfrm>
+            <a:off x="11494008" y="5458968"/>
+            <a:ext cx="54864" cy="54864"/>
+          </a:xfrm>
+          <a:prstGeom prst="ellipse">
+            <a:avLst/>
+          </a:prstGeom>
+          <a:solidFill>
+            <a:srgbClr val="8B98AC">
+              <a:alpha val="60000"/>
+            </a:srgbClr>
+          </a:solidFill>
+          <a:ln/>
+        </p:spPr>
+        <p:txBody>
+          <a:bodyPr/>
+          <a:lstStyle/>
+          <a:p>
+            <a:endParaRPr lang="en-CA"/>
+          </a:p>
+        </p:txBody>
+      </p:sp>
+      <p:sp>
+        <p:nvSpPr>
+          <p:cNvPr id="14" name="Shape 12"/>
+          <p:cNvSpPr/>
+          <p:nvPr/>
+        </p:nvSpPr>
+        <p:spPr>
+          <a:xfrm>
+            <a:off x="11128248" y="4727448"/>
+            <a:ext cx="54864" cy="54864"/>
+          </a:xfrm>
+          <a:prstGeom prst="ellipse">
+            <a:avLst/>
+          </a:prstGeom>
+          <a:solidFill>
+            <a:srgbClr val="8B98AC">
+              <a:alpha val="60000"/>
+            </a:srgbClr>
+          </a:solidFill>
+          <a:ln/>
+        </p:spPr>
+        <p:txBody>
+          <a:bodyPr/>
+          <a:lstStyle/>
+          <a:p>
+            <a:endParaRPr lang="en-CA"/>
+          </a:p>
+        </p:txBody>
+      </p:sp>
+      <p:sp>
+        <p:nvSpPr>
+          <p:cNvPr id="15" name="Shape 13"/>
+          <p:cNvSpPr/>
+          <p:nvPr/>
+        </p:nvSpPr>
+        <p:spPr>
+          <a:xfrm>
+            <a:off x="11859768" y="5093208"/>
+            <a:ext cx="54864" cy="54864"/>
+          </a:xfrm>
+          <a:prstGeom prst="ellipse">
+            <a:avLst/>
+          </a:prstGeom>
+          <a:solidFill>
+            <a:srgbClr val="8B98AC">
+              <a:alpha val="60000"/>
+            </a:srgbClr>
+          </a:solidFill>
+          <a:ln/>
+        </p:spPr>
+        <p:txBody>
+          <a:bodyPr/>
+          <a:lstStyle/>
+          <a:p>
+            <a:endParaRPr lang="en-CA"/>
+          </a:p>
+        </p:txBody>
+      </p:sp>
+      <p:sp>
+        <p:nvSpPr>
+          <p:cNvPr id="16" name="Text 14"/>
+          <p:cNvSpPr/>
+          <p:nvPr/>
+        </p:nvSpPr>
+        <p:spPr>
+          <a:xfrm>
+            <a:off x="457200" y="6355080"/>
+            <a:ext cx="2743200" cy="274320"/>
+          </a:xfrm>
+          <a:prstGeom prst="rect">
+            <a:avLst/>
+          </a:prstGeom>
+          <a:noFill/>
+          <a:ln/>
+        </p:spPr>
+        <p:txBody>
+          <a:bodyPr wrap="square" lIns="0" tIns="0" rIns="0" bIns="0" rtlCol="0" anchor="ctr"/>
+          <a:lstStyle/>
+          <a:p>
+            <a:pPr marL="0" indent="0">
+              <a:buNone/>
+            </a:pPr>
+            <a:r>
+              <a:rPr lang="en-US" sz="1080" dirty="0">
+                <a:solidFill>
+                  <a:srgbClr val="5B6478"/>
+                </a:solidFill>
+                <a:latin typeface="Courier New" pitchFamily="34" charset="0"/>
+                <a:ea typeface="Courier New" pitchFamily="34" charset="-122"/>
+                <a:cs typeface="Courier New" pitchFamily="34" charset="-120"/>
+              </a:rPr>
+              <a:t>PromptToApps</a:t>
+            </a:r>
+            <a:endParaRPr lang="en-US" sz="1080" dirty="0"/>
+          </a:p>
+        </p:txBody>
+      </p:sp>
+      <p:sp>
+        <p:nvSpPr>
+          <p:cNvPr id="17" name="Text 15"/>
+          <p:cNvSpPr/>
+          <p:nvPr/>
+        </p:nvSpPr>
+        <p:spPr>
+          <a:xfrm>
+            <a:off x="11247120" y="6355080"/>
+            <a:ext cx="731520" cy="274320"/>
+          </a:xfrm>
+          <a:prstGeom prst="rect">
+            <a:avLst/>
+          </a:prstGeom>
+          <a:noFill/>
+          <a:ln/>
+        </p:spPr>
+        <p:txBody>
+          <a:bodyPr wrap="square" lIns="0" tIns="0" rIns="0" bIns="0" rtlCol="0" anchor="ctr"/>
+          <a:lstStyle/>
+          <a:p>
+            <a:pPr marL="0" indent="0" algn="r">
+              <a:buNone/>
+            </a:pPr>
+            <a:r>
+              <a:rPr lang="en-US" sz="1080" dirty="0">
+                <a:solidFill>
+                  <a:srgbClr val="5B6478"/>
+                </a:solidFill>
+                <a:latin typeface="Courier New" pitchFamily="34" charset="0"/>
+                <a:ea typeface="Courier New" pitchFamily="34" charset="-122"/>
+                <a:cs typeface="Courier New" pitchFamily="34" charset="-120"/>
+              </a:rPr>
+              <a:t>9 / 11</a:t>
+            </a:r>
+            <a:endParaRPr lang="en-US" sz="1080" dirty="0"/>
+          </a:p>
+        </p:txBody>
+      </p:sp>
+      <p:sp>
+        <p:nvSpPr>
+          <p:cNvPr id="18" name="Text 16"/>
+          <p:cNvSpPr/>
+          <p:nvPr/>
+        </p:nvSpPr>
+        <p:spPr>
+          <a:xfrm>
+            <a:off x="5577840" y="945490"/>
+            <a:ext cx="502920" cy="502920"/>
+          </a:xfrm>
+          <a:prstGeom prst="rect">
+            <a:avLst/>
+          </a:prstGeom>
+          <a:noFill/>
+          <a:ln/>
+        </p:spPr>
+        <p:txBody>
+          <a:bodyPr wrap="square" lIns="0" tIns="0" rIns="0" bIns="0" rtlCol="0" anchor="ctr"/>
+          <a:lstStyle/>
+          <a:p>
+            <a:pPr marL="0" indent="0" algn="ctr">
+              <a:buNone/>
+            </a:pPr>
+            <a:r>
+              <a:rPr lang="en-US" sz="3696" b="1" dirty="0">
+                <a:solidFill>
+                  <a:srgbClr val="F2A93B"/>
+                </a:solidFill>
+                <a:latin typeface="Courier New" pitchFamily="34" charset="0"/>
+                <a:ea typeface="Courier New" pitchFamily="34" charset="-122"/>
+                <a:cs typeface="Courier New" pitchFamily="34" charset="-120"/>
+              </a:rPr>
+              <a:t>&gt;</a:t>
+            </a:r>
+            <a:endParaRPr lang="en-US" sz="3696" dirty="0"/>
+          </a:p>
+        </p:txBody>
+      </p:sp>
+      <p:sp>
+        <p:nvSpPr>
+          <p:cNvPr id="19" name="Shape 17"/>
+          <p:cNvSpPr/>
+          <p:nvPr/>
+        </p:nvSpPr>
+        <p:spPr>
+          <a:xfrm>
+            <a:off x="6000293" y="1186891"/>
+            <a:ext cx="341986" cy="120701"/>
+          </a:xfrm>
+          <a:prstGeom prst="roundRect">
+            <a:avLst>
+              <a:gd name="adj" fmla="val 50000"/>
+            </a:avLst>
+          </a:prstGeom>
+          <a:solidFill>
+            <a:srgbClr val="5FE0C5"/>
+          </a:solidFill>
+          <a:ln/>
+        </p:spPr>
+        <p:txBody>
+          <a:bodyPr/>
+          <a:lstStyle/>
+          <a:p>
+            <a:endParaRPr lang="en-CA"/>
+          </a:p>
+        </p:txBody>
+      </p:sp>
+      <p:sp>
+        <p:nvSpPr>
+          <p:cNvPr id="20" name="Text 18"/>
+          <p:cNvSpPr/>
+          <p:nvPr/>
+        </p:nvSpPr>
+        <p:spPr>
+          <a:xfrm>
+            <a:off x="0" y="1783080"/>
+            <a:ext cx="12161520" cy="731520"/>
+          </a:xfrm>
+          <a:prstGeom prst="rect">
+            <a:avLst/>
+          </a:prstGeom>
+          <a:noFill/>
+          <a:ln/>
+        </p:spPr>
+        <p:txBody>
+          <a:bodyPr wrap="square" lIns="0" tIns="0" rIns="0" bIns="0" rtlCol="0" anchor="ctr"/>
+          <a:lstStyle/>
+          <a:p>
+            <a:pPr marL="0" indent="0" algn="ctr">
+              <a:buNone/>
+            </a:pPr>
+            <a:r>
+              <a:rPr lang="en-US" sz="4320" b="1" dirty="0">
+                <a:solidFill>
+                  <a:srgbClr val="E5E9F0"/>
+                </a:solidFill>
+                <a:latin typeface="Courier New" pitchFamily="34" charset="0"/>
+                <a:ea typeface="Courier New" pitchFamily="34" charset="-122"/>
+                <a:cs typeface="Courier New" pitchFamily="34" charset="-120"/>
+              </a:rPr>
+              <a:t>Let's build Chapter 1.</a:t>
+            </a:r>
+            <a:endParaRPr lang="en-US" sz="4320" dirty="0"/>
+          </a:p>
+        </p:txBody>
+      </p:sp>
+      <p:sp>
+        <p:nvSpPr>
+          <p:cNvPr id="21" name="Shape 19"/>
+          <p:cNvSpPr/>
+          <p:nvPr/>
+        </p:nvSpPr>
+        <p:spPr>
+          <a:xfrm>
+            <a:off x="4709160" y="2743200"/>
+            <a:ext cx="2743200" cy="0"/>
+          </a:xfrm>
+          <a:prstGeom prst="line">
+            <a:avLst/>
+          </a:prstGeom>
+          <a:noFill/>
+          <a:ln w="12700">
+            <a:solidFill>
+              <a:srgbClr val="5B6478">
+                <a:alpha val="70000"/>
+              </a:srgbClr>
+            </a:solidFill>
+            <a:prstDash val="solid"/>
+          </a:ln>
+        </p:spPr>
+        <p:txBody>
+          <a:bodyPr/>
+          <a:lstStyle/>
+          <a:p>
+            <a:endParaRPr lang="en-CA"/>
+          </a:p>
+        </p:txBody>
+      </p:sp>
+      <p:sp>
+        <p:nvSpPr>
+          <p:cNvPr id="22" name="Shape 20"/>
+          <p:cNvSpPr/>
+          <p:nvPr/>
+        </p:nvSpPr>
+        <p:spPr>
+          <a:xfrm>
+            <a:off x="4668012" y="2702052"/>
+            <a:ext cx="82296" cy="82296"/>
+          </a:xfrm>
+          <a:prstGeom prst="ellipse">
+            <a:avLst/>
+          </a:prstGeom>
+          <a:solidFill>
+            <a:srgbClr val="0A0F1C"/>
+          </a:solidFill>
+          <a:ln w="19050">
+            <a:solidFill>
+              <a:srgbClr val="F2A93B"/>
+            </a:solidFill>
+            <a:prstDash val="solid"/>
+          </a:ln>
+        </p:spPr>
+        <p:txBody>
+          <a:bodyPr/>
+          <a:lstStyle/>
+          <a:p>
+            <a:endParaRPr lang="en-CA"/>
+          </a:p>
+        </p:txBody>
+      </p:sp>
+      <p:sp>
+        <p:nvSpPr>
+          <p:cNvPr id="23" name="Shape 21"/>
+          <p:cNvSpPr/>
+          <p:nvPr/>
+        </p:nvSpPr>
+        <p:spPr>
+          <a:xfrm>
+            <a:off x="6039612" y="2702052"/>
+            <a:ext cx="82296" cy="82296"/>
+          </a:xfrm>
+          <a:prstGeom prst="ellipse">
+            <a:avLst/>
+          </a:prstGeom>
+          <a:solidFill>
+            <a:srgbClr val="0A0F1C"/>
+          </a:solidFill>
+          <a:ln w="19050">
+            <a:solidFill>
+              <a:srgbClr val="8B98AC"/>
+            </a:solidFill>
+            <a:prstDash val="solid"/>
+          </a:ln>
+        </p:spPr>
+        <p:txBody>
+          <a:bodyPr/>
+          <a:lstStyle/>
+          <a:p>
+            <a:endParaRPr lang="en-CA"/>
+          </a:p>
+        </p:txBody>
+      </p:sp>
+      <p:sp>
+        <p:nvSpPr>
+          <p:cNvPr id="24" name="Shape 22"/>
+          <p:cNvSpPr/>
+          <p:nvPr/>
+        </p:nvSpPr>
+        <p:spPr>
+          <a:xfrm>
+            <a:off x="7411212" y="2702052"/>
+            <a:ext cx="82296" cy="82296"/>
+          </a:xfrm>
+          <a:prstGeom prst="ellipse">
+            <a:avLst/>
+          </a:prstGeom>
+          <a:solidFill>
+            <a:srgbClr val="0A0F1C"/>
+          </a:solidFill>
+          <a:ln w="19050">
+            <a:solidFill>
+              <a:srgbClr val="5FE0C5"/>
+            </a:solidFill>
+            <a:prstDash val="solid"/>
+          </a:ln>
+        </p:spPr>
+        <p:txBody>
+          <a:bodyPr/>
+          <a:lstStyle/>
+          <a:p>
+            <a:endParaRPr lang="en-CA"/>
+          </a:p>
+        </p:txBody>
+      </p:sp>
+      <p:sp>
+        <p:nvSpPr>
+          <p:cNvPr id="25" name="Text 23"/>
+          <p:cNvSpPr/>
+          <p:nvPr/>
+        </p:nvSpPr>
+        <p:spPr>
+          <a:xfrm>
+            <a:off x="0" y="3017520"/>
+            <a:ext cx="12161520" cy="457200"/>
+          </a:xfrm>
+          <a:prstGeom prst="rect">
+            <a:avLst/>
+          </a:prstGeom>
+          <a:noFill/>
+          <a:ln/>
+        </p:spPr>
+        <p:txBody>
+          <a:bodyPr wrap="square" lIns="0" tIns="0" rIns="0" bIns="0" rtlCol="0" anchor="ctr"/>
+          <a:lstStyle/>
+          <a:p>
+            <a:pPr marL="0" indent="0" algn="ctr">
+              <a:buNone/>
+            </a:pPr>
+            <a:r>
+              <a:rPr lang="en-US" sz="2040" b="1" dirty="0">
+                <a:solidFill>
+                  <a:srgbClr val="F2A93B"/>
+                </a:solidFill>
+                <a:latin typeface="Calibri" pitchFamily="34" charset="0"/>
+                <a:ea typeface="Calibri" pitchFamily="34" charset="-122"/>
+                <a:cs typeface="Calibri" pitchFamily="34" charset="-120"/>
+              </a:rPr>
+              <a:t>Subscribe</a:t>
+            </a:r>
+            <a:r>
+              <a:rPr lang="en-US" sz="2040" dirty="0">
+                <a:solidFill>
+                  <a:srgbClr val="B8C0D0"/>
+                </a:solidFill>
+                <a:latin typeface="Calibri" pitchFamily="34" charset="0"/>
+                <a:ea typeface="Calibri" pitchFamily="34" charset="-122"/>
+                <a:cs typeface="Calibri" pitchFamily="34" charset="-120"/>
+              </a:rPr>
+              <a:t>  for every chapter  ·  </a:t>
+            </a:r>
+            <a:r>
+              <a:rPr lang="en-US" sz="2040" b="1" dirty="0">
+                <a:solidFill>
+                  <a:srgbClr val="5FE0C5"/>
+                </a:solidFill>
+                <a:latin typeface="Calibri" pitchFamily="34" charset="0"/>
+                <a:ea typeface="Calibri" pitchFamily="34" charset="-122"/>
+                <a:cs typeface="Calibri" pitchFamily="34" charset="-120"/>
+              </a:rPr>
+              <a:t>Star the repo</a:t>
+            </a:r>
+            <a:r>
+              <a:rPr lang="en-US" sz="2040" dirty="0">
+                <a:solidFill>
+                  <a:srgbClr val="B8C0D0"/>
+                </a:solidFill>
+                <a:latin typeface="Calibri" pitchFamily="34" charset="0"/>
+                <a:ea typeface="Calibri" pitchFamily="34" charset="-122"/>
+                <a:cs typeface="Calibri" pitchFamily="34" charset="-120"/>
+              </a:rPr>
+              <a:t>  on GitHub</a:t>
+            </a:r>
+            <a:endParaRPr lang="en-US" sz="2040" dirty="0"/>
+          </a:p>
+        </p:txBody>
+      </p:sp>
+      <p:sp>
+        <p:nvSpPr>
+          <p:cNvPr id="26" name="Text 24"/>
+          <p:cNvSpPr/>
+          <p:nvPr/>
+        </p:nvSpPr>
+        <p:spPr>
+          <a:xfrm>
+            <a:off x="0" y="3657600"/>
+            <a:ext cx="12161520" cy="365760"/>
+          </a:xfrm>
+          <a:prstGeom prst="rect">
+            <a:avLst/>
+          </a:prstGeom>
+          <a:noFill/>
+          <a:ln/>
+        </p:spPr>
+        <p:txBody>
+          <a:bodyPr wrap="square" lIns="0" tIns="0" rIns="0" bIns="0" rtlCol="0" anchor="ctr"/>
+          <a:lstStyle/>
+          <a:p>
+            <a:pPr marL="0" indent="0" algn="ctr">
+              <a:buNone/>
+            </a:pPr>
+            <a:r>
+              <a:rPr lang="en-US" sz="1800" dirty="0">
+                <a:solidFill>
+                  <a:srgbClr val="8B98AC"/>
+                </a:solidFill>
+                <a:latin typeface="Courier New" pitchFamily="34" charset="0"/>
+                <a:ea typeface="Courier New" pitchFamily="34" charset="-122"/>
+                <a:cs typeface="Courier New" pitchFamily="34" charset="-120"/>
+              </a:rPr>
+              <a:t>github.com/balajich/spring-ai-with-llama</a:t>
+            </a:r>
+            <a:endParaRPr lang="en-US" sz="1800" dirty="0"/>
+          </a:p>
+        </p:txBody>
+      </p:sp>
+      <p:sp>
+        <p:nvSpPr>
+          <p:cNvPr id="27" name="Text 25"/>
+          <p:cNvSpPr/>
+          <p:nvPr/>
+        </p:nvSpPr>
+        <p:spPr>
+          <a:xfrm>
+            <a:off x="0" y="4114800"/>
+            <a:ext cx="12161520" cy="365760"/>
+          </a:xfrm>
+          <a:prstGeom prst="rect">
+            <a:avLst/>
+          </a:prstGeom>
+          <a:noFill/>
+          <a:ln/>
+        </p:spPr>
+        <p:txBody>
+          <a:bodyPr wrap="square" lIns="0" tIns="0" rIns="0" bIns="0" rtlCol="0" anchor="ctr"/>
+          <a:lstStyle/>
+          <a:p>
+            <a:pPr marL="0" indent="0" algn="ctr">
+              <a:buNone/>
+            </a:pPr>
+            <a:r>
+              <a:rPr lang="en-US" sz="1560" dirty="0">
+                <a:solidFill>
+                  <a:srgbClr val="5B6478"/>
+                </a:solidFill>
+                <a:latin typeface="Courier New" pitchFamily="34" charset="0"/>
+                <a:ea typeface="Courier New" pitchFamily="34" charset="-122"/>
+                <a:cs typeface="Courier New" pitchFamily="34" charset="-120"/>
+              </a:rPr>
+              <a:t>prompttoapps.com</a:t>
+            </a:r>
+            <a:endParaRPr lang="en-US" sz="1560" dirty="0"/>
           </a:p>
         </p:txBody>
       </p:sp>
@@ -3438,6 +4458,7 @@
         <a:solidFill>
           <a:srgbClr val="0A0F1C"/>
         </a:solidFill>
+        <a:effectLst/>
       </p:bgPr>
     </p:bg>
     <p:spTree>
@@ -3478,6 +4499,13 @@
             <a:prstDash val="solid"/>
           </a:ln>
         </p:spPr>
+        <p:txBody>
+          <a:bodyPr/>
+          <a:lstStyle/>
+          <a:p>
+            <a:endParaRPr lang="en-CA"/>
+          </a:p>
+        </p:txBody>
       </p:sp>
       <p:sp>
         <p:nvSpPr>
@@ -3503,6 +4531,13 @@
             <a:prstDash val="solid"/>
           </a:ln>
         </p:spPr>
+        <p:txBody>
+          <a:bodyPr/>
+          <a:lstStyle/>
+          <a:p>
+            <a:endParaRPr lang="en-CA"/>
+          </a:p>
+        </p:txBody>
       </p:sp>
       <p:sp>
         <p:nvSpPr>
@@ -3528,6 +4563,13 @@
             <a:prstDash val="solid"/>
           </a:ln>
         </p:spPr>
+        <p:txBody>
+          <a:bodyPr/>
+          <a:lstStyle/>
+          <a:p>
+            <a:endParaRPr lang="en-CA"/>
+          </a:p>
+        </p:txBody>
       </p:sp>
       <p:sp>
         <p:nvSpPr>
@@ -3550,6 +4592,13 @@
           </a:solidFill>
           <a:ln/>
         </p:spPr>
+        <p:txBody>
+          <a:bodyPr/>
+          <a:lstStyle/>
+          <a:p>
+            <a:endParaRPr lang="en-CA"/>
+          </a:p>
+        </p:txBody>
       </p:sp>
       <p:sp>
         <p:nvSpPr>
@@ -3572,6 +4621,13 @@
           </a:solidFill>
           <a:ln/>
         </p:spPr>
+        <p:txBody>
+          <a:bodyPr/>
+          <a:lstStyle/>
+          <a:p>
+            <a:endParaRPr lang="en-CA"/>
+          </a:p>
+        </p:txBody>
       </p:sp>
       <p:sp>
         <p:nvSpPr>
@@ -3594,6 +4650,13 @@
           </a:solidFill>
           <a:ln/>
         </p:spPr>
+        <p:txBody>
+          <a:bodyPr/>
+          <a:lstStyle/>
+          <a:p>
+            <a:endParaRPr lang="en-CA"/>
+          </a:p>
+        </p:txBody>
       </p:sp>
       <p:sp>
         <p:nvSpPr>
@@ -3616,6 +4679,13 @@
           </a:solidFill>
           <a:ln/>
         </p:spPr>
+        <p:txBody>
+          <a:bodyPr/>
+          <a:lstStyle/>
+          <a:p>
+            <a:endParaRPr lang="en-CA"/>
+          </a:p>
+        </p:txBody>
       </p:sp>
       <p:sp>
         <p:nvSpPr>
@@ -3641,6 +4711,13 @@
             <a:prstDash val="solid"/>
           </a:ln>
         </p:spPr>
+        <p:txBody>
+          <a:bodyPr/>
+          <a:lstStyle/>
+          <a:p>
+            <a:endParaRPr lang="en-CA"/>
+          </a:p>
+        </p:txBody>
       </p:sp>
       <p:sp>
         <p:nvSpPr>
@@ -3666,6 +4743,13 @@
             <a:prstDash val="solid"/>
           </a:ln>
         </p:spPr>
+        <p:txBody>
+          <a:bodyPr/>
+          <a:lstStyle/>
+          <a:p>
+            <a:endParaRPr lang="en-CA"/>
+          </a:p>
+        </p:txBody>
       </p:sp>
       <p:sp>
         <p:nvSpPr>
@@ -3691,6 +4775,13 @@
             <a:prstDash val="solid"/>
           </a:ln>
         </p:spPr>
+        <p:txBody>
+          <a:bodyPr/>
+          <a:lstStyle/>
+          <a:p>
+            <a:endParaRPr lang="en-CA"/>
+          </a:p>
+        </p:txBody>
       </p:sp>
       <p:sp>
         <p:nvSpPr>
@@ -3713,6 +4804,13 @@
           </a:solidFill>
           <a:ln/>
         </p:spPr>
+        <p:txBody>
+          <a:bodyPr/>
+          <a:lstStyle/>
+          <a:p>
+            <a:endParaRPr lang="en-CA"/>
+          </a:p>
+        </p:txBody>
       </p:sp>
       <p:sp>
         <p:nvSpPr>
@@ -3735,6 +4833,13 @@
           </a:solidFill>
           <a:ln/>
         </p:spPr>
+        <p:txBody>
+          <a:bodyPr/>
+          <a:lstStyle/>
+          <a:p>
+            <a:endParaRPr lang="en-CA"/>
+          </a:p>
+        </p:txBody>
       </p:sp>
       <p:sp>
         <p:nvSpPr>
@@ -3757,6 +4862,13 @@
           </a:solidFill>
           <a:ln/>
         </p:spPr>
+        <p:txBody>
+          <a:bodyPr/>
+          <a:lstStyle/>
+          <a:p>
+            <a:endParaRPr lang="en-CA"/>
+          </a:p>
+        </p:txBody>
       </p:sp>
       <p:sp>
         <p:nvSpPr>
@@ -3779,6 +4891,13 @@
           </a:solidFill>
           <a:ln/>
         </p:spPr>
+        <p:txBody>
+          <a:bodyPr/>
+          <a:lstStyle/>
+          <a:p>
+            <a:endParaRPr lang="en-CA"/>
+          </a:p>
+        </p:txBody>
       </p:sp>
       <p:sp>
         <p:nvSpPr>
@@ -3801,7 +4920,7 @@
           <a:bodyPr wrap="square" lIns="0" tIns="0" rIns="0" bIns="0" rtlCol="0" anchor="ctr"/>
           <a:lstStyle/>
           <a:p>
-            <a:pPr indent="0" marL="0">
+            <a:pPr marL="0" indent="0">
               <a:buNone/>
             </a:pPr>
             <a:r>
@@ -3840,7 +4959,7 @@
           <a:bodyPr wrap="square" lIns="0" tIns="0" rIns="0" bIns="0" rtlCol="0" anchor="ctr"/>
           <a:lstStyle/>
           <a:p>
-            <a:pPr algn="r" indent="0" marL="0">
+            <a:pPr marL="0" indent="0" algn="r">
               <a:buNone/>
             </a:pPr>
             <a:r>
@@ -3852,7 +4971,7 @@
                 <a:ea typeface="Courier New" pitchFamily="34" charset="-122"/>
                 <a:cs typeface="Courier New" pitchFamily="34" charset="-120"/>
               </a:rPr>
-              <a:t>2 / 10</a:t>
+              <a:t>2 / 11</a:t>
             </a:r>
             <a:endParaRPr lang="en-US" sz="1080" dirty="0"/>
           </a:p>
@@ -3879,11 +4998,11 @@
           <a:bodyPr wrap="square" lIns="0" tIns="0" rIns="0" bIns="0" rtlCol="0" anchor="ctr"/>
           <a:lstStyle/>
           <a:p>
-            <a:pPr indent="0" marL="0">
+            <a:pPr marL="0" indent="0">
               <a:buNone/>
             </a:pPr>
             <a:r>
-              <a:rPr lang="en-US" sz="1440" spc="200" kern="0" dirty="0">
+              <a:rPr lang="en-US" sz="1440" kern="0" spc="200" dirty="0">
                 <a:solidFill>
                   <a:srgbClr val="5FE0C5"/>
                 </a:solidFill>
@@ -3918,7 +5037,7 @@
           <a:bodyPr wrap="square" lIns="0" tIns="0" rIns="0" bIns="0" rtlCol="0" anchor="ctr"/>
           <a:lstStyle/>
           <a:p>
-            <a:pPr algn="l" indent="0" marL="0">
+            <a:pPr marL="0" indent="0" algn="l">
               <a:buNone/>
             </a:pPr>
             <a:r>
@@ -3962,13 +5081,20 @@
             <a:prstDash val="solid"/>
           </a:ln>
           <a:effectLst>
-            <a:outerShdw sx="100000" sy="100000" kx="0" ky="0" algn="bl" rotWithShape="0" blurRad="101600" dist="38100" dir="2700000">
+            <a:outerShdw blurRad="101600" dist="38100" dir="2700000" algn="bl" rotWithShape="0">
               <a:srgbClr val="000000">
                 <a:alpha val="25000"/>
               </a:srgbClr>
             </a:outerShdw>
           </a:effectLst>
         </p:spPr>
+        <p:txBody>
+          <a:bodyPr/>
+          <a:lstStyle/>
+          <a:p>
+            <a:endParaRPr lang="en-CA"/>
+          </a:p>
+        </p:txBody>
       </p:sp>
       <p:sp>
         <p:nvSpPr>
@@ -3994,6 +5120,13 @@
             <a:prstDash val="solid"/>
           </a:ln>
         </p:spPr>
+        <p:txBody>
+          <a:bodyPr/>
+          <a:lstStyle/>
+          <a:p>
+            <a:endParaRPr lang="en-CA"/>
+          </a:p>
+        </p:txBody>
       </p:sp>
       <p:sp>
         <p:nvSpPr>
@@ -4016,7 +5149,7 @@
           <a:bodyPr wrap="square" lIns="0" tIns="0" rIns="0" bIns="0" rtlCol="0" anchor="ctr"/>
           <a:lstStyle/>
           <a:p>
-            <a:pPr algn="ctr" indent="0" marL="0">
+            <a:pPr marL="0" indent="0" algn="ctr">
               <a:buNone/>
             </a:pPr>
             <a:r>
@@ -4055,7 +5188,7 @@
           <a:bodyPr wrap="square" lIns="0" tIns="0" rIns="0" bIns="0" rtlCol="0" anchor="ctr"/>
           <a:lstStyle/>
           <a:p>
-            <a:pPr algn="ctr" indent="0" marL="0">
+            <a:pPr marL="0" indent="0" algn="ctr">
               <a:buNone/>
             </a:pPr>
             <a:r>
@@ -4094,7 +5227,7 @@
           <a:bodyPr wrap="square" lIns="0" tIns="0" rIns="0" bIns="0" rtlCol="0" anchor="t"/>
           <a:lstStyle/>
           <a:p>
-            <a:pPr algn="ctr" indent="0" marL="0">
+            <a:pPr marL="0" indent="0" algn="ctr">
               <a:lnSpc>
                 <a:spcPct val="120000"/>
               </a:lnSpc>
@@ -4114,7 +5247,7 @@
             <a:endParaRPr lang="en-US" sz="1620" dirty="0"/>
           </a:p>
           <a:p>
-            <a:pPr algn="ctr" indent="0" marL="0">
+            <a:pPr marL="0" indent="0" algn="ctr">
               <a:lnSpc>
                 <a:spcPct val="120000"/>
               </a:lnSpc>
@@ -4161,13 +5294,20 @@
             <a:prstDash val="solid"/>
           </a:ln>
           <a:effectLst>
-            <a:outerShdw sx="100000" sy="100000" kx="0" ky="0" algn="bl" rotWithShape="0" blurRad="101600" dist="38100" dir="2700000">
+            <a:outerShdw blurRad="101600" dist="38100" dir="2700000" algn="bl" rotWithShape="0">
               <a:srgbClr val="000000">
                 <a:alpha val="25000"/>
               </a:srgbClr>
             </a:outerShdw>
           </a:effectLst>
         </p:spPr>
+        <p:txBody>
+          <a:bodyPr/>
+          <a:lstStyle/>
+          <a:p>
+            <a:endParaRPr lang="en-CA"/>
+          </a:p>
+        </p:txBody>
       </p:sp>
       <p:sp>
         <p:nvSpPr>
@@ -4193,6 +5333,13 @@
             <a:prstDash val="solid"/>
           </a:ln>
         </p:spPr>
+        <p:txBody>
+          <a:bodyPr/>
+          <a:lstStyle/>
+          <a:p>
+            <a:endParaRPr lang="en-CA"/>
+          </a:p>
+        </p:txBody>
       </p:sp>
       <p:sp>
         <p:nvSpPr>
@@ -4215,7 +5362,7 @@
           <a:bodyPr wrap="square" lIns="0" tIns="0" rIns="0" bIns="0" rtlCol="0" anchor="ctr"/>
           <a:lstStyle/>
           <a:p>
-            <a:pPr algn="ctr" indent="0" marL="0">
+            <a:pPr marL="0" indent="0" algn="ctr">
               <a:buNone/>
             </a:pPr>
             <a:r>
@@ -4254,7 +5401,7 @@
           <a:bodyPr wrap="square" lIns="0" tIns="0" rIns="0" bIns="0" rtlCol="0" anchor="ctr"/>
           <a:lstStyle/>
           <a:p>
-            <a:pPr algn="ctr" indent="0" marL="0">
+            <a:pPr marL="0" indent="0" algn="ctr">
               <a:buNone/>
             </a:pPr>
             <a:r>
@@ -4293,7 +5440,7 @@
           <a:bodyPr wrap="square" lIns="0" tIns="0" rIns="0" bIns="0" rtlCol="0" anchor="t"/>
           <a:lstStyle/>
           <a:p>
-            <a:pPr algn="ctr" indent="0" marL="0">
+            <a:pPr marL="0" indent="0" algn="ctr">
               <a:lnSpc>
                 <a:spcPct val="120000"/>
               </a:lnSpc>
@@ -4313,7 +5460,7 @@
             <a:endParaRPr lang="en-US" sz="1620" dirty="0"/>
           </a:p>
           <a:p>
-            <a:pPr algn="ctr" indent="0" marL="0">
+            <a:pPr marL="0" indent="0" algn="ctr">
               <a:lnSpc>
                 <a:spcPct val="120000"/>
               </a:lnSpc>
@@ -4360,13 +5507,20 @@
             <a:prstDash val="solid"/>
           </a:ln>
           <a:effectLst>
-            <a:outerShdw sx="100000" sy="100000" kx="0" ky="0" algn="bl" rotWithShape="0" blurRad="101600" dist="38100" dir="2700000">
+            <a:outerShdw blurRad="101600" dist="38100" dir="2700000" algn="bl" rotWithShape="0">
               <a:srgbClr val="000000">
                 <a:alpha val="25000"/>
               </a:srgbClr>
             </a:outerShdw>
           </a:effectLst>
         </p:spPr>
+        <p:txBody>
+          <a:bodyPr/>
+          <a:lstStyle/>
+          <a:p>
+            <a:endParaRPr lang="en-CA"/>
+          </a:p>
+        </p:txBody>
       </p:sp>
       <p:sp>
         <p:nvSpPr>
@@ -4392,6 +5546,13 @@
             <a:prstDash val="solid"/>
           </a:ln>
         </p:spPr>
+        <p:txBody>
+          <a:bodyPr/>
+          <a:lstStyle/>
+          <a:p>
+            <a:endParaRPr lang="en-CA"/>
+          </a:p>
+        </p:txBody>
       </p:sp>
       <p:sp>
         <p:nvSpPr>
@@ -4414,7 +5575,7 @@
           <a:bodyPr wrap="square" lIns="0" tIns="0" rIns="0" bIns="0" rtlCol="0" anchor="ctr"/>
           <a:lstStyle/>
           <a:p>
-            <a:pPr algn="ctr" indent="0" marL="0">
+            <a:pPr marL="0" indent="0" algn="ctr">
               <a:buNone/>
             </a:pPr>
             <a:r>
@@ -4453,7 +5614,7 @@
           <a:bodyPr wrap="square" lIns="0" tIns="0" rIns="0" bIns="0" rtlCol="0" anchor="ctr"/>
           <a:lstStyle/>
           <a:p>
-            <a:pPr algn="ctr" indent="0" marL="0">
+            <a:pPr marL="0" indent="0" algn="ctr">
               <a:buNone/>
             </a:pPr>
             <a:r>
@@ -4492,7 +5653,7 @@
           <a:bodyPr wrap="square" lIns="0" tIns="0" rIns="0" bIns="0" rtlCol="0" anchor="t"/>
           <a:lstStyle/>
           <a:p>
-            <a:pPr algn="ctr" indent="0" marL="0">
+            <a:pPr marL="0" indent="0" algn="ctr">
               <a:lnSpc>
                 <a:spcPct val="120000"/>
               </a:lnSpc>
@@ -4512,7 +5673,7 @@
             <a:endParaRPr lang="en-US" sz="1620" dirty="0"/>
           </a:p>
           <a:p>
-            <a:pPr algn="ctr" indent="0" marL="0">
+            <a:pPr marL="0" indent="0" algn="ctr">
               <a:lnSpc>
                 <a:spcPct val="120000"/>
               </a:lnSpc>
@@ -4549,6 +5710,7 @@
         <a:solidFill>
           <a:srgbClr val="0A0F1C"/>
         </a:solidFill>
+        <a:effectLst/>
       </p:bgPr>
     </p:bg>
     <p:spTree>
@@ -4589,6 +5751,13 @@
             <a:prstDash val="solid"/>
           </a:ln>
         </p:spPr>
+        <p:txBody>
+          <a:bodyPr/>
+          <a:lstStyle/>
+          <a:p>
+            <a:endParaRPr lang="en-CA"/>
+          </a:p>
+        </p:txBody>
       </p:sp>
       <p:sp>
         <p:nvSpPr>
@@ -4614,6 +5783,13 @@
             <a:prstDash val="solid"/>
           </a:ln>
         </p:spPr>
+        <p:txBody>
+          <a:bodyPr/>
+          <a:lstStyle/>
+          <a:p>
+            <a:endParaRPr lang="en-CA"/>
+          </a:p>
+        </p:txBody>
       </p:sp>
       <p:sp>
         <p:nvSpPr>
@@ -4639,6 +5815,13 @@
             <a:prstDash val="solid"/>
           </a:ln>
         </p:spPr>
+        <p:txBody>
+          <a:bodyPr/>
+          <a:lstStyle/>
+          <a:p>
+            <a:endParaRPr lang="en-CA"/>
+          </a:p>
+        </p:txBody>
       </p:sp>
       <p:sp>
         <p:nvSpPr>
@@ -4661,6 +5844,13 @@
           </a:solidFill>
           <a:ln/>
         </p:spPr>
+        <p:txBody>
+          <a:bodyPr/>
+          <a:lstStyle/>
+          <a:p>
+            <a:endParaRPr lang="en-CA"/>
+          </a:p>
+        </p:txBody>
       </p:sp>
       <p:sp>
         <p:nvSpPr>
@@ -4683,6 +5873,13 @@
           </a:solidFill>
           <a:ln/>
         </p:spPr>
+        <p:txBody>
+          <a:bodyPr/>
+          <a:lstStyle/>
+          <a:p>
+            <a:endParaRPr lang="en-CA"/>
+          </a:p>
+        </p:txBody>
       </p:sp>
       <p:sp>
         <p:nvSpPr>
@@ -4705,6 +5902,13 @@
           </a:solidFill>
           <a:ln/>
         </p:spPr>
+        <p:txBody>
+          <a:bodyPr/>
+          <a:lstStyle/>
+          <a:p>
+            <a:endParaRPr lang="en-CA"/>
+          </a:p>
+        </p:txBody>
       </p:sp>
       <p:sp>
         <p:nvSpPr>
@@ -4727,6 +5931,13 @@
           </a:solidFill>
           <a:ln/>
         </p:spPr>
+        <p:txBody>
+          <a:bodyPr/>
+          <a:lstStyle/>
+          <a:p>
+            <a:endParaRPr lang="en-CA"/>
+          </a:p>
+        </p:txBody>
       </p:sp>
       <p:sp>
         <p:nvSpPr>
@@ -4752,6 +5963,13 @@
             <a:prstDash val="solid"/>
           </a:ln>
         </p:spPr>
+        <p:txBody>
+          <a:bodyPr/>
+          <a:lstStyle/>
+          <a:p>
+            <a:endParaRPr lang="en-CA"/>
+          </a:p>
+        </p:txBody>
       </p:sp>
       <p:sp>
         <p:nvSpPr>
@@ -4777,6 +5995,13 @@
             <a:prstDash val="solid"/>
           </a:ln>
         </p:spPr>
+        <p:txBody>
+          <a:bodyPr/>
+          <a:lstStyle/>
+          <a:p>
+            <a:endParaRPr lang="en-CA"/>
+          </a:p>
+        </p:txBody>
       </p:sp>
       <p:sp>
         <p:nvSpPr>
@@ -4802,6 +6027,13 @@
             <a:prstDash val="solid"/>
           </a:ln>
         </p:spPr>
+        <p:txBody>
+          <a:bodyPr/>
+          <a:lstStyle/>
+          <a:p>
+            <a:endParaRPr lang="en-CA"/>
+          </a:p>
+        </p:txBody>
       </p:sp>
       <p:sp>
         <p:nvSpPr>
@@ -4824,6 +6056,13 @@
           </a:solidFill>
           <a:ln/>
         </p:spPr>
+        <p:txBody>
+          <a:bodyPr/>
+          <a:lstStyle/>
+          <a:p>
+            <a:endParaRPr lang="en-CA"/>
+          </a:p>
+        </p:txBody>
       </p:sp>
       <p:sp>
         <p:nvSpPr>
@@ -4846,6 +6085,13 @@
           </a:solidFill>
           <a:ln/>
         </p:spPr>
+        <p:txBody>
+          <a:bodyPr/>
+          <a:lstStyle/>
+          <a:p>
+            <a:endParaRPr lang="en-CA"/>
+          </a:p>
+        </p:txBody>
       </p:sp>
       <p:sp>
         <p:nvSpPr>
@@ -4868,6 +6114,13 @@
           </a:solidFill>
           <a:ln/>
         </p:spPr>
+        <p:txBody>
+          <a:bodyPr/>
+          <a:lstStyle/>
+          <a:p>
+            <a:endParaRPr lang="en-CA"/>
+          </a:p>
+        </p:txBody>
       </p:sp>
       <p:sp>
         <p:nvSpPr>
@@ -4890,6 +6143,13 @@
           </a:solidFill>
           <a:ln/>
         </p:spPr>
+        <p:txBody>
+          <a:bodyPr/>
+          <a:lstStyle/>
+          <a:p>
+            <a:endParaRPr lang="en-CA"/>
+          </a:p>
+        </p:txBody>
       </p:sp>
       <p:sp>
         <p:nvSpPr>
@@ -4912,7 +6172,7 @@
           <a:bodyPr wrap="square" lIns="0" tIns="0" rIns="0" bIns="0" rtlCol="0" anchor="ctr"/>
           <a:lstStyle/>
           <a:p>
-            <a:pPr indent="0" marL="0">
+            <a:pPr marL="0" indent="0">
               <a:buNone/>
             </a:pPr>
             <a:r>
@@ -4951,7 +6211,7 @@
           <a:bodyPr wrap="square" lIns="0" tIns="0" rIns="0" bIns="0" rtlCol="0" anchor="ctr"/>
           <a:lstStyle/>
           <a:p>
-            <a:pPr algn="r" indent="0" marL="0">
+            <a:pPr marL="0" indent="0" algn="r">
               <a:buNone/>
             </a:pPr>
             <a:r>
@@ -4963,7 +6223,7 @@
                 <a:ea typeface="Courier New" pitchFamily="34" charset="-122"/>
                 <a:cs typeface="Courier New" pitchFamily="34" charset="-120"/>
               </a:rPr>
-              <a:t>3 / 10</a:t>
+              <a:t>3 / 11</a:t>
             </a:r>
             <a:endParaRPr lang="en-US" sz="1080" dirty="0"/>
           </a:p>
@@ -4990,11 +6250,11 @@
           <a:bodyPr wrap="square" lIns="0" tIns="0" rIns="0" bIns="0" rtlCol="0" anchor="ctr"/>
           <a:lstStyle/>
           <a:p>
-            <a:pPr indent="0" marL="0">
+            <a:pPr marL="0" indent="0">
               <a:buNone/>
             </a:pPr>
             <a:r>
-              <a:rPr lang="en-US" sz="1440" spc="200" kern="0" dirty="0">
+              <a:rPr lang="en-US" sz="1440" kern="0" spc="200" dirty="0">
                 <a:solidFill>
                   <a:srgbClr val="5FE0C5"/>
                 </a:solidFill>
@@ -5029,7 +6289,7 @@
           <a:bodyPr wrap="square" lIns="0" tIns="0" rIns="0" bIns="0" rtlCol="0" anchor="ctr"/>
           <a:lstStyle/>
           <a:p>
-            <a:pPr algn="l" indent="0" marL="0">
+            <a:pPr marL="0" indent="0" algn="l">
               <a:buNone/>
             </a:pPr>
             <a:r>
@@ -5068,7 +6328,7 @@
           <a:bodyPr wrap="square" lIns="0" tIns="0" rIns="0" bIns="0" rtlCol="0" anchor="ctr"/>
           <a:lstStyle/>
           <a:p>
-            <a:pPr indent="0" marL="0">
+            <a:pPr marL="0" indent="0">
               <a:buNone/>
             </a:pPr>
             <a:r>
@@ -5082,9 +6342,6 @@
               </a:rPr>
               <a:t>A fictional company, </a:t>
             </a:r>
-            <a:pPr indent="0" marL="0">
-              <a:buNone/>
-            </a:pPr>
             <a:r>
               <a:rPr lang="en-US" sz="2160" b="1" dirty="0">
                 <a:solidFill>
@@ -5096,9 +6353,6 @@
               </a:rPr>
               <a:t>TechCorp</a:t>
             </a:r>
-            <a:pPr indent="0" marL="0">
-              <a:buNone/>
-            </a:pPr>
             <a:r>
               <a:rPr lang="en-US" sz="2160" dirty="0">
                 <a:solidFill>
@@ -5258,13 +6512,20 @@
             <a:prstDash val="solid"/>
           </a:ln>
           <a:effectLst>
-            <a:outerShdw sx="100000" sy="100000" kx="0" ky="0" algn="bl" rotWithShape="0" blurRad="76200" dist="38100" dir="5400000">
+            <a:outerShdw blurRad="76200" dist="38100" dir="5400000" algn="bl" rotWithShape="0">
               <a:srgbClr val="000000">
                 <a:alpha val="20000"/>
               </a:srgbClr>
             </a:outerShdw>
           </a:effectLst>
         </p:spPr>
+        <p:txBody>
+          <a:bodyPr/>
+          <a:lstStyle/>
+          <a:p>
+            <a:endParaRPr lang="en-CA"/>
+          </a:p>
+        </p:txBody>
       </p:sp>
       <p:sp>
         <p:nvSpPr>
@@ -5287,7 +6548,7 @@
           <a:bodyPr wrap="square" lIns="0" tIns="0" rIns="0" bIns="0" rtlCol="0" anchor="ctr"/>
           <a:lstStyle/>
           <a:p>
-            <a:pPr indent="0" marL="0">
+            <a:pPr marL="0" indent="0">
               <a:buNone/>
             </a:pPr>
             <a:r>
@@ -5326,7 +6587,7 @@
           <a:bodyPr wrap="square" lIns="0" tIns="0" rIns="0" bIns="0" rtlCol="0" anchor="ctr"/>
           <a:lstStyle/>
           <a:p>
-            <a:pPr indent="0" marL="0">
+            <a:pPr marL="0" indent="0">
               <a:buNone/>
             </a:pPr>
             <a:r>
@@ -5367,6 +6628,13 @@
             <a:tailEnd type="triangle"/>
           </a:ln>
         </p:spPr>
+        <p:txBody>
+          <a:bodyPr/>
+          <a:lstStyle/>
+          <a:p>
+            <a:endParaRPr lang="en-CA"/>
+          </a:p>
+        </p:txBody>
       </p:sp>
       <p:sp>
         <p:nvSpPr>
@@ -5394,13 +6662,20 @@
             <a:prstDash val="solid"/>
           </a:ln>
           <a:effectLst>
-            <a:outerShdw sx="100000" sy="100000" kx="0" ky="0" algn="bl" rotWithShape="0" blurRad="76200" dist="38100" dir="5400000">
+            <a:outerShdw blurRad="76200" dist="38100" dir="5400000" algn="bl" rotWithShape="0">
               <a:srgbClr val="000000">
                 <a:alpha val="20000"/>
               </a:srgbClr>
             </a:outerShdw>
           </a:effectLst>
         </p:spPr>
+        <p:txBody>
+          <a:bodyPr/>
+          <a:lstStyle/>
+          <a:p>
+            <a:endParaRPr lang="en-CA"/>
+          </a:p>
+        </p:txBody>
       </p:sp>
       <p:sp>
         <p:nvSpPr>
@@ -5423,7 +6698,7 @@
           <a:bodyPr wrap="square" lIns="0" tIns="0" rIns="0" bIns="0" rtlCol="0" anchor="ctr"/>
           <a:lstStyle/>
           <a:p>
-            <a:pPr indent="0" marL="0">
+            <a:pPr marL="0" indent="0">
               <a:buNone/>
             </a:pPr>
             <a:r>
@@ -5462,7 +6737,7 @@
           <a:bodyPr wrap="square" lIns="0" tIns="0" rIns="0" bIns="0" rtlCol="0" anchor="ctr"/>
           <a:lstStyle/>
           <a:p>
-            <a:pPr indent="0" marL="0">
+            <a:pPr marL="0" indent="0">
               <a:buNone/>
             </a:pPr>
             <a:r>
@@ -5503,6 +6778,13 @@
             <a:tailEnd type="triangle"/>
           </a:ln>
         </p:spPr>
+        <p:txBody>
+          <a:bodyPr/>
+          <a:lstStyle/>
+          <a:p>
+            <a:endParaRPr lang="en-CA"/>
+          </a:p>
+        </p:txBody>
       </p:sp>
       <p:sp>
         <p:nvSpPr>
@@ -5530,13 +6812,20 @@
             <a:prstDash val="solid"/>
           </a:ln>
           <a:effectLst>
-            <a:outerShdw sx="100000" sy="100000" kx="0" ky="0" algn="bl" rotWithShape="0" blurRad="76200" dist="38100" dir="5400000">
+            <a:outerShdw blurRad="76200" dist="38100" dir="5400000" algn="bl" rotWithShape="0">
               <a:srgbClr val="000000">
                 <a:alpha val="20000"/>
               </a:srgbClr>
             </a:outerShdw>
           </a:effectLst>
         </p:spPr>
+        <p:txBody>
+          <a:bodyPr/>
+          <a:lstStyle/>
+          <a:p>
+            <a:endParaRPr lang="en-CA"/>
+          </a:p>
+        </p:txBody>
       </p:sp>
       <p:sp>
         <p:nvSpPr>
@@ -5559,7 +6848,7 @@
           <a:bodyPr wrap="square" lIns="0" tIns="0" rIns="0" bIns="0" rtlCol="0" anchor="ctr"/>
           <a:lstStyle/>
           <a:p>
-            <a:pPr indent="0" marL="0">
+            <a:pPr marL="0" indent="0">
               <a:buNone/>
             </a:pPr>
             <a:r>
@@ -5598,7 +6887,7 @@
           <a:bodyPr wrap="square" lIns="0" tIns="0" rIns="0" bIns="0" rtlCol="0" anchor="ctr"/>
           <a:lstStyle/>
           <a:p>
-            <a:pPr indent="0" marL="0">
+            <a:pPr marL="0" indent="0">
               <a:buNone/>
             </a:pPr>
             <a:r>
@@ -5639,6 +6928,13 @@
             <a:tailEnd type="triangle"/>
           </a:ln>
         </p:spPr>
+        <p:txBody>
+          <a:bodyPr/>
+          <a:lstStyle/>
+          <a:p>
+            <a:endParaRPr lang="en-CA"/>
+          </a:p>
+        </p:txBody>
       </p:sp>
       <p:sp>
         <p:nvSpPr>
@@ -5666,13 +6962,20 @@
             <a:prstDash val="solid"/>
           </a:ln>
           <a:effectLst>
-            <a:outerShdw sx="100000" sy="100000" kx="0" ky="0" algn="bl" rotWithShape="0" blurRad="76200" dist="38100" dir="5400000">
+            <a:outerShdw blurRad="76200" dist="38100" dir="5400000" algn="bl" rotWithShape="0">
               <a:srgbClr val="000000">
                 <a:alpha val="20000"/>
               </a:srgbClr>
             </a:outerShdw>
           </a:effectLst>
         </p:spPr>
+        <p:txBody>
+          <a:bodyPr/>
+          <a:lstStyle/>
+          <a:p>
+            <a:endParaRPr lang="en-CA"/>
+          </a:p>
+        </p:txBody>
       </p:sp>
       <p:sp>
         <p:nvSpPr>
@@ -5695,7 +6998,7 @@
           <a:bodyPr wrap="square" lIns="0" tIns="0" rIns="0" bIns="0" rtlCol="0" anchor="ctr"/>
           <a:lstStyle/>
           <a:p>
-            <a:pPr indent="0" marL="0">
+            <a:pPr marL="0" indent="0">
               <a:buNone/>
             </a:pPr>
             <a:r>
@@ -5734,7 +7037,7 @@
           <a:bodyPr wrap="square" lIns="0" tIns="0" rIns="0" bIns="0" rtlCol="0" anchor="ctr"/>
           <a:lstStyle/>
           <a:p>
-            <a:pPr indent="0" marL="0">
+            <a:pPr marL="0" indent="0">
               <a:buNone/>
             </a:pPr>
             <a:r>
@@ -5768,6 +7071,7 @@
         <a:solidFill>
           <a:srgbClr val="0A0F1C"/>
         </a:solidFill>
+        <a:effectLst/>
       </p:bgPr>
     </p:bg>
     <p:spTree>
@@ -5808,6 +7112,13 @@
             <a:prstDash val="solid"/>
           </a:ln>
         </p:spPr>
+        <p:txBody>
+          <a:bodyPr/>
+          <a:lstStyle/>
+          <a:p>
+            <a:endParaRPr lang="en-CA"/>
+          </a:p>
+        </p:txBody>
       </p:sp>
       <p:sp>
         <p:nvSpPr>
@@ -5833,6 +7144,13 @@
             <a:prstDash val="solid"/>
           </a:ln>
         </p:spPr>
+        <p:txBody>
+          <a:bodyPr/>
+          <a:lstStyle/>
+          <a:p>
+            <a:endParaRPr lang="en-CA"/>
+          </a:p>
+        </p:txBody>
       </p:sp>
       <p:sp>
         <p:nvSpPr>
@@ -5858,6 +7176,13 @@
             <a:prstDash val="solid"/>
           </a:ln>
         </p:spPr>
+        <p:txBody>
+          <a:bodyPr/>
+          <a:lstStyle/>
+          <a:p>
+            <a:endParaRPr lang="en-CA"/>
+          </a:p>
+        </p:txBody>
       </p:sp>
       <p:sp>
         <p:nvSpPr>
@@ -5880,6 +7205,13 @@
           </a:solidFill>
           <a:ln/>
         </p:spPr>
+        <p:txBody>
+          <a:bodyPr/>
+          <a:lstStyle/>
+          <a:p>
+            <a:endParaRPr lang="en-CA"/>
+          </a:p>
+        </p:txBody>
       </p:sp>
       <p:sp>
         <p:nvSpPr>
@@ -5902,6 +7234,13 @@
           </a:solidFill>
           <a:ln/>
         </p:spPr>
+        <p:txBody>
+          <a:bodyPr/>
+          <a:lstStyle/>
+          <a:p>
+            <a:endParaRPr lang="en-CA"/>
+          </a:p>
+        </p:txBody>
       </p:sp>
       <p:sp>
         <p:nvSpPr>
@@ -5924,6 +7263,13 @@
           </a:solidFill>
           <a:ln/>
         </p:spPr>
+        <p:txBody>
+          <a:bodyPr/>
+          <a:lstStyle/>
+          <a:p>
+            <a:endParaRPr lang="en-CA"/>
+          </a:p>
+        </p:txBody>
       </p:sp>
       <p:sp>
         <p:nvSpPr>
@@ -5946,6 +7292,13 @@
           </a:solidFill>
           <a:ln/>
         </p:spPr>
+        <p:txBody>
+          <a:bodyPr/>
+          <a:lstStyle/>
+          <a:p>
+            <a:endParaRPr lang="en-CA"/>
+          </a:p>
+        </p:txBody>
       </p:sp>
       <p:sp>
         <p:nvSpPr>
@@ -5971,6 +7324,13 @@
             <a:prstDash val="solid"/>
           </a:ln>
         </p:spPr>
+        <p:txBody>
+          <a:bodyPr/>
+          <a:lstStyle/>
+          <a:p>
+            <a:endParaRPr lang="en-CA"/>
+          </a:p>
+        </p:txBody>
       </p:sp>
       <p:sp>
         <p:nvSpPr>
@@ -5996,6 +7356,13 @@
             <a:prstDash val="solid"/>
           </a:ln>
         </p:spPr>
+        <p:txBody>
+          <a:bodyPr/>
+          <a:lstStyle/>
+          <a:p>
+            <a:endParaRPr lang="en-CA"/>
+          </a:p>
+        </p:txBody>
       </p:sp>
       <p:sp>
         <p:nvSpPr>
@@ -6021,6 +7388,13 @@
             <a:prstDash val="solid"/>
           </a:ln>
         </p:spPr>
+        <p:txBody>
+          <a:bodyPr/>
+          <a:lstStyle/>
+          <a:p>
+            <a:endParaRPr lang="en-CA"/>
+          </a:p>
+        </p:txBody>
       </p:sp>
       <p:sp>
         <p:nvSpPr>
@@ -6043,6 +7417,13 @@
           </a:solidFill>
           <a:ln/>
         </p:spPr>
+        <p:txBody>
+          <a:bodyPr/>
+          <a:lstStyle/>
+          <a:p>
+            <a:endParaRPr lang="en-CA"/>
+          </a:p>
+        </p:txBody>
       </p:sp>
       <p:sp>
         <p:nvSpPr>
@@ -6065,6 +7446,13 @@
           </a:solidFill>
           <a:ln/>
         </p:spPr>
+        <p:txBody>
+          <a:bodyPr/>
+          <a:lstStyle/>
+          <a:p>
+            <a:endParaRPr lang="en-CA"/>
+          </a:p>
+        </p:txBody>
       </p:sp>
       <p:sp>
         <p:nvSpPr>
@@ -6087,6 +7475,13 @@
           </a:solidFill>
           <a:ln/>
         </p:spPr>
+        <p:txBody>
+          <a:bodyPr/>
+          <a:lstStyle/>
+          <a:p>
+            <a:endParaRPr lang="en-CA"/>
+          </a:p>
+        </p:txBody>
       </p:sp>
       <p:sp>
         <p:nvSpPr>
@@ -6109,6 +7504,13 @@
           </a:solidFill>
           <a:ln/>
         </p:spPr>
+        <p:txBody>
+          <a:bodyPr/>
+          <a:lstStyle/>
+          <a:p>
+            <a:endParaRPr lang="en-CA"/>
+          </a:p>
+        </p:txBody>
       </p:sp>
       <p:sp>
         <p:nvSpPr>
@@ -6131,7 +7533,7 @@
           <a:bodyPr wrap="square" lIns="0" tIns="0" rIns="0" bIns="0" rtlCol="0" anchor="ctr"/>
           <a:lstStyle/>
           <a:p>
-            <a:pPr indent="0" marL="0">
+            <a:pPr marL="0" indent="0">
               <a:buNone/>
             </a:pPr>
             <a:r>
@@ -6170,7 +7572,7 @@
           <a:bodyPr wrap="square" lIns="0" tIns="0" rIns="0" bIns="0" rtlCol="0" anchor="ctr"/>
           <a:lstStyle/>
           <a:p>
-            <a:pPr algn="r" indent="0" marL="0">
+            <a:pPr marL="0" indent="0" algn="r">
               <a:buNone/>
             </a:pPr>
             <a:r>
@@ -6182,7 +7584,7 @@
                 <a:ea typeface="Courier New" pitchFamily="34" charset="-122"/>
                 <a:cs typeface="Courier New" pitchFamily="34" charset="-120"/>
               </a:rPr>
-              <a:t>4 / 10</a:t>
+              <a:t>4 / 11</a:t>
             </a:r>
             <a:endParaRPr lang="en-US" sz="1080" dirty="0"/>
           </a:p>
@@ -6209,11 +7611,11 @@
           <a:bodyPr wrap="square" lIns="0" tIns="0" rIns="0" bIns="0" rtlCol="0" anchor="ctr"/>
           <a:lstStyle/>
           <a:p>
-            <a:pPr indent="0" marL="0">
+            <a:pPr marL="0" indent="0">
               <a:buNone/>
             </a:pPr>
             <a:r>
-              <a:rPr lang="en-US" sz="1440" spc="200" kern="0" dirty="0">
+              <a:rPr lang="en-US" sz="1440" kern="0" spc="200" dirty="0">
                 <a:solidFill>
                   <a:srgbClr val="5FE0C5"/>
                 </a:solidFill>
@@ -6248,7 +7650,7 @@
           <a:bodyPr wrap="square" lIns="0" tIns="0" rIns="0" bIns="0" rtlCol="0" anchor="ctr"/>
           <a:lstStyle/>
           <a:p>
-            <a:pPr algn="l" indent="0" marL="0">
+            <a:pPr marL="0" indent="0" algn="l">
               <a:buNone/>
             </a:pPr>
             <a:r>
@@ -6292,13 +7694,20 @@
             <a:prstDash val="solid"/>
           </a:ln>
           <a:effectLst>
-            <a:outerShdw sx="100000" sy="100000" kx="0" ky="0" algn="bl" rotWithShape="0" blurRad="76200" dist="38100" dir="2700000">
+            <a:outerShdw blurRad="76200" dist="38100" dir="2700000" algn="bl" rotWithShape="0">
               <a:srgbClr val="000000">
                 <a:alpha val="20000"/>
               </a:srgbClr>
             </a:outerShdw>
           </a:effectLst>
         </p:spPr>
+        <p:txBody>
+          <a:bodyPr/>
+          <a:lstStyle/>
+          <a:p>
+            <a:endParaRPr lang="en-CA"/>
+          </a:p>
+        </p:txBody>
       </p:sp>
       <p:sp>
         <p:nvSpPr>
@@ -6321,7 +7730,7 @@
           <a:bodyPr wrap="square" lIns="0" tIns="0" rIns="0" bIns="0" rtlCol="0" anchor="t"/>
           <a:lstStyle/>
           <a:p>
-            <a:pPr indent="0" marL="0">
+            <a:pPr marL="0" indent="0">
               <a:buNone/>
             </a:pPr>
             <a:r>
@@ -6360,7 +7769,7 @@
           <a:bodyPr wrap="square" lIns="0" tIns="0" rIns="0" bIns="0" rtlCol="0" anchor="t"/>
           <a:lstStyle/>
           <a:p>
-            <a:pPr indent="0" marL="0">
+            <a:pPr marL="0" indent="0">
               <a:buNone/>
             </a:pPr>
             <a:r>
@@ -6404,13 +7813,20 @@
             <a:prstDash val="solid"/>
           </a:ln>
           <a:effectLst>
-            <a:outerShdw sx="100000" sy="100000" kx="0" ky="0" algn="bl" rotWithShape="0" blurRad="76200" dist="38100" dir="2700000">
+            <a:outerShdw blurRad="76200" dist="38100" dir="2700000" algn="bl" rotWithShape="0">
               <a:srgbClr val="000000">
                 <a:alpha val="20000"/>
               </a:srgbClr>
             </a:outerShdw>
           </a:effectLst>
         </p:spPr>
+        <p:txBody>
+          <a:bodyPr/>
+          <a:lstStyle/>
+          <a:p>
+            <a:endParaRPr lang="en-CA"/>
+          </a:p>
+        </p:txBody>
       </p:sp>
       <p:sp>
         <p:nvSpPr>
@@ -6433,7 +7849,7 @@
           <a:bodyPr wrap="square" lIns="0" tIns="0" rIns="0" bIns="0" rtlCol="0" anchor="t"/>
           <a:lstStyle/>
           <a:p>
-            <a:pPr indent="0" marL="0">
+            <a:pPr marL="0" indent="0">
               <a:buNone/>
             </a:pPr>
             <a:r>
@@ -6472,7 +7888,7 @@
           <a:bodyPr wrap="square" lIns="0" tIns="0" rIns="0" bIns="0" rtlCol="0" anchor="t"/>
           <a:lstStyle/>
           <a:p>
-            <a:pPr indent="0" marL="0">
+            <a:pPr marL="0" indent="0">
               <a:buNone/>
             </a:pPr>
             <a:r>
@@ -6516,13 +7932,20 @@
             <a:prstDash val="solid"/>
           </a:ln>
           <a:effectLst>
-            <a:outerShdw sx="100000" sy="100000" kx="0" ky="0" algn="bl" rotWithShape="0" blurRad="76200" dist="38100" dir="2700000">
+            <a:outerShdw blurRad="76200" dist="38100" dir="2700000" algn="bl" rotWithShape="0">
               <a:srgbClr val="000000">
                 <a:alpha val="20000"/>
               </a:srgbClr>
             </a:outerShdw>
           </a:effectLst>
         </p:spPr>
+        <p:txBody>
+          <a:bodyPr/>
+          <a:lstStyle/>
+          <a:p>
+            <a:endParaRPr lang="en-CA"/>
+          </a:p>
+        </p:txBody>
       </p:sp>
       <p:sp>
         <p:nvSpPr>
@@ -6545,7 +7968,7 @@
           <a:bodyPr wrap="square" lIns="0" tIns="0" rIns="0" bIns="0" rtlCol="0" anchor="t"/>
           <a:lstStyle/>
           <a:p>
-            <a:pPr indent="0" marL="0">
+            <a:pPr marL="0" indent="0">
               <a:buNone/>
             </a:pPr>
             <a:r>
@@ -6584,7 +8007,7 @@
           <a:bodyPr wrap="square" lIns="0" tIns="0" rIns="0" bIns="0" rtlCol="0" anchor="t"/>
           <a:lstStyle/>
           <a:p>
-            <a:pPr indent="0" marL="0">
+            <a:pPr marL="0" indent="0">
               <a:buNone/>
             </a:pPr>
             <a:r>
@@ -6628,13 +8051,20 @@
             <a:prstDash val="solid"/>
           </a:ln>
           <a:effectLst>
-            <a:outerShdw sx="100000" sy="100000" kx="0" ky="0" algn="bl" rotWithShape="0" blurRad="76200" dist="38100" dir="2700000">
+            <a:outerShdw blurRad="76200" dist="38100" dir="2700000" algn="bl" rotWithShape="0">
               <a:srgbClr val="000000">
                 <a:alpha val="20000"/>
               </a:srgbClr>
             </a:outerShdw>
           </a:effectLst>
         </p:spPr>
+        <p:txBody>
+          <a:bodyPr/>
+          <a:lstStyle/>
+          <a:p>
+            <a:endParaRPr lang="en-CA"/>
+          </a:p>
+        </p:txBody>
       </p:sp>
       <p:sp>
         <p:nvSpPr>
@@ -6657,7 +8087,7 @@
           <a:bodyPr wrap="square" lIns="0" tIns="0" rIns="0" bIns="0" rtlCol="0" anchor="t"/>
           <a:lstStyle/>
           <a:p>
-            <a:pPr indent="0" marL="0">
+            <a:pPr marL="0" indent="0">
               <a:buNone/>
             </a:pPr>
             <a:r>
@@ -6696,7 +8126,7 @@
           <a:bodyPr wrap="square" lIns="0" tIns="0" rIns="0" bIns="0" rtlCol="0" anchor="t"/>
           <a:lstStyle/>
           <a:p>
-            <a:pPr indent="0" marL="0">
+            <a:pPr marL="0" indent="0">
               <a:buNone/>
             </a:pPr>
             <a:r>
@@ -6740,13 +8170,20 @@
             <a:prstDash val="solid"/>
           </a:ln>
           <a:effectLst>
-            <a:outerShdw sx="100000" sy="100000" kx="0" ky="0" algn="bl" rotWithShape="0" blurRad="76200" dist="38100" dir="2700000">
+            <a:outerShdw blurRad="76200" dist="38100" dir="2700000" algn="bl" rotWithShape="0">
               <a:srgbClr val="000000">
                 <a:alpha val="20000"/>
               </a:srgbClr>
             </a:outerShdw>
           </a:effectLst>
         </p:spPr>
+        <p:txBody>
+          <a:bodyPr/>
+          <a:lstStyle/>
+          <a:p>
+            <a:endParaRPr lang="en-CA"/>
+          </a:p>
+        </p:txBody>
       </p:sp>
       <p:sp>
         <p:nvSpPr>
@@ -6769,7 +8206,7 @@
           <a:bodyPr wrap="square" lIns="0" tIns="0" rIns="0" bIns="0" rtlCol="0" anchor="t"/>
           <a:lstStyle/>
           <a:p>
-            <a:pPr indent="0" marL="0">
+            <a:pPr marL="0" indent="0">
               <a:buNone/>
             </a:pPr>
             <a:r>
@@ -6808,7 +8245,7 @@
           <a:bodyPr wrap="square" lIns="0" tIns="0" rIns="0" bIns="0" rtlCol="0" anchor="t"/>
           <a:lstStyle/>
           <a:p>
-            <a:pPr indent="0" marL="0">
+            <a:pPr marL="0" indent="0">
               <a:buNone/>
             </a:pPr>
             <a:r>
@@ -6852,13 +8289,20 @@
             <a:prstDash val="solid"/>
           </a:ln>
           <a:effectLst>
-            <a:outerShdw sx="100000" sy="100000" kx="0" ky="0" algn="bl" rotWithShape="0" blurRad="76200" dist="38100" dir="2700000">
+            <a:outerShdw blurRad="76200" dist="38100" dir="2700000" algn="bl" rotWithShape="0">
               <a:srgbClr val="000000">
                 <a:alpha val="20000"/>
               </a:srgbClr>
             </a:outerShdw>
           </a:effectLst>
         </p:spPr>
+        <p:txBody>
+          <a:bodyPr/>
+          <a:lstStyle/>
+          <a:p>
+            <a:endParaRPr lang="en-CA"/>
+          </a:p>
+        </p:txBody>
       </p:sp>
       <p:sp>
         <p:nvSpPr>
@@ -6881,7 +8325,7 @@
           <a:bodyPr wrap="square" lIns="0" tIns="0" rIns="0" bIns="0" rtlCol="0" anchor="t"/>
           <a:lstStyle/>
           <a:p>
-            <a:pPr indent="0" marL="0">
+            <a:pPr marL="0" indent="0">
               <a:buNone/>
             </a:pPr>
             <a:r>
@@ -6920,7 +8364,7 @@
           <a:bodyPr wrap="square" lIns="0" tIns="0" rIns="0" bIns="0" rtlCol="0" anchor="t"/>
           <a:lstStyle/>
           <a:p>
-            <a:pPr indent="0" marL="0">
+            <a:pPr marL="0" indent="0">
               <a:buNone/>
             </a:pPr>
             <a:r>
@@ -6964,13 +8408,20 @@
             <a:prstDash val="solid"/>
           </a:ln>
           <a:effectLst>
-            <a:outerShdw sx="100000" sy="100000" kx="0" ky="0" algn="bl" rotWithShape="0" blurRad="76200" dist="38100" dir="2700000">
+            <a:outerShdw blurRad="76200" dist="38100" dir="2700000" algn="bl" rotWithShape="0">
               <a:srgbClr val="000000">
                 <a:alpha val="20000"/>
               </a:srgbClr>
             </a:outerShdw>
           </a:effectLst>
         </p:spPr>
+        <p:txBody>
+          <a:bodyPr/>
+          <a:lstStyle/>
+          <a:p>
+            <a:endParaRPr lang="en-CA"/>
+          </a:p>
+        </p:txBody>
       </p:sp>
       <p:sp>
         <p:nvSpPr>
@@ -6993,7 +8444,7 @@
           <a:bodyPr wrap="square" lIns="0" tIns="0" rIns="0" bIns="0" rtlCol="0" anchor="t"/>
           <a:lstStyle/>
           <a:p>
-            <a:pPr indent="0" marL="0">
+            <a:pPr marL="0" indent="0">
               <a:buNone/>
             </a:pPr>
             <a:r>
@@ -7032,7 +8483,7 @@
           <a:bodyPr wrap="square" lIns="0" tIns="0" rIns="0" bIns="0" rtlCol="0" anchor="t"/>
           <a:lstStyle/>
           <a:p>
-            <a:pPr indent="0" marL="0">
+            <a:pPr marL="0" indent="0">
               <a:buNone/>
             </a:pPr>
             <a:r>
@@ -7076,13 +8527,20 @@
             <a:prstDash val="solid"/>
           </a:ln>
           <a:effectLst>
-            <a:outerShdw sx="100000" sy="100000" kx="0" ky="0" algn="bl" rotWithShape="0" blurRad="76200" dist="38100" dir="2700000">
+            <a:outerShdw blurRad="76200" dist="38100" dir="2700000" algn="bl" rotWithShape="0">
               <a:srgbClr val="000000">
                 <a:alpha val="20000"/>
               </a:srgbClr>
             </a:outerShdw>
           </a:effectLst>
         </p:spPr>
+        <p:txBody>
+          <a:bodyPr/>
+          <a:lstStyle/>
+          <a:p>
+            <a:endParaRPr lang="en-CA"/>
+          </a:p>
+        </p:txBody>
       </p:sp>
       <p:sp>
         <p:nvSpPr>
@@ -7105,7 +8563,7 @@
           <a:bodyPr wrap="square" lIns="0" tIns="0" rIns="0" bIns="0" rtlCol="0" anchor="t"/>
           <a:lstStyle/>
           <a:p>
-            <a:pPr indent="0" marL="0">
+            <a:pPr marL="0" indent="0">
               <a:buNone/>
             </a:pPr>
             <a:r>
@@ -7144,7 +8602,7 @@
           <a:bodyPr wrap="square" lIns="0" tIns="0" rIns="0" bIns="0" rtlCol="0" anchor="t"/>
           <a:lstStyle/>
           <a:p>
-            <a:pPr indent="0" marL="0">
+            <a:pPr marL="0" indent="0">
               <a:buNone/>
             </a:pPr>
             <a:r>
@@ -7178,6 +8636,7 @@
         <a:solidFill>
           <a:srgbClr val="0A0F1C"/>
         </a:solidFill>
+        <a:effectLst/>
       </p:bgPr>
     </p:bg>
     <p:spTree>
@@ -7218,6 +8677,13 @@
             <a:prstDash val="solid"/>
           </a:ln>
         </p:spPr>
+        <p:txBody>
+          <a:bodyPr/>
+          <a:lstStyle/>
+          <a:p>
+            <a:endParaRPr lang="en-CA"/>
+          </a:p>
+        </p:txBody>
       </p:sp>
       <p:sp>
         <p:nvSpPr>
@@ -7243,6 +8709,13 @@
             <a:prstDash val="solid"/>
           </a:ln>
         </p:spPr>
+        <p:txBody>
+          <a:bodyPr/>
+          <a:lstStyle/>
+          <a:p>
+            <a:endParaRPr lang="en-CA"/>
+          </a:p>
+        </p:txBody>
       </p:sp>
       <p:sp>
         <p:nvSpPr>
@@ -7268,6 +8741,13 @@
             <a:prstDash val="solid"/>
           </a:ln>
         </p:spPr>
+        <p:txBody>
+          <a:bodyPr/>
+          <a:lstStyle/>
+          <a:p>
+            <a:endParaRPr lang="en-CA"/>
+          </a:p>
+        </p:txBody>
       </p:sp>
       <p:sp>
         <p:nvSpPr>
@@ -7290,6 +8770,13 @@
           </a:solidFill>
           <a:ln/>
         </p:spPr>
+        <p:txBody>
+          <a:bodyPr/>
+          <a:lstStyle/>
+          <a:p>
+            <a:endParaRPr lang="en-CA"/>
+          </a:p>
+        </p:txBody>
       </p:sp>
       <p:sp>
         <p:nvSpPr>
@@ -7312,6 +8799,13 @@
           </a:solidFill>
           <a:ln/>
         </p:spPr>
+        <p:txBody>
+          <a:bodyPr/>
+          <a:lstStyle/>
+          <a:p>
+            <a:endParaRPr lang="en-CA"/>
+          </a:p>
+        </p:txBody>
       </p:sp>
       <p:sp>
         <p:nvSpPr>
@@ -7334,6 +8828,13 @@
           </a:solidFill>
           <a:ln/>
         </p:spPr>
+        <p:txBody>
+          <a:bodyPr/>
+          <a:lstStyle/>
+          <a:p>
+            <a:endParaRPr lang="en-CA"/>
+          </a:p>
+        </p:txBody>
       </p:sp>
       <p:sp>
         <p:nvSpPr>
@@ -7356,6 +8857,13 @@
           </a:solidFill>
           <a:ln/>
         </p:spPr>
+        <p:txBody>
+          <a:bodyPr/>
+          <a:lstStyle/>
+          <a:p>
+            <a:endParaRPr lang="en-CA"/>
+          </a:p>
+        </p:txBody>
       </p:sp>
       <p:sp>
         <p:nvSpPr>
@@ -7381,6 +8889,13 @@
             <a:prstDash val="solid"/>
           </a:ln>
         </p:spPr>
+        <p:txBody>
+          <a:bodyPr/>
+          <a:lstStyle/>
+          <a:p>
+            <a:endParaRPr lang="en-CA"/>
+          </a:p>
+        </p:txBody>
       </p:sp>
       <p:sp>
         <p:nvSpPr>
@@ -7406,6 +8921,13 @@
             <a:prstDash val="solid"/>
           </a:ln>
         </p:spPr>
+        <p:txBody>
+          <a:bodyPr/>
+          <a:lstStyle/>
+          <a:p>
+            <a:endParaRPr lang="en-CA"/>
+          </a:p>
+        </p:txBody>
       </p:sp>
       <p:sp>
         <p:nvSpPr>
@@ -7431,6 +8953,13 @@
             <a:prstDash val="solid"/>
           </a:ln>
         </p:spPr>
+        <p:txBody>
+          <a:bodyPr/>
+          <a:lstStyle/>
+          <a:p>
+            <a:endParaRPr lang="en-CA"/>
+          </a:p>
+        </p:txBody>
       </p:sp>
       <p:sp>
         <p:nvSpPr>
@@ -7453,6 +8982,13 @@
           </a:solidFill>
           <a:ln/>
         </p:spPr>
+        <p:txBody>
+          <a:bodyPr/>
+          <a:lstStyle/>
+          <a:p>
+            <a:endParaRPr lang="en-CA"/>
+          </a:p>
+        </p:txBody>
       </p:sp>
       <p:sp>
         <p:nvSpPr>
@@ -7475,6 +9011,13 @@
           </a:solidFill>
           <a:ln/>
         </p:spPr>
+        <p:txBody>
+          <a:bodyPr/>
+          <a:lstStyle/>
+          <a:p>
+            <a:endParaRPr lang="en-CA"/>
+          </a:p>
+        </p:txBody>
       </p:sp>
       <p:sp>
         <p:nvSpPr>
@@ -7497,6 +9040,13 @@
           </a:solidFill>
           <a:ln/>
         </p:spPr>
+        <p:txBody>
+          <a:bodyPr/>
+          <a:lstStyle/>
+          <a:p>
+            <a:endParaRPr lang="en-CA"/>
+          </a:p>
+        </p:txBody>
       </p:sp>
       <p:sp>
         <p:nvSpPr>
@@ -7519,6 +9069,13 @@
           </a:solidFill>
           <a:ln/>
         </p:spPr>
+        <p:txBody>
+          <a:bodyPr/>
+          <a:lstStyle/>
+          <a:p>
+            <a:endParaRPr lang="en-CA"/>
+          </a:p>
+        </p:txBody>
       </p:sp>
       <p:sp>
         <p:nvSpPr>
@@ -7541,7 +9098,7 @@
           <a:bodyPr wrap="square" lIns="0" tIns="0" rIns="0" bIns="0" rtlCol="0" anchor="ctr"/>
           <a:lstStyle/>
           <a:p>
-            <a:pPr indent="0" marL="0">
+            <a:pPr marL="0" indent="0">
               <a:buNone/>
             </a:pPr>
             <a:r>
@@ -7580,7 +9137,7 @@
           <a:bodyPr wrap="square" lIns="0" tIns="0" rIns="0" bIns="0" rtlCol="0" anchor="ctr"/>
           <a:lstStyle/>
           <a:p>
-            <a:pPr algn="r" indent="0" marL="0">
+            <a:pPr marL="0" indent="0" algn="r">
               <a:buNone/>
             </a:pPr>
             <a:r>
@@ -7592,7 +9149,7 @@
                 <a:ea typeface="Courier New" pitchFamily="34" charset="-122"/>
                 <a:cs typeface="Courier New" pitchFamily="34" charset="-120"/>
               </a:rPr>
-              <a:t>5 / 10</a:t>
+              <a:t>5 / 11</a:t>
             </a:r>
             <a:endParaRPr lang="en-US" sz="1080" dirty="0"/>
           </a:p>
@@ -7619,11 +9176,11 @@
           <a:bodyPr wrap="square" lIns="0" tIns="0" rIns="0" bIns="0" rtlCol="0" anchor="ctr"/>
           <a:lstStyle/>
           <a:p>
-            <a:pPr indent="0" marL="0">
+            <a:pPr marL="0" indent="0">
               <a:buNone/>
             </a:pPr>
             <a:r>
-              <a:rPr lang="en-US" sz="1440" spc="200" kern="0" dirty="0">
+              <a:rPr lang="en-US" sz="1440" kern="0" spc="200" dirty="0">
                 <a:solidFill>
                   <a:srgbClr val="5FE0C5"/>
                 </a:solidFill>
@@ -7658,7 +9215,7 @@
           <a:bodyPr wrap="square" lIns="0" tIns="0" rIns="0" bIns="0" rtlCol="0" anchor="ctr"/>
           <a:lstStyle/>
           <a:p>
-            <a:pPr algn="l" indent="0" marL="0">
+            <a:pPr marL="0" indent="0" algn="l">
               <a:buNone/>
             </a:pPr>
             <a:r>
@@ -7702,13 +9259,20 @@
             <a:prstDash val="solid"/>
           </a:ln>
           <a:effectLst>
-            <a:outerShdw sx="100000" sy="100000" kx="0" ky="0" algn="bl" rotWithShape="0" blurRad="63500" dist="38100" dir="2700000">
+            <a:outerShdw blurRad="63500" dist="38100" dir="2700000" algn="bl" rotWithShape="0">
               <a:srgbClr val="000000">
                 <a:alpha val="20000"/>
               </a:srgbClr>
             </a:outerShdw>
           </a:effectLst>
         </p:spPr>
+        <p:txBody>
+          <a:bodyPr/>
+          <a:lstStyle/>
+          <a:p>
+            <a:endParaRPr lang="en-CA"/>
+          </a:p>
+        </p:txBody>
       </p:sp>
       <p:sp>
         <p:nvSpPr>
@@ -7731,7 +9295,7 @@
           <a:bodyPr wrap="square" lIns="0" tIns="0" rIns="0" bIns="0" rtlCol="0" anchor="ctr"/>
           <a:lstStyle/>
           <a:p>
-            <a:pPr algn="l" indent="0" marL="0">
+            <a:pPr marL="0" indent="0" algn="l">
               <a:buNone/>
             </a:pPr>
             <a:r>
@@ -7745,9 +9309,6 @@
               </a:rPr>
               <a:t>1  </a:t>
             </a:r>
-            <a:pPr algn="l" indent="0" marL="0">
-              <a:buNone/>
-            </a:pPr>
             <a:r>
               <a:rPr lang="en-US" sz="1500" dirty="0">
                 <a:solidFill>
@@ -7789,13 +9350,20 @@
             <a:prstDash val="solid"/>
           </a:ln>
           <a:effectLst>
-            <a:outerShdw sx="100000" sy="100000" kx="0" ky="0" algn="bl" rotWithShape="0" blurRad="63500" dist="38100" dir="2700000">
+            <a:outerShdw blurRad="63500" dist="38100" dir="2700000" algn="bl" rotWithShape="0">
               <a:srgbClr val="000000">
                 <a:alpha val="20000"/>
               </a:srgbClr>
             </a:outerShdw>
           </a:effectLst>
         </p:spPr>
+        <p:txBody>
+          <a:bodyPr/>
+          <a:lstStyle/>
+          <a:p>
+            <a:endParaRPr lang="en-CA"/>
+          </a:p>
+        </p:txBody>
       </p:sp>
       <p:sp>
         <p:nvSpPr>
@@ -7818,7 +9386,7 @@
           <a:bodyPr wrap="square" lIns="0" tIns="0" rIns="0" bIns="0" rtlCol="0" anchor="ctr"/>
           <a:lstStyle/>
           <a:p>
-            <a:pPr algn="l" indent="0" marL="0">
+            <a:pPr marL="0" indent="0" algn="l">
               <a:buNone/>
             </a:pPr>
             <a:r>
@@ -7832,9 +9400,6 @@
               </a:rPr>
               <a:t>2  </a:t>
             </a:r>
-            <a:pPr algn="l" indent="0" marL="0">
-              <a:buNone/>
-            </a:pPr>
             <a:r>
               <a:rPr lang="en-US" sz="1500" dirty="0">
                 <a:solidFill>
@@ -7876,13 +9441,20 @@
             <a:prstDash val="solid"/>
           </a:ln>
           <a:effectLst>
-            <a:outerShdw sx="100000" sy="100000" kx="0" ky="0" algn="bl" rotWithShape="0" blurRad="63500" dist="38100" dir="2700000">
+            <a:outerShdw blurRad="63500" dist="38100" dir="2700000" algn="bl" rotWithShape="0">
               <a:srgbClr val="000000">
                 <a:alpha val="20000"/>
               </a:srgbClr>
             </a:outerShdw>
           </a:effectLst>
         </p:spPr>
+        <p:txBody>
+          <a:bodyPr/>
+          <a:lstStyle/>
+          <a:p>
+            <a:endParaRPr lang="en-CA"/>
+          </a:p>
+        </p:txBody>
       </p:sp>
       <p:sp>
         <p:nvSpPr>
@@ -7905,7 +9477,7 @@
           <a:bodyPr wrap="square" lIns="0" tIns="0" rIns="0" bIns="0" rtlCol="0" anchor="ctr"/>
           <a:lstStyle/>
           <a:p>
-            <a:pPr algn="l" indent="0" marL="0">
+            <a:pPr marL="0" indent="0" algn="l">
               <a:buNone/>
             </a:pPr>
             <a:r>
@@ -7919,9 +9491,6 @@
               </a:rPr>
               <a:t>3  </a:t>
             </a:r>
-            <a:pPr algn="l" indent="0" marL="0">
-              <a:buNone/>
-            </a:pPr>
             <a:r>
               <a:rPr lang="en-US" sz="1500" dirty="0">
                 <a:solidFill>
@@ -7963,13 +9532,20 @@
             <a:prstDash val="solid"/>
           </a:ln>
           <a:effectLst>
-            <a:outerShdw sx="100000" sy="100000" kx="0" ky="0" algn="bl" rotWithShape="0" blurRad="63500" dist="38100" dir="2700000">
+            <a:outerShdw blurRad="63500" dist="38100" dir="2700000" algn="bl" rotWithShape="0">
               <a:srgbClr val="000000">
                 <a:alpha val="20000"/>
               </a:srgbClr>
             </a:outerShdw>
           </a:effectLst>
         </p:spPr>
+        <p:txBody>
+          <a:bodyPr/>
+          <a:lstStyle/>
+          <a:p>
+            <a:endParaRPr lang="en-CA"/>
+          </a:p>
+        </p:txBody>
       </p:sp>
       <p:sp>
         <p:nvSpPr>
@@ -7992,7 +9568,7 @@
           <a:bodyPr wrap="square" lIns="0" tIns="0" rIns="0" bIns="0" rtlCol="0" anchor="ctr"/>
           <a:lstStyle/>
           <a:p>
-            <a:pPr algn="l" indent="0" marL="0">
+            <a:pPr marL="0" indent="0" algn="l">
               <a:buNone/>
             </a:pPr>
             <a:r>
@@ -8006,9 +9582,6 @@
               </a:rPr>
               <a:t>4  </a:t>
             </a:r>
-            <a:pPr algn="l" indent="0" marL="0">
-              <a:buNone/>
-            </a:pPr>
             <a:r>
               <a:rPr lang="en-US" sz="1500" dirty="0">
                 <a:solidFill>
@@ -8050,13 +9623,20 @@
             <a:prstDash val="solid"/>
           </a:ln>
           <a:effectLst>
-            <a:outerShdw sx="100000" sy="100000" kx="0" ky="0" algn="bl" rotWithShape="0" blurRad="63500" dist="38100" dir="2700000">
+            <a:outerShdw blurRad="63500" dist="38100" dir="2700000" algn="bl" rotWithShape="0">
               <a:srgbClr val="000000">
                 <a:alpha val="20000"/>
               </a:srgbClr>
             </a:outerShdw>
           </a:effectLst>
         </p:spPr>
+        <p:txBody>
+          <a:bodyPr/>
+          <a:lstStyle/>
+          <a:p>
+            <a:endParaRPr lang="en-CA"/>
+          </a:p>
+        </p:txBody>
       </p:sp>
       <p:sp>
         <p:nvSpPr>
@@ -8079,7 +9659,7 @@
           <a:bodyPr wrap="square" lIns="0" tIns="0" rIns="0" bIns="0" rtlCol="0" anchor="ctr"/>
           <a:lstStyle/>
           <a:p>
-            <a:pPr algn="l" indent="0" marL="0">
+            <a:pPr marL="0" indent="0" algn="l">
               <a:buNone/>
             </a:pPr>
             <a:r>
@@ -8093,9 +9673,6 @@
               </a:rPr>
               <a:t>5  </a:t>
             </a:r>
-            <a:pPr algn="l" indent="0" marL="0">
-              <a:buNone/>
-            </a:pPr>
             <a:r>
               <a:rPr lang="en-US" sz="1500" dirty="0">
                 <a:solidFill>
@@ -8137,13 +9714,20 @@
             <a:prstDash val="solid"/>
           </a:ln>
           <a:effectLst>
-            <a:outerShdw sx="100000" sy="100000" kx="0" ky="0" algn="bl" rotWithShape="0" blurRad="63500" dist="38100" dir="2700000">
+            <a:outerShdw blurRad="63500" dist="38100" dir="2700000" algn="bl" rotWithShape="0">
               <a:srgbClr val="000000">
                 <a:alpha val="20000"/>
               </a:srgbClr>
             </a:outerShdw>
           </a:effectLst>
         </p:spPr>
+        <p:txBody>
+          <a:bodyPr/>
+          <a:lstStyle/>
+          <a:p>
+            <a:endParaRPr lang="en-CA"/>
+          </a:p>
+        </p:txBody>
       </p:sp>
       <p:sp>
         <p:nvSpPr>
@@ -8166,7 +9750,7 @@
           <a:bodyPr wrap="square" lIns="0" tIns="0" rIns="0" bIns="0" rtlCol="0" anchor="ctr"/>
           <a:lstStyle/>
           <a:p>
-            <a:pPr algn="l" indent="0" marL="0">
+            <a:pPr marL="0" indent="0" algn="l">
               <a:buNone/>
             </a:pPr>
             <a:r>
@@ -8180,9 +9764,6 @@
               </a:rPr>
               <a:t>6  </a:t>
             </a:r>
-            <a:pPr algn="l" indent="0" marL="0">
-              <a:buNone/>
-            </a:pPr>
             <a:r>
               <a:rPr lang="en-US" sz="1500" dirty="0">
                 <a:solidFill>
@@ -8224,13 +9805,20 @@
             <a:prstDash val="solid"/>
           </a:ln>
           <a:effectLst>
-            <a:outerShdw sx="100000" sy="100000" kx="0" ky="0" algn="bl" rotWithShape="0" blurRad="63500" dist="38100" dir="2700000">
+            <a:outerShdw blurRad="63500" dist="38100" dir="2700000" algn="bl" rotWithShape="0">
               <a:srgbClr val="000000">
                 <a:alpha val="20000"/>
               </a:srgbClr>
             </a:outerShdw>
           </a:effectLst>
         </p:spPr>
+        <p:txBody>
+          <a:bodyPr/>
+          <a:lstStyle/>
+          <a:p>
+            <a:endParaRPr lang="en-CA"/>
+          </a:p>
+        </p:txBody>
       </p:sp>
       <p:sp>
         <p:nvSpPr>
@@ -8253,7 +9841,7 @@
           <a:bodyPr wrap="square" lIns="0" tIns="0" rIns="0" bIns="0" rtlCol="0" anchor="ctr"/>
           <a:lstStyle/>
           <a:p>
-            <a:pPr algn="l" indent="0" marL="0">
+            <a:pPr marL="0" indent="0" algn="l">
               <a:buNone/>
             </a:pPr>
             <a:r>
@@ -8267,9 +9855,6 @@
               </a:rPr>
               <a:t>7  </a:t>
             </a:r>
-            <a:pPr algn="l" indent="0" marL="0">
-              <a:buNone/>
-            </a:pPr>
             <a:r>
               <a:rPr lang="en-US" sz="1500" dirty="0">
                 <a:solidFill>
@@ -8311,13 +9896,20 @@
             <a:prstDash val="solid"/>
           </a:ln>
           <a:effectLst>
-            <a:outerShdw sx="100000" sy="100000" kx="0" ky="0" algn="bl" rotWithShape="0" blurRad="63500" dist="38100" dir="2700000">
+            <a:outerShdw blurRad="63500" dist="38100" dir="2700000" algn="bl" rotWithShape="0">
               <a:srgbClr val="000000">
                 <a:alpha val="20000"/>
               </a:srgbClr>
             </a:outerShdw>
           </a:effectLst>
         </p:spPr>
+        <p:txBody>
+          <a:bodyPr/>
+          <a:lstStyle/>
+          <a:p>
+            <a:endParaRPr lang="en-CA"/>
+          </a:p>
+        </p:txBody>
       </p:sp>
       <p:sp>
         <p:nvSpPr>
@@ -8340,7 +9932,7 @@
           <a:bodyPr wrap="square" lIns="0" tIns="0" rIns="0" bIns="0" rtlCol="0" anchor="ctr"/>
           <a:lstStyle/>
           <a:p>
-            <a:pPr algn="l" indent="0" marL="0">
+            <a:pPr marL="0" indent="0" algn="l">
               <a:buNone/>
             </a:pPr>
             <a:r>
@@ -8354,9 +9946,6 @@
               </a:rPr>
               <a:t>8  </a:t>
             </a:r>
-            <a:pPr algn="l" indent="0" marL="0">
-              <a:buNone/>
-            </a:pPr>
             <a:r>
               <a:rPr lang="en-US" sz="1500" dirty="0">
                 <a:solidFill>
@@ -8398,13 +9987,20 @@
             <a:prstDash val="solid"/>
           </a:ln>
           <a:effectLst>
-            <a:outerShdw sx="100000" sy="100000" kx="0" ky="0" algn="bl" rotWithShape="0" blurRad="63500" dist="38100" dir="2700000">
+            <a:outerShdw blurRad="63500" dist="38100" dir="2700000" algn="bl" rotWithShape="0">
               <a:srgbClr val="000000">
                 <a:alpha val="20000"/>
               </a:srgbClr>
             </a:outerShdw>
           </a:effectLst>
         </p:spPr>
+        <p:txBody>
+          <a:bodyPr/>
+          <a:lstStyle/>
+          <a:p>
+            <a:endParaRPr lang="en-CA"/>
+          </a:p>
+        </p:txBody>
       </p:sp>
       <p:sp>
         <p:nvSpPr>
@@ -8427,7 +10023,7 @@
           <a:bodyPr wrap="square" lIns="0" tIns="0" rIns="0" bIns="0" rtlCol="0" anchor="ctr"/>
           <a:lstStyle/>
           <a:p>
-            <a:pPr algn="l" indent="0" marL="0">
+            <a:pPr marL="0" indent="0" algn="l">
               <a:buNone/>
             </a:pPr>
             <a:r>
@@ -8441,9 +10037,6 @@
               </a:rPr>
               <a:t>9  </a:t>
             </a:r>
-            <a:pPr algn="l" indent="0" marL="0">
-              <a:buNone/>
-            </a:pPr>
             <a:r>
               <a:rPr lang="en-US" sz="1500" dirty="0">
                 <a:solidFill>
@@ -8485,13 +10078,20 @@
             <a:prstDash val="solid"/>
           </a:ln>
           <a:effectLst>
-            <a:outerShdw sx="100000" sy="100000" kx="0" ky="0" algn="bl" rotWithShape="0" blurRad="63500" dist="38100" dir="2700000">
+            <a:outerShdw blurRad="63500" dist="38100" dir="2700000" algn="bl" rotWithShape="0">
               <a:srgbClr val="000000">
                 <a:alpha val="20000"/>
               </a:srgbClr>
             </a:outerShdw>
           </a:effectLst>
         </p:spPr>
+        <p:txBody>
+          <a:bodyPr/>
+          <a:lstStyle/>
+          <a:p>
+            <a:endParaRPr lang="en-CA"/>
+          </a:p>
+        </p:txBody>
       </p:sp>
       <p:sp>
         <p:nvSpPr>
@@ -8514,7 +10114,7 @@
           <a:bodyPr wrap="square" lIns="0" tIns="0" rIns="0" bIns="0" rtlCol="0" anchor="ctr"/>
           <a:lstStyle/>
           <a:p>
-            <a:pPr algn="l" indent="0" marL="0">
+            <a:pPr marL="0" indent="0" algn="l">
               <a:buNone/>
             </a:pPr>
             <a:r>
@@ -8528,9 +10128,6 @@
               </a:rPr>
               <a:t>10  </a:t>
             </a:r>
-            <a:pPr algn="l" indent="0" marL="0">
-              <a:buNone/>
-            </a:pPr>
             <a:r>
               <a:rPr lang="en-US" sz="1500" dirty="0">
                 <a:solidFill>
@@ -8572,13 +10169,20 @@
             <a:prstDash val="solid"/>
           </a:ln>
           <a:effectLst>
-            <a:outerShdw sx="100000" sy="100000" kx="0" ky="0" algn="bl" rotWithShape="0" blurRad="63500" dist="38100" dir="2700000">
+            <a:outerShdw blurRad="63500" dist="38100" dir="2700000" algn="bl" rotWithShape="0">
               <a:srgbClr val="000000">
                 <a:alpha val="20000"/>
               </a:srgbClr>
             </a:outerShdw>
           </a:effectLst>
         </p:spPr>
+        <p:txBody>
+          <a:bodyPr/>
+          <a:lstStyle/>
+          <a:p>
+            <a:endParaRPr lang="en-CA"/>
+          </a:p>
+        </p:txBody>
       </p:sp>
       <p:sp>
         <p:nvSpPr>
@@ -8601,7 +10205,7 @@
           <a:bodyPr wrap="square" lIns="0" tIns="0" rIns="0" bIns="0" rtlCol="0" anchor="ctr"/>
           <a:lstStyle/>
           <a:p>
-            <a:pPr algn="l" indent="0" marL="0">
+            <a:pPr marL="0" indent="0" algn="l">
               <a:buNone/>
             </a:pPr>
             <a:r>
@@ -8615,9 +10219,6 @@
               </a:rPr>
               <a:t>11  </a:t>
             </a:r>
-            <a:pPr algn="l" indent="0" marL="0">
-              <a:buNone/>
-            </a:pPr>
             <a:r>
               <a:rPr lang="en-US" sz="1500" dirty="0">
                 <a:solidFill>
@@ -8649,6 +10250,7 @@
         <a:solidFill>
           <a:srgbClr val="0A0F1C"/>
         </a:solidFill>
+        <a:effectLst/>
       </p:bgPr>
     </p:bg>
     <p:spTree>
@@ -8689,6 +10291,13 @@
             <a:prstDash val="solid"/>
           </a:ln>
         </p:spPr>
+        <p:txBody>
+          <a:bodyPr/>
+          <a:lstStyle/>
+          <a:p>
+            <a:endParaRPr lang="en-CA"/>
+          </a:p>
+        </p:txBody>
       </p:sp>
       <p:sp>
         <p:nvSpPr>
@@ -8714,6 +10323,13 @@
             <a:prstDash val="solid"/>
           </a:ln>
         </p:spPr>
+        <p:txBody>
+          <a:bodyPr/>
+          <a:lstStyle/>
+          <a:p>
+            <a:endParaRPr lang="en-CA"/>
+          </a:p>
+        </p:txBody>
       </p:sp>
       <p:sp>
         <p:nvSpPr>
@@ -8739,6 +10355,13 @@
             <a:prstDash val="solid"/>
           </a:ln>
         </p:spPr>
+        <p:txBody>
+          <a:bodyPr/>
+          <a:lstStyle/>
+          <a:p>
+            <a:endParaRPr lang="en-CA"/>
+          </a:p>
+        </p:txBody>
       </p:sp>
       <p:sp>
         <p:nvSpPr>
@@ -8761,6 +10384,13 @@
           </a:solidFill>
           <a:ln/>
         </p:spPr>
+        <p:txBody>
+          <a:bodyPr/>
+          <a:lstStyle/>
+          <a:p>
+            <a:endParaRPr lang="en-CA"/>
+          </a:p>
+        </p:txBody>
       </p:sp>
       <p:sp>
         <p:nvSpPr>
@@ -8783,6 +10413,13 @@
           </a:solidFill>
           <a:ln/>
         </p:spPr>
+        <p:txBody>
+          <a:bodyPr/>
+          <a:lstStyle/>
+          <a:p>
+            <a:endParaRPr lang="en-CA"/>
+          </a:p>
+        </p:txBody>
       </p:sp>
       <p:sp>
         <p:nvSpPr>
@@ -8805,6 +10442,13 @@
           </a:solidFill>
           <a:ln/>
         </p:spPr>
+        <p:txBody>
+          <a:bodyPr/>
+          <a:lstStyle/>
+          <a:p>
+            <a:endParaRPr lang="en-CA"/>
+          </a:p>
+        </p:txBody>
       </p:sp>
       <p:sp>
         <p:nvSpPr>
@@ -8827,6 +10471,13 @@
           </a:solidFill>
           <a:ln/>
         </p:spPr>
+        <p:txBody>
+          <a:bodyPr/>
+          <a:lstStyle/>
+          <a:p>
+            <a:endParaRPr lang="en-CA"/>
+          </a:p>
+        </p:txBody>
       </p:sp>
       <p:sp>
         <p:nvSpPr>
@@ -8852,6 +10503,13 @@
             <a:prstDash val="solid"/>
           </a:ln>
         </p:spPr>
+        <p:txBody>
+          <a:bodyPr/>
+          <a:lstStyle/>
+          <a:p>
+            <a:endParaRPr lang="en-CA"/>
+          </a:p>
+        </p:txBody>
       </p:sp>
       <p:sp>
         <p:nvSpPr>
@@ -8877,6 +10535,13 @@
             <a:prstDash val="solid"/>
           </a:ln>
         </p:spPr>
+        <p:txBody>
+          <a:bodyPr/>
+          <a:lstStyle/>
+          <a:p>
+            <a:endParaRPr lang="en-CA"/>
+          </a:p>
+        </p:txBody>
       </p:sp>
       <p:sp>
         <p:nvSpPr>
@@ -8902,6 +10567,13 @@
             <a:prstDash val="solid"/>
           </a:ln>
         </p:spPr>
+        <p:txBody>
+          <a:bodyPr/>
+          <a:lstStyle/>
+          <a:p>
+            <a:endParaRPr lang="en-CA"/>
+          </a:p>
+        </p:txBody>
       </p:sp>
       <p:sp>
         <p:nvSpPr>
@@ -8924,6 +10596,13 @@
           </a:solidFill>
           <a:ln/>
         </p:spPr>
+        <p:txBody>
+          <a:bodyPr/>
+          <a:lstStyle/>
+          <a:p>
+            <a:endParaRPr lang="en-CA"/>
+          </a:p>
+        </p:txBody>
       </p:sp>
       <p:sp>
         <p:nvSpPr>
@@ -8946,6 +10625,13 @@
           </a:solidFill>
           <a:ln/>
         </p:spPr>
+        <p:txBody>
+          <a:bodyPr/>
+          <a:lstStyle/>
+          <a:p>
+            <a:endParaRPr lang="en-CA"/>
+          </a:p>
+        </p:txBody>
       </p:sp>
       <p:sp>
         <p:nvSpPr>
@@ -8968,6 +10654,13 @@
           </a:solidFill>
           <a:ln/>
         </p:spPr>
+        <p:txBody>
+          <a:bodyPr/>
+          <a:lstStyle/>
+          <a:p>
+            <a:endParaRPr lang="en-CA"/>
+          </a:p>
+        </p:txBody>
       </p:sp>
       <p:sp>
         <p:nvSpPr>
@@ -8990,6 +10683,13 @@
           </a:solidFill>
           <a:ln/>
         </p:spPr>
+        <p:txBody>
+          <a:bodyPr/>
+          <a:lstStyle/>
+          <a:p>
+            <a:endParaRPr lang="en-CA"/>
+          </a:p>
+        </p:txBody>
       </p:sp>
       <p:sp>
         <p:nvSpPr>
@@ -9012,7 +10712,7 @@
           <a:bodyPr wrap="square" lIns="0" tIns="0" rIns="0" bIns="0" rtlCol="0" anchor="ctr"/>
           <a:lstStyle/>
           <a:p>
-            <a:pPr indent="0" marL="0">
+            <a:pPr marL="0" indent="0">
               <a:buNone/>
             </a:pPr>
             <a:r>
@@ -9051,7 +10751,7 @@
           <a:bodyPr wrap="square" lIns="0" tIns="0" rIns="0" bIns="0" rtlCol="0" anchor="ctr"/>
           <a:lstStyle/>
           <a:p>
-            <a:pPr algn="r" indent="0" marL="0">
+            <a:pPr marL="0" indent="0" algn="r">
               <a:buNone/>
             </a:pPr>
             <a:r>
@@ -9063,7 +10763,7 @@
                 <a:ea typeface="Courier New" pitchFamily="34" charset="-122"/>
                 <a:cs typeface="Courier New" pitchFamily="34" charset="-120"/>
               </a:rPr>
-              <a:t>6 / 10</a:t>
+              <a:t>6 / 11</a:t>
             </a:r>
             <a:endParaRPr lang="en-US" sz="1080" dirty="0"/>
           </a:p>
@@ -9090,11 +10790,11 @@
           <a:bodyPr wrap="square" lIns="0" tIns="0" rIns="0" bIns="0" rtlCol="0" anchor="ctr"/>
           <a:lstStyle/>
           <a:p>
-            <a:pPr indent="0" marL="0">
+            <a:pPr marL="0" indent="0">
               <a:buNone/>
             </a:pPr>
             <a:r>
-              <a:rPr lang="en-US" sz="1440" spc="200" kern="0" dirty="0">
+              <a:rPr lang="en-US" sz="1440" kern="0" spc="200" dirty="0">
                 <a:solidFill>
                   <a:srgbClr val="5FE0C5"/>
                 </a:solidFill>
@@ -9129,7 +10829,7 @@
           <a:bodyPr wrap="square" lIns="0" tIns="0" rIns="0" bIns="0" rtlCol="0" anchor="ctr"/>
           <a:lstStyle/>
           <a:p>
-            <a:pPr algn="l" indent="0" marL="0">
+            <a:pPr marL="0" indent="0" algn="l">
               <a:buNone/>
             </a:pPr>
             <a:r>
@@ -9168,7 +10868,7 @@
           <a:bodyPr wrap="square" lIns="0" tIns="0" rIns="0" bIns="0" rtlCol="0" anchor="ctr"/>
           <a:lstStyle/>
           <a:p>
-            <a:pPr indent="0" marL="0">
+            <a:pPr marL="0" indent="0">
               <a:buNone/>
             </a:pPr>
             <a:r>
@@ -9212,13 +10912,20 @@
             <a:prstDash val="solid"/>
           </a:ln>
           <a:effectLst>
-            <a:outerShdw sx="100000" sy="100000" kx="0" ky="0" algn="bl" rotWithShape="0" blurRad="101600" dist="38100" dir="2700000">
+            <a:outerShdw blurRad="101600" dist="38100" dir="2700000" algn="bl" rotWithShape="0">
               <a:srgbClr val="000000">
                 <a:alpha val="25000"/>
               </a:srgbClr>
             </a:outerShdw>
           </a:effectLst>
         </p:spPr>
+        <p:txBody>
+          <a:bodyPr/>
+          <a:lstStyle/>
+          <a:p>
+            <a:endParaRPr lang="en-CA"/>
+          </a:p>
+        </p:txBody>
       </p:sp>
       <p:sp>
         <p:nvSpPr>
@@ -9241,7 +10948,7 @@
           <a:bodyPr wrap="square" lIns="0" tIns="0" rIns="0" bIns="0" rtlCol="0" anchor="ctr"/>
           <a:lstStyle/>
           <a:p>
-            <a:pPr indent="0" marL="0">
+            <a:pPr marL="0" indent="0">
               <a:buNone/>
             </a:pPr>
             <a:r>
@@ -9280,7 +10987,7 @@
           <a:bodyPr wrap="square" lIns="0" tIns="0" rIns="0" bIns="0" rtlCol="0" anchor="ctr"/>
           <a:lstStyle/>
           <a:p>
-            <a:pPr indent="0" marL="0">
+            <a:pPr marL="0" indent="0">
               <a:buNone/>
             </a:pPr>
             <a:r>
@@ -9319,7 +11026,7 @@
           <a:bodyPr wrap="square" lIns="0" tIns="0" rIns="0" bIns="0" rtlCol="0" anchor="ctr"/>
           <a:lstStyle/>
           <a:p>
-            <a:pPr indent="0" marL="0">
+            <a:pPr marL="0" indent="0">
               <a:buNone/>
             </a:pPr>
             <a:r>
@@ -9360,6 +11067,13 @@
             <a:tailEnd type="triangle"/>
           </a:ln>
         </p:spPr>
+        <p:txBody>
+          <a:bodyPr/>
+          <a:lstStyle/>
+          <a:p>
+            <a:endParaRPr lang="en-CA"/>
+          </a:p>
+        </p:txBody>
       </p:sp>
       <p:sp>
         <p:nvSpPr>
@@ -9387,13 +11101,20 @@
             <a:prstDash val="solid"/>
           </a:ln>
           <a:effectLst>
-            <a:outerShdw sx="100000" sy="100000" kx="0" ky="0" algn="bl" rotWithShape="0" blurRad="101600" dist="38100" dir="2700000">
+            <a:outerShdw blurRad="101600" dist="38100" dir="2700000" algn="bl" rotWithShape="0">
               <a:srgbClr val="000000">
                 <a:alpha val="25000"/>
               </a:srgbClr>
             </a:outerShdw>
           </a:effectLst>
         </p:spPr>
+        <p:txBody>
+          <a:bodyPr/>
+          <a:lstStyle/>
+          <a:p>
+            <a:endParaRPr lang="en-CA"/>
+          </a:p>
+        </p:txBody>
       </p:sp>
       <p:sp>
         <p:nvSpPr>
@@ -9416,7 +11137,7 @@
           <a:bodyPr wrap="square" lIns="0" tIns="0" rIns="0" bIns="0" rtlCol="0" anchor="ctr"/>
           <a:lstStyle/>
           <a:p>
-            <a:pPr indent="0" marL="0">
+            <a:pPr marL="0" indent="0">
               <a:buNone/>
             </a:pPr>
             <a:r>
@@ -9455,7 +11176,7 @@
           <a:bodyPr wrap="square" lIns="0" tIns="0" rIns="0" bIns="0" rtlCol="0" anchor="ctr"/>
           <a:lstStyle/>
           <a:p>
-            <a:pPr indent="0" marL="0">
+            <a:pPr marL="0" indent="0">
               <a:buNone/>
             </a:pPr>
             <a:r>
@@ -9494,7 +11215,7 @@
           <a:bodyPr wrap="square" lIns="0" tIns="0" rIns="0" bIns="0" rtlCol="0" anchor="ctr"/>
           <a:lstStyle/>
           <a:p>
-            <a:pPr indent="0" marL="0">
+            <a:pPr marL="0" indent="0">
               <a:buNone/>
             </a:pPr>
             <a:r>
@@ -9535,6 +11256,13 @@
             <a:tailEnd type="triangle"/>
           </a:ln>
         </p:spPr>
+        <p:txBody>
+          <a:bodyPr/>
+          <a:lstStyle/>
+          <a:p>
+            <a:endParaRPr lang="en-CA"/>
+          </a:p>
+        </p:txBody>
       </p:sp>
       <p:sp>
         <p:nvSpPr>
@@ -9562,13 +11290,20 @@
             <a:prstDash val="solid"/>
           </a:ln>
           <a:effectLst>
-            <a:outerShdw sx="100000" sy="100000" kx="0" ky="0" algn="bl" rotWithShape="0" blurRad="101600" dist="38100" dir="2700000">
+            <a:outerShdw blurRad="101600" dist="38100" dir="2700000" algn="bl" rotWithShape="0">
               <a:srgbClr val="000000">
                 <a:alpha val="25000"/>
               </a:srgbClr>
             </a:outerShdw>
           </a:effectLst>
         </p:spPr>
+        <p:txBody>
+          <a:bodyPr/>
+          <a:lstStyle/>
+          <a:p>
+            <a:endParaRPr lang="en-CA"/>
+          </a:p>
+        </p:txBody>
       </p:sp>
       <p:sp>
         <p:nvSpPr>
@@ -9591,7 +11326,7 @@
           <a:bodyPr wrap="square" lIns="0" tIns="0" rIns="0" bIns="0" rtlCol="0" anchor="ctr"/>
           <a:lstStyle/>
           <a:p>
-            <a:pPr indent="0" marL="0">
+            <a:pPr marL="0" indent="0">
               <a:buNone/>
             </a:pPr>
             <a:r>
@@ -9630,7 +11365,7 @@
           <a:bodyPr wrap="square" lIns="0" tIns="0" rIns="0" bIns="0" rtlCol="0" anchor="ctr"/>
           <a:lstStyle/>
           <a:p>
-            <a:pPr indent="0" marL="0">
+            <a:pPr marL="0" indent="0">
               <a:buNone/>
             </a:pPr>
             <a:r>
@@ -9669,7 +11404,7 @@
           <a:bodyPr wrap="square" lIns="0" tIns="0" rIns="0" bIns="0" rtlCol="0" anchor="ctr"/>
           <a:lstStyle/>
           <a:p>
-            <a:pPr indent="0" marL="0">
+            <a:pPr marL="0" indent="0">
               <a:buNone/>
             </a:pPr>
             <a:r>
@@ -9708,7 +11443,7 @@
           <a:bodyPr wrap="square" lIns="0" tIns="0" rIns="0" bIns="0" rtlCol="0" anchor="ctr"/>
           <a:lstStyle/>
           <a:p>
-            <a:pPr algn="ctr" indent="0" marL="0">
+            <a:pPr marL="0" indent="0" algn="ctr">
               <a:buNone/>
             </a:pPr>
             <a:r>
@@ -9722,9 +11457,6 @@
               </a:rPr>
               <a:t>Same controller. Same </a:t>
             </a:r>
-            <a:pPr algn="ctr" indent="0" marL="0">
-              <a:buNone/>
-            </a:pPr>
             <a:r>
               <a:rPr lang="en-US" sz="1680" i="1" dirty="0">
                 <a:solidFill>
@@ -9736,9 +11468,6 @@
               </a:rPr>
               <a:t>QuestionAnswerAdvisor</a:t>
             </a:r>
-            <a:pPr algn="ctr" indent="0" marL="0">
-              <a:buNone/>
-            </a:pPr>
             <a:r>
               <a:rPr lang="en-US" sz="1680" i="1" dirty="0">
                 <a:solidFill>
@@ -9770,6 +11499,7 @@
         <a:solidFill>
           <a:srgbClr val="0A0F1C"/>
         </a:solidFill>
+        <a:effectLst/>
       </p:bgPr>
     </p:bg>
     <p:spTree>
@@ -9810,6 +11540,13 @@
             <a:prstDash val="solid"/>
           </a:ln>
         </p:spPr>
+        <p:txBody>
+          <a:bodyPr/>
+          <a:lstStyle/>
+          <a:p>
+            <a:endParaRPr lang="en-CA"/>
+          </a:p>
+        </p:txBody>
       </p:sp>
       <p:sp>
         <p:nvSpPr>
@@ -9835,6 +11572,13 @@
             <a:prstDash val="solid"/>
           </a:ln>
         </p:spPr>
+        <p:txBody>
+          <a:bodyPr/>
+          <a:lstStyle/>
+          <a:p>
+            <a:endParaRPr lang="en-CA"/>
+          </a:p>
+        </p:txBody>
       </p:sp>
       <p:sp>
         <p:nvSpPr>
@@ -9860,6 +11604,13 @@
             <a:prstDash val="solid"/>
           </a:ln>
         </p:spPr>
+        <p:txBody>
+          <a:bodyPr/>
+          <a:lstStyle/>
+          <a:p>
+            <a:endParaRPr lang="en-CA"/>
+          </a:p>
+        </p:txBody>
       </p:sp>
       <p:sp>
         <p:nvSpPr>
@@ -9882,6 +11633,13 @@
           </a:solidFill>
           <a:ln/>
         </p:spPr>
+        <p:txBody>
+          <a:bodyPr/>
+          <a:lstStyle/>
+          <a:p>
+            <a:endParaRPr lang="en-CA"/>
+          </a:p>
+        </p:txBody>
       </p:sp>
       <p:sp>
         <p:nvSpPr>
@@ -9904,6 +11662,13 @@
           </a:solidFill>
           <a:ln/>
         </p:spPr>
+        <p:txBody>
+          <a:bodyPr/>
+          <a:lstStyle/>
+          <a:p>
+            <a:endParaRPr lang="en-CA"/>
+          </a:p>
+        </p:txBody>
       </p:sp>
       <p:sp>
         <p:nvSpPr>
@@ -9926,6 +11691,13 @@
           </a:solidFill>
           <a:ln/>
         </p:spPr>
+        <p:txBody>
+          <a:bodyPr/>
+          <a:lstStyle/>
+          <a:p>
+            <a:endParaRPr lang="en-CA"/>
+          </a:p>
+        </p:txBody>
       </p:sp>
       <p:sp>
         <p:nvSpPr>
@@ -9948,6 +11720,13 @@
           </a:solidFill>
           <a:ln/>
         </p:spPr>
+        <p:txBody>
+          <a:bodyPr/>
+          <a:lstStyle/>
+          <a:p>
+            <a:endParaRPr lang="en-CA"/>
+          </a:p>
+        </p:txBody>
       </p:sp>
       <p:sp>
         <p:nvSpPr>
@@ -9973,6 +11752,13 @@
             <a:prstDash val="solid"/>
           </a:ln>
         </p:spPr>
+        <p:txBody>
+          <a:bodyPr/>
+          <a:lstStyle/>
+          <a:p>
+            <a:endParaRPr lang="en-CA"/>
+          </a:p>
+        </p:txBody>
       </p:sp>
       <p:sp>
         <p:nvSpPr>
@@ -9998,6 +11784,13 @@
             <a:prstDash val="solid"/>
           </a:ln>
         </p:spPr>
+        <p:txBody>
+          <a:bodyPr/>
+          <a:lstStyle/>
+          <a:p>
+            <a:endParaRPr lang="en-CA"/>
+          </a:p>
+        </p:txBody>
       </p:sp>
       <p:sp>
         <p:nvSpPr>
@@ -10023,6 +11816,13 @@
             <a:prstDash val="solid"/>
           </a:ln>
         </p:spPr>
+        <p:txBody>
+          <a:bodyPr/>
+          <a:lstStyle/>
+          <a:p>
+            <a:endParaRPr lang="en-CA"/>
+          </a:p>
+        </p:txBody>
       </p:sp>
       <p:sp>
         <p:nvSpPr>
@@ -10045,6 +11845,13 @@
           </a:solidFill>
           <a:ln/>
         </p:spPr>
+        <p:txBody>
+          <a:bodyPr/>
+          <a:lstStyle/>
+          <a:p>
+            <a:endParaRPr lang="en-CA"/>
+          </a:p>
+        </p:txBody>
       </p:sp>
       <p:sp>
         <p:nvSpPr>
@@ -10067,6 +11874,13 @@
           </a:solidFill>
           <a:ln/>
         </p:spPr>
+        <p:txBody>
+          <a:bodyPr/>
+          <a:lstStyle/>
+          <a:p>
+            <a:endParaRPr lang="en-CA"/>
+          </a:p>
+        </p:txBody>
       </p:sp>
       <p:sp>
         <p:nvSpPr>
@@ -10089,6 +11903,13 @@
           </a:solidFill>
           <a:ln/>
         </p:spPr>
+        <p:txBody>
+          <a:bodyPr/>
+          <a:lstStyle/>
+          <a:p>
+            <a:endParaRPr lang="en-CA"/>
+          </a:p>
+        </p:txBody>
       </p:sp>
       <p:sp>
         <p:nvSpPr>
@@ -10111,6 +11932,13 @@
           </a:solidFill>
           <a:ln/>
         </p:spPr>
+        <p:txBody>
+          <a:bodyPr/>
+          <a:lstStyle/>
+          <a:p>
+            <a:endParaRPr lang="en-CA"/>
+          </a:p>
+        </p:txBody>
       </p:sp>
       <p:sp>
         <p:nvSpPr>
@@ -10133,7 +11961,7 @@
           <a:bodyPr wrap="square" lIns="0" tIns="0" rIns="0" bIns="0" rtlCol="0" anchor="ctr"/>
           <a:lstStyle/>
           <a:p>
-            <a:pPr indent="0" marL="0">
+            <a:pPr marL="0" indent="0">
               <a:buNone/>
             </a:pPr>
             <a:r>
@@ -10172,7 +12000,7 @@
           <a:bodyPr wrap="square" lIns="0" tIns="0" rIns="0" bIns="0" rtlCol="0" anchor="ctr"/>
           <a:lstStyle/>
           <a:p>
-            <a:pPr algn="r" indent="0" marL="0">
+            <a:pPr marL="0" indent="0" algn="r">
               <a:buNone/>
             </a:pPr>
             <a:r>
@@ -10184,7 +12012,7 @@
                 <a:ea typeface="Courier New" pitchFamily="34" charset="-122"/>
                 <a:cs typeface="Courier New" pitchFamily="34" charset="-120"/>
               </a:rPr>
-              <a:t>7 / 10</a:t>
+              <a:t>7 / 11</a:t>
             </a:r>
             <a:endParaRPr lang="en-US" sz="1080" dirty="0"/>
           </a:p>
@@ -10211,11 +12039,11 @@
           <a:bodyPr wrap="square" lIns="0" tIns="0" rIns="0" bIns="0" rtlCol="0" anchor="ctr"/>
           <a:lstStyle/>
           <a:p>
-            <a:pPr indent="0" marL="0">
+            <a:pPr marL="0" indent="0">
               <a:buNone/>
             </a:pPr>
             <a:r>
-              <a:rPr lang="en-US" sz="1440" spc="200" kern="0" dirty="0">
+              <a:rPr lang="en-US" sz="1440" kern="0" spc="200" dirty="0">
                 <a:solidFill>
                   <a:srgbClr val="5FE0C5"/>
                 </a:solidFill>
@@ -10250,7 +12078,7 @@
           <a:bodyPr wrap="square" lIns="0" tIns="0" rIns="0" bIns="0" rtlCol="0" anchor="ctr"/>
           <a:lstStyle/>
           <a:p>
-            <a:pPr algn="l" indent="0" marL="0">
+            <a:pPr marL="0" indent="0" algn="l">
               <a:buNone/>
             </a:pPr>
             <a:r>
@@ -10294,13 +12122,20 @@
             <a:prstDash val="solid"/>
           </a:ln>
           <a:effectLst>
-            <a:outerShdw sx="100000" sy="100000" kx="0" ky="0" algn="bl" rotWithShape="0" blurRad="101600" dist="38100" dir="2700000">
+            <a:outerShdw blurRad="101600" dist="38100" dir="2700000" algn="bl" rotWithShape="0">
               <a:srgbClr val="000000">
                 <a:alpha val="25000"/>
               </a:srgbClr>
             </a:outerShdw>
           </a:effectLst>
         </p:spPr>
+        <p:txBody>
+          <a:bodyPr/>
+          <a:lstStyle/>
+          <a:p>
+            <a:endParaRPr lang="en-CA"/>
+          </a:p>
+        </p:txBody>
       </p:sp>
       <p:sp>
         <p:nvSpPr>
@@ -10323,7 +12158,7 @@
           <a:bodyPr wrap="square" lIns="0" tIns="0" rIns="0" bIns="0" rtlCol="0" anchor="ctr"/>
           <a:lstStyle/>
           <a:p>
-            <a:pPr indent="0" marL="0">
+            <a:pPr marL="0" indent="0">
               <a:buNone/>
             </a:pPr>
             <a:r>
@@ -10362,7 +12197,7 @@
           <a:bodyPr wrap="square" lIns="0" tIns="0" rIns="0" bIns="0" rtlCol="0" anchor="ctr"/>
           <a:lstStyle/>
           <a:p>
-            <a:pPr indent="0" marL="0">
+            <a:pPr marL="0" indent="0">
               <a:buNone/>
             </a:pPr>
             <a:r>
@@ -10401,7 +12236,7 @@
           <a:bodyPr wrap="square" lIns="0" tIns="0" rIns="0" bIns="0" rtlCol="0" anchor="t"/>
           <a:lstStyle/>
           <a:p>
-            <a:pPr indent="0" marL="0">
+            <a:pPr marL="0" indent="0">
               <a:lnSpc>
                 <a:spcPct val="120000"/>
               </a:lnSpc>
@@ -10421,7 +12256,7 @@
             <a:endParaRPr lang="en-US" sz="1560" dirty="0"/>
           </a:p>
           <a:p>
-            <a:pPr indent="0" marL="0">
+            <a:pPr marL="0" indent="0">
               <a:lnSpc>
                 <a:spcPct val="120000"/>
               </a:lnSpc>
@@ -10465,6 +12300,13 @@
             <a:tailEnd type="triangle"/>
           </a:ln>
         </p:spPr>
+        <p:txBody>
+          <a:bodyPr/>
+          <a:lstStyle/>
+          <a:p>
+            <a:endParaRPr lang="en-CA"/>
+          </a:p>
+        </p:txBody>
       </p:sp>
       <p:sp>
         <p:nvSpPr>
@@ -10492,13 +12334,20 @@
             <a:prstDash val="solid"/>
           </a:ln>
           <a:effectLst>
-            <a:outerShdw sx="100000" sy="100000" kx="0" ky="0" algn="bl" rotWithShape="0" blurRad="101600" dist="38100" dir="2700000">
+            <a:outerShdw blurRad="101600" dist="38100" dir="2700000" algn="bl" rotWithShape="0">
               <a:srgbClr val="000000">
                 <a:alpha val="25000"/>
               </a:srgbClr>
             </a:outerShdw>
           </a:effectLst>
         </p:spPr>
+        <p:txBody>
+          <a:bodyPr/>
+          <a:lstStyle/>
+          <a:p>
+            <a:endParaRPr lang="en-CA"/>
+          </a:p>
+        </p:txBody>
       </p:sp>
       <p:sp>
         <p:nvSpPr>
@@ -10521,7 +12370,7 @@
           <a:bodyPr wrap="square" lIns="0" tIns="0" rIns="0" bIns="0" rtlCol="0" anchor="ctr"/>
           <a:lstStyle/>
           <a:p>
-            <a:pPr indent="0" marL="0">
+            <a:pPr marL="0" indent="0">
               <a:buNone/>
             </a:pPr>
             <a:r>
@@ -10560,7 +12409,7 @@
           <a:bodyPr wrap="square" lIns="0" tIns="0" rIns="0" bIns="0" rtlCol="0" anchor="ctr"/>
           <a:lstStyle/>
           <a:p>
-            <a:pPr indent="0" marL="0">
+            <a:pPr marL="0" indent="0">
               <a:buNone/>
             </a:pPr>
             <a:r>
@@ -10599,7 +12448,7 @@
           <a:bodyPr wrap="square" lIns="0" tIns="0" rIns="0" bIns="0" rtlCol="0" anchor="t"/>
           <a:lstStyle/>
           <a:p>
-            <a:pPr indent="0" marL="0">
+            <a:pPr marL="0" indent="0">
               <a:lnSpc>
                 <a:spcPct val="120000"/>
               </a:lnSpc>
@@ -10619,7 +12468,7 @@
             <a:endParaRPr lang="en-US" sz="1560" dirty="0"/>
           </a:p>
           <a:p>
-            <a:pPr indent="0" marL="0">
+            <a:pPr marL="0" indent="0">
               <a:lnSpc>
                 <a:spcPct val="120000"/>
               </a:lnSpc>
@@ -10663,6 +12512,13 @@
             <a:tailEnd type="triangle"/>
           </a:ln>
         </p:spPr>
+        <p:txBody>
+          <a:bodyPr/>
+          <a:lstStyle/>
+          <a:p>
+            <a:endParaRPr lang="en-CA"/>
+          </a:p>
+        </p:txBody>
       </p:sp>
       <p:sp>
         <p:nvSpPr>
@@ -10690,13 +12546,20 @@
             <a:prstDash val="solid"/>
           </a:ln>
           <a:effectLst>
-            <a:outerShdw sx="100000" sy="100000" kx="0" ky="0" algn="bl" rotWithShape="0" blurRad="101600" dist="38100" dir="2700000">
+            <a:outerShdw blurRad="101600" dist="38100" dir="2700000" algn="bl" rotWithShape="0">
               <a:srgbClr val="000000">
                 <a:alpha val="25000"/>
               </a:srgbClr>
             </a:outerShdw>
           </a:effectLst>
         </p:spPr>
+        <p:txBody>
+          <a:bodyPr/>
+          <a:lstStyle/>
+          <a:p>
+            <a:endParaRPr lang="en-CA"/>
+          </a:p>
+        </p:txBody>
       </p:sp>
       <p:sp>
         <p:nvSpPr>
@@ -10719,7 +12582,7 @@
           <a:bodyPr wrap="square" lIns="0" tIns="0" rIns="0" bIns="0" rtlCol="0" anchor="ctr"/>
           <a:lstStyle/>
           <a:p>
-            <a:pPr indent="0" marL="0">
+            <a:pPr marL="0" indent="0">
               <a:buNone/>
             </a:pPr>
             <a:r>
@@ -10758,7 +12621,7 @@
           <a:bodyPr wrap="square" lIns="0" tIns="0" rIns="0" bIns="0" rtlCol="0" anchor="ctr"/>
           <a:lstStyle/>
           <a:p>
-            <a:pPr indent="0" marL="0">
+            <a:pPr marL="0" indent="0">
               <a:buNone/>
             </a:pPr>
             <a:r>
@@ -10797,7 +12660,7 @@
           <a:bodyPr wrap="square" lIns="0" tIns="0" rIns="0" bIns="0" rtlCol="0" anchor="t"/>
           <a:lstStyle/>
           <a:p>
-            <a:pPr indent="0" marL="0">
+            <a:pPr marL="0" indent="0">
               <a:lnSpc>
                 <a:spcPct val="120000"/>
               </a:lnSpc>
@@ -10817,7 +12680,7 @@
             <a:endParaRPr lang="en-US" sz="1560" dirty="0"/>
           </a:p>
           <a:p>
-            <a:pPr indent="0" marL="0">
+            <a:pPr marL="0" indent="0">
               <a:lnSpc>
                 <a:spcPct val="120000"/>
               </a:lnSpc>
@@ -10859,7 +12722,7 @@
           <a:bodyPr wrap="square" lIns="0" tIns="0" rIns="0" bIns="0" rtlCol="0" anchor="ctr"/>
           <a:lstStyle/>
           <a:p>
-            <a:pPr algn="ctr" indent="0" marL="0">
+            <a:pPr marL="0" indent="0" algn="ctr">
               <a:buNone/>
             </a:pPr>
             <a:r>
@@ -10893,6 +12756,7 @@
         <a:solidFill>
           <a:srgbClr val="0A0F1C"/>
         </a:solidFill>
+        <a:effectLst/>
       </p:bgPr>
     </p:bg>
     <p:spTree>
@@ -10933,6 +12797,13 @@
             <a:prstDash val="solid"/>
           </a:ln>
         </p:spPr>
+        <p:txBody>
+          <a:bodyPr/>
+          <a:lstStyle/>
+          <a:p>
+            <a:endParaRPr lang="en-CA"/>
+          </a:p>
+        </p:txBody>
       </p:sp>
       <p:sp>
         <p:nvSpPr>
@@ -10958,6 +12829,13 @@
             <a:prstDash val="solid"/>
           </a:ln>
         </p:spPr>
+        <p:txBody>
+          <a:bodyPr/>
+          <a:lstStyle/>
+          <a:p>
+            <a:endParaRPr lang="en-CA"/>
+          </a:p>
+        </p:txBody>
       </p:sp>
       <p:sp>
         <p:nvSpPr>
@@ -10983,6 +12861,13 @@
             <a:prstDash val="solid"/>
           </a:ln>
         </p:spPr>
+        <p:txBody>
+          <a:bodyPr/>
+          <a:lstStyle/>
+          <a:p>
+            <a:endParaRPr lang="en-CA"/>
+          </a:p>
+        </p:txBody>
       </p:sp>
       <p:sp>
         <p:nvSpPr>
@@ -11005,6 +12890,13 @@
           </a:solidFill>
           <a:ln/>
         </p:spPr>
+        <p:txBody>
+          <a:bodyPr/>
+          <a:lstStyle/>
+          <a:p>
+            <a:endParaRPr lang="en-CA"/>
+          </a:p>
+        </p:txBody>
       </p:sp>
       <p:sp>
         <p:nvSpPr>
@@ -11027,6 +12919,13 @@
           </a:solidFill>
           <a:ln/>
         </p:spPr>
+        <p:txBody>
+          <a:bodyPr/>
+          <a:lstStyle/>
+          <a:p>
+            <a:endParaRPr lang="en-CA"/>
+          </a:p>
+        </p:txBody>
       </p:sp>
       <p:sp>
         <p:nvSpPr>
@@ -11049,6 +12948,13 @@
           </a:solidFill>
           <a:ln/>
         </p:spPr>
+        <p:txBody>
+          <a:bodyPr/>
+          <a:lstStyle/>
+          <a:p>
+            <a:endParaRPr lang="en-CA"/>
+          </a:p>
+        </p:txBody>
       </p:sp>
       <p:sp>
         <p:nvSpPr>
@@ -11071,6 +12977,13 @@
           </a:solidFill>
           <a:ln/>
         </p:spPr>
+        <p:txBody>
+          <a:bodyPr/>
+          <a:lstStyle/>
+          <a:p>
+            <a:endParaRPr lang="en-CA"/>
+          </a:p>
+        </p:txBody>
       </p:sp>
       <p:sp>
         <p:nvSpPr>
@@ -11096,6 +13009,13 @@
             <a:prstDash val="solid"/>
           </a:ln>
         </p:spPr>
+        <p:txBody>
+          <a:bodyPr/>
+          <a:lstStyle/>
+          <a:p>
+            <a:endParaRPr lang="en-CA"/>
+          </a:p>
+        </p:txBody>
       </p:sp>
       <p:sp>
         <p:nvSpPr>
@@ -11121,6 +13041,13 @@
             <a:prstDash val="solid"/>
           </a:ln>
         </p:spPr>
+        <p:txBody>
+          <a:bodyPr/>
+          <a:lstStyle/>
+          <a:p>
+            <a:endParaRPr lang="en-CA"/>
+          </a:p>
+        </p:txBody>
       </p:sp>
       <p:sp>
         <p:nvSpPr>
@@ -11146,6 +13073,13 @@
             <a:prstDash val="solid"/>
           </a:ln>
         </p:spPr>
+        <p:txBody>
+          <a:bodyPr/>
+          <a:lstStyle/>
+          <a:p>
+            <a:endParaRPr lang="en-CA"/>
+          </a:p>
+        </p:txBody>
       </p:sp>
       <p:sp>
         <p:nvSpPr>
@@ -11168,6 +13102,13 @@
           </a:solidFill>
           <a:ln/>
         </p:spPr>
+        <p:txBody>
+          <a:bodyPr/>
+          <a:lstStyle/>
+          <a:p>
+            <a:endParaRPr lang="en-CA"/>
+          </a:p>
+        </p:txBody>
       </p:sp>
       <p:sp>
         <p:nvSpPr>
@@ -11190,6 +13131,13 @@
           </a:solidFill>
           <a:ln/>
         </p:spPr>
+        <p:txBody>
+          <a:bodyPr/>
+          <a:lstStyle/>
+          <a:p>
+            <a:endParaRPr lang="en-CA"/>
+          </a:p>
+        </p:txBody>
       </p:sp>
       <p:sp>
         <p:nvSpPr>
@@ -11212,6 +13160,13 @@
           </a:solidFill>
           <a:ln/>
         </p:spPr>
+        <p:txBody>
+          <a:bodyPr/>
+          <a:lstStyle/>
+          <a:p>
+            <a:endParaRPr lang="en-CA"/>
+          </a:p>
+        </p:txBody>
       </p:sp>
       <p:sp>
         <p:nvSpPr>
@@ -11234,6 +13189,13 @@
           </a:solidFill>
           <a:ln/>
         </p:spPr>
+        <p:txBody>
+          <a:bodyPr/>
+          <a:lstStyle/>
+          <a:p>
+            <a:endParaRPr lang="en-CA"/>
+          </a:p>
+        </p:txBody>
       </p:sp>
       <p:sp>
         <p:nvSpPr>
@@ -11256,7 +13218,7 @@
           <a:bodyPr wrap="square" lIns="0" tIns="0" rIns="0" bIns="0" rtlCol="0" anchor="ctr"/>
           <a:lstStyle/>
           <a:p>
-            <a:pPr indent="0" marL="0">
+            <a:pPr marL="0" indent="0">
               <a:buNone/>
             </a:pPr>
             <a:r>
@@ -11295,7 +13257,7 @@
           <a:bodyPr wrap="square" lIns="0" tIns="0" rIns="0" bIns="0" rtlCol="0" anchor="ctr"/>
           <a:lstStyle/>
           <a:p>
-            <a:pPr algn="r" indent="0" marL="0">
+            <a:pPr marL="0" indent="0" algn="r">
               <a:buNone/>
             </a:pPr>
             <a:r>
@@ -11307,7 +13269,7 @@
                 <a:ea typeface="Courier New" pitchFamily="34" charset="-122"/>
                 <a:cs typeface="Courier New" pitchFamily="34" charset="-120"/>
               </a:rPr>
-              <a:t>8 / 10</a:t>
+              <a:t>8 / 11</a:t>
             </a:r>
             <a:endParaRPr lang="en-US" sz="1080" dirty="0"/>
           </a:p>
@@ -11334,11 +13296,11 @@
           <a:bodyPr wrap="square" lIns="0" tIns="0" rIns="0" bIns="0" rtlCol="0" anchor="ctr"/>
           <a:lstStyle/>
           <a:p>
-            <a:pPr indent="0" marL="0">
+            <a:pPr marL="0" indent="0">
               <a:buNone/>
             </a:pPr>
             <a:r>
-              <a:rPr lang="en-US" sz="1440" spc="200" kern="0" dirty="0">
+              <a:rPr lang="en-US" sz="1440" kern="0" spc="200" dirty="0">
                 <a:solidFill>
                   <a:srgbClr val="5FE0C5"/>
                 </a:solidFill>
@@ -11373,7 +13335,7 @@
           <a:bodyPr wrap="square" lIns="0" tIns="0" rIns="0" bIns="0" rtlCol="0" anchor="ctr"/>
           <a:lstStyle/>
           <a:p>
-            <a:pPr algn="l" indent="0" marL="0">
+            <a:pPr marL="0" indent="0" algn="l">
               <a:buNone/>
             </a:pPr>
             <a:r>
@@ -11417,13 +13379,20 @@
             <a:prstDash val="solid"/>
           </a:ln>
           <a:effectLst>
-            <a:outerShdw sx="100000" sy="100000" kx="0" ky="0" algn="bl" rotWithShape="0" blurRad="76200" dist="38100" dir="2700000">
+            <a:outerShdw blurRad="76200" dist="38100" dir="2700000" algn="bl" rotWithShape="0">
               <a:srgbClr val="000000">
                 <a:alpha val="20000"/>
               </a:srgbClr>
             </a:outerShdw>
           </a:effectLst>
         </p:spPr>
+        <p:txBody>
+          <a:bodyPr/>
+          <a:lstStyle/>
+          <a:p>
+            <a:endParaRPr lang="en-CA"/>
+          </a:p>
+        </p:txBody>
       </p:sp>
       <p:sp>
         <p:nvSpPr>
@@ -11446,7 +13415,7 @@
           <a:bodyPr wrap="square" lIns="0" tIns="0" rIns="0" bIns="0" rtlCol="0" anchor="ctr"/>
           <a:lstStyle/>
           <a:p>
-            <a:pPr algn="ctr" indent="0" marL="0">
+            <a:pPr marL="0" indent="0" algn="ctr">
               <a:buNone/>
             </a:pPr>
             <a:r>
@@ -11485,7 +13454,7 @@
           <a:bodyPr wrap="square" lIns="0" tIns="0" rIns="0" bIns="0" rtlCol="0" anchor="t"/>
           <a:lstStyle/>
           <a:p>
-            <a:pPr algn="ctr" indent="0" marL="0">
+            <a:pPr marL="0" indent="0" algn="ctr">
               <a:lnSpc>
                 <a:spcPct val="120000"/>
               </a:lnSpc>
@@ -11532,13 +13501,20 @@
             <a:prstDash val="solid"/>
           </a:ln>
           <a:effectLst>
-            <a:outerShdw sx="100000" sy="100000" kx="0" ky="0" algn="bl" rotWithShape="0" blurRad="76200" dist="38100" dir="2700000">
+            <a:outerShdw blurRad="76200" dist="38100" dir="2700000" algn="bl" rotWithShape="0">
               <a:srgbClr val="000000">
                 <a:alpha val="20000"/>
               </a:srgbClr>
             </a:outerShdw>
           </a:effectLst>
         </p:spPr>
+        <p:txBody>
+          <a:bodyPr/>
+          <a:lstStyle/>
+          <a:p>
+            <a:endParaRPr lang="en-CA"/>
+          </a:p>
+        </p:txBody>
       </p:sp>
       <p:sp>
         <p:nvSpPr>
@@ -11561,7 +13537,7 @@
           <a:bodyPr wrap="square" lIns="0" tIns="0" rIns="0" bIns="0" rtlCol="0" anchor="ctr"/>
           <a:lstStyle/>
           <a:p>
-            <a:pPr algn="ctr" indent="0" marL="0">
+            <a:pPr marL="0" indent="0" algn="ctr">
               <a:buNone/>
             </a:pPr>
             <a:r>
@@ -11600,7 +13576,7 @@
           <a:bodyPr wrap="square" lIns="0" tIns="0" rIns="0" bIns="0" rtlCol="0" anchor="t"/>
           <a:lstStyle/>
           <a:p>
-            <a:pPr algn="ctr" indent="0" marL="0">
+            <a:pPr marL="0" indent="0" algn="ctr">
               <a:lnSpc>
                 <a:spcPct val="120000"/>
               </a:lnSpc>
@@ -11647,13 +13623,20 @@
             <a:prstDash val="solid"/>
           </a:ln>
           <a:effectLst>
-            <a:outerShdw sx="100000" sy="100000" kx="0" ky="0" algn="bl" rotWithShape="0" blurRad="76200" dist="38100" dir="2700000">
+            <a:outerShdw blurRad="76200" dist="38100" dir="2700000" algn="bl" rotWithShape="0">
               <a:srgbClr val="000000">
                 <a:alpha val="20000"/>
               </a:srgbClr>
             </a:outerShdw>
           </a:effectLst>
         </p:spPr>
+        <p:txBody>
+          <a:bodyPr/>
+          <a:lstStyle/>
+          <a:p>
+            <a:endParaRPr lang="en-CA"/>
+          </a:p>
+        </p:txBody>
       </p:sp>
       <p:sp>
         <p:nvSpPr>
@@ -11676,7 +13659,7 @@
           <a:bodyPr wrap="square" lIns="0" tIns="0" rIns="0" bIns="0" rtlCol="0" anchor="ctr"/>
           <a:lstStyle/>
           <a:p>
-            <a:pPr algn="ctr" indent="0" marL="0">
+            <a:pPr marL="0" indent="0" algn="ctr">
               <a:buNone/>
             </a:pPr>
             <a:r>
@@ -11715,7 +13698,7 @@
           <a:bodyPr wrap="square" lIns="0" tIns="0" rIns="0" bIns="0" rtlCol="0" anchor="t"/>
           <a:lstStyle/>
           <a:p>
-            <a:pPr algn="ctr" indent="0" marL="0">
+            <a:pPr marL="0" indent="0" algn="ctr">
               <a:lnSpc>
                 <a:spcPct val="120000"/>
               </a:lnSpc>
@@ -11762,13 +13745,20 @@
             <a:prstDash val="solid"/>
           </a:ln>
           <a:effectLst>
-            <a:outerShdw sx="100000" sy="100000" kx="0" ky="0" algn="bl" rotWithShape="0" blurRad="76200" dist="38100" dir="2700000">
+            <a:outerShdw blurRad="76200" dist="38100" dir="2700000" algn="bl" rotWithShape="0">
               <a:srgbClr val="000000">
                 <a:alpha val="20000"/>
               </a:srgbClr>
             </a:outerShdw>
           </a:effectLst>
         </p:spPr>
+        <p:txBody>
+          <a:bodyPr/>
+          <a:lstStyle/>
+          <a:p>
+            <a:endParaRPr lang="en-CA"/>
+          </a:p>
+        </p:txBody>
       </p:sp>
       <p:sp>
         <p:nvSpPr>
@@ -11791,7 +13781,7 @@
           <a:bodyPr wrap="square" lIns="0" tIns="0" rIns="0" bIns="0" rtlCol="0" anchor="ctr"/>
           <a:lstStyle/>
           <a:p>
-            <a:pPr algn="ctr" indent="0" marL="0">
+            <a:pPr marL="0" indent="0" algn="ctr">
               <a:buNone/>
             </a:pPr>
             <a:r>
@@ -11830,7 +13820,7 @@
           <a:bodyPr wrap="square" lIns="0" tIns="0" rIns="0" bIns="0" rtlCol="0" anchor="t"/>
           <a:lstStyle/>
           <a:p>
-            <a:pPr algn="ctr" indent="0" marL="0">
+            <a:pPr marL="0" indent="0" algn="ctr">
               <a:lnSpc>
                 <a:spcPct val="120000"/>
               </a:lnSpc>
@@ -11850,7 +13840,7 @@
             <a:endParaRPr lang="en-US" sz="1440" dirty="0"/>
           </a:p>
           <a:p>
-            <a:pPr algn="ctr" indent="0" marL="0">
+            <a:pPr marL="0" indent="0" algn="ctr">
               <a:lnSpc>
                 <a:spcPct val="120000"/>
               </a:lnSpc>
@@ -11892,7 +13882,7 @@
           <a:bodyPr wrap="square" lIns="0" tIns="0" rIns="0" bIns="0" rtlCol="0" anchor="ctr"/>
           <a:lstStyle/>
           <a:p>
-            <a:pPr algn="ctr" indent="0" marL="0">
+            <a:pPr marL="0" indent="0" algn="ctr">
               <a:buNone/>
             </a:pPr>
             <a:r>
@@ -11906,9 +13896,6 @@
               </a:rPr>
               <a:t>ollama pull llama3.2</a:t>
             </a:r>
-            <a:pPr algn="ctr" indent="0" marL="0">
-              <a:buNone/>
-            </a:pPr>
             <a:r>
               <a:rPr lang="en-US" sz="1680" dirty="0">
                 <a:solidFill>
@@ -11920,9 +13907,6 @@
               </a:rPr>
               <a:t>   ·   </a:t>
             </a:r>
-            <a:pPr algn="ctr" indent="0" marL="0">
-              <a:buNone/>
-            </a:pPr>
             <a:r>
               <a:rPr lang="en-US" sz="1680" dirty="0">
                 <a:solidFill>
@@ -11948,12 +13932,13 @@
 
 <file path=ppt/slides/slide9.xml><?xml version="1.0" encoding="utf-8"?>
 <p:sld xmlns:a="http://schemas.openxmlformats.org/drawingml/2006/main" xmlns:r="http://schemas.openxmlformats.org/officeDocument/2006/relationships" xmlns:p="http://schemas.openxmlformats.org/presentationml/2006/main">
-  <p:cSld name="Slide 9">
+  <p:cSld name="Slide 10">
     <p:bg>
       <p:bgPr>
         <a:solidFill>
           <a:srgbClr val="0A0F1C"/>
         </a:solidFill>
+        <a:effectLst/>
       </p:bgPr>
     </p:bg>
     <p:spTree>
@@ -11994,6 +13979,13 @@
             <a:prstDash val="solid"/>
           </a:ln>
         </p:spPr>
+        <p:txBody>
+          <a:bodyPr/>
+          <a:lstStyle/>
+          <a:p>
+            <a:endParaRPr lang="en-CA"/>
+          </a:p>
+        </p:txBody>
       </p:sp>
       <p:sp>
         <p:nvSpPr>
@@ -12019,6 +14011,13 @@
             <a:prstDash val="solid"/>
           </a:ln>
         </p:spPr>
+        <p:txBody>
+          <a:bodyPr/>
+          <a:lstStyle/>
+          <a:p>
+            <a:endParaRPr lang="en-CA"/>
+          </a:p>
+        </p:txBody>
       </p:sp>
       <p:sp>
         <p:nvSpPr>
@@ -12044,6 +14043,13 @@
             <a:prstDash val="solid"/>
           </a:ln>
         </p:spPr>
+        <p:txBody>
+          <a:bodyPr/>
+          <a:lstStyle/>
+          <a:p>
+            <a:endParaRPr lang="en-CA"/>
+          </a:p>
+        </p:txBody>
       </p:sp>
       <p:sp>
         <p:nvSpPr>
@@ -12066,6 +14072,13 @@
           </a:solidFill>
           <a:ln/>
         </p:spPr>
+        <p:txBody>
+          <a:bodyPr/>
+          <a:lstStyle/>
+          <a:p>
+            <a:endParaRPr lang="en-CA"/>
+          </a:p>
+        </p:txBody>
       </p:sp>
       <p:sp>
         <p:nvSpPr>
@@ -12088,6 +14101,13 @@
           </a:solidFill>
           <a:ln/>
         </p:spPr>
+        <p:txBody>
+          <a:bodyPr/>
+          <a:lstStyle/>
+          <a:p>
+            <a:endParaRPr lang="en-CA"/>
+          </a:p>
+        </p:txBody>
       </p:sp>
       <p:sp>
         <p:nvSpPr>
@@ -12110,6 +14130,13 @@
           </a:solidFill>
           <a:ln/>
         </p:spPr>
+        <p:txBody>
+          <a:bodyPr/>
+          <a:lstStyle/>
+          <a:p>
+            <a:endParaRPr lang="en-CA"/>
+          </a:p>
+        </p:txBody>
       </p:sp>
       <p:sp>
         <p:nvSpPr>
@@ -12132,6 +14159,13 @@
           </a:solidFill>
           <a:ln/>
         </p:spPr>
+        <p:txBody>
+          <a:bodyPr/>
+          <a:lstStyle/>
+          <a:p>
+            <a:endParaRPr lang="en-CA"/>
+          </a:p>
+        </p:txBody>
       </p:sp>
       <p:sp>
         <p:nvSpPr>
@@ -12157,6 +14191,13 @@
             <a:prstDash val="solid"/>
           </a:ln>
         </p:spPr>
+        <p:txBody>
+          <a:bodyPr/>
+          <a:lstStyle/>
+          <a:p>
+            <a:endParaRPr lang="en-CA"/>
+          </a:p>
+        </p:txBody>
       </p:sp>
       <p:sp>
         <p:nvSpPr>
@@ -12182,6 +14223,13 @@
             <a:prstDash val="solid"/>
           </a:ln>
         </p:spPr>
+        <p:txBody>
+          <a:bodyPr/>
+          <a:lstStyle/>
+          <a:p>
+            <a:endParaRPr lang="en-CA"/>
+          </a:p>
+        </p:txBody>
       </p:sp>
       <p:sp>
         <p:nvSpPr>
@@ -12207,6 +14255,13 @@
             <a:prstDash val="solid"/>
           </a:ln>
         </p:spPr>
+        <p:txBody>
+          <a:bodyPr/>
+          <a:lstStyle/>
+          <a:p>
+            <a:endParaRPr lang="en-CA"/>
+          </a:p>
+        </p:txBody>
       </p:sp>
       <p:sp>
         <p:nvSpPr>
@@ -12229,6 +14284,13 @@
           </a:solidFill>
           <a:ln/>
         </p:spPr>
+        <p:txBody>
+          <a:bodyPr/>
+          <a:lstStyle/>
+          <a:p>
+            <a:endParaRPr lang="en-CA"/>
+          </a:p>
+        </p:txBody>
       </p:sp>
       <p:sp>
         <p:nvSpPr>
@@ -12251,6 +14313,13 @@
           </a:solidFill>
           <a:ln/>
         </p:spPr>
+        <p:txBody>
+          <a:bodyPr/>
+          <a:lstStyle/>
+          <a:p>
+            <a:endParaRPr lang="en-CA"/>
+          </a:p>
+        </p:txBody>
       </p:sp>
       <p:sp>
         <p:nvSpPr>
@@ -12273,6 +14342,13 @@
           </a:solidFill>
           <a:ln/>
         </p:spPr>
+        <p:txBody>
+          <a:bodyPr/>
+          <a:lstStyle/>
+          <a:p>
+            <a:endParaRPr lang="en-CA"/>
+          </a:p>
+        </p:txBody>
       </p:sp>
       <p:sp>
         <p:nvSpPr>
@@ -12295,6 +14371,13 @@
           </a:solidFill>
           <a:ln/>
         </p:spPr>
+        <p:txBody>
+          <a:bodyPr/>
+          <a:lstStyle/>
+          <a:p>
+            <a:endParaRPr lang="en-CA"/>
+          </a:p>
+        </p:txBody>
       </p:sp>
       <p:sp>
         <p:nvSpPr>
@@ -12317,7 +14400,7 @@
           <a:bodyPr wrap="square" lIns="0" tIns="0" rIns="0" bIns="0" rtlCol="0" anchor="ctr"/>
           <a:lstStyle/>
           <a:p>
-            <a:pPr indent="0" marL="0">
+            <a:pPr marL="0" indent="0">
               <a:buNone/>
             </a:pPr>
             <a:r>
@@ -12356,7 +14439,7 @@
           <a:bodyPr wrap="square" lIns="0" tIns="0" rIns="0" bIns="0" rtlCol="0" anchor="ctr"/>
           <a:lstStyle/>
           <a:p>
-            <a:pPr algn="r" indent="0" marL="0">
+            <a:pPr marL="0" indent="0" algn="r">
               <a:buNone/>
             </a:pPr>
             <a:r>
@@ -12368,7 +14451,7 @@
                 <a:ea typeface="Courier New" pitchFamily="34" charset="-122"/>
                 <a:cs typeface="Courier New" pitchFamily="34" charset="-120"/>
               </a:rPr>
-              <a:t>9 / 10</a:t>
+              <a:t>10 / 11</a:t>
             </a:r>
             <a:endParaRPr lang="en-US" sz="1080" dirty="0"/>
           </a:p>
@@ -12382,8 +14465,8 @@
         </p:nvSpPr>
         <p:spPr>
           <a:xfrm>
-            <a:off x="5577840" y="945490"/>
-            <a:ext cx="502920" cy="502920"/>
+            <a:off x="640080" y="164592"/>
+            <a:ext cx="7315200" cy="274320"/>
           </a:xfrm>
           <a:prstGeom prst="rect">
             <a:avLst/>
@@ -12395,56 +14478,34 @@
           <a:bodyPr wrap="square" lIns="0" tIns="0" rIns="0" bIns="0" rtlCol="0" anchor="ctr"/>
           <a:lstStyle/>
           <a:p>
-            <a:pPr algn="ctr" indent="0" marL="0">
+            <a:pPr marL="0" indent="0">
               <a:buNone/>
             </a:pPr>
             <a:r>
-              <a:rPr lang="en-US" sz="3696" b="1" dirty="0">
-                <a:solidFill>
-                  <a:srgbClr val="F2A93B"/>
+              <a:rPr lang="en-US" sz="1440" kern="0" spc="200" dirty="0">
+                <a:solidFill>
+                  <a:srgbClr val="5FE0C5"/>
                 </a:solidFill>
                 <a:latin typeface="Courier New" pitchFamily="34" charset="0"/>
                 <a:ea typeface="Courier New" pitchFamily="34" charset="-122"/>
                 <a:cs typeface="Courier New" pitchFamily="34" charset="-120"/>
               </a:rPr>
-              <a:t>&gt;</a:t>
-            </a:r>
-            <a:endParaRPr lang="en-US" sz="3696" dirty="0"/>
-          </a:p>
-        </p:txBody>
-      </p:sp>
-      <p:sp>
-        <p:nvSpPr>
-          <p:cNvPr id="19" name="Shape 17"/>
-          <p:cNvSpPr/>
-          <p:nvPr/>
-        </p:nvSpPr>
-        <p:spPr>
-          <a:xfrm>
-            <a:off x="6000293" y="1186891"/>
-            <a:ext cx="341986" cy="120701"/>
-          </a:xfrm>
-          <a:prstGeom prst="roundRect">
-            <a:avLst>
-              <a:gd name="adj" fmla="val 50000"/>
-            </a:avLst>
-          </a:prstGeom>
-          <a:solidFill>
-            <a:srgbClr val="5FE0C5"/>
-          </a:solidFill>
-          <a:ln/>
-        </p:spPr>
-      </p:sp>
-      <p:sp>
-        <p:nvSpPr>
-          <p:cNvPr id="20" name="Text 18"/>
-          <p:cNvSpPr/>
-          <p:nvPr/>
-        </p:nvSpPr>
-        <p:spPr>
-          <a:xfrm>
-            <a:off x="0" y="1783080"/>
-            <a:ext cx="12161520" cy="731520"/>
+              <a:t>RESOURCES</a:t>
+            </a:r>
+            <a:endParaRPr lang="en-US" sz="1440" dirty="0"/>
+          </a:p>
+        </p:txBody>
+      </p:sp>
+      <p:sp>
+        <p:nvSpPr>
+          <p:cNvPr id="19" name="Text 17"/>
+          <p:cNvSpPr/>
+          <p:nvPr/>
+        </p:nvSpPr>
+        <p:spPr>
+          <a:xfrm>
+            <a:off x="640080" y="457200"/>
+            <a:ext cx="10881360" cy="640080"/>
           </a:xfrm>
           <a:prstGeom prst="rect">
             <a:avLst/>
@@ -12456,21 +14517,60 @@
           <a:bodyPr wrap="square" lIns="0" tIns="0" rIns="0" bIns="0" rtlCol="0" anchor="ctr"/>
           <a:lstStyle/>
           <a:p>
-            <a:pPr algn="ctr" indent="0" marL="0">
+            <a:pPr marL="0" indent="0" algn="l">
               <a:buNone/>
             </a:pPr>
             <a:r>
-              <a:rPr lang="en-US" sz="4320" b="1" dirty="0">
-                <a:solidFill>
-                  <a:srgbClr val="E5E9F0"/>
+              <a:rPr lang="en-US" sz="3360" b="1" dirty="0">
+                <a:solidFill>
+                  <a:srgbClr val="F2A93B"/>
                 </a:solidFill>
                 <a:latin typeface="Courier New" pitchFamily="34" charset="0"/>
                 <a:ea typeface="Courier New" pitchFamily="34" charset="-122"/>
                 <a:cs typeface="Courier New" pitchFamily="34" charset="-120"/>
               </a:rPr>
-              <a:t>Let's build Chapter 1.</a:t>
-            </a:r>
-            <a:endParaRPr lang="en-US" sz="4320" dirty="0"/>
+              <a:t>Keep learning</a:t>
+            </a:r>
+            <a:endParaRPr lang="en-US" sz="3360" dirty="0"/>
+          </a:p>
+        </p:txBody>
+      </p:sp>
+      <p:sp>
+        <p:nvSpPr>
+          <p:cNvPr id="20" name="Text 18"/>
+          <p:cNvSpPr/>
+          <p:nvPr/>
+        </p:nvSpPr>
+        <p:spPr>
+          <a:xfrm>
+            <a:off x="640080" y="1371600"/>
+            <a:ext cx="10881360" cy="457200"/>
+          </a:xfrm>
+          <a:prstGeom prst="rect">
+            <a:avLst/>
+          </a:prstGeom>
+          <a:noFill/>
+          <a:ln/>
+        </p:spPr>
+        <p:txBody>
+          <a:bodyPr wrap="square" lIns="0" tIns="0" rIns="0" bIns="0" rtlCol="0" anchor="ctr"/>
+          <a:lstStyle/>
+          <a:p>
+            <a:pPr marL="0" indent="0">
+              <a:buNone/>
+            </a:pPr>
+            <a:r>
+              <a:rPr lang="en-US" sz="1920" dirty="0">
+                <a:solidFill>
+                  <a:srgbClr val="B8C0D0"/>
+                </a:solidFill>
+                <a:latin typeface="Calibri" pitchFamily="34" charset="0"/>
+                <a:ea typeface="Calibri" pitchFamily="34" charset="-122"/>
+                <a:cs typeface="Calibri" pitchFamily="34" charset="-120"/>
+              </a:rPr>
+              <a:t>Everything for this series lives in one place — read, run, and test yourself.</a:t>
+            </a:r>
+            <a:endParaRPr lang="en-US" sz="1920" dirty="0"/>
           </a:p>
         </p:txBody>
       </p:sp>
@@ -12482,8 +14582,482 @@
         </p:nvSpPr>
         <p:spPr>
           <a:xfrm>
-            <a:off x="4709160" y="2743200"/>
-            <a:ext cx="2743200" cy="0"/>
+            <a:off x="822960" y="1874520"/>
+            <a:ext cx="10515600" cy="1097280"/>
+          </a:xfrm>
+          <a:prstGeom prst="roundRect">
+            <a:avLst>
+              <a:gd name="adj" fmla="val 10000"/>
+            </a:avLst>
+          </a:prstGeom>
+          <a:solidFill>
+            <a:srgbClr val="121A2E"/>
+          </a:solidFill>
+          <a:ln w="19050">
+            <a:solidFill>
+              <a:srgbClr val="F2A93B"/>
+            </a:solidFill>
+            <a:prstDash val="solid"/>
+          </a:ln>
+          <a:effectLst>
+            <a:outerShdw blurRad="101600" dist="38100" dir="2700000" algn="bl" rotWithShape="0">
+              <a:srgbClr val="000000">
+                <a:alpha val="25000"/>
+              </a:srgbClr>
+            </a:outerShdw>
+          </a:effectLst>
+        </p:spPr>
+        <p:txBody>
+          <a:bodyPr/>
+          <a:lstStyle/>
+          <a:p>
+            <a:endParaRPr lang="en-CA"/>
+          </a:p>
+        </p:txBody>
+      </p:sp>
+      <p:sp>
+        <p:nvSpPr>
+          <p:cNvPr id="22" name="Text 20"/>
+          <p:cNvSpPr/>
+          <p:nvPr/>
+        </p:nvSpPr>
+        <p:spPr>
+          <a:xfrm>
+            <a:off x="1143000" y="2011680"/>
+            <a:ext cx="9875520" cy="384048"/>
+          </a:xfrm>
+          <a:prstGeom prst="rect">
+            <a:avLst/>
+          </a:prstGeom>
+          <a:noFill/>
+          <a:ln/>
+        </p:spPr>
+        <p:txBody>
+          <a:bodyPr wrap="square" lIns="0" tIns="0" rIns="0" bIns="0" rtlCol="0" anchor="ctr"/>
+          <a:lstStyle/>
+          <a:p>
+            <a:pPr marL="0" indent="0">
+              <a:buNone/>
+            </a:pPr>
+            <a:r>
+              <a:rPr lang="en-US" sz="1920" b="1" dirty="0">
+                <a:solidFill>
+                  <a:srgbClr val="F2A93B"/>
+                </a:solidFill>
+                <a:latin typeface="Courier New" pitchFamily="34" charset="0"/>
+                <a:ea typeface="Courier New" pitchFamily="34" charset="-122"/>
+                <a:cs typeface="Courier New" pitchFamily="34" charset="-120"/>
+              </a:rPr>
+              <a:t>Source code — all chapters</a:t>
+            </a:r>
+            <a:endParaRPr lang="en-US" sz="1920" dirty="0"/>
+          </a:p>
+        </p:txBody>
+      </p:sp>
+      <p:sp>
+        <p:nvSpPr>
+          <p:cNvPr id="23" name="Text 21"/>
+          <p:cNvSpPr/>
+          <p:nvPr/>
+        </p:nvSpPr>
+        <p:spPr>
+          <a:xfrm>
+            <a:off x="1143000" y="2386584"/>
+            <a:ext cx="9875520" cy="320040"/>
+          </a:xfrm>
+          <a:prstGeom prst="rect">
+            <a:avLst/>
+          </a:prstGeom>
+          <a:noFill/>
+          <a:ln/>
+        </p:spPr>
+        <p:txBody>
+          <a:bodyPr wrap="square" lIns="0" tIns="0" rIns="0" bIns="0" rtlCol="0" anchor="ctr"/>
+          <a:lstStyle/>
+          <a:p>
+            <a:pPr marL="0" indent="0">
+              <a:buNone/>
+            </a:pPr>
+            <a:r>
+              <a:rPr lang="en-US" sz="1440" dirty="0">
+                <a:solidFill>
+                  <a:srgbClr val="E5E9F0"/>
+                </a:solidFill>
+                <a:latin typeface="Calibri" pitchFamily="34" charset="0"/>
+                <a:ea typeface="Calibri" pitchFamily="34" charset="-122"/>
+                <a:cs typeface="Calibri" pitchFamily="34" charset="-120"/>
+              </a:rPr>
+              <a:t>Clone, run, and star the repo on GitHub.</a:t>
+            </a:r>
+            <a:endParaRPr lang="en-US" sz="1440" dirty="0"/>
+          </a:p>
+        </p:txBody>
+      </p:sp>
+      <p:sp>
+        <p:nvSpPr>
+          <p:cNvPr id="24" name="Text 22"/>
+          <p:cNvSpPr/>
+          <p:nvPr/>
+        </p:nvSpPr>
+        <p:spPr>
+          <a:xfrm>
+            <a:off x="1143000" y="2670048"/>
+            <a:ext cx="9875520" cy="292608"/>
+          </a:xfrm>
+          <a:prstGeom prst="rect">
+            <a:avLst/>
+          </a:prstGeom>
+          <a:noFill/>
+          <a:ln/>
+        </p:spPr>
+        <p:txBody>
+          <a:bodyPr wrap="square" lIns="0" tIns="0" rIns="0" bIns="0" rtlCol="0" anchor="ctr"/>
+          <a:lstStyle/>
+          <a:p>
+            <a:pPr marL="0" indent="0">
+              <a:buNone/>
+            </a:pPr>
+            <a:r>
+              <a:rPr lang="en-US" sz="1440" dirty="0">
+                <a:solidFill>
+                  <a:srgbClr val="8B98AC"/>
+                </a:solidFill>
+                <a:latin typeface="Courier New" pitchFamily="34" charset="0"/>
+                <a:ea typeface="Courier New" pitchFamily="34" charset="-122"/>
+                <a:cs typeface="Courier New" pitchFamily="34" charset="-120"/>
+              </a:rPr>
+              <a:t>github.com/balajich/spring-ai-with-llama</a:t>
+            </a:r>
+            <a:endParaRPr lang="en-US" sz="1440" dirty="0"/>
+          </a:p>
+        </p:txBody>
+      </p:sp>
+      <p:sp>
+        <p:nvSpPr>
+          <p:cNvPr id="25" name="Shape 23"/>
+          <p:cNvSpPr/>
+          <p:nvPr/>
+        </p:nvSpPr>
+        <p:spPr>
+          <a:xfrm>
+            <a:off x="822960" y="3154680"/>
+            <a:ext cx="10515600" cy="1097280"/>
+          </a:xfrm>
+          <a:prstGeom prst="roundRect">
+            <a:avLst>
+              <a:gd name="adj" fmla="val 10000"/>
+            </a:avLst>
+          </a:prstGeom>
+          <a:solidFill>
+            <a:srgbClr val="121A2E"/>
+          </a:solidFill>
+          <a:ln w="19050">
+            <a:solidFill>
+              <a:srgbClr val="5FE0C5"/>
+            </a:solidFill>
+            <a:prstDash val="solid"/>
+          </a:ln>
+          <a:effectLst>
+            <a:outerShdw blurRad="101600" dist="38100" dir="2700000" algn="bl" rotWithShape="0">
+              <a:srgbClr val="000000">
+                <a:alpha val="25000"/>
+              </a:srgbClr>
+            </a:outerShdw>
+          </a:effectLst>
+        </p:spPr>
+        <p:txBody>
+          <a:bodyPr/>
+          <a:lstStyle/>
+          <a:p>
+            <a:endParaRPr lang="en-CA"/>
+          </a:p>
+        </p:txBody>
+      </p:sp>
+      <p:sp>
+        <p:nvSpPr>
+          <p:cNvPr id="26" name="Text 24"/>
+          <p:cNvSpPr/>
+          <p:nvPr/>
+        </p:nvSpPr>
+        <p:spPr>
+          <a:xfrm>
+            <a:off x="1143000" y="3291840"/>
+            <a:ext cx="9875520" cy="384048"/>
+          </a:xfrm>
+          <a:prstGeom prst="rect">
+            <a:avLst/>
+          </a:prstGeom>
+          <a:noFill/>
+          <a:ln/>
+        </p:spPr>
+        <p:txBody>
+          <a:bodyPr wrap="square" lIns="0" tIns="0" rIns="0" bIns="0" rtlCol="0" anchor="ctr"/>
+          <a:lstStyle/>
+          <a:p>
+            <a:pPr marL="0" indent="0">
+              <a:buNone/>
+            </a:pPr>
+            <a:r>
+              <a:rPr lang="en-US" sz="1920" b="1" dirty="0">
+                <a:solidFill>
+                  <a:srgbClr val="5FE0C5"/>
+                </a:solidFill>
+                <a:latin typeface="Courier New" pitchFamily="34" charset="0"/>
+                <a:ea typeface="Courier New" pitchFamily="34" charset="-122"/>
+                <a:cs typeface="Courier New" pitchFamily="34" charset="-120"/>
+              </a:rPr>
+              <a:t>Full tutorial series</a:t>
+            </a:r>
+            <a:endParaRPr lang="en-US" sz="1920" dirty="0"/>
+          </a:p>
+        </p:txBody>
+      </p:sp>
+      <p:sp>
+        <p:nvSpPr>
+          <p:cNvPr id="27" name="Text 25"/>
+          <p:cNvSpPr/>
+          <p:nvPr/>
+        </p:nvSpPr>
+        <p:spPr>
+          <a:xfrm>
+            <a:off x="1143000" y="3666744"/>
+            <a:ext cx="9875520" cy="320040"/>
+          </a:xfrm>
+          <a:prstGeom prst="rect">
+            <a:avLst/>
+          </a:prstGeom>
+          <a:noFill/>
+          <a:ln/>
+        </p:spPr>
+        <p:txBody>
+          <a:bodyPr wrap="square" lIns="0" tIns="0" rIns="0" bIns="0" rtlCol="0" anchor="ctr"/>
+          <a:lstStyle/>
+          <a:p>
+            <a:pPr marL="0" indent="0">
+              <a:buNone/>
+            </a:pPr>
+            <a:r>
+              <a:rPr lang="en-US" sz="1440" dirty="0">
+                <a:solidFill>
+                  <a:srgbClr val="E5E9F0"/>
+                </a:solidFill>
+                <a:latin typeface="Calibri" pitchFamily="34" charset="0"/>
+                <a:ea typeface="Calibri" pitchFamily="34" charset="-122"/>
+                <a:cs typeface="Calibri" pitchFamily="34" charset="-120"/>
+              </a:rPr>
+              <a:t>Read every chapter online, with code and diagrams.</a:t>
+            </a:r>
+            <a:endParaRPr lang="en-US" sz="1440" dirty="0"/>
+          </a:p>
+        </p:txBody>
+      </p:sp>
+      <p:sp>
+        <p:nvSpPr>
+          <p:cNvPr id="28" name="Text 26"/>
+          <p:cNvSpPr/>
+          <p:nvPr/>
+        </p:nvSpPr>
+        <p:spPr>
+          <a:xfrm>
+            <a:off x="1143000" y="3950208"/>
+            <a:ext cx="9875520" cy="292608"/>
+          </a:xfrm>
+          <a:prstGeom prst="rect">
+            <a:avLst/>
+          </a:prstGeom>
+          <a:noFill/>
+          <a:ln/>
+        </p:spPr>
+        <p:txBody>
+          <a:bodyPr wrap="square" lIns="0" tIns="0" rIns="0" bIns="0" rtlCol="0" anchor="ctr"/>
+          <a:lstStyle/>
+          <a:p>
+            <a:pPr marL="0" indent="0">
+              <a:buNone/>
+            </a:pPr>
+            <a:r>
+              <a:rPr lang="en-US" sz="1440" dirty="0">
+                <a:solidFill>
+                  <a:srgbClr val="8B98AC"/>
+                </a:solidFill>
+                <a:latin typeface="Courier New" pitchFamily="34" charset="0"/>
+                <a:ea typeface="Courier New" pitchFamily="34" charset="-122"/>
+                <a:cs typeface="Courier New" pitchFamily="34" charset="-120"/>
+              </a:rPr>
+              <a:t>prompttoapps.com/tutorials/spring-ai-llama</a:t>
+            </a:r>
+            <a:endParaRPr lang="en-US" sz="1440" dirty="0"/>
+          </a:p>
+        </p:txBody>
+      </p:sp>
+      <p:sp>
+        <p:nvSpPr>
+          <p:cNvPr id="29" name="Shape 27"/>
+          <p:cNvSpPr/>
+          <p:nvPr/>
+        </p:nvSpPr>
+        <p:spPr>
+          <a:xfrm>
+            <a:off x="822960" y="4434840"/>
+            <a:ext cx="10515600" cy="1097280"/>
+          </a:xfrm>
+          <a:prstGeom prst="roundRect">
+            <a:avLst>
+              <a:gd name="adj" fmla="val 10000"/>
+            </a:avLst>
+          </a:prstGeom>
+          <a:solidFill>
+            <a:srgbClr val="121A2E"/>
+          </a:solidFill>
+          <a:ln w="19050">
+            <a:solidFill>
+              <a:srgbClr val="8B98AC"/>
+            </a:solidFill>
+            <a:prstDash val="solid"/>
+          </a:ln>
+          <a:effectLst>
+            <a:outerShdw blurRad="101600" dist="38100" dir="2700000" algn="bl" rotWithShape="0">
+              <a:srgbClr val="000000">
+                <a:alpha val="25000"/>
+              </a:srgbClr>
+            </a:outerShdw>
+          </a:effectLst>
+        </p:spPr>
+        <p:txBody>
+          <a:bodyPr/>
+          <a:lstStyle/>
+          <a:p>
+            <a:endParaRPr lang="en-CA"/>
+          </a:p>
+        </p:txBody>
+      </p:sp>
+      <p:sp>
+        <p:nvSpPr>
+          <p:cNvPr id="30" name="Text 28"/>
+          <p:cNvSpPr/>
+          <p:nvPr/>
+        </p:nvSpPr>
+        <p:spPr>
+          <a:xfrm>
+            <a:off x="1143000" y="4572000"/>
+            <a:ext cx="9875520" cy="384048"/>
+          </a:xfrm>
+          <a:prstGeom prst="rect">
+            <a:avLst/>
+          </a:prstGeom>
+          <a:noFill/>
+          <a:ln/>
+        </p:spPr>
+        <p:txBody>
+          <a:bodyPr wrap="square" lIns="0" tIns="0" rIns="0" bIns="0" rtlCol="0" anchor="ctr"/>
+          <a:lstStyle/>
+          <a:p>
+            <a:pPr marL="0" indent="0">
+              <a:buNone/>
+            </a:pPr>
+            <a:r>
+              <a:rPr lang="en-US" sz="1920" b="1" dirty="0">
+                <a:solidFill>
+                  <a:srgbClr val="8B98AC"/>
+                </a:solidFill>
+                <a:latin typeface="Courier New" pitchFamily="34" charset="0"/>
+                <a:ea typeface="Courier New" pitchFamily="34" charset="-122"/>
+                <a:cs typeface="Courier New" pitchFamily="34" charset="-120"/>
+              </a:rPr>
+              <a:t>Test yourself — chapter quizzes</a:t>
+            </a:r>
+            <a:endParaRPr lang="en-US" sz="1920" dirty="0"/>
+          </a:p>
+        </p:txBody>
+      </p:sp>
+      <p:sp>
+        <p:nvSpPr>
+          <p:cNvPr id="31" name="Text 29"/>
+          <p:cNvSpPr/>
+          <p:nvPr/>
+        </p:nvSpPr>
+        <p:spPr>
+          <a:xfrm>
+            <a:off x="1143000" y="4946904"/>
+            <a:ext cx="9875520" cy="320040"/>
+          </a:xfrm>
+          <a:prstGeom prst="rect">
+            <a:avLst/>
+          </a:prstGeom>
+          <a:noFill/>
+          <a:ln/>
+        </p:spPr>
+        <p:txBody>
+          <a:bodyPr wrap="square" lIns="0" tIns="0" rIns="0" bIns="0" rtlCol="0" anchor="ctr"/>
+          <a:lstStyle/>
+          <a:p>
+            <a:pPr marL="0" indent="0">
+              <a:buNone/>
+            </a:pPr>
+            <a:r>
+              <a:rPr lang="en-US" sz="1440" dirty="0">
+                <a:solidFill>
+                  <a:srgbClr val="E5E9F0"/>
+                </a:solidFill>
+                <a:latin typeface="Calibri" pitchFamily="34" charset="0"/>
+                <a:ea typeface="Calibri" pitchFamily="34" charset="-122"/>
+                <a:cs typeface="Calibri" pitchFamily="34" charset="-120"/>
+              </a:rPr>
+              <a:t>Check your understanding chapter by chapter.</a:t>
+            </a:r>
+            <a:endParaRPr lang="en-US" sz="1440" dirty="0"/>
+          </a:p>
+        </p:txBody>
+      </p:sp>
+      <p:sp>
+        <p:nvSpPr>
+          <p:cNvPr id="32" name="Text 30"/>
+          <p:cNvSpPr/>
+          <p:nvPr/>
+        </p:nvSpPr>
+        <p:spPr>
+          <a:xfrm>
+            <a:off x="1143000" y="5230368"/>
+            <a:ext cx="9875520" cy="292608"/>
+          </a:xfrm>
+          <a:prstGeom prst="rect">
+            <a:avLst/>
+          </a:prstGeom>
+          <a:noFill/>
+          <a:ln/>
+        </p:spPr>
+        <p:txBody>
+          <a:bodyPr wrap="square" lIns="0" tIns="0" rIns="0" bIns="0" rtlCol="0" anchor="ctr"/>
+          <a:lstStyle/>
+          <a:p>
+            <a:pPr marL="0" indent="0">
+              <a:buNone/>
+            </a:pPr>
+            <a:r>
+              <a:rPr lang="en-US" sz="1440" dirty="0">
+                <a:solidFill>
+                  <a:srgbClr val="8B98AC"/>
+                </a:solidFill>
+                <a:latin typeface="Courier New" pitchFamily="34" charset="0"/>
+                <a:ea typeface="Courier New" pitchFamily="34" charset="-122"/>
+                <a:cs typeface="Courier New" pitchFamily="34" charset="-120"/>
+              </a:rPr>
+              <a:t>prompttoapps.com/quiz/#springai/ch01</a:t>
+            </a:r>
+            <a:endParaRPr lang="en-US" sz="1440" dirty="0"/>
+          </a:p>
+        </p:txBody>
+      </p:sp>
+      <p:sp>
+        <p:nvSpPr>
+          <p:cNvPr id="33" name="Shape 31"/>
+          <p:cNvSpPr/>
+          <p:nvPr/>
+        </p:nvSpPr>
+        <p:spPr>
+          <a:xfrm>
+            <a:off x="4251960" y="5943600"/>
+            <a:ext cx="3657600" cy="0"/>
           </a:xfrm>
           <a:prstGeom prst="line">
             <a:avLst/>
@@ -12498,16 +15072,23 @@
             <a:prstDash val="solid"/>
           </a:ln>
         </p:spPr>
-      </p:sp>
-      <p:sp>
-        <p:nvSpPr>
-          <p:cNvPr id="22" name="Shape 20"/>
-          <p:cNvSpPr/>
-          <p:nvPr/>
-        </p:nvSpPr>
-        <p:spPr>
-          <a:xfrm>
-            <a:off x="4668012" y="2702052"/>
+        <p:txBody>
+          <a:bodyPr/>
+          <a:lstStyle/>
+          <a:p>
+            <a:endParaRPr lang="en-CA"/>
+          </a:p>
+        </p:txBody>
+      </p:sp>
+      <p:sp>
+        <p:nvSpPr>
+          <p:cNvPr id="34" name="Shape 32"/>
+          <p:cNvSpPr/>
+          <p:nvPr/>
+        </p:nvSpPr>
+        <p:spPr>
+          <a:xfrm>
+            <a:off x="4210812" y="5902452"/>
             <a:ext cx="82296" cy="82296"/>
           </a:xfrm>
           <a:prstGeom prst="ellipse">
@@ -12523,16 +15104,23 @@
             <a:prstDash val="solid"/>
           </a:ln>
         </p:spPr>
-      </p:sp>
-      <p:sp>
-        <p:nvSpPr>
-          <p:cNvPr id="23" name="Shape 21"/>
-          <p:cNvSpPr/>
-          <p:nvPr/>
-        </p:nvSpPr>
-        <p:spPr>
-          <a:xfrm>
-            <a:off x="6039612" y="2702052"/>
+        <p:txBody>
+          <a:bodyPr/>
+          <a:lstStyle/>
+          <a:p>
+            <a:endParaRPr lang="en-CA"/>
+          </a:p>
+        </p:txBody>
+      </p:sp>
+      <p:sp>
+        <p:nvSpPr>
+          <p:cNvPr id="35" name="Shape 33"/>
+          <p:cNvSpPr/>
+          <p:nvPr/>
+        </p:nvSpPr>
+        <p:spPr>
+          <a:xfrm>
+            <a:off x="6039612" y="5902452"/>
             <a:ext cx="82296" cy="82296"/>
           </a:xfrm>
           <a:prstGeom prst="ellipse">
@@ -12548,16 +15136,23 @@
             <a:prstDash val="solid"/>
           </a:ln>
         </p:spPr>
-      </p:sp>
-      <p:sp>
-        <p:nvSpPr>
-          <p:cNvPr id="24" name="Shape 22"/>
-          <p:cNvSpPr/>
-          <p:nvPr/>
-        </p:nvSpPr>
-        <p:spPr>
-          <a:xfrm>
-            <a:off x="7411212" y="2702052"/>
+        <p:txBody>
+          <a:bodyPr/>
+          <a:lstStyle/>
+          <a:p>
+            <a:endParaRPr lang="en-CA"/>
+          </a:p>
+        </p:txBody>
+      </p:sp>
+      <p:sp>
+        <p:nvSpPr>
+          <p:cNvPr id="36" name="Shape 34"/>
+          <p:cNvSpPr/>
+          <p:nvPr/>
+        </p:nvSpPr>
+        <p:spPr>
+          <a:xfrm>
+            <a:off x="7868412" y="5902452"/>
             <a:ext cx="82296" cy="82296"/>
           </a:xfrm>
           <a:prstGeom prst="ellipse">
@@ -12573,163 +15168,11 @@
             <a:prstDash val="solid"/>
           </a:ln>
         </p:spPr>
-      </p:sp>
-      <p:sp>
-        <p:nvSpPr>
-          <p:cNvPr id="25" name="Text 23"/>
-          <p:cNvSpPr/>
-          <p:nvPr/>
-        </p:nvSpPr>
-        <p:spPr>
-          <a:xfrm>
-            <a:off x="0" y="3017520"/>
-            <a:ext cx="12161520" cy="457200"/>
-          </a:xfrm>
-          <a:prstGeom prst="rect">
-            <a:avLst/>
-          </a:prstGeom>
-          <a:noFill/>
-          <a:ln/>
-        </p:spPr>
-        <p:txBody>
-          <a:bodyPr wrap="square" lIns="0" tIns="0" rIns="0" bIns="0" rtlCol="0" anchor="ctr"/>
-          <a:lstStyle/>
-          <a:p>
-            <a:pPr algn="ctr" indent="0" marL="0">
-              <a:buNone/>
-            </a:pPr>
-            <a:r>
-              <a:rPr lang="en-US" sz="2040" b="1" dirty="0">
-                <a:solidFill>
-                  <a:srgbClr val="F2A93B"/>
-                </a:solidFill>
-                <a:latin typeface="Calibri" pitchFamily="34" charset="0"/>
-                <a:ea typeface="Calibri" pitchFamily="34" charset="-122"/>
-                <a:cs typeface="Calibri" pitchFamily="34" charset="-120"/>
-              </a:rPr>
-              <a:t>Subscribe</a:t>
-            </a:r>
-            <a:pPr algn="ctr" indent="0" marL="0">
-              <a:buNone/>
-            </a:pPr>
-            <a:r>
-              <a:rPr lang="en-US" sz="2040" dirty="0">
-                <a:solidFill>
-                  <a:srgbClr val="B8C0D0"/>
-                </a:solidFill>
-                <a:latin typeface="Calibri" pitchFamily="34" charset="0"/>
-                <a:ea typeface="Calibri" pitchFamily="34" charset="-122"/>
-                <a:cs typeface="Calibri" pitchFamily="34" charset="-120"/>
-              </a:rPr>
-              <a:t>  for every chapter  ·  </a:t>
-            </a:r>
-            <a:pPr algn="ctr" indent="0" marL="0">
-              <a:buNone/>
-            </a:pPr>
-            <a:r>
-              <a:rPr lang="en-US" sz="2040" b="1" dirty="0">
-                <a:solidFill>
-                  <a:srgbClr val="5FE0C5"/>
-                </a:solidFill>
-                <a:latin typeface="Calibri" pitchFamily="34" charset="0"/>
-                <a:ea typeface="Calibri" pitchFamily="34" charset="-122"/>
-                <a:cs typeface="Calibri" pitchFamily="34" charset="-120"/>
-              </a:rPr>
-              <a:t>Star the repo</a:t>
-            </a:r>
-            <a:pPr algn="ctr" indent="0" marL="0">
-              <a:buNone/>
-            </a:pPr>
-            <a:r>
-              <a:rPr lang="en-US" sz="2040" dirty="0">
-                <a:solidFill>
-                  <a:srgbClr val="B8C0D0"/>
-                </a:solidFill>
-                <a:latin typeface="Calibri" pitchFamily="34" charset="0"/>
-                <a:ea typeface="Calibri" pitchFamily="34" charset="-122"/>
-                <a:cs typeface="Calibri" pitchFamily="34" charset="-120"/>
-              </a:rPr>
-              <a:t>  on GitHub</a:t>
-            </a:r>
-            <a:endParaRPr lang="en-US" sz="2040" dirty="0"/>
-          </a:p>
-        </p:txBody>
-      </p:sp>
-      <p:sp>
-        <p:nvSpPr>
-          <p:cNvPr id="26" name="Text 24"/>
-          <p:cNvSpPr/>
-          <p:nvPr/>
-        </p:nvSpPr>
-        <p:spPr>
-          <a:xfrm>
-            <a:off x="0" y="3657600"/>
-            <a:ext cx="12161520" cy="365760"/>
-          </a:xfrm>
-          <a:prstGeom prst="rect">
-            <a:avLst/>
-          </a:prstGeom>
-          <a:noFill/>
-          <a:ln/>
-        </p:spPr>
-        <p:txBody>
-          <a:bodyPr wrap="square" lIns="0" tIns="0" rIns="0" bIns="0" rtlCol="0" anchor="ctr"/>
-          <a:lstStyle/>
-          <a:p>
-            <a:pPr algn="ctr" indent="0" marL="0">
-              <a:buNone/>
-            </a:pPr>
-            <a:r>
-              <a:rPr lang="en-US" sz="1800" dirty="0">
-                <a:solidFill>
-                  <a:srgbClr val="8B98AC"/>
-                </a:solidFill>
-                <a:latin typeface="Courier New" pitchFamily="34" charset="0"/>
-                <a:ea typeface="Courier New" pitchFamily="34" charset="-122"/>
-                <a:cs typeface="Courier New" pitchFamily="34" charset="-120"/>
-              </a:rPr>
-              <a:t>github.com/balajich/spring-ai-with-llama</a:t>
-            </a:r>
-            <a:endParaRPr lang="en-US" sz="1800" dirty="0"/>
-          </a:p>
-        </p:txBody>
-      </p:sp>
-      <p:sp>
-        <p:nvSpPr>
-          <p:cNvPr id="27" name="Text 25"/>
-          <p:cNvSpPr/>
-          <p:nvPr/>
-        </p:nvSpPr>
-        <p:spPr>
-          <a:xfrm>
-            <a:off x="0" y="4114800"/>
-            <a:ext cx="12161520" cy="365760"/>
-          </a:xfrm>
-          <a:prstGeom prst="rect">
-            <a:avLst/>
-          </a:prstGeom>
-          <a:noFill/>
-          <a:ln/>
-        </p:spPr>
-        <p:txBody>
-          <a:bodyPr wrap="square" lIns="0" tIns="0" rIns="0" bIns="0" rtlCol="0" anchor="ctr"/>
-          <a:lstStyle/>
-          <a:p>
-            <a:pPr algn="ctr" indent="0" marL="0">
-              <a:buNone/>
-            </a:pPr>
-            <a:r>
-              <a:rPr lang="en-US" sz="1560" dirty="0">
-                <a:solidFill>
-                  <a:srgbClr val="5B6478"/>
-                </a:solidFill>
-                <a:latin typeface="Courier New" pitchFamily="34" charset="0"/>
-                <a:ea typeface="Courier New" pitchFamily="34" charset="-122"/>
-                <a:cs typeface="Courier New" pitchFamily="34" charset="-120"/>
-              </a:rPr>
-              <a:t>prompttoapps.com</a:t>
-            </a:r>
-            <a:endParaRPr lang="en-US" sz="1560" dirty="0"/>
+        <p:txBody>
+          <a:bodyPr/>
+          <a:lstStyle/>
+          <a:p>
+            <a:endParaRPr lang="en-CA"/>
           </a:p>
         </p:txBody>
       </p:sp>
@@ -13034,4 +15477,319 @@
     </a:ext>
   </a:extLst>
 </a:theme>
+</file>
+
+<file path=ppt/theme/theme2.xml><?xml version="1.0" encoding="utf-8"?>
+<a:theme xmlns:a="http://schemas.openxmlformats.org/drawingml/2006/main" name="Office Theme">
+  <a:themeElements>
+    <a:clrScheme name="Office">
+      <a:dk1>
+        <a:sysClr val="windowText" lastClr="000000"/>
+      </a:dk1>
+      <a:lt1>
+        <a:sysClr val="window" lastClr="FFFFFF"/>
+      </a:lt1>
+      <a:dk2>
+        <a:srgbClr val="0E2841"/>
+      </a:dk2>
+      <a:lt2>
+        <a:srgbClr val="E8E8E8"/>
+      </a:lt2>
+      <a:accent1>
+        <a:srgbClr val="156082"/>
+      </a:accent1>
+      <a:accent2>
+        <a:srgbClr val="E97132"/>
+      </a:accent2>
+      <a:accent3>
+        <a:srgbClr val="196B24"/>
+      </a:accent3>
+      <a:accent4>
+        <a:srgbClr val="0F9ED5"/>
+      </a:accent4>
+      <a:accent5>
+        <a:srgbClr val="A02B93"/>
+      </a:accent5>
+      <a:accent6>
+        <a:srgbClr val="4EA72E"/>
+      </a:accent6>
+      <a:hlink>
+        <a:srgbClr val="467886"/>
+      </a:hlink>
+      <a:folHlink>
+        <a:srgbClr val="96607D"/>
+      </a:folHlink>
+    </a:clrScheme>
+    <a:fontScheme name="Office">
+      <a:majorFont>
+        <a:latin typeface="Aptos Display" panose="02110004020202020204"/>
+        <a:ea typeface=""/>
+        <a:cs typeface=""/>
+        <a:font script="Jpan" typeface="游ゴシック Light"/>
+        <a:font script="Hang" typeface="맑은 고딕"/>
+        <a:font script="Hans" typeface="等线 Light"/>
+        <a:font script="Hant" typeface="新細明體"/>
+        <a:font script="Arab" typeface="Times New Roman"/>
+        <a:font script="Hebr" typeface="Times New Roman"/>
+        <a:font script="Thai" typeface="Angsana New"/>
+        <a:font script="Ethi" typeface="Nyala"/>
+        <a:font script="Beng" typeface="Vrinda"/>
+        <a:font script="Gujr" typeface="Shruti"/>
+        <a:font script="Khmr" typeface="MoolBoran"/>
+        <a:font script="Knda" typeface="Tunga"/>
+        <a:font script="Guru" typeface="Raavi"/>
+        <a:font script="Cans" typeface="Euphemia"/>
+        <a:font script="Cher" typeface="Plantagenet Cherokee"/>
+        <a:font script="Yiii" typeface="Microsoft Yi Baiti"/>
+        <a:font script="Tibt" typeface="Microsoft Himalaya"/>
+        <a:font script="Thaa" typeface="MV Boli"/>
+        <a:font script="Deva" typeface="Mangal"/>
+        <a:font script="Telu" typeface="Gautami"/>
+        <a:font script="Taml" typeface="Latha"/>
+        <a:font script="Syrc" typeface="Estrangelo Edessa"/>
+        <a:font script="Orya" typeface="Kalinga"/>
+        <a:font script="Mlym" typeface="Kartika"/>
+        <a:font script="Laoo" typeface="DokChampa"/>
+        <a:font script="Sinh" typeface="Iskoola Pota"/>
+        <a:font script="Mong" typeface="Mongolian Baiti"/>
+        <a:font script="Viet" typeface="Times New Roman"/>
+        <a:font script="Uigh" typeface="Microsoft Uighur"/>
+        <a:font script="Geor" typeface="Sylfaen"/>
+        <a:font script="Armn" typeface="Arial"/>
+        <a:font script="Bugi" typeface="Leelawadee UI"/>
+        <a:font script="Bopo" typeface="Microsoft JhengHei"/>
+        <a:font script="Java" typeface="Javanese Text"/>
+        <a:font script="Lisu" typeface="Segoe UI"/>
+        <a:font script="Mymr" typeface="Myanmar Text"/>
+        <a:font script="Nkoo" typeface="Ebrima"/>
+        <a:font script="Olck" typeface="Nirmala UI"/>
+        <a:font script="Osma" typeface="Ebrima"/>
+        <a:font script="Phag" typeface="Phagspa"/>
+        <a:font script="Syrn" typeface="Estrangelo Edessa"/>
+        <a:font script="Syrj" typeface="Estrangelo Edessa"/>
+        <a:font script="Syre" typeface="Estrangelo Edessa"/>
+        <a:font script="Sora" typeface="Nirmala UI"/>
+        <a:font script="Tale" typeface="Microsoft Tai Le"/>
+        <a:font script="Talu" typeface="Microsoft New Tai Lue"/>
+        <a:font script="Tfng" typeface="Ebrima"/>
+      </a:majorFont>
+      <a:minorFont>
+        <a:latin typeface="Aptos" panose="02110004020202020204"/>
+        <a:ea typeface=""/>
+        <a:cs typeface=""/>
+        <a:font script="Jpan" typeface="游ゴシック"/>
+        <a:font script="Hang" typeface="맑은 고딕"/>
+        <a:font script="Hans" typeface="等线"/>
+        <a:font script="Hant" typeface="新細明體"/>
+        <a:font script="Arab" typeface="Arial"/>
+        <a:font script="Hebr" typeface="Arial"/>
+        <a:font script="Thai" typeface="Cordia New"/>
+        <a:font script="Ethi" typeface="Nyala"/>
+        <a:font script="Beng" typeface="Vrinda"/>
+        <a:font script="Gujr" typeface="Shruti"/>
+        <a:font script="Khmr" typeface="DaunPenh"/>
+        <a:font script="Knda" typeface="Tunga"/>
+        <a:font script="Guru" typeface="Raavi"/>
+        <a:font script="Cans" typeface="Euphemia"/>
+        <a:font script="Cher" typeface="Plantagenet Cherokee"/>
+        <a:font script="Yiii" typeface="Microsoft Yi Baiti"/>
+        <a:font script="Tibt" typeface="Microsoft Himalaya"/>
+        <a:font script="Thaa" typeface="MV Boli"/>
+        <a:font script="Deva" typeface="Mangal"/>
+        <a:font script="Telu" typeface="Gautami"/>
+        <a:font script="Taml" typeface="Latha"/>
+        <a:font script="Syrc" typeface="Estrangelo Edessa"/>
+        <a:font script="Orya" typeface="Kalinga"/>
+        <a:font script="Mlym" typeface="Kartika"/>
+        <a:font script="Laoo" typeface="DokChampa"/>
+        <a:font script="Sinh" typeface="Iskoola Pota"/>
+        <a:font script="Mong" typeface="Mongolian Baiti"/>
+        <a:font script="Viet" typeface="Arial"/>
+        <a:font script="Uigh" typeface="Microsoft Uighur"/>
+        <a:font script="Geor" typeface="Sylfaen"/>
+        <a:font script="Armn" typeface="Arial"/>
+        <a:font script="Bugi" typeface="Leelawadee UI"/>
+        <a:font script="Bopo" typeface="Microsoft JhengHei"/>
+        <a:font script="Java" typeface="Javanese Text"/>
+        <a:font script="Lisu" typeface="Segoe UI"/>
+        <a:font script="Mymr" typeface="Myanmar Text"/>
+        <a:font script="Nkoo" typeface="Ebrima"/>
+        <a:font script="Olck" typeface="Nirmala UI"/>
+        <a:font script="Osma" typeface="Ebrima"/>
+        <a:font script="Phag" typeface="Phagspa"/>
+        <a:font script="Syrn" typeface="Estrangelo Edessa"/>
+        <a:font script="Syrj" typeface="Estrangelo Edessa"/>
+        <a:font script="Syre" typeface="Estrangelo Edessa"/>
+        <a:font script="Sora" typeface="Nirmala UI"/>
+        <a:font script="Tale" typeface="Microsoft Tai Le"/>
+        <a:font script="Talu" typeface="Microsoft New Tai Lue"/>
+        <a:font script="Tfng" typeface="Ebrima"/>
+      </a:minorFont>
+    </a:fontScheme>
+    <a:fmtScheme name="Office">
+      <a:fillStyleLst>
+        <a:solidFill>
+          <a:schemeClr val="phClr"/>
+        </a:solidFill>
+        <a:gradFill rotWithShape="1">
+          <a:gsLst>
+            <a:gs pos="0">
+              <a:schemeClr val="phClr">
+                <a:lumMod val="110000"/>
+                <a:satMod val="105000"/>
+                <a:tint val="67000"/>
+              </a:schemeClr>
+            </a:gs>
+            <a:gs pos="50000">
+              <a:schemeClr val="phClr">
+                <a:lumMod val="105000"/>
+                <a:satMod val="103000"/>
+                <a:tint val="73000"/>
+              </a:schemeClr>
+            </a:gs>
+            <a:gs pos="100000">
+              <a:schemeClr val="phClr">
+                <a:lumMod val="105000"/>
+                <a:satMod val="109000"/>
+                <a:tint val="81000"/>
+              </a:schemeClr>
+            </a:gs>
+          </a:gsLst>
+          <a:lin ang="5400000" scaled="0"/>
+        </a:gradFill>
+        <a:gradFill rotWithShape="1">
+          <a:gsLst>
+            <a:gs pos="0">
+              <a:schemeClr val="phClr">
+                <a:satMod val="103000"/>
+                <a:lumMod val="102000"/>
+                <a:tint val="94000"/>
+              </a:schemeClr>
+            </a:gs>
+            <a:gs pos="50000">
+              <a:schemeClr val="phClr">
+                <a:satMod val="110000"/>
+                <a:lumMod val="100000"/>
+                <a:shade val="100000"/>
+              </a:schemeClr>
+            </a:gs>
+            <a:gs pos="100000">
+              <a:schemeClr val="phClr">
+                <a:lumMod val="99000"/>
+                <a:satMod val="120000"/>
+                <a:shade val="78000"/>
+              </a:schemeClr>
+            </a:gs>
+          </a:gsLst>
+          <a:lin ang="5400000" scaled="0"/>
+        </a:gradFill>
+      </a:fillStyleLst>
+      <a:lnStyleLst>
+        <a:ln w="12700" cap="flat" cmpd="sng" algn="ctr">
+          <a:solidFill>
+            <a:schemeClr val="phClr"/>
+          </a:solidFill>
+          <a:prstDash val="solid"/>
+          <a:miter lim="800000"/>
+        </a:ln>
+        <a:ln w="19050" cap="flat" cmpd="sng" algn="ctr">
+          <a:solidFill>
+            <a:schemeClr val="phClr"/>
+          </a:solidFill>
+          <a:prstDash val="solid"/>
+          <a:miter lim="800000"/>
+        </a:ln>
+        <a:ln w="25400" cap="flat" cmpd="sng" algn="ctr">
+          <a:solidFill>
+            <a:schemeClr val="phClr"/>
+          </a:solidFill>
+          <a:prstDash val="solid"/>
+          <a:miter lim="800000"/>
+        </a:ln>
+      </a:lnStyleLst>
+      <a:effectStyleLst>
+        <a:effectStyle>
+          <a:effectLst/>
+        </a:effectStyle>
+        <a:effectStyle>
+          <a:effectLst/>
+        </a:effectStyle>
+        <a:effectStyle>
+          <a:effectLst>
+            <a:outerShdw blurRad="57150" dist="19050" dir="5400000" algn="ctr" rotWithShape="0">
+              <a:srgbClr val="000000">
+                <a:alpha val="63000"/>
+              </a:srgbClr>
+            </a:outerShdw>
+          </a:effectLst>
+        </a:effectStyle>
+      </a:effectStyleLst>
+      <a:bgFillStyleLst>
+        <a:solidFill>
+          <a:schemeClr val="phClr"/>
+        </a:solidFill>
+        <a:solidFill>
+          <a:schemeClr val="phClr">
+            <a:tint val="95000"/>
+            <a:satMod val="170000"/>
+          </a:schemeClr>
+        </a:solidFill>
+        <a:gradFill rotWithShape="1">
+          <a:gsLst>
+            <a:gs pos="0">
+              <a:schemeClr val="phClr">
+                <a:tint val="93000"/>
+                <a:satMod val="150000"/>
+                <a:shade val="98000"/>
+                <a:lumMod val="102000"/>
+              </a:schemeClr>
+            </a:gs>
+            <a:gs pos="50000">
+              <a:schemeClr val="phClr">
+                <a:tint val="98000"/>
+                <a:satMod val="130000"/>
+                <a:shade val="90000"/>
+                <a:lumMod val="103000"/>
+              </a:schemeClr>
+            </a:gs>
+            <a:gs pos="100000">
+              <a:schemeClr val="phClr">
+                <a:shade val="63000"/>
+                <a:satMod val="120000"/>
+              </a:schemeClr>
+            </a:gs>
+          </a:gsLst>
+          <a:lin ang="5400000" scaled="0"/>
+        </a:gradFill>
+      </a:bgFillStyleLst>
+    </a:fmtScheme>
+  </a:themeElements>
+  <a:objectDefaults>
+    <a:lnDef>
+      <a:spPr/>
+      <a:bodyPr/>
+      <a:lstStyle/>
+      <a:style>
+        <a:lnRef idx="2">
+          <a:schemeClr val="accent1"/>
+        </a:lnRef>
+        <a:fillRef idx="0">
+          <a:schemeClr val="accent1"/>
+        </a:fillRef>
+        <a:effectRef idx="1">
+          <a:schemeClr val="accent1"/>
+        </a:effectRef>
+        <a:fontRef idx="minor">
+          <a:schemeClr val="tx1"/>
+        </a:fontRef>
+      </a:style>
+    </a:lnDef>
+  </a:objectDefaults>
+  <a:extraClrSchemeLst/>
+  <a:extLst>
+    <a:ext uri="{05A4C25C-085E-4340-85A3-A5531E510DB2}">
+      <thm15:themeFamily xmlns:thm15="http://schemas.microsoft.com/office/thememl/2012/main" name="Office Theme" id="{2E142A2C-CD16-42D6-873A-C26D2A0506FA}" vid="{1BDDFF52-6CD6-40A5-AB3C-68EB2F1E4D0A}"/>
+    </a:ext>
+  </a:extLst>
+</a:theme>
 </file>